--- a/presentation/Consulting_Finance_ML_Slides.pptx
+++ b/presentation/Consulting_Finance_ML_Slides.pptx
@@ -6861,6 +6861,30 @@
           </a:p>
         </p:txBody>
       </p:sp>
+      <p:pic>
+        <p:nvPicPr>
+          <p:cNvPr id="22" name="Picture 21" descr="deck_leak.png"/>
+          <p:cNvPicPr>
+            <a:picLocks noChangeAspect="1"/>
+          </p:cNvPicPr>
+          <p:nvPr/>
+        </p:nvPicPr>
+        <p:blipFill>
+          <a:blip r:embed="rId3"/>
+          <a:stretch>
+            <a:fillRect/>
+          </a:stretch>
+        </p:blipFill>
+        <p:spPr>
+          <a:xfrm>
+            <a:off x="1188720" y="3200400"/>
+            <a:ext cx="7589520" cy="4843590"/>
+          </a:xfrm>
+          <a:prstGeom prst="rect">
+            <a:avLst/>
+          </a:prstGeom>
+        </p:spPr>
+      </p:pic>
     </p:spTree>
   </p:cSld>
   <p:clrMapOvr>
@@ -8285,6 +8309,54 @@
           </a:p>
         </p:txBody>
       </p:sp>
+      <p:pic>
+        <p:nvPicPr>
+          <p:cNvPr id="11" name="Picture 10" descr="deck_risk.png"/>
+          <p:cNvPicPr>
+            <a:picLocks noChangeAspect="1"/>
+          </p:cNvPicPr>
+          <p:nvPr/>
+        </p:nvPicPr>
+        <p:blipFill>
+          <a:blip r:embed="rId3"/>
+          <a:stretch>
+            <a:fillRect/>
+          </a:stretch>
+        </p:blipFill>
+        <p:spPr>
+          <a:xfrm>
+            <a:off x="950976" y="3703320"/>
+            <a:ext cx="8165592" cy="4727448"/>
+          </a:xfrm>
+          <a:prstGeom prst="rect">
+            <a:avLst/>
+          </a:prstGeom>
+        </p:spPr>
+      </p:pic>
+      <p:pic>
+        <p:nvPicPr>
+          <p:cNvPr id="12" name="Picture 11" descr="deck_opinion.png"/>
+          <p:cNvPicPr>
+            <a:picLocks noChangeAspect="1"/>
+          </p:cNvPicPr>
+          <p:nvPr/>
+        </p:nvPicPr>
+        <p:blipFill>
+          <a:blip r:embed="rId4"/>
+          <a:stretch>
+            <a:fillRect/>
+          </a:stretch>
+        </p:blipFill>
+        <p:spPr>
+          <a:xfrm>
+            <a:off x="9409176" y="3703320"/>
+            <a:ext cx="8165592" cy="4727448"/>
+          </a:xfrm>
+          <a:prstGeom prst="rect">
+            <a:avLst/>
+          </a:prstGeom>
+        </p:spPr>
+      </p:pic>
     </p:spTree>
   </p:cSld>
   <p:clrMapOvr>
@@ -10423,6 +10495,30 @@
           </a:p>
         </p:txBody>
       </p:sp>
+      <p:pic>
+        <p:nvPicPr>
+          <p:cNvPr id="41" name="Picture 40" descr="deck_importance.png"/>
+          <p:cNvPicPr>
+            <a:picLocks noChangeAspect="1"/>
+          </p:cNvPicPr>
+          <p:nvPr/>
+        </p:nvPicPr>
+        <p:blipFill>
+          <a:blip r:embed="rId3"/>
+          <a:stretch>
+            <a:fillRect/>
+          </a:stretch>
+        </p:blipFill>
+        <p:spPr>
+          <a:xfrm>
+            <a:off x="10515600" y="6967728"/>
+            <a:ext cx="6583680" cy="2139696"/>
+          </a:xfrm>
+          <a:prstGeom prst="rect">
+            <a:avLst/>
+          </a:prstGeom>
+        </p:spPr>
+      </p:pic>
     </p:spTree>
   </p:cSld>
   <p:clrMapOvr>

--- a/presentation/Consulting_Finance_ML_Slides.pptx
+++ b/presentation/Consulting_Finance_ML_Slides.pptx
@@ -12729,6 +12729,30 @@
           </a:p>
         </p:txBody>
       </p:sp>
+      <p:pic>
+        <p:nvPicPr>
+          <p:cNvPr id="62" name="Picture 61" descr="deck_progression.png"/>
+          <p:cNvPicPr>
+            <a:picLocks noChangeAspect="1"/>
+          </p:cNvPicPr>
+          <p:nvPr/>
+        </p:nvPicPr>
+        <p:blipFill>
+          <a:blip r:embed="rId3"/>
+          <a:stretch>
+            <a:fillRect/>
+          </a:stretch>
+        </p:blipFill>
+        <p:spPr>
+          <a:xfrm>
+            <a:off x="1188720" y="2103120"/>
+            <a:ext cx="15361920" cy="1632204"/>
+          </a:xfrm>
+          <a:prstGeom prst="rect">
+            <a:avLst/>
+          </a:prstGeom>
+        </p:spPr>
+      </p:pic>
     </p:spTree>
   </p:cSld>
   <p:clrMapOvr>

--- a/presentation/Consulting_Finance_ML_Slides.pptx
+++ b/presentation/Consulting_Finance_ML_Slides.pptx
@@ -16,6 +16,7 @@
     <p:sldId id="264" r:id="rId10"/>
     <p:sldId id="265" r:id="rId11"/>
     <p:sldId id="266" r:id="rId12"/>
+    <p:sldId id="268" r:id="rId19"/>
     <p:sldId id="267" r:id="rId13"/>
   </p:sldIdLst>
   <p:notesMasterIdLst>
@@ -3745,6 +3746,720 @@
 </file>
 
 <file path=ppt/slides/slide12.xml><?xml version="1.0" encoding="utf-8"?>
+<p:sld xmlns:a="http://schemas.openxmlformats.org/drawingml/2006/main" xmlns:p="http://schemas.openxmlformats.org/presentationml/2006/main" xmlns:r="http://schemas.openxmlformats.org/officeDocument/2006/relationships">
+  <p:cSld>
+    <p:spTree>
+      <p:nvGrpSpPr>
+        <p:cNvPr id="1" name=""/>
+        <p:cNvGrpSpPr/>
+        <p:nvPr/>
+      </p:nvGrpSpPr>
+      <p:grpSpPr/>
+      <p:sp>
+        <p:nvSpPr>
+          <p:cNvPr id="2" name="Shape 0"/>
+          <p:cNvSpPr/>
+          <p:nvPr/>
+        </p:nvSpPr>
+        <p:spPr>
+          <a:xfrm>
+            <a:off x="952500" y="1912218"/>
+            <a:ext cx="16383000" cy="19050"/>
+          </a:xfrm>
+          <a:prstGeom prst="rect">
+            <a:avLst/>
+          </a:prstGeom>
+          <a:solidFill>
+            <a:srgbClr val="1A7A57"/>
+          </a:solidFill>
+          <a:ln/>
+        </p:spPr>
+        <p:txBody>
+          <a:bodyPr/>
+          <a:p>
+            <a:pPr algn="l"/>
+          </a:p>
+        </p:txBody>
+      </p:sp>
+      <p:sp>
+        <p:nvSpPr>
+          <p:cNvPr id="3" name="Text 1"/>
+          <p:cNvSpPr/>
+          <p:nvPr/>
+        </p:nvSpPr>
+        <p:spPr>
+          <a:xfrm>
+            <a:off x="952500" y="742950"/>
+            <a:ext cx="18021300" cy="295275"/>
+          </a:xfrm>
+          <a:prstGeom prst="rect">
+            <a:avLst/>
+          </a:prstGeom>
+          <a:noFill/>
+          <a:ln/>
+        </p:spPr>
+        <p:txBody>
+          <a:bodyPr wrap="square" lIns="25400" tIns="25400" rIns="25400" bIns="25400" rtlCol="0" anchor="t">
+            <a:normAutofit/>
+          </a:bodyPr>
+          <a:lstStyle/>
+          <a:p>
+            <a:pPr algn="l" indent="0" marL="0">
+              <a:buNone/>
+            </a:pPr>
+            <a:r>
+              <a:rPr lang="en-US" sz="1800" spc="225" kern="0" dirty="0">
+                <a:solidFill>
+                  <a:srgbClr val="007A33"/>
+                </a:solidFill>
+                <a:latin typeface="Courier New" pitchFamily="34" charset="0"/>
+                <a:ea typeface="Courier New" pitchFamily="34" charset="-122"/>
+                <a:cs typeface="Courier New" pitchFamily="34" charset="-120"/>
+              </a:rPr>
+              <a:t>12 · KEY CODE</a:t>
+            </a:r>
+            <a:endParaRPr lang="en-US" sz="1800" dirty="0"/>
+          </a:p>
+        </p:txBody>
+      </p:sp>
+      <p:sp>
+        <p:nvSpPr>
+          <p:cNvPr id="4" name="Text 2"/>
+          <p:cNvSpPr/>
+          <p:nvPr/>
+        </p:nvSpPr>
+        <p:spPr>
+          <a:xfrm>
+            <a:off x="952500" y="1152525"/>
+            <a:ext cx="18021300" cy="550143"/>
+          </a:xfrm>
+          <a:prstGeom prst="rect">
+            <a:avLst/>
+          </a:prstGeom>
+          <a:noFill/>
+          <a:ln/>
+        </p:spPr>
+        <p:txBody>
+          <a:bodyPr wrap="square" lIns="25400" tIns="25400" rIns="25400" bIns="25400" rtlCol="0" anchor="t">
+            <a:normAutofit/>
+          </a:bodyPr>
+          <a:lstStyle/>
+          <a:p>
+            <a:pPr algn="l" indent="0" marL="0">
+              <a:lnSpc>
+                <a:spcPct val="112000"/>
+              </a:lnSpc>
+              <a:buNone/>
+            </a:pPr>
+            <a:r>
+              <a:rPr lang="en-US" sz="3600" b="1" spc="-37" kern="0" dirty="0">
+                <a:solidFill>
+                  <a:srgbClr val="063D22"/>
+                </a:solidFill>
+                <a:latin typeface="Arial" pitchFamily="34" charset="0"/>
+                <a:ea typeface="Arial" pitchFamily="34" charset="-122"/>
+                <a:cs typeface="Arial" pitchFamily="34" charset="-120"/>
+              </a:rPr>
+              <a:t>The code behind the method</a:t>
+            </a:r>
+            <a:endParaRPr lang="en-US" sz="3600" dirty="0"/>
+          </a:p>
+        </p:txBody>
+      </p:sp>
+      <p:sp>
+        <p:nvSpPr>
+          <p:cNvPr id="20" name="Shape 18"/>
+          <p:cNvSpPr/>
+          <p:nvPr/>
+        </p:nvSpPr>
+        <p:spPr>
+          <a:xfrm>
+            <a:off x="952500" y="9239250"/>
+            <a:ext cx="16383000" cy="9525"/>
+          </a:xfrm>
+          <a:prstGeom prst="rect">
+            <a:avLst/>
+          </a:prstGeom>
+          <a:solidFill>
+            <a:srgbClr val="D2E6DD"/>
+          </a:solidFill>
+          <a:ln/>
+        </p:spPr>
+        <p:txBody>
+          <a:bodyPr/>
+          <a:p>
+            <a:pPr algn="l"/>
+          </a:p>
+        </p:txBody>
+      </p:sp>
+      <p:sp>
+        <p:nvSpPr>
+          <p:cNvPr id="21" name="Text 19"/>
+          <p:cNvSpPr/>
+          <p:nvPr/>
+        </p:nvSpPr>
+        <p:spPr>
+          <a:xfrm>
+            <a:off x="952500" y="9458325"/>
+            <a:ext cx="16874490" cy="295275"/>
+          </a:xfrm>
+          <a:prstGeom prst="rect">
+            <a:avLst/>
+          </a:prstGeom>
+          <a:noFill/>
+          <a:ln/>
+        </p:spPr>
+        <p:txBody>
+          <a:bodyPr wrap="square" lIns="25400" tIns="25400" rIns="25400" bIns="25400" rtlCol="0" anchor="t">
+            <a:normAutofit/>
+          </a:bodyPr>
+          <a:lstStyle/>
+          <a:p>
+            <a:pPr algn="l" indent="0" marL="0">
+              <a:buNone/>
+            </a:pPr>
+            <a:r>
+              <a:rPr lang="en-US" sz="1800" dirty="0">
+                <a:solidFill>
+                  <a:srgbClr val="5C7268"/>
+                </a:solidFill>
+                <a:latin typeface="Courier New" pitchFamily="34" charset="0"/>
+                <a:ea typeface="Courier New" pitchFamily="34" charset="-122"/>
+                <a:cs typeface="Courier New" pitchFamily="34" charset="-120"/>
+              </a:rPr>
+              <a:t>Source: src/prep.py · src/model_v10.py · full notebook in repo</a:t>
+            </a:r>
+            <a:endParaRPr lang="en-US" sz="1800" dirty="0"/>
+          </a:p>
+        </p:txBody>
+      </p:sp>
+      <p:sp>
+        <p:nvSpPr>
+          <p:cNvPr id="22" name="TextBox 21"/>
+          <p:cNvSpPr txBox="1"/>
+          <p:nvPr/>
+        </p:nvSpPr>
+        <p:spPr>
+          <a:xfrm>
+            <a:off x="950976" y="2395728"/>
+            <a:ext cx="10058400" cy="365760"/>
+          </a:xfrm>
+          <a:prstGeom prst="rect">
+            <a:avLst/>
+          </a:prstGeom>
+          <a:noFill/>
+        </p:spPr>
+        <p:txBody>
+          <a:bodyPr wrap="none">
+            <a:spAutoFit/>
+          </a:bodyPr>
+          <a:lstStyle/>
+          <a:p>
+            <a:r>
+              <a:rPr sz="2100" b="1">
+                <a:solidFill>
+                  <a:srgbClr val="063D22"/>
+                </a:solidFill>
+                <a:latin typeface="Arial"/>
+              </a:rPr>
+              <a:t>Catching the planted leak</a:t>
+            </a:r>
+          </a:p>
+        </p:txBody>
+      </p:sp>
+      <p:sp>
+        <p:nvSpPr>
+          <p:cNvPr id="23" name="Rounded Rectangle 22"/>
+          <p:cNvSpPr/>
+          <p:nvPr/>
+        </p:nvSpPr>
+        <p:spPr>
+          <a:xfrm>
+            <a:off x="950976" y="2807208"/>
+            <a:ext cx="9692640" cy="1344168"/>
+          </a:xfrm>
+          <a:prstGeom prst="roundRect">
+            <a:avLst/>
+          </a:prstGeom>
+          <a:solidFill>
+            <a:srgbClr val="EAF3EF"/>
+          </a:solidFill>
+          <a:ln>
+            <a:noFill/>
+          </a:ln>
+          <a:effectLst/>
+        </p:spPr>
+        <p:style>
+          <a:lnRef idx="1">
+            <a:schemeClr val="accent1"/>
+          </a:lnRef>
+          <a:fillRef idx="3">
+            <a:schemeClr val="accent1"/>
+          </a:fillRef>
+          <a:effectRef idx="2">
+            <a:schemeClr val="accent1"/>
+          </a:effectRef>
+          <a:fontRef idx="minor">
+            <a:schemeClr val="lt1"/>
+          </a:fontRef>
+        </p:style>
+        <p:txBody>
+          <a:bodyPr rtlCol="0" anchor="ctr" wrap="square" lIns="228600" rIns="137160" tIns="137160" bIns="109728"/>
+          <a:lstStyle/>
+          <a:p>
+            <a:pPr algn="l">
+              <a:spcAft>
+                <a:spcPts val="400"/>
+              </a:spcAft>
+            </a:pPr>
+            <a:r>
+              <a:rPr sz="1500">
+                <a:solidFill>
+                  <a:srgbClr val="14533B"/>
+                </a:solidFill>
+                <a:latin typeface="Courier New"/>
+              </a:rPr>
+              <a:t>tr_op = train.analyst_opinion.map(approval_rate)</a:t>
+            </a:r>
+          </a:p>
+          <a:p>
+            <a:pPr algn="l">
+              <a:spcAft>
+                <a:spcPts val="400"/>
+              </a:spcAft>
+            </a:pPr>
+            <a:r>
+              <a:rPr sz="1500">
+                <a:solidFill>
+                  <a:srgbClr val="14533B"/>
+                </a:solidFill>
+                <a:latin typeface="Courier New"/>
+              </a:rPr>
+              <a:t>train.internal_code.corr(tr_op)</a:t>
+            </a:r>
+            <a:r>
+              <a:rPr sz="1500">
+                <a:solidFill>
+                  <a:srgbClr val="8A9A93"/>
+                </a:solidFill>
+                <a:latin typeface="Courier New"/>
+              </a:rPr>
+              <a:t>   # +0.46  real signal</a:t>
+            </a:r>
+          </a:p>
+          <a:p>
+            <a:pPr algn="l">
+              <a:spcAft>
+                <a:spcPts val="400"/>
+              </a:spcAft>
+            </a:pPr>
+            <a:r>
+              <a:rPr sz="1500">
+                <a:solidFill>
+                  <a:srgbClr val="14533B"/>
+                </a:solidFill>
+                <a:latin typeface="Courier New"/>
+              </a:rPr>
+              <a:t>test.internal_code.corr(te_op)</a:t>
+            </a:r>
+            <a:r>
+              <a:rPr sz="1500">
+                <a:solidFill>
+                  <a:srgbClr val="8A9A93"/>
+                </a:solidFill>
+                <a:latin typeface="Courier New"/>
+              </a:rPr>
+              <a:t>    # -0.02  noise -&gt; DROP</a:t>
+            </a:r>
+          </a:p>
+        </p:txBody>
+      </p:sp>
+      <p:sp>
+        <p:nvSpPr>
+          <p:cNvPr id="24" name="TextBox 23"/>
+          <p:cNvSpPr txBox="1"/>
+          <p:nvPr/>
+        </p:nvSpPr>
+        <p:spPr>
+          <a:xfrm>
+            <a:off x="11338560" y="2852928"/>
+            <a:ext cx="6400800" cy="1371600"/>
+          </a:xfrm>
+          <a:prstGeom prst="rect">
+            <a:avLst/>
+          </a:prstGeom>
+          <a:noFill/>
+        </p:spPr>
+        <p:txBody>
+          <a:bodyPr wrap="square">
+            <a:spAutoFit/>
+          </a:bodyPr>
+          <a:lstStyle/>
+          <a:p>
+            <a:r>
+              <a:rPr sz="1700">
+                <a:solidFill>
+                  <a:srgbClr val="5C7268"/>
+                </a:solidFill>
+                <a:latin typeface="Arial"/>
+              </a:rPr>
+              <a:t>The column that predicts in training is random noise in test — proof it was scrambled on purpose.</a:t>
+            </a:r>
+          </a:p>
+        </p:txBody>
+      </p:sp>
+      <p:sp>
+        <p:nvSpPr>
+          <p:cNvPr id="25" name="TextBox 24"/>
+          <p:cNvSpPr txBox="1"/>
+          <p:nvPr/>
+        </p:nvSpPr>
+        <p:spPr>
+          <a:xfrm>
+            <a:off x="950976" y="4681728"/>
+            <a:ext cx="10058400" cy="365760"/>
+          </a:xfrm>
+          <a:prstGeom prst="rect">
+            <a:avLst/>
+          </a:prstGeom>
+          <a:noFill/>
+        </p:spPr>
+        <p:txBody>
+          <a:bodyPr wrap="none">
+            <a:spAutoFit/>
+          </a:bodyPr>
+          <a:lstStyle/>
+          <a:p>
+            <a:r>
+              <a:rPr sz="2100" b="1">
+                <a:solidFill>
+                  <a:srgbClr val="063D22"/>
+                </a:solidFill>
+                <a:latin typeface="Arial"/>
+              </a:rPr>
+              <a:t>Fixing the legacy mess</a:t>
+            </a:r>
+          </a:p>
+        </p:txBody>
+      </p:sp>
+      <p:sp>
+        <p:nvSpPr>
+          <p:cNvPr id="26" name="Rounded Rectangle 25"/>
+          <p:cNvSpPr/>
+          <p:nvPr/>
+        </p:nvSpPr>
+        <p:spPr>
+          <a:xfrm>
+            <a:off x="950976" y="5093208"/>
+            <a:ext cx="9692640" cy="1344168"/>
+          </a:xfrm>
+          <a:prstGeom prst="roundRect">
+            <a:avLst/>
+          </a:prstGeom>
+          <a:solidFill>
+            <a:srgbClr val="EAF3EF"/>
+          </a:solidFill>
+          <a:ln>
+            <a:noFill/>
+          </a:ln>
+          <a:effectLst/>
+        </p:spPr>
+        <p:style>
+          <a:lnRef idx="1">
+            <a:schemeClr val="accent1"/>
+          </a:lnRef>
+          <a:fillRef idx="3">
+            <a:schemeClr val="accent1"/>
+          </a:fillRef>
+          <a:effectRef idx="2">
+            <a:schemeClr val="accent1"/>
+          </a:effectRef>
+          <a:fontRef idx="minor">
+            <a:schemeClr val="lt1"/>
+          </a:fontRef>
+        </p:style>
+        <p:txBody>
+          <a:bodyPr rtlCol="0" anchor="ctr" wrap="square" lIns="228600" rIns="137160" tIns="137160" bIns="109728"/>
+          <a:lstStyle/>
+          <a:p>
+            <a:pPr algn="l">
+              <a:spcAft>
+                <a:spcPts val="400"/>
+              </a:spcAft>
+            </a:pPr>
+            <a:r>
+              <a:rPr sz="1500">
+                <a:solidFill>
+                  <a:srgbClr val="14533B"/>
+                </a:solidFill>
+                <a:latin typeface="Courier New"/>
+              </a:rPr>
+              <a:t>ann_income = np.where(inc &lt; 700, inc*1000, inc)</a:t>
+            </a:r>
+            <a:r>
+              <a:rPr sz="1500">
+                <a:solidFill>
+                  <a:srgbClr val="8A9A93"/>
+                </a:solidFill>
+                <a:latin typeface="Courier New"/>
+              </a:rPr>
+              <a:t>  # units</a:t>
+            </a:r>
+          </a:p>
+          <a:p>
+            <a:pPr algn="l">
+              <a:spcAft>
+                <a:spcPts val="400"/>
+              </a:spcAft>
+            </a:pPr>
+            <a:r>
+              <a:rPr sz="1500">
+                <a:solidFill>
+                  <a:srgbClr val="14533B"/>
+                </a:solidFill>
+                <a:latin typeface="Courier New"/>
+              </a:rPr>
+              <a:t>risk12 = risk_1.fillna(risk_2)</a:t>
+            </a:r>
+            <a:r>
+              <a:rPr sz="1500">
+                <a:solidFill>
+                  <a:srgbClr val="8A9A93"/>
+                </a:solidFill>
+                <a:latin typeface="Courier New"/>
+              </a:rPr>
+              <a:t>                  # r1 == r2</a:t>
+            </a:r>
+          </a:p>
+          <a:p>
+            <a:pPr algn="l">
+              <a:spcAft>
+                <a:spcPts val="400"/>
+              </a:spcAft>
+            </a:pPr>
+            <a:r>
+              <a:rPr sz="1500">
+                <a:solidFill>
+                  <a:srgbClr val="14533B"/>
+                </a:solidFill>
+                <a:latin typeface="Courier New"/>
+              </a:rPr>
+              <a:t>risk_dev = (risk - 55).abs()</a:t>
+            </a:r>
+            <a:r>
+              <a:rPr sz="1500">
+                <a:solidFill>
+                  <a:srgbClr val="8A9A93"/>
+                </a:solidFill>
+                <a:latin typeface="Courier New"/>
+              </a:rPr>
+              <a:t>                    # inverted-U</a:t>
+            </a:r>
+          </a:p>
+        </p:txBody>
+      </p:sp>
+      <p:sp>
+        <p:nvSpPr>
+          <p:cNvPr id="27" name="TextBox 26"/>
+          <p:cNvSpPr txBox="1"/>
+          <p:nvPr/>
+        </p:nvSpPr>
+        <p:spPr>
+          <a:xfrm>
+            <a:off x="11338560" y="5138928"/>
+            <a:ext cx="6400800" cy="1371600"/>
+          </a:xfrm>
+          <a:prstGeom prst="rect">
+            <a:avLst/>
+          </a:prstGeom>
+          <a:noFill/>
+        </p:spPr>
+        <p:txBody>
+          <a:bodyPr wrap="square">
+            <a:spAutoFit/>
+          </a:bodyPr>
+          <a:lstStyle/>
+          <a:p>
+            <a:r>
+              <a:rPr sz="1700">
+                <a:solidFill>
+                  <a:srgbClr val="5C7268"/>
+                </a:solidFill>
+                <a:latin typeface="Arial"/>
+              </a:rPr>
+              <a:t>Three of the highest-value fixes: unit rescaling, one duplicate column, and the risk-shape feature.</a:t>
+            </a:r>
+          </a:p>
+        </p:txBody>
+      </p:sp>
+      <p:sp>
+        <p:nvSpPr>
+          <p:cNvPr id="28" name="TextBox 27"/>
+          <p:cNvSpPr txBox="1"/>
+          <p:nvPr/>
+        </p:nvSpPr>
+        <p:spPr>
+          <a:xfrm>
+            <a:off x="950976" y="6967728"/>
+            <a:ext cx="10058400" cy="365760"/>
+          </a:xfrm>
+          <a:prstGeom prst="rect">
+            <a:avLst/>
+          </a:prstGeom>
+          <a:noFill/>
+        </p:spPr>
+        <p:txBody>
+          <a:bodyPr wrap="none">
+            <a:spAutoFit/>
+          </a:bodyPr>
+          <a:lstStyle/>
+          <a:p>
+            <a:r>
+              <a:rPr sz="2100" b="1">
+                <a:solidFill>
+                  <a:srgbClr val="063D22"/>
+                </a:solidFill>
+                <a:latin typeface="Arial"/>
+              </a:rPr>
+              <a:t>Honest validation + robust cutoff</a:t>
+            </a:r>
+          </a:p>
+        </p:txBody>
+      </p:sp>
+      <p:sp>
+        <p:nvSpPr>
+          <p:cNvPr id="29" name="Rounded Rectangle 28"/>
+          <p:cNvSpPr/>
+          <p:nvPr/>
+        </p:nvSpPr>
+        <p:spPr>
+          <a:xfrm>
+            <a:off x="950976" y="7379208"/>
+            <a:ext cx="9692640" cy="1033272"/>
+          </a:xfrm>
+          <a:prstGeom prst="roundRect">
+            <a:avLst/>
+          </a:prstGeom>
+          <a:solidFill>
+            <a:srgbClr val="EAF3EF"/>
+          </a:solidFill>
+          <a:ln>
+            <a:noFill/>
+          </a:ln>
+          <a:effectLst/>
+        </p:spPr>
+        <p:style>
+          <a:lnRef idx="1">
+            <a:schemeClr val="accent1"/>
+          </a:lnRef>
+          <a:fillRef idx="3">
+            <a:schemeClr val="accent1"/>
+          </a:fillRef>
+          <a:effectRef idx="2">
+            <a:schemeClr val="accent1"/>
+          </a:effectRef>
+          <a:fontRef idx="minor">
+            <a:schemeClr val="lt1"/>
+          </a:fontRef>
+        </p:style>
+        <p:txBody>
+          <a:bodyPr rtlCol="0" anchor="ctr" wrap="square" lIns="228600" rIns="137160" tIns="137160" bIns="109728"/>
+          <a:lstStyle/>
+          <a:p>
+            <a:pPr algn="l">
+              <a:spcAft>
+                <a:spcPts val="400"/>
+              </a:spcAft>
+            </a:pPr>
+            <a:r>
+              <a:rPr sz="1500">
+                <a:solidFill>
+                  <a:srgbClr val="14533B"/>
+                </a:solidFill>
+                <a:latin typeface="Courier New"/>
+              </a:rPr>
+              <a:t>oof[val] = model.predict_proba(X.iloc[val])[:,1]</a:t>
+            </a:r>
+            <a:r>
+              <a:rPr sz="1500">
+                <a:solidFill>
+                  <a:srgbClr val="8A9A93"/>
+                </a:solidFill>
+                <a:latin typeface="Courier New"/>
+              </a:rPr>
+              <a:t>  # 5-fold OOF</a:t>
+            </a:r>
+          </a:p>
+          <a:p>
+            <a:pPr algn="l">
+              <a:spcAft>
+                <a:spcPts val="400"/>
+              </a:spcAft>
+            </a:pPr>
+            <a:r>
+              <a:rPr sz="1500">
+                <a:solidFill>
+                  <a:srgbClr val="14533B"/>
+                </a:solidFill>
+                <a:latin typeface="Courier New"/>
+              </a:rPr>
+              <a:t>t = thresholds[acc.argsort()[-6:]].mean()</a:t>
+            </a:r>
+            <a:r>
+              <a:rPr sz="1500">
+                <a:solidFill>
+                  <a:srgbClr val="8A9A93"/>
+                </a:solidFill>
+                <a:latin typeface="Courier New"/>
+              </a:rPr>
+              <a:t>         # smooth cutoff</a:t>
+            </a:r>
+          </a:p>
+        </p:txBody>
+      </p:sp>
+      <p:sp>
+        <p:nvSpPr>
+          <p:cNvPr id="30" name="TextBox 29"/>
+          <p:cNvSpPr txBox="1"/>
+          <p:nvPr/>
+        </p:nvSpPr>
+        <p:spPr>
+          <a:xfrm>
+            <a:off x="11338560" y="7424928"/>
+            <a:ext cx="6400800" cy="1371600"/>
+          </a:xfrm>
+          <a:prstGeom prst="rect">
+            <a:avLst/>
+          </a:prstGeom>
+          <a:noFill/>
+        </p:spPr>
+        <p:txBody>
+          <a:bodyPr wrap="square">
+            <a:spAutoFit/>
+          </a:bodyPr>
+          <a:lstStyle/>
+          <a:p>
+            <a:r>
+              <a:rPr sz="1700">
+                <a:solidFill>
+                  <a:srgbClr val="5C7268"/>
+                </a:solidFill>
+                <a:latin typeface="Arial"/>
+              </a:rPr>
+              <a:t>Every row scored out-of-fold; the decision cutoff is averaged over the top-1% to avoid overfitting noise.</a:t>
+            </a:r>
+          </a:p>
+        </p:txBody>
+      </p:sp>
+    </p:spTree>
+  </p:cSld>
+  <p:clrMapOvr>
+    <a:masterClrMapping/>
+  </p:clrMapOvr>
+</p:sld>
+</file>
+
+<file path=ppt/slides/slide13.xml><?xml version="1.0" encoding="utf-8"?>
 <p:sld xmlns:a="http://schemas.openxmlformats.org/drawingml/2006/main" xmlns:r="http://schemas.openxmlformats.org/officeDocument/2006/relationships" xmlns:p="http://schemas.openxmlformats.org/presentationml/2006/main">
   <p:cSld name="Slide 12">
     <p:bg>
@@ -3803,7 +4518,7 @@
                 <a:ea typeface="Courier New" pitchFamily="34" charset="-122"/>
                 <a:cs typeface="Courier New" pitchFamily="34" charset="-120"/>
               </a:rPr>
-              <a:t>12 · QUESTIONS</a:t>
+              <a:t>13 · QUESTIONS</a:t>
             </a:r>
             <a:endParaRPr lang="en-US" sz="1800" dirty="0"/>
           </a:p>
@@ -3913,6 +4628,10 @@
           </a:solidFill>
           <a:ln/>
         </p:spPr>
+        <p:txBody>
+          <a:bodyPr/>
+          <a:p/>
+        </p:txBody>
       </p:sp>
       <p:sp>
         <p:nvSpPr>
@@ -4018,6 +4737,10 @@
           </a:solidFill>
           <a:ln/>
         </p:spPr>
+        <p:txBody>
+          <a:bodyPr/>
+          <a:p/>
+        </p:txBody>
       </p:sp>
       <p:sp>
         <p:nvSpPr>
@@ -4123,6 +4846,10 @@
           </a:solidFill>
           <a:ln/>
         </p:spPr>
+        <p:txBody>
+          <a:bodyPr/>
+          <a:p/>
+        </p:txBody>
       </p:sp>
       <p:sp>
         <p:nvSpPr>
@@ -4230,6 +4957,10 @@
           </a:solidFill>
           <a:ln/>
         </p:spPr>
+        <p:txBody>
+          <a:bodyPr/>
+          <a:p/>
+        </p:txBody>
       </p:sp>
       <p:sp>
         <p:nvSpPr>

--- a/presentation/Consulting_Finance_ML_Slides.pptx
+++ b/presentation/Consulting_Finance_ML_Slides.pptx
@@ -1983,50 +1983,6 @@
       </p:sp>
       <p:sp>
         <p:nvSpPr>
-          <p:cNvPr id="5" name="Text 3"/>
-          <p:cNvSpPr/>
-          <p:nvPr/>
-        </p:nvSpPr>
-        <p:spPr>
-          <a:xfrm>
-            <a:off x="990600" y="6279877"/>
-            <a:ext cx="872654" cy="781050"/>
-          </a:xfrm>
-          <a:prstGeom prst="rect">
-            <a:avLst/>
-          </a:prstGeom>
-          <a:noFill/>
-          <a:ln/>
-        </p:spPr>
-        <p:txBody>
-          <a:bodyPr wrap="square" lIns="25400" tIns="25400" rIns="25400" bIns="25400" rtlCol="0" anchor="t">
-            <a:normAutofit/>
-          </a:bodyPr>
-          <a:lstStyle/>
-          <a:p>
-            <a:pPr algn="l" indent="0" marL="0">
-              <a:lnSpc>
-                <a:spcPct val="100000"/>
-              </a:lnSpc>
-              <a:buNone/>
-            </a:pPr>
-            <a:r>
-              <a:rPr lang="en-US" sz="5850" b="1" dirty="0">
-                <a:solidFill>
-                  <a:srgbClr val="FFFFFF"/>
-                </a:solidFill>
-                <a:latin typeface="Georgia" pitchFamily="34" charset="0"/>
-                <a:ea typeface="Georgia" pitchFamily="34" charset="-122"/>
-                <a:cs typeface="Georgia" pitchFamily="34" charset="-120"/>
-              </a:rPr>
-              <a:t>#1</a:t>
-            </a:r>
-            <a:endParaRPr lang="en-US" sz="5850" dirty="0"/>
-          </a:p>
-        </p:txBody>
-      </p:sp>
-      <p:sp>
-        <p:nvSpPr>
           <p:cNvPr id="6" name="Text 4"/>
           <p:cNvSpPr/>
           <p:nvPr/>
@@ -2063,7 +2019,7 @@
                 <a:ea typeface="Arial" pitchFamily="34" charset="-122"/>
                 <a:cs typeface="Arial" pitchFamily="34" charset="-120"/>
               </a:rPr>
-              <a:t>Tied for first place — reached without the planted data trap and without using race or religion.</a:t>
+              <a:t>Built clean — we caught the planted data trap and used no race or religion data.</a:t>
             </a:r>
             <a:endParaRPr lang="en-US" sz="2100" dirty="0"/>
           </a:p>
@@ -4668,7 +4624,7 @@
                 <a:ea typeface="Arial" pitchFamily="34" charset="-122"/>
                 <a:cs typeface="Arial" pitchFamily="34" charset="-120"/>
               </a:rPr>
-              <a:t>Tied for #1</a:t>
+              <a:t>Built clean</a:t>
             </a:r>
             <a:endParaRPr lang="en-US" sz="1950" dirty="0"/>
           </a:p>
@@ -4712,7 +4668,7 @@
                 <a:ea typeface="Arial" pitchFamily="34" charset="-122"/>
                 <a:cs typeface="Arial" pitchFamily="34" charset="-120"/>
               </a:rPr>
-              <a:t>without the planted trap or any protected data.</a:t>
+              <a:t>no planted trap, no protected data.</a:t>
             </a:r>
             <a:endParaRPr lang="en-US" sz="1875" dirty="0"/>
           </a:p>
@@ -11301,6 +11257,10 @@
           </a:solidFill>
           <a:ln/>
         </p:spPr>
+        <p:txBody>
+          <a:bodyPr/>
+          <a:p/>
+        </p:txBody>
       </p:sp>
       <p:sp>
         <p:nvSpPr>
@@ -11381,7 +11341,7 @@
                 <a:ea typeface="Arial" pitchFamily="34" charset="-122"/>
                 <a:cs typeface="Arial" pitchFamily="34" charset="-120"/>
               </a:rPr>
-              <a:t>We tied for first — and our own validation predicted it</a:t>
+              <a:t>Our own validation predicted the result in advance</a:t>
             </a:r>
             <a:endParaRPr lang="en-US" sz="3600" dirty="0"/>
           </a:p>
@@ -11447,6 +11407,10 @@
           </a:solidFill>
           <a:ln/>
         </p:spPr>
+        <p:txBody>
+          <a:bodyPr/>
+          <a:p/>
+        </p:txBody>
       </p:sp>
       <p:sp>
         <p:nvSpPr>
@@ -11508,6 +11472,10 @@
           </a:solidFill>
           <a:ln/>
         </p:spPr>
+        <p:txBody>
+          <a:bodyPr/>
+          <a:p/>
+        </p:txBody>
       </p:sp>
       <p:sp>
         <p:nvSpPr>
@@ -11569,6 +11537,10 @@
           </a:solidFill>
           <a:ln/>
         </p:spPr>
+        <p:txBody>
+          <a:bodyPr/>
+          <a:p/>
+        </p:txBody>
       </p:sp>
       <p:sp>
         <p:nvSpPr>
@@ -11630,6 +11602,10 @@
           </a:solidFill>
           <a:ln/>
         </p:spPr>
+        <p:txBody>
+          <a:bodyPr/>
+          <a:p/>
+        </p:txBody>
       </p:sp>
       <p:sp>
         <p:nvSpPr>
@@ -11691,6 +11667,10 @@
           </a:solidFill>
           <a:ln/>
         </p:spPr>
+        <p:txBody>
+          <a:bodyPr/>
+          <a:p/>
+        </p:txBody>
       </p:sp>
       <p:sp>
         <p:nvSpPr>
@@ -11752,6 +11732,10 @@
           </a:solidFill>
           <a:ln/>
         </p:spPr>
+        <p:txBody>
+          <a:bodyPr/>
+          <a:p/>
+        </p:txBody>
       </p:sp>
       <p:sp>
         <p:nvSpPr>
@@ -11813,6 +11797,10 @@
           </a:solidFill>
           <a:ln/>
         </p:spPr>
+        <p:txBody>
+          <a:bodyPr/>
+          <a:p/>
+        </p:txBody>
       </p:sp>
       <p:sp>
         <p:nvSpPr>
@@ -11874,6 +11862,10 @@
           </a:solidFill>
           <a:ln/>
         </p:spPr>
+        <p:txBody>
+          <a:bodyPr/>
+          <a:p/>
+        </p:txBody>
       </p:sp>
       <p:sp>
         <p:nvSpPr>
@@ -11935,6 +11927,10 @@
           </a:solidFill>
           <a:ln/>
         </p:spPr>
+        <p:txBody>
+          <a:bodyPr/>
+          <a:p/>
+        </p:txBody>
       </p:sp>
       <p:sp>
         <p:nvSpPr>
@@ -11996,6 +11992,10 @@
           </a:solidFill>
           <a:ln/>
         </p:spPr>
+        <p:txBody>
+          <a:bodyPr/>
+          <a:p/>
+        </p:txBody>
       </p:sp>
       <p:sp>
         <p:nvSpPr>
@@ -12057,6 +12057,10 @@
           </a:solidFill>
           <a:ln/>
         </p:spPr>
+        <p:txBody>
+          <a:bodyPr/>
+          <a:p/>
+        </p:txBody>
       </p:sp>
       <p:sp>
         <p:nvSpPr>
@@ -12077,6 +12081,10 @@
           </a:solidFill>
           <a:ln/>
         </p:spPr>
+        <p:txBody>
+          <a:bodyPr/>
+          <a:p/>
+        </p:txBody>
       </p:sp>
       <p:sp>
         <p:nvSpPr>
@@ -12138,6 +12146,10 @@
           </a:solidFill>
           <a:ln/>
         </p:spPr>
+        <p:txBody>
+          <a:bodyPr/>
+          <a:p/>
+        </p:txBody>
       </p:sp>
       <p:sp>
         <p:nvSpPr>
@@ -12199,6 +12211,10 @@
           </a:solidFill>
           <a:ln/>
         </p:spPr>
+        <p:txBody>
+          <a:bodyPr/>
+          <a:p/>
+        </p:txBody>
       </p:sp>
       <p:sp>
         <p:nvSpPr>
@@ -12260,6 +12276,10 @@
           </a:solidFill>
           <a:ln/>
         </p:spPr>
+        <p:txBody>
+          <a:bodyPr/>
+          <a:p/>
+        </p:txBody>
       </p:sp>
       <p:sp>
         <p:nvSpPr>
@@ -12321,6 +12341,10 @@
           </a:solidFill>
           <a:ln/>
         </p:spPr>
+        <p:txBody>
+          <a:bodyPr/>
+          <a:p/>
+        </p:txBody>
       </p:sp>
       <p:sp>
         <p:nvSpPr>
@@ -12382,6 +12406,10 @@
           </a:solidFill>
           <a:ln/>
         </p:spPr>
+        <p:txBody>
+          <a:bodyPr/>
+          <a:p/>
+        </p:txBody>
       </p:sp>
       <p:sp>
         <p:nvSpPr>
@@ -13237,7 +13265,7 @@
                 <a:ea typeface="Arial" pitchFamily="34" charset="-122"/>
                 <a:cs typeface="Arial" pitchFamily="34" charset="-120"/>
               </a:rPr>
-              <a:t>Tied for #1 on the public leaderboard — no leak, no protected attributes.</a:t>
+              <a:t>0.8565 public accuracy — no leak, no protected attributes.</a:t>
             </a:r>
             <a:endParaRPr lang="en-US" sz="2250" dirty="0"/>
           </a:p>

--- a/presentation/Consulting_Finance_ML_Slides.pptx
+++ b/presentation/Consulting_Finance_ML_Slides.pptx
@@ -4,6 +4,9 @@
   <p:sldMasterIdLst>
     <p:sldMasterId id="2147483648" r:id="rId1"/>
   </p:sldMasterIdLst>
+  <p:notesMasterIdLst>
+    <p:notesMasterId r:id="rId15"/>
+  </p:notesMasterIdLst>
   <p:sldIdLst>
     <p:sldId id="256" r:id="rId2"/>
     <p:sldId id="257" r:id="rId3"/>
@@ -16,12 +19,9 @@
     <p:sldId id="264" r:id="rId10"/>
     <p:sldId id="265" r:id="rId11"/>
     <p:sldId id="266" r:id="rId12"/>
-    <p:sldId id="268" r:id="rId19"/>
-    <p:sldId id="267" r:id="rId13"/>
+    <p:sldId id="268" r:id="rId13"/>
+    <p:sldId id="267" r:id="rId14"/>
   </p:sldIdLst>
-  <p:notesMasterIdLst>
-    <p:notesMasterId r:id="rId14"/>
-  </p:notesMasterIdLst>
   <p:sldSz cx="18288000" cy="10287000"/>
   <p:notesSz cx="10287000" cy="18288000"/>
   <p:defaultTextStyle>
@@ -116,6 +116,11 @@
       </a:defRPr>
     </a:lvl9pPr>
   </p:defaultTextStyle>
+  <p:extLst>
+    <p:ext uri="{EFAFB233-063F-42B5-8137-9DF3F51BA10A}">
+      <p15:sldGuideLst xmlns:p15="http://schemas.microsoft.com/office/powerpoint/2012/main"/>
+    </p:ext>
+  </p:extLst>
 </p:presentation>
 </file>
 
@@ -141,234 +146,10 @@
           <a:chExt cx="0" cy="0"/>
         </a:xfrm>
       </p:grpSpPr>
-      <p:sp>
-        <p:nvSpPr>
-          <p:cNvPr id="2" name="Header Placeholder 1"/>
-          <p:cNvSpPr>
-            <a:spLocks noGrp="1"/>
-          </p:cNvSpPr>
-          <p:nvPr>
-            <p:ph type="hdr" sz="quarter"/>
-          </p:nvPr>
-        </p:nvSpPr>
-        <p:spPr>
-          <a:xfrm>
-            <a:off x="0" y="0"/>
-            <a:ext cx="2971800" cy="458788"/>
-          </a:xfrm>
-          <a:prstGeom prst="rect">
-            <a:avLst/>
-          </a:prstGeom>
-        </p:spPr>
-        <p:txBody>
-          <a:bodyPr vert="horz" lIns="91440" tIns="45720" rIns="91440" bIns="45720" rtlCol="0"/>
-          <a:lstStyle>
-            <a:lvl1pPr algn="l">
-              <a:defRPr sz="1200"/>
-            </a:lvl1pPr>
-          </a:lstStyle>
-          <a:p>
-            <a:endParaRPr lang="en-US"/>
-          </a:p>
-        </p:txBody>
-      </p:sp>
-      <p:sp>
-        <p:nvSpPr>
-          <p:cNvPr id="3" name="Date Placeholder 2"/>
-          <p:cNvSpPr>
-            <a:spLocks noGrp="1"/>
-          </p:cNvSpPr>
-          <p:nvPr>
-            <p:ph type="dt" idx="1"/>
-          </p:nvPr>
-        </p:nvSpPr>
-        <p:spPr>
-          <a:xfrm>
-            <a:off x="3884613" y="0"/>
-            <a:ext cx="2971800" cy="458788"/>
-          </a:xfrm>
-          <a:prstGeom prst="rect">
-            <a:avLst/>
-          </a:prstGeom>
-        </p:spPr>
-        <p:txBody>
-          <a:bodyPr vert="horz" lIns="91440" tIns="45720" rIns="91440" bIns="45720" rtlCol="0"/>
-          <a:lstStyle>
-            <a:lvl1pPr algn="r">
-              <a:defRPr sz="1200"/>
-            </a:lvl1pPr>
-          </a:lstStyle>
-          <a:p>
-            <a:fld id="{5282F153-3F37-0F45-9E97-73ACFA13230C}" type="datetimeFigureOut">
-              <a:rPr lang="en-US"/>
-              <a:t>7/23/19</a:t>
-            </a:fld>
-            <a:endParaRPr lang="en-US"/>
-          </a:p>
-        </p:txBody>
-      </p:sp>
-      <p:sp>
-        <p:nvSpPr>
-          <p:cNvPr id="4" name="Slide Image Placeholder 3"/>
-          <p:cNvSpPr>
-            <a:spLocks noGrp="1" noRot="1" noChangeAspect="1"/>
-          </p:cNvSpPr>
-          <p:nvPr>
-            <p:ph type="sldImg" idx="2"/>
-          </p:nvPr>
-        </p:nvSpPr>
-        <p:spPr>
-          <a:xfrm>
-            <a:off x="685800" y="1143000"/>
-            <a:ext cx="5486400" cy="3086100"/>
-          </a:xfrm>
-          <a:prstGeom prst="rect">
-            <a:avLst/>
-          </a:prstGeom>
-          <a:noFill/>
-          <a:ln w="12700">
-            <a:solidFill>
-              <a:prstClr val="black"/>
-            </a:solidFill>
-          </a:ln>
-        </p:spPr>
-        <p:txBody>
-          <a:bodyPr vert="horz" lIns="91440" tIns="45720" rIns="91440" bIns="45720" rtlCol="0" anchor="ctr"/>
-          <a:lstStyle/>
-          <a:p>
-            <a:endParaRPr lang="en-US"/>
-          </a:p>
-        </p:txBody>
-      </p:sp>
-      <p:sp>
-        <p:nvSpPr>
-          <p:cNvPr id="5" name="Notes Placeholder 4"/>
-          <p:cNvSpPr>
-            <a:spLocks noGrp="1"/>
-          </p:cNvSpPr>
-          <p:nvPr>
-            <p:ph type="body" sz="quarter" idx="3"/>
-          </p:nvPr>
-        </p:nvSpPr>
-        <p:spPr>
-          <a:xfrm>
-            <a:off x="685800" y="4400550"/>
-            <a:ext cx="5486400" cy="3600450"/>
-          </a:xfrm>
-          <a:prstGeom prst="rect">
-            <a:avLst/>
-          </a:prstGeom>
-        </p:spPr>
-        <p:txBody>
-          <a:bodyPr vert="horz" lIns="91440" tIns="45720" rIns="91440" bIns="45720" rtlCol="0"/>
-          <a:lstStyle/>
-          <a:p>
-            <a:pPr lvl="0"/>
-            <a:r>
-              <a:rPr lang="en-US"/>
-              <a:t>Click to edit Master text styles</a:t>
-            </a:r>
-          </a:p>
-          <a:p>
-            <a:pPr lvl="1"/>
-            <a:r>
-              <a:rPr lang="en-US"/>
-              <a:t>Second level</a:t>
-            </a:r>
-          </a:p>
-          <a:p>
-            <a:pPr lvl="2"/>
-            <a:r>
-              <a:rPr lang="en-US"/>
-              <a:t>Third level</a:t>
-            </a:r>
-          </a:p>
-          <a:p>
-            <a:pPr lvl="3"/>
-            <a:r>
-              <a:rPr lang="en-US"/>
-              <a:t>Fourth level</a:t>
-            </a:r>
-          </a:p>
-          <a:p>
-            <a:pPr lvl="4"/>
-            <a:r>
-              <a:rPr lang="en-US"/>
-              <a:t>Fifth level</a:t>
-            </a:r>
-          </a:p>
-        </p:txBody>
-      </p:sp>
-      <p:sp>
-        <p:nvSpPr>
-          <p:cNvPr id="6" name="Footer Placeholder 5"/>
-          <p:cNvSpPr>
-            <a:spLocks noGrp="1"/>
-          </p:cNvSpPr>
-          <p:nvPr>
-            <p:ph type="ftr" sz="quarter" idx="4"/>
-          </p:nvPr>
-        </p:nvSpPr>
-        <p:spPr>
-          <a:xfrm>
-            <a:off x="0" y="8685213"/>
-            <a:ext cx="2971800" cy="458787"/>
-          </a:xfrm>
-          <a:prstGeom prst="rect">
-            <a:avLst/>
-          </a:prstGeom>
-        </p:spPr>
-        <p:txBody>
-          <a:bodyPr vert="horz" lIns="91440" tIns="45720" rIns="91440" bIns="45720" rtlCol="0" anchor="b"/>
-          <a:lstStyle>
-            <a:lvl1pPr algn="l">
-              <a:defRPr sz="1200"/>
-            </a:lvl1pPr>
-          </a:lstStyle>
-          <a:p>
-            <a:endParaRPr lang="en-US"/>
-          </a:p>
-        </p:txBody>
-      </p:sp>
-      <p:sp>
-        <p:nvSpPr>
-          <p:cNvPr id="7" name="Slide Number Placeholder 6"/>
-          <p:cNvSpPr>
-            <a:spLocks noGrp="1"/>
-          </p:cNvSpPr>
-          <p:nvPr>
-            <p:ph type="sldNum" sz="quarter" idx="5"/>
-          </p:nvPr>
-        </p:nvSpPr>
-        <p:spPr>
-          <a:xfrm>
-            <a:off x="3884613" y="8685213"/>
-            <a:ext cx="2971800" cy="458787"/>
-          </a:xfrm>
-          <a:prstGeom prst="rect">
-            <a:avLst/>
-          </a:prstGeom>
-        </p:spPr>
-        <p:txBody>
-          <a:bodyPr vert="horz" lIns="91440" tIns="45720" rIns="91440" bIns="45720" rtlCol="0" anchor="b"/>
-          <a:lstStyle>
-            <a:lvl1pPr algn="r">
-              <a:defRPr sz="1200"/>
-            </a:lvl1pPr>
-          </a:lstStyle>
-          <a:p>
-            <a:fld id="{CE5E9CC1-C706-0F49-92D6-E571CC5EEA8F}" type="slidenum">
-              <a:rPr lang="en-US"/>
-              <a:t>‹#›</a:t>
-            </a:fld>
-            <a:endParaRPr lang="en-US"/>
-          </a:p>
-        </p:txBody>
-      </p:sp>
     </p:spTree>
     <p:extLst>
       <p:ext uri="{BB962C8B-B14F-4D97-AF65-F5344CB8AC3E}">
-        <p14:creationId xmlns:p14="http://schemas.microsoft.com/office/powerpoint/2010/main" val="1024086991"/>
+        <p14:creationId xmlns:p14="http://schemas.microsoft.com/office/powerpoint/2010/main" val="2309609074"/>
       </p:ext>
     </p:extLst>
   </p:cSld>
@@ -516,7 +297,6 @@
               <a:rPr lang="en-US" dirty="0"/>
               <a:t>One-line pitch: we built a model to decide whether a personal loan should be approved, using messy data that was deliberately sabotaged. We tied for #1 on the public leaderboard without the planted leak and without the protected attributes that would have inflated the score.</a:t>
             </a:r>
-            <a:endParaRPr lang="en-US" dirty="0"/>
           </a:p>
         </p:txBody>
       </p:sp>
@@ -604,7 +384,6 @@
               <a:rPr lang="en-US" dirty="0"/>
               <a:t>This slide shows we understood the problem, not just ran a library. The hardest part was the forensics, the validation against the real task, and quantifying the ethics rather than hand-waving them.</a:t>
             </a:r>
-            <a:endParaRPr lang="en-US" dirty="0"/>
           </a:p>
         </p:txBody>
       </p:sp>
@@ -692,7 +471,6 @@
               <a:rPr lang="en-US" dirty="0"/>
               <a:t>Separate what we did from what we'd do next. For a finance audience the strongest next step is deciding by cost rather than accuracy, plus calibrated probabilities: that reframes this from a Kaggle score to real lending economics.</a:t>
             </a:r>
-            <a:endParaRPr lang="en-US" dirty="0"/>
           </a:p>
         </p:txBody>
       </p:sp>
@@ -780,7 +558,6 @@
               <a:rPr lang="en-US" dirty="0"/>
               <a:t>The two questions most likely to come up: why we dropped race and religion (lead with the +0.7pt number), and how we knew the column was a leak (it tracked real signal in training but was random in test). Both make us look rigorous.</a:t>
             </a:r>
-            <a:endParaRPr lang="en-US" dirty="0"/>
           </a:p>
         </p:txBody>
       </p:sp>
@@ -801,7 +578,7 @@
           <a:p>
             <a:fld id="{F7021451-1387-4CA6-816F-3879F97B5CBC}" type="slidenum">
               <a:rPr lang="en-US"/>
-              <a:t>12</a:t>
+              <a:t>13</a:t>
             </a:fld>
             <a:endParaRPr lang="en-US"/>
           </a:p>
@@ -868,7 +645,6 @@
               <a:rPr lang="en-US" dirty="0"/>
               <a:t>This mirrors a real underwriting workflow. The model's job is to get both calls right. Two of the four outcomes cost the bank money: approving a loan that defaults, and rejecting a customer who would have repaid.</a:t>
             </a:r>
-            <a:endParaRPr lang="en-US" dirty="0"/>
           </a:p>
         </p:txBody>
       </p:sp>
@@ -956,7 +732,6 @@
               <a:rPr lang="en-US" dirty="0"/>
               <a:t>We have four years of past decisions to learn from, but the test set is a single future month we have never seen. That is why we validate by predicting held-back months, not with random splits. The target is nearly balanced, so a coin flip scores about 52%.</a:t>
             </a:r>
-            <a:endParaRPr lang="en-US" dirty="0"/>
           </a:p>
         </p:txBody>
       </p:sp>
@@ -1044,7 +819,6 @@
               <a:rPr lang="en-US" dirty="0"/>
               <a:t>This is the slide that wins the project. One column looked almost perfect in our own tests, but a simple check showed it tracks real signal in training and is pure noise in the test set: it had been scrambled on purpose. Anyone who trusted it would see 99% in cross-validation and then collapse to about 55% on the real leaderboard.</a:t>
             </a:r>
-            <a:endParaRPr lang="en-US" dirty="0"/>
           </a:p>
         </p:txBody>
       </p:sp>
@@ -1132,7 +906,6 @@
               <a:rPr lang="en-US" dirty="0"/>
               <a:t>One shared script cleans the training and test data in exactly the same way, so the whole thing is reproducible and there is no leakage. We end with 20 features we trust, after dropping the four traps.</a:t>
             </a:r>
-            <a:endParaRPr lang="en-US" dirty="0"/>
           </a:p>
         </p:txBody>
       </p:sp>
@@ -1220,7 +993,6 @@
               <a:rPr lang="en-US" dirty="0"/>
               <a:t>Two insights did most of the work. First, the risk indicators looked useless on a straight-line correlation, but plotting them showed approval peaks in the middle and drops at both extremes. Second, the free-text analyst note is really 60 fixed sentences in three clear sentiment tiers, so we let the model learn each one's approval rate instead of doing fancy text analysis.</a:t>
             </a:r>
-            <a:endParaRPr lang="en-US" dirty="0"/>
           </a:p>
         </p:txBody>
       </p:sp>
@@ -1308,7 +1080,6 @@
               <a:rPr lang="en-US" dirty="0"/>
               <a:t>We could have added race and religion for about +0.7 points and probably first place. We measured it and refused, because those columns have zero link to real credit risk yet shift approval rates by group. The gain is not better risk prediction; it is automated discrimination, and it is illegal under EU and US credit law.</a:t>
             </a:r>
-            <a:endParaRPr lang="en-US" dirty="0"/>
           </a:p>
         </p:txBody>
       </p:sp>
@@ -1396,7 +1167,6 @@
               <a:rPr lang="en-US" dirty="0"/>
               <a:t>Model selection: gradient-boosted trees won a 5-fold bake-off, from Naive Bayes 0.760 up to LightGBM 0.836. Adversarial validation shows a train-vs-test classifier scores AUC 1.000 on all features, but only because of the date (the test set is all May 2026); drop the date features and it falls to 0.497, proving train and test are identically distributed apart from time. Final labels use a smooth threshold, the average of the top 1% of candidate cutoffs, which is more robust than a single argmax cutoff.</a:t>
             </a:r>
-            <a:endParaRPr lang="en-US" dirty="0"/>
           </a:p>
         </p:txBody>
       </p:sp>
@@ -1484,7 +1254,6 @@
               <a:rPr lang="en-US" dirty="0"/>
               <a:t>We tied for first on the public leaderboard at 0.8565, cleanly, with no leak and no protected attributes. Final submissions are v6 (public-best) and v10 (clean prep, pseudo-labeling, smooth threshold; OOF 0.8590, ROC AUC 0.9377, public 0.8535, approval 0.509). v10's OOF is slightly lower than v6 and v7 by design: the smooth threshold is deliberately conservative and the z-scoring is now leak-free, not because the model is worse. Adversarial validation confirms the CV-to-leaderboard gap is distribution shift over time, not overfitting.</a:t>
             </a:r>
-            <a:endParaRPr lang="en-US" dirty="0"/>
           </a:p>
         </p:txBody>
       </p:sp>
@@ -1557,6 +1326,11 @@
 <file path=ppt/slideMasters/slideMaster1.xml><?xml version="1.0" encoding="utf-8"?>
 <p:sldMaster xmlns:a="http://schemas.openxmlformats.org/drawingml/2006/main" xmlns:r="http://schemas.openxmlformats.org/officeDocument/2006/relationships" xmlns:p="http://schemas.openxmlformats.org/presentationml/2006/main">
   <p:cSld>
+    <p:bg>
+      <p:bgRef idx="1001">
+        <a:schemeClr val="bg1"/>
+      </p:bgRef>
+    </p:bg>
     <p:spTree>
       <p:nvGrpSpPr>
         <p:cNvPr id="1" name=""/>
@@ -1839,6 +1613,7 @@
         <a:solidFill>
           <a:srgbClr val="1A7A57"/>
         </a:solidFill>
+        <a:effectLst/>
       </p:bgPr>
     </p:bg>
     <p:spTree>
@@ -1874,15 +1649,15 @@
         </p:spPr>
         <p:txBody>
           <a:bodyPr wrap="square" lIns="25400" tIns="25400" rIns="25400" bIns="25400" rtlCol="0" anchor="t">
-            <a:normAutofit/>
-          </a:bodyPr>
-          <a:lstStyle/>
-          <a:p>
-            <a:pPr algn="l" indent="0" marL="0">
-              <a:buNone/>
-            </a:pPr>
-            <a:r>
-              <a:rPr lang="en-US" sz="1800" spc="225" kern="0" dirty="0">
+            <a:normAutofit fontScale="92500" lnSpcReduction="10000"/>
+          </a:bodyPr>
+          <a:lstStyle/>
+          <a:p>
+            <a:pPr marL="0" indent="0" algn="l">
+              <a:buNone/>
+            </a:pPr>
+            <a:r>
+              <a:rPr lang="en-US" sz="1800" kern="0" spc="225" dirty="0">
                 <a:solidFill>
                   <a:srgbClr val="B2E0D4"/>
                 </a:solidFill>
@@ -1919,14 +1694,14 @@
           </a:bodyPr>
           <a:lstStyle/>
           <a:p>
-            <a:pPr algn="l" indent="0" marL="0">
+            <a:pPr marL="0" indent="0" algn="l">
               <a:lnSpc>
                 <a:spcPct val="100000"/>
               </a:lnSpc>
               <a:buNone/>
             </a:pPr>
             <a:r>
-              <a:rPr lang="en-US" sz="7500" b="1" spc="-75" kern="0" dirty="0">
+              <a:rPr lang="en-US" sz="7500" b="1" kern="0" spc="-75" dirty="0">
                 <a:solidFill>
                   <a:srgbClr val="FFFFFF"/>
                 </a:solidFill>
@@ -1959,11 +1734,11 @@
         </p:spPr>
         <p:txBody>
           <a:bodyPr wrap="square" lIns="25400" tIns="25400" rIns="25400" bIns="25400" rtlCol="0" anchor="t">
-            <a:normAutofit/>
-          </a:bodyPr>
-          <a:lstStyle/>
-          <a:p>
-            <a:pPr algn="l" indent="0" marL="0">
+            <a:normAutofit lnSpcReduction="10000"/>
+          </a:bodyPr>
+          <a:lstStyle/>
+          <a:p>
+            <a:pPr marL="0" indent="0" algn="l">
               <a:buNone/>
             </a:pPr>
             <a:r>
@@ -2000,11 +1775,11 @@
         </p:spPr>
         <p:txBody>
           <a:bodyPr wrap="square" lIns="25400" tIns="25400" rIns="25400" bIns="25400" rtlCol="0" anchor="t">
-            <a:normAutofit/>
-          </a:bodyPr>
-          <a:lstStyle/>
-          <a:p>
-            <a:pPr algn="l" indent="0" marL="0">
+            <a:normAutofit fontScale="92500" lnSpcReduction="10000"/>
+          </a:bodyPr>
+          <a:lstStyle/>
+          <a:p>
+            <a:pPr marL="0" indent="0" algn="l">
               <a:lnSpc>
                 <a:spcPct val="140000"/>
               </a:lnSpc>
@@ -2046,6 +1821,13 @@
           </a:solidFill>
           <a:ln/>
         </p:spPr>
+        <p:txBody>
+          <a:bodyPr/>
+          <a:lstStyle/>
+          <a:p>
+            <a:endParaRPr lang="en-GB"/>
+          </a:p>
+        </p:txBody>
       </p:sp>
       <p:sp>
         <p:nvSpPr>
@@ -2066,11 +1848,11 @@
         </p:spPr>
         <p:txBody>
           <a:bodyPr wrap="square" lIns="25400" tIns="25400" rIns="25400" bIns="25400" rtlCol="0" anchor="t">
-            <a:normAutofit/>
-          </a:bodyPr>
-          <a:lstStyle/>
-          <a:p>
-            <a:pPr algn="l" indent="0" marL="0">
+            <a:normAutofit lnSpcReduction="10000"/>
+          </a:bodyPr>
+          <a:lstStyle/>
+          <a:p>
+            <a:pPr marL="0" indent="0" algn="l">
               <a:buNone/>
             </a:pPr>
             <a:r>
@@ -2107,11 +1889,11 @@
         </p:spPr>
         <p:txBody>
           <a:bodyPr wrap="square" lIns="25400" tIns="25400" rIns="25400" bIns="25400" rtlCol="0" anchor="t">
-            <a:normAutofit/>
-          </a:bodyPr>
-          <a:lstStyle/>
-          <a:p>
-            <a:pPr algn="r" indent="0" marL="0">
+            <a:normAutofit fontScale="92500" lnSpcReduction="10000"/>
+          </a:bodyPr>
+          <a:lstStyle/>
+          <a:p>
+            <a:pPr marL="0" indent="0" algn="r">
               <a:buNone/>
             </a:pPr>
             <a:r>
@@ -2145,6 +1927,7 @@
         <a:solidFill>
           <a:srgbClr val="FFFFFF"/>
         </a:solidFill>
+        <a:effectLst/>
       </p:bgPr>
     </p:bg>
     <p:spTree>
@@ -2180,6 +1963,13 @@
           </a:solidFill>
           <a:ln/>
         </p:spPr>
+        <p:txBody>
+          <a:bodyPr/>
+          <a:lstStyle/>
+          <a:p>
+            <a:endParaRPr lang="en-GB"/>
+          </a:p>
+        </p:txBody>
       </p:sp>
       <p:sp>
         <p:nvSpPr>
@@ -2200,15 +1990,15 @@
         </p:spPr>
         <p:txBody>
           <a:bodyPr wrap="square" lIns="25400" tIns="25400" rIns="25400" bIns="25400" rtlCol="0" anchor="t">
-            <a:normAutofit/>
-          </a:bodyPr>
-          <a:lstStyle/>
-          <a:p>
-            <a:pPr algn="l" indent="0" marL="0">
-              <a:buNone/>
-            </a:pPr>
-            <a:r>
-              <a:rPr lang="en-US" sz="1800" spc="225" kern="0" dirty="0">
+            <a:normAutofit fontScale="92500" lnSpcReduction="10000"/>
+          </a:bodyPr>
+          <a:lstStyle/>
+          <a:p>
+            <a:pPr marL="0" indent="0" algn="l">
+              <a:buNone/>
+            </a:pPr>
+            <a:r>
+              <a:rPr lang="en-US" sz="1800" kern="0" spc="225" dirty="0">
                 <a:solidFill>
                   <a:srgbClr val="007A33"/>
                 </a:solidFill>
@@ -2241,18 +2031,18 @@
         </p:spPr>
         <p:txBody>
           <a:bodyPr wrap="square" lIns="25400" tIns="25400" rIns="25400" bIns="25400" rtlCol="0" anchor="t">
-            <a:normAutofit/>
-          </a:bodyPr>
-          <a:lstStyle/>
-          <a:p>
-            <a:pPr algn="l" indent="0" marL="0">
+            <a:normAutofit fontScale="92500" lnSpcReduction="10000"/>
+          </a:bodyPr>
+          <a:lstStyle/>
+          <a:p>
+            <a:pPr marL="0" indent="0" algn="l">
               <a:lnSpc>
                 <a:spcPct val="112000"/>
               </a:lnSpc>
               <a:buNone/>
             </a:pPr>
             <a:r>
-              <a:rPr lang="en-US" sz="3600" b="1" spc="-37" kern="0" dirty="0">
+              <a:rPr lang="en-US" sz="3600" b="1" kern="0" spc="-37" dirty="0">
                 <a:solidFill>
                   <a:srgbClr val="063D22"/>
                 </a:solidFill>
@@ -2285,11 +2075,11 @@
         </p:spPr>
         <p:txBody>
           <a:bodyPr wrap="square" lIns="25400" tIns="25400" rIns="25400" bIns="25400" rtlCol="0" anchor="t">
-            <a:normAutofit/>
-          </a:bodyPr>
-          <a:lstStyle/>
-          <a:p>
-            <a:pPr algn="l" indent="0" marL="0">
+            <a:normAutofit fontScale="92500" lnSpcReduction="20000"/>
+          </a:bodyPr>
+          <a:lstStyle/>
+          <a:p>
+            <a:pPr marL="0" indent="0" algn="l">
               <a:lnSpc>
                 <a:spcPct val="100000"/>
               </a:lnSpc>
@@ -2329,11 +2119,11 @@
         </p:spPr>
         <p:txBody>
           <a:bodyPr wrap="square" lIns="25400" tIns="25400" rIns="25400" bIns="25400" rtlCol="0" anchor="t">
-            <a:normAutofit/>
-          </a:bodyPr>
-          <a:lstStyle/>
-          <a:p>
-            <a:pPr algn="l" indent="0" marL="0">
+            <a:normAutofit lnSpcReduction="10000"/>
+          </a:bodyPr>
+          <a:lstStyle/>
+          <a:p>
+            <a:pPr marL="0" indent="0" algn="l">
               <a:buNone/>
             </a:pPr>
             <a:r>
@@ -2370,11 +2160,11 @@
         </p:spPr>
         <p:txBody>
           <a:bodyPr wrap="square" lIns="25400" tIns="25400" rIns="25400" bIns="25400" rtlCol="0" anchor="t">
-            <a:normAutofit/>
-          </a:bodyPr>
-          <a:lstStyle/>
-          <a:p>
-            <a:pPr algn="l" indent="0" marL="0">
+            <a:normAutofit fontScale="92500" lnSpcReduction="20000"/>
+          </a:bodyPr>
+          <a:lstStyle/>
+          <a:p>
+            <a:pPr marL="0" indent="0" algn="l">
               <a:lnSpc>
                 <a:spcPct val="145000"/>
               </a:lnSpc>
@@ -2414,6 +2204,13 @@
           </a:solidFill>
           <a:ln/>
         </p:spPr>
+        <p:txBody>
+          <a:bodyPr/>
+          <a:lstStyle/>
+          <a:p>
+            <a:endParaRPr lang="en-GB"/>
+          </a:p>
+        </p:txBody>
       </p:sp>
       <p:sp>
         <p:nvSpPr>
@@ -2434,11 +2231,11 @@
         </p:spPr>
         <p:txBody>
           <a:bodyPr wrap="square" lIns="25400" tIns="25400" rIns="25400" bIns="25400" rtlCol="0" anchor="t">
-            <a:normAutofit/>
-          </a:bodyPr>
-          <a:lstStyle/>
-          <a:p>
-            <a:pPr algn="l" indent="0" marL="0">
+            <a:normAutofit fontScale="92500" lnSpcReduction="20000"/>
+          </a:bodyPr>
+          <a:lstStyle/>
+          <a:p>
+            <a:pPr marL="0" indent="0" algn="l">
               <a:lnSpc>
                 <a:spcPct val="100000"/>
               </a:lnSpc>
@@ -2478,11 +2275,11 @@
         </p:spPr>
         <p:txBody>
           <a:bodyPr wrap="square" lIns="25400" tIns="25400" rIns="25400" bIns="25400" rtlCol="0" anchor="t">
-            <a:normAutofit/>
-          </a:bodyPr>
-          <a:lstStyle/>
-          <a:p>
-            <a:pPr algn="l" indent="0" marL="0">
+            <a:normAutofit lnSpcReduction="10000"/>
+          </a:bodyPr>
+          <a:lstStyle/>
+          <a:p>
+            <a:pPr marL="0" indent="0" algn="l">
               <a:buNone/>
             </a:pPr>
             <a:r>
@@ -2519,11 +2316,11 @@
         </p:spPr>
         <p:txBody>
           <a:bodyPr wrap="square" lIns="25400" tIns="25400" rIns="25400" bIns="25400" rtlCol="0" anchor="t">
-            <a:normAutofit/>
-          </a:bodyPr>
-          <a:lstStyle/>
-          <a:p>
-            <a:pPr algn="l" indent="0" marL="0">
+            <a:normAutofit fontScale="92500" lnSpcReduction="20000"/>
+          </a:bodyPr>
+          <a:lstStyle/>
+          <a:p>
+            <a:pPr marL="0" indent="0" algn="l">
               <a:lnSpc>
                 <a:spcPct val="145000"/>
               </a:lnSpc>
@@ -2563,6 +2360,13 @@
           </a:solidFill>
           <a:ln/>
         </p:spPr>
+        <p:txBody>
+          <a:bodyPr/>
+          <a:lstStyle/>
+          <a:p>
+            <a:endParaRPr lang="en-GB"/>
+          </a:p>
+        </p:txBody>
       </p:sp>
       <p:sp>
         <p:nvSpPr>
@@ -2583,11 +2387,11 @@
         </p:spPr>
         <p:txBody>
           <a:bodyPr wrap="square" lIns="25400" tIns="25400" rIns="25400" bIns="25400" rtlCol="0" anchor="t">
-            <a:normAutofit/>
-          </a:bodyPr>
-          <a:lstStyle/>
-          <a:p>
-            <a:pPr algn="l" indent="0" marL="0">
+            <a:normAutofit fontScale="92500" lnSpcReduction="20000"/>
+          </a:bodyPr>
+          <a:lstStyle/>
+          <a:p>
+            <a:pPr marL="0" indent="0" algn="l">
               <a:lnSpc>
                 <a:spcPct val="100000"/>
               </a:lnSpc>
@@ -2627,11 +2431,11 @@
         </p:spPr>
         <p:txBody>
           <a:bodyPr wrap="square" lIns="25400" tIns="25400" rIns="25400" bIns="25400" rtlCol="0" anchor="t">
-            <a:normAutofit/>
-          </a:bodyPr>
-          <a:lstStyle/>
-          <a:p>
-            <a:pPr algn="l" indent="0" marL="0">
+            <a:normAutofit lnSpcReduction="10000"/>
+          </a:bodyPr>
+          <a:lstStyle/>
+          <a:p>
+            <a:pPr marL="0" indent="0" algn="l">
               <a:buNone/>
             </a:pPr>
             <a:r>
@@ -2668,11 +2472,11 @@
         </p:spPr>
         <p:txBody>
           <a:bodyPr wrap="square" lIns="25400" tIns="25400" rIns="25400" bIns="25400" rtlCol="0" anchor="t">
-            <a:normAutofit/>
-          </a:bodyPr>
-          <a:lstStyle/>
-          <a:p>
-            <a:pPr algn="l" indent="0" marL="0">
+            <a:normAutofit fontScale="92500" lnSpcReduction="20000"/>
+          </a:bodyPr>
+          <a:lstStyle/>
+          <a:p>
+            <a:pPr marL="0" indent="0" algn="l">
               <a:lnSpc>
                 <a:spcPct val="145000"/>
               </a:lnSpc>
@@ -2712,6 +2516,13 @@
           </a:solidFill>
           <a:ln/>
         </p:spPr>
+        <p:txBody>
+          <a:bodyPr/>
+          <a:lstStyle/>
+          <a:p>
+            <a:endParaRPr lang="en-GB"/>
+          </a:p>
+        </p:txBody>
       </p:sp>
       <p:sp>
         <p:nvSpPr>
@@ -2732,11 +2543,11 @@
         </p:spPr>
         <p:txBody>
           <a:bodyPr wrap="square" lIns="25400" tIns="25400" rIns="25400" bIns="25400" rtlCol="0" anchor="t">
-            <a:normAutofit/>
-          </a:bodyPr>
-          <a:lstStyle/>
-          <a:p>
-            <a:pPr algn="l" indent="0" marL="0">
+            <a:normAutofit fontScale="92500" lnSpcReduction="20000"/>
+          </a:bodyPr>
+          <a:lstStyle/>
+          <a:p>
+            <a:pPr marL="0" indent="0" algn="l">
               <a:lnSpc>
                 <a:spcPct val="100000"/>
               </a:lnSpc>
@@ -2776,11 +2587,11 @@
         </p:spPr>
         <p:txBody>
           <a:bodyPr wrap="square" lIns="25400" tIns="25400" rIns="25400" bIns="25400" rtlCol="0" anchor="t">
-            <a:normAutofit/>
-          </a:bodyPr>
-          <a:lstStyle/>
-          <a:p>
-            <a:pPr algn="l" indent="0" marL="0">
+            <a:normAutofit lnSpcReduction="10000"/>
+          </a:bodyPr>
+          <a:lstStyle/>
+          <a:p>
+            <a:pPr marL="0" indent="0" algn="l">
               <a:buNone/>
             </a:pPr>
             <a:r>
@@ -2821,7 +2632,7 @@
           </a:bodyPr>
           <a:lstStyle/>
           <a:p>
-            <a:pPr algn="l" indent="0" marL="0">
+            <a:pPr marL="0" indent="0" algn="l">
               <a:lnSpc>
                 <a:spcPct val="145000"/>
               </a:lnSpc>
@@ -2861,6 +2672,13 @@
           </a:solidFill>
           <a:ln/>
         </p:spPr>
+        <p:txBody>
+          <a:bodyPr/>
+          <a:lstStyle/>
+          <a:p>
+            <a:endParaRPr lang="en-GB"/>
+          </a:p>
+        </p:txBody>
       </p:sp>
       <p:sp>
         <p:nvSpPr>
@@ -2881,11 +2699,11 @@
         </p:spPr>
         <p:txBody>
           <a:bodyPr wrap="square" lIns="25400" tIns="25400" rIns="25400" bIns="25400" rtlCol="0" anchor="t">
-            <a:normAutofit/>
-          </a:bodyPr>
-          <a:lstStyle/>
-          <a:p>
-            <a:pPr algn="l" indent="0" marL="0">
+            <a:normAutofit fontScale="92500" lnSpcReduction="10000"/>
+          </a:bodyPr>
+          <a:lstStyle/>
+          <a:p>
+            <a:pPr marL="0" indent="0" algn="l">
               <a:buNone/>
             </a:pPr>
             <a:r>
@@ -2919,6 +2737,7 @@
         <a:solidFill>
           <a:srgbClr val="FFFFFF"/>
         </a:solidFill>
+        <a:effectLst/>
       </p:bgPr>
     </p:bg>
     <p:spTree>
@@ -2954,6 +2773,13 @@
           </a:solidFill>
           <a:ln/>
         </p:spPr>
+        <p:txBody>
+          <a:bodyPr/>
+          <a:lstStyle/>
+          <a:p>
+            <a:endParaRPr lang="en-GB"/>
+          </a:p>
+        </p:txBody>
       </p:sp>
       <p:sp>
         <p:nvSpPr>
@@ -2974,15 +2800,15 @@
         </p:spPr>
         <p:txBody>
           <a:bodyPr wrap="square" lIns="25400" tIns="25400" rIns="25400" bIns="25400" rtlCol="0" anchor="t">
-            <a:normAutofit/>
-          </a:bodyPr>
-          <a:lstStyle/>
-          <a:p>
-            <a:pPr algn="l" indent="0" marL="0">
-              <a:buNone/>
-            </a:pPr>
-            <a:r>
-              <a:rPr lang="en-US" sz="1800" spc="225" kern="0" dirty="0">
+            <a:normAutofit fontScale="92500" lnSpcReduction="10000"/>
+          </a:bodyPr>
+          <a:lstStyle/>
+          <a:p>
+            <a:pPr marL="0" indent="0" algn="l">
+              <a:buNone/>
+            </a:pPr>
+            <a:r>
+              <a:rPr lang="en-US" sz="1800" kern="0" spc="225" dirty="0">
                 <a:solidFill>
                   <a:srgbClr val="007A33"/>
                 </a:solidFill>
@@ -3015,18 +2841,18 @@
         </p:spPr>
         <p:txBody>
           <a:bodyPr wrap="square" lIns="25400" tIns="25400" rIns="25400" bIns="25400" rtlCol="0" anchor="t">
-            <a:normAutofit/>
-          </a:bodyPr>
-          <a:lstStyle/>
-          <a:p>
-            <a:pPr algn="l" indent="0" marL="0">
+            <a:normAutofit fontScale="92500" lnSpcReduction="10000"/>
+          </a:bodyPr>
+          <a:lstStyle/>
+          <a:p>
+            <a:pPr marL="0" indent="0" algn="l">
               <a:lnSpc>
                 <a:spcPct val="112000"/>
               </a:lnSpc>
               <a:buNone/>
             </a:pPr>
             <a:r>
-              <a:rPr lang="en-US" sz="3600" b="1" spc="-37" kern="0" dirty="0">
+              <a:rPr lang="en-US" sz="3600" b="1" kern="0" spc="-37" dirty="0">
                 <a:solidFill>
                   <a:srgbClr val="063D22"/>
                 </a:solidFill>
@@ -3061,6 +2887,13 @@
           </a:solidFill>
           <a:ln/>
         </p:spPr>
+        <p:txBody>
+          <a:bodyPr/>
+          <a:lstStyle/>
+          <a:p>
+            <a:endParaRPr lang="en-GB"/>
+          </a:p>
+        </p:txBody>
       </p:sp>
       <p:sp>
         <p:nvSpPr>
@@ -3081,11 +2914,11 @@
         </p:spPr>
         <p:txBody>
           <a:bodyPr wrap="square" lIns="25400" tIns="25400" rIns="25400" bIns="25400" rtlCol="0" anchor="t">
-            <a:normAutofit/>
-          </a:bodyPr>
-          <a:lstStyle/>
-          <a:p>
-            <a:pPr algn="l" indent="0" marL="0">
+            <a:normAutofit fontScale="92500" lnSpcReduction="10000"/>
+          </a:bodyPr>
+          <a:lstStyle/>
+          <a:p>
+            <a:pPr marL="0" indent="0" algn="l">
               <a:buNone/>
             </a:pPr>
             <a:r>
@@ -3122,11 +2955,11 @@
         </p:spPr>
         <p:txBody>
           <a:bodyPr wrap="square" lIns="25400" tIns="25400" rIns="25400" bIns="25400" rtlCol="0" anchor="t">
-            <a:normAutofit/>
-          </a:bodyPr>
-          <a:lstStyle/>
-          <a:p>
-            <a:pPr algn="l" indent="0" marL="0">
+            <a:normAutofit lnSpcReduction="10000"/>
+          </a:bodyPr>
+          <a:lstStyle/>
+          <a:p>
+            <a:pPr marL="0" indent="0" algn="l">
               <a:buNone/>
             </a:pPr>
             <a:r>
@@ -3163,11 +2996,11 @@
         </p:spPr>
         <p:txBody>
           <a:bodyPr wrap="square" lIns="25400" tIns="25400" rIns="25400" bIns="25400" rtlCol="0" anchor="t">
-            <a:normAutofit/>
-          </a:bodyPr>
-          <a:lstStyle/>
-          <a:p>
-            <a:pPr algn="l" indent="0" marL="0">
+            <a:normAutofit fontScale="92500" lnSpcReduction="20000"/>
+          </a:bodyPr>
+          <a:lstStyle/>
+          <a:p>
+            <a:pPr marL="0" indent="0" algn="l">
               <a:lnSpc>
                 <a:spcPct val="145000"/>
               </a:lnSpc>
@@ -3209,6 +3042,13 @@
           </a:solidFill>
           <a:ln/>
         </p:spPr>
+        <p:txBody>
+          <a:bodyPr/>
+          <a:lstStyle/>
+          <a:p>
+            <a:endParaRPr lang="en-GB"/>
+          </a:p>
+        </p:txBody>
       </p:sp>
       <p:sp>
         <p:nvSpPr>
@@ -3229,11 +3069,11 @@
         </p:spPr>
         <p:txBody>
           <a:bodyPr wrap="square" lIns="25400" tIns="25400" rIns="25400" bIns="25400" rtlCol="0" anchor="t">
-            <a:normAutofit/>
-          </a:bodyPr>
-          <a:lstStyle/>
-          <a:p>
-            <a:pPr algn="l" indent="0" marL="0">
+            <a:normAutofit fontScale="92500" lnSpcReduction="10000"/>
+          </a:bodyPr>
+          <a:lstStyle/>
+          <a:p>
+            <a:pPr marL="0" indent="0" algn="l">
               <a:buNone/>
             </a:pPr>
             <a:r>
@@ -3270,11 +3110,11 @@
         </p:spPr>
         <p:txBody>
           <a:bodyPr wrap="square" lIns="25400" tIns="25400" rIns="25400" bIns="25400" rtlCol="0" anchor="t">
-            <a:normAutofit/>
-          </a:bodyPr>
-          <a:lstStyle/>
-          <a:p>
-            <a:pPr algn="l" indent="0" marL="0">
+            <a:normAutofit lnSpcReduction="10000"/>
+          </a:bodyPr>
+          <a:lstStyle/>
+          <a:p>
+            <a:pPr marL="0" indent="0" algn="l">
               <a:buNone/>
             </a:pPr>
             <a:r>
@@ -3311,11 +3151,11 @@
         </p:spPr>
         <p:txBody>
           <a:bodyPr wrap="square" lIns="25400" tIns="25400" rIns="25400" bIns="25400" rtlCol="0" anchor="t">
-            <a:normAutofit/>
-          </a:bodyPr>
-          <a:lstStyle/>
-          <a:p>
-            <a:pPr algn="l" indent="0" marL="0">
+            <a:normAutofit fontScale="92500" lnSpcReduction="20000"/>
+          </a:bodyPr>
+          <a:lstStyle/>
+          <a:p>
+            <a:pPr marL="0" indent="0" algn="l">
               <a:lnSpc>
                 <a:spcPct val="145000"/>
               </a:lnSpc>
@@ -3357,6 +3197,13 @@
           </a:solidFill>
           <a:ln/>
         </p:spPr>
+        <p:txBody>
+          <a:bodyPr/>
+          <a:lstStyle/>
+          <a:p>
+            <a:endParaRPr lang="en-GB"/>
+          </a:p>
+        </p:txBody>
       </p:sp>
       <p:sp>
         <p:nvSpPr>
@@ -3377,11 +3224,11 @@
         </p:spPr>
         <p:txBody>
           <a:bodyPr wrap="square" lIns="25400" tIns="25400" rIns="25400" bIns="25400" rtlCol="0" anchor="t">
-            <a:normAutofit/>
-          </a:bodyPr>
-          <a:lstStyle/>
-          <a:p>
-            <a:pPr algn="l" indent="0" marL="0">
+            <a:normAutofit fontScale="92500" lnSpcReduction="10000"/>
+          </a:bodyPr>
+          <a:lstStyle/>
+          <a:p>
+            <a:pPr marL="0" indent="0" algn="l">
               <a:buNone/>
             </a:pPr>
             <a:r>
@@ -3418,11 +3265,11 @@
         </p:spPr>
         <p:txBody>
           <a:bodyPr wrap="square" lIns="25400" tIns="25400" rIns="25400" bIns="25400" rtlCol="0" anchor="t">
-            <a:normAutofit/>
-          </a:bodyPr>
-          <a:lstStyle/>
-          <a:p>
-            <a:pPr algn="l" indent="0" marL="0">
+            <a:normAutofit lnSpcReduction="10000"/>
+          </a:bodyPr>
+          <a:lstStyle/>
+          <a:p>
+            <a:pPr marL="0" indent="0" algn="l">
               <a:buNone/>
             </a:pPr>
             <a:r>
@@ -3459,11 +3306,11 @@
         </p:spPr>
         <p:txBody>
           <a:bodyPr wrap="square" lIns="25400" tIns="25400" rIns="25400" bIns="25400" rtlCol="0" anchor="t">
-            <a:normAutofit/>
-          </a:bodyPr>
-          <a:lstStyle/>
-          <a:p>
-            <a:pPr algn="l" indent="0" marL="0">
+            <a:normAutofit fontScale="92500" lnSpcReduction="20000"/>
+          </a:bodyPr>
+          <a:lstStyle/>
+          <a:p>
+            <a:pPr marL="0" indent="0" algn="l">
               <a:lnSpc>
                 <a:spcPct val="145000"/>
               </a:lnSpc>
@@ -3505,6 +3352,13 @@
           </a:solidFill>
           <a:ln/>
         </p:spPr>
+        <p:txBody>
+          <a:bodyPr/>
+          <a:lstStyle/>
+          <a:p>
+            <a:endParaRPr lang="en-GB"/>
+          </a:p>
+        </p:txBody>
       </p:sp>
       <p:sp>
         <p:nvSpPr>
@@ -3525,11 +3379,11 @@
         </p:spPr>
         <p:txBody>
           <a:bodyPr wrap="square" lIns="25400" tIns="25400" rIns="25400" bIns="25400" rtlCol="0" anchor="t">
-            <a:normAutofit/>
-          </a:bodyPr>
-          <a:lstStyle/>
-          <a:p>
-            <a:pPr algn="l" indent="0" marL="0">
+            <a:normAutofit fontScale="92500" lnSpcReduction="10000"/>
+          </a:bodyPr>
+          <a:lstStyle/>
+          <a:p>
+            <a:pPr marL="0" indent="0" algn="l">
               <a:buNone/>
             </a:pPr>
             <a:r>
@@ -3566,11 +3420,11 @@
         </p:spPr>
         <p:txBody>
           <a:bodyPr wrap="square" lIns="25400" tIns="25400" rIns="25400" bIns="25400" rtlCol="0" anchor="t">
-            <a:normAutofit/>
-          </a:bodyPr>
-          <a:lstStyle/>
-          <a:p>
-            <a:pPr algn="l" indent="0" marL="0">
+            <a:normAutofit lnSpcReduction="10000"/>
+          </a:bodyPr>
+          <a:lstStyle/>
+          <a:p>
+            <a:pPr marL="0" indent="0" algn="l">
               <a:buNone/>
             </a:pPr>
             <a:r>
@@ -3607,11 +3461,11 @@
         </p:spPr>
         <p:txBody>
           <a:bodyPr wrap="square" lIns="25400" tIns="25400" rIns="25400" bIns="25400" rtlCol="0" anchor="t">
-            <a:normAutofit/>
-          </a:bodyPr>
-          <a:lstStyle/>
-          <a:p>
-            <a:pPr algn="l" indent="0" marL="0">
+            <a:normAutofit fontScale="92500" lnSpcReduction="20000"/>
+          </a:bodyPr>
+          <a:lstStyle/>
+          <a:p>
+            <a:pPr marL="0" indent="0" algn="l">
               <a:lnSpc>
                 <a:spcPct val="145000"/>
               </a:lnSpc>
@@ -3651,6 +3505,13 @@
           </a:solidFill>
           <a:ln/>
         </p:spPr>
+        <p:txBody>
+          <a:bodyPr/>
+          <a:lstStyle/>
+          <a:p>
+            <a:endParaRPr lang="en-GB"/>
+          </a:p>
+        </p:txBody>
       </p:sp>
       <p:sp>
         <p:nvSpPr>
@@ -3671,11 +3532,11 @@
         </p:spPr>
         <p:txBody>
           <a:bodyPr wrap="square" lIns="25400" tIns="25400" rIns="25400" bIns="25400" rtlCol="0" anchor="t">
-            <a:normAutofit/>
-          </a:bodyPr>
-          <a:lstStyle/>
-          <a:p>
-            <a:pPr algn="l" indent="0" marL="0">
+            <a:normAutofit fontScale="92500" lnSpcReduction="10000"/>
+          </a:bodyPr>
+          <a:lstStyle/>
+          <a:p>
+            <a:pPr marL="0" indent="0" algn="l">
               <a:buNone/>
             </a:pPr>
             <a:r>
@@ -3702,7 +3563,7 @@
 </file>
 
 <file path=ppt/slides/slide12.xml><?xml version="1.0" encoding="utf-8"?>
-<p:sld xmlns:a="http://schemas.openxmlformats.org/drawingml/2006/main" xmlns:p="http://schemas.openxmlformats.org/presentationml/2006/main" xmlns:r="http://schemas.openxmlformats.org/officeDocument/2006/relationships">
+<p:sld xmlns:a="http://schemas.openxmlformats.org/drawingml/2006/main" xmlns:r="http://schemas.openxmlformats.org/officeDocument/2006/relationships" xmlns:p="http://schemas.openxmlformats.org/presentationml/2006/main">
   <p:cSld>
     <p:spTree>
       <p:nvGrpSpPr>
@@ -3710,7 +3571,14 @@
         <p:cNvGrpSpPr/>
         <p:nvPr/>
       </p:nvGrpSpPr>
-      <p:grpSpPr/>
+      <p:grpSpPr>
+        <a:xfrm>
+          <a:off x="0" y="0"/>
+          <a:ext cx="0" cy="0"/>
+          <a:chOff x="0" y="0"/>
+          <a:chExt cx="0" cy="0"/>
+        </a:xfrm>
+      </p:grpSpPr>
       <p:sp>
         <p:nvSpPr>
           <p:cNvPr id="2" name="Shape 0"/>
@@ -3732,8 +3600,10 @@
         </p:spPr>
         <p:txBody>
           <a:bodyPr/>
+          <a:lstStyle/>
           <a:p>
             <a:pPr algn="l"/>
+            <a:endParaRPr/>
           </a:p>
         </p:txBody>
       </p:sp>
@@ -3756,15 +3626,15 @@
         </p:spPr>
         <p:txBody>
           <a:bodyPr wrap="square" lIns="25400" tIns="25400" rIns="25400" bIns="25400" rtlCol="0" anchor="t">
-            <a:normAutofit/>
-          </a:bodyPr>
-          <a:lstStyle/>
-          <a:p>
-            <a:pPr algn="l" indent="0" marL="0">
-              <a:buNone/>
-            </a:pPr>
-            <a:r>
-              <a:rPr lang="en-US" sz="1800" spc="225" kern="0" dirty="0">
+            <a:normAutofit fontScale="92500" lnSpcReduction="10000"/>
+          </a:bodyPr>
+          <a:lstStyle/>
+          <a:p>
+            <a:pPr marL="0" indent="0" algn="l">
+              <a:buNone/>
+            </a:pPr>
+            <a:r>
+              <a:rPr lang="en-US" sz="1800" kern="0" spc="225" dirty="0">
                 <a:solidFill>
                   <a:srgbClr val="007A33"/>
                 </a:solidFill>
@@ -3797,18 +3667,18 @@
         </p:spPr>
         <p:txBody>
           <a:bodyPr wrap="square" lIns="25400" tIns="25400" rIns="25400" bIns="25400" rtlCol="0" anchor="t">
-            <a:normAutofit/>
-          </a:bodyPr>
-          <a:lstStyle/>
-          <a:p>
-            <a:pPr algn="l" indent="0" marL="0">
+            <a:normAutofit fontScale="92500" lnSpcReduction="10000"/>
+          </a:bodyPr>
+          <a:lstStyle/>
+          <a:p>
+            <a:pPr marL="0" indent="0" algn="l">
               <a:lnSpc>
                 <a:spcPct val="112000"/>
               </a:lnSpc>
               <a:buNone/>
             </a:pPr>
             <a:r>
-              <a:rPr lang="en-US" sz="3600" b="1" spc="-37" kern="0" dirty="0">
+              <a:rPr lang="en-US" sz="3600" b="1" kern="0" spc="-37" dirty="0">
                 <a:solidFill>
                   <a:srgbClr val="063D22"/>
                 </a:solidFill>
@@ -3843,8 +3713,10 @@
         </p:spPr>
         <p:txBody>
           <a:bodyPr/>
+          <a:lstStyle/>
           <a:p>
             <a:pPr algn="l"/>
+            <a:endParaRPr/>
           </a:p>
         </p:txBody>
       </p:sp>
@@ -3867,11 +3739,11 @@
         </p:spPr>
         <p:txBody>
           <a:bodyPr wrap="square" lIns="25400" tIns="25400" rIns="25400" bIns="25400" rtlCol="0" anchor="t">
-            <a:normAutofit/>
-          </a:bodyPr>
-          <a:lstStyle/>
-          <a:p>
-            <a:pPr algn="l" indent="0" marL="0">
+            <a:normAutofit fontScale="92500" lnSpcReduction="10000"/>
+          </a:bodyPr>
+          <a:lstStyle/>
+          <a:p>
+            <a:pPr marL="0" indent="0" algn="l">
               <a:buNone/>
             </a:pPr>
             <a:r>
@@ -3960,7 +3832,7 @@
           </a:fontRef>
         </p:style>
         <p:txBody>
-          <a:bodyPr rtlCol="0" anchor="ctr" wrap="square" lIns="228600" rIns="137160" tIns="137160" bIns="109728"/>
+          <a:bodyPr wrap="square" lIns="228600" tIns="137160" rIns="137160" bIns="109728" rtlCol="0" anchor="ctr"/>
           <a:lstStyle/>
           <a:p>
             <a:pPr algn="l">
@@ -4135,7 +4007,7 @@
           </a:fontRef>
         </p:style>
         <p:txBody>
-          <a:bodyPr rtlCol="0" anchor="ctr" wrap="square" lIns="228600" rIns="137160" tIns="137160" bIns="109728"/>
+          <a:bodyPr wrap="square" lIns="228600" tIns="137160" rIns="137160" bIns="109728" rtlCol="0" anchor="ctr"/>
           <a:lstStyle/>
           <a:p>
             <a:pPr algn="l">
@@ -4319,7 +4191,7 @@
           </a:fontRef>
         </p:style>
         <p:txBody>
-          <a:bodyPr rtlCol="0" anchor="ctr" wrap="square" lIns="228600" rIns="137160" tIns="137160" bIns="109728"/>
+          <a:bodyPr wrap="square" lIns="228600" tIns="137160" rIns="137160" bIns="109728" rtlCol="0" anchor="ctr"/>
           <a:lstStyle/>
           <a:p>
             <a:pPr algn="l">
@@ -4423,6 +4295,7 @@
         <a:solidFill>
           <a:srgbClr val="1A7A57"/>
         </a:solidFill>
+        <a:effectLst/>
       </p:bgPr>
     </p:bg>
     <p:spTree>
@@ -4458,15 +4331,15 @@
         </p:spPr>
         <p:txBody>
           <a:bodyPr wrap="square" lIns="25400" tIns="25400" rIns="25400" bIns="25400" rtlCol="0" anchor="t">
-            <a:normAutofit/>
-          </a:bodyPr>
-          <a:lstStyle/>
-          <a:p>
-            <a:pPr algn="l" indent="0" marL="0">
-              <a:buNone/>
-            </a:pPr>
-            <a:r>
-              <a:rPr lang="en-US" sz="1800" spc="225" kern="0" dirty="0">
+            <a:normAutofit fontScale="92500" lnSpcReduction="10000"/>
+          </a:bodyPr>
+          <a:lstStyle/>
+          <a:p>
+            <a:pPr marL="0" indent="0" algn="l">
+              <a:buNone/>
+            </a:pPr>
+            <a:r>
+              <a:rPr lang="en-US" sz="1800" kern="0" spc="225" dirty="0">
                 <a:solidFill>
                   <a:srgbClr val="B2E0D4"/>
                 </a:solidFill>
@@ -4499,11 +4372,11 @@
         </p:spPr>
         <p:txBody>
           <a:bodyPr wrap="square" lIns="25400" tIns="25400" rIns="25400" bIns="25400" rtlCol="0" anchor="t">
-            <a:normAutofit/>
-          </a:bodyPr>
-          <a:lstStyle/>
-          <a:p>
-            <a:pPr algn="l" indent="0" marL="0">
+            <a:normAutofit fontScale="92500" lnSpcReduction="20000"/>
+          </a:bodyPr>
+          <a:lstStyle/>
+          <a:p>
+            <a:pPr marL="0" indent="0" algn="l">
               <a:lnSpc>
                 <a:spcPct val="100000"/>
               </a:lnSpc>
@@ -4543,11 +4416,11 @@
         </p:spPr>
         <p:txBody>
           <a:bodyPr wrap="square" lIns="25400" tIns="25400" rIns="25400" bIns="25400" rtlCol="0" anchor="t">
-            <a:normAutofit/>
-          </a:bodyPr>
-          <a:lstStyle/>
-          <a:p>
-            <a:pPr algn="l" indent="0" marL="0">
+            <a:normAutofit lnSpcReduction="10000"/>
+          </a:bodyPr>
+          <a:lstStyle/>
+          <a:p>
+            <a:pPr marL="0" indent="0" algn="l">
               <a:buNone/>
             </a:pPr>
             <a:r>
@@ -4586,7 +4459,10 @@
         </p:spPr>
         <p:txBody>
           <a:bodyPr/>
-          <a:p/>
+          <a:lstStyle/>
+          <a:p>
+            <a:endParaRPr/>
+          </a:p>
         </p:txBody>
       </p:sp>
       <p:sp>
@@ -4608,11 +4484,11 @@
         </p:spPr>
         <p:txBody>
           <a:bodyPr wrap="square" lIns="25400" tIns="25400" rIns="25400" bIns="25400" rtlCol="0" anchor="t">
-            <a:normAutofit/>
-          </a:bodyPr>
-          <a:lstStyle/>
-          <a:p>
-            <a:pPr algn="l" indent="0" marL="0">
+            <a:normAutofit lnSpcReduction="10000"/>
+          </a:bodyPr>
+          <a:lstStyle/>
+          <a:p>
+            <a:pPr marL="0" indent="0" algn="l">
               <a:buNone/>
             </a:pPr>
             <a:r>
@@ -4653,7 +4529,7 @@
           </a:bodyPr>
           <a:lstStyle/>
           <a:p>
-            <a:pPr algn="l" indent="0" marL="0">
+            <a:pPr marL="0" indent="0" algn="l">
               <a:lnSpc>
                 <a:spcPct val="140000"/>
               </a:lnSpc>
@@ -4695,7 +4571,10 @@
         </p:spPr>
         <p:txBody>
           <a:bodyPr/>
-          <a:p/>
+          <a:lstStyle/>
+          <a:p>
+            <a:endParaRPr/>
+          </a:p>
         </p:txBody>
       </p:sp>
       <p:sp>
@@ -4717,11 +4596,11 @@
         </p:spPr>
         <p:txBody>
           <a:bodyPr wrap="square" lIns="25400" tIns="25400" rIns="25400" bIns="25400" rtlCol="0" anchor="t">
-            <a:normAutofit/>
-          </a:bodyPr>
-          <a:lstStyle/>
-          <a:p>
-            <a:pPr algn="l" indent="0" marL="0">
+            <a:normAutofit lnSpcReduction="10000"/>
+          </a:bodyPr>
+          <a:lstStyle/>
+          <a:p>
+            <a:pPr marL="0" indent="0" algn="l">
               <a:buNone/>
             </a:pPr>
             <a:r>
@@ -4758,11 +4637,11 @@
         </p:spPr>
         <p:txBody>
           <a:bodyPr wrap="square" lIns="25400" tIns="25400" rIns="25400" bIns="25400" rtlCol="0" anchor="t">
-            <a:normAutofit/>
-          </a:bodyPr>
-          <a:lstStyle/>
-          <a:p>
-            <a:pPr algn="l" indent="0" marL="0">
+            <a:normAutofit fontScale="92500" lnSpcReduction="10000"/>
+          </a:bodyPr>
+          <a:lstStyle/>
+          <a:p>
+            <a:pPr marL="0" indent="0" algn="l">
               <a:lnSpc>
                 <a:spcPct val="140000"/>
               </a:lnSpc>
@@ -4804,7 +4683,10 @@
         </p:spPr>
         <p:txBody>
           <a:bodyPr/>
-          <a:p/>
+          <a:lstStyle/>
+          <a:p>
+            <a:endParaRPr/>
+          </a:p>
         </p:txBody>
       </p:sp>
       <p:sp>
@@ -4826,11 +4708,11 @@
         </p:spPr>
         <p:txBody>
           <a:bodyPr wrap="square" lIns="25400" tIns="25400" rIns="25400" bIns="25400" rtlCol="0" anchor="t">
-            <a:normAutofit/>
-          </a:bodyPr>
-          <a:lstStyle/>
-          <a:p>
-            <a:pPr algn="l" indent="0" marL="0">
+            <a:normAutofit lnSpcReduction="10000"/>
+          </a:bodyPr>
+          <a:lstStyle/>
+          <a:p>
+            <a:pPr marL="0" indent="0" algn="l">
               <a:buNone/>
             </a:pPr>
             <a:r>
@@ -4867,11 +4749,11 @@
         </p:spPr>
         <p:txBody>
           <a:bodyPr wrap="square" lIns="25400" tIns="25400" rIns="25400" bIns="25400" rtlCol="0" anchor="t">
-            <a:normAutofit/>
-          </a:bodyPr>
-          <a:lstStyle/>
-          <a:p>
-            <a:pPr algn="l" indent="0" marL="0">
+            <a:normAutofit fontScale="92500" lnSpcReduction="10000"/>
+          </a:bodyPr>
+          <a:lstStyle/>
+          <a:p>
+            <a:pPr marL="0" indent="0" algn="l">
               <a:lnSpc>
                 <a:spcPct val="140000"/>
               </a:lnSpc>
@@ -4915,7 +4797,10 @@
         </p:spPr>
         <p:txBody>
           <a:bodyPr/>
-          <a:p/>
+          <a:lstStyle/>
+          <a:p>
+            <a:endParaRPr/>
+          </a:p>
         </p:txBody>
       </p:sp>
       <p:sp>
@@ -4937,11 +4822,11 @@
         </p:spPr>
         <p:txBody>
           <a:bodyPr wrap="square" lIns="25400" tIns="25400" rIns="25400" bIns="25400" rtlCol="0" anchor="t">
-            <a:normAutofit/>
-          </a:bodyPr>
-          <a:lstStyle/>
-          <a:p>
-            <a:pPr algn="l" indent="0" marL="0">
+            <a:normAutofit lnSpcReduction="10000"/>
+          </a:bodyPr>
+          <a:lstStyle/>
+          <a:p>
+            <a:pPr marL="0" indent="0" algn="l">
               <a:buNone/>
             </a:pPr>
             <a:r>
@@ -4978,11 +4863,11 @@
         </p:spPr>
         <p:txBody>
           <a:bodyPr wrap="square" lIns="25400" tIns="25400" rIns="25400" bIns="25400" rtlCol="0" anchor="t">
-            <a:normAutofit/>
-          </a:bodyPr>
-          <a:lstStyle/>
-          <a:p>
-            <a:pPr algn="l" indent="0" marL="0">
+            <a:normAutofit fontScale="92500" lnSpcReduction="10000"/>
+          </a:bodyPr>
+          <a:lstStyle/>
+          <a:p>
+            <a:pPr marL="0" indent="0" algn="l">
               <a:buNone/>
             </a:pPr>
             <a:r>
@@ -5016,6 +4901,7 @@
         <a:solidFill>
           <a:srgbClr val="FFFFFF"/>
         </a:solidFill>
+        <a:effectLst/>
       </p:bgPr>
     </p:bg>
     <p:spTree>
@@ -5051,6 +4937,13 @@
           </a:solidFill>
           <a:ln/>
         </p:spPr>
+        <p:txBody>
+          <a:bodyPr/>
+          <a:lstStyle/>
+          <a:p>
+            <a:endParaRPr lang="en-GB"/>
+          </a:p>
+        </p:txBody>
       </p:sp>
       <p:sp>
         <p:nvSpPr>
@@ -5071,15 +4964,15 @@
         </p:spPr>
         <p:txBody>
           <a:bodyPr wrap="square" lIns="25400" tIns="25400" rIns="25400" bIns="25400" rtlCol="0" anchor="t">
-            <a:normAutofit/>
-          </a:bodyPr>
-          <a:lstStyle/>
-          <a:p>
-            <a:pPr algn="l" indent="0" marL="0">
-              <a:buNone/>
-            </a:pPr>
-            <a:r>
-              <a:rPr lang="en-US" sz="1800" spc="225" kern="0" dirty="0">
+            <a:normAutofit fontScale="92500" lnSpcReduction="10000"/>
+          </a:bodyPr>
+          <a:lstStyle/>
+          <a:p>
+            <a:pPr marL="0" indent="0" algn="l">
+              <a:buNone/>
+            </a:pPr>
+            <a:r>
+              <a:rPr lang="en-US" sz="1800" kern="0" spc="225" dirty="0">
                 <a:solidFill>
                   <a:srgbClr val="007A33"/>
                 </a:solidFill>
@@ -5112,18 +5005,18 @@
         </p:spPr>
         <p:txBody>
           <a:bodyPr wrap="square" lIns="25400" tIns="25400" rIns="25400" bIns="25400" rtlCol="0" anchor="t">
-            <a:normAutofit/>
-          </a:bodyPr>
-          <a:lstStyle/>
-          <a:p>
-            <a:pPr algn="l" indent="0" marL="0">
+            <a:normAutofit fontScale="92500" lnSpcReduction="10000"/>
+          </a:bodyPr>
+          <a:lstStyle/>
+          <a:p>
+            <a:pPr marL="0" indent="0" algn="l">
               <a:lnSpc>
                 <a:spcPct val="112000"/>
               </a:lnSpc>
               <a:buNone/>
             </a:pPr>
             <a:r>
-              <a:rPr lang="en-US" sz="3600" b="1" spc="-37" kern="0" dirty="0">
+              <a:rPr lang="en-US" sz="3600" b="1" kern="0" spc="-37" dirty="0">
                 <a:solidFill>
                   <a:srgbClr val="063D22"/>
                 </a:solidFill>
@@ -5156,11 +5049,11 @@
         </p:spPr>
         <p:txBody>
           <a:bodyPr wrap="square" lIns="25400" tIns="25400" rIns="25400" bIns="25400" rtlCol="0" anchor="t">
-            <a:normAutofit/>
-          </a:bodyPr>
-          <a:lstStyle/>
-          <a:p>
-            <a:pPr algn="ctr" indent="0" marL="0">
+            <a:normAutofit fontScale="92500" lnSpcReduction="10000"/>
+          </a:bodyPr>
+          <a:lstStyle/>
+          <a:p>
+            <a:pPr marL="0" indent="0" algn="ctr">
               <a:buNone/>
             </a:pPr>
             <a:r>
@@ -5197,11 +5090,11 @@
         </p:spPr>
         <p:txBody>
           <a:bodyPr wrap="square" lIns="25400" tIns="25400" rIns="25400" bIns="25400" rtlCol="0" anchor="t">
-            <a:normAutofit/>
-          </a:bodyPr>
-          <a:lstStyle/>
-          <a:p>
-            <a:pPr algn="ctr" indent="0" marL="0">
+            <a:normAutofit fontScale="92500" lnSpcReduction="10000"/>
+          </a:bodyPr>
+          <a:lstStyle/>
+          <a:p>
+            <a:pPr marL="0" indent="0" algn="ctr">
               <a:buNone/>
             </a:pPr>
             <a:r>
@@ -5242,7 +5135,7 @@
           </a:bodyPr>
           <a:lstStyle/>
           <a:p>
-            <a:pPr algn="r" indent="0" marL="0">
+            <a:pPr marL="0" indent="0" algn="r">
               <a:buNone/>
             </a:pPr>
             <a:r>
@@ -5286,6 +5179,13 @@
             <a:prstDash val="solid"/>
           </a:ln>
         </p:spPr>
+        <p:txBody>
+          <a:bodyPr/>
+          <a:lstStyle/>
+          <a:p>
+            <a:endParaRPr lang="en-GB"/>
+          </a:p>
+        </p:txBody>
       </p:sp>
       <p:sp>
         <p:nvSpPr>
@@ -5306,11 +5206,11 @@
         </p:spPr>
         <p:txBody>
           <a:bodyPr wrap="square" lIns="25400" tIns="25400" rIns="25400" bIns="25400" rtlCol="0" anchor="t">
-            <a:normAutofit/>
-          </a:bodyPr>
-          <a:lstStyle/>
-          <a:p>
-            <a:pPr algn="l" indent="0" marL="0">
+            <a:normAutofit lnSpcReduction="10000"/>
+          </a:bodyPr>
+          <a:lstStyle/>
+          <a:p>
+            <a:pPr marL="0" indent="0" algn="l">
               <a:buNone/>
             </a:pPr>
             <a:r>
@@ -5347,11 +5247,11 @@
         </p:spPr>
         <p:txBody>
           <a:bodyPr wrap="square" lIns="25400" tIns="25400" rIns="25400" bIns="25400" rtlCol="0" anchor="t">
-            <a:normAutofit/>
-          </a:bodyPr>
-          <a:lstStyle/>
-          <a:p>
-            <a:pPr algn="l" indent="0" marL="0">
+            <a:normAutofit lnSpcReduction="10000"/>
+          </a:bodyPr>
+          <a:lstStyle/>
+          <a:p>
+            <a:pPr marL="0" indent="0" algn="l">
               <a:buNone/>
             </a:pPr>
             <a:r>
@@ -5395,6 +5295,13 @@
             <a:prstDash val="solid"/>
           </a:ln>
         </p:spPr>
+        <p:txBody>
+          <a:bodyPr/>
+          <a:lstStyle/>
+          <a:p>
+            <a:endParaRPr lang="en-GB"/>
+          </a:p>
+        </p:txBody>
       </p:sp>
       <p:sp>
         <p:nvSpPr>
@@ -5415,11 +5322,11 @@
         </p:spPr>
         <p:txBody>
           <a:bodyPr wrap="square" lIns="25400" tIns="25400" rIns="25400" bIns="25400" rtlCol="0" anchor="t">
-            <a:normAutofit/>
-          </a:bodyPr>
-          <a:lstStyle/>
-          <a:p>
-            <a:pPr algn="l" indent="0" marL="0">
+            <a:normAutofit lnSpcReduction="10000"/>
+          </a:bodyPr>
+          <a:lstStyle/>
+          <a:p>
+            <a:pPr marL="0" indent="0" algn="l">
               <a:buNone/>
             </a:pPr>
             <a:r>
@@ -5456,11 +5363,11 @@
         </p:spPr>
         <p:txBody>
           <a:bodyPr wrap="square" lIns="25400" tIns="25400" rIns="25400" bIns="25400" rtlCol="0" anchor="t">
-            <a:normAutofit/>
-          </a:bodyPr>
-          <a:lstStyle/>
-          <a:p>
-            <a:pPr algn="l" indent="0" marL="0">
+            <a:normAutofit lnSpcReduction="10000"/>
+          </a:bodyPr>
+          <a:lstStyle/>
+          <a:p>
+            <a:pPr marL="0" indent="0" algn="l">
               <a:buNone/>
             </a:pPr>
             <a:r>
@@ -5501,7 +5408,7 @@
           </a:bodyPr>
           <a:lstStyle/>
           <a:p>
-            <a:pPr algn="r" indent="0" marL="0">
+            <a:pPr marL="0" indent="0" algn="r">
               <a:buNone/>
             </a:pPr>
             <a:r>
@@ -5545,6 +5452,13 @@
             <a:prstDash val="solid"/>
           </a:ln>
         </p:spPr>
+        <p:txBody>
+          <a:bodyPr/>
+          <a:lstStyle/>
+          <a:p>
+            <a:endParaRPr lang="en-GB"/>
+          </a:p>
+        </p:txBody>
       </p:sp>
       <p:sp>
         <p:nvSpPr>
@@ -5565,11 +5479,11 @@
         </p:spPr>
         <p:txBody>
           <a:bodyPr wrap="square" lIns="25400" tIns="25400" rIns="25400" bIns="25400" rtlCol="0" anchor="t">
-            <a:normAutofit/>
-          </a:bodyPr>
-          <a:lstStyle/>
-          <a:p>
-            <a:pPr algn="l" indent="0" marL="0">
+            <a:normAutofit lnSpcReduction="10000"/>
+          </a:bodyPr>
+          <a:lstStyle/>
+          <a:p>
+            <a:pPr marL="0" indent="0" algn="l">
               <a:buNone/>
             </a:pPr>
             <a:r>
@@ -5606,11 +5520,11 @@
         </p:spPr>
         <p:txBody>
           <a:bodyPr wrap="square" lIns="25400" tIns="25400" rIns="25400" bIns="25400" rtlCol="0" anchor="t">
-            <a:normAutofit/>
-          </a:bodyPr>
-          <a:lstStyle/>
-          <a:p>
-            <a:pPr algn="l" indent="0" marL="0">
+            <a:normAutofit lnSpcReduction="10000"/>
+          </a:bodyPr>
+          <a:lstStyle/>
+          <a:p>
+            <a:pPr marL="0" indent="0" algn="l">
               <a:buNone/>
             </a:pPr>
             <a:r>
@@ -5654,6 +5568,13 @@
             <a:prstDash val="solid"/>
           </a:ln>
         </p:spPr>
+        <p:txBody>
+          <a:bodyPr/>
+          <a:lstStyle/>
+          <a:p>
+            <a:endParaRPr lang="en-GB"/>
+          </a:p>
+        </p:txBody>
       </p:sp>
       <p:sp>
         <p:nvSpPr>
@@ -5674,11 +5595,11 @@
         </p:spPr>
         <p:txBody>
           <a:bodyPr wrap="square" lIns="25400" tIns="25400" rIns="25400" bIns="25400" rtlCol="0" anchor="t">
-            <a:normAutofit/>
-          </a:bodyPr>
-          <a:lstStyle/>
-          <a:p>
-            <a:pPr algn="l" indent="0" marL="0">
+            <a:normAutofit lnSpcReduction="10000"/>
+          </a:bodyPr>
+          <a:lstStyle/>
+          <a:p>
+            <a:pPr marL="0" indent="0" algn="l">
               <a:buNone/>
             </a:pPr>
             <a:r>
@@ -5715,11 +5636,11 @@
         </p:spPr>
         <p:txBody>
           <a:bodyPr wrap="square" lIns="25400" tIns="25400" rIns="25400" bIns="25400" rtlCol="0" anchor="t">
-            <a:normAutofit/>
-          </a:bodyPr>
-          <a:lstStyle/>
-          <a:p>
-            <a:pPr algn="l" indent="0" marL="0">
+            <a:normAutofit lnSpcReduction="10000"/>
+          </a:bodyPr>
+          <a:lstStyle/>
+          <a:p>
+            <a:pPr marL="0" indent="0" algn="l">
               <a:buNone/>
             </a:pPr>
             <a:r>
@@ -5756,11 +5677,11 @@
         </p:spPr>
         <p:txBody>
           <a:bodyPr wrap="square" lIns="25400" tIns="25400" rIns="25400" bIns="25400" rtlCol="0" anchor="t">
-            <a:normAutofit/>
-          </a:bodyPr>
-          <a:lstStyle/>
-          <a:p>
-            <a:pPr algn="l" indent="0" marL="0">
+            <a:normAutofit fontScale="92500" lnSpcReduction="20000"/>
+          </a:bodyPr>
+          <a:lstStyle/>
+          <a:p>
+            <a:pPr marL="0" indent="0" algn="l">
               <a:lnSpc>
                 <a:spcPct val="145000"/>
               </a:lnSpc>
@@ -5777,82 +5698,70 @@
               </a:rPr>
               <a:t>Our model has one job: </a:t>
             </a:r>
-            <a:pPr algn="l" indent="0" marL="0">
+            <a:r>
+              <a:rPr lang="en-US" sz="2250" b="1" dirty="0">
+                <a:solidFill>
+                  <a:srgbClr val="063D22"/>
+                </a:solidFill>
+                <a:latin typeface="Arial" pitchFamily="34" charset="0"/>
+                <a:ea typeface="Arial" pitchFamily="34" charset="-122"/>
+                <a:cs typeface="Arial" pitchFamily="34" charset="-120"/>
+              </a:rPr>
+              <a:t>make the same approve-or-reject call a human analyst would </a:t>
+            </a:r>
+            <a:r>
+              <a:rPr lang="en-US" sz="2250" dirty="0">
+                <a:solidFill>
+                  <a:srgbClr val="244236"/>
+                </a:solidFill>
+                <a:latin typeface="Arial" pitchFamily="34" charset="0"/>
+                <a:ea typeface="Arial" pitchFamily="34" charset="-122"/>
+                <a:cs typeface="Arial" pitchFamily="34" charset="-120"/>
+              </a:rPr>
+              <a:t>, for 5,000 new applications.</a:t>
+            </a:r>
+            <a:endParaRPr lang="en-US" sz="2250" dirty="0"/>
+          </a:p>
+        </p:txBody>
+      </p:sp>
+      <p:sp>
+        <p:nvSpPr>
+          <p:cNvPr id="22" name="Text 20"/>
+          <p:cNvSpPr/>
+          <p:nvPr/>
+        </p:nvSpPr>
+        <p:spPr>
+          <a:xfrm>
+            <a:off x="11312054" y="6178674"/>
+            <a:ext cx="6204150" cy="756196"/>
+          </a:xfrm>
+          <a:prstGeom prst="rect">
+            <a:avLst/>
+          </a:prstGeom>
+          <a:noFill/>
+          <a:ln/>
+        </p:spPr>
+        <p:txBody>
+          <a:bodyPr wrap="square" lIns="25400" tIns="25400" rIns="25400" bIns="25400" rtlCol="0" anchor="t">
+            <a:normAutofit fontScale="92500" lnSpcReduction="20000"/>
+          </a:bodyPr>
+          <a:lstStyle/>
+          <a:p>
+            <a:pPr marL="0" indent="0" algn="l">
               <a:lnSpc>
                 <a:spcPct val="145000"/>
               </a:lnSpc>
               <a:buNone/>
             </a:pPr>
             <a:r>
-              <a:rPr lang="en-US" sz="2250" b="1" dirty="0">
-                <a:solidFill>
-                  <a:srgbClr val="063D22"/>
+              <a:rPr lang="en-US" sz="1950" dirty="0">
+                <a:solidFill>
+                  <a:srgbClr val="5C7268"/>
                 </a:solidFill>
                 <a:latin typeface="Arial" pitchFamily="34" charset="0"/>
                 <a:ea typeface="Arial" pitchFamily="34" charset="-122"/>
                 <a:cs typeface="Arial" pitchFamily="34" charset="-120"/>
               </a:rPr>
-              <a:t>make the same approve-or-reject call a human analyst would </a:t>
-            </a:r>
-            <a:pPr algn="l" indent="0" marL="0">
-              <a:lnSpc>
-                <a:spcPct val="145000"/>
-              </a:lnSpc>
-              <a:buNone/>
-            </a:pPr>
-            <a:r>
-              <a:rPr lang="en-US" sz="2250" dirty="0">
-                <a:solidFill>
-                  <a:srgbClr val="244236"/>
-                </a:solidFill>
-                <a:latin typeface="Arial" pitchFamily="34" charset="0"/>
-                <a:ea typeface="Arial" pitchFamily="34" charset="-122"/>
-                <a:cs typeface="Arial" pitchFamily="34" charset="-120"/>
-              </a:rPr>
-              <a:t>, for 5,000 new applications.</a:t>
-            </a:r>
-            <a:endParaRPr lang="en-US" sz="2250" dirty="0"/>
-          </a:p>
-        </p:txBody>
-      </p:sp>
-      <p:sp>
-        <p:nvSpPr>
-          <p:cNvPr id="22" name="Text 20"/>
-          <p:cNvSpPr/>
-          <p:nvPr/>
-        </p:nvSpPr>
-        <p:spPr>
-          <a:xfrm>
-            <a:off x="11312054" y="6178674"/>
-            <a:ext cx="6204150" cy="756196"/>
-          </a:xfrm>
-          <a:prstGeom prst="rect">
-            <a:avLst/>
-          </a:prstGeom>
-          <a:noFill/>
-          <a:ln/>
-        </p:spPr>
-        <p:txBody>
-          <a:bodyPr wrap="square" lIns="25400" tIns="25400" rIns="25400" bIns="25400" rtlCol="0" anchor="t">
-            <a:normAutofit/>
-          </a:bodyPr>
-          <a:lstStyle/>
-          <a:p>
-            <a:pPr algn="l" indent="0" marL="0">
-              <a:lnSpc>
-                <a:spcPct val="145000"/>
-              </a:lnSpc>
-              <a:buNone/>
-            </a:pPr>
-            <a:r>
-              <a:rPr lang="en-US" sz="1950" dirty="0">
-                <a:solidFill>
-                  <a:srgbClr val="5C7268"/>
-                </a:solidFill>
-                <a:latin typeface="Arial" pitchFamily="34" charset="0"/>
-                <a:ea typeface="Arial" pitchFamily="34" charset="-122"/>
-                <a:cs typeface="Arial" pitchFamily="34" charset="-120"/>
-              </a:rPr>
               <a:t>It learns the bank’s existing policy — so it must also avoid copying the analysts’ bias (see slide 7).</a:t>
             </a:r>
             <a:endParaRPr lang="en-US" sz="1950" dirty="0"/>
@@ -5878,6 +5787,13 @@
           </a:solidFill>
           <a:ln/>
         </p:spPr>
+        <p:txBody>
+          <a:bodyPr/>
+          <a:lstStyle/>
+          <a:p>
+            <a:endParaRPr lang="en-GB"/>
+          </a:p>
+        </p:txBody>
       </p:sp>
       <p:sp>
         <p:nvSpPr>
@@ -5898,11 +5814,11 @@
         </p:spPr>
         <p:txBody>
           <a:bodyPr wrap="square" lIns="25400" tIns="25400" rIns="25400" bIns="25400" rtlCol="0" anchor="t">
-            <a:normAutofit/>
-          </a:bodyPr>
-          <a:lstStyle/>
-          <a:p>
-            <a:pPr algn="l" indent="0" marL="0">
+            <a:normAutofit fontScale="92500" lnSpcReduction="10000"/>
+          </a:bodyPr>
+          <a:lstStyle/>
+          <a:p>
+            <a:pPr marL="0" indent="0" algn="l">
               <a:buNone/>
             </a:pPr>
             <a:r>
@@ -5936,6 +5852,7 @@
         <a:solidFill>
           <a:srgbClr val="FFFFFF"/>
         </a:solidFill>
+        <a:effectLst/>
       </p:bgPr>
     </p:bg>
     <p:spTree>
@@ -5971,6 +5888,13 @@
           </a:solidFill>
           <a:ln/>
         </p:spPr>
+        <p:txBody>
+          <a:bodyPr/>
+          <a:lstStyle/>
+          <a:p>
+            <a:endParaRPr lang="en-GB"/>
+          </a:p>
+        </p:txBody>
       </p:sp>
       <p:sp>
         <p:nvSpPr>
@@ -5991,15 +5915,15 @@
         </p:spPr>
         <p:txBody>
           <a:bodyPr wrap="square" lIns="25400" tIns="25400" rIns="25400" bIns="25400" rtlCol="0" anchor="t">
-            <a:normAutofit/>
-          </a:bodyPr>
-          <a:lstStyle/>
-          <a:p>
-            <a:pPr algn="l" indent="0" marL="0">
-              <a:buNone/>
-            </a:pPr>
-            <a:r>
-              <a:rPr lang="en-US" sz="1800" spc="225" kern="0" dirty="0">
+            <a:normAutofit fontScale="92500" lnSpcReduction="10000"/>
+          </a:bodyPr>
+          <a:lstStyle/>
+          <a:p>
+            <a:pPr marL="0" indent="0" algn="l">
+              <a:buNone/>
+            </a:pPr>
+            <a:r>
+              <a:rPr lang="en-US" sz="1800" kern="0" spc="225" dirty="0">
                 <a:solidFill>
                   <a:srgbClr val="007A33"/>
                 </a:solidFill>
@@ -6032,18 +5956,18 @@
         </p:spPr>
         <p:txBody>
           <a:bodyPr wrap="square" lIns="25400" tIns="25400" rIns="25400" bIns="25400" rtlCol="0" anchor="t">
-            <a:normAutofit/>
-          </a:bodyPr>
-          <a:lstStyle/>
-          <a:p>
-            <a:pPr algn="l" indent="0" marL="0">
+            <a:normAutofit fontScale="92500" lnSpcReduction="10000"/>
+          </a:bodyPr>
+          <a:lstStyle/>
+          <a:p>
+            <a:pPr marL="0" indent="0" algn="l">
               <a:lnSpc>
                 <a:spcPct val="112000"/>
               </a:lnSpc>
               <a:buNone/>
             </a:pPr>
             <a:r>
-              <a:rPr lang="en-US" sz="3600" b="1" spc="-37" kern="0" dirty="0">
+              <a:rPr lang="en-US" sz="3600" b="1" kern="0" spc="-37" dirty="0">
                 <a:solidFill>
                   <a:srgbClr val="063D22"/>
                 </a:solidFill>
@@ -6078,6 +6002,13 @@
           </a:solidFill>
           <a:ln/>
         </p:spPr>
+        <p:txBody>
+          <a:bodyPr/>
+          <a:lstStyle/>
+          <a:p>
+            <a:endParaRPr lang="en-GB"/>
+          </a:p>
+        </p:txBody>
       </p:sp>
       <p:sp>
         <p:nvSpPr>
@@ -6098,11 +6029,11 @@
         </p:spPr>
         <p:txBody>
           <a:bodyPr wrap="square" lIns="25400" tIns="25400" rIns="25400" bIns="25400" rtlCol="0" anchor="t">
-            <a:normAutofit/>
-          </a:bodyPr>
-          <a:lstStyle/>
-          <a:p>
-            <a:pPr algn="l" indent="0" marL="0">
+            <a:normAutofit lnSpcReduction="10000"/>
+          </a:bodyPr>
+          <a:lstStyle/>
+          <a:p>
+            <a:pPr marL="0" indent="0" algn="l">
               <a:buNone/>
             </a:pPr>
             <a:r>
@@ -6139,11 +6070,11 @@
         </p:spPr>
         <p:txBody>
           <a:bodyPr wrap="square" lIns="25400" tIns="25400" rIns="25400" bIns="25400" rtlCol="0" anchor="t">
-            <a:normAutofit/>
-          </a:bodyPr>
-          <a:lstStyle/>
-          <a:p>
-            <a:pPr algn="l" indent="0" marL="0">
+            <a:normAutofit lnSpcReduction="10000"/>
+          </a:bodyPr>
+          <a:lstStyle/>
+          <a:p>
+            <a:pPr marL="0" indent="0" algn="l">
               <a:buNone/>
             </a:pPr>
             <a:r>
@@ -6187,6 +6118,13 @@
             <a:prstDash val="solid"/>
           </a:ln>
         </p:spPr>
+        <p:txBody>
+          <a:bodyPr/>
+          <a:lstStyle/>
+          <a:p>
+            <a:endParaRPr lang="en-GB"/>
+          </a:p>
+        </p:txBody>
       </p:sp>
       <p:sp>
         <p:nvSpPr>
@@ -6207,11 +6145,11 @@
         </p:spPr>
         <p:txBody>
           <a:bodyPr wrap="square" lIns="25400" tIns="25400" rIns="25400" bIns="25400" rtlCol="0" anchor="t">
-            <a:normAutofit/>
-          </a:bodyPr>
-          <a:lstStyle/>
-          <a:p>
-            <a:pPr algn="l" indent="0" marL="0">
+            <a:normAutofit lnSpcReduction="10000"/>
+          </a:bodyPr>
+          <a:lstStyle/>
+          <a:p>
+            <a:pPr marL="0" indent="0" algn="l">
               <a:buNone/>
             </a:pPr>
             <a:r>
@@ -6248,11 +6186,11 @@
         </p:spPr>
         <p:txBody>
           <a:bodyPr wrap="square" lIns="25400" tIns="25400" rIns="25400" bIns="25400" rtlCol="0" anchor="t">
-            <a:normAutofit/>
-          </a:bodyPr>
-          <a:lstStyle/>
-          <a:p>
-            <a:pPr algn="l" indent="0" marL="0">
+            <a:normAutofit lnSpcReduction="10000"/>
+          </a:bodyPr>
+          <a:lstStyle/>
+          <a:p>
+            <a:pPr marL="0" indent="0" algn="l">
               <a:buNone/>
             </a:pPr>
             <a:r>
@@ -6289,11 +6227,11 @@
         </p:spPr>
         <p:txBody>
           <a:bodyPr wrap="square" lIns="25400" tIns="25400" rIns="25400" bIns="25400" rtlCol="0" anchor="t">
-            <a:normAutofit/>
-          </a:bodyPr>
-          <a:lstStyle/>
-          <a:p>
-            <a:pPr algn="l" indent="0" marL="0">
+            <a:normAutofit fontScale="92500" lnSpcReduction="10000"/>
+          </a:bodyPr>
+          <a:lstStyle/>
+          <a:p>
+            <a:pPr marL="0" indent="0" algn="l">
               <a:buNone/>
             </a:pPr>
             <a:r>
@@ -6330,11 +6268,11 @@
         </p:spPr>
         <p:txBody>
           <a:bodyPr wrap="square" lIns="25400" tIns="25400" rIns="25400" bIns="25400" rtlCol="0" anchor="t">
-            <a:normAutofit/>
-          </a:bodyPr>
-          <a:lstStyle/>
-          <a:p>
-            <a:pPr algn="l" indent="0" marL="0">
+            <a:normAutofit fontScale="92500" lnSpcReduction="10000"/>
+          </a:bodyPr>
+          <a:lstStyle/>
+          <a:p>
+            <a:pPr marL="0" indent="0" algn="l">
               <a:buNone/>
             </a:pPr>
             <a:r>
@@ -6371,11 +6309,11 @@
         </p:spPr>
         <p:txBody>
           <a:bodyPr wrap="square" lIns="25400" tIns="25400" rIns="25400" bIns="25400" rtlCol="0" anchor="t">
-            <a:normAutofit/>
-          </a:bodyPr>
-          <a:lstStyle/>
-          <a:p>
-            <a:pPr algn="l" indent="0" marL="0">
+            <a:normAutofit fontScale="92500" lnSpcReduction="10000"/>
+          </a:bodyPr>
+          <a:lstStyle/>
+          <a:p>
+            <a:pPr marL="0" indent="0" algn="l">
               <a:buNone/>
             </a:pPr>
             <a:r>
@@ -6412,11 +6350,11 @@
         </p:spPr>
         <p:txBody>
           <a:bodyPr wrap="square" lIns="25400" tIns="25400" rIns="25400" bIns="25400" rtlCol="0" anchor="t">
-            <a:normAutofit/>
-          </a:bodyPr>
-          <a:lstStyle/>
-          <a:p>
-            <a:pPr algn="l" indent="0" marL="0">
+            <a:normAutofit fontScale="92500" lnSpcReduction="10000"/>
+          </a:bodyPr>
+          <a:lstStyle/>
+          <a:p>
+            <a:pPr marL="0" indent="0" algn="l">
               <a:buNone/>
             </a:pPr>
             <a:r>
@@ -6453,6 +6391,13 @@
           </a:solidFill>
           <a:ln/>
         </p:spPr>
+        <p:txBody>
+          <a:bodyPr/>
+          <a:lstStyle/>
+          <a:p>
+            <a:endParaRPr lang="en-GB"/>
+          </a:p>
+        </p:txBody>
       </p:sp>
       <p:sp>
         <p:nvSpPr>
@@ -6477,7 +6422,7 @@
           </a:bodyPr>
           <a:lstStyle/>
           <a:p>
-            <a:pPr algn="l" indent="0" marL="0">
+            <a:pPr marL="0" indent="0" algn="l">
               <a:buNone/>
             </a:pPr>
             <a:r>
@@ -6514,6 +6459,13 @@
           </a:solidFill>
           <a:ln/>
         </p:spPr>
+        <p:txBody>
+          <a:bodyPr/>
+          <a:lstStyle/>
+          <a:p>
+            <a:endParaRPr lang="en-GB"/>
+          </a:p>
+        </p:txBody>
       </p:sp>
       <p:sp>
         <p:nvSpPr>
@@ -6538,7 +6490,7 @@
           </a:bodyPr>
           <a:lstStyle/>
           <a:p>
-            <a:pPr algn="l" indent="0" marL="0">
+            <a:pPr marL="0" indent="0" algn="l">
               <a:buNone/>
             </a:pPr>
             <a:r>
@@ -6575,11 +6527,11 @@
         </p:spPr>
         <p:txBody>
           <a:bodyPr wrap="square" lIns="25400" tIns="25400" rIns="25400" bIns="25400" rtlCol="0" anchor="t">
-            <a:normAutofit/>
-          </a:bodyPr>
-          <a:lstStyle/>
-          <a:p>
-            <a:pPr algn="l" indent="0" marL="0">
+            <a:normAutofit fontScale="92500" lnSpcReduction="20000"/>
+          </a:bodyPr>
+          <a:lstStyle/>
+          <a:p>
+            <a:pPr marL="0" indent="0" algn="l">
               <a:lnSpc>
                 <a:spcPct val="145000"/>
               </a:lnSpc>
@@ -6596,12 +6548,6 @@
               </a:rPr>
               <a:t>Because approvals and rejections are nearly even, </a:t>
             </a:r>
-            <a:pPr algn="l" indent="0" marL="0">
-              <a:lnSpc>
-                <a:spcPct val="145000"/>
-              </a:lnSpc>
-              <a:buNone/>
-            </a:pPr>
             <a:r>
               <a:rPr lang="en-US" sz="2025" b="1" dirty="0">
                 <a:solidFill>
@@ -6613,12 +6559,6 @@
               </a:rPr>
               <a:t>guessing scores only ~52% </a:t>
             </a:r>
-            <a:pPr algn="l" indent="0" marL="0">
-              <a:lnSpc>
-                <a:spcPct val="145000"/>
-              </a:lnSpc>
-              <a:buNone/>
-            </a:pPr>
             <a:r>
               <a:rPr lang="en-US" sz="2025" dirty="0">
                 <a:solidFill>
@@ -6653,6 +6593,13 @@
           </a:solidFill>
           <a:ln/>
         </p:spPr>
+        <p:txBody>
+          <a:bodyPr/>
+          <a:lstStyle/>
+          <a:p>
+            <a:endParaRPr lang="en-GB"/>
+          </a:p>
+        </p:txBody>
       </p:sp>
       <p:sp>
         <p:nvSpPr>
@@ -6673,11 +6620,11 @@
         </p:spPr>
         <p:txBody>
           <a:bodyPr wrap="square" lIns="25400" tIns="25400" rIns="25400" bIns="25400" rtlCol="0" anchor="t">
-            <a:normAutofit/>
-          </a:bodyPr>
-          <a:lstStyle/>
-          <a:p>
-            <a:pPr algn="l" indent="0" marL="0">
+            <a:normAutofit fontScale="92500" lnSpcReduction="10000"/>
+          </a:bodyPr>
+          <a:lstStyle/>
+          <a:p>
+            <a:pPr marL="0" indent="0" algn="l">
               <a:buNone/>
             </a:pPr>
             <a:r>
@@ -6711,6 +6658,7 @@
         <a:solidFill>
           <a:srgbClr val="FFFFFF"/>
         </a:solidFill>
+        <a:effectLst/>
       </p:bgPr>
     </p:bg>
     <p:spTree>
@@ -6746,6 +6694,13 @@
           </a:solidFill>
           <a:ln/>
         </p:spPr>
+        <p:txBody>
+          <a:bodyPr/>
+          <a:lstStyle/>
+          <a:p>
+            <a:endParaRPr lang="en-GB"/>
+          </a:p>
+        </p:txBody>
       </p:sp>
       <p:sp>
         <p:nvSpPr>
@@ -6766,15 +6721,15 @@
         </p:spPr>
         <p:txBody>
           <a:bodyPr wrap="square" lIns="25400" tIns="25400" rIns="25400" bIns="25400" rtlCol="0" anchor="t">
-            <a:normAutofit/>
-          </a:bodyPr>
-          <a:lstStyle/>
-          <a:p>
-            <a:pPr algn="l" indent="0" marL="0">
-              <a:buNone/>
-            </a:pPr>
-            <a:r>
-              <a:rPr lang="en-US" sz="1800" spc="225" kern="0" dirty="0">
+            <a:normAutofit fontScale="92500" lnSpcReduction="10000"/>
+          </a:bodyPr>
+          <a:lstStyle/>
+          <a:p>
+            <a:pPr marL="0" indent="0" algn="l">
+              <a:buNone/>
+            </a:pPr>
+            <a:r>
+              <a:rPr lang="en-US" sz="1800" kern="0" spc="225" dirty="0">
                 <a:solidFill>
                   <a:srgbClr val="007A33"/>
                 </a:solidFill>
@@ -6807,18 +6762,18 @@
         </p:spPr>
         <p:txBody>
           <a:bodyPr wrap="square" lIns="25400" tIns="25400" rIns="25400" bIns="25400" rtlCol="0" anchor="t">
-            <a:normAutofit/>
-          </a:bodyPr>
-          <a:lstStyle/>
-          <a:p>
-            <a:pPr algn="l" indent="0" marL="0">
+            <a:normAutofit fontScale="92500" lnSpcReduction="10000"/>
+          </a:bodyPr>
+          <a:lstStyle/>
+          <a:p>
+            <a:pPr marL="0" indent="0" algn="l">
               <a:lnSpc>
                 <a:spcPct val="112000"/>
               </a:lnSpc>
               <a:buNone/>
             </a:pPr>
             <a:r>
-              <a:rPr lang="en-US" sz="3600" b="1" spc="-37" kern="0" dirty="0">
+              <a:rPr lang="en-US" sz="3600" b="1" kern="0" spc="-37" dirty="0">
                 <a:solidFill>
                   <a:srgbClr val="063D22"/>
                 </a:solidFill>
@@ -6851,11 +6806,11 @@
         </p:spPr>
         <p:txBody>
           <a:bodyPr wrap="square" lIns="25400" tIns="25400" rIns="25400" bIns="25400" rtlCol="0" anchor="t">
-            <a:normAutofit/>
-          </a:bodyPr>
-          <a:lstStyle/>
-          <a:p>
-            <a:pPr algn="l" indent="0" marL="0">
+            <a:normAutofit fontScale="92500" lnSpcReduction="10000"/>
+          </a:bodyPr>
+          <a:lstStyle/>
+          <a:p>
+            <a:pPr marL="0" indent="0" algn="l">
               <a:buNone/>
             </a:pPr>
             <a:r>
@@ -6869,9 +6824,6 @@
               </a:rPr>
               <a:t>One “perfect” column, </a:t>
             </a:r>
-            <a:pPr algn="l" indent="0" marL="0">
-              <a:buNone/>
-            </a:pPr>
             <a:r>
               <a:rPr lang="en-US" sz="1800" dirty="0">
                 <a:solidFill>
@@ -6883,9 +6835,6 @@
               </a:rPr>
               <a:t>internal_code </a:t>
             </a:r>
-            <a:pPr algn="l" indent="0" marL="0">
-              <a:buNone/>
-            </a:pPr>
             <a:r>
               <a:rPr lang="en-US" sz="1800" dirty="0">
                 <a:solidFill>
@@ -6920,11 +6869,11 @@
         </p:spPr>
         <p:txBody>
           <a:bodyPr wrap="square" lIns="25400" tIns="25400" rIns="25400" bIns="25400" rtlCol="0" anchor="t">
-            <a:normAutofit/>
-          </a:bodyPr>
-          <a:lstStyle/>
-          <a:p>
-            <a:pPr algn="l" indent="0" marL="0">
+            <a:normAutofit fontScale="92500" lnSpcReduction="20000"/>
+          </a:bodyPr>
+          <a:lstStyle/>
+          <a:p>
+            <a:pPr marL="0" indent="0" algn="l">
               <a:lnSpc>
                 <a:spcPct val="145000"/>
               </a:lnSpc>
@@ -6941,12 +6890,6 @@
               </a:rPr>
               <a:t>The column looked like the best predictor in the dataset. A simple integrity check gave it away: it lines up with real risk in the </a:t>
             </a:r>
-            <a:pPr algn="l" indent="0" marL="0">
-              <a:lnSpc>
-                <a:spcPct val="145000"/>
-              </a:lnSpc>
-              <a:buNone/>
-            </a:pPr>
             <a:r>
               <a:rPr lang="en-US" sz="2175" b="1" dirty="0">
                 <a:solidFill>
@@ -6958,12 +6901,6 @@
               </a:rPr>
               <a:t>training data </a:t>
             </a:r>
-            <a:pPr algn="l" indent="0" marL="0">
-              <a:lnSpc>
-                <a:spcPct val="145000"/>
-              </a:lnSpc>
-              <a:buNone/>
-            </a:pPr>
             <a:r>
               <a:rPr lang="en-US" sz="2175" dirty="0">
                 <a:solidFill>
@@ -6975,12 +6912,6 @@
               </a:rPr>
               <a:t>but is random noise in the </a:t>
             </a:r>
-            <a:pPr algn="l" indent="0" marL="0">
-              <a:lnSpc>
-                <a:spcPct val="145000"/>
-              </a:lnSpc>
-              <a:buNone/>
-            </a:pPr>
             <a:r>
               <a:rPr lang="en-US" sz="2175" b="1" dirty="0">
                 <a:solidFill>
@@ -6992,12 +6923,6 @@
               </a:rPr>
               <a:t>test data </a:t>
             </a:r>
-            <a:pPr algn="l" indent="0" marL="0">
-              <a:lnSpc>
-                <a:spcPct val="145000"/>
-              </a:lnSpc>
-              <a:buNone/>
-            </a:pPr>
             <a:r>
               <a:rPr lang="en-US" sz="2175" dirty="0">
                 <a:solidFill>
@@ -7009,12 +6934,6 @@
               </a:rPr>
               <a:t>— it was scrambled on purpose. </a:t>
             </a:r>
-            <a:pPr algn="l" indent="0" marL="0">
-              <a:lnSpc>
-                <a:spcPct val="145000"/>
-              </a:lnSpc>
-              <a:buNone/>
-            </a:pPr>
             <a:r>
               <a:rPr lang="en-US" sz="2175" b="1" dirty="0">
                 <a:solidFill>
@@ -7049,11 +6968,11 @@
         </p:spPr>
         <p:txBody>
           <a:bodyPr wrap="square" lIns="25400" tIns="25400" rIns="25400" bIns="25400" rtlCol="0" anchor="t">
-            <a:normAutofit/>
-          </a:bodyPr>
-          <a:lstStyle/>
-          <a:p>
-            <a:pPr algn="l" indent="0" marL="0">
+            <a:normAutofit fontScale="92500" lnSpcReduction="10000"/>
+          </a:bodyPr>
+          <a:lstStyle/>
+          <a:p>
+            <a:pPr marL="0" indent="0" algn="l">
               <a:buNone/>
             </a:pPr>
             <a:r>
@@ -7092,6 +7011,13 @@
           </a:solidFill>
           <a:ln/>
         </p:spPr>
+        <p:txBody>
+          <a:bodyPr/>
+          <a:lstStyle/>
+          <a:p>
+            <a:endParaRPr lang="en-GB"/>
+          </a:p>
+        </p:txBody>
       </p:sp>
       <p:sp>
         <p:nvSpPr>
@@ -7101,7 +7027,7 @@
         </p:nvSpPr>
         <p:spPr>
           <a:xfrm>
-            <a:off x="9658350" y="4752454"/>
+            <a:off x="9658350" y="4727796"/>
             <a:ext cx="914400" cy="333375"/>
           </a:xfrm>
           <a:prstGeom prst="rect">
@@ -7116,7 +7042,7 @@
           </a:bodyPr>
           <a:lstStyle/>
           <a:p>
-            <a:pPr algn="l" indent="0" marL="0">
+            <a:pPr marL="0" indent="0" algn="l">
               <a:buNone/>
             </a:pPr>
             <a:r>
@@ -7153,11 +7079,11 @@
         </p:spPr>
         <p:txBody>
           <a:bodyPr wrap="square" lIns="25400" tIns="25400" rIns="25400" bIns="25400" rtlCol="0" anchor="t">
-            <a:normAutofit/>
-          </a:bodyPr>
-          <a:lstStyle/>
-          <a:p>
-            <a:pPr algn="l" indent="0" marL="0">
+            <a:normAutofit lnSpcReduction="10000"/>
+          </a:bodyPr>
+          <a:lstStyle/>
+          <a:p>
+            <a:pPr marL="0" indent="0" algn="l">
               <a:buNone/>
             </a:pPr>
             <a:r>
@@ -7196,6 +7122,13 @@
           </a:solidFill>
           <a:ln/>
         </p:spPr>
+        <p:txBody>
+          <a:bodyPr/>
+          <a:lstStyle/>
+          <a:p>
+            <a:endParaRPr lang="en-GB"/>
+          </a:p>
+        </p:txBody>
       </p:sp>
       <p:sp>
         <p:nvSpPr>
@@ -7205,7 +7138,7 @@
         </p:nvSpPr>
         <p:spPr>
           <a:xfrm>
-            <a:off x="9658350" y="5466829"/>
+            <a:off x="9658350" y="5408414"/>
             <a:ext cx="914400" cy="333375"/>
           </a:xfrm>
           <a:prstGeom prst="rect">
@@ -7220,7 +7153,7 @@
           </a:bodyPr>
           <a:lstStyle/>
           <a:p>
-            <a:pPr algn="l" indent="0" marL="0">
+            <a:pPr marL="0" indent="0" algn="l">
               <a:buNone/>
             </a:pPr>
             <a:r>
@@ -7257,11 +7190,11 @@
         </p:spPr>
         <p:txBody>
           <a:bodyPr wrap="square" lIns="25400" tIns="25400" rIns="25400" bIns="25400" rtlCol="0" anchor="t">
-            <a:normAutofit/>
-          </a:bodyPr>
-          <a:lstStyle/>
-          <a:p>
-            <a:pPr algn="l" indent="0" marL="0">
+            <a:normAutofit lnSpcReduction="10000"/>
+          </a:bodyPr>
+          <a:lstStyle/>
+          <a:p>
+            <a:pPr marL="0" indent="0" algn="l">
               <a:buNone/>
             </a:pPr>
             <a:r>
@@ -7300,6 +7233,13 @@
           </a:solidFill>
           <a:ln/>
         </p:spPr>
+        <p:txBody>
+          <a:bodyPr/>
+          <a:lstStyle/>
+          <a:p>
+            <a:endParaRPr lang="en-GB"/>
+          </a:p>
+        </p:txBody>
       </p:sp>
       <p:sp>
         <p:nvSpPr>
@@ -7324,7 +7264,7 @@
           </a:bodyPr>
           <a:lstStyle/>
           <a:p>
-            <a:pPr algn="l" indent="0" marL="0">
+            <a:pPr marL="0" indent="0" algn="l">
               <a:buNone/>
             </a:pPr>
             <a:r>
@@ -7361,11 +7301,11 @@
         </p:spPr>
         <p:txBody>
           <a:bodyPr wrap="square" lIns="25400" tIns="25400" rIns="25400" bIns="25400" rtlCol="0" anchor="t">
-            <a:normAutofit/>
-          </a:bodyPr>
-          <a:lstStyle/>
-          <a:p>
-            <a:pPr algn="l" indent="0" marL="0">
+            <a:normAutofit lnSpcReduction="10000"/>
+          </a:bodyPr>
+          <a:lstStyle/>
+          <a:p>
+            <a:pPr marL="0" indent="0" algn="l">
               <a:buNone/>
             </a:pPr>
             <a:r>
@@ -7404,6 +7344,13 @@
           </a:solidFill>
           <a:ln/>
         </p:spPr>
+        <p:txBody>
+          <a:bodyPr/>
+          <a:lstStyle/>
+          <a:p>
+            <a:endParaRPr lang="en-GB"/>
+          </a:p>
+        </p:txBody>
       </p:sp>
       <p:sp>
         <p:nvSpPr>
@@ -7413,7 +7360,7 @@
         </p:nvSpPr>
         <p:spPr>
           <a:xfrm>
-            <a:off x="9658350" y="6895579"/>
+            <a:off x="9591675" y="6916320"/>
             <a:ext cx="914400" cy="333375"/>
           </a:xfrm>
           <a:prstGeom prst="rect">
@@ -7424,11 +7371,11 @@
         </p:spPr>
         <p:txBody>
           <a:bodyPr wrap="square" lIns="25400" tIns="25400" rIns="25400" bIns="25400" rtlCol="0" anchor="t">
-            <a:normAutofit/>
-          </a:bodyPr>
-          <a:lstStyle/>
-          <a:p>
-            <a:pPr algn="l" indent="0" marL="0">
+            <a:normAutofit fontScale="85000" lnSpcReduction="10000"/>
+          </a:bodyPr>
+          <a:lstStyle/>
+          <a:p>
+            <a:pPr marL="0" indent="0" algn="l">
               <a:buNone/>
             </a:pPr>
             <a:r>
@@ -7465,11 +7412,11 @@
         </p:spPr>
         <p:txBody>
           <a:bodyPr wrap="square" lIns="25400" tIns="25400" rIns="25400" bIns="25400" rtlCol="0" anchor="t">
-            <a:normAutofit/>
-          </a:bodyPr>
-          <a:lstStyle/>
-          <a:p>
-            <a:pPr algn="l" indent="0" marL="0">
+            <a:normAutofit lnSpcReduction="10000"/>
+          </a:bodyPr>
+          <a:lstStyle/>
+          <a:p>
+            <a:pPr marL="0" indent="0" algn="l">
               <a:buNone/>
             </a:pPr>
             <a:r>
@@ -7506,6 +7453,13 @@
           </a:solidFill>
           <a:ln/>
         </p:spPr>
+        <p:txBody>
+          <a:bodyPr/>
+          <a:lstStyle/>
+          <a:p>
+            <a:endParaRPr lang="en-GB"/>
+          </a:p>
+        </p:txBody>
       </p:sp>
       <p:sp>
         <p:nvSpPr>
@@ -7526,11 +7480,11 @@
         </p:spPr>
         <p:txBody>
           <a:bodyPr wrap="square" lIns="25400" tIns="25400" rIns="25400" bIns="25400" rtlCol="0" anchor="t">
-            <a:normAutofit/>
-          </a:bodyPr>
-          <a:lstStyle/>
-          <a:p>
-            <a:pPr algn="l" indent="0" marL="0">
+            <a:normAutofit fontScale="92500" lnSpcReduction="10000"/>
+          </a:bodyPr>
+          <a:lstStyle/>
+          <a:p>
+            <a:pPr marL="0" indent="0" algn="l">
               <a:buNone/>
             </a:pPr>
             <a:r>
@@ -7572,6 +7526,146 @@
           </a:prstGeom>
         </p:spPr>
       </p:pic>
+      <p:sp>
+        <p:nvSpPr>
+          <p:cNvPr id="24" name="TextBox 23">
+            <a:extLst>
+              <a:ext uri="{FF2B5EF4-FFF2-40B4-BE49-F238E27FC236}">
+                <a16:creationId xmlns:a16="http://schemas.microsoft.com/office/drawing/2014/main" id="{742EB33F-E089-D2ED-2869-7CBDC6463FC1}"/>
+              </a:ext>
+            </a:extLst>
+          </p:cNvPr>
+          <p:cNvSpPr txBox="1"/>
+          <p:nvPr/>
+        </p:nvSpPr>
+        <p:spPr>
+          <a:xfrm>
+            <a:off x="15507761" y="4742204"/>
+            <a:ext cx="1827739" cy="369332"/>
+          </a:xfrm>
+          <a:prstGeom prst="rect">
+            <a:avLst/>
+          </a:prstGeom>
+          <a:noFill/>
+        </p:spPr>
+        <p:txBody>
+          <a:bodyPr wrap="square" rtlCol="0">
+            <a:spAutoFit/>
+          </a:bodyPr>
+          <a:lstStyle/>
+          <a:p>
+            <a:r>
+              <a:rPr lang="en-DE" b="1" cap="all" dirty="0"/>
+              <a:t>INTERNAL_CODE</a:t>
+            </a:r>
+          </a:p>
+        </p:txBody>
+      </p:sp>
+      <p:sp>
+        <p:nvSpPr>
+          <p:cNvPr id="25" name="TextBox 24">
+            <a:extLst>
+              <a:ext uri="{FF2B5EF4-FFF2-40B4-BE49-F238E27FC236}">
+                <a16:creationId xmlns:a16="http://schemas.microsoft.com/office/drawing/2014/main" id="{F8780A9C-BBDC-74A6-186D-D49B495B51B3}"/>
+              </a:ext>
+            </a:extLst>
+          </p:cNvPr>
+          <p:cNvSpPr txBox="1"/>
+          <p:nvPr/>
+        </p:nvSpPr>
+        <p:spPr>
+          <a:xfrm>
+            <a:off x="15011802" y="5437529"/>
+            <a:ext cx="2361798" cy="369332"/>
+          </a:xfrm>
+          <a:prstGeom prst="rect">
+            <a:avLst/>
+          </a:prstGeom>
+          <a:noFill/>
+        </p:spPr>
+        <p:txBody>
+          <a:bodyPr wrap="square" rtlCol="0">
+            <a:spAutoFit/>
+          </a:bodyPr>
+          <a:lstStyle/>
+          <a:p>
+            <a:r>
+              <a:rPr lang="en-DE" b="1" cap="all" dirty="0"/>
+              <a:t>EXTERNAL_PD_SCORE</a:t>
+            </a:r>
+          </a:p>
+        </p:txBody>
+      </p:sp>
+      <p:sp>
+        <p:nvSpPr>
+          <p:cNvPr id="27" name="TextBox 26">
+            <a:extLst>
+              <a:ext uri="{FF2B5EF4-FFF2-40B4-BE49-F238E27FC236}">
+                <a16:creationId xmlns:a16="http://schemas.microsoft.com/office/drawing/2014/main" id="{6F1D54C4-2036-E4BB-83BB-5E3F3A8960AD}"/>
+              </a:ext>
+            </a:extLst>
+          </p:cNvPr>
+          <p:cNvSpPr txBox="1"/>
+          <p:nvPr/>
+        </p:nvSpPr>
+        <p:spPr>
+          <a:xfrm>
+            <a:off x="15574780" y="6858535"/>
+            <a:ext cx="2713220" cy="369332"/>
+          </a:xfrm>
+          <a:prstGeom prst="rect">
+            <a:avLst/>
+          </a:prstGeom>
+          <a:noFill/>
+        </p:spPr>
+        <p:txBody>
+          <a:bodyPr wrap="square" rtlCol="0">
+            <a:spAutoFit/>
+          </a:bodyPr>
+          <a:lstStyle/>
+          <a:p>
+            <a:r>
+              <a:rPr lang="en-DE" b="1" cap="all" dirty="0"/>
+              <a:t>RACE, RELIGION</a:t>
+            </a:r>
+          </a:p>
+        </p:txBody>
+      </p:sp>
+      <p:sp>
+        <p:nvSpPr>
+          <p:cNvPr id="29" name="TextBox 28">
+            <a:extLst>
+              <a:ext uri="{FF2B5EF4-FFF2-40B4-BE49-F238E27FC236}">
+                <a16:creationId xmlns:a16="http://schemas.microsoft.com/office/drawing/2014/main" id="{72E322D4-2501-B028-B84F-413385805EE0}"/>
+              </a:ext>
+            </a:extLst>
+          </p:cNvPr>
+          <p:cNvSpPr txBox="1"/>
+          <p:nvPr/>
+        </p:nvSpPr>
+        <p:spPr>
+          <a:xfrm>
+            <a:off x="15742670" y="6140485"/>
+            <a:ext cx="2713220" cy="369332"/>
+          </a:xfrm>
+          <a:prstGeom prst="rect">
+            <a:avLst/>
+          </a:prstGeom>
+          <a:noFill/>
+        </p:spPr>
+        <p:txBody>
+          <a:bodyPr wrap="square" rtlCol="0">
+            <a:spAutoFit/>
+          </a:bodyPr>
+          <a:lstStyle/>
+          <a:p>
+            <a:r>
+              <a:rPr lang="en-DE" b="1" cap="all" dirty="0"/>
+              <a:t>76.4 or 76400</a:t>
+            </a:r>
+          </a:p>
+        </p:txBody>
+      </p:sp>
     </p:spTree>
   </p:cSld>
   <p:clrMapOvr>
@@ -7588,6 +7682,7 @@
         <a:solidFill>
           <a:srgbClr val="FFFFFF"/>
         </a:solidFill>
+        <a:effectLst/>
       </p:bgPr>
     </p:bg>
     <p:spTree>
@@ -7623,6 +7718,13 @@
           </a:solidFill>
           <a:ln/>
         </p:spPr>
+        <p:txBody>
+          <a:bodyPr/>
+          <a:lstStyle/>
+          <a:p>
+            <a:endParaRPr lang="en-GB"/>
+          </a:p>
+        </p:txBody>
       </p:sp>
       <p:sp>
         <p:nvSpPr>
@@ -7643,15 +7745,15 @@
         </p:spPr>
         <p:txBody>
           <a:bodyPr wrap="square" lIns="25400" tIns="25400" rIns="25400" bIns="25400" rtlCol="0" anchor="t">
-            <a:normAutofit/>
-          </a:bodyPr>
-          <a:lstStyle/>
-          <a:p>
-            <a:pPr algn="l" indent="0" marL="0">
-              <a:buNone/>
-            </a:pPr>
-            <a:r>
-              <a:rPr lang="en-US" sz="1800" spc="225" kern="0" dirty="0">
+            <a:normAutofit fontScale="92500" lnSpcReduction="10000"/>
+          </a:bodyPr>
+          <a:lstStyle/>
+          <a:p>
+            <a:pPr marL="0" indent="0" algn="l">
+              <a:buNone/>
+            </a:pPr>
+            <a:r>
+              <a:rPr lang="en-US" sz="1800" kern="0" spc="225" dirty="0">
                 <a:solidFill>
                   <a:srgbClr val="007A33"/>
                 </a:solidFill>
@@ -7684,18 +7786,18 @@
         </p:spPr>
         <p:txBody>
           <a:bodyPr wrap="square" lIns="25400" tIns="25400" rIns="25400" bIns="25400" rtlCol="0" anchor="t">
-            <a:normAutofit/>
-          </a:bodyPr>
-          <a:lstStyle/>
-          <a:p>
-            <a:pPr algn="l" indent="0" marL="0">
+            <a:normAutofit fontScale="92500" lnSpcReduction="10000"/>
+          </a:bodyPr>
+          <a:lstStyle/>
+          <a:p>
+            <a:pPr marL="0" indent="0" algn="l">
               <a:lnSpc>
                 <a:spcPct val="112000"/>
               </a:lnSpc>
               <a:buNone/>
             </a:pPr>
             <a:r>
-              <a:rPr lang="en-US" sz="3600" b="1" spc="-37" kern="0" dirty="0">
+              <a:rPr lang="en-US" sz="3600" b="1" kern="0" spc="-37" dirty="0">
                 <a:solidFill>
                   <a:srgbClr val="063D22"/>
                 </a:solidFill>
@@ -7717,7 +7819,7 @@
         </p:nvSpPr>
         <p:spPr>
           <a:xfrm>
-            <a:off x="952500" y="3449092"/>
+            <a:off x="952500" y="4105126"/>
             <a:ext cx="3363888" cy="2845594"/>
           </a:xfrm>
           <a:prstGeom prst="roundRect">
@@ -7735,6 +7837,13 @@
             <a:prstDash val="solid"/>
           </a:ln>
         </p:spPr>
+        <p:txBody>
+          <a:bodyPr/>
+          <a:lstStyle/>
+          <a:p>
+            <a:endParaRPr lang="en-GB"/>
+          </a:p>
+        </p:txBody>
       </p:sp>
       <p:sp>
         <p:nvSpPr>
@@ -7744,7 +7853,7 @@
         </p:nvSpPr>
         <p:spPr>
           <a:xfrm>
-            <a:off x="1247775" y="4187577"/>
+            <a:off x="1247775" y="4843611"/>
             <a:ext cx="3050671" cy="661987"/>
           </a:xfrm>
           <a:prstGeom prst="rect">
@@ -7755,11 +7864,11 @@
         </p:spPr>
         <p:txBody>
           <a:bodyPr wrap="square" lIns="25400" tIns="25400" rIns="25400" bIns="25400" rtlCol="0" anchor="t">
-            <a:normAutofit/>
-          </a:bodyPr>
-          <a:lstStyle/>
-          <a:p>
-            <a:pPr algn="l" indent="0" marL="0">
+            <a:normAutofit lnSpcReduction="10000"/>
+          </a:bodyPr>
+          <a:lstStyle/>
+          <a:p>
+            <a:pPr marL="0" indent="0" algn="l">
               <a:buNone/>
             </a:pPr>
             <a:r>
@@ -7785,7 +7894,7 @@
         </p:nvSpPr>
         <p:spPr>
           <a:xfrm>
-            <a:off x="1247775" y="4887664"/>
+            <a:off x="1247775" y="5543698"/>
             <a:ext cx="2856538" cy="706636"/>
           </a:xfrm>
           <a:prstGeom prst="rect">
@@ -7796,11 +7905,11 @@
         </p:spPr>
         <p:txBody>
           <a:bodyPr wrap="square" lIns="25400" tIns="25400" rIns="25400" bIns="25400" rtlCol="0" anchor="t">
-            <a:normAutofit/>
-          </a:bodyPr>
-          <a:lstStyle/>
-          <a:p>
-            <a:pPr algn="l" indent="0" marL="0">
+            <a:normAutofit fontScale="92500" lnSpcReduction="20000"/>
+          </a:bodyPr>
+          <a:lstStyle/>
+          <a:p>
+            <a:pPr marL="0" indent="0" algn="l">
               <a:lnSpc>
                 <a:spcPct val="135000"/>
               </a:lnSpc>
@@ -7829,7 +7938,7 @@
         </p:nvSpPr>
         <p:spPr>
           <a:xfrm>
-            <a:off x="4278288" y="3449092"/>
+            <a:off x="4278288" y="4105126"/>
             <a:ext cx="781050" cy="2883694"/>
           </a:xfrm>
           <a:prstGeom prst="rect">
@@ -7844,7 +7953,7 @@
           </a:bodyPr>
           <a:lstStyle/>
           <a:p>
-            <a:pPr algn="ctr" indent="0" marL="0">
+            <a:pPr marL="0" indent="0" algn="ctr">
               <a:buNone/>
             </a:pPr>
             <a:r>
@@ -7870,7 +7979,7 @@
         </p:nvSpPr>
         <p:spPr>
           <a:xfrm>
-            <a:off x="5021238" y="3449092"/>
+            <a:off x="5021238" y="4105126"/>
             <a:ext cx="4057204" cy="2845594"/>
           </a:xfrm>
           <a:prstGeom prst="roundRect">
@@ -7888,6 +7997,13 @@
             <a:prstDash val="solid"/>
           </a:ln>
         </p:spPr>
+        <p:txBody>
+          <a:bodyPr/>
+          <a:lstStyle/>
+          <a:p>
+            <a:endParaRPr lang="en-GB"/>
+          </a:p>
+        </p:txBody>
       </p:sp>
       <p:sp>
         <p:nvSpPr>
@@ -7897,7 +8013,7 @@
         </p:nvSpPr>
         <p:spPr>
           <a:xfrm>
-            <a:off x="5316513" y="3744367"/>
+            <a:off x="5316513" y="4400401"/>
             <a:ext cx="3813319" cy="295275"/>
           </a:xfrm>
           <a:prstGeom prst="rect">
@@ -7908,11 +8024,11 @@
         </p:spPr>
         <p:txBody>
           <a:bodyPr wrap="square" lIns="25400" tIns="25400" rIns="25400" bIns="25400" rtlCol="0" anchor="t">
-            <a:normAutofit/>
-          </a:bodyPr>
-          <a:lstStyle/>
-          <a:p>
-            <a:pPr algn="l" indent="0" marL="0">
+            <a:normAutofit fontScale="92500" lnSpcReduction="10000"/>
+          </a:bodyPr>
+          <a:lstStyle/>
+          <a:p>
+            <a:pPr marL="0" indent="0" algn="l">
               <a:buNone/>
             </a:pPr>
             <a:r>
@@ -7938,7 +8054,7 @@
         </p:nvSpPr>
         <p:spPr>
           <a:xfrm>
-            <a:off x="5316513" y="4153942"/>
+            <a:off x="5316513" y="4809976"/>
             <a:ext cx="3570653" cy="1883569"/>
           </a:xfrm>
           <a:prstGeom prst="rect">
@@ -7953,7 +8069,7 @@
           </a:bodyPr>
           <a:lstStyle/>
           <a:p>
-            <a:pPr algn="l" indent="0" marL="0">
+            <a:pPr marL="0" indent="0" algn="l">
               <a:lnSpc>
                 <a:spcPct val="155000"/>
               </a:lnSpc>
@@ -7982,7 +8098,7 @@
         </p:nvSpPr>
         <p:spPr>
           <a:xfrm>
-            <a:off x="9040341" y="3449092"/>
+            <a:off x="9040341" y="4105126"/>
             <a:ext cx="781050" cy="2883694"/>
           </a:xfrm>
           <a:prstGeom prst="rect">
@@ -7997,7 +8113,7 @@
           </a:bodyPr>
           <a:lstStyle/>
           <a:p>
-            <a:pPr algn="ctr" indent="0" marL="0">
+            <a:pPr marL="0" indent="0" algn="ctr">
               <a:buNone/>
             </a:pPr>
             <a:r>
@@ -8023,7 +8139,7 @@
         </p:nvSpPr>
         <p:spPr>
           <a:xfrm>
-            <a:off x="9783291" y="3449092"/>
+            <a:off x="9783291" y="4105126"/>
             <a:ext cx="3502521" cy="2845594"/>
           </a:xfrm>
           <a:prstGeom prst="roundRect">
@@ -8041,6 +8157,13 @@
             <a:prstDash val="solid"/>
           </a:ln>
         </p:spPr>
+        <p:txBody>
+          <a:bodyPr/>
+          <a:lstStyle/>
+          <a:p>
+            <a:endParaRPr lang="en-GB"/>
+          </a:p>
+        </p:txBody>
       </p:sp>
       <p:sp>
         <p:nvSpPr>
@@ -8050,7 +8173,7 @@
         </p:nvSpPr>
         <p:spPr>
           <a:xfrm>
-            <a:off x="10078566" y="4059882"/>
+            <a:off x="10078566" y="4715916"/>
             <a:ext cx="3203168" cy="295275"/>
           </a:xfrm>
           <a:prstGeom prst="rect">
@@ -8061,11 +8184,11 @@
         </p:spPr>
         <p:txBody>
           <a:bodyPr wrap="square" lIns="25400" tIns="25400" rIns="25400" bIns="25400" rtlCol="0" anchor="t">
-            <a:normAutofit/>
-          </a:bodyPr>
-          <a:lstStyle/>
-          <a:p>
-            <a:pPr algn="l" indent="0" marL="0">
+            <a:normAutofit fontScale="92500" lnSpcReduction="10000"/>
+          </a:bodyPr>
+          <a:lstStyle/>
+          <a:p>
+            <a:pPr marL="0" indent="0" algn="l">
               <a:buNone/>
             </a:pPr>
             <a:r>
@@ -8091,7 +8214,7 @@
         </p:nvSpPr>
         <p:spPr>
           <a:xfrm>
-            <a:off x="10078566" y="4469457"/>
+            <a:off x="10078566" y="5125491"/>
             <a:ext cx="2999330" cy="1252538"/>
           </a:xfrm>
           <a:prstGeom prst="rect">
@@ -8106,7 +8229,7 @@
           </a:bodyPr>
           <a:lstStyle/>
           <a:p>
-            <a:pPr algn="l" indent="0" marL="0">
+            <a:pPr marL="0" indent="0" algn="l">
               <a:lnSpc>
                 <a:spcPct val="170000"/>
               </a:lnSpc>
@@ -8135,7 +8258,7 @@
         </p:nvSpPr>
         <p:spPr>
           <a:xfrm>
-            <a:off x="13247712" y="3449092"/>
+            <a:off x="13247712" y="4105126"/>
             <a:ext cx="781050" cy="2883694"/>
           </a:xfrm>
           <a:prstGeom prst="rect">
@@ -8150,7 +8273,7 @@
           </a:bodyPr>
           <a:lstStyle/>
           <a:p>
-            <a:pPr algn="ctr" indent="0" marL="0">
+            <a:pPr marL="0" indent="0" algn="ctr">
               <a:buNone/>
             </a:pPr>
             <a:r>
@@ -8176,7 +8299,7 @@
         </p:nvSpPr>
         <p:spPr>
           <a:xfrm>
-            <a:off x="13990662" y="3449092"/>
+            <a:off x="13990662" y="4105126"/>
             <a:ext cx="3344838" cy="2845594"/>
           </a:xfrm>
           <a:prstGeom prst="roundRect">
@@ -8189,6 +8312,13 @@
           </a:solidFill>
           <a:ln/>
         </p:spPr>
+        <p:txBody>
+          <a:bodyPr/>
+          <a:lstStyle/>
+          <a:p>
+            <a:endParaRPr lang="en-GB"/>
+          </a:p>
+        </p:txBody>
       </p:sp>
       <p:sp>
         <p:nvSpPr>
@@ -8198,7 +8328,7 @@
         </p:nvSpPr>
         <p:spPr>
           <a:xfrm>
-            <a:off x="14276412" y="4187577"/>
+            <a:off x="14276412" y="4843611"/>
             <a:ext cx="3050671" cy="661987"/>
           </a:xfrm>
           <a:prstGeom prst="rect">
@@ -8209,11 +8339,11 @@
         </p:spPr>
         <p:txBody>
           <a:bodyPr wrap="square" lIns="25400" tIns="25400" rIns="25400" bIns="25400" rtlCol="0" anchor="t">
-            <a:normAutofit/>
-          </a:bodyPr>
-          <a:lstStyle/>
-          <a:p>
-            <a:pPr algn="l" indent="0" marL="0">
+            <a:normAutofit lnSpcReduction="10000"/>
+          </a:bodyPr>
+          <a:lstStyle/>
+          <a:p>
+            <a:pPr marL="0" indent="0" algn="l">
               <a:buNone/>
             </a:pPr>
             <a:r>
@@ -8239,7 +8369,7 @@
         </p:nvSpPr>
         <p:spPr>
           <a:xfrm>
-            <a:off x="14276412" y="4887664"/>
+            <a:off x="14276412" y="5543698"/>
             <a:ext cx="2856538" cy="706636"/>
           </a:xfrm>
           <a:prstGeom prst="rect">
@@ -8250,11 +8380,11 @@
         </p:spPr>
         <p:txBody>
           <a:bodyPr wrap="square" lIns="25400" tIns="25400" rIns="25400" bIns="25400" rtlCol="0" anchor="t">
-            <a:normAutofit/>
-          </a:bodyPr>
-          <a:lstStyle/>
-          <a:p>
-            <a:pPr algn="l" indent="0" marL="0">
+            <a:normAutofit fontScale="92500" lnSpcReduction="20000"/>
+          </a:bodyPr>
+          <a:lstStyle/>
+          <a:p>
+            <a:pPr marL="0" indent="0" algn="l">
               <a:lnSpc>
                 <a:spcPct val="135000"/>
               </a:lnSpc>
@@ -8283,7 +8413,7 @@
         </p:nvSpPr>
         <p:spPr>
           <a:xfrm>
-            <a:off x="952500" y="6675686"/>
+            <a:off x="952500" y="7331720"/>
             <a:ext cx="13342620" cy="805755"/>
           </a:xfrm>
           <a:prstGeom prst="rect">
@@ -8294,11 +8424,11 @@
         </p:spPr>
         <p:txBody>
           <a:bodyPr wrap="square" lIns="25400" tIns="25400" rIns="25400" bIns="25400" rtlCol="0" anchor="t">
-            <a:normAutofit/>
-          </a:bodyPr>
-          <a:lstStyle/>
-          <a:p>
-            <a:pPr algn="l" indent="0" marL="0">
+            <a:normAutofit fontScale="92500" lnSpcReduction="10000"/>
+          </a:bodyPr>
+          <a:lstStyle/>
+          <a:p>
+            <a:pPr marL="0" indent="0" algn="l">
               <a:lnSpc>
                 <a:spcPct val="145000"/>
               </a:lnSpc>
@@ -8315,12 +8445,6 @@
               </a:rPr>
               <a:t>The same script cleans training </a:t>
             </a:r>
-            <a:pPr algn="l" indent="0" marL="0">
-              <a:lnSpc>
-                <a:spcPct val="145000"/>
-              </a:lnSpc>
-              <a:buNone/>
-            </a:pPr>
             <a:r>
               <a:rPr lang="en-US" sz="2025" b="1" dirty="0">
                 <a:solidFill>
@@ -8332,12 +8456,6 @@
               </a:rPr>
               <a:t>and </a:t>
             </a:r>
-            <a:pPr algn="l" indent="0" marL="0">
-              <a:lnSpc>
-                <a:spcPct val="145000"/>
-              </a:lnSpc>
-              <a:buNone/>
-            </a:pPr>
             <a:r>
               <a:rPr lang="en-US" sz="2025" dirty="0">
                 <a:solidFill>
@@ -8349,12 +8467,6 @@
               </a:rPr>
               <a:t>test data identically, and adds </a:t>
             </a:r>
-            <a:pPr algn="l" indent="0" marL="0">
-              <a:lnSpc>
-                <a:spcPct val="145000"/>
-              </a:lnSpc>
-              <a:buNone/>
-            </a:pPr>
             <a:r>
               <a:rPr lang="en-US" sz="2025" b="1" dirty="0">
                 <a:solidFill>
@@ -8366,12 +8478,6 @@
               </a:rPr>
               <a:t>missingness flags </a:t>
             </a:r>
-            <a:pPr algn="l" indent="0" marL="0">
-              <a:lnSpc>
-                <a:spcPct val="145000"/>
-              </a:lnSpc>
-              <a:buNone/>
-            </a:pPr>
             <a:r>
               <a:rPr lang="en-US" sz="2025" dirty="0">
                 <a:solidFill>
@@ -8383,12 +8489,6 @@
               </a:rPr>
               <a:t>— </a:t>
             </a:r>
-            <a:pPr algn="l" indent="0" marL="0">
-              <a:lnSpc>
-                <a:spcPct val="145000"/>
-              </a:lnSpc>
-              <a:buNone/>
-            </a:pPr>
             <a:r>
               <a:rPr lang="en-US" sz="1800" dirty="0">
                 <a:solidFill>
@@ -8400,12 +8500,6 @@
               </a:rPr>
               <a:t>ann_income_missing</a:t>
             </a:r>
-            <a:pPr algn="l" indent="0" marL="0">
-              <a:lnSpc>
-                <a:spcPct val="145000"/>
-              </a:lnSpc>
-              <a:buNone/>
-            </a:pPr>
             <a:r>
               <a:rPr lang="en-US" sz="2025" dirty="0">
                 <a:solidFill>
@@ -8417,12 +8511,6 @@
               </a:rPr>
               <a:t>, </a:t>
             </a:r>
-            <a:pPr algn="l" indent="0" marL="0">
-              <a:lnSpc>
-                <a:spcPct val="145000"/>
-              </a:lnSpc>
-              <a:buNone/>
-            </a:pPr>
             <a:r>
               <a:rPr lang="en-US" sz="1800" dirty="0">
                 <a:solidFill>
@@ -8434,12 +8522,6 @@
               </a:rPr>
               <a:t>other_income_missing</a:t>
             </a:r>
-            <a:pPr algn="l" indent="0" marL="0">
-              <a:lnSpc>
-                <a:spcPct val="145000"/>
-              </a:lnSpc>
-              <a:buNone/>
-            </a:pPr>
             <a:r>
               <a:rPr lang="en-US" sz="2025" dirty="0">
                 <a:solidFill>
@@ -8451,12 +8533,6 @@
               </a:rPr>
               <a:t>, </a:t>
             </a:r>
-            <a:pPr algn="l" indent="0" marL="0">
-              <a:lnSpc>
-                <a:spcPct val="145000"/>
-              </a:lnSpc>
-              <a:buNone/>
-            </a:pPr>
             <a:r>
               <a:rPr lang="en-US" sz="1800" dirty="0">
                 <a:solidFill>
@@ -8468,12 +8544,6 @@
               </a:rPr>
               <a:t>prev_default_missing </a:t>
             </a:r>
-            <a:pPr algn="l" indent="0" marL="0">
-              <a:lnSpc>
-                <a:spcPct val="145000"/>
-              </a:lnSpc>
-              <a:buNone/>
-            </a:pPr>
             <a:r>
               <a:rPr lang="en-US" sz="2025" dirty="0">
                 <a:solidFill>
@@ -8497,7 +8567,7 @@
         </p:nvSpPr>
         <p:spPr>
           <a:xfrm>
-            <a:off x="952500" y="7576691"/>
+            <a:off x="952500" y="8232725"/>
             <a:ext cx="13342620" cy="678061"/>
           </a:xfrm>
           <a:prstGeom prst="rect">
@@ -8508,11 +8578,11 @@
         </p:spPr>
         <p:txBody>
           <a:bodyPr wrap="square" lIns="25400" tIns="25400" rIns="25400" bIns="25400" rtlCol="0" anchor="t">
-            <a:normAutofit/>
-          </a:bodyPr>
-          <a:lstStyle/>
-          <a:p>
-            <a:pPr algn="l" indent="0" marL="0">
+            <a:normAutofit fontScale="92500" lnSpcReduction="20000"/>
+          </a:bodyPr>
+          <a:lstStyle/>
+          <a:p>
+            <a:pPr marL="0" indent="0" algn="l">
               <a:lnSpc>
                 <a:spcPct val="140000"/>
               </a:lnSpc>
@@ -8529,12 +8599,6 @@
               </a:rPr>
               <a:t>Credit scores are z-scored using </a:t>
             </a:r>
-            <a:pPr algn="l" indent="0" marL="0">
-              <a:lnSpc>
-                <a:spcPct val="140000"/>
-              </a:lnSpc>
-              <a:buNone/>
-            </a:pPr>
             <a:r>
               <a:rPr lang="en-US" sz="1800" b="1" dirty="0">
                 <a:solidFill>
@@ -8546,12 +8610,6 @@
               </a:rPr>
               <a:t>train-only statistics </a:t>
             </a:r>
-            <a:pPr algn="l" indent="0" marL="0">
-              <a:lnSpc>
-                <a:spcPct val="140000"/>
-              </a:lnSpc>
-              <a:buNone/>
-            </a:pPr>
             <a:r>
               <a:rPr lang="en-US" sz="1800" dirty="0">
                 <a:solidFill>
@@ -8586,6 +8644,13 @@
           </a:solidFill>
           <a:ln/>
         </p:spPr>
+        <p:txBody>
+          <a:bodyPr/>
+          <a:lstStyle/>
+          <a:p>
+            <a:endParaRPr lang="en-GB"/>
+          </a:p>
+        </p:txBody>
       </p:sp>
       <p:sp>
         <p:nvSpPr>
@@ -8606,11 +8671,11 @@
         </p:spPr>
         <p:txBody>
           <a:bodyPr wrap="square" lIns="25400" tIns="25400" rIns="25400" bIns="25400" rtlCol="0" anchor="t">
-            <a:normAutofit/>
-          </a:bodyPr>
-          <a:lstStyle/>
-          <a:p>
-            <a:pPr algn="l" indent="0" marL="0">
+            <a:normAutofit fontScale="92500" lnSpcReduction="10000"/>
+          </a:bodyPr>
+          <a:lstStyle/>
+          <a:p>
+            <a:pPr marL="0" indent="0" algn="l">
               <a:buNone/>
             </a:pPr>
             <a:r>
@@ -8628,6 +8693,36 @@
           </a:p>
         </p:txBody>
       </p:sp>
+      <p:pic>
+        <p:nvPicPr>
+          <p:cNvPr id="24" name="Picture 23">
+            <a:extLst>
+              <a:ext uri="{FF2B5EF4-FFF2-40B4-BE49-F238E27FC236}">
+                <a16:creationId xmlns:a16="http://schemas.microsoft.com/office/drawing/2014/main" id="{F92F4531-B16F-C979-C433-81F52CCEA065}"/>
+              </a:ext>
+            </a:extLst>
+          </p:cNvPr>
+          <p:cNvPicPr>
+            <a:picLocks noChangeAspect="1"/>
+          </p:cNvPicPr>
+          <p:nvPr/>
+        </p:nvPicPr>
+        <p:blipFill>
+          <a:blip r:embed="rId3"/>
+          <a:stretch>
+            <a:fillRect/>
+          </a:stretch>
+        </p:blipFill>
+        <p:spPr>
+          <a:xfrm>
+            <a:off x="2401561" y="2150670"/>
+            <a:ext cx="13277559" cy="1665269"/>
+          </a:xfrm>
+          <a:prstGeom prst="rect">
+            <a:avLst/>
+          </a:prstGeom>
+        </p:spPr>
+      </p:pic>
     </p:spTree>
   </p:cSld>
   <p:clrMapOvr>
@@ -8644,6 +8739,7 @@
         <a:solidFill>
           <a:srgbClr val="FFFFFF"/>
         </a:solidFill>
+        <a:effectLst/>
       </p:bgPr>
     </p:bg>
     <p:spTree>
@@ -8679,6 +8775,13 @@
           </a:solidFill>
           <a:ln/>
         </p:spPr>
+        <p:txBody>
+          <a:bodyPr/>
+          <a:lstStyle/>
+          <a:p>
+            <a:endParaRPr lang="en-GB"/>
+          </a:p>
+        </p:txBody>
       </p:sp>
       <p:sp>
         <p:nvSpPr>
@@ -8699,15 +8802,15 @@
         </p:spPr>
         <p:txBody>
           <a:bodyPr wrap="square" lIns="25400" tIns="25400" rIns="25400" bIns="25400" rtlCol="0" anchor="t">
-            <a:normAutofit/>
-          </a:bodyPr>
-          <a:lstStyle/>
-          <a:p>
-            <a:pPr algn="l" indent="0" marL="0">
-              <a:buNone/>
-            </a:pPr>
-            <a:r>
-              <a:rPr lang="en-US" sz="1800" spc="225" kern="0" dirty="0">
+            <a:normAutofit fontScale="92500" lnSpcReduction="10000"/>
+          </a:bodyPr>
+          <a:lstStyle/>
+          <a:p>
+            <a:pPr marL="0" indent="0" algn="l">
+              <a:buNone/>
+            </a:pPr>
+            <a:r>
+              <a:rPr lang="en-US" sz="1800" kern="0" spc="225" dirty="0">
                 <a:solidFill>
                   <a:srgbClr val="007A33"/>
                 </a:solidFill>
@@ -8740,18 +8843,18 @@
         </p:spPr>
         <p:txBody>
           <a:bodyPr wrap="square" lIns="25400" tIns="25400" rIns="25400" bIns="25400" rtlCol="0" anchor="t">
-            <a:normAutofit/>
-          </a:bodyPr>
-          <a:lstStyle/>
-          <a:p>
-            <a:pPr algn="l" indent="0" marL="0">
+            <a:normAutofit fontScale="92500" lnSpcReduction="10000"/>
+          </a:bodyPr>
+          <a:lstStyle/>
+          <a:p>
+            <a:pPr marL="0" indent="0" algn="l">
               <a:lnSpc>
                 <a:spcPct val="112000"/>
               </a:lnSpc>
               <a:buNone/>
             </a:pPr>
             <a:r>
-              <a:rPr lang="en-US" sz="3600" b="1" spc="-37" kern="0" dirty="0">
+              <a:rPr lang="en-US" sz="3600" b="1" kern="0" spc="-37" dirty="0">
                 <a:solidFill>
                   <a:srgbClr val="063D22"/>
                 </a:solidFill>
@@ -8784,11 +8887,11 @@
         </p:spPr>
         <p:txBody>
           <a:bodyPr wrap="square" lIns="25400" tIns="25400" rIns="25400" bIns="25400" rtlCol="0" anchor="t">
-            <a:normAutofit/>
-          </a:bodyPr>
-          <a:lstStyle/>
-          <a:p>
-            <a:pPr algn="l" indent="0" marL="0">
+            <a:normAutofit lnSpcReduction="10000"/>
+          </a:bodyPr>
+          <a:lstStyle/>
+          <a:p>
+            <a:pPr marL="0" indent="0" algn="l">
               <a:buNone/>
             </a:pPr>
             <a:r>
@@ -8825,11 +8928,11 @@
         </p:spPr>
         <p:txBody>
           <a:bodyPr wrap="square" lIns="25400" tIns="25400" rIns="25400" bIns="25400" rtlCol="0" anchor="t">
-            <a:normAutofit/>
-          </a:bodyPr>
-          <a:lstStyle/>
-          <a:p>
-            <a:pPr algn="l" indent="0" marL="0">
+            <a:normAutofit fontScale="92500"/>
+          </a:bodyPr>
+          <a:lstStyle/>
+          <a:p>
+            <a:pPr marL="0" indent="0" algn="l">
               <a:lnSpc>
                 <a:spcPct val="135000"/>
               </a:lnSpc>
@@ -8869,11 +8972,11 @@
         </p:spPr>
         <p:txBody>
           <a:bodyPr wrap="square" lIns="25400" tIns="25400" rIns="25400" bIns="25400" rtlCol="0" anchor="t">
-            <a:normAutofit/>
-          </a:bodyPr>
-          <a:lstStyle/>
-          <a:p>
-            <a:pPr algn="l" indent="0" marL="0">
+            <a:normAutofit lnSpcReduction="10000"/>
+          </a:bodyPr>
+          <a:lstStyle/>
+          <a:p>
+            <a:pPr marL="0" indent="0" algn="l">
               <a:buNone/>
             </a:pPr>
             <a:r>
@@ -8910,11 +9013,11 @@
         </p:spPr>
         <p:txBody>
           <a:bodyPr wrap="square" lIns="25400" tIns="25400" rIns="25400" bIns="25400" rtlCol="0" anchor="t">
-            <a:normAutofit/>
-          </a:bodyPr>
-          <a:lstStyle/>
-          <a:p>
-            <a:pPr algn="l" indent="0" marL="0">
+            <a:normAutofit fontScale="92500" lnSpcReduction="10000"/>
+          </a:bodyPr>
+          <a:lstStyle/>
+          <a:p>
+            <a:pPr marL="0" indent="0" algn="l">
               <a:lnSpc>
                 <a:spcPct val="135000"/>
               </a:lnSpc>
@@ -8954,6 +9057,13 @@
           </a:solidFill>
           <a:ln/>
         </p:spPr>
+        <p:txBody>
+          <a:bodyPr/>
+          <a:lstStyle/>
+          <a:p>
+            <a:endParaRPr lang="en-GB"/>
+          </a:p>
+        </p:txBody>
       </p:sp>
       <p:sp>
         <p:nvSpPr>
@@ -8974,11 +9084,11 @@
         </p:spPr>
         <p:txBody>
           <a:bodyPr wrap="square" lIns="25400" tIns="25400" rIns="25400" bIns="25400" rtlCol="0" anchor="t">
-            <a:normAutofit/>
-          </a:bodyPr>
-          <a:lstStyle/>
-          <a:p>
-            <a:pPr algn="l" indent="0" marL="0">
+            <a:normAutofit fontScale="92500" lnSpcReduction="10000"/>
+          </a:bodyPr>
+          <a:lstStyle/>
+          <a:p>
+            <a:pPr marL="0" indent="0" algn="l">
               <a:buNone/>
             </a:pPr>
             <a:r>
@@ -9044,6 +9154,154 @@
           </a:prstGeom>
         </p:spPr>
       </p:pic>
+      <p:sp>
+        <p:nvSpPr>
+          <p:cNvPr id="13" name="TextBox 12">
+            <a:extLst>
+              <a:ext uri="{FF2B5EF4-FFF2-40B4-BE49-F238E27FC236}">
+                <a16:creationId xmlns:a16="http://schemas.microsoft.com/office/drawing/2014/main" id="{93C6C84A-8D72-6B88-2FA7-01657B29A72D}"/>
+              </a:ext>
+            </a:extLst>
+          </p:cNvPr>
+          <p:cNvSpPr txBox="1"/>
+          <p:nvPr/>
+        </p:nvSpPr>
+        <p:spPr>
+          <a:xfrm>
+            <a:off x="10394831" y="8640318"/>
+            <a:ext cx="2646611" cy="369332"/>
+          </a:xfrm>
+          <a:prstGeom prst="rect">
+            <a:avLst/>
+          </a:prstGeom>
+          <a:noFill/>
+        </p:spPr>
+        <p:txBody>
+          <a:bodyPr wrap="square" rtlCol="0">
+            <a:spAutoFit/>
+          </a:bodyPr>
+          <a:lstStyle/>
+          <a:p>
+            <a:r>
+              <a:rPr lang="en-DE" b="1" cap="all" dirty="0"/>
+              <a:t>Turn text to category </a:t>
+            </a:r>
+          </a:p>
+        </p:txBody>
+      </p:sp>
+      <p:sp>
+        <p:nvSpPr>
+          <p:cNvPr id="14" name="TextBox 13">
+            <a:extLst>
+              <a:ext uri="{FF2B5EF4-FFF2-40B4-BE49-F238E27FC236}">
+                <a16:creationId xmlns:a16="http://schemas.microsoft.com/office/drawing/2014/main" id="{AACC180B-A0C6-A78B-63DA-A769B29E2A7A}"/>
+              </a:ext>
+            </a:extLst>
+          </p:cNvPr>
+          <p:cNvSpPr txBox="1"/>
+          <p:nvPr/>
+        </p:nvSpPr>
+        <p:spPr>
+          <a:xfrm>
+            <a:off x="14459663" y="8494284"/>
+            <a:ext cx="2646611" cy="646331"/>
+          </a:xfrm>
+          <a:prstGeom prst="rect">
+            <a:avLst/>
+          </a:prstGeom>
+          <a:noFill/>
+        </p:spPr>
+        <p:txBody>
+          <a:bodyPr wrap="square" rtlCol="0">
+            <a:spAutoFit/>
+          </a:bodyPr>
+          <a:lstStyle/>
+          <a:p>
+            <a:r>
+              <a:rPr lang="en-DE" b="1" cap="all" dirty="0"/>
+              <a:t>Gradient boost model (Lightgbm), no tf-idf</a:t>
+            </a:r>
+          </a:p>
+        </p:txBody>
+      </p:sp>
+      <p:cxnSp>
+        <p:nvCxnSpPr>
+          <p:cNvPr id="16" name="Straight Arrow Connector 15">
+            <a:extLst>
+              <a:ext uri="{FF2B5EF4-FFF2-40B4-BE49-F238E27FC236}">
+                <a16:creationId xmlns:a16="http://schemas.microsoft.com/office/drawing/2014/main" id="{D43197BD-2397-CC5B-FB91-B62AB2848916}"/>
+              </a:ext>
+            </a:extLst>
+          </p:cNvPr>
+          <p:cNvCxnSpPr>
+            <a:cxnSpLocks/>
+            <a:stCxn id="13" idx="3"/>
+            <a:endCxn id="14" idx="1"/>
+          </p:cNvCxnSpPr>
+          <p:nvPr/>
+        </p:nvCxnSpPr>
+        <p:spPr>
+          <a:xfrm flipV="1">
+            <a:off x="13041442" y="8817450"/>
+            <a:ext cx="1418221" cy="7534"/>
+          </a:xfrm>
+          <a:prstGeom prst="straightConnector1">
+            <a:avLst/>
+          </a:prstGeom>
+          <a:ln>
+            <a:tailEnd type="triangle"/>
+          </a:ln>
+        </p:spPr>
+        <p:style>
+          <a:lnRef idx="1">
+            <a:schemeClr val="accent1"/>
+          </a:lnRef>
+          <a:fillRef idx="0">
+            <a:schemeClr val="accent1"/>
+          </a:fillRef>
+          <a:effectRef idx="0">
+            <a:schemeClr val="accent1"/>
+          </a:effectRef>
+          <a:fontRef idx="minor">
+            <a:schemeClr val="tx1"/>
+          </a:fontRef>
+        </p:style>
+      </p:cxnSp>
+      <p:sp>
+        <p:nvSpPr>
+          <p:cNvPr id="21" name="TextBox 20">
+            <a:extLst>
+              <a:ext uri="{FF2B5EF4-FFF2-40B4-BE49-F238E27FC236}">
+                <a16:creationId xmlns:a16="http://schemas.microsoft.com/office/drawing/2014/main" id="{710B0613-D128-4C51-03A4-488D2F25D790}"/>
+              </a:ext>
+            </a:extLst>
+          </p:cNvPr>
+          <p:cNvSpPr txBox="1"/>
+          <p:nvPr/>
+        </p:nvSpPr>
+        <p:spPr>
+          <a:xfrm>
+            <a:off x="4482509" y="8160071"/>
+            <a:ext cx="2646611" cy="369332"/>
+          </a:xfrm>
+          <a:prstGeom prst="rect">
+            <a:avLst/>
+          </a:prstGeom>
+          <a:noFill/>
+        </p:spPr>
+        <p:txBody>
+          <a:bodyPr wrap="square" rtlCol="0">
+            <a:spAutoFit/>
+          </a:bodyPr>
+          <a:lstStyle/>
+          <a:p>
+            <a:r>
+              <a:rPr lang="en-DE" b="1" cap="all" dirty="0"/>
+              <a:t>Risk_indicator</a:t>
+            </a:r>
+          </a:p>
+        </p:txBody>
+      </p:sp>
     </p:spTree>
   </p:cSld>
   <p:clrMapOvr>
@@ -9060,6 +9318,7 @@
         <a:solidFill>
           <a:srgbClr val="1A7A57"/>
         </a:solidFill>
+        <a:effectLst/>
       </p:bgPr>
     </p:bg>
     <p:spTree>
@@ -9097,6 +9356,13 @@
           </a:solidFill>
           <a:ln/>
         </p:spPr>
+        <p:txBody>
+          <a:bodyPr/>
+          <a:lstStyle/>
+          <a:p>
+            <a:endParaRPr lang="en-GB"/>
+          </a:p>
+        </p:txBody>
       </p:sp>
       <p:sp>
         <p:nvSpPr>
@@ -9117,15 +9383,15 @@
         </p:spPr>
         <p:txBody>
           <a:bodyPr wrap="square" lIns="25400" tIns="25400" rIns="25400" bIns="25400" rtlCol="0" anchor="t">
-            <a:normAutofit/>
-          </a:bodyPr>
-          <a:lstStyle/>
-          <a:p>
-            <a:pPr algn="l" indent="0" marL="0">
-              <a:buNone/>
-            </a:pPr>
-            <a:r>
-              <a:rPr lang="en-US" sz="1800" spc="225" kern="0" dirty="0">
+            <a:normAutofit fontScale="92500" lnSpcReduction="10000"/>
+          </a:bodyPr>
+          <a:lstStyle/>
+          <a:p>
+            <a:pPr marL="0" indent="0" algn="l">
+              <a:buNone/>
+            </a:pPr>
+            <a:r>
+              <a:rPr lang="en-US" sz="1800" kern="0" spc="225" dirty="0">
                 <a:solidFill>
                   <a:srgbClr val="B2E0D4"/>
                 </a:solidFill>
@@ -9158,18 +9424,18 @@
         </p:spPr>
         <p:txBody>
           <a:bodyPr wrap="square" lIns="25400" tIns="25400" rIns="25400" bIns="25400" rtlCol="0" anchor="t">
-            <a:normAutofit/>
-          </a:bodyPr>
-          <a:lstStyle/>
-          <a:p>
-            <a:pPr algn="l" indent="0" marL="0">
+            <a:normAutofit fontScale="92500" lnSpcReduction="10000"/>
+          </a:bodyPr>
+          <a:lstStyle/>
+          <a:p>
+            <a:pPr marL="0" indent="0" algn="l">
               <a:lnSpc>
                 <a:spcPct val="112000"/>
               </a:lnSpc>
               <a:buNone/>
             </a:pPr>
             <a:r>
-              <a:rPr lang="en-US" sz="3600" b="1" spc="-37" kern="0" dirty="0">
+              <a:rPr lang="en-US" sz="3600" b="1" kern="0" spc="-37" dirty="0">
                 <a:solidFill>
                   <a:srgbClr val="FFFFFF"/>
                 </a:solidFill>
@@ -9191,7 +9457,7 @@
         </p:nvSpPr>
         <p:spPr>
           <a:xfrm>
-            <a:off x="952500" y="4132659"/>
+            <a:off x="952500" y="3997524"/>
             <a:ext cx="8463774" cy="295275"/>
           </a:xfrm>
           <a:prstGeom prst="rect">
@@ -9202,11 +9468,11 @@
         </p:spPr>
         <p:txBody>
           <a:bodyPr wrap="square" lIns="25400" tIns="25400" rIns="25400" bIns="25400" rtlCol="0" anchor="t">
-            <a:normAutofit/>
-          </a:bodyPr>
-          <a:lstStyle/>
-          <a:p>
-            <a:pPr algn="l" indent="0" marL="0">
+            <a:normAutofit fontScale="92500" lnSpcReduction="10000"/>
+          </a:bodyPr>
+          <a:lstStyle/>
+          <a:p>
+            <a:pPr marL="0" indent="0" algn="l">
               <a:buNone/>
             </a:pPr>
             <a:r>
@@ -9243,11 +9509,11 @@
         </p:spPr>
         <p:txBody>
           <a:bodyPr wrap="square" lIns="25400" tIns="25400" rIns="25400" bIns="25400" rtlCol="0" anchor="t">
-            <a:normAutofit/>
-          </a:bodyPr>
-          <a:lstStyle/>
-          <a:p>
-            <a:pPr algn="l" indent="0" marL="0">
+            <a:normAutofit lnSpcReduction="10000"/>
+          </a:bodyPr>
+          <a:lstStyle/>
+          <a:p>
+            <a:pPr marL="0" indent="0" algn="l">
               <a:buNone/>
             </a:pPr>
             <a:r>
@@ -9286,6 +9552,13 @@
           </a:solidFill>
           <a:ln/>
         </p:spPr>
+        <p:txBody>
+          <a:bodyPr/>
+          <a:lstStyle/>
+          <a:p>
+            <a:endParaRPr lang="en-GB"/>
+          </a:p>
+        </p:txBody>
       </p:sp>
       <p:sp>
         <p:nvSpPr>
@@ -9306,11 +9579,11 @@
         </p:spPr>
         <p:txBody>
           <a:bodyPr wrap="square" lIns="25400" tIns="25400" rIns="25400" bIns="25400" rtlCol="0" anchor="t">
-            <a:normAutofit/>
-          </a:bodyPr>
-          <a:lstStyle/>
-          <a:p>
-            <a:pPr algn="ctr" indent="0" marL="0">
+            <a:normAutofit fontScale="92500" lnSpcReduction="10000"/>
+          </a:bodyPr>
+          <a:lstStyle/>
+          <a:p>
+            <a:pPr marL="0" indent="0" algn="ctr">
               <a:lnSpc>
                 <a:spcPct val="130000"/>
               </a:lnSpc>
@@ -9339,7 +9612,7 @@
         </p:nvSpPr>
         <p:spPr>
           <a:xfrm>
-            <a:off x="6226746" y="4637484"/>
+            <a:off x="6292930" y="4366095"/>
             <a:ext cx="1343739" cy="500063"/>
           </a:xfrm>
           <a:prstGeom prst="rect">
@@ -9350,11 +9623,11 @@
         </p:spPr>
         <p:txBody>
           <a:bodyPr wrap="square" lIns="25400" tIns="25400" rIns="25400" bIns="25400" rtlCol="0" anchor="t">
-            <a:normAutofit/>
-          </a:bodyPr>
-          <a:lstStyle/>
-          <a:p>
-            <a:pPr algn="l" indent="0" marL="0">
+            <a:normAutofit lnSpcReduction="10000"/>
+          </a:bodyPr>
+          <a:lstStyle/>
+          <a:p>
+            <a:pPr marL="0" indent="0" algn="l">
               <a:buNone/>
             </a:pPr>
             <a:r>
@@ -9380,8 +9653,8 @@
         </p:nvSpPr>
         <p:spPr>
           <a:xfrm>
-            <a:off x="5028233" y="5213747"/>
-            <a:ext cx="3618607" cy="1509713"/>
+            <a:off x="5028233" y="4835129"/>
+            <a:ext cx="3618607" cy="1888332"/>
           </a:xfrm>
           <a:prstGeom prst="roundRect">
             <a:avLst>
@@ -9393,6 +9666,13 @@
           </a:solidFill>
           <a:ln/>
         </p:spPr>
+        <p:txBody>
+          <a:bodyPr/>
+          <a:lstStyle/>
+          <a:p>
+            <a:endParaRPr lang="en-GB"/>
+          </a:p>
+        </p:txBody>
       </p:sp>
       <p:sp>
         <p:nvSpPr>
@@ -9413,11 +9693,11 @@
         </p:spPr>
         <p:txBody>
           <a:bodyPr wrap="square" lIns="25400" tIns="25400" rIns="25400" bIns="25400" rtlCol="0" anchor="t">
-            <a:normAutofit/>
-          </a:bodyPr>
-          <a:lstStyle/>
-          <a:p>
-            <a:pPr algn="ctr" indent="0" marL="0">
+            <a:normAutofit fontScale="92500" lnSpcReduction="10000"/>
+          </a:bodyPr>
+          <a:lstStyle/>
+          <a:p>
+            <a:pPr marL="0" indent="0" algn="ctr">
               <a:lnSpc>
                 <a:spcPct val="130000"/>
               </a:lnSpc>
@@ -9457,11 +9737,11 @@
         </p:spPr>
         <p:txBody>
           <a:bodyPr wrap="square" lIns="25400" tIns="25400" rIns="25400" bIns="25400" rtlCol="0" anchor="t">
-            <a:normAutofit/>
-          </a:bodyPr>
-          <a:lstStyle/>
-          <a:p>
-            <a:pPr algn="l" indent="0" marL="0">
+            <a:normAutofit fontScale="92500" lnSpcReduction="20000"/>
+          </a:bodyPr>
+          <a:lstStyle/>
+          <a:p>
+            <a:pPr marL="0" indent="0" algn="l">
               <a:lnSpc>
                 <a:spcPct val="100000"/>
               </a:lnSpc>
@@ -9501,11 +9781,11 @@
         </p:spPr>
         <p:txBody>
           <a:bodyPr wrap="square" lIns="25400" tIns="25400" rIns="25400" bIns="25400" rtlCol="0" anchor="t">
-            <a:normAutofit/>
-          </a:bodyPr>
-          <a:lstStyle/>
-          <a:p>
-            <a:pPr algn="l" indent="0" marL="0">
+            <a:normAutofit fontScale="92500" lnSpcReduction="10000"/>
+          </a:bodyPr>
+          <a:lstStyle/>
+          <a:p>
+            <a:pPr marL="0" indent="0" algn="l">
               <a:lnSpc>
                 <a:spcPct val="135000"/>
               </a:lnSpc>
@@ -9545,11 +9825,11 @@
         </p:spPr>
         <p:txBody>
           <a:bodyPr wrap="square" lIns="25400" tIns="25400" rIns="25400" bIns="25400" rtlCol="0" anchor="t">
-            <a:normAutofit/>
-          </a:bodyPr>
-          <a:lstStyle/>
-          <a:p>
-            <a:pPr algn="l" indent="0" marL="0">
+            <a:normAutofit fontScale="92500"/>
+          </a:bodyPr>
+          <a:lstStyle/>
+          <a:p>
+            <a:pPr marL="0" indent="0" algn="l">
               <a:lnSpc>
                 <a:spcPct val="150000"/>
               </a:lnSpc>
@@ -9566,12 +9846,6 @@
               </a:rPr>
               <a:t>These columns have </a:t>
             </a:r>
-            <a:pPr algn="l" indent="0" marL="0">
-              <a:lnSpc>
-                <a:spcPct val="150000"/>
-              </a:lnSpc>
-              <a:buNone/>
-            </a:pPr>
             <a:r>
               <a:rPr lang="en-US" sz="2100" b="1" dirty="0">
                 <a:solidFill>
@@ -9583,12 +9857,6 @@
               </a:rPr>
               <a:t>no link to real credit risk </a:t>
             </a:r>
-            <a:pPr algn="l" indent="0" marL="0">
-              <a:lnSpc>
-                <a:spcPct val="150000"/>
-              </a:lnSpc>
-              <a:buNone/>
-            </a:pPr>
             <a:r>
               <a:rPr lang="en-US" sz="2100" dirty="0">
                 <a:solidFill>
@@ -9600,12 +9868,6 @@
               </a:rPr>
               <a:t>, yet they change who gets approved — e.g. </a:t>
             </a:r>
-            <a:pPr algn="l" indent="0" marL="0">
-              <a:lnSpc>
-                <a:spcPct val="150000"/>
-              </a:lnSpc>
-              <a:buNone/>
-            </a:pPr>
             <a:r>
               <a:rPr lang="en-US" sz="2100" b="1" dirty="0">
                 <a:solidFill>
@@ -9617,12 +9879,6 @@
               </a:rPr>
               <a:t>56% vs 45% </a:t>
             </a:r>
-            <a:pPr algn="l" indent="0" marL="0">
-              <a:lnSpc>
-                <a:spcPct val="150000"/>
-              </a:lnSpc>
-              <a:buNone/>
-            </a:pPr>
             <a:r>
               <a:rPr lang="en-US" sz="2100" dirty="0">
                 <a:solidFill>
@@ -9657,11 +9913,11 @@
         </p:spPr>
         <p:txBody>
           <a:bodyPr wrap="square" lIns="25400" tIns="25400" rIns="25400" bIns="25400" rtlCol="0" anchor="t">
-            <a:normAutofit/>
-          </a:bodyPr>
-          <a:lstStyle/>
-          <a:p>
-            <a:pPr algn="l" indent="0" marL="0">
+            <a:normAutofit fontScale="92500" lnSpcReduction="10000"/>
+          </a:bodyPr>
+          <a:lstStyle/>
+          <a:p>
+            <a:pPr marL="0" indent="0" algn="l">
               <a:lnSpc>
                 <a:spcPct val="150000"/>
               </a:lnSpc>
@@ -9703,6 +9959,13 @@
           </a:solidFill>
           <a:ln/>
         </p:spPr>
+        <p:txBody>
+          <a:bodyPr/>
+          <a:lstStyle/>
+          <a:p>
+            <a:endParaRPr lang="en-GB"/>
+          </a:p>
+        </p:txBody>
       </p:sp>
       <p:sp>
         <p:nvSpPr>
@@ -9723,11 +9986,11 @@
         </p:spPr>
         <p:txBody>
           <a:bodyPr wrap="square" lIns="25400" tIns="25400" rIns="25400" bIns="25400" rtlCol="0" anchor="t">
-            <a:normAutofit/>
-          </a:bodyPr>
-          <a:lstStyle/>
-          <a:p>
-            <a:pPr algn="l" indent="0" marL="0">
+            <a:normAutofit fontScale="92500" lnSpcReduction="10000"/>
+          </a:bodyPr>
+          <a:lstStyle/>
+          <a:p>
+            <a:pPr marL="0" indent="0" algn="l">
               <a:buNone/>
             </a:pPr>
             <a:r>
@@ -9761,6 +10024,7 @@
         <a:solidFill>
           <a:srgbClr val="FFFFFF"/>
         </a:solidFill>
+        <a:effectLst/>
       </p:bgPr>
     </p:bg>
     <p:spTree>
@@ -9796,6 +10060,13 @@
           </a:solidFill>
           <a:ln/>
         </p:spPr>
+        <p:txBody>
+          <a:bodyPr/>
+          <a:lstStyle/>
+          <a:p>
+            <a:endParaRPr lang="en-GB"/>
+          </a:p>
+        </p:txBody>
       </p:sp>
       <p:sp>
         <p:nvSpPr>
@@ -9816,15 +10087,15 @@
         </p:spPr>
         <p:txBody>
           <a:bodyPr wrap="square" lIns="25400" tIns="25400" rIns="25400" bIns="25400" rtlCol="0" anchor="t">
-            <a:normAutofit/>
-          </a:bodyPr>
-          <a:lstStyle/>
-          <a:p>
-            <a:pPr algn="l" indent="0" marL="0">
-              <a:buNone/>
-            </a:pPr>
-            <a:r>
-              <a:rPr lang="en-US" sz="1800" spc="225" kern="0" dirty="0">
+            <a:normAutofit fontScale="92500" lnSpcReduction="10000"/>
+          </a:bodyPr>
+          <a:lstStyle/>
+          <a:p>
+            <a:pPr marL="0" indent="0" algn="l">
+              <a:buNone/>
+            </a:pPr>
+            <a:r>
+              <a:rPr lang="en-US" sz="1800" kern="0" spc="225" dirty="0">
                 <a:solidFill>
                   <a:srgbClr val="007A33"/>
                 </a:solidFill>
@@ -9857,18 +10128,18 @@
         </p:spPr>
         <p:txBody>
           <a:bodyPr wrap="square" lIns="25400" tIns="25400" rIns="25400" bIns="25400" rtlCol="0" anchor="t">
-            <a:normAutofit/>
-          </a:bodyPr>
-          <a:lstStyle/>
-          <a:p>
-            <a:pPr algn="l" indent="0" marL="0">
+            <a:normAutofit fontScale="92500" lnSpcReduction="10000"/>
+          </a:bodyPr>
+          <a:lstStyle/>
+          <a:p>
+            <a:pPr marL="0" indent="0" algn="l">
               <a:lnSpc>
                 <a:spcPct val="112000"/>
               </a:lnSpc>
               <a:buNone/>
             </a:pPr>
             <a:r>
-              <a:rPr lang="en-US" sz="3600" b="1" spc="-37" kern="0" dirty="0">
+              <a:rPr lang="en-US" sz="3600" b="1" kern="0" spc="-37" dirty="0">
                 <a:solidFill>
                   <a:srgbClr val="063D22"/>
                 </a:solidFill>
@@ -9901,11 +10172,11 @@
         </p:spPr>
         <p:txBody>
           <a:bodyPr wrap="square" lIns="25400" tIns="25400" rIns="25400" bIns="25400" rtlCol="0" anchor="t">
-            <a:normAutofit/>
-          </a:bodyPr>
-          <a:lstStyle/>
-          <a:p>
-            <a:pPr algn="l" indent="0" marL="0">
+            <a:normAutofit fontScale="92500" lnSpcReduction="10000"/>
+          </a:bodyPr>
+          <a:lstStyle/>
+          <a:p>
+            <a:pPr marL="0" indent="0" algn="l">
               <a:buNone/>
             </a:pPr>
             <a:r>
@@ -9942,11 +10213,11 @@
         </p:spPr>
         <p:txBody>
           <a:bodyPr wrap="square" lIns="25400" tIns="25400" rIns="25400" bIns="25400" rtlCol="0" anchor="t">
-            <a:normAutofit/>
-          </a:bodyPr>
-          <a:lstStyle/>
-          <a:p>
-            <a:pPr algn="l" indent="0" marL="0">
+            <a:normAutofit lnSpcReduction="10000"/>
+          </a:bodyPr>
+          <a:lstStyle/>
+          <a:p>
+            <a:pPr marL="0" indent="0" algn="l">
               <a:buNone/>
             </a:pPr>
             <a:r>
@@ -9985,6 +10256,13 @@
           </a:solidFill>
           <a:ln/>
         </p:spPr>
+        <p:txBody>
+          <a:bodyPr/>
+          <a:lstStyle/>
+          <a:p>
+            <a:endParaRPr lang="en-GB"/>
+          </a:p>
+        </p:txBody>
       </p:sp>
       <p:sp>
         <p:nvSpPr>
@@ -10005,6 +10283,13 @@
           </a:solidFill>
           <a:ln/>
         </p:spPr>
+        <p:txBody>
+          <a:bodyPr/>
+          <a:lstStyle/>
+          <a:p>
+            <a:endParaRPr lang="en-GB"/>
+          </a:p>
+        </p:txBody>
       </p:sp>
       <p:sp>
         <p:nvSpPr>
@@ -10025,11 +10310,11 @@
         </p:spPr>
         <p:txBody>
           <a:bodyPr wrap="square" lIns="25400" tIns="25400" rIns="25400" bIns="25400" rtlCol="0" anchor="t">
-            <a:normAutofit/>
-          </a:bodyPr>
-          <a:lstStyle/>
-          <a:p>
-            <a:pPr algn="r" indent="0" marL="0">
+            <a:normAutofit fontScale="92500" lnSpcReduction="10000"/>
+          </a:bodyPr>
+          <a:lstStyle/>
+          <a:p>
+            <a:pPr marL="0" indent="0" algn="r">
               <a:buNone/>
             </a:pPr>
             <a:r>
@@ -10066,11 +10351,11 @@
         </p:spPr>
         <p:txBody>
           <a:bodyPr wrap="square" lIns="25400" tIns="25400" rIns="25400" bIns="25400" rtlCol="0" anchor="t">
-            <a:normAutofit/>
-          </a:bodyPr>
-          <a:lstStyle/>
-          <a:p>
-            <a:pPr algn="l" indent="0" marL="0">
+            <a:normAutofit lnSpcReduction="10000"/>
+          </a:bodyPr>
+          <a:lstStyle/>
+          <a:p>
+            <a:pPr marL="0" indent="0" algn="l">
               <a:buNone/>
             </a:pPr>
             <a:r>
@@ -10109,6 +10394,13 @@
           </a:solidFill>
           <a:ln/>
         </p:spPr>
+        <p:txBody>
+          <a:bodyPr/>
+          <a:lstStyle/>
+          <a:p>
+            <a:endParaRPr lang="en-GB"/>
+          </a:p>
+        </p:txBody>
       </p:sp>
       <p:sp>
         <p:nvSpPr>
@@ -10129,6 +10421,13 @@
           </a:solidFill>
           <a:ln/>
         </p:spPr>
+        <p:txBody>
+          <a:bodyPr/>
+          <a:lstStyle/>
+          <a:p>
+            <a:endParaRPr lang="en-GB"/>
+          </a:p>
+        </p:txBody>
       </p:sp>
       <p:sp>
         <p:nvSpPr>
@@ -10149,11 +10448,11 @@
         </p:spPr>
         <p:txBody>
           <a:bodyPr wrap="square" lIns="25400" tIns="25400" rIns="25400" bIns="25400" rtlCol="0" anchor="t">
-            <a:normAutofit/>
-          </a:bodyPr>
-          <a:lstStyle/>
-          <a:p>
-            <a:pPr algn="r" indent="0" marL="0">
+            <a:normAutofit fontScale="92500" lnSpcReduction="10000"/>
+          </a:bodyPr>
+          <a:lstStyle/>
+          <a:p>
+            <a:pPr marL="0" indent="0" algn="r">
               <a:buNone/>
             </a:pPr>
             <a:r>
@@ -10190,11 +10489,11 @@
         </p:spPr>
         <p:txBody>
           <a:bodyPr wrap="square" lIns="25400" tIns="25400" rIns="25400" bIns="25400" rtlCol="0" anchor="t">
-            <a:normAutofit/>
-          </a:bodyPr>
-          <a:lstStyle/>
-          <a:p>
-            <a:pPr algn="l" indent="0" marL="0">
+            <a:normAutofit lnSpcReduction="10000"/>
+          </a:bodyPr>
+          <a:lstStyle/>
+          <a:p>
+            <a:pPr marL="0" indent="0" algn="l">
               <a:buNone/>
             </a:pPr>
             <a:r>
@@ -10233,6 +10532,13 @@
           </a:solidFill>
           <a:ln/>
         </p:spPr>
+        <p:txBody>
+          <a:bodyPr/>
+          <a:lstStyle/>
+          <a:p>
+            <a:endParaRPr lang="en-GB"/>
+          </a:p>
+        </p:txBody>
       </p:sp>
       <p:sp>
         <p:nvSpPr>
@@ -10253,6 +10559,13 @@
           </a:solidFill>
           <a:ln/>
         </p:spPr>
+        <p:txBody>
+          <a:bodyPr/>
+          <a:lstStyle/>
+          <a:p>
+            <a:endParaRPr lang="en-GB"/>
+          </a:p>
+        </p:txBody>
       </p:sp>
       <p:sp>
         <p:nvSpPr>
@@ -10273,11 +10586,11 @@
         </p:spPr>
         <p:txBody>
           <a:bodyPr wrap="square" lIns="25400" tIns="25400" rIns="25400" bIns="25400" rtlCol="0" anchor="t">
-            <a:normAutofit/>
-          </a:bodyPr>
-          <a:lstStyle/>
-          <a:p>
-            <a:pPr algn="r" indent="0" marL="0">
+            <a:normAutofit fontScale="92500" lnSpcReduction="10000"/>
+          </a:bodyPr>
+          <a:lstStyle/>
+          <a:p>
+            <a:pPr marL="0" indent="0" algn="r">
               <a:buNone/>
             </a:pPr>
             <a:r>
@@ -10314,11 +10627,11 @@
         </p:spPr>
         <p:txBody>
           <a:bodyPr wrap="square" lIns="25400" tIns="25400" rIns="25400" bIns="25400" rtlCol="0" anchor="t">
-            <a:normAutofit/>
-          </a:bodyPr>
-          <a:lstStyle/>
-          <a:p>
-            <a:pPr algn="l" indent="0" marL="0">
+            <a:normAutofit lnSpcReduction="10000"/>
+          </a:bodyPr>
+          <a:lstStyle/>
+          <a:p>
+            <a:pPr marL="0" indent="0" algn="l">
               <a:buNone/>
             </a:pPr>
             <a:r>
@@ -10357,6 +10670,13 @@
           </a:solidFill>
           <a:ln/>
         </p:spPr>
+        <p:txBody>
+          <a:bodyPr/>
+          <a:lstStyle/>
+          <a:p>
+            <a:endParaRPr lang="en-GB"/>
+          </a:p>
+        </p:txBody>
       </p:sp>
       <p:sp>
         <p:nvSpPr>
@@ -10377,6 +10697,13 @@
           </a:solidFill>
           <a:ln/>
         </p:spPr>
+        <p:txBody>
+          <a:bodyPr/>
+          <a:lstStyle/>
+          <a:p>
+            <a:endParaRPr lang="en-GB"/>
+          </a:p>
+        </p:txBody>
       </p:sp>
       <p:sp>
         <p:nvSpPr>
@@ -10397,11 +10724,11 @@
         </p:spPr>
         <p:txBody>
           <a:bodyPr wrap="square" lIns="25400" tIns="25400" rIns="25400" bIns="25400" rtlCol="0" anchor="t">
-            <a:normAutofit/>
-          </a:bodyPr>
-          <a:lstStyle/>
-          <a:p>
-            <a:pPr algn="r" indent="0" marL="0">
+            <a:normAutofit fontScale="92500" lnSpcReduction="10000"/>
+          </a:bodyPr>
+          <a:lstStyle/>
+          <a:p>
+            <a:pPr marL="0" indent="0" algn="r">
               <a:buNone/>
             </a:pPr>
             <a:r>
@@ -10438,11 +10765,11 @@
         </p:spPr>
         <p:txBody>
           <a:bodyPr wrap="square" lIns="25400" tIns="25400" rIns="25400" bIns="25400" rtlCol="0" anchor="t">
-            <a:normAutofit/>
-          </a:bodyPr>
-          <a:lstStyle/>
-          <a:p>
-            <a:pPr algn="l" indent="0" marL="0">
+            <a:normAutofit lnSpcReduction="10000"/>
+          </a:bodyPr>
+          <a:lstStyle/>
+          <a:p>
+            <a:pPr marL="0" indent="0" algn="l">
               <a:buNone/>
             </a:pPr>
             <a:r>
@@ -10481,6 +10808,13 @@
           </a:solidFill>
           <a:ln/>
         </p:spPr>
+        <p:txBody>
+          <a:bodyPr/>
+          <a:lstStyle/>
+          <a:p>
+            <a:endParaRPr lang="en-GB"/>
+          </a:p>
+        </p:txBody>
       </p:sp>
       <p:sp>
         <p:nvSpPr>
@@ -10501,6 +10835,13 @@
           </a:solidFill>
           <a:ln/>
         </p:spPr>
+        <p:txBody>
+          <a:bodyPr/>
+          <a:lstStyle/>
+          <a:p>
+            <a:endParaRPr lang="en-GB"/>
+          </a:p>
+        </p:txBody>
       </p:sp>
       <p:sp>
         <p:nvSpPr>
@@ -10525,7 +10866,7 @@
           </a:bodyPr>
           <a:lstStyle/>
           <a:p>
-            <a:pPr algn="r" indent="0" marL="0">
+            <a:pPr marL="0" indent="0" algn="r">
               <a:buNone/>
             </a:pPr>
             <a:r>
@@ -10562,11 +10903,11 @@
         </p:spPr>
         <p:txBody>
           <a:bodyPr wrap="square" lIns="25400" tIns="25400" rIns="25400" bIns="25400" rtlCol="0" anchor="t">
-            <a:normAutofit/>
-          </a:bodyPr>
-          <a:lstStyle/>
-          <a:p>
-            <a:pPr algn="l" indent="0" marL="0">
+            <a:normAutofit fontScale="92500" lnSpcReduction="20000"/>
+          </a:bodyPr>
+          <a:lstStyle/>
+          <a:p>
+            <a:pPr marL="0" indent="0" algn="l">
               <a:lnSpc>
                 <a:spcPct val="140000"/>
               </a:lnSpc>
@@ -10583,12 +10924,6 @@
               </a:rPr>
               <a:t>Bars scaled from 0.70 · final label uses a </a:t>
             </a:r>
-            <a:pPr algn="l" indent="0" marL="0">
-              <a:lnSpc>
-                <a:spcPct val="140000"/>
-              </a:lnSpc>
-              <a:buNone/>
-            </a:pPr>
             <a:r>
               <a:rPr lang="en-US" sz="1800" dirty="0">
                 <a:solidFill>
@@ -10600,12 +10935,6 @@
               </a:rPr>
               <a:t>smooth threshold </a:t>
             </a:r>
-            <a:pPr algn="l" indent="0" marL="0">
-              <a:lnSpc>
-                <a:spcPct val="140000"/>
-              </a:lnSpc>
-              <a:buNone/>
-            </a:pPr>
             <a:r>
               <a:rPr lang="en-US" sz="1800" dirty="0">
                 <a:solidFill>
@@ -10642,6 +10971,13 @@
           </a:solidFill>
           <a:ln/>
         </p:spPr>
+        <p:txBody>
+          <a:bodyPr/>
+          <a:lstStyle/>
+          <a:p>
+            <a:endParaRPr lang="en-GB"/>
+          </a:p>
+        </p:txBody>
       </p:sp>
       <p:sp>
         <p:nvSpPr>
@@ -10662,11 +10998,11 @@
         </p:spPr>
         <p:txBody>
           <a:bodyPr wrap="square" lIns="25400" tIns="25400" rIns="25400" bIns="25400" rtlCol="0" anchor="t">
-            <a:normAutofit/>
-          </a:bodyPr>
-          <a:lstStyle/>
-          <a:p>
-            <a:pPr algn="l" indent="0" marL="0">
+            <a:normAutofit lnSpcReduction="10000"/>
+          </a:bodyPr>
+          <a:lstStyle/>
+          <a:p>
+            <a:pPr marL="0" indent="0" algn="l">
               <a:buNone/>
             </a:pPr>
             <a:r>
@@ -10710,6 +11046,13 @@
             <a:prstDash val="solid"/>
           </a:ln>
         </p:spPr>
+        <p:txBody>
+          <a:bodyPr/>
+          <a:lstStyle/>
+          <a:p>
+            <a:endParaRPr lang="en-GB"/>
+          </a:p>
+        </p:txBody>
       </p:sp>
       <p:sp>
         <p:nvSpPr>
@@ -10730,11 +11073,11 @@
         </p:spPr>
         <p:txBody>
           <a:bodyPr wrap="square" lIns="25400" tIns="25400" rIns="25400" bIns="25400" rtlCol="0" anchor="t">
-            <a:normAutofit/>
-          </a:bodyPr>
-          <a:lstStyle/>
-          <a:p>
-            <a:pPr algn="l" indent="0" marL="0">
+            <a:normAutofit fontScale="92500" lnSpcReduction="10000"/>
+          </a:bodyPr>
+          <a:lstStyle/>
+          <a:p>
+            <a:pPr marL="0" indent="0" algn="l">
               <a:buNone/>
             </a:pPr>
             <a:r>
@@ -10771,11 +11114,11 @@
         </p:spPr>
         <p:txBody>
           <a:bodyPr wrap="square" lIns="25400" tIns="25400" rIns="25400" bIns="25400" rtlCol="0" anchor="t">
-            <a:normAutofit/>
-          </a:bodyPr>
-          <a:lstStyle/>
-          <a:p>
-            <a:pPr algn="l" indent="0" marL="0">
+            <a:normAutofit lnSpcReduction="10000"/>
+          </a:bodyPr>
+          <a:lstStyle/>
+          <a:p>
+            <a:pPr marL="0" indent="0" algn="l">
               <a:buNone/>
             </a:pPr>
             <a:r>
@@ -10819,6 +11162,13 @@
             <a:prstDash val="solid"/>
           </a:ln>
         </p:spPr>
+        <p:txBody>
+          <a:bodyPr/>
+          <a:lstStyle/>
+          <a:p>
+            <a:endParaRPr lang="en-GB"/>
+          </a:p>
+        </p:txBody>
       </p:sp>
       <p:sp>
         <p:nvSpPr>
@@ -10839,11 +11189,11 @@
         </p:spPr>
         <p:txBody>
           <a:bodyPr wrap="square" lIns="25400" tIns="25400" rIns="25400" bIns="25400" rtlCol="0" anchor="t">
-            <a:normAutofit/>
-          </a:bodyPr>
-          <a:lstStyle/>
-          <a:p>
-            <a:pPr algn="l" indent="0" marL="0">
+            <a:normAutofit fontScale="92500" lnSpcReduction="10000"/>
+          </a:bodyPr>
+          <a:lstStyle/>
+          <a:p>
+            <a:pPr marL="0" indent="0" algn="l">
               <a:buNone/>
             </a:pPr>
             <a:r>
@@ -10880,11 +11230,11 @@
         </p:spPr>
         <p:txBody>
           <a:bodyPr wrap="square" lIns="25400" tIns="25400" rIns="25400" bIns="25400" rtlCol="0" anchor="t">
-            <a:normAutofit/>
-          </a:bodyPr>
-          <a:lstStyle/>
-          <a:p>
-            <a:pPr algn="l" indent="0" marL="0">
+            <a:normAutofit lnSpcReduction="10000"/>
+          </a:bodyPr>
+          <a:lstStyle/>
+          <a:p>
+            <a:pPr marL="0" indent="0" algn="l">
               <a:buNone/>
             </a:pPr>
             <a:r>
@@ -10921,11 +11271,11 @@
         </p:spPr>
         <p:txBody>
           <a:bodyPr wrap="square" lIns="25400" tIns="25400" rIns="25400" bIns="25400" rtlCol="0" anchor="t">
-            <a:normAutofit/>
-          </a:bodyPr>
-          <a:lstStyle/>
-          <a:p>
-            <a:pPr algn="l" indent="0" marL="0">
+            <a:normAutofit fontScale="92500" lnSpcReduction="20000"/>
+          </a:bodyPr>
+          <a:lstStyle/>
+          <a:p>
+            <a:pPr marL="0" indent="0" algn="l">
               <a:lnSpc>
                 <a:spcPct val="145000"/>
               </a:lnSpc>
@@ -10942,12 +11292,6 @@
               </a:rPr>
               <a:t>A classifier separates train from test perfectly — but only via the </a:t>
             </a:r>
-            <a:pPr algn="l" indent="0" marL="0">
-              <a:lnSpc>
-                <a:spcPct val="145000"/>
-              </a:lnSpc>
-              <a:buNone/>
-            </a:pPr>
             <a:r>
               <a:rPr lang="en-US" sz="1800" b="1" dirty="0">
                 <a:solidFill>
@@ -10959,12 +11303,6 @@
               </a:rPr>
               <a:t>date </a:t>
             </a:r>
-            <a:pPr algn="l" indent="0" marL="0">
-              <a:lnSpc>
-                <a:spcPct val="145000"/>
-              </a:lnSpc>
-              <a:buNone/>
-            </a:pPr>
             <a:r>
               <a:rPr lang="en-US" sz="1800" dirty="0">
                 <a:solidFill>
@@ -10976,12 +11314,6 @@
               </a:rPr>
               <a:t>(test is all May 2026). Drop the date features and it’s no better than chance, so the sets are </a:t>
             </a:r>
-            <a:pPr algn="l" indent="0" marL="0">
-              <a:lnSpc>
-                <a:spcPct val="145000"/>
-              </a:lnSpc>
-              <a:buNone/>
-            </a:pPr>
             <a:r>
               <a:rPr lang="en-US" sz="1800" b="1" dirty="0">
                 <a:solidFill>
@@ -10993,12 +11325,6 @@
               </a:rPr>
               <a:t>identically distributed apart from time </a:t>
             </a:r>
-            <a:pPr algn="l" indent="0" marL="0">
-              <a:lnSpc>
-                <a:spcPct val="145000"/>
-              </a:lnSpc>
-              <a:buNone/>
-            </a:pPr>
             <a:r>
               <a:rPr lang="en-US" sz="1800" dirty="0">
                 <a:solidFill>
@@ -11035,6 +11361,13 @@
           </a:solidFill>
           <a:ln/>
         </p:spPr>
+        <p:txBody>
+          <a:bodyPr/>
+          <a:lstStyle/>
+          <a:p>
+            <a:endParaRPr lang="en-GB"/>
+          </a:p>
+        </p:txBody>
       </p:sp>
       <p:sp>
         <p:nvSpPr>
@@ -11055,11 +11388,11 @@
         </p:spPr>
         <p:txBody>
           <a:bodyPr wrap="square" lIns="25400" tIns="25400" rIns="25400" bIns="25400" rtlCol="0" anchor="t">
-            <a:normAutofit/>
-          </a:bodyPr>
-          <a:lstStyle/>
-          <a:p>
-            <a:pPr algn="l" indent="0" marL="0">
+            <a:normAutofit lnSpcReduction="10000"/>
+          </a:bodyPr>
+          <a:lstStyle/>
+          <a:p>
+            <a:pPr marL="0" indent="0" algn="l">
               <a:buNone/>
             </a:pPr>
             <a:r>
@@ -11096,11 +11429,11 @@
         </p:spPr>
         <p:txBody>
           <a:bodyPr wrap="square" lIns="25400" tIns="25400" rIns="25400" bIns="25400" rtlCol="0" anchor="t">
-            <a:normAutofit/>
-          </a:bodyPr>
-          <a:lstStyle/>
-          <a:p>
-            <a:pPr algn="l" indent="0" marL="0">
+            <a:normAutofit fontScale="92500" lnSpcReduction="20000"/>
+          </a:bodyPr>
+          <a:lstStyle/>
+          <a:p>
+            <a:pPr marL="0" indent="0" algn="l">
               <a:lnSpc>
                 <a:spcPct val="130000"/>
               </a:lnSpc>
@@ -11140,6 +11473,13 @@
           </a:solidFill>
           <a:ln/>
         </p:spPr>
+        <p:txBody>
+          <a:bodyPr/>
+          <a:lstStyle/>
+          <a:p>
+            <a:endParaRPr lang="en-GB"/>
+          </a:p>
+        </p:txBody>
       </p:sp>
       <p:sp>
         <p:nvSpPr>
@@ -11160,11 +11500,11 @@
         </p:spPr>
         <p:txBody>
           <a:bodyPr wrap="square" lIns="25400" tIns="25400" rIns="25400" bIns="25400" rtlCol="0" anchor="t">
-            <a:normAutofit/>
-          </a:bodyPr>
-          <a:lstStyle/>
-          <a:p>
-            <a:pPr algn="l" indent="0" marL="0">
+            <a:normAutofit fontScale="92500" lnSpcReduction="10000"/>
+          </a:bodyPr>
+          <a:lstStyle/>
+          <a:p>
+            <a:pPr marL="0" indent="0" algn="l">
               <a:buNone/>
             </a:pPr>
             <a:r>
@@ -11222,6 +11562,7 @@
         <a:solidFill>
           <a:srgbClr val="FFFFFF"/>
         </a:solidFill>
+        <a:effectLst/>
       </p:bgPr>
     </p:bg>
     <p:spTree>
@@ -11259,7 +11600,10 @@
         </p:spPr>
         <p:txBody>
           <a:bodyPr/>
-          <a:p/>
+          <a:lstStyle/>
+          <a:p>
+            <a:endParaRPr/>
+          </a:p>
         </p:txBody>
       </p:sp>
       <p:sp>
@@ -11281,15 +11625,15 @@
         </p:spPr>
         <p:txBody>
           <a:bodyPr wrap="square" lIns="25400" tIns="25400" rIns="25400" bIns="25400" rtlCol="0" anchor="t">
-            <a:normAutofit/>
-          </a:bodyPr>
-          <a:lstStyle/>
-          <a:p>
-            <a:pPr algn="l" indent="0" marL="0">
-              <a:buNone/>
-            </a:pPr>
-            <a:r>
-              <a:rPr lang="en-US" sz="1800" spc="225" kern="0" dirty="0">
+            <a:normAutofit fontScale="92500" lnSpcReduction="10000"/>
+          </a:bodyPr>
+          <a:lstStyle/>
+          <a:p>
+            <a:pPr marL="0" indent="0" algn="l">
+              <a:buNone/>
+            </a:pPr>
+            <a:r>
+              <a:rPr lang="en-US" sz="1800" kern="0" spc="225" dirty="0">
                 <a:solidFill>
                   <a:srgbClr val="007A33"/>
                 </a:solidFill>
@@ -11322,18 +11666,18 @@
         </p:spPr>
         <p:txBody>
           <a:bodyPr wrap="square" lIns="25400" tIns="25400" rIns="25400" bIns="25400" rtlCol="0" anchor="t">
-            <a:normAutofit/>
-          </a:bodyPr>
-          <a:lstStyle/>
-          <a:p>
-            <a:pPr algn="l" indent="0" marL="0">
+            <a:normAutofit fontScale="92500" lnSpcReduction="10000"/>
+          </a:bodyPr>
+          <a:lstStyle/>
+          <a:p>
+            <a:pPr marL="0" indent="0" algn="l">
               <a:lnSpc>
                 <a:spcPct val="112000"/>
               </a:lnSpc>
               <a:buNone/>
             </a:pPr>
             <a:r>
-              <a:rPr lang="en-US" sz="3600" b="1" spc="-37" kern="0" dirty="0">
+              <a:rPr lang="en-US" sz="3600" b="1" kern="0" spc="-37" dirty="0">
                 <a:solidFill>
                   <a:srgbClr val="063D22"/>
                 </a:solidFill>
@@ -11366,15 +11710,15 @@
         </p:spPr>
         <p:txBody>
           <a:bodyPr wrap="square" lIns="25400" tIns="25400" rIns="25400" bIns="25400" rtlCol="0" anchor="t">
-            <a:normAutofit/>
-          </a:bodyPr>
-          <a:lstStyle/>
-          <a:p>
-            <a:pPr algn="l" indent="0" marL="0">
-              <a:buNone/>
-            </a:pPr>
-            <a:r>
-              <a:rPr lang="en-US" sz="1800" spc="75" kern="0" dirty="0">
+            <a:normAutofit fontScale="92500" lnSpcReduction="10000"/>
+          </a:bodyPr>
+          <a:lstStyle/>
+          <a:p>
+            <a:pPr marL="0" indent="0" algn="l">
+              <a:buNone/>
+            </a:pPr>
+            <a:r>
+              <a:rPr lang="en-US" sz="1800" kern="0" spc="75" dirty="0">
                 <a:solidFill>
                   <a:srgbClr val="007A33"/>
                 </a:solidFill>
@@ -11409,7 +11753,10 @@
         </p:spPr>
         <p:txBody>
           <a:bodyPr/>
-          <a:p/>
+          <a:lstStyle/>
+          <a:p>
+            <a:endParaRPr/>
+          </a:p>
         </p:txBody>
       </p:sp>
       <p:sp>
@@ -11431,11 +11778,11 @@
         </p:spPr>
         <p:txBody>
           <a:bodyPr wrap="square" lIns="25400" tIns="25400" rIns="25400" bIns="25400" rtlCol="0" anchor="ctr">
-            <a:normAutofit/>
-          </a:bodyPr>
-          <a:lstStyle/>
-          <a:p>
-            <a:pPr algn="l" indent="0" marL="0">
+            <a:normAutofit lnSpcReduction="10000"/>
+          </a:bodyPr>
+          <a:lstStyle/>
+          <a:p>
+            <a:pPr marL="0" indent="0" algn="l">
               <a:buNone/>
             </a:pPr>
             <a:r>
@@ -11474,7 +11821,10 @@
         </p:spPr>
         <p:txBody>
           <a:bodyPr/>
-          <a:p/>
+          <a:lstStyle/>
+          <a:p>
+            <a:endParaRPr/>
+          </a:p>
         </p:txBody>
       </p:sp>
       <p:sp>
@@ -11496,11 +11846,11 @@
         </p:spPr>
         <p:txBody>
           <a:bodyPr wrap="square" lIns="25400" tIns="25400" rIns="25400" bIns="25400" rtlCol="0" anchor="ctr">
-            <a:normAutofit/>
-          </a:bodyPr>
-          <a:lstStyle/>
-          <a:p>
-            <a:pPr algn="l" indent="0" marL="0">
+            <a:normAutofit lnSpcReduction="10000"/>
+          </a:bodyPr>
+          <a:lstStyle/>
+          <a:p>
+            <a:pPr marL="0" indent="0" algn="l">
               <a:buNone/>
             </a:pPr>
             <a:r>
@@ -11539,7 +11889,10 @@
         </p:spPr>
         <p:txBody>
           <a:bodyPr/>
-          <a:p/>
+          <a:lstStyle/>
+          <a:p>
+            <a:endParaRPr/>
+          </a:p>
         </p:txBody>
       </p:sp>
       <p:sp>
@@ -11561,11 +11914,11 @@
         </p:spPr>
         <p:txBody>
           <a:bodyPr wrap="square" lIns="25400" tIns="25400" rIns="25400" bIns="25400" rtlCol="0" anchor="ctr">
-            <a:normAutofit/>
-          </a:bodyPr>
-          <a:lstStyle/>
-          <a:p>
-            <a:pPr algn="r" indent="0" marL="0">
+            <a:normAutofit lnSpcReduction="10000"/>
+          </a:bodyPr>
+          <a:lstStyle/>
+          <a:p>
+            <a:pPr marL="0" indent="0" algn="r">
               <a:buNone/>
             </a:pPr>
             <a:r>
@@ -11604,7 +11957,10 @@
         </p:spPr>
         <p:txBody>
           <a:bodyPr/>
-          <a:p/>
+          <a:lstStyle/>
+          <a:p>
+            <a:endParaRPr/>
+          </a:p>
         </p:txBody>
       </p:sp>
       <p:sp>
@@ -11626,11 +11982,11 @@
         </p:spPr>
         <p:txBody>
           <a:bodyPr wrap="square" lIns="25400" tIns="25400" rIns="25400" bIns="25400" rtlCol="0" anchor="ctr">
-            <a:normAutofit/>
-          </a:bodyPr>
-          <a:lstStyle/>
-          <a:p>
-            <a:pPr algn="r" indent="0" marL="0">
+            <a:normAutofit lnSpcReduction="10000"/>
+          </a:bodyPr>
+          <a:lstStyle/>
+          <a:p>
+            <a:pPr marL="0" indent="0" algn="r">
               <a:buNone/>
             </a:pPr>
             <a:r>
@@ -11669,7 +12025,10 @@
         </p:spPr>
         <p:txBody>
           <a:bodyPr/>
-          <a:p/>
+          <a:lstStyle/>
+          <a:p>
+            <a:endParaRPr/>
+          </a:p>
         </p:txBody>
       </p:sp>
       <p:sp>
@@ -11691,11 +12050,11 @@
         </p:spPr>
         <p:txBody>
           <a:bodyPr wrap="square" lIns="25400" tIns="25400" rIns="25400" bIns="25400" rtlCol="0" anchor="ctr">
-            <a:normAutofit/>
-          </a:bodyPr>
-          <a:lstStyle/>
-          <a:p>
-            <a:pPr algn="r" indent="0" marL="0">
+            <a:normAutofit lnSpcReduction="10000"/>
+          </a:bodyPr>
+          <a:lstStyle/>
+          <a:p>
+            <a:pPr marL="0" indent="0" algn="r">
               <a:buNone/>
             </a:pPr>
             <a:r>
@@ -11734,7 +12093,10 @@
         </p:spPr>
         <p:txBody>
           <a:bodyPr/>
-          <a:p/>
+          <a:lstStyle/>
+          <a:p>
+            <a:endParaRPr/>
+          </a:p>
         </p:txBody>
       </p:sp>
       <p:sp>
@@ -11756,11 +12118,11 @@
         </p:spPr>
         <p:txBody>
           <a:bodyPr wrap="square" lIns="25400" tIns="25400" rIns="25400" bIns="25400" rtlCol="0" anchor="ctr">
-            <a:normAutofit/>
-          </a:bodyPr>
-          <a:lstStyle/>
-          <a:p>
-            <a:pPr algn="l" indent="0" marL="0">
+            <a:normAutofit lnSpcReduction="10000"/>
+          </a:bodyPr>
+          <a:lstStyle/>
+          <a:p>
+            <a:pPr marL="0" indent="0" algn="l">
               <a:buNone/>
             </a:pPr>
             <a:r>
@@ -11799,7 +12161,10 @@
         </p:spPr>
         <p:txBody>
           <a:bodyPr/>
-          <a:p/>
+          <a:lstStyle/>
+          <a:p>
+            <a:endParaRPr/>
+          </a:p>
         </p:txBody>
       </p:sp>
       <p:sp>
@@ -11821,11 +12186,11 @@
         </p:spPr>
         <p:txBody>
           <a:bodyPr wrap="square" lIns="25400" tIns="25400" rIns="25400" bIns="25400" rtlCol="0" anchor="ctr">
-            <a:normAutofit/>
-          </a:bodyPr>
-          <a:lstStyle/>
-          <a:p>
-            <a:pPr algn="l" indent="0" marL="0">
+            <a:normAutofit lnSpcReduction="10000"/>
+          </a:bodyPr>
+          <a:lstStyle/>
+          <a:p>
+            <a:pPr marL="0" indent="0" algn="l">
               <a:buNone/>
             </a:pPr>
             <a:r>
@@ -11864,7 +12229,10 @@
         </p:spPr>
         <p:txBody>
           <a:bodyPr/>
-          <a:p/>
+          <a:lstStyle/>
+          <a:p>
+            <a:endParaRPr/>
+          </a:p>
         </p:txBody>
       </p:sp>
       <p:sp>
@@ -11886,11 +12254,11 @@
         </p:spPr>
         <p:txBody>
           <a:bodyPr wrap="square" lIns="25400" tIns="25400" rIns="25400" bIns="25400" rtlCol="0" anchor="ctr">
-            <a:normAutofit/>
-          </a:bodyPr>
-          <a:lstStyle/>
-          <a:p>
-            <a:pPr algn="r" indent="0" marL="0">
+            <a:normAutofit lnSpcReduction="10000"/>
+          </a:bodyPr>
+          <a:lstStyle/>
+          <a:p>
+            <a:pPr marL="0" indent="0" algn="r">
               <a:buNone/>
             </a:pPr>
             <a:r>
@@ -11929,7 +12297,10 @@
         </p:spPr>
         <p:txBody>
           <a:bodyPr/>
-          <a:p/>
+          <a:lstStyle/>
+          <a:p>
+            <a:endParaRPr/>
+          </a:p>
         </p:txBody>
       </p:sp>
       <p:sp>
@@ -11951,11 +12322,11 @@
         </p:spPr>
         <p:txBody>
           <a:bodyPr wrap="square" lIns="25400" tIns="25400" rIns="25400" bIns="25400" rtlCol="0" anchor="ctr">
-            <a:normAutofit/>
-          </a:bodyPr>
-          <a:lstStyle/>
-          <a:p>
-            <a:pPr algn="r" indent="0" marL="0">
+            <a:normAutofit lnSpcReduction="10000"/>
+          </a:bodyPr>
+          <a:lstStyle/>
+          <a:p>
+            <a:pPr marL="0" indent="0" algn="r">
               <a:buNone/>
             </a:pPr>
             <a:r>
@@ -11994,7 +12365,10 @@
         </p:spPr>
         <p:txBody>
           <a:bodyPr/>
-          <a:p/>
+          <a:lstStyle/>
+          <a:p>
+            <a:endParaRPr/>
+          </a:p>
         </p:txBody>
       </p:sp>
       <p:sp>
@@ -12016,11 +12390,11 @@
         </p:spPr>
         <p:txBody>
           <a:bodyPr wrap="square" lIns="25400" tIns="25400" rIns="25400" bIns="25400" rtlCol="0" anchor="ctr">
-            <a:normAutofit/>
-          </a:bodyPr>
-          <a:lstStyle/>
-          <a:p>
-            <a:pPr algn="r" indent="0" marL="0">
+            <a:normAutofit lnSpcReduction="10000"/>
+          </a:bodyPr>
+          <a:lstStyle/>
+          <a:p>
+            <a:pPr marL="0" indent="0" algn="r">
               <a:buNone/>
             </a:pPr>
             <a:r>
@@ -12059,7 +12433,10 @@
         </p:spPr>
         <p:txBody>
           <a:bodyPr/>
-          <a:p/>
+          <a:lstStyle/>
+          <a:p>
+            <a:endParaRPr/>
+          </a:p>
         </p:txBody>
       </p:sp>
       <p:sp>
@@ -12083,7 +12460,10 @@
         </p:spPr>
         <p:txBody>
           <a:bodyPr/>
-          <a:p/>
+          <a:lstStyle/>
+          <a:p>
+            <a:endParaRPr/>
+          </a:p>
         </p:txBody>
       </p:sp>
       <p:sp>
@@ -12109,7 +12489,7 @@
           </a:bodyPr>
           <a:lstStyle/>
           <a:p>
-            <a:pPr algn="l" indent="0" marL="0">
+            <a:pPr marL="0" indent="0" algn="l">
               <a:buNone/>
             </a:pPr>
             <a:r>
@@ -12148,7 +12528,10 @@
         </p:spPr>
         <p:txBody>
           <a:bodyPr/>
-          <a:p/>
+          <a:lstStyle/>
+          <a:p>
+            <a:endParaRPr/>
+          </a:p>
         </p:txBody>
       </p:sp>
       <p:sp>
@@ -12174,7 +12557,7 @@
           </a:bodyPr>
           <a:lstStyle/>
           <a:p>
-            <a:pPr algn="l" indent="0" marL="0">
+            <a:pPr marL="0" indent="0" algn="l">
               <a:buNone/>
             </a:pPr>
             <a:r>
@@ -12213,7 +12596,10 @@
         </p:spPr>
         <p:txBody>
           <a:bodyPr/>
-          <a:p/>
+          <a:lstStyle/>
+          <a:p>
+            <a:endParaRPr/>
+          </a:p>
         </p:txBody>
       </p:sp>
       <p:sp>
@@ -12239,7 +12625,7 @@
           </a:bodyPr>
           <a:lstStyle/>
           <a:p>
-            <a:pPr algn="r" indent="0" marL="0">
+            <a:pPr marL="0" indent="0" algn="r">
               <a:buNone/>
             </a:pPr>
             <a:r>
@@ -12278,7 +12664,10 @@
         </p:spPr>
         <p:txBody>
           <a:bodyPr/>
-          <a:p/>
+          <a:lstStyle/>
+          <a:p>
+            <a:endParaRPr/>
+          </a:p>
         </p:txBody>
       </p:sp>
       <p:sp>
@@ -12304,7 +12693,7 @@
           </a:bodyPr>
           <a:lstStyle/>
           <a:p>
-            <a:pPr algn="r" indent="0" marL="0">
+            <a:pPr marL="0" indent="0" algn="r">
               <a:buNone/>
             </a:pPr>
             <a:r>
@@ -12343,7 +12732,10 @@
         </p:spPr>
         <p:txBody>
           <a:bodyPr/>
-          <a:p/>
+          <a:lstStyle/>
+          <a:p>
+            <a:endParaRPr/>
+          </a:p>
         </p:txBody>
       </p:sp>
       <p:sp>
@@ -12369,7 +12761,7 @@
           </a:bodyPr>
           <a:lstStyle/>
           <a:p>
-            <a:pPr algn="r" indent="0" marL="0">
+            <a:pPr marL="0" indent="0" algn="r">
               <a:buNone/>
             </a:pPr>
             <a:r>
@@ -12408,7 +12800,10 @@
         </p:spPr>
         <p:txBody>
           <a:bodyPr/>
-          <a:p/>
+          <a:lstStyle/>
+          <a:p>
+            <a:endParaRPr/>
+          </a:p>
         </p:txBody>
       </p:sp>
       <p:sp>
@@ -12434,7 +12829,7 @@
           </a:bodyPr>
           <a:lstStyle/>
           <a:p>
-            <a:pPr algn="l" indent="0" marL="0">
+            <a:pPr marL="0" indent="0" algn="l">
               <a:buNone/>
             </a:pPr>
             <a:r>
@@ -12475,7 +12870,7 @@
           </a:bodyPr>
           <a:lstStyle/>
           <a:p>
-            <a:pPr algn="l" indent="0" marL="0">
+            <a:pPr marL="0" indent="0" algn="l">
               <a:buNone/>
             </a:pPr>
             <a:r>
@@ -12516,7 +12911,7 @@
           </a:bodyPr>
           <a:lstStyle/>
           <a:p>
-            <a:pPr algn="r" indent="0" marL="0">
+            <a:pPr marL="0" indent="0" algn="r">
               <a:buNone/>
             </a:pPr>
             <a:r>
@@ -12557,7 +12952,7 @@
           </a:bodyPr>
           <a:lstStyle/>
           <a:p>
-            <a:pPr algn="r" indent="0" marL="0">
+            <a:pPr marL="0" indent="0" algn="r">
               <a:buNone/>
             </a:pPr>
             <a:r>
@@ -12598,7 +12993,7 @@
           </a:bodyPr>
           <a:lstStyle/>
           <a:p>
-            <a:pPr algn="r" indent="0" marL="0">
+            <a:pPr marL="0" indent="0" algn="r">
               <a:buNone/>
             </a:pPr>
             <a:r>
@@ -12635,11 +13030,11 @@
         </p:spPr>
         <p:txBody>
           <a:bodyPr wrap="square" lIns="25400" tIns="25400" rIns="25400" bIns="25400" rtlCol="0" anchor="t">
-            <a:normAutofit/>
-          </a:bodyPr>
-          <a:lstStyle/>
-          <a:p>
-            <a:pPr algn="l" indent="0" marL="0">
+            <a:normAutofit fontScale="92500" lnSpcReduction="10000"/>
+          </a:bodyPr>
+          <a:lstStyle/>
+          <a:p>
+            <a:pPr marL="0" indent="0" algn="l">
               <a:buNone/>
             </a:pPr>
             <a:r>
@@ -12676,11 +13071,11 @@
         </p:spPr>
         <p:txBody>
           <a:bodyPr wrap="square" lIns="25400" tIns="25400" rIns="25400" bIns="25400" rtlCol="0" anchor="t">
-            <a:normAutofit/>
-          </a:bodyPr>
-          <a:lstStyle/>
-          <a:p>
-            <a:pPr algn="l" indent="0" marL="0">
+            <a:normAutofit fontScale="92500" lnSpcReduction="10000"/>
+          </a:bodyPr>
+          <a:lstStyle/>
+          <a:p>
+            <a:pPr marL="0" indent="0" algn="l">
               <a:buNone/>
             </a:pPr>
             <a:r>
@@ -12717,11 +13112,11 @@
         </p:spPr>
         <p:txBody>
           <a:bodyPr wrap="square" lIns="25400" tIns="25400" rIns="25400" bIns="25400" rtlCol="0" anchor="t">
-            <a:normAutofit/>
-          </a:bodyPr>
-          <a:lstStyle/>
-          <a:p>
-            <a:pPr algn="l" indent="0" marL="0">
+            <a:normAutofit fontScale="92500" lnSpcReduction="10000"/>
+          </a:bodyPr>
+          <a:lstStyle/>
+          <a:p>
+            <a:pPr marL="0" indent="0" algn="l">
               <a:buNone/>
             </a:pPr>
             <a:r>
@@ -12758,11 +13153,11 @@
         </p:spPr>
         <p:txBody>
           <a:bodyPr wrap="square" lIns="25400" tIns="25400" rIns="25400" bIns="25400" rtlCol="0" anchor="t">
-            <a:normAutofit/>
-          </a:bodyPr>
-          <a:lstStyle/>
-          <a:p>
-            <a:pPr algn="l" indent="0" marL="0">
+            <a:normAutofit fontScale="92500" lnSpcReduction="10000"/>
+          </a:bodyPr>
+          <a:lstStyle/>
+          <a:p>
+            <a:pPr marL="0" indent="0" algn="l">
               <a:buNone/>
             </a:pPr>
             <a:r>
@@ -12799,11 +13194,11 @@
         </p:spPr>
         <p:txBody>
           <a:bodyPr wrap="square" lIns="25400" tIns="25400" rIns="25400" bIns="25400" rtlCol="0" anchor="t">
-            <a:normAutofit/>
-          </a:bodyPr>
-          <a:lstStyle/>
-          <a:p>
-            <a:pPr algn="l" indent="0" marL="0">
+            <a:normAutofit fontScale="92500" lnSpcReduction="10000"/>
+          </a:bodyPr>
+          <a:lstStyle/>
+          <a:p>
+            <a:pPr marL="0" indent="0" algn="l">
               <a:buNone/>
             </a:pPr>
             <a:r>
@@ -12840,11 +13235,11 @@
         </p:spPr>
         <p:txBody>
           <a:bodyPr wrap="square" lIns="25400" tIns="25400" rIns="25400" bIns="25400" rtlCol="0" anchor="t">
-            <a:normAutofit/>
-          </a:bodyPr>
-          <a:lstStyle/>
-          <a:p>
-            <a:pPr algn="l" indent="0" marL="0">
+            <a:normAutofit fontScale="92500" lnSpcReduction="10000"/>
+          </a:bodyPr>
+          <a:lstStyle/>
+          <a:p>
+            <a:pPr marL="0" indent="0" algn="l">
               <a:buNone/>
             </a:pPr>
             <a:r>
@@ -12881,11 +13276,11 @@
         </p:spPr>
         <p:txBody>
           <a:bodyPr wrap="square" lIns="25400" tIns="25400" rIns="25400" bIns="25400" rtlCol="0" anchor="t">
-            <a:normAutofit/>
-          </a:bodyPr>
-          <a:lstStyle/>
-          <a:p>
-            <a:pPr algn="l" indent="0" marL="0">
+            <a:normAutofit fontScale="92500" lnSpcReduction="10000"/>
+          </a:bodyPr>
+          <a:lstStyle/>
+          <a:p>
+            <a:pPr marL="0" indent="0" algn="l">
               <a:buNone/>
             </a:pPr>
             <a:r>
@@ -12922,11 +13317,11 @@
         </p:spPr>
         <p:txBody>
           <a:bodyPr wrap="square" lIns="25400" tIns="25400" rIns="25400" bIns="25400" rtlCol="0" anchor="t">
-            <a:normAutofit/>
-          </a:bodyPr>
-          <a:lstStyle/>
-          <a:p>
-            <a:pPr algn="l" indent="0" marL="0">
+            <a:normAutofit fontScale="92500" lnSpcReduction="10000"/>
+          </a:bodyPr>
+          <a:lstStyle/>
+          <a:p>
+            <a:pPr marL="0" indent="0" algn="l">
               <a:buNone/>
             </a:pPr>
             <a:r>
@@ -12963,11 +13358,11 @@
         </p:spPr>
         <p:txBody>
           <a:bodyPr wrap="square" lIns="25400" tIns="25400" rIns="25400" bIns="25400" rtlCol="0" anchor="t">
-            <a:normAutofit/>
-          </a:bodyPr>
-          <a:lstStyle/>
-          <a:p>
-            <a:pPr algn="l" indent="0" marL="0">
+            <a:normAutofit fontScale="92500" lnSpcReduction="10000"/>
+          </a:bodyPr>
+          <a:lstStyle/>
+          <a:p>
+            <a:pPr marL="0" indent="0" algn="l">
               <a:buNone/>
             </a:pPr>
             <a:r>
@@ -13008,7 +13403,7 @@
           </a:bodyPr>
           <a:lstStyle/>
           <a:p>
-            <a:pPr algn="l" indent="0" marL="0">
+            <a:pPr marL="0" indent="0" algn="l">
               <a:buNone/>
             </a:pPr>
             <a:r>
@@ -13045,11 +13440,11 @@
         </p:spPr>
         <p:txBody>
           <a:bodyPr wrap="square" lIns="25400" tIns="25400" rIns="25400" bIns="25400" rtlCol="0" anchor="t">
-            <a:normAutofit/>
-          </a:bodyPr>
-          <a:lstStyle/>
-          <a:p>
-            <a:pPr algn="l" indent="0" marL="0">
+            <a:normAutofit fontScale="92500" lnSpcReduction="10000"/>
+          </a:bodyPr>
+          <a:lstStyle/>
+          <a:p>
+            <a:pPr marL="0" indent="0" algn="l">
               <a:buNone/>
             </a:pPr>
             <a:r>
@@ -13090,7 +13485,7 @@
           </a:bodyPr>
           <a:lstStyle/>
           <a:p>
-            <a:pPr algn="l" indent="0" marL="0">
+            <a:pPr marL="0" indent="0" algn="l">
               <a:buNone/>
             </a:pPr>
             <a:r>
@@ -13127,11 +13522,11 @@
         </p:spPr>
         <p:txBody>
           <a:bodyPr wrap="square" lIns="25400" tIns="25400" rIns="25400" bIns="25400" rtlCol="0" anchor="t">
-            <a:normAutofit/>
-          </a:bodyPr>
-          <a:lstStyle/>
-          <a:p>
-            <a:pPr algn="l" indent="0" marL="0">
+            <a:normAutofit fontScale="92500" lnSpcReduction="20000"/>
+          </a:bodyPr>
+          <a:lstStyle/>
+          <a:p>
+            <a:pPr marL="0" indent="0" algn="l">
               <a:lnSpc>
                 <a:spcPct val="140000"/>
               </a:lnSpc>
@@ -13148,12 +13543,6 @@
               </a:rPr>
               <a:t>v10 adds leak-free z-scoring and a conservative smooth threshold (ROC AUC 0.9377). Its OOF dips slightly below v6/v7 </a:t>
             </a:r>
-            <a:pPr algn="l" indent="0" marL="0">
-              <a:lnSpc>
-                <a:spcPct val="140000"/>
-              </a:lnSpc>
-              <a:buNone/>
-            </a:pPr>
             <a:r>
               <a:rPr lang="en-US" sz="1800" b="1" dirty="0">
                 <a:solidFill>
@@ -13165,12 +13554,6 @@
               </a:rPr>
               <a:t>by design </a:t>
             </a:r>
-            <a:pPr algn="l" indent="0" marL="0">
-              <a:lnSpc>
-                <a:spcPct val="140000"/>
-              </a:lnSpc>
-              <a:buNone/>
-            </a:pPr>
             <a:r>
               <a:rPr lang="en-US" sz="1800" dirty="0">
                 <a:solidFill>
@@ -13205,11 +13588,11 @@
         </p:spPr>
         <p:txBody>
           <a:bodyPr wrap="square" lIns="25400" tIns="25400" rIns="25400" bIns="25400" rtlCol="0" anchor="t">
-            <a:normAutofit/>
-          </a:bodyPr>
-          <a:lstStyle/>
-          <a:p>
-            <a:pPr algn="l" indent="0" marL="0">
+            <a:normAutofit fontScale="92500" lnSpcReduction="20000"/>
+          </a:bodyPr>
+          <a:lstStyle/>
+          <a:p>
+            <a:pPr marL="0" indent="0" algn="l">
               <a:lnSpc>
                 <a:spcPct val="95000"/>
               </a:lnSpc>
@@ -13249,11 +13632,11 @@
         </p:spPr>
         <p:txBody>
           <a:bodyPr wrap="square" lIns="25400" tIns="25400" rIns="25400" bIns="25400" rtlCol="0" anchor="t">
-            <a:normAutofit/>
-          </a:bodyPr>
-          <a:lstStyle/>
-          <a:p>
-            <a:pPr algn="l" indent="0" marL="0">
+            <a:normAutofit lnSpcReduction="10000"/>
+          </a:bodyPr>
+          <a:lstStyle/>
+          <a:p>
+            <a:pPr marL="0" indent="0" algn="l">
               <a:buNone/>
             </a:pPr>
             <a:r>
@@ -13290,11 +13673,11 @@
         </p:spPr>
         <p:txBody>
           <a:bodyPr wrap="square" lIns="25400" tIns="25400" rIns="25400" bIns="25400" rtlCol="0" anchor="t">
-            <a:normAutofit/>
-          </a:bodyPr>
-          <a:lstStyle/>
-          <a:p>
-            <a:pPr algn="l" indent="0" marL="0">
+            <a:normAutofit fontScale="92500" lnSpcReduction="20000"/>
+          </a:bodyPr>
+          <a:lstStyle/>
+          <a:p>
+            <a:pPr marL="0" indent="0" algn="l">
               <a:lnSpc>
                 <a:spcPct val="150000"/>
               </a:lnSpc>
@@ -13311,31 +13694,74 @@
               </a:rPr>
               <a:t>Our held-back validation tracked just above the live score the whole way — it </a:t>
             </a:r>
-            <a:pPr algn="l" indent="0" marL="0">
+            <a:r>
+              <a:rPr lang="en-US" sz="2025" b="1" dirty="0">
+                <a:solidFill>
+                  <a:srgbClr val="063D22"/>
+                </a:solidFill>
+                <a:latin typeface="Arial" pitchFamily="34" charset="0"/>
+                <a:ea typeface="Arial" pitchFamily="34" charset="-122"/>
+                <a:cs typeface="Arial" pitchFamily="34" charset="-120"/>
+              </a:rPr>
+              <a:t>called the result in advance </a:t>
+            </a:r>
+            <a:r>
+              <a:rPr lang="en-US" sz="2025" dirty="0">
+                <a:solidFill>
+                  <a:srgbClr val="244236"/>
+                </a:solidFill>
+                <a:latin typeface="Arial" pitchFamily="34" charset="0"/>
+                <a:ea typeface="Arial" pitchFamily="34" charset="-122"/>
+                <a:cs typeface="Arial" pitchFamily="34" charset="-120"/>
+              </a:rPr>
+              <a:t>.</a:t>
+            </a:r>
+            <a:endParaRPr lang="en-US" sz="2025" dirty="0"/>
+          </a:p>
+        </p:txBody>
+      </p:sp>
+      <p:sp>
+        <p:nvSpPr>
+          <p:cNvPr id="59" name="Text 57"/>
+          <p:cNvSpPr/>
+          <p:nvPr/>
+        </p:nvSpPr>
+        <p:spPr>
+          <a:xfrm>
+            <a:off x="11531426" y="7020669"/>
+            <a:ext cx="5978196" cy="814388"/>
+          </a:xfrm>
+          <a:prstGeom prst="rect">
+            <a:avLst/>
+          </a:prstGeom>
+          <a:noFill/>
+          <a:ln/>
+        </p:spPr>
+        <p:txBody>
+          <a:bodyPr wrap="square" lIns="25400" tIns="25400" rIns="25400" bIns="25400" rtlCol="0" anchor="t">
+            <a:normAutofit fontScale="92500" lnSpcReduction="20000"/>
+          </a:bodyPr>
+          <a:lstStyle/>
+          <a:p>
+            <a:pPr marL="0" indent="0" algn="l">
               <a:lnSpc>
                 <a:spcPct val="150000"/>
               </a:lnSpc>
               <a:buNone/>
             </a:pPr>
             <a:r>
-              <a:rPr lang="en-US" sz="2025" b="1" dirty="0">
-                <a:solidFill>
-                  <a:srgbClr val="063D22"/>
+              <a:rPr lang="en-US" sz="2025" dirty="0">
+                <a:solidFill>
+                  <a:srgbClr val="5C7268"/>
                 </a:solidFill>
                 <a:latin typeface="Arial" pitchFamily="34" charset="0"/>
                 <a:ea typeface="Arial" pitchFamily="34" charset="-122"/>
                 <a:cs typeface="Arial" pitchFamily="34" charset="-120"/>
               </a:rPr>
-              <a:t>called the result in advance </a:t>
-            </a:r>
-            <a:pPr algn="l" indent="0" marL="0">
-              <a:lnSpc>
-                <a:spcPct val="150000"/>
-              </a:lnSpc>
-              <a:buNone/>
-            </a:pPr>
-            <a:r>
-              <a:rPr lang="en-US" sz="2025" dirty="0">
+              <a:t>Adversarial validation confirms the CV→LB gap is </a:t>
+            </a:r>
+            <a:r>
+              <a:rPr lang="en-US" sz="2025" b="1" dirty="0">
                 <a:solidFill>
                   <a:srgbClr val="244236"/>
                 </a:solidFill>
@@ -13343,41 +13769,8 @@
                 <a:ea typeface="Arial" pitchFamily="34" charset="-122"/>
                 <a:cs typeface="Arial" pitchFamily="34" charset="-120"/>
               </a:rPr>
-              <a:t>.</a:t>
-            </a:r>
-            <a:endParaRPr lang="en-US" sz="2025" dirty="0"/>
-          </a:p>
-        </p:txBody>
-      </p:sp>
-      <p:sp>
-        <p:nvSpPr>
-          <p:cNvPr id="59" name="Text 57"/>
-          <p:cNvSpPr/>
-          <p:nvPr/>
-        </p:nvSpPr>
-        <p:spPr>
-          <a:xfrm>
-            <a:off x="11531426" y="7020669"/>
-            <a:ext cx="5978196" cy="814388"/>
-          </a:xfrm>
-          <a:prstGeom prst="rect">
-            <a:avLst/>
-          </a:prstGeom>
-          <a:noFill/>
-          <a:ln/>
-        </p:spPr>
-        <p:txBody>
-          <a:bodyPr wrap="square" lIns="25400" tIns="25400" rIns="25400" bIns="25400" rtlCol="0" anchor="t">
-            <a:normAutofit/>
-          </a:bodyPr>
-          <a:lstStyle/>
-          <a:p>
-            <a:pPr algn="l" indent="0" marL="0">
-              <a:lnSpc>
-                <a:spcPct val="150000"/>
-              </a:lnSpc>
-              <a:buNone/>
-            </a:pPr>
+              <a:t>distribution shift over time</a:t>
+            </a:r>
             <a:r>
               <a:rPr lang="en-US" sz="2025" dirty="0">
                 <a:solidFill>
@@ -13387,40 +13780,6 @@
                 <a:ea typeface="Arial" pitchFamily="34" charset="-122"/>
                 <a:cs typeface="Arial" pitchFamily="34" charset="-120"/>
               </a:rPr>
-              <a:t>Adversarial validation confirms the CV→LB gap is </a:t>
-            </a:r>
-            <a:pPr algn="l" indent="0" marL="0">
-              <a:lnSpc>
-                <a:spcPct val="150000"/>
-              </a:lnSpc>
-              <a:buNone/>
-            </a:pPr>
-            <a:r>
-              <a:rPr lang="en-US" sz="2025" b="1" dirty="0">
-                <a:solidFill>
-                  <a:srgbClr val="244236"/>
-                </a:solidFill>
-                <a:latin typeface="Arial" pitchFamily="34" charset="0"/>
-                <a:ea typeface="Arial" pitchFamily="34" charset="-122"/>
-                <a:cs typeface="Arial" pitchFamily="34" charset="-120"/>
-              </a:rPr>
-              <a:t>distribution shift over time</a:t>
-            </a:r>
-            <a:pPr algn="l" indent="0" marL="0">
-              <a:lnSpc>
-                <a:spcPct val="150000"/>
-              </a:lnSpc>
-              <a:buNone/>
-            </a:pPr>
-            <a:r>
-              <a:rPr lang="en-US" sz="2025" dirty="0">
-                <a:solidFill>
-                  <a:srgbClr val="5C7268"/>
-                </a:solidFill>
-                <a:latin typeface="Arial" pitchFamily="34" charset="0"/>
-                <a:ea typeface="Arial" pitchFamily="34" charset="-122"/>
-                <a:cs typeface="Arial" pitchFamily="34" charset="-120"/>
-              </a:rPr>
               <a:t>, not overfitting.</a:t>
             </a:r>
             <a:endParaRPr lang="en-US" sz="2025" dirty="0"/>
@@ -13446,6 +13805,13 @@
           </a:solidFill>
           <a:ln/>
         </p:spPr>
+        <p:txBody>
+          <a:bodyPr/>
+          <a:lstStyle/>
+          <a:p>
+            <a:endParaRPr lang="en-GB"/>
+          </a:p>
+        </p:txBody>
       </p:sp>
       <p:sp>
         <p:nvSpPr>
@@ -13466,11 +13832,11 @@
         </p:spPr>
         <p:txBody>
           <a:bodyPr wrap="square" lIns="25400" tIns="25400" rIns="25400" bIns="25400" rtlCol="0" anchor="t">
-            <a:normAutofit/>
-          </a:bodyPr>
-          <a:lstStyle/>
-          <a:p>
-            <a:pPr algn="l" indent="0" marL="0">
+            <a:normAutofit fontScale="92500" lnSpcReduction="10000"/>
+          </a:bodyPr>
+          <a:lstStyle/>
+          <a:p>
+            <a:pPr marL="0" indent="0" algn="l">
               <a:buNone/>
             </a:pPr>
             <a:r>
@@ -13813,4 +14179,319 @@
     </a:ext>
   </a:extLst>
 </a:theme>
+</file>
+
+<file path=ppt/theme/theme2.xml><?xml version="1.0" encoding="utf-8"?>
+<a:theme xmlns:a="http://schemas.openxmlformats.org/drawingml/2006/main" name="Office Theme">
+  <a:themeElements>
+    <a:clrScheme name="Office">
+      <a:dk1>
+        <a:sysClr val="windowText" lastClr="000000"/>
+      </a:dk1>
+      <a:lt1>
+        <a:sysClr val="window" lastClr="FFFFFF"/>
+      </a:lt1>
+      <a:dk2>
+        <a:srgbClr val="0E2841"/>
+      </a:dk2>
+      <a:lt2>
+        <a:srgbClr val="E8E8E8"/>
+      </a:lt2>
+      <a:accent1>
+        <a:srgbClr val="156082"/>
+      </a:accent1>
+      <a:accent2>
+        <a:srgbClr val="E97132"/>
+      </a:accent2>
+      <a:accent3>
+        <a:srgbClr val="196B24"/>
+      </a:accent3>
+      <a:accent4>
+        <a:srgbClr val="0F9ED5"/>
+      </a:accent4>
+      <a:accent5>
+        <a:srgbClr val="A02B93"/>
+      </a:accent5>
+      <a:accent6>
+        <a:srgbClr val="4EA72E"/>
+      </a:accent6>
+      <a:hlink>
+        <a:srgbClr val="467886"/>
+      </a:hlink>
+      <a:folHlink>
+        <a:srgbClr val="96607D"/>
+      </a:folHlink>
+    </a:clrScheme>
+    <a:fontScheme name="Office">
+      <a:majorFont>
+        <a:latin typeface="Aptos Display" panose="02110004020202020204"/>
+        <a:ea typeface=""/>
+        <a:cs typeface=""/>
+        <a:font script="Jpan" typeface="游ゴシック Light"/>
+        <a:font script="Hang" typeface="맑은 고딕"/>
+        <a:font script="Hans" typeface="等线 Light"/>
+        <a:font script="Hant" typeface="新細明體"/>
+        <a:font script="Arab" typeface="Times New Roman"/>
+        <a:font script="Hebr" typeface="Times New Roman"/>
+        <a:font script="Thai" typeface="Angsana New"/>
+        <a:font script="Ethi" typeface="Nyala"/>
+        <a:font script="Beng" typeface="Vrinda"/>
+        <a:font script="Gujr" typeface="Shruti"/>
+        <a:font script="Khmr" typeface="MoolBoran"/>
+        <a:font script="Knda" typeface="Tunga"/>
+        <a:font script="Guru" typeface="Raavi"/>
+        <a:font script="Cans" typeface="Euphemia"/>
+        <a:font script="Cher" typeface="Plantagenet Cherokee"/>
+        <a:font script="Yiii" typeface="Microsoft Yi Baiti"/>
+        <a:font script="Tibt" typeface="Microsoft Himalaya"/>
+        <a:font script="Thaa" typeface="MV Boli"/>
+        <a:font script="Deva" typeface="Mangal"/>
+        <a:font script="Telu" typeface="Gautami"/>
+        <a:font script="Taml" typeface="Latha"/>
+        <a:font script="Syrc" typeface="Estrangelo Edessa"/>
+        <a:font script="Orya" typeface="Kalinga"/>
+        <a:font script="Mlym" typeface="Kartika"/>
+        <a:font script="Laoo" typeface="DokChampa"/>
+        <a:font script="Sinh" typeface="Iskoola Pota"/>
+        <a:font script="Mong" typeface="Mongolian Baiti"/>
+        <a:font script="Viet" typeface="Times New Roman"/>
+        <a:font script="Uigh" typeface="Microsoft Uighur"/>
+        <a:font script="Geor" typeface="Sylfaen"/>
+        <a:font script="Armn" typeface="Arial"/>
+        <a:font script="Bugi" typeface="Leelawadee UI"/>
+        <a:font script="Bopo" typeface="Microsoft JhengHei"/>
+        <a:font script="Java" typeface="Javanese Text"/>
+        <a:font script="Lisu" typeface="Segoe UI"/>
+        <a:font script="Mymr" typeface="Myanmar Text"/>
+        <a:font script="Nkoo" typeface="Ebrima"/>
+        <a:font script="Olck" typeface="Nirmala UI"/>
+        <a:font script="Osma" typeface="Ebrima"/>
+        <a:font script="Phag" typeface="Phagspa"/>
+        <a:font script="Syrn" typeface="Estrangelo Edessa"/>
+        <a:font script="Syrj" typeface="Estrangelo Edessa"/>
+        <a:font script="Syre" typeface="Estrangelo Edessa"/>
+        <a:font script="Sora" typeface="Nirmala UI"/>
+        <a:font script="Tale" typeface="Microsoft Tai Le"/>
+        <a:font script="Talu" typeface="Microsoft New Tai Lue"/>
+        <a:font script="Tfng" typeface="Ebrima"/>
+      </a:majorFont>
+      <a:minorFont>
+        <a:latin typeface="Aptos" panose="02110004020202020204"/>
+        <a:ea typeface=""/>
+        <a:cs typeface=""/>
+        <a:font script="Jpan" typeface="游ゴシック"/>
+        <a:font script="Hang" typeface="맑은 고딕"/>
+        <a:font script="Hans" typeface="等线"/>
+        <a:font script="Hant" typeface="新細明體"/>
+        <a:font script="Arab" typeface="Arial"/>
+        <a:font script="Hebr" typeface="Arial"/>
+        <a:font script="Thai" typeface="Cordia New"/>
+        <a:font script="Ethi" typeface="Nyala"/>
+        <a:font script="Beng" typeface="Vrinda"/>
+        <a:font script="Gujr" typeface="Shruti"/>
+        <a:font script="Khmr" typeface="DaunPenh"/>
+        <a:font script="Knda" typeface="Tunga"/>
+        <a:font script="Guru" typeface="Raavi"/>
+        <a:font script="Cans" typeface="Euphemia"/>
+        <a:font script="Cher" typeface="Plantagenet Cherokee"/>
+        <a:font script="Yiii" typeface="Microsoft Yi Baiti"/>
+        <a:font script="Tibt" typeface="Microsoft Himalaya"/>
+        <a:font script="Thaa" typeface="MV Boli"/>
+        <a:font script="Deva" typeface="Mangal"/>
+        <a:font script="Telu" typeface="Gautami"/>
+        <a:font script="Taml" typeface="Latha"/>
+        <a:font script="Syrc" typeface="Estrangelo Edessa"/>
+        <a:font script="Orya" typeface="Kalinga"/>
+        <a:font script="Mlym" typeface="Kartika"/>
+        <a:font script="Laoo" typeface="DokChampa"/>
+        <a:font script="Sinh" typeface="Iskoola Pota"/>
+        <a:font script="Mong" typeface="Mongolian Baiti"/>
+        <a:font script="Viet" typeface="Arial"/>
+        <a:font script="Uigh" typeface="Microsoft Uighur"/>
+        <a:font script="Geor" typeface="Sylfaen"/>
+        <a:font script="Armn" typeface="Arial"/>
+        <a:font script="Bugi" typeface="Leelawadee UI"/>
+        <a:font script="Bopo" typeface="Microsoft JhengHei"/>
+        <a:font script="Java" typeface="Javanese Text"/>
+        <a:font script="Lisu" typeface="Segoe UI"/>
+        <a:font script="Mymr" typeface="Myanmar Text"/>
+        <a:font script="Nkoo" typeface="Ebrima"/>
+        <a:font script="Olck" typeface="Nirmala UI"/>
+        <a:font script="Osma" typeface="Ebrima"/>
+        <a:font script="Phag" typeface="Phagspa"/>
+        <a:font script="Syrn" typeface="Estrangelo Edessa"/>
+        <a:font script="Syrj" typeface="Estrangelo Edessa"/>
+        <a:font script="Syre" typeface="Estrangelo Edessa"/>
+        <a:font script="Sora" typeface="Nirmala UI"/>
+        <a:font script="Tale" typeface="Microsoft Tai Le"/>
+        <a:font script="Talu" typeface="Microsoft New Tai Lue"/>
+        <a:font script="Tfng" typeface="Ebrima"/>
+      </a:minorFont>
+    </a:fontScheme>
+    <a:fmtScheme name="Office">
+      <a:fillStyleLst>
+        <a:solidFill>
+          <a:schemeClr val="phClr"/>
+        </a:solidFill>
+        <a:gradFill rotWithShape="1">
+          <a:gsLst>
+            <a:gs pos="0">
+              <a:schemeClr val="phClr">
+                <a:lumMod val="110000"/>
+                <a:satMod val="105000"/>
+                <a:tint val="67000"/>
+              </a:schemeClr>
+            </a:gs>
+            <a:gs pos="50000">
+              <a:schemeClr val="phClr">
+                <a:lumMod val="105000"/>
+                <a:satMod val="103000"/>
+                <a:tint val="73000"/>
+              </a:schemeClr>
+            </a:gs>
+            <a:gs pos="100000">
+              <a:schemeClr val="phClr">
+                <a:lumMod val="105000"/>
+                <a:satMod val="109000"/>
+                <a:tint val="81000"/>
+              </a:schemeClr>
+            </a:gs>
+          </a:gsLst>
+          <a:lin ang="5400000" scaled="0"/>
+        </a:gradFill>
+        <a:gradFill rotWithShape="1">
+          <a:gsLst>
+            <a:gs pos="0">
+              <a:schemeClr val="phClr">
+                <a:satMod val="103000"/>
+                <a:lumMod val="102000"/>
+                <a:tint val="94000"/>
+              </a:schemeClr>
+            </a:gs>
+            <a:gs pos="50000">
+              <a:schemeClr val="phClr">
+                <a:satMod val="110000"/>
+                <a:lumMod val="100000"/>
+                <a:shade val="100000"/>
+              </a:schemeClr>
+            </a:gs>
+            <a:gs pos="100000">
+              <a:schemeClr val="phClr">
+                <a:lumMod val="99000"/>
+                <a:satMod val="120000"/>
+                <a:shade val="78000"/>
+              </a:schemeClr>
+            </a:gs>
+          </a:gsLst>
+          <a:lin ang="5400000" scaled="0"/>
+        </a:gradFill>
+      </a:fillStyleLst>
+      <a:lnStyleLst>
+        <a:ln w="12700" cap="flat" cmpd="sng" algn="ctr">
+          <a:solidFill>
+            <a:schemeClr val="phClr"/>
+          </a:solidFill>
+          <a:prstDash val="solid"/>
+          <a:miter lim="800000"/>
+        </a:ln>
+        <a:ln w="19050" cap="flat" cmpd="sng" algn="ctr">
+          <a:solidFill>
+            <a:schemeClr val="phClr"/>
+          </a:solidFill>
+          <a:prstDash val="solid"/>
+          <a:miter lim="800000"/>
+        </a:ln>
+        <a:ln w="25400" cap="flat" cmpd="sng" algn="ctr">
+          <a:solidFill>
+            <a:schemeClr val="phClr"/>
+          </a:solidFill>
+          <a:prstDash val="solid"/>
+          <a:miter lim="800000"/>
+        </a:ln>
+      </a:lnStyleLst>
+      <a:effectStyleLst>
+        <a:effectStyle>
+          <a:effectLst/>
+        </a:effectStyle>
+        <a:effectStyle>
+          <a:effectLst/>
+        </a:effectStyle>
+        <a:effectStyle>
+          <a:effectLst>
+            <a:outerShdw blurRad="57150" dist="19050" dir="5400000" algn="ctr" rotWithShape="0">
+              <a:srgbClr val="000000">
+                <a:alpha val="63000"/>
+              </a:srgbClr>
+            </a:outerShdw>
+          </a:effectLst>
+        </a:effectStyle>
+      </a:effectStyleLst>
+      <a:bgFillStyleLst>
+        <a:solidFill>
+          <a:schemeClr val="phClr"/>
+        </a:solidFill>
+        <a:solidFill>
+          <a:schemeClr val="phClr">
+            <a:tint val="95000"/>
+            <a:satMod val="170000"/>
+          </a:schemeClr>
+        </a:solidFill>
+        <a:gradFill rotWithShape="1">
+          <a:gsLst>
+            <a:gs pos="0">
+              <a:schemeClr val="phClr">
+                <a:tint val="93000"/>
+                <a:satMod val="150000"/>
+                <a:shade val="98000"/>
+                <a:lumMod val="102000"/>
+              </a:schemeClr>
+            </a:gs>
+            <a:gs pos="50000">
+              <a:schemeClr val="phClr">
+                <a:tint val="98000"/>
+                <a:satMod val="130000"/>
+                <a:shade val="90000"/>
+                <a:lumMod val="103000"/>
+              </a:schemeClr>
+            </a:gs>
+            <a:gs pos="100000">
+              <a:schemeClr val="phClr">
+                <a:shade val="63000"/>
+                <a:satMod val="120000"/>
+              </a:schemeClr>
+            </a:gs>
+          </a:gsLst>
+          <a:lin ang="5400000" scaled="0"/>
+        </a:gradFill>
+      </a:bgFillStyleLst>
+    </a:fmtScheme>
+  </a:themeElements>
+  <a:objectDefaults>
+    <a:lnDef>
+      <a:spPr/>
+      <a:bodyPr/>
+      <a:lstStyle/>
+      <a:style>
+        <a:lnRef idx="2">
+          <a:schemeClr val="accent1"/>
+        </a:lnRef>
+        <a:fillRef idx="0">
+          <a:schemeClr val="accent1"/>
+        </a:fillRef>
+        <a:effectRef idx="1">
+          <a:schemeClr val="accent1"/>
+        </a:effectRef>
+        <a:fontRef idx="minor">
+          <a:schemeClr val="tx1"/>
+        </a:fontRef>
+      </a:style>
+    </a:lnDef>
+  </a:objectDefaults>
+  <a:extraClrSchemeLst/>
+  <a:extLst>
+    <a:ext uri="{05A4C25C-085E-4340-85A3-A5531E510DB2}">
+      <thm15:themeFamily xmlns:thm15="http://schemas.microsoft.com/office/thememl/2012/main" name="Office Theme" id="{2E142A2C-CD16-42D6-873A-C26D2A0506FA}" vid="{1BDDFF52-6CD6-40A5-AB3C-68EB2F1E4D0A}"/>
+    </a:ext>
+  </a:extLst>
+</a:theme>
 </file>
--- a/presentation/Consulting_Finance_ML_Slides.pptx
+++ b/presentation/Consulting_Finance_ML_Slides.pptx
@@ -16,6 +16,7 @@
     <p:sldId id="261" r:id="rId7"/>
     <p:sldId id="262" r:id="rId8"/>
     <p:sldId id="263" r:id="rId9"/>
+    <p:sldId id="269" r:id="rId20"/>
     <p:sldId id="264" r:id="rId10"/>
     <p:sldId id="265" r:id="rId11"/>
     <p:sldId id="266" r:id="rId12"/>
@@ -2006,7 +2007,7 @@
                 <a:ea typeface="Courier New" pitchFamily="34" charset="-122"/>
                 <a:cs typeface="Courier New" pitchFamily="34" charset="-120"/>
               </a:rPr>
-              <a:t>10 · WHAT WE LEARNED</a:t>
+              <a:t>11 · WHAT WE LEARNED</a:t>
             </a:r>
             <a:endParaRPr lang="en-US" sz="1800" dirty="0"/>
           </a:p>
@@ -2816,7 +2817,7 @@
                 <a:ea typeface="Courier New" pitchFamily="34" charset="-122"/>
                 <a:cs typeface="Courier New" pitchFamily="34" charset="-120"/>
               </a:rPr>
-              <a:t>11 · WHAT COMES NEXT</a:t>
+              <a:t>12 · WHAT COMES NEXT</a:t>
             </a:r>
             <a:endParaRPr lang="en-US" sz="1800" dirty="0"/>
           </a:p>
@@ -3642,7 +3643,7 @@
                 <a:ea typeface="Courier New" pitchFamily="34" charset="-122"/>
                 <a:cs typeface="Courier New" pitchFamily="34" charset="-120"/>
               </a:rPr>
-              <a:t>12 · KEY CODE</a:t>
+              <a:t>13 · KEY CODE</a:t>
             </a:r>
             <a:endParaRPr lang="en-US" sz="1800" dirty="0"/>
           </a:p>
@@ -4347,7 +4348,7 @@
                 <a:ea typeface="Courier New" pitchFamily="34" charset="-122"/>
                 <a:cs typeface="Courier New" pitchFamily="34" charset="-120"/>
               </a:rPr>
-              <a:t>13 · QUESTIONS</a:t>
+              <a:t>14 · QUESTIONS</a:t>
             </a:r>
             <a:endParaRPr lang="en-US" sz="1800" dirty="0"/>
           </a:p>
@@ -4885,6 +4886,799 @@
           </a:p>
         </p:txBody>
       </p:sp>
+    </p:spTree>
+  </p:cSld>
+  <p:clrMapOvr>
+    <a:masterClrMapping/>
+  </p:clrMapOvr>
+</p:sld>
+</file>
+
+<file path=ppt/slides/slide14.xml><?xml version="1.0" encoding="utf-8"?>
+<p:sld xmlns:a="http://schemas.openxmlformats.org/drawingml/2006/main" xmlns:p="http://schemas.openxmlformats.org/presentationml/2006/main" xmlns:r="http://schemas.openxmlformats.org/officeDocument/2006/relationships">
+  <p:cSld>
+    <p:spTree>
+      <p:nvGrpSpPr>
+        <p:cNvPr id="1" name=""/>
+        <p:cNvGrpSpPr/>
+        <p:nvPr/>
+      </p:nvGrpSpPr>
+      <p:grpSpPr/>
+      <p:sp>
+        <p:nvSpPr>
+          <p:cNvPr id="2" name="Shape 0"/>
+          <p:cNvSpPr/>
+          <p:nvPr/>
+        </p:nvSpPr>
+        <p:spPr>
+          <a:xfrm>
+            <a:off x="952500" y="1912218"/>
+            <a:ext cx="16383000" cy="19050"/>
+          </a:xfrm>
+          <a:prstGeom prst="rect">
+            <a:avLst/>
+          </a:prstGeom>
+          <a:solidFill>
+            <a:srgbClr val="1A7A57"/>
+          </a:solidFill>
+          <a:ln/>
+        </p:spPr>
+        <p:txBody>
+          <a:bodyPr/>
+          <a:lstStyle/>
+          <a:p>
+            <a:endParaRPr lang="en-GB"/>
+          </a:p>
+        </p:txBody>
+      </p:sp>
+      <p:sp>
+        <p:nvSpPr>
+          <p:cNvPr id="3" name="Text 1"/>
+          <p:cNvSpPr/>
+          <p:nvPr/>
+        </p:nvSpPr>
+        <p:spPr>
+          <a:xfrm>
+            <a:off x="952500" y="742950"/>
+            <a:ext cx="18021300" cy="295275"/>
+          </a:xfrm>
+          <a:prstGeom prst="rect">
+            <a:avLst/>
+          </a:prstGeom>
+          <a:noFill/>
+          <a:ln/>
+        </p:spPr>
+        <p:txBody>
+          <a:bodyPr wrap="square" lIns="25400" tIns="25400" rIns="25400" bIns="25400" rtlCol="0" anchor="t">
+            <a:normAutofit fontScale="92500" lnSpcReduction="10000"/>
+          </a:bodyPr>
+          <a:lstStyle/>
+          <a:p>
+            <a:pPr marL="0" indent="0" algn="l">
+              <a:buNone/>
+            </a:pPr>
+            <a:r>
+              <a:rPr lang="en-US" sz="1800" kern="0" spc="225" dirty="0">
+                <a:solidFill>
+                  <a:srgbClr val="007A33"/>
+                </a:solidFill>
+                <a:latin typeface="Courier New" pitchFamily="34" charset="0"/>
+                <a:ea typeface="Courier New" pitchFamily="34" charset="-122"/>
+                <a:cs typeface="Courier New" pitchFamily="34" charset="-120"/>
+              </a:rPr>
+              <a:t>09 · FEATURES WE BUILT</a:t>
+            </a:r>
+            <a:endParaRPr lang="en-US" sz="1800" dirty="0"/>
+          </a:p>
+        </p:txBody>
+      </p:sp>
+      <p:sp>
+        <p:nvSpPr>
+          <p:cNvPr id="4" name="Text 2"/>
+          <p:cNvSpPr/>
+          <p:nvPr/>
+        </p:nvSpPr>
+        <p:spPr>
+          <a:xfrm>
+            <a:off x="952500" y="1152525"/>
+            <a:ext cx="18021300" cy="550143"/>
+          </a:xfrm>
+          <a:prstGeom prst="rect">
+            <a:avLst/>
+          </a:prstGeom>
+          <a:noFill/>
+          <a:ln/>
+        </p:spPr>
+        <p:txBody>
+          <a:bodyPr wrap="square" lIns="25400" tIns="25400" rIns="25400" bIns="25400" rtlCol="0" anchor="t">
+            <a:normAutofit fontScale="92500" lnSpcReduction="10000"/>
+          </a:bodyPr>
+          <a:lstStyle/>
+          <a:p>
+            <a:pPr marL="0" indent="0" algn="l">
+              <a:lnSpc>
+                <a:spcPct val="112000"/>
+              </a:lnSpc>
+              <a:buNone/>
+            </a:pPr>
+            <a:r>
+              <a:rPr lang="en-US" sz="3600" b="1" kern="0" spc="-37" dirty="0">
+                <a:solidFill>
+                  <a:srgbClr val="063D22"/>
+                </a:solidFill>
+                <a:latin typeface="Arial" pitchFamily="34" charset="0"/>
+                <a:ea typeface="Arial" pitchFamily="34" charset="-122"/>
+                <a:cs typeface="Arial" pitchFamily="34" charset="-120"/>
+              </a:rPr>
+              <a:t>The features we engineered</a:t>
+            </a:r>
+            <a:endParaRPr lang="en-US" sz="3600" dirty="0"/>
+          </a:p>
+        </p:txBody>
+      </p:sp>
+      <p:sp>
+        <p:nvSpPr>
+          <p:cNvPr id="20" name="Shape 18"/>
+          <p:cNvSpPr/>
+          <p:nvPr/>
+        </p:nvSpPr>
+        <p:spPr>
+          <a:xfrm>
+            <a:off x="952500" y="9239250"/>
+            <a:ext cx="16383000" cy="9525"/>
+          </a:xfrm>
+          <a:prstGeom prst="rect">
+            <a:avLst/>
+          </a:prstGeom>
+          <a:solidFill>
+            <a:srgbClr val="D2E6DD"/>
+          </a:solidFill>
+          <a:ln/>
+        </p:spPr>
+        <p:txBody>
+          <a:bodyPr/>
+          <a:lstStyle/>
+          <a:p>
+            <a:endParaRPr lang="en-GB"/>
+          </a:p>
+        </p:txBody>
+      </p:sp>
+      <p:sp>
+        <p:nvSpPr>
+          <p:cNvPr id="21" name="Text 19"/>
+          <p:cNvSpPr/>
+          <p:nvPr/>
+        </p:nvSpPr>
+        <p:spPr>
+          <a:xfrm>
+            <a:off x="952500" y="9458325"/>
+            <a:ext cx="16874490" cy="295275"/>
+          </a:xfrm>
+          <a:prstGeom prst="rect">
+            <a:avLst/>
+          </a:prstGeom>
+          <a:noFill/>
+          <a:ln/>
+        </p:spPr>
+        <p:txBody>
+          <a:bodyPr wrap="square" lIns="25400" tIns="25400" rIns="25400" bIns="25400" rtlCol="0" anchor="t">
+            <a:normAutofit fontScale="92500" lnSpcReduction="10000"/>
+          </a:bodyPr>
+          <a:lstStyle/>
+          <a:p>
+            <a:pPr marL="0" indent="0" algn="l">
+              <a:buNone/>
+            </a:pPr>
+            <a:r>
+              <a:rPr lang="en-US" sz="1800" dirty="0">
+                <a:solidFill>
+                  <a:srgbClr val="5C7268"/>
+                </a:solidFill>
+                <a:latin typeface="Courier New" pitchFamily="34" charset="0"/>
+                <a:ea typeface="Courier New" pitchFamily="34" charset="-122"/>
+                <a:cs typeface="Courier New" pitchFamily="34" charset="-120"/>
+              </a:rPr>
+              <a:t>Source: src/prep.py · engineered features ranked on slide 8</a:t>
+            </a:r>
+            <a:endParaRPr lang="en-US" sz="1800" dirty="0"/>
+          </a:p>
+        </p:txBody>
+      </p:sp>
+      <p:graphicFrame>
+        <p:nvGraphicFramePr>
+          <p:cNvPr id="22" name="Table 21"/>
+          <p:cNvGraphicFramePr>
+            <a:graphicFrameLocks noGrp="1"/>
+          </p:cNvGraphicFramePr>
+          <p:nvPr/>
+        </p:nvGraphicFramePr>
+        <p:xfrm>
+          <a:off x="950976" y="2468880"/>
+          <a:ext cx="16367760" cy="6035040"/>
+        </p:xfrm>
+        <a:graphic>
+          <a:graphicData uri="http://schemas.openxmlformats.org/drawingml/2006/table">
+            <a:tbl>
+              <a:tblPr>
+                <a:tableStyleId>{5C22544A-7EE6-4342-B048-85BDC9FD1C3A}</a:tableStyleId>
+              </a:tblPr>
+              <a:tblGrid>
+                <a:gridCol w="3931920"/>
+                <a:gridCol w="5943600"/>
+                <a:gridCol w="6492240"/>
+              </a:tblGrid>
+              <a:tr h="754380">
+                <a:tc>
+                  <a:txBody>
+                    <a:bodyPr wrap="square"/>
+                    <a:lstStyle/>
+                    <a:p>
+                      <a:pPr algn="l"/>
+                      <a:r>
+                        <a:rPr sz="1700" b="1">
+                          <a:solidFill>
+                            <a:srgbClr val="FFFFFF"/>
+                          </a:solidFill>
+                          <a:latin typeface="Arial"/>
+                        </a:rPr>
+                        <a:t>Feature</a:t>
+                      </a:r>
+                    </a:p>
+                  </a:txBody>
+                  <a:tcPr anchor="ctr" marL="164592" marT="54864" marB="54864">
+                    <a:solidFill>
+                      <a:srgbClr val="063D22"/>
+                    </a:solidFill>
+                  </a:tcPr>
+                </a:tc>
+                <a:tc>
+                  <a:txBody>
+                    <a:bodyPr wrap="square"/>
+                    <a:lstStyle/>
+                    <a:p>
+                      <a:pPr algn="l"/>
+                      <a:r>
+                        <a:rPr sz="1700" b="1">
+                          <a:solidFill>
+                            <a:srgbClr val="FFFFFF"/>
+                          </a:solidFill>
+                          <a:latin typeface="Arial"/>
+                        </a:rPr>
+                        <a:t>How we built it</a:t>
+                      </a:r>
+                    </a:p>
+                  </a:txBody>
+                  <a:tcPr anchor="ctr" marL="164592" marT="54864" marB="54864">
+                    <a:solidFill>
+                      <a:srgbClr val="063D22"/>
+                    </a:solidFill>
+                  </a:tcPr>
+                </a:tc>
+                <a:tc>
+                  <a:txBody>
+                    <a:bodyPr wrap="square"/>
+                    <a:lstStyle/>
+                    <a:p>
+                      <a:pPr algn="l"/>
+                      <a:r>
+                        <a:rPr sz="1700" b="1">
+                          <a:solidFill>
+                            <a:srgbClr val="FFFFFF"/>
+                          </a:solidFill>
+                          <a:latin typeface="Arial"/>
+                        </a:rPr>
+                        <a:t>Why it helps</a:t>
+                      </a:r>
+                    </a:p>
+                  </a:txBody>
+                  <a:tcPr anchor="ctr" marL="164592" marT="54864" marB="54864">
+                    <a:solidFill>
+                      <a:srgbClr val="063D22"/>
+                    </a:solidFill>
+                  </a:tcPr>
+                </a:tc>
+              </a:tr>
+              <a:tr h="754380">
+                <a:tc>
+                  <a:txBody>
+                    <a:bodyPr wrap="square"/>
+                    <a:lstStyle/>
+                    <a:p>
+                      <a:pPr algn="l"/>
+                      <a:r>
+                        <a:rPr sz="1500">
+                          <a:solidFill>
+                            <a:srgbClr val="14533B"/>
+                          </a:solidFill>
+                          <a:latin typeface="Courier New"/>
+                        </a:rPr>
+                        <a:t>risk_mean · risk_max</a:t>
+                      </a:r>
+                    </a:p>
+                  </a:txBody>
+                  <a:tcPr anchor="ctr" marL="164592" marT="54864" marB="54864">
+                    <a:solidFill>
+                      <a:srgbClr val="EAF3EF"/>
+                    </a:solidFill>
+                  </a:tcPr>
+                </a:tc>
+                <a:tc>
+                  <a:txBody>
+                    <a:bodyPr wrap="square"/>
+                    <a:lstStyle/>
+                    <a:p>
+                      <a:pPr algn="l"/>
+                      <a:r>
+                        <a:rPr sz="1500">
+                          <a:solidFill>
+                            <a:srgbClr val="14533B"/>
+                          </a:solidFill>
+                          <a:latin typeface="Courier New"/>
+                        </a:rPr>
+                        <a:t>mean &amp; max of the two risk indicators</a:t>
+                      </a:r>
+                    </a:p>
+                  </a:txBody>
+                  <a:tcPr anchor="ctr" marL="164592" marT="54864" marB="54864">
+                    <a:solidFill>
+                      <a:srgbClr val="EAF3EF"/>
+                    </a:solidFill>
+                  </a:tcPr>
+                </a:tc>
+                <a:tc>
+                  <a:txBody>
+                    <a:bodyPr wrap="square"/>
+                    <a:lstStyle/>
+                    <a:p>
+                      <a:pPr algn="l"/>
+                      <a:r>
+                        <a:rPr sz="1500">
+                          <a:solidFill>
+                            <a:srgbClr val="5C7268"/>
+                          </a:solidFill>
+                          <a:latin typeface="Arial"/>
+                        </a:rPr>
+                        <a:t>Combine both risk sources</a:t>
+                      </a:r>
+                    </a:p>
+                  </a:txBody>
+                  <a:tcPr anchor="ctr" marL="164592" marT="54864" marB="54864">
+                    <a:solidFill>
+                      <a:srgbClr val="EAF3EF"/>
+                    </a:solidFill>
+                  </a:tcPr>
+                </a:tc>
+              </a:tr>
+              <a:tr h="754380">
+                <a:tc>
+                  <a:txBody>
+                    <a:bodyPr wrap="square"/>
+                    <a:lstStyle/>
+                    <a:p>
+                      <a:pPr algn="l"/>
+                      <a:r>
+                        <a:rPr sz="1500">
+                          <a:solidFill>
+                            <a:srgbClr val="14533B"/>
+                          </a:solidFill>
+                          <a:latin typeface="Courier New"/>
+                        </a:rPr>
+                        <a:t>risk_dev</a:t>
+                      </a:r>
+                    </a:p>
+                  </a:txBody>
+                  <a:tcPr anchor="ctr" marL="164592" marT="54864" marB="54864">
+                    <a:solidFill>
+                      <a:srgbClr val="FFFFFF"/>
+                    </a:solidFill>
+                  </a:tcPr>
+                </a:tc>
+                <a:tc>
+                  <a:txBody>
+                    <a:bodyPr wrap="square"/>
+                    <a:lstStyle/>
+                    <a:p>
+                      <a:pPr algn="l"/>
+                      <a:r>
+                        <a:rPr sz="1500">
+                          <a:solidFill>
+                            <a:srgbClr val="14533B"/>
+                          </a:solidFill>
+                          <a:latin typeface="Courier New"/>
+                        </a:rPr>
+                        <a:t>distance from the middle:  |risk - 55|</a:t>
+                      </a:r>
+                    </a:p>
+                  </a:txBody>
+                  <a:tcPr anchor="ctr" marL="164592" marT="54864" marB="54864">
+                    <a:solidFill>
+                      <a:srgbClr val="FFFFFF"/>
+                    </a:solidFill>
+                  </a:tcPr>
+                </a:tc>
+                <a:tc>
+                  <a:txBody>
+                    <a:bodyPr wrap="square"/>
+                    <a:lstStyle/>
+                    <a:p>
+                      <a:pPr algn="l"/>
+                      <a:r>
+                        <a:rPr sz="1500">
+                          <a:solidFill>
+                            <a:srgbClr val="5C7268"/>
+                          </a:solidFill>
+                          <a:latin typeface="Arial"/>
+                        </a:rPr>
+                        <a:t>Turns the risk hump into usable signal</a:t>
+                      </a:r>
+                    </a:p>
+                  </a:txBody>
+                  <a:tcPr anchor="ctr" marL="164592" marT="54864" marB="54864">
+                    <a:solidFill>
+                      <a:srgbClr val="FFFFFF"/>
+                    </a:solidFill>
+                  </a:tcPr>
+                </a:tc>
+              </a:tr>
+              <a:tr h="754380">
+                <a:tc>
+                  <a:txBody>
+                    <a:bodyPr wrap="square"/>
+                    <a:lstStyle/>
+                    <a:p>
+                      <a:pPr algn="l"/>
+                      <a:r>
+                        <a:rPr sz="1500">
+                          <a:solidFill>
+                            <a:srgbClr val="14533B"/>
+                          </a:solidFill>
+                          <a:latin typeface="Courier New"/>
+                        </a:rPr>
+                        <a:t>amt_to_income</a:t>
+                      </a:r>
+                    </a:p>
+                  </a:txBody>
+                  <a:tcPr anchor="ctr" marL="164592" marT="54864" marB="54864">
+                    <a:solidFill>
+                      <a:srgbClr val="EAF3EF"/>
+                    </a:solidFill>
+                  </a:tcPr>
+                </a:tc>
+                <a:tc>
+                  <a:txBody>
+                    <a:bodyPr wrap="square"/>
+                    <a:lstStyle/>
+                    <a:p>
+                      <a:pPr algn="l"/>
+                      <a:r>
+                        <a:rPr sz="1500">
+                          <a:solidFill>
+                            <a:srgbClr val="14533B"/>
+                          </a:solidFill>
+                          <a:latin typeface="Courier New"/>
+                        </a:rPr>
+                        <a:t>amount / (total_income + 1)</a:t>
+                      </a:r>
+                    </a:p>
+                  </a:txBody>
+                  <a:tcPr anchor="ctr" marL="164592" marT="54864" marB="54864">
+                    <a:solidFill>
+                      <a:srgbClr val="EAF3EF"/>
+                    </a:solidFill>
+                  </a:tcPr>
+                </a:tc>
+                <a:tc>
+                  <a:txBody>
+                    <a:bodyPr wrap="square"/>
+                    <a:lstStyle/>
+                    <a:p>
+                      <a:pPr algn="l"/>
+                      <a:r>
+                        <a:rPr sz="1500">
+                          <a:solidFill>
+                            <a:srgbClr val="5C7268"/>
+                          </a:solidFill>
+                          <a:latin typeface="Arial"/>
+                        </a:rPr>
+                        <a:t>Affordability ratio — a credit standard</a:t>
+                      </a:r>
+                    </a:p>
+                  </a:txBody>
+                  <a:tcPr anchor="ctr" marL="164592" marT="54864" marB="54864">
+                    <a:solidFill>
+                      <a:srgbClr val="EAF3EF"/>
+                    </a:solidFill>
+                  </a:tcPr>
+                </a:tc>
+              </a:tr>
+              <a:tr h="754380">
+                <a:tc>
+                  <a:txBody>
+                    <a:bodyPr wrap="square"/>
+                    <a:lstStyle/>
+                    <a:p>
+                      <a:pPr algn="l"/>
+                      <a:r>
+                        <a:rPr sz="1500">
+                          <a:solidFill>
+                            <a:srgbClr val="14533B"/>
+                          </a:solidFill>
+                          <a:latin typeface="Courier New"/>
+                        </a:rPr>
+                        <a:t>total_income · log_income</a:t>
+                      </a:r>
+                    </a:p>
+                  </a:txBody>
+                  <a:tcPr anchor="ctr" marL="164592" marT="54864" marB="54864">
+                    <a:solidFill>
+                      <a:srgbClr val="FFFFFF"/>
+                    </a:solidFill>
+                  </a:tcPr>
+                </a:tc>
+                <a:tc>
+                  <a:txBody>
+                    <a:bodyPr wrap="square"/>
+                    <a:lstStyle/>
+                    <a:p>
+                      <a:pPr algn="l"/>
+                      <a:r>
+                        <a:rPr sz="1500">
+                          <a:solidFill>
+                            <a:srgbClr val="14533B"/>
+                          </a:solidFill>
+                          <a:latin typeface="Courier New"/>
+                        </a:rPr>
+                        <a:t>ann_income + other_income (log-scaled)</a:t>
+                      </a:r>
+                    </a:p>
+                  </a:txBody>
+                  <a:tcPr anchor="ctr" marL="164592" marT="54864" marB="54864">
+                    <a:solidFill>
+                      <a:srgbClr val="FFFFFF"/>
+                    </a:solidFill>
+                  </a:tcPr>
+                </a:tc>
+                <a:tc>
+                  <a:txBody>
+                    <a:bodyPr wrap="square"/>
+                    <a:lstStyle/>
+                    <a:p>
+                      <a:pPr algn="l"/>
+                      <a:r>
+                        <a:rPr sz="1500">
+                          <a:solidFill>
+                            <a:srgbClr val="5C7268"/>
+                          </a:solidFill>
+                          <a:latin typeface="Arial"/>
+                        </a:rPr>
+                        <a:t>Real disposable income</a:t>
+                      </a:r>
+                    </a:p>
+                  </a:txBody>
+                  <a:tcPr anchor="ctr" marL="164592" marT="54864" marB="54864">
+                    <a:solidFill>
+                      <a:srgbClr val="FFFFFF"/>
+                    </a:solidFill>
+                  </a:tcPr>
+                </a:tc>
+              </a:tr>
+              <a:tr h="754380">
+                <a:tc>
+                  <a:txBody>
+                    <a:bodyPr wrap="square"/>
+                    <a:lstStyle/>
+                    <a:p>
+                      <a:pPr algn="l"/>
+                      <a:r>
+                        <a:rPr sz="1500">
+                          <a:solidFill>
+                            <a:srgbClr val="14533B"/>
+                          </a:solidFill>
+                          <a:latin typeface="Courier New"/>
+                        </a:rPr>
+                        <a:t>credit_z</a:t>
+                      </a:r>
+                    </a:p>
+                  </a:txBody>
+                  <a:tcPr anchor="ctr" marL="164592" marT="54864" marB="54864">
+                    <a:solidFill>
+                      <a:srgbClr val="EAF3EF"/>
+                    </a:solidFill>
+                  </a:tcPr>
+                </a:tc>
+                <a:tc>
+                  <a:txBody>
+                    <a:bodyPr wrap="square"/>
+                    <a:lstStyle/>
+                    <a:p>
+                      <a:pPr algn="l"/>
+                      <a:r>
+                        <a:rPr sz="1500">
+                          <a:solidFill>
+                            <a:srgbClr val="14533B"/>
+                          </a:solidFill>
+                          <a:latin typeface="Courier New"/>
+                        </a:rPr>
+                        <a:t>3 bureau scores z-scored &amp; merged</a:t>
+                      </a:r>
+                    </a:p>
+                  </a:txBody>
+                  <a:tcPr anchor="ctr" marL="164592" marT="54864" marB="54864">
+                    <a:solidFill>
+                      <a:srgbClr val="EAF3EF"/>
+                    </a:solidFill>
+                  </a:tcPr>
+                </a:tc>
+                <a:tc>
+                  <a:txBody>
+                    <a:bodyPr wrap="square"/>
+                    <a:lstStyle/>
+                    <a:p>
+                      <a:pPr algn="l"/>
+                      <a:r>
+                        <a:rPr sz="1500">
+                          <a:solidFill>
+                            <a:srgbClr val="5C7268"/>
+                          </a:solidFill>
+                          <a:latin typeface="Arial"/>
+                        </a:rPr>
+                        <a:t>One comparable score from 3 scales</a:t>
+                      </a:r>
+                    </a:p>
+                  </a:txBody>
+                  <a:tcPr anchor="ctr" marL="164592" marT="54864" marB="54864">
+                    <a:solidFill>
+                      <a:srgbClr val="EAF3EF"/>
+                    </a:solidFill>
+                  </a:tcPr>
+                </a:tc>
+              </a:tr>
+              <a:tr h="754380">
+                <a:tc>
+                  <a:txBody>
+                    <a:bodyPr wrap="square"/>
+                    <a:lstStyle/>
+                    <a:p>
+                      <a:pPr algn="l"/>
+                      <a:r>
+                        <a:rPr sz="1500">
+                          <a:solidFill>
+                            <a:srgbClr val="14533B"/>
+                          </a:solidFill>
+                          <a:latin typeface="Courier New"/>
+                        </a:rPr>
+                        <a:t>has_score · *_missing</a:t>
+                      </a:r>
+                    </a:p>
+                  </a:txBody>
+                  <a:tcPr anchor="ctr" marL="164592" marT="54864" marB="54864">
+                    <a:solidFill>
+                      <a:srgbClr val="FFFFFF"/>
+                    </a:solidFill>
+                  </a:tcPr>
+                </a:tc>
+                <a:tc>
+                  <a:txBody>
+                    <a:bodyPr wrap="square"/>
+                    <a:lstStyle/>
+                    <a:p>
+                      <a:pPr algn="l"/>
+                      <a:r>
+                        <a:rPr sz="1500">
+                          <a:solidFill>
+                            <a:srgbClr val="14533B"/>
+                          </a:solidFill>
+                          <a:latin typeface="Courier New"/>
+                        </a:rPr>
+                        <a:t>binary 0/1 flags</a:t>
+                      </a:r>
+                    </a:p>
+                  </a:txBody>
+                  <a:tcPr anchor="ctr" marL="164592" marT="54864" marB="54864">
+                    <a:solidFill>
+                      <a:srgbClr val="FFFFFF"/>
+                    </a:solidFill>
+                  </a:tcPr>
+                </a:tc>
+                <a:tc>
+                  <a:txBody>
+                    <a:bodyPr wrap="square"/>
+                    <a:lstStyle/>
+                    <a:p>
+                      <a:pPr algn="l"/>
+                      <a:r>
+                        <a:rPr sz="1500">
+                          <a:solidFill>
+                            <a:srgbClr val="5C7268"/>
+                          </a:solidFill>
+                          <a:latin typeface="Arial"/>
+                        </a:rPr>
+                        <a:t>“Value absent” is itself a signal</a:t>
+                      </a:r>
+                    </a:p>
+                  </a:txBody>
+                  <a:tcPr anchor="ctr" marL="164592" marT="54864" marB="54864">
+                    <a:solidFill>
+                      <a:srgbClr val="FFFFFF"/>
+                    </a:solidFill>
+                  </a:tcPr>
+                </a:tc>
+              </a:tr>
+              <a:tr h="754380">
+                <a:tc>
+                  <a:txBody>
+                    <a:bodyPr wrap="square"/>
+                    <a:lstStyle/>
+                    <a:p>
+                      <a:pPr algn="l"/>
+                      <a:r>
+                        <a:rPr sz="1500">
+                          <a:solidFill>
+                            <a:srgbClr val="14533B"/>
+                          </a:solidFill>
+                          <a:latin typeface="Courier New"/>
+                        </a:rPr>
+                        <a:t>year · month</a:t>
+                      </a:r>
+                    </a:p>
+                  </a:txBody>
+                  <a:tcPr anchor="ctr" marL="164592" marT="54864" marB="54864">
+                    <a:solidFill>
+                      <a:srgbClr val="EAF3EF"/>
+                    </a:solidFill>
+                  </a:tcPr>
+                </a:tc>
+                <a:tc>
+                  <a:txBody>
+                    <a:bodyPr wrap="square"/>
+                    <a:lstStyle/>
+                    <a:p>
+                      <a:pPr algn="l"/>
+                      <a:r>
+                        <a:rPr sz="1500">
+                          <a:solidFill>
+                            <a:srgbClr val="14533B"/>
+                          </a:solidFill>
+                          <a:latin typeface="Courier New"/>
+                        </a:rPr>
+                        <a:t>parsed from the date</a:t>
+                      </a:r>
+                    </a:p>
+                  </a:txBody>
+                  <a:tcPr anchor="ctr" marL="164592" marT="54864" marB="54864">
+                    <a:solidFill>
+                      <a:srgbClr val="EAF3EF"/>
+                    </a:solidFill>
+                  </a:tcPr>
+                </a:tc>
+                <a:tc>
+                  <a:txBody>
+                    <a:bodyPr wrap="square"/>
+                    <a:lstStyle/>
+                    <a:p>
+                      <a:pPr algn="l"/>
+                      <a:r>
+                        <a:rPr sz="1500">
+                          <a:solidFill>
+                            <a:srgbClr val="5C7268"/>
+                          </a:solidFill>
+                          <a:latin typeface="Arial"/>
+                        </a:rPr>
+                        <a:t>Captures the downward 2026 approval trend</a:t>
+                      </a:r>
+                    </a:p>
+                  </a:txBody>
+                  <a:tcPr anchor="ctr" marL="164592" marT="54864" marB="54864">
+                    <a:solidFill>
+                      <a:srgbClr val="EAF3EF"/>
+                    </a:solidFill>
+                  </a:tcPr>
+                </a:tc>
+              </a:tr>
+            </a:tbl>
+          </a:graphicData>
+        </a:graphic>
+      </p:graphicFrame>
     </p:spTree>
   </p:cSld>
   <p:clrMapOvr>
@@ -11641,7 +12435,7 @@
                 <a:ea typeface="Courier New" pitchFamily="34" charset="-122"/>
                 <a:cs typeface="Courier New" pitchFamily="34" charset="-120"/>
               </a:rPr>
-              <a:t>09 · RESULTS</a:t>
+              <a:t>10 · RESULTS</a:t>
             </a:r>
             <a:endParaRPr lang="en-US" sz="1800" dirty="0"/>
           </a:p>

--- a/presentation/Consulting_Finance_ML_Slides.pptx
+++ b/presentation/Consulting_Finance_ML_Slides.pptx
@@ -5,7 +5,7 @@
     <p:sldMasterId id="2147483648" r:id="rId1"/>
   </p:sldMasterIdLst>
   <p:notesMasterIdLst>
-    <p:notesMasterId r:id="rId15"/>
+    <p:notesMasterId r:id="rId16"/>
   </p:notesMasterIdLst>
   <p:sldIdLst>
     <p:sldId id="256" r:id="rId2"/>
@@ -16,12 +16,12 @@
     <p:sldId id="261" r:id="rId7"/>
     <p:sldId id="262" r:id="rId8"/>
     <p:sldId id="263" r:id="rId9"/>
-    <p:sldId id="269" r:id="rId20"/>
-    <p:sldId id="264" r:id="rId10"/>
-    <p:sldId id="265" r:id="rId11"/>
-    <p:sldId id="266" r:id="rId12"/>
-    <p:sldId id="268" r:id="rId13"/>
-    <p:sldId id="267" r:id="rId14"/>
+    <p:sldId id="269" r:id="rId10"/>
+    <p:sldId id="264" r:id="rId11"/>
+    <p:sldId id="265" r:id="rId12"/>
+    <p:sldId id="266" r:id="rId13"/>
+    <p:sldId id="268" r:id="rId14"/>
+    <p:sldId id="267" r:id="rId15"/>
   </p:sldIdLst>
   <p:sldSz cx="18288000" cy="10287000"/>
   <p:notesSz cx="10287000" cy="18288000"/>
@@ -405,7 +405,7 @@
           <a:p>
             <a:fld id="{F7021451-1387-4CA6-816F-3879F97B5CBC}" type="slidenum">
               <a:rPr lang="en-US"/>
-              <a:t>10</a:t>
+              <a:t>11</a:t>
             </a:fld>
             <a:endParaRPr lang="en-US"/>
           </a:p>
@@ -492,7 +492,7 @@
           <a:p>
             <a:fld id="{F7021451-1387-4CA6-816F-3879F97B5CBC}" type="slidenum">
               <a:rPr lang="en-US"/>
-              <a:t>11</a:t>
+              <a:t>12</a:t>
             </a:fld>
             <a:endParaRPr lang="en-US"/>
           </a:p>
@@ -579,7 +579,7 @@
           <a:p>
             <a:fld id="{F7021451-1387-4CA6-816F-3879F97B5CBC}" type="slidenum">
               <a:rPr lang="en-US"/>
-              <a:t>13</a:t>
+              <a:t>14</a:t>
             </a:fld>
             <a:endParaRPr lang="en-US"/>
           </a:p>
@@ -1275,7 +1275,7 @@
           <a:p>
             <a:fld id="{F7021451-1387-4CA6-816F-3879F97B5CBC}" type="slidenum">
               <a:rPr lang="en-US"/>
-              <a:t>9</a:t>
+              <a:t>10</a:t>
             </a:fld>
             <a:endParaRPr lang="en-US"/>
           </a:p>
@@ -1922,6 +1922,2338 @@
 
 <file path=ppt/slides/slide10.xml><?xml version="1.0" encoding="utf-8"?>
 <p:sld xmlns:a="http://schemas.openxmlformats.org/drawingml/2006/main" xmlns:r="http://schemas.openxmlformats.org/officeDocument/2006/relationships" xmlns:p="http://schemas.openxmlformats.org/presentationml/2006/main">
+  <p:cSld name="Slide 9">
+    <p:bg>
+      <p:bgPr>
+        <a:solidFill>
+          <a:srgbClr val="FFFFFF"/>
+        </a:solidFill>
+        <a:effectLst/>
+      </p:bgPr>
+    </p:bg>
+    <p:spTree>
+      <p:nvGrpSpPr>
+        <p:cNvPr id="1" name=""/>
+        <p:cNvGrpSpPr/>
+        <p:nvPr/>
+      </p:nvGrpSpPr>
+      <p:grpSpPr>
+        <a:xfrm>
+          <a:off x="0" y="0"/>
+          <a:ext cx="0" cy="0"/>
+          <a:chOff x="0" y="0"/>
+          <a:chExt cx="0" cy="0"/>
+        </a:xfrm>
+      </p:grpSpPr>
+      <p:sp>
+        <p:nvSpPr>
+          <p:cNvPr id="2" name="Shape 0"/>
+          <p:cNvSpPr/>
+          <p:nvPr/>
+        </p:nvSpPr>
+        <p:spPr>
+          <a:xfrm>
+            <a:off x="952500" y="1912218"/>
+            <a:ext cx="16383000" cy="19050"/>
+          </a:xfrm>
+          <a:prstGeom prst="rect">
+            <a:avLst/>
+          </a:prstGeom>
+          <a:solidFill>
+            <a:srgbClr val="1A7A57"/>
+          </a:solidFill>
+          <a:ln/>
+        </p:spPr>
+        <p:txBody>
+          <a:bodyPr/>
+          <a:lstStyle/>
+          <a:p>
+            <a:endParaRPr/>
+          </a:p>
+        </p:txBody>
+      </p:sp>
+      <p:sp>
+        <p:nvSpPr>
+          <p:cNvPr id="3" name="Text 1"/>
+          <p:cNvSpPr/>
+          <p:nvPr/>
+        </p:nvSpPr>
+        <p:spPr>
+          <a:xfrm>
+            <a:off x="952500" y="742950"/>
+            <a:ext cx="18021300" cy="295275"/>
+          </a:xfrm>
+          <a:prstGeom prst="rect">
+            <a:avLst/>
+          </a:prstGeom>
+          <a:noFill/>
+          <a:ln/>
+        </p:spPr>
+        <p:txBody>
+          <a:bodyPr wrap="square" lIns="25400" tIns="25400" rIns="25400" bIns="25400" rtlCol="0" anchor="t">
+            <a:normAutofit fontScale="92500" lnSpcReduction="10000"/>
+          </a:bodyPr>
+          <a:lstStyle/>
+          <a:p>
+            <a:pPr marL="0" indent="0" algn="l">
+              <a:buNone/>
+            </a:pPr>
+            <a:r>
+              <a:rPr lang="en-US" sz="1800" kern="0" spc="225" dirty="0">
+                <a:solidFill>
+                  <a:srgbClr val="007A33"/>
+                </a:solidFill>
+                <a:latin typeface="Courier New" pitchFamily="34" charset="0"/>
+                <a:ea typeface="Courier New" pitchFamily="34" charset="-122"/>
+                <a:cs typeface="Courier New" pitchFamily="34" charset="-120"/>
+              </a:rPr>
+              <a:t>10 · RESULTS</a:t>
+            </a:r>
+            <a:endParaRPr lang="en-US" sz="1800" dirty="0"/>
+          </a:p>
+        </p:txBody>
+      </p:sp>
+      <p:sp>
+        <p:nvSpPr>
+          <p:cNvPr id="4" name="Text 2"/>
+          <p:cNvSpPr/>
+          <p:nvPr/>
+        </p:nvSpPr>
+        <p:spPr>
+          <a:xfrm>
+            <a:off x="952500" y="1152525"/>
+            <a:ext cx="18021300" cy="550143"/>
+          </a:xfrm>
+          <a:prstGeom prst="rect">
+            <a:avLst/>
+          </a:prstGeom>
+          <a:noFill/>
+          <a:ln/>
+        </p:spPr>
+        <p:txBody>
+          <a:bodyPr wrap="square" lIns="25400" tIns="25400" rIns="25400" bIns="25400" rtlCol="0" anchor="t">
+            <a:normAutofit fontScale="92500" lnSpcReduction="10000"/>
+          </a:bodyPr>
+          <a:lstStyle/>
+          <a:p>
+            <a:pPr marL="0" indent="0" algn="l">
+              <a:lnSpc>
+                <a:spcPct val="112000"/>
+              </a:lnSpc>
+              <a:buNone/>
+            </a:pPr>
+            <a:r>
+              <a:rPr lang="en-US" sz="3600" b="1" kern="0" spc="-37" dirty="0">
+                <a:solidFill>
+                  <a:srgbClr val="063D22"/>
+                </a:solidFill>
+                <a:latin typeface="Arial" pitchFamily="34" charset="0"/>
+                <a:ea typeface="Arial" pitchFamily="34" charset="-122"/>
+                <a:cs typeface="Arial" pitchFamily="34" charset="-120"/>
+              </a:rPr>
+              <a:t>Our own validation predicted the result in advance</a:t>
+            </a:r>
+            <a:endParaRPr lang="en-US" sz="3600" dirty="0"/>
+          </a:p>
+        </p:txBody>
+      </p:sp>
+      <p:sp>
+        <p:nvSpPr>
+          <p:cNvPr id="5" name="Text 3"/>
+          <p:cNvSpPr/>
+          <p:nvPr/>
+        </p:nvSpPr>
+        <p:spPr>
+          <a:xfrm>
+            <a:off x="952500" y="3717429"/>
+            <a:ext cx="11050079" cy="295275"/>
+          </a:xfrm>
+          <a:prstGeom prst="rect">
+            <a:avLst/>
+          </a:prstGeom>
+          <a:noFill/>
+          <a:ln/>
+        </p:spPr>
+        <p:txBody>
+          <a:bodyPr wrap="square" lIns="25400" tIns="25400" rIns="25400" bIns="25400" rtlCol="0" anchor="t">
+            <a:normAutofit fontScale="92500" lnSpcReduction="10000"/>
+          </a:bodyPr>
+          <a:lstStyle/>
+          <a:p>
+            <a:pPr marL="0" indent="0" algn="l">
+              <a:buNone/>
+            </a:pPr>
+            <a:r>
+              <a:rPr lang="en-US" sz="1800" kern="0" spc="75" dirty="0">
+                <a:solidFill>
+                  <a:srgbClr val="007A33"/>
+                </a:solidFill>
+                <a:latin typeface="Courier New" pitchFamily="34" charset="0"/>
+                <a:ea typeface="Courier New" pitchFamily="34" charset="-122"/>
+                <a:cs typeface="Courier New" pitchFamily="34" charset="-120"/>
+              </a:rPr>
+              <a:t>FINAL SUBMISSIONS SELECTED — v6 + v10</a:t>
+            </a:r>
+            <a:endParaRPr lang="en-US" sz="1800" dirty="0"/>
+          </a:p>
+        </p:txBody>
+      </p:sp>
+      <p:sp>
+        <p:nvSpPr>
+          <p:cNvPr id="6" name="Shape 4"/>
+          <p:cNvSpPr/>
+          <p:nvPr/>
+        </p:nvSpPr>
+        <p:spPr>
+          <a:xfrm>
+            <a:off x="952500" y="4593729"/>
+            <a:ext cx="704627" cy="19050"/>
+          </a:xfrm>
+          <a:prstGeom prst="rect">
+            <a:avLst/>
+          </a:prstGeom>
+          <a:solidFill>
+            <a:srgbClr val="1A7A57"/>
+          </a:solidFill>
+          <a:ln/>
+        </p:spPr>
+        <p:txBody>
+          <a:bodyPr/>
+          <a:lstStyle/>
+          <a:p>
+            <a:endParaRPr/>
+          </a:p>
+        </p:txBody>
+      </p:sp>
+      <p:sp>
+        <p:nvSpPr>
+          <p:cNvPr id="7" name="Text 5"/>
+          <p:cNvSpPr/>
+          <p:nvPr/>
+        </p:nvSpPr>
+        <p:spPr>
+          <a:xfrm>
+            <a:off x="1066800" y="4222254"/>
+            <a:ext cx="552227" cy="314325"/>
+          </a:xfrm>
+          <a:prstGeom prst="rect">
+            <a:avLst/>
+          </a:prstGeom>
+          <a:noFill/>
+          <a:ln/>
+        </p:spPr>
+        <p:txBody>
+          <a:bodyPr wrap="square" lIns="25400" tIns="25400" rIns="25400" bIns="25400" rtlCol="0" anchor="ctr">
+            <a:normAutofit lnSpcReduction="10000"/>
+          </a:bodyPr>
+          <a:lstStyle/>
+          <a:p>
+            <a:pPr marL="0" indent="0" algn="l">
+              <a:buNone/>
+            </a:pPr>
+            <a:r>
+              <a:rPr lang="en-US" sz="1875" b="1" dirty="0">
+                <a:solidFill>
+                  <a:srgbClr val="063D22"/>
+                </a:solidFill>
+                <a:latin typeface="Arial" pitchFamily="34" charset="0"/>
+                <a:ea typeface="Arial" pitchFamily="34" charset="-122"/>
+                <a:cs typeface="Arial" pitchFamily="34" charset="-120"/>
+              </a:rPr>
+              <a:t>Ver</a:t>
+            </a:r>
+            <a:endParaRPr lang="en-US" sz="1875" dirty="0"/>
+          </a:p>
+        </p:txBody>
+      </p:sp>
+      <p:sp>
+        <p:nvSpPr>
+          <p:cNvPr id="8" name="Shape 6"/>
+          <p:cNvSpPr/>
+          <p:nvPr/>
+        </p:nvSpPr>
+        <p:spPr>
+          <a:xfrm>
+            <a:off x="1657127" y="4593729"/>
+            <a:ext cx="5770736" cy="19050"/>
+          </a:xfrm>
+          <a:prstGeom prst="rect">
+            <a:avLst/>
+          </a:prstGeom>
+          <a:solidFill>
+            <a:srgbClr val="1A7A57"/>
+          </a:solidFill>
+          <a:ln/>
+        </p:spPr>
+        <p:txBody>
+          <a:bodyPr/>
+          <a:lstStyle/>
+          <a:p>
+            <a:endParaRPr/>
+          </a:p>
+        </p:txBody>
+      </p:sp>
+      <p:sp>
+        <p:nvSpPr>
+          <p:cNvPr id="9" name="Text 7"/>
+          <p:cNvSpPr/>
+          <p:nvPr/>
+        </p:nvSpPr>
+        <p:spPr>
+          <a:xfrm>
+            <a:off x="1771427" y="4222254"/>
+            <a:ext cx="5715258" cy="314325"/>
+          </a:xfrm>
+          <a:prstGeom prst="rect">
+            <a:avLst/>
+          </a:prstGeom>
+          <a:noFill/>
+          <a:ln/>
+        </p:spPr>
+        <p:txBody>
+          <a:bodyPr wrap="square" lIns="25400" tIns="25400" rIns="25400" bIns="25400" rtlCol="0" anchor="ctr">
+            <a:normAutofit lnSpcReduction="10000"/>
+          </a:bodyPr>
+          <a:lstStyle/>
+          <a:p>
+            <a:pPr marL="0" indent="0" algn="l">
+              <a:buNone/>
+            </a:pPr>
+            <a:r>
+              <a:rPr lang="en-US" sz="1875" b="1" dirty="0">
+                <a:solidFill>
+                  <a:srgbClr val="063D22"/>
+                </a:solidFill>
+                <a:latin typeface="Arial" pitchFamily="34" charset="0"/>
+                <a:ea typeface="Arial" pitchFamily="34" charset="-122"/>
+                <a:cs typeface="Arial" pitchFamily="34" charset="-120"/>
+              </a:rPr>
+              <a:t>Approach</a:t>
+            </a:r>
+            <a:endParaRPr lang="en-US" sz="1875" dirty="0"/>
+          </a:p>
+        </p:txBody>
+      </p:sp>
+      <p:sp>
+        <p:nvSpPr>
+          <p:cNvPr id="10" name="Shape 8"/>
+          <p:cNvSpPr/>
+          <p:nvPr/>
+        </p:nvSpPr>
+        <p:spPr>
+          <a:xfrm>
+            <a:off x="7427863" y="4593729"/>
+            <a:ext cx="1164357" cy="19050"/>
+          </a:xfrm>
+          <a:prstGeom prst="rect">
+            <a:avLst/>
+          </a:prstGeom>
+          <a:solidFill>
+            <a:srgbClr val="1A7A57"/>
+          </a:solidFill>
+          <a:ln/>
+        </p:spPr>
+        <p:txBody>
+          <a:bodyPr/>
+          <a:lstStyle/>
+          <a:p>
+            <a:endParaRPr/>
+          </a:p>
+        </p:txBody>
+      </p:sp>
+      <p:sp>
+        <p:nvSpPr>
+          <p:cNvPr id="11" name="Text 9"/>
+          <p:cNvSpPr/>
+          <p:nvPr/>
+        </p:nvSpPr>
+        <p:spPr>
+          <a:xfrm>
+            <a:off x="7465963" y="4222254"/>
+            <a:ext cx="1011957" cy="314325"/>
+          </a:xfrm>
+          <a:prstGeom prst="rect">
+            <a:avLst/>
+          </a:prstGeom>
+          <a:noFill/>
+          <a:ln/>
+        </p:spPr>
+        <p:txBody>
+          <a:bodyPr wrap="square" lIns="25400" tIns="25400" rIns="25400" bIns="25400" rtlCol="0" anchor="ctr">
+            <a:normAutofit lnSpcReduction="10000"/>
+          </a:bodyPr>
+          <a:lstStyle/>
+          <a:p>
+            <a:pPr marL="0" indent="0" algn="r">
+              <a:buNone/>
+            </a:pPr>
+            <a:r>
+              <a:rPr lang="en-US" sz="1875" b="1" dirty="0">
+                <a:solidFill>
+                  <a:srgbClr val="063D22"/>
+                </a:solidFill>
+                <a:latin typeface="Arial" pitchFamily="34" charset="0"/>
+                <a:ea typeface="Arial" pitchFamily="34" charset="-122"/>
+                <a:cs typeface="Arial" pitchFamily="34" charset="-120"/>
+              </a:rPr>
+              <a:t>OOF</a:t>
+            </a:r>
+            <a:endParaRPr lang="en-US" sz="1875" dirty="0"/>
+          </a:p>
+        </p:txBody>
+      </p:sp>
+      <p:sp>
+        <p:nvSpPr>
+          <p:cNvPr id="12" name="Shape 10"/>
+          <p:cNvSpPr/>
+          <p:nvPr/>
+        </p:nvSpPr>
+        <p:spPr>
+          <a:xfrm>
+            <a:off x="8592220" y="4593729"/>
+            <a:ext cx="1394520" cy="19050"/>
+          </a:xfrm>
+          <a:prstGeom prst="rect">
+            <a:avLst/>
+          </a:prstGeom>
+          <a:solidFill>
+            <a:srgbClr val="1A7A57"/>
+          </a:solidFill>
+          <a:ln/>
+        </p:spPr>
+        <p:txBody>
+          <a:bodyPr/>
+          <a:lstStyle/>
+          <a:p>
+            <a:endParaRPr/>
+          </a:p>
+        </p:txBody>
+      </p:sp>
+      <p:sp>
+        <p:nvSpPr>
+          <p:cNvPr id="13" name="Text 11"/>
+          <p:cNvSpPr/>
+          <p:nvPr/>
+        </p:nvSpPr>
+        <p:spPr>
+          <a:xfrm>
+            <a:off x="8630320" y="4222254"/>
+            <a:ext cx="1242120" cy="314325"/>
+          </a:xfrm>
+          <a:prstGeom prst="rect">
+            <a:avLst/>
+          </a:prstGeom>
+          <a:noFill/>
+          <a:ln/>
+        </p:spPr>
+        <p:txBody>
+          <a:bodyPr wrap="square" lIns="25400" tIns="25400" rIns="25400" bIns="25400" rtlCol="0" anchor="ctr">
+            <a:normAutofit lnSpcReduction="10000"/>
+          </a:bodyPr>
+          <a:lstStyle/>
+          <a:p>
+            <a:pPr marL="0" indent="0" algn="r">
+              <a:buNone/>
+            </a:pPr>
+            <a:r>
+              <a:rPr lang="en-US" sz="1875" b="1" dirty="0">
+                <a:solidFill>
+                  <a:srgbClr val="063D22"/>
+                </a:solidFill>
+                <a:latin typeface="Arial" pitchFamily="34" charset="0"/>
+                <a:ea typeface="Arial" pitchFamily="34" charset="-122"/>
+                <a:cs typeface="Arial" pitchFamily="34" charset="-120"/>
+              </a:rPr>
+              <a:t>Public LB</a:t>
+            </a:r>
+            <a:endParaRPr lang="en-US" sz="1875" dirty="0"/>
+          </a:p>
+        </p:txBody>
+      </p:sp>
+      <p:sp>
+        <p:nvSpPr>
+          <p:cNvPr id="14" name="Shape 12"/>
+          <p:cNvSpPr/>
+          <p:nvPr/>
+        </p:nvSpPr>
+        <p:spPr>
+          <a:xfrm>
+            <a:off x="9986739" y="4593729"/>
+            <a:ext cx="1011287" cy="19050"/>
+          </a:xfrm>
+          <a:prstGeom prst="rect">
+            <a:avLst/>
+          </a:prstGeom>
+          <a:solidFill>
+            <a:srgbClr val="1A7A57"/>
+          </a:solidFill>
+          <a:ln/>
+        </p:spPr>
+        <p:txBody>
+          <a:bodyPr/>
+          <a:lstStyle/>
+          <a:p>
+            <a:endParaRPr/>
+          </a:p>
+        </p:txBody>
+      </p:sp>
+      <p:sp>
+        <p:nvSpPr>
+          <p:cNvPr id="15" name="Text 13"/>
+          <p:cNvSpPr/>
+          <p:nvPr/>
+        </p:nvSpPr>
+        <p:spPr>
+          <a:xfrm>
+            <a:off x="10024839" y="4222254"/>
+            <a:ext cx="858887" cy="314325"/>
+          </a:xfrm>
+          <a:prstGeom prst="rect">
+            <a:avLst/>
+          </a:prstGeom>
+          <a:noFill/>
+          <a:ln/>
+        </p:spPr>
+        <p:txBody>
+          <a:bodyPr wrap="square" lIns="25400" tIns="25400" rIns="25400" bIns="25400" rtlCol="0" anchor="ctr">
+            <a:normAutofit lnSpcReduction="10000"/>
+          </a:bodyPr>
+          <a:lstStyle/>
+          <a:p>
+            <a:pPr marL="0" indent="0" algn="r">
+              <a:buNone/>
+            </a:pPr>
+            <a:r>
+              <a:rPr lang="en-US" sz="1875" b="1" dirty="0">
+                <a:solidFill>
+                  <a:srgbClr val="063D22"/>
+                </a:solidFill>
+                <a:latin typeface="Arial" pitchFamily="34" charset="0"/>
+                <a:ea typeface="Arial" pitchFamily="34" charset="-122"/>
+                <a:cs typeface="Arial" pitchFamily="34" charset="-120"/>
+              </a:rPr>
+              <a:t>Appr.</a:t>
+            </a:r>
+            <a:endParaRPr lang="en-US" sz="1875" dirty="0"/>
+          </a:p>
+        </p:txBody>
+      </p:sp>
+      <p:sp>
+        <p:nvSpPr>
+          <p:cNvPr id="16" name="Shape 14"/>
+          <p:cNvSpPr/>
+          <p:nvPr/>
+        </p:nvSpPr>
+        <p:spPr>
+          <a:xfrm>
+            <a:off x="952500" y="5103316"/>
+            <a:ext cx="704627" cy="9525"/>
+          </a:xfrm>
+          <a:prstGeom prst="rect">
+            <a:avLst/>
+          </a:prstGeom>
+          <a:solidFill>
+            <a:srgbClr val="D2E6DD"/>
+          </a:solidFill>
+          <a:ln/>
+        </p:spPr>
+        <p:txBody>
+          <a:bodyPr/>
+          <a:lstStyle/>
+          <a:p>
+            <a:endParaRPr/>
+          </a:p>
+        </p:txBody>
+      </p:sp>
+      <p:sp>
+        <p:nvSpPr>
+          <p:cNvPr id="17" name="Text 15"/>
+          <p:cNvSpPr/>
+          <p:nvPr/>
+        </p:nvSpPr>
+        <p:spPr>
+          <a:xfrm>
+            <a:off x="1066800" y="4717554"/>
+            <a:ext cx="552227" cy="319088"/>
+          </a:xfrm>
+          <a:prstGeom prst="rect">
+            <a:avLst/>
+          </a:prstGeom>
+          <a:noFill/>
+          <a:ln/>
+        </p:spPr>
+        <p:txBody>
+          <a:bodyPr wrap="square" lIns="25400" tIns="25400" rIns="25400" bIns="25400" rtlCol="0" anchor="ctr">
+            <a:normAutofit lnSpcReduction="10000"/>
+          </a:bodyPr>
+          <a:lstStyle/>
+          <a:p>
+            <a:pPr marL="0" indent="0" algn="l">
+              <a:buNone/>
+            </a:pPr>
+            <a:r>
+              <a:rPr lang="en-US" sz="1875" dirty="0">
+                <a:solidFill>
+                  <a:srgbClr val="244236"/>
+                </a:solidFill>
+                <a:latin typeface="Courier New" pitchFamily="34" charset="0"/>
+                <a:ea typeface="Courier New" pitchFamily="34" charset="-122"/>
+                <a:cs typeface="Courier New" pitchFamily="34" charset="-120"/>
+              </a:rPr>
+              <a:t>v1</a:t>
+            </a:r>
+            <a:endParaRPr lang="en-US" sz="1875" dirty="0"/>
+          </a:p>
+        </p:txBody>
+      </p:sp>
+      <p:sp>
+        <p:nvSpPr>
+          <p:cNvPr id="18" name="Shape 16"/>
+          <p:cNvSpPr/>
+          <p:nvPr/>
+        </p:nvSpPr>
+        <p:spPr>
+          <a:xfrm>
+            <a:off x="1657127" y="5103316"/>
+            <a:ext cx="5770736" cy="9525"/>
+          </a:xfrm>
+          <a:prstGeom prst="rect">
+            <a:avLst/>
+          </a:prstGeom>
+          <a:solidFill>
+            <a:srgbClr val="D2E6DD"/>
+          </a:solidFill>
+          <a:ln/>
+        </p:spPr>
+        <p:txBody>
+          <a:bodyPr/>
+          <a:lstStyle/>
+          <a:p>
+            <a:endParaRPr/>
+          </a:p>
+        </p:txBody>
+      </p:sp>
+      <p:sp>
+        <p:nvSpPr>
+          <p:cNvPr id="19" name="Text 17"/>
+          <p:cNvSpPr/>
+          <p:nvPr/>
+        </p:nvSpPr>
+        <p:spPr>
+          <a:xfrm>
+            <a:off x="1771427" y="4717554"/>
+            <a:ext cx="5715258" cy="319088"/>
+          </a:xfrm>
+          <a:prstGeom prst="rect">
+            <a:avLst/>
+          </a:prstGeom>
+          <a:noFill/>
+          <a:ln/>
+        </p:spPr>
+        <p:txBody>
+          <a:bodyPr wrap="square" lIns="25400" tIns="25400" rIns="25400" bIns="25400" rtlCol="0" anchor="ctr">
+            <a:normAutofit lnSpcReduction="10000"/>
+          </a:bodyPr>
+          <a:lstStyle/>
+          <a:p>
+            <a:pPr marL="0" indent="0" algn="l">
+              <a:buNone/>
+            </a:pPr>
+            <a:r>
+              <a:rPr lang="en-US" sz="1875" dirty="0">
+                <a:solidFill>
+                  <a:srgbClr val="244236"/>
+                </a:solidFill>
+                <a:latin typeface="Arial" pitchFamily="34" charset="0"/>
+                <a:ea typeface="Arial" pitchFamily="34" charset="-122"/>
+                <a:cs typeface="Arial" pitchFamily="34" charset="-120"/>
+              </a:rPr>
+              <a:t>Single LightGBM</a:t>
+            </a:r>
+            <a:endParaRPr lang="en-US" sz="1875" dirty="0"/>
+          </a:p>
+        </p:txBody>
+      </p:sp>
+      <p:sp>
+        <p:nvSpPr>
+          <p:cNvPr id="20" name="Shape 18"/>
+          <p:cNvSpPr/>
+          <p:nvPr/>
+        </p:nvSpPr>
+        <p:spPr>
+          <a:xfrm>
+            <a:off x="7427863" y="5103316"/>
+            <a:ext cx="1164357" cy="9525"/>
+          </a:xfrm>
+          <a:prstGeom prst="rect">
+            <a:avLst/>
+          </a:prstGeom>
+          <a:solidFill>
+            <a:srgbClr val="D2E6DD"/>
+          </a:solidFill>
+          <a:ln/>
+        </p:spPr>
+        <p:txBody>
+          <a:bodyPr/>
+          <a:lstStyle/>
+          <a:p>
+            <a:endParaRPr/>
+          </a:p>
+        </p:txBody>
+      </p:sp>
+      <p:sp>
+        <p:nvSpPr>
+          <p:cNvPr id="21" name="Text 19"/>
+          <p:cNvSpPr/>
+          <p:nvPr/>
+        </p:nvSpPr>
+        <p:spPr>
+          <a:xfrm>
+            <a:off x="7465963" y="4717554"/>
+            <a:ext cx="1011957" cy="319088"/>
+          </a:xfrm>
+          <a:prstGeom prst="rect">
+            <a:avLst/>
+          </a:prstGeom>
+          <a:noFill/>
+          <a:ln/>
+        </p:spPr>
+        <p:txBody>
+          <a:bodyPr wrap="square" lIns="25400" tIns="25400" rIns="25400" bIns="25400" rtlCol="0" anchor="ctr">
+            <a:normAutofit lnSpcReduction="10000"/>
+          </a:bodyPr>
+          <a:lstStyle/>
+          <a:p>
+            <a:pPr marL="0" indent="0" algn="r">
+              <a:buNone/>
+            </a:pPr>
+            <a:r>
+              <a:rPr lang="en-US" sz="1875" dirty="0">
+                <a:solidFill>
+                  <a:srgbClr val="244236"/>
+                </a:solidFill>
+                <a:latin typeface="Courier New" pitchFamily="34" charset="0"/>
+                <a:ea typeface="Courier New" pitchFamily="34" charset="-122"/>
+                <a:cs typeface="Courier New" pitchFamily="34" charset="-120"/>
+              </a:rPr>
+              <a:t>0.8525</a:t>
+            </a:r>
+            <a:endParaRPr lang="en-US" sz="1875" dirty="0"/>
+          </a:p>
+        </p:txBody>
+      </p:sp>
+      <p:sp>
+        <p:nvSpPr>
+          <p:cNvPr id="22" name="Shape 20"/>
+          <p:cNvSpPr/>
+          <p:nvPr/>
+        </p:nvSpPr>
+        <p:spPr>
+          <a:xfrm>
+            <a:off x="8592220" y="5103316"/>
+            <a:ext cx="1394520" cy="9525"/>
+          </a:xfrm>
+          <a:prstGeom prst="rect">
+            <a:avLst/>
+          </a:prstGeom>
+          <a:solidFill>
+            <a:srgbClr val="D2E6DD"/>
+          </a:solidFill>
+          <a:ln/>
+        </p:spPr>
+        <p:txBody>
+          <a:bodyPr/>
+          <a:lstStyle/>
+          <a:p>
+            <a:endParaRPr/>
+          </a:p>
+        </p:txBody>
+      </p:sp>
+      <p:sp>
+        <p:nvSpPr>
+          <p:cNvPr id="23" name="Text 21"/>
+          <p:cNvSpPr/>
+          <p:nvPr/>
+        </p:nvSpPr>
+        <p:spPr>
+          <a:xfrm>
+            <a:off x="8630320" y="4717554"/>
+            <a:ext cx="1242120" cy="319088"/>
+          </a:xfrm>
+          <a:prstGeom prst="rect">
+            <a:avLst/>
+          </a:prstGeom>
+          <a:noFill/>
+          <a:ln/>
+        </p:spPr>
+        <p:txBody>
+          <a:bodyPr wrap="square" lIns="25400" tIns="25400" rIns="25400" bIns="25400" rtlCol="0" anchor="ctr">
+            <a:normAutofit lnSpcReduction="10000"/>
+          </a:bodyPr>
+          <a:lstStyle/>
+          <a:p>
+            <a:pPr marL="0" indent="0" algn="r">
+              <a:buNone/>
+            </a:pPr>
+            <a:r>
+              <a:rPr lang="en-US" sz="1875" dirty="0">
+                <a:solidFill>
+                  <a:srgbClr val="244236"/>
+                </a:solidFill>
+                <a:latin typeface="Courier New" pitchFamily="34" charset="0"/>
+                <a:ea typeface="Courier New" pitchFamily="34" charset="-122"/>
+                <a:cs typeface="Courier New" pitchFamily="34" charset="-120"/>
+              </a:rPr>
+              <a:t>0.8515</a:t>
+            </a:r>
+            <a:endParaRPr lang="en-US" sz="1875" dirty="0"/>
+          </a:p>
+        </p:txBody>
+      </p:sp>
+      <p:sp>
+        <p:nvSpPr>
+          <p:cNvPr id="24" name="Shape 22"/>
+          <p:cNvSpPr/>
+          <p:nvPr/>
+        </p:nvSpPr>
+        <p:spPr>
+          <a:xfrm>
+            <a:off x="9986739" y="5103316"/>
+            <a:ext cx="1011287" cy="9525"/>
+          </a:xfrm>
+          <a:prstGeom prst="rect">
+            <a:avLst/>
+          </a:prstGeom>
+          <a:solidFill>
+            <a:srgbClr val="D2E6DD"/>
+          </a:solidFill>
+          <a:ln/>
+        </p:spPr>
+        <p:txBody>
+          <a:bodyPr/>
+          <a:lstStyle/>
+          <a:p>
+            <a:endParaRPr/>
+          </a:p>
+        </p:txBody>
+      </p:sp>
+      <p:sp>
+        <p:nvSpPr>
+          <p:cNvPr id="25" name="Text 23"/>
+          <p:cNvSpPr/>
+          <p:nvPr/>
+        </p:nvSpPr>
+        <p:spPr>
+          <a:xfrm>
+            <a:off x="10024839" y="4717554"/>
+            <a:ext cx="858887" cy="319088"/>
+          </a:xfrm>
+          <a:prstGeom prst="rect">
+            <a:avLst/>
+          </a:prstGeom>
+          <a:noFill/>
+          <a:ln/>
+        </p:spPr>
+        <p:txBody>
+          <a:bodyPr wrap="square" lIns="25400" tIns="25400" rIns="25400" bIns="25400" rtlCol="0" anchor="ctr">
+            <a:normAutofit lnSpcReduction="10000"/>
+          </a:bodyPr>
+          <a:lstStyle/>
+          <a:p>
+            <a:pPr marL="0" indent="0" algn="r">
+              <a:buNone/>
+            </a:pPr>
+            <a:r>
+              <a:rPr lang="en-US" sz="1875" dirty="0">
+                <a:solidFill>
+                  <a:srgbClr val="5C7268"/>
+                </a:solidFill>
+                <a:latin typeface="Courier New" pitchFamily="34" charset="0"/>
+                <a:ea typeface="Courier New" pitchFamily="34" charset="-122"/>
+                <a:cs typeface="Courier New" pitchFamily="34" charset="-120"/>
+              </a:rPr>
+              <a:t>0.506</a:t>
+            </a:r>
+            <a:endParaRPr lang="en-US" sz="1875" dirty="0"/>
+          </a:p>
+        </p:txBody>
+      </p:sp>
+      <p:sp>
+        <p:nvSpPr>
+          <p:cNvPr id="26" name="Shape 24"/>
+          <p:cNvSpPr/>
+          <p:nvPr/>
+        </p:nvSpPr>
+        <p:spPr>
+          <a:xfrm>
+            <a:off x="952500" y="5112841"/>
+            <a:ext cx="10045526" cy="528638"/>
+          </a:xfrm>
+          <a:prstGeom prst="rect">
+            <a:avLst/>
+          </a:prstGeom>
+          <a:solidFill>
+            <a:srgbClr val="E6F5EF"/>
+          </a:solidFill>
+          <a:ln/>
+        </p:spPr>
+        <p:txBody>
+          <a:bodyPr/>
+          <a:lstStyle/>
+          <a:p>
+            <a:endParaRPr/>
+          </a:p>
+        </p:txBody>
+      </p:sp>
+      <p:sp>
+        <p:nvSpPr>
+          <p:cNvPr id="27" name="Shape 25"/>
+          <p:cNvSpPr/>
+          <p:nvPr/>
+        </p:nvSpPr>
+        <p:spPr>
+          <a:xfrm>
+            <a:off x="952500" y="5631954"/>
+            <a:ext cx="704627" cy="9525"/>
+          </a:xfrm>
+          <a:prstGeom prst="rect">
+            <a:avLst/>
+          </a:prstGeom>
+          <a:solidFill>
+            <a:srgbClr val="D2E6DD"/>
+          </a:solidFill>
+          <a:ln/>
+        </p:spPr>
+        <p:txBody>
+          <a:bodyPr/>
+          <a:lstStyle/>
+          <a:p>
+            <a:endParaRPr/>
+          </a:p>
+        </p:txBody>
+      </p:sp>
+      <p:sp>
+        <p:nvSpPr>
+          <p:cNvPr id="28" name="Text 26"/>
+          <p:cNvSpPr/>
+          <p:nvPr/>
+        </p:nvSpPr>
+        <p:spPr>
+          <a:xfrm>
+            <a:off x="1066800" y="5217616"/>
+            <a:ext cx="552227" cy="347663"/>
+          </a:xfrm>
+          <a:prstGeom prst="rect">
+            <a:avLst/>
+          </a:prstGeom>
+          <a:noFill/>
+          <a:ln/>
+        </p:spPr>
+        <p:txBody>
+          <a:bodyPr wrap="square" lIns="25400" tIns="25400" rIns="25400" bIns="25400" rtlCol="0" anchor="ctr">
+            <a:normAutofit/>
+          </a:bodyPr>
+          <a:lstStyle/>
+          <a:p>
+            <a:pPr marL="0" indent="0" algn="l">
+              <a:buNone/>
+            </a:pPr>
+            <a:r>
+              <a:rPr lang="en-US" sz="1875" b="1" dirty="0">
+                <a:solidFill>
+                  <a:srgbClr val="063D22"/>
+                </a:solidFill>
+                <a:latin typeface="Courier New" pitchFamily="34" charset="0"/>
+                <a:ea typeface="Courier New" pitchFamily="34" charset="-122"/>
+                <a:cs typeface="Courier New" pitchFamily="34" charset="-120"/>
+              </a:rPr>
+              <a:t>v6</a:t>
+            </a:r>
+            <a:endParaRPr lang="en-US" sz="1875" dirty="0"/>
+          </a:p>
+        </p:txBody>
+      </p:sp>
+      <p:sp>
+        <p:nvSpPr>
+          <p:cNvPr id="29" name="Shape 27"/>
+          <p:cNvSpPr/>
+          <p:nvPr/>
+        </p:nvSpPr>
+        <p:spPr>
+          <a:xfrm>
+            <a:off x="1657127" y="5631954"/>
+            <a:ext cx="5770736" cy="9525"/>
+          </a:xfrm>
+          <a:prstGeom prst="rect">
+            <a:avLst/>
+          </a:prstGeom>
+          <a:solidFill>
+            <a:srgbClr val="D2E6DD"/>
+          </a:solidFill>
+          <a:ln/>
+        </p:spPr>
+        <p:txBody>
+          <a:bodyPr/>
+          <a:lstStyle/>
+          <a:p>
+            <a:endParaRPr/>
+          </a:p>
+        </p:txBody>
+      </p:sp>
+      <p:sp>
+        <p:nvSpPr>
+          <p:cNvPr id="30" name="Text 28"/>
+          <p:cNvSpPr/>
+          <p:nvPr/>
+        </p:nvSpPr>
+        <p:spPr>
+          <a:xfrm>
+            <a:off x="1771427" y="5217616"/>
+            <a:ext cx="5715258" cy="347663"/>
+          </a:xfrm>
+          <a:prstGeom prst="rect">
+            <a:avLst/>
+          </a:prstGeom>
+          <a:noFill/>
+          <a:ln/>
+        </p:spPr>
+        <p:txBody>
+          <a:bodyPr wrap="square" lIns="25400" tIns="25400" rIns="25400" bIns="25400" rtlCol="0" anchor="ctr">
+            <a:normAutofit/>
+          </a:bodyPr>
+          <a:lstStyle/>
+          <a:p>
+            <a:pPr marL="0" indent="0" algn="l">
+              <a:buNone/>
+            </a:pPr>
+            <a:r>
+              <a:rPr lang="en-US" sz="1875" b="1" dirty="0">
+                <a:solidFill>
+                  <a:srgbClr val="244236"/>
+                </a:solidFill>
+                <a:latin typeface="Arial" pitchFamily="34" charset="0"/>
+                <a:ea typeface="Arial" pitchFamily="34" charset="-122"/>
+                <a:cs typeface="Arial" pitchFamily="34" charset="-120"/>
+              </a:rPr>
+              <a:t>9× CatBoost blend</a:t>
+            </a:r>
+            <a:endParaRPr lang="en-US" sz="1875" dirty="0"/>
+          </a:p>
+        </p:txBody>
+      </p:sp>
+      <p:sp>
+        <p:nvSpPr>
+          <p:cNvPr id="31" name="Shape 29"/>
+          <p:cNvSpPr/>
+          <p:nvPr/>
+        </p:nvSpPr>
+        <p:spPr>
+          <a:xfrm>
+            <a:off x="7427863" y="5631954"/>
+            <a:ext cx="1164357" cy="9525"/>
+          </a:xfrm>
+          <a:prstGeom prst="rect">
+            <a:avLst/>
+          </a:prstGeom>
+          <a:solidFill>
+            <a:srgbClr val="D2E6DD"/>
+          </a:solidFill>
+          <a:ln/>
+        </p:spPr>
+        <p:txBody>
+          <a:bodyPr/>
+          <a:lstStyle/>
+          <a:p>
+            <a:endParaRPr/>
+          </a:p>
+        </p:txBody>
+      </p:sp>
+      <p:sp>
+        <p:nvSpPr>
+          <p:cNvPr id="32" name="Text 30"/>
+          <p:cNvSpPr/>
+          <p:nvPr/>
+        </p:nvSpPr>
+        <p:spPr>
+          <a:xfrm>
+            <a:off x="7465963" y="5217616"/>
+            <a:ext cx="1011957" cy="347663"/>
+          </a:xfrm>
+          <a:prstGeom prst="rect">
+            <a:avLst/>
+          </a:prstGeom>
+          <a:noFill/>
+          <a:ln/>
+        </p:spPr>
+        <p:txBody>
+          <a:bodyPr wrap="square" lIns="25400" tIns="25400" rIns="25400" bIns="25400" rtlCol="0" anchor="ctr">
+            <a:normAutofit/>
+          </a:bodyPr>
+          <a:lstStyle/>
+          <a:p>
+            <a:pPr marL="0" indent="0" algn="r">
+              <a:buNone/>
+            </a:pPr>
+            <a:r>
+              <a:rPr lang="en-US" sz="1875" b="1" dirty="0">
+                <a:solidFill>
+                  <a:srgbClr val="244236"/>
+                </a:solidFill>
+                <a:latin typeface="Courier New" pitchFamily="34" charset="0"/>
+                <a:ea typeface="Courier New" pitchFamily="34" charset="-122"/>
+                <a:cs typeface="Courier New" pitchFamily="34" charset="-120"/>
+              </a:rPr>
+              <a:t>0.8615</a:t>
+            </a:r>
+            <a:endParaRPr lang="en-US" sz="1875" dirty="0"/>
+          </a:p>
+        </p:txBody>
+      </p:sp>
+      <p:sp>
+        <p:nvSpPr>
+          <p:cNvPr id="33" name="Shape 31"/>
+          <p:cNvSpPr/>
+          <p:nvPr/>
+        </p:nvSpPr>
+        <p:spPr>
+          <a:xfrm>
+            <a:off x="8592220" y="5631954"/>
+            <a:ext cx="1394520" cy="9525"/>
+          </a:xfrm>
+          <a:prstGeom prst="rect">
+            <a:avLst/>
+          </a:prstGeom>
+          <a:solidFill>
+            <a:srgbClr val="D2E6DD"/>
+          </a:solidFill>
+          <a:ln/>
+        </p:spPr>
+        <p:txBody>
+          <a:bodyPr/>
+          <a:lstStyle/>
+          <a:p>
+            <a:endParaRPr/>
+          </a:p>
+        </p:txBody>
+      </p:sp>
+      <p:sp>
+        <p:nvSpPr>
+          <p:cNvPr id="34" name="Text 32"/>
+          <p:cNvSpPr/>
+          <p:nvPr/>
+        </p:nvSpPr>
+        <p:spPr>
+          <a:xfrm>
+            <a:off x="8630320" y="5217616"/>
+            <a:ext cx="1242120" cy="347663"/>
+          </a:xfrm>
+          <a:prstGeom prst="rect">
+            <a:avLst/>
+          </a:prstGeom>
+          <a:noFill/>
+          <a:ln/>
+        </p:spPr>
+        <p:txBody>
+          <a:bodyPr wrap="square" lIns="25400" tIns="25400" rIns="25400" bIns="25400" rtlCol="0" anchor="ctr">
+            <a:normAutofit/>
+          </a:bodyPr>
+          <a:lstStyle/>
+          <a:p>
+            <a:pPr marL="0" indent="0" algn="r">
+              <a:buNone/>
+            </a:pPr>
+            <a:r>
+              <a:rPr lang="en-US" sz="1875" b="1" dirty="0">
+                <a:solidFill>
+                  <a:srgbClr val="1A7A57"/>
+                </a:solidFill>
+                <a:latin typeface="Courier New" pitchFamily="34" charset="0"/>
+                <a:ea typeface="Courier New" pitchFamily="34" charset="-122"/>
+                <a:cs typeface="Courier New" pitchFamily="34" charset="-120"/>
+              </a:rPr>
+              <a:t>0.8565</a:t>
+            </a:r>
+            <a:endParaRPr lang="en-US" sz="1875" dirty="0"/>
+          </a:p>
+        </p:txBody>
+      </p:sp>
+      <p:sp>
+        <p:nvSpPr>
+          <p:cNvPr id="35" name="Shape 33"/>
+          <p:cNvSpPr/>
+          <p:nvPr/>
+        </p:nvSpPr>
+        <p:spPr>
+          <a:xfrm>
+            <a:off x="9986739" y="5631954"/>
+            <a:ext cx="1011287" cy="9525"/>
+          </a:xfrm>
+          <a:prstGeom prst="rect">
+            <a:avLst/>
+          </a:prstGeom>
+          <a:solidFill>
+            <a:srgbClr val="D2E6DD"/>
+          </a:solidFill>
+          <a:ln/>
+        </p:spPr>
+        <p:txBody>
+          <a:bodyPr/>
+          <a:lstStyle/>
+          <a:p>
+            <a:endParaRPr/>
+          </a:p>
+        </p:txBody>
+      </p:sp>
+      <p:sp>
+        <p:nvSpPr>
+          <p:cNvPr id="36" name="Text 34"/>
+          <p:cNvSpPr/>
+          <p:nvPr/>
+        </p:nvSpPr>
+        <p:spPr>
+          <a:xfrm>
+            <a:off x="10024839" y="5217616"/>
+            <a:ext cx="858887" cy="347663"/>
+          </a:xfrm>
+          <a:prstGeom prst="rect">
+            <a:avLst/>
+          </a:prstGeom>
+          <a:noFill/>
+          <a:ln/>
+        </p:spPr>
+        <p:txBody>
+          <a:bodyPr wrap="square" lIns="25400" tIns="25400" rIns="25400" bIns="25400" rtlCol="0" anchor="ctr">
+            <a:normAutofit/>
+          </a:bodyPr>
+          <a:lstStyle/>
+          <a:p>
+            <a:pPr marL="0" indent="0" algn="r">
+              <a:buNone/>
+            </a:pPr>
+            <a:r>
+              <a:rPr lang="en-US" sz="1875" dirty="0">
+                <a:solidFill>
+                  <a:srgbClr val="5C7268"/>
+                </a:solidFill>
+                <a:latin typeface="Courier New" pitchFamily="34" charset="0"/>
+                <a:ea typeface="Courier New" pitchFamily="34" charset="-122"/>
+                <a:cs typeface="Courier New" pitchFamily="34" charset="-120"/>
+              </a:rPr>
+              <a:t>0.512</a:t>
+            </a:r>
+            <a:endParaRPr lang="en-US" sz="1875" dirty="0"/>
+          </a:p>
+        </p:txBody>
+      </p:sp>
+      <p:sp>
+        <p:nvSpPr>
+          <p:cNvPr id="37" name="Shape 35"/>
+          <p:cNvSpPr/>
+          <p:nvPr/>
+        </p:nvSpPr>
+        <p:spPr>
+          <a:xfrm>
+            <a:off x="952500" y="5641479"/>
+            <a:ext cx="10045526" cy="523875"/>
+          </a:xfrm>
+          <a:prstGeom prst="rect">
+            <a:avLst/>
+          </a:prstGeom>
+          <a:solidFill>
+            <a:srgbClr val="E6F5EF"/>
+          </a:solidFill>
+          <a:ln/>
+        </p:spPr>
+        <p:txBody>
+          <a:bodyPr/>
+          <a:lstStyle/>
+          <a:p>
+            <a:endParaRPr/>
+          </a:p>
+        </p:txBody>
+      </p:sp>
+      <p:sp>
+        <p:nvSpPr>
+          <p:cNvPr id="38" name="Text 36"/>
+          <p:cNvSpPr/>
+          <p:nvPr/>
+        </p:nvSpPr>
+        <p:spPr>
+          <a:xfrm>
+            <a:off x="1066800" y="5746254"/>
+            <a:ext cx="552227" cy="352425"/>
+          </a:xfrm>
+          <a:prstGeom prst="rect">
+            <a:avLst/>
+          </a:prstGeom>
+          <a:noFill/>
+          <a:ln/>
+        </p:spPr>
+        <p:txBody>
+          <a:bodyPr wrap="square" lIns="25400" tIns="25400" rIns="25400" bIns="25400" rtlCol="0" anchor="ctr">
+            <a:normAutofit/>
+          </a:bodyPr>
+          <a:lstStyle/>
+          <a:p>
+            <a:pPr marL="0" indent="0" algn="l">
+              <a:buNone/>
+            </a:pPr>
+            <a:r>
+              <a:rPr lang="en-US" sz="1875" b="1" dirty="0">
+                <a:solidFill>
+                  <a:srgbClr val="063D22"/>
+                </a:solidFill>
+                <a:latin typeface="Courier New" pitchFamily="34" charset="0"/>
+                <a:ea typeface="Courier New" pitchFamily="34" charset="-122"/>
+                <a:cs typeface="Courier New" pitchFamily="34" charset="-120"/>
+              </a:rPr>
+              <a:t>v10</a:t>
+            </a:r>
+            <a:endParaRPr lang="en-US" sz="1875" dirty="0"/>
+          </a:p>
+        </p:txBody>
+      </p:sp>
+      <p:sp>
+        <p:nvSpPr>
+          <p:cNvPr id="39" name="Text 37"/>
+          <p:cNvSpPr/>
+          <p:nvPr/>
+        </p:nvSpPr>
+        <p:spPr>
+          <a:xfrm>
+            <a:off x="1771427" y="5746254"/>
+            <a:ext cx="5715258" cy="352425"/>
+          </a:xfrm>
+          <a:prstGeom prst="rect">
+            <a:avLst/>
+          </a:prstGeom>
+          <a:noFill/>
+          <a:ln/>
+        </p:spPr>
+        <p:txBody>
+          <a:bodyPr wrap="square" lIns="25400" tIns="25400" rIns="25400" bIns="25400" rtlCol="0" anchor="ctr">
+            <a:normAutofit/>
+          </a:bodyPr>
+          <a:lstStyle/>
+          <a:p>
+            <a:pPr marL="0" indent="0" algn="l">
+              <a:buNone/>
+            </a:pPr>
+            <a:r>
+              <a:rPr lang="en-US" sz="1875" b="1" dirty="0">
+                <a:solidFill>
+                  <a:srgbClr val="244236"/>
+                </a:solidFill>
+                <a:latin typeface="Arial" pitchFamily="34" charset="0"/>
+                <a:ea typeface="Arial" pitchFamily="34" charset="-122"/>
+                <a:cs typeface="Arial" pitchFamily="34" charset="-120"/>
+              </a:rPr>
+              <a:t>Clean prep + pseudo-label + smooth threshold</a:t>
+            </a:r>
+            <a:endParaRPr lang="en-US" sz="1875" dirty="0"/>
+          </a:p>
+        </p:txBody>
+      </p:sp>
+      <p:sp>
+        <p:nvSpPr>
+          <p:cNvPr id="40" name="Text 38"/>
+          <p:cNvSpPr/>
+          <p:nvPr/>
+        </p:nvSpPr>
+        <p:spPr>
+          <a:xfrm>
+            <a:off x="7465963" y="5746254"/>
+            <a:ext cx="1011957" cy="352425"/>
+          </a:xfrm>
+          <a:prstGeom prst="rect">
+            <a:avLst/>
+          </a:prstGeom>
+          <a:noFill/>
+          <a:ln/>
+        </p:spPr>
+        <p:txBody>
+          <a:bodyPr wrap="square" lIns="25400" tIns="25400" rIns="25400" bIns="25400" rtlCol="0" anchor="ctr">
+            <a:normAutofit/>
+          </a:bodyPr>
+          <a:lstStyle/>
+          <a:p>
+            <a:pPr marL="0" indent="0" algn="r">
+              <a:buNone/>
+            </a:pPr>
+            <a:r>
+              <a:rPr lang="en-US" sz="1875" b="1" dirty="0">
+                <a:solidFill>
+                  <a:srgbClr val="244236"/>
+                </a:solidFill>
+                <a:latin typeface="Courier New" pitchFamily="34" charset="0"/>
+                <a:ea typeface="Courier New" pitchFamily="34" charset="-122"/>
+                <a:cs typeface="Courier New" pitchFamily="34" charset="-120"/>
+              </a:rPr>
+              <a:t>0.8590</a:t>
+            </a:r>
+            <a:endParaRPr lang="en-US" sz="1875" dirty="0"/>
+          </a:p>
+        </p:txBody>
+      </p:sp>
+      <p:sp>
+        <p:nvSpPr>
+          <p:cNvPr id="41" name="Text 39"/>
+          <p:cNvSpPr/>
+          <p:nvPr/>
+        </p:nvSpPr>
+        <p:spPr>
+          <a:xfrm>
+            <a:off x="8630320" y="5746254"/>
+            <a:ext cx="1242120" cy="352425"/>
+          </a:xfrm>
+          <a:prstGeom prst="rect">
+            <a:avLst/>
+          </a:prstGeom>
+          <a:noFill/>
+          <a:ln/>
+        </p:spPr>
+        <p:txBody>
+          <a:bodyPr wrap="square" lIns="25400" tIns="25400" rIns="25400" bIns="25400" rtlCol="0" anchor="ctr">
+            <a:normAutofit/>
+          </a:bodyPr>
+          <a:lstStyle/>
+          <a:p>
+            <a:pPr marL="0" indent="0" algn="r">
+              <a:buNone/>
+            </a:pPr>
+            <a:r>
+              <a:rPr lang="en-US" sz="1875" b="1" dirty="0">
+                <a:solidFill>
+                  <a:srgbClr val="244236"/>
+                </a:solidFill>
+                <a:latin typeface="Courier New" pitchFamily="34" charset="0"/>
+                <a:ea typeface="Courier New" pitchFamily="34" charset="-122"/>
+                <a:cs typeface="Courier New" pitchFamily="34" charset="-120"/>
+              </a:rPr>
+              <a:t>0.8535</a:t>
+            </a:r>
+            <a:endParaRPr lang="en-US" sz="1875" dirty="0"/>
+          </a:p>
+        </p:txBody>
+      </p:sp>
+      <p:sp>
+        <p:nvSpPr>
+          <p:cNvPr id="42" name="Text 40"/>
+          <p:cNvSpPr/>
+          <p:nvPr/>
+        </p:nvSpPr>
+        <p:spPr>
+          <a:xfrm>
+            <a:off x="10024839" y="5746254"/>
+            <a:ext cx="858887" cy="352425"/>
+          </a:xfrm>
+          <a:prstGeom prst="rect">
+            <a:avLst/>
+          </a:prstGeom>
+          <a:noFill/>
+          <a:ln/>
+        </p:spPr>
+        <p:txBody>
+          <a:bodyPr wrap="square" lIns="25400" tIns="25400" rIns="25400" bIns="25400" rtlCol="0" anchor="ctr">
+            <a:normAutofit/>
+          </a:bodyPr>
+          <a:lstStyle/>
+          <a:p>
+            <a:pPr marL="0" indent="0" algn="r">
+              <a:buNone/>
+            </a:pPr>
+            <a:r>
+              <a:rPr lang="en-US" sz="1875" dirty="0">
+                <a:solidFill>
+                  <a:srgbClr val="5C7268"/>
+                </a:solidFill>
+                <a:latin typeface="Courier New" pitchFamily="34" charset="0"/>
+                <a:ea typeface="Courier New" pitchFamily="34" charset="-122"/>
+                <a:cs typeface="Courier New" pitchFamily="34" charset="-120"/>
+              </a:rPr>
+              <a:t>0.509</a:t>
+            </a:r>
+            <a:endParaRPr lang="en-US" sz="1875" dirty="0"/>
+          </a:p>
+        </p:txBody>
+      </p:sp>
+      <p:sp>
+        <p:nvSpPr>
+          <p:cNvPr id="43" name="Text 41"/>
+          <p:cNvSpPr/>
+          <p:nvPr/>
+        </p:nvSpPr>
+        <p:spPr>
+          <a:xfrm>
+            <a:off x="952500" y="6374904"/>
+            <a:ext cx="11050079" cy="295275"/>
+          </a:xfrm>
+          <a:prstGeom prst="rect">
+            <a:avLst/>
+          </a:prstGeom>
+          <a:noFill/>
+          <a:ln/>
+        </p:spPr>
+        <p:txBody>
+          <a:bodyPr wrap="square" lIns="25400" tIns="25400" rIns="25400" bIns="25400" rtlCol="0" anchor="t">
+            <a:normAutofit fontScale="92500" lnSpcReduction="10000"/>
+          </a:bodyPr>
+          <a:lstStyle/>
+          <a:p>
+            <a:pPr marL="0" indent="0" algn="l">
+              <a:buNone/>
+            </a:pPr>
+            <a:r>
+              <a:rPr lang="en-US" sz="1800" dirty="0">
+                <a:solidFill>
+                  <a:srgbClr val="5C7268"/>
+                </a:solidFill>
+                <a:latin typeface="Courier New" pitchFamily="34" charset="0"/>
+                <a:ea typeface="Courier New" pitchFamily="34" charset="-122"/>
+                <a:cs typeface="Courier New" pitchFamily="34" charset="-120"/>
+              </a:rPr>
+              <a:t>Model family ladder · 5-fold accuracy</a:t>
+            </a:r>
+            <a:endParaRPr lang="en-US" sz="1800" dirty="0"/>
+          </a:p>
+        </p:txBody>
+      </p:sp>
+      <p:sp>
+        <p:nvSpPr>
+          <p:cNvPr id="44" name="Text 42"/>
+          <p:cNvSpPr/>
+          <p:nvPr/>
+        </p:nvSpPr>
+        <p:spPr>
+          <a:xfrm>
+            <a:off x="952500" y="6746379"/>
+            <a:ext cx="1173659" cy="295275"/>
+          </a:xfrm>
+          <a:prstGeom prst="rect">
+            <a:avLst/>
+          </a:prstGeom>
+          <a:noFill/>
+          <a:ln/>
+        </p:spPr>
+        <p:txBody>
+          <a:bodyPr wrap="square" lIns="25400" tIns="25400" rIns="25400" bIns="25400" rtlCol="0" anchor="t">
+            <a:normAutofit fontScale="92500" lnSpcReduction="10000"/>
+          </a:bodyPr>
+          <a:lstStyle/>
+          <a:p>
+            <a:pPr marL="0" indent="0" algn="l">
+              <a:buNone/>
+            </a:pPr>
+            <a:r>
+              <a:rPr lang="en-US" sz="1800" dirty="0">
+                <a:solidFill>
+                  <a:srgbClr val="5C7268"/>
+                </a:solidFill>
+                <a:latin typeface="Courier New" pitchFamily="34" charset="0"/>
+                <a:ea typeface="Courier New" pitchFamily="34" charset="-122"/>
+                <a:cs typeface="Courier New" pitchFamily="34" charset="-120"/>
+              </a:rPr>
+              <a:t>NB 0.760</a:t>
+            </a:r>
+            <a:endParaRPr lang="en-US" sz="1800" dirty="0"/>
+          </a:p>
+        </p:txBody>
+      </p:sp>
+      <p:sp>
+        <p:nvSpPr>
+          <p:cNvPr id="45" name="Text 43"/>
+          <p:cNvSpPr/>
+          <p:nvPr/>
+        </p:nvSpPr>
+        <p:spPr>
+          <a:xfrm>
+            <a:off x="2145209" y="6746379"/>
+            <a:ext cx="213420" cy="295275"/>
+          </a:xfrm>
+          <a:prstGeom prst="rect">
+            <a:avLst/>
+          </a:prstGeom>
+          <a:noFill/>
+          <a:ln/>
+        </p:spPr>
+        <p:txBody>
+          <a:bodyPr wrap="square" lIns="25400" tIns="25400" rIns="25400" bIns="25400" rtlCol="0" anchor="t">
+            <a:normAutofit fontScale="92500" lnSpcReduction="10000"/>
+          </a:bodyPr>
+          <a:lstStyle/>
+          <a:p>
+            <a:pPr marL="0" indent="0" algn="l">
+              <a:buNone/>
+            </a:pPr>
+            <a:r>
+              <a:rPr lang="en-US" sz="1800" dirty="0">
+                <a:solidFill>
+                  <a:srgbClr val="66B3A1"/>
+                </a:solidFill>
+                <a:latin typeface="Courier New" pitchFamily="34" charset="0"/>
+                <a:ea typeface="Courier New" pitchFamily="34" charset="-122"/>
+                <a:cs typeface="Courier New" pitchFamily="34" charset="-120"/>
+              </a:rPr>
+              <a:t>→</a:t>
+            </a:r>
+            <a:endParaRPr lang="en-US" sz="1800" dirty="0"/>
+          </a:p>
+        </p:txBody>
+      </p:sp>
+      <p:sp>
+        <p:nvSpPr>
+          <p:cNvPr id="46" name="Text 44"/>
+          <p:cNvSpPr/>
+          <p:nvPr/>
+        </p:nvSpPr>
+        <p:spPr>
+          <a:xfrm>
+            <a:off x="2377678" y="6746379"/>
+            <a:ext cx="1358146" cy="295275"/>
+          </a:xfrm>
+          <a:prstGeom prst="rect">
+            <a:avLst/>
+          </a:prstGeom>
+          <a:noFill/>
+          <a:ln/>
+        </p:spPr>
+        <p:txBody>
+          <a:bodyPr wrap="square" lIns="25400" tIns="25400" rIns="25400" bIns="25400" rtlCol="0" anchor="t">
+            <a:normAutofit fontScale="92500" lnSpcReduction="10000"/>
+          </a:bodyPr>
+          <a:lstStyle/>
+          <a:p>
+            <a:pPr marL="0" indent="0" algn="l">
+              <a:buNone/>
+            </a:pPr>
+            <a:r>
+              <a:rPr lang="en-US" sz="1800" dirty="0">
+                <a:solidFill>
+                  <a:srgbClr val="5C7268"/>
+                </a:solidFill>
+                <a:latin typeface="Courier New" pitchFamily="34" charset="0"/>
+                <a:ea typeface="Courier New" pitchFamily="34" charset="-122"/>
+                <a:cs typeface="Courier New" pitchFamily="34" charset="-120"/>
+              </a:rPr>
+              <a:t>LDA 0.777</a:t>
+            </a:r>
+            <a:endParaRPr lang="en-US" sz="1800" dirty="0"/>
+          </a:p>
+        </p:txBody>
+      </p:sp>
+      <p:sp>
+        <p:nvSpPr>
+          <p:cNvPr id="47" name="Text 45"/>
+          <p:cNvSpPr/>
+          <p:nvPr/>
+        </p:nvSpPr>
+        <p:spPr>
+          <a:xfrm>
+            <a:off x="3707606" y="6746379"/>
+            <a:ext cx="213420" cy="295275"/>
+          </a:xfrm>
+          <a:prstGeom prst="rect">
+            <a:avLst/>
+          </a:prstGeom>
+          <a:noFill/>
+          <a:ln/>
+        </p:spPr>
+        <p:txBody>
+          <a:bodyPr wrap="square" lIns="25400" tIns="25400" rIns="25400" bIns="25400" rtlCol="0" anchor="t">
+            <a:normAutofit fontScale="92500" lnSpcReduction="10000"/>
+          </a:bodyPr>
+          <a:lstStyle/>
+          <a:p>
+            <a:pPr marL="0" indent="0" algn="l">
+              <a:buNone/>
+            </a:pPr>
+            <a:r>
+              <a:rPr lang="en-US" sz="1800" dirty="0">
+                <a:solidFill>
+                  <a:srgbClr val="66B3A1"/>
+                </a:solidFill>
+                <a:latin typeface="Courier New" pitchFamily="34" charset="0"/>
+                <a:ea typeface="Courier New" pitchFamily="34" charset="-122"/>
+                <a:cs typeface="Courier New" pitchFamily="34" charset="-120"/>
+              </a:rPr>
+              <a:t>→</a:t>
+            </a:r>
+            <a:endParaRPr lang="en-US" sz="1800" dirty="0"/>
+          </a:p>
+        </p:txBody>
+      </p:sp>
+      <p:sp>
+        <p:nvSpPr>
+          <p:cNvPr id="48" name="Text 46"/>
+          <p:cNvSpPr/>
+          <p:nvPr/>
+        </p:nvSpPr>
+        <p:spPr>
+          <a:xfrm>
+            <a:off x="3940076" y="6746379"/>
+            <a:ext cx="1173659" cy="295275"/>
+          </a:xfrm>
+          <a:prstGeom prst="rect">
+            <a:avLst/>
+          </a:prstGeom>
+          <a:noFill/>
+          <a:ln/>
+        </p:spPr>
+        <p:txBody>
+          <a:bodyPr wrap="square" lIns="25400" tIns="25400" rIns="25400" bIns="25400" rtlCol="0" anchor="t">
+            <a:normAutofit fontScale="92500" lnSpcReduction="10000"/>
+          </a:bodyPr>
+          <a:lstStyle/>
+          <a:p>
+            <a:pPr marL="0" indent="0" algn="l">
+              <a:buNone/>
+            </a:pPr>
+            <a:r>
+              <a:rPr lang="en-US" sz="1800" dirty="0">
+                <a:solidFill>
+                  <a:srgbClr val="5C7268"/>
+                </a:solidFill>
+                <a:latin typeface="Courier New" pitchFamily="34" charset="0"/>
+                <a:ea typeface="Courier New" pitchFamily="34" charset="-122"/>
+                <a:cs typeface="Courier New" pitchFamily="34" charset="-120"/>
+              </a:rPr>
+              <a:t>LR 0.784</a:t>
+            </a:r>
+            <a:endParaRPr lang="en-US" sz="1800" dirty="0"/>
+          </a:p>
+        </p:txBody>
+      </p:sp>
+      <p:sp>
+        <p:nvSpPr>
+          <p:cNvPr id="49" name="Text 47"/>
+          <p:cNvSpPr/>
+          <p:nvPr/>
+        </p:nvSpPr>
+        <p:spPr>
+          <a:xfrm>
+            <a:off x="5132784" y="6746379"/>
+            <a:ext cx="213420" cy="295275"/>
+          </a:xfrm>
+          <a:prstGeom prst="rect">
+            <a:avLst/>
+          </a:prstGeom>
+          <a:noFill/>
+          <a:ln/>
+        </p:spPr>
+        <p:txBody>
+          <a:bodyPr wrap="square" lIns="25400" tIns="25400" rIns="25400" bIns="25400" rtlCol="0" anchor="t">
+            <a:normAutofit fontScale="92500" lnSpcReduction="10000"/>
+          </a:bodyPr>
+          <a:lstStyle/>
+          <a:p>
+            <a:pPr marL="0" indent="0" algn="l">
+              <a:buNone/>
+            </a:pPr>
+            <a:r>
+              <a:rPr lang="en-US" sz="1800" dirty="0">
+                <a:solidFill>
+                  <a:srgbClr val="66B3A1"/>
+                </a:solidFill>
+                <a:latin typeface="Courier New" pitchFamily="34" charset="0"/>
+                <a:ea typeface="Courier New" pitchFamily="34" charset="-122"/>
+                <a:cs typeface="Courier New" pitchFamily="34" charset="-120"/>
+              </a:rPr>
+              <a:t>→</a:t>
+            </a:r>
+            <a:endParaRPr lang="en-US" sz="1800" dirty="0"/>
+          </a:p>
+        </p:txBody>
+      </p:sp>
+      <p:sp>
+        <p:nvSpPr>
+          <p:cNvPr id="50" name="Text 48"/>
+          <p:cNvSpPr/>
+          <p:nvPr/>
+        </p:nvSpPr>
+        <p:spPr>
+          <a:xfrm>
+            <a:off x="5365254" y="6746379"/>
+            <a:ext cx="1173659" cy="295275"/>
+          </a:xfrm>
+          <a:prstGeom prst="rect">
+            <a:avLst/>
+          </a:prstGeom>
+          <a:noFill/>
+          <a:ln/>
+        </p:spPr>
+        <p:txBody>
+          <a:bodyPr wrap="square" lIns="25400" tIns="25400" rIns="25400" bIns="25400" rtlCol="0" anchor="t">
+            <a:normAutofit fontScale="92500" lnSpcReduction="10000"/>
+          </a:bodyPr>
+          <a:lstStyle/>
+          <a:p>
+            <a:pPr marL="0" indent="0" algn="l">
+              <a:buNone/>
+            </a:pPr>
+            <a:r>
+              <a:rPr lang="en-US" sz="1800" dirty="0">
+                <a:solidFill>
+                  <a:srgbClr val="244236"/>
+                </a:solidFill>
+                <a:latin typeface="Courier New" pitchFamily="34" charset="0"/>
+                <a:ea typeface="Courier New" pitchFamily="34" charset="-122"/>
+                <a:cs typeface="Courier New" pitchFamily="34" charset="-120"/>
+              </a:rPr>
+              <a:t>RF 0.833</a:t>
+            </a:r>
+            <a:endParaRPr lang="en-US" sz="1800" dirty="0"/>
+          </a:p>
+        </p:txBody>
+      </p:sp>
+      <p:sp>
+        <p:nvSpPr>
+          <p:cNvPr id="51" name="Text 49"/>
+          <p:cNvSpPr/>
+          <p:nvPr/>
+        </p:nvSpPr>
+        <p:spPr>
+          <a:xfrm>
+            <a:off x="6557963" y="6746379"/>
+            <a:ext cx="213420" cy="295275"/>
+          </a:xfrm>
+          <a:prstGeom prst="rect">
+            <a:avLst/>
+          </a:prstGeom>
+          <a:noFill/>
+          <a:ln/>
+        </p:spPr>
+        <p:txBody>
+          <a:bodyPr wrap="square" lIns="25400" tIns="25400" rIns="25400" bIns="25400" rtlCol="0" anchor="t">
+            <a:normAutofit fontScale="92500" lnSpcReduction="10000"/>
+          </a:bodyPr>
+          <a:lstStyle/>
+          <a:p>
+            <a:pPr marL="0" indent="0" algn="l">
+              <a:buNone/>
+            </a:pPr>
+            <a:r>
+              <a:rPr lang="en-US" sz="1800" dirty="0">
+                <a:solidFill>
+                  <a:srgbClr val="66B3A1"/>
+                </a:solidFill>
+                <a:latin typeface="Courier New" pitchFamily="34" charset="0"/>
+                <a:ea typeface="Courier New" pitchFamily="34" charset="-122"/>
+                <a:cs typeface="Courier New" pitchFamily="34" charset="-120"/>
+              </a:rPr>
+              <a:t>→</a:t>
+            </a:r>
+            <a:endParaRPr lang="en-US" sz="1800" dirty="0"/>
+          </a:p>
+        </p:txBody>
+      </p:sp>
+      <p:sp>
+        <p:nvSpPr>
+          <p:cNvPr id="52" name="Text 50"/>
+          <p:cNvSpPr/>
+          <p:nvPr/>
+        </p:nvSpPr>
+        <p:spPr>
+          <a:xfrm>
+            <a:off x="6790432" y="6727329"/>
+            <a:ext cx="2112280" cy="333375"/>
+          </a:xfrm>
+          <a:prstGeom prst="rect">
+            <a:avLst/>
+          </a:prstGeom>
+          <a:noFill/>
+          <a:ln/>
+        </p:spPr>
+        <p:txBody>
+          <a:bodyPr wrap="square" lIns="25400" tIns="25400" rIns="25400" bIns="25400" rtlCol="0" anchor="t">
+            <a:normAutofit/>
+          </a:bodyPr>
+          <a:lstStyle/>
+          <a:p>
+            <a:pPr marL="0" indent="0" algn="l">
+              <a:buNone/>
+            </a:pPr>
+            <a:r>
+              <a:rPr lang="en-US" sz="1800" b="1" dirty="0">
+                <a:solidFill>
+                  <a:srgbClr val="063D22"/>
+                </a:solidFill>
+                <a:latin typeface="Courier New" pitchFamily="34" charset="0"/>
+                <a:ea typeface="Courier New" pitchFamily="34" charset="-122"/>
+                <a:cs typeface="Courier New" pitchFamily="34" charset="-120"/>
+              </a:rPr>
+              <a:t>LightGBM 0.836</a:t>
+            </a:r>
+            <a:endParaRPr lang="en-US" sz="1800" dirty="0"/>
+          </a:p>
+        </p:txBody>
+      </p:sp>
+      <p:sp>
+        <p:nvSpPr>
+          <p:cNvPr id="53" name="Text 51"/>
+          <p:cNvSpPr/>
+          <p:nvPr/>
+        </p:nvSpPr>
+        <p:spPr>
+          <a:xfrm>
+            <a:off x="8805937" y="6746379"/>
+            <a:ext cx="213420" cy="295275"/>
+          </a:xfrm>
+          <a:prstGeom prst="rect">
+            <a:avLst/>
+          </a:prstGeom>
+          <a:noFill/>
+          <a:ln/>
+        </p:spPr>
+        <p:txBody>
+          <a:bodyPr wrap="square" lIns="25400" tIns="25400" rIns="25400" bIns="25400" rtlCol="0" anchor="t">
+            <a:normAutofit fontScale="92500" lnSpcReduction="10000"/>
+          </a:bodyPr>
+          <a:lstStyle/>
+          <a:p>
+            <a:pPr marL="0" indent="0" algn="l">
+              <a:buNone/>
+            </a:pPr>
+            <a:r>
+              <a:rPr lang="en-US" sz="1800" dirty="0">
+                <a:solidFill>
+                  <a:srgbClr val="66B3A1"/>
+                </a:solidFill>
+                <a:latin typeface="Courier New" pitchFamily="34" charset="0"/>
+                <a:ea typeface="Courier New" pitchFamily="34" charset="-122"/>
+                <a:cs typeface="Courier New" pitchFamily="34" charset="-120"/>
+              </a:rPr>
+              <a:t>→</a:t>
+            </a:r>
+            <a:endParaRPr lang="en-US" sz="1800" dirty="0"/>
+          </a:p>
+        </p:txBody>
+      </p:sp>
+      <p:sp>
+        <p:nvSpPr>
+          <p:cNvPr id="54" name="Text 52"/>
+          <p:cNvSpPr/>
+          <p:nvPr/>
+        </p:nvSpPr>
+        <p:spPr>
+          <a:xfrm>
+            <a:off x="9038406" y="6727329"/>
+            <a:ext cx="2112280" cy="333375"/>
+          </a:xfrm>
+          <a:prstGeom prst="rect">
+            <a:avLst/>
+          </a:prstGeom>
+          <a:noFill/>
+          <a:ln/>
+        </p:spPr>
+        <p:txBody>
+          <a:bodyPr wrap="square" lIns="25400" tIns="25400" rIns="25400" bIns="25400" rtlCol="0" anchor="t">
+            <a:normAutofit/>
+          </a:bodyPr>
+          <a:lstStyle/>
+          <a:p>
+            <a:pPr marL="0" indent="0" algn="l">
+              <a:buNone/>
+            </a:pPr>
+            <a:r>
+              <a:rPr lang="en-US" sz="1800" b="1" dirty="0">
+                <a:solidFill>
+                  <a:srgbClr val="1A7A57"/>
+                </a:solidFill>
+                <a:latin typeface="Courier New" pitchFamily="34" charset="0"/>
+                <a:ea typeface="Courier New" pitchFamily="34" charset="-122"/>
+                <a:cs typeface="Courier New" pitchFamily="34" charset="-120"/>
+              </a:rPr>
+              <a:t>ensemble 0.859</a:t>
+            </a:r>
+            <a:endParaRPr lang="en-US" sz="1800" dirty="0"/>
+          </a:p>
+        </p:txBody>
+      </p:sp>
+      <p:sp>
+        <p:nvSpPr>
+          <p:cNvPr id="55" name="Text 53"/>
+          <p:cNvSpPr/>
+          <p:nvPr/>
+        </p:nvSpPr>
+        <p:spPr>
+          <a:xfrm>
+            <a:off x="952500" y="7232154"/>
+            <a:ext cx="10346892" cy="678061"/>
+          </a:xfrm>
+          <a:prstGeom prst="rect">
+            <a:avLst/>
+          </a:prstGeom>
+          <a:noFill/>
+          <a:ln/>
+        </p:spPr>
+        <p:txBody>
+          <a:bodyPr wrap="square" lIns="25400" tIns="25400" rIns="25400" bIns="25400" rtlCol="0" anchor="t">
+            <a:normAutofit fontScale="92500" lnSpcReduction="20000"/>
+          </a:bodyPr>
+          <a:lstStyle/>
+          <a:p>
+            <a:pPr marL="0" indent="0" algn="l">
+              <a:lnSpc>
+                <a:spcPct val="140000"/>
+              </a:lnSpc>
+              <a:buNone/>
+            </a:pPr>
+            <a:r>
+              <a:rPr lang="en-US" sz="1800" dirty="0">
+                <a:solidFill>
+                  <a:srgbClr val="5C7268"/>
+                </a:solidFill>
+                <a:latin typeface="Arial" pitchFamily="34" charset="0"/>
+                <a:ea typeface="Arial" pitchFamily="34" charset="-122"/>
+                <a:cs typeface="Arial" pitchFamily="34" charset="-120"/>
+              </a:rPr>
+              <a:t>v10 adds leak-free z-scoring and a conservative smooth threshold (ROC AUC 0.9377). Its OOF dips slightly below v6/v7 </a:t>
+            </a:r>
+            <a:r>
+              <a:rPr lang="en-US" sz="1800" b="1" dirty="0">
+                <a:solidFill>
+                  <a:srgbClr val="244236"/>
+                </a:solidFill>
+                <a:latin typeface="Arial" pitchFamily="34" charset="0"/>
+                <a:ea typeface="Arial" pitchFamily="34" charset="-122"/>
+                <a:cs typeface="Arial" pitchFamily="34" charset="-120"/>
+              </a:rPr>
+              <a:t>by design </a:t>
+            </a:r>
+            <a:r>
+              <a:rPr lang="en-US" sz="1800" dirty="0">
+                <a:solidFill>
+                  <a:srgbClr val="5C7268"/>
+                </a:solidFill>
+                <a:latin typeface="Arial" pitchFamily="34" charset="0"/>
+                <a:ea typeface="Arial" pitchFamily="34" charset="-122"/>
+                <a:cs typeface="Arial" pitchFamily="34" charset="-120"/>
+              </a:rPr>
+              <a:t>— not because the model is worse.</a:t>
+            </a:r>
+            <a:endParaRPr lang="en-US" sz="1800" dirty="0"/>
+          </a:p>
+        </p:txBody>
+      </p:sp>
+      <p:sp>
+        <p:nvSpPr>
+          <p:cNvPr id="56" name="Text 54"/>
+          <p:cNvSpPr/>
+          <p:nvPr/>
+        </p:nvSpPr>
+        <p:spPr>
+          <a:xfrm>
+            <a:off x="11531426" y="3792662"/>
+            <a:ext cx="6384481" cy="870570"/>
+          </a:xfrm>
+          <a:prstGeom prst="rect">
+            <a:avLst/>
+          </a:prstGeom>
+          <a:noFill/>
+          <a:ln/>
+        </p:spPr>
+        <p:txBody>
+          <a:bodyPr wrap="square" lIns="25400" tIns="25400" rIns="25400" bIns="25400" rtlCol="0" anchor="t">
+            <a:normAutofit fontScale="92500" lnSpcReduction="20000"/>
+          </a:bodyPr>
+          <a:lstStyle/>
+          <a:p>
+            <a:pPr marL="0" indent="0" algn="l">
+              <a:lnSpc>
+                <a:spcPct val="95000"/>
+              </a:lnSpc>
+              <a:buNone/>
+            </a:pPr>
+            <a:r>
+              <a:rPr lang="en-US" sz="6900" b="1" dirty="0">
+                <a:solidFill>
+                  <a:srgbClr val="1A7A57"/>
+                </a:solidFill>
+                <a:latin typeface="Arial" pitchFamily="34" charset="0"/>
+                <a:ea typeface="Arial" pitchFamily="34" charset="-122"/>
+                <a:cs typeface="Arial" pitchFamily="34" charset="-120"/>
+              </a:rPr>
+              <a:t>0.8565</a:t>
+            </a:r>
+            <a:endParaRPr lang="en-US" sz="6900" dirty="0"/>
+          </a:p>
+        </p:txBody>
+      </p:sp>
+      <p:sp>
+        <p:nvSpPr>
+          <p:cNvPr id="57" name="Text 55"/>
+          <p:cNvSpPr/>
+          <p:nvPr/>
+        </p:nvSpPr>
+        <p:spPr>
+          <a:xfrm>
+            <a:off x="11531426" y="4720382"/>
+            <a:ext cx="5978196" cy="733425"/>
+          </a:xfrm>
+          <a:prstGeom prst="rect">
+            <a:avLst/>
+          </a:prstGeom>
+          <a:noFill/>
+          <a:ln/>
+        </p:spPr>
+        <p:txBody>
+          <a:bodyPr wrap="square" lIns="25400" tIns="25400" rIns="25400" bIns="25400" rtlCol="0" anchor="t">
+            <a:normAutofit lnSpcReduction="10000"/>
+          </a:bodyPr>
+          <a:lstStyle/>
+          <a:p>
+            <a:pPr marL="0" indent="0" algn="l">
+              <a:buNone/>
+            </a:pPr>
+            <a:r>
+              <a:rPr lang="en-US" sz="2250" b="1" dirty="0">
+                <a:solidFill>
+                  <a:srgbClr val="063D22"/>
+                </a:solidFill>
+                <a:latin typeface="Arial" pitchFamily="34" charset="0"/>
+                <a:ea typeface="Arial" pitchFamily="34" charset="-122"/>
+                <a:cs typeface="Arial" pitchFamily="34" charset="-120"/>
+              </a:rPr>
+              <a:t>0.8565 public accuracy — no leak, no protected attributes.</a:t>
+            </a:r>
+            <a:endParaRPr lang="en-US" sz="2250" dirty="0"/>
+          </a:p>
+        </p:txBody>
+      </p:sp>
+      <p:sp>
+        <p:nvSpPr>
+          <p:cNvPr id="58" name="Text 56"/>
+          <p:cNvSpPr/>
+          <p:nvPr/>
+        </p:nvSpPr>
+        <p:spPr>
+          <a:xfrm>
+            <a:off x="11531426" y="5682407"/>
+            <a:ext cx="5978196" cy="1204913"/>
+          </a:xfrm>
+          <a:prstGeom prst="rect">
+            <a:avLst/>
+          </a:prstGeom>
+          <a:noFill/>
+          <a:ln/>
+        </p:spPr>
+        <p:txBody>
+          <a:bodyPr wrap="square" lIns="25400" tIns="25400" rIns="25400" bIns="25400" rtlCol="0" anchor="t">
+            <a:normAutofit fontScale="92500" lnSpcReduction="20000"/>
+          </a:bodyPr>
+          <a:lstStyle/>
+          <a:p>
+            <a:pPr marL="0" indent="0" algn="l">
+              <a:lnSpc>
+                <a:spcPct val="150000"/>
+              </a:lnSpc>
+              <a:buNone/>
+            </a:pPr>
+            <a:r>
+              <a:rPr lang="en-US" sz="2025" dirty="0">
+                <a:solidFill>
+                  <a:srgbClr val="244236"/>
+                </a:solidFill>
+                <a:latin typeface="Arial" pitchFamily="34" charset="0"/>
+                <a:ea typeface="Arial" pitchFamily="34" charset="-122"/>
+                <a:cs typeface="Arial" pitchFamily="34" charset="-120"/>
+              </a:rPr>
+              <a:t>Our held-back validation tracked just above the live score the whole way — it </a:t>
+            </a:r>
+            <a:r>
+              <a:rPr lang="en-US" sz="2025" b="1" dirty="0">
+                <a:solidFill>
+                  <a:srgbClr val="063D22"/>
+                </a:solidFill>
+                <a:latin typeface="Arial" pitchFamily="34" charset="0"/>
+                <a:ea typeface="Arial" pitchFamily="34" charset="-122"/>
+                <a:cs typeface="Arial" pitchFamily="34" charset="-120"/>
+              </a:rPr>
+              <a:t>called the result in advance </a:t>
+            </a:r>
+            <a:r>
+              <a:rPr lang="en-US" sz="2025" dirty="0">
+                <a:solidFill>
+                  <a:srgbClr val="244236"/>
+                </a:solidFill>
+                <a:latin typeface="Arial" pitchFamily="34" charset="0"/>
+                <a:ea typeface="Arial" pitchFamily="34" charset="-122"/>
+                <a:cs typeface="Arial" pitchFamily="34" charset="-120"/>
+              </a:rPr>
+              <a:t>.</a:t>
+            </a:r>
+            <a:endParaRPr lang="en-US" sz="2025" dirty="0"/>
+          </a:p>
+        </p:txBody>
+      </p:sp>
+      <p:sp>
+        <p:nvSpPr>
+          <p:cNvPr id="59" name="Text 57"/>
+          <p:cNvSpPr/>
+          <p:nvPr/>
+        </p:nvSpPr>
+        <p:spPr>
+          <a:xfrm>
+            <a:off x="11531426" y="7020669"/>
+            <a:ext cx="5978196" cy="814388"/>
+          </a:xfrm>
+          <a:prstGeom prst="rect">
+            <a:avLst/>
+          </a:prstGeom>
+          <a:noFill/>
+          <a:ln/>
+        </p:spPr>
+        <p:txBody>
+          <a:bodyPr wrap="square" lIns="25400" tIns="25400" rIns="25400" bIns="25400" rtlCol="0" anchor="t">
+            <a:normAutofit fontScale="92500" lnSpcReduction="20000"/>
+          </a:bodyPr>
+          <a:lstStyle/>
+          <a:p>
+            <a:pPr marL="0" indent="0" algn="l">
+              <a:lnSpc>
+                <a:spcPct val="150000"/>
+              </a:lnSpc>
+              <a:buNone/>
+            </a:pPr>
+            <a:r>
+              <a:rPr lang="en-US" sz="2025" dirty="0">
+                <a:solidFill>
+                  <a:srgbClr val="5C7268"/>
+                </a:solidFill>
+                <a:latin typeface="Arial" pitchFamily="34" charset="0"/>
+                <a:ea typeface="Arial" pitchFamily="34" charset="-122"/>
+                <a:cs typeface="Arial" pitchFamily="34" charset="-120"/>
+              </a:rPr>
+              <a:t>Adversarial validation confirms the CV→LB gap is </a:t>
+            </a:r>
+            <a:r>
+              <a:rPr lang="en-US" sz="2025" b="1" dirty="0">
+                <a:solidFill>
+                  <a:srgbClr val="244236"/>
+                </a:solidFill>
+                <a:latin typeface="Arial" pitchFamily="34" charset="0"/>
+                <a:ea typeface="Arial" pitchFamily="34" charset="-122"/>
+                <a:cs typeface="Arial" pitchFamily="34" charset="-120"/>
+              </a:rPr>
+              <a:t>distribution shift over time</a:t>
+            </a:r>
+            <a:r>
+              <a:rPr lang="en-US" sz="2025" dirty="0">
+                <a:solidFill>
+                  <a:srgbClr val="5C7268"/>
+                </a:solidFill>
+                <a:latin typeface="Arial" pitchFamily="34" charset="0"/>
+                <a:ea typeface="Arial" pitchFamily="34" charset="-122"/>
+                <a:cs typeface="Arial" pitchFamily="34" charset="-120"/>
+              </a:rPr>
+              <a:t>, not overfitting.</a:t>
+            </a:r>
+            <a:endParaRPr lang="en-US" sz="2025" dirty="0"/>
+          </a:p>
+        </p:txBody>
+      </p:sp>
+      <p:sp>
+        <p:nvSpPr>
+          <p:cNvPr id="60" name="Shape 58"/>
+          <p:cNvSpPr/>
+          <p:nvPr/>
+        </p:nvSpPr>
+        <p:spPr>
+          <a:xfrm>
+            <a:off x="952500" y="9239250"/>
+            <a:ext cx="16383000" cy="9525"/>
+          </a:xfrm>
+          <a:prstGeom prst="rect">
+            <a:avLst/>
+          </a:prstGeom>
+          <a:solidFill>
+            <a:srgbClr val="D2E6DD"/>
+          </a:solidFill>
+          <a:ln/>
+        </p:spPr>
+        <p:txBody>
+          <a:bodyPr/>
+          <a:lstStyle/>
+          <a:p>
+            <a:endParaRPr lang="en-GB"/>
+          </a:p>
+        </p:txBody>
+      </p:sp>
+      <p:sp>
+        <p:nvSpPr>
+          <p:cNvPr id="61" name="Text 59"/>
+          <p:cNvSpPr/>
+          <p:nvPr/>
+        </p:nvSpPr>
+        <p:spPr>
+          <a:xfrm>
+            <a:off x="952500" y="9458325"/>
+            <a:ext cx="16874490" cy="295275"/>
+          </a:xfrm>
+          <a:prstGeom prst="rect">
+            <a:avLst/>
+          </a:prstGeom>
+          <a:noFill/>
+          <a:ln/>
+        </p:spPr>
+        <p:txBody>
+          <a:bodyPr wrap="square" lIns="25400" tIns="25400" rIns="25400" bIns="25400" rtlCol="0" anchor="t">
+            <a:normAutofit fontScale="92500" lnSpcReduction="10000"/>
+          </a:bodyPr>
+          <a:lstStyle/>
+          <a:p>
+            <a:pPr marL="0" indent="0" algn="l">
+              <a:buNone/>
+            </a:pPr>
+            <a:r>
+              <a:rPr lang="en-US" sz="1800" dirty="0">
+                <a:solidFill>
+                  <a:srgbClr val="5C7268"/>
+                </a:solidFill>
+                <a:latin typeface="Courier New" pitchFamily="34" charset="0"/>
+                <a:ea typeface="Courier New" pitchFamily="34" charset="-122"/>
+                <a:cs typeface="Courier New" pitchFamily="34" charset="-120"/>
+              </a:rPr>
+              <a:t>Source: Kaggle public leaderboard · 10 submissions, v1 → v10</a:t>
+            </a:r>
+            <a:endParaRPr lang="en-US" sz="1800" dirty="0"/>
+          </a:p>
+        </p:txBody>
+      </p:sp>
+      <p:pic>
+        <p:nvPicPr>
+          <p:cNvPr id="62" name="Picture 61" descr="deck_progression.png"/>
+          <p:cNvPicPr>
+            <a:picLocks noChangeAspect="1"/>
+          </p:cNvPicPr>
+          <p:nvPr/>
+        </p:nvPicPr>
+        <p:blipFill>
+          <a:blip r:embed="rId3"/>
+          <a:stretch>
+            <a:fillRect/>
+          </a:stretch>
+        </p:blipFill>
+        <p:spPr>
+          <a:xfrm>
+            <a:off x="1188720" y="2103120"/>
+            <a:ext cx="15361920" cy="1632204"/>
+          </a:xfrm>
+          <a:prstGeom prst="rect">
+            <a:avLst/>
+          </a:prstGeom>
+        </p:spPr>
+      </p:pic>
+    </p:spTree>
+  </p:cSld>
+  <p:clrMapOvr>
+    <a:masterClrMapping/>
+  </p:clrMapOvr>
+</p:sld>
+</file>
+
+<file path=ppt/slides/slide11.xml><?xml version="1.0" encoding="utf-8"?>
+<p:sld xmlns:a="http://schemas.openxmlformats.org/drawingml/2006/main" xmlns:r="http://schemas.openxmlformats.org/officeDocument/2006/relationships" xmlns:p="http://schemas.openxmlformats.org/presentationml/2006/main">
   <p:cSld name="Slide 10">
     <p:bg>
       <p:bgPr>
@@ -2730,7 +5062,7 @@
 </p:sld>
 </file>
 
-<file path=ppt/slides/slide11.xml><?xml version="1.0" encoding="utf-8"?>
+<file path=ppt/slides/slide12.xml><?xml version="1.0" encoding="utf-8"?>
 <p:sld xmlns:a="http://schemas.openxmlformats.org/drawingml/2006/main" xmlns:r="http://schemas.openxmlformats.org/officeDocument/2006/relationships" xmlns:p="http://schemas.openxmlformats.org/presentationml/2006/main">
   <p:cSld name="Slide 11">
     <p:bg>
@@ -3563,7 +5895,7 @@
 </p:sld>
 </file>
 
-<file path=ppt/slides/slide12.xml><?xml version="1.0" encoding="utf-8"?>
+<file path=ppt/slides/slide13.xml><?xml version="1.0" encoding="utf-8"?>
 <p:sld xmlns:a="http://schemas.openxmlformats.org/drawingml/2006/main" xmlns:r="http://schemas.openxmlformats.org/officeDocument/2006/relationships" xmlns:p="http://schemas.openxmlformats.org/presentationml/2006/main">
   <p:cSld>
     <p:spTree>
@@ -4288,7 +6620,7 @@
 </p:sld>
 </file>
 
-<file path=ppt/slides/slide13.xml><?xml version="1.0" encoding="utf-8"?>
+<file path=ppt/slides/slide14.xml><?xml version="1.0" encoding="utf-8"?>
 <p:sld xmlns:a="http://schemas.openxmlformats.org/drawingml/2006/main" xmlns:r="http://schemas.openxmlformats.org/officeDocument/2006/relationships" xmlns:p="http://schemas.openxmlformats.org/presentationml/2006/main">
   <p:cSld name="Slide 12">
     <p:bg>
@@ -4886,799 +7218,6 @@
           </a:p>
         </p:txBody>
       </p:sp>
-    </p:spTree>
-  </p:cSld>
-  <p:clrMapOvr>
-    <a:masterClrMapping/>
-  </p:clrMapOvr>
-</p:sld>
-</file>
-
-<file path=ppt/slides/slide14.xml><?xml version="1.0" encoding="utf-8"?>
-<p:sld xmlns:a="http://schemas.openxmlformats.org/drawingml/2006/main" xmlns:p="http://schemas.openxmlformats.org/presentationml/2006/main" xmlns:r="http://schemas.openxmlformats.org/officeDocument/2006/relationships">
-  <p:cSld>
-    <p:spTree>
-      <p:nvGrpSpPr>
-        <p:cNvPr id="1" name=""/>
-        <p:cNvGrpSpPr/>
-        <p:nvPr/>
-      </p:nvGrpSpPr>
-      <p:grpSpPr/>
-      <p:sp>
-        <p:nvSpPr>
-          <p:cNvPr id="2" name="Shape 0"/>
-          <p:cNvSpPr/>
-          <p:nvPr/>
-        </p:nvSpPr>
-        <p:spPr>
-          <a:xfrm>
-            <a:off x="952500" y="1912218"/>
-            <a:ext cx="16383000" cy="19050"/>
-          </a:xfrm>
-          <a:prstGeom prst="rect">
-            <a:avLst/>
-          </a:prstGeom>
-          <a:solidFill>
-            <a:srgbClr val="1A7A57"/>
-          </a:solidFill>
-          <a:ln/>
-        </p:spPr>
-        <p:txBody>
-          <a:bodyPr/>
-          <a:lstStyle/>
-          <a:p>
-            <a:endParaRPr lang="en-GB"/>
-          </a:p>
-        </p:txBody>
-      </p:sp>
-      <p:sp>
-        <p:nvSpPr>
-          <p:cNvPr id="3" name="Text 1"/>
-          <p:cNvSpPr/>
-          <p:nvPr/>
-        </p:nvSpPr>
-        <p:spPr>
-          <a:xfrm>
-            <a:off x="952500" y="742950"/>
-            <a:ext cx="18021300" cy="295275"/>
-          </a:xfrm>
-          <a:prstGeom prst="rect">
-            <a:avLst/>
-          </a:prstGeom>
-          <a:noFill/>
-          <a:ln/>
-        </p:spPr>
-        <p:txBody>
-          <a:bodyPr wrap="square" lIns="25400" tIns="25400" rIns="25400" bIns="25400" rtlCol="0" anchor="t">
-            <a:normAutofit fontScale="92500" lnSpcReduction="10000"/>
-          </a:bodyPr>
-          <a:lstStyle/>
-          <a:p>
-            <a:pPr marL="0" indent="0" algn="l">
-              <a:buNone/>
-            </a:pPr>
-            <a:r>
-              <a:rPr lang="en-US" sz="1800" kern="0" spc="225" dirty="0">
-                <a:solidFill>
-                  <a:srgbClr val="007A33"/>
-                </a:solidFill>
-                <a:latin typeface="Courier New" pitchFamily="34" charset="0"/>
-                <a:ea typeface="Courier New" pitchFamily="34" charset="-122"/>
-                <a:cs typeface="Courier New" pitchFamily="34" charset="-120"/>
-              </a:rPr>
-              <a:t>09 · FEATURES WE BUILT</a:t>
-            </a:r>
-            <a:endParaRPr lang="en-US" sz="1800" dirty="0"/>
-          </a:p>
-        </p:txBody>
-      </p:sp>
-      <p:sp>
-        <p:nvSpPr>
-          <p:cNvPr id="4" name="Text 2"/>
-          <p:cNvSpPr/>
-          <p:nvPr/>
-        </p:nvSpPr>
-        <p:spPr>
-          <a:xfrm>
-            <a:off x="952500" y="1152525"/>
-            <a:ext cx="18021300" cy="550143"/>
-          </a:xfrm>
-          <a:prstGeom prst="rect">
-            <a:avLst/>
-          </a:prstGeom>
-          <a:noFill/>
-          <a:ln/>
-        </p:spPr>
-        <p:txBody>
-          <a:bodyPr wrap="square" lIns="25400" tIns="25400" rIns="25400" bIns="25400" rtlCol="0" anchor="t">
-            <a:normAutofit fontScale="92500" lnSpcReduction="10000"/>
-          </a:bodyPr>
-          <a:lstStyle/>
-          <a:p>
-            <a:pPr marL="0" indent="0" algn="l">
-              <a:lnSpc>
-                <a:spcPct val="112000"/>
-              </a:lnSpc>
-              <a:buNone/>
-            </a:pPr>
-            <a:r>
-              <a:rPr lang="en-US" sz="3600" b="1" kern="0" spc="-37" dirty="0">
-                <a:solidFill>
-                  <a:srgbClr val="063D22"/>
-                </a:solidFill>
-                <a:latin typeface="Arial" pitchFamily="34" charset="0"/>
-                <a:ea typeface="Arial" pitchFamily="34" charset="-122"/>
-                <a:cs typeface="Arial" pitchFamily="34" charset="-120"/>
-              </a:rPr>
-              <a:t>The features we engineered</a:t>
-            </a:r>
-            <a:endParaRPr lang="en-US" sz="3600" dirty="0"/>
-          </a:p>
-        </p:txBody>
-      </p:sp>
-      <p:sp>
-        <p:nvSpPr>
-          <p:cNvPr id="20" name="Shape 18"/>
-          <p:cNvSpPr/>
-          <p:nvPr/>
-        </p:nvSpPr>
-        <p:spPr>
-          <a:xfrm>
-            <a:off x="952500" y="9239250"/>
-            <a:ext cx="16383000" cy="9525"/>
-          </a:xfrm>
-          <a:prstGeom prst="rect">
-            <a:avLst/>
-          </a:prstGeom>
-          <a:solidFill>
-            <a:srgbClr val="D2E6DD"/>
-          </a:solidFill>
-          <a:ln/>
-        </p:spPr>
-        <p:txBody>
-          <a:bodyPr/>
-          <a:lstStyle/>
-          <a:p>
-            <a:endParaRPr lang="en-GB"/>
-          </a:p>
-        </p:txBody>
-      </p:sp>
-      <p:sp>
-        <p:nvSpPr>
-          <p:cNvPr id="21" name="Text 19"/>
-          <p:cNvSpPr/>
-          <p:nvPr/>
-        </p:nvSpPr>
-        <p:spPr>
-          <a:xfrm>
-            <a:off x="952500" y="9458325"/>
-            <a:ext cx="16874490" cy="295275"/>
-          </a:xfrm>
-          <a:prstGeom prst="rect">
-            <a:avLst/>
-          </a:prstGeom>
-          <a:noFill/>
-          <a:ln/>
-        </p:spPr>
-        <p:txBody>
-          <a:bodyPr wrap="square" lIns="25400" tIns="25400" rIns="25400" bIns="25400" rtlCol="0" anchor="t">
-            <a:normAutofit fontScale="92500" lnSpcReduction="10000"/>
-          </a:bodyPr>
-          <a:lstStyle/>
-          <a:p>
-            <a:pPr marL="0" indent="0" algn="l">
-              <a:buNone/>
-            </a:pPr>
-            <a:r>
-              <a:rPr lang="en-US" sz="1800" dirty="0">
-                <a:solidFill>
-                  <a:srgbClr val="5C7268"/>
-                </a:solidFill>
-                <a:latin typeface="Courier New" pitchFamily="34" charset="0"/>
-                <a:ea typeface="Courier New" pitchFamily="34" charset="-122"/>
-                <a:cs typeface="Courier New" pitchFamily="34" charset="-120"/>
-              </a:rPr>
-              <a:t>Source: src/prep.py · engineered features ranked on slide 8</a:t>
-            </a:r>
-            <a:endParaRPr lang="en-US" sz="1800" dirty="0"/>
-          </a:p>
-        </p:txBody>
-      </p:sp>
-      <p:graphicFrame>
-        <p:nvGraphicFramePr>
-          <p:cNvPr id="22" name="Table 21"/>
-          <p:cNvGraphicFramePr>
-            <a:graphicFrameLocks noGrp="1"/>
-          </p:cNvGraphicFramePr>
-          <p:nvPr/>
-        </p:nvGraphicFramePr>
-        <p:xfrm>
-          <a:off x="950976" y="2468880"/>
-          <a:ext cx="16367760" cy="6035040"/>
-        </p:xfrm>
-        <a:graphic>
-          <a:graphicData uri="http://schemas.openxmlformats.org/drawingml/2006/table">
-            <a:tbl>
-              <a:tblPr>
-                <a:tableStyleId>{5C22544A-7EE6-4342-B048-85BDC9FD1C3A}</a:tableStyleId>
-              </a:tblPr>
-              <a:tblGrid>
-                <a:gridCol w="3931920"/>
-                <a:gridCol w="5943600"/>
-                <a:gridCol w="6492240"/>
-              </a:tblGrid>
-              <a:tr h="754380">
-                <a:tc>
-                  <a:txBody>
-                    <a:bodyPr wrap="square"/>
-                    <a:lstStyle/>
-                    <a:p>
-                      <a:pPr algn="l"/>
-                      <a:r>
-                        <a:rPr sz="1700" b="1">
-                          <a:solidFill>
-                            <a:srgbClr val="FFFFFF"/>
-                          </a:solidFill>
-                          <a:latin typeface="Arial"/>
-                        </a:rPr>
-                        <a:t>Feature</a:t>
-                      </a:r>
-                    </a:p>
-                  </a:txBody>
-                  <a:tcPr anchor="ctr" marL="164592" marT="54864" marB="54864">
-                    <a:solidFill>
-                      <a:srgbClr val="063D22"/>
-                    </a:solidFill>
-                  </a:tcPr>
-                </a:tc>
-                <a:tc>
-                  <a:txBody>
-                    <a:bodyPr wrap="square"/>
-                    <a:lstStyle/>
-                    <a:p>
-                      <a:pPr algn="l"/>
-                      <a:r>
-                        <a:rPr sz="1700" b="1">
-                          <a:solidFill>
-                            <a:srgbClr val="FFFFFF"/>
-                          </a:solidFill>
-                          <a:latin typeface="Arial"/>
-                        </a:rPr>
-                        <a:t>How we built it</a:t>
-                      </a:r>
-                    </a:p>
-                  </a:txBody>
-                  <a:tcPr anchor="ctr" marL="164592" marT="54864" marB="54864">
-                    <a:solidFill>
-                      <a:srgbClr val="063D22"/>
-                    </a:solidFill>
-                  </a:tcPr>
-                </a:tc>
-                <a:tc>
-                  <a:txBody>
-                    <a:bodyPr wrap="square"/>
-                    <a:lstStyle/>
-                    <a:p>
-                      <a:pPr algn="l"/>
-                      <a:r>
-                        <a:rPr sz="1700" b="1">
-                          <a:solidFill>
-                            <a:srgbClr val="FFFFFF"/>
-                          </a:solidFill>
-                          <a:latin typeface="Arial"/>
-                        </a:rPr>
-                        <a:t>Why it helps</a:t>
-                      </a:r>
-                    </a:p>
-                  </a:txBody>
-                  <a:tcPr anchor="ctr" marL="164592" marT="54864" marB="54864">
-                    <a:solidFill>
-                      <a:srgbClr val="063D22"/>
-                    </a:solidFill>
-                  </a:tcPr>
-                </a:tc>
-              </a:tr>
-              <a:tr h="754380">
-                <a:tc>
-                  <a:txBody>
-                    <a:bodyPr wrap="square"/>
-                    <a:lstStyle/>
-                    <a:p>
-                      <a:pPr algn="l"/>
-                      <a:r>
-                        <a:rPr sz="1500">
-                          <a:solidFill>
-                            <a:srgbClr val="14533B"/>
-                          </a:solidFill>
-                          <a:latin typeface="Courier New"/>
-                        </a:rPr>
-                        <a:t>risk_mean · risk_max</a:t>
-                      </a:r>
-                    </a:p>
-                  </a:txBody>
-                  <a:tcPr anchor="ctr" marL="164592" marT="54864" marB="54864">
-                    <a:solidFill>
-                      <a:srgbClr val="EAF3EF"/>
-                    </a:solidFill>
-                  </a:tcPr>
-                </a:tc>
-                <a:tc>
-                  <a:txBody>
-                    <a:bodyPr wrap="square"/>
-                    <a:lstStyle/>
-                    <a:p>
-                      <a:pPr algn="l"/>
-                      <a:r>
-                        <a:rPr sz="1500">
-                          <a:solidFill>
-                            <a:srgbClr val="14533B"/>
-                          </a:solidFill>
-                          <a:latin typeface="Courier New"/>
-                        </a:rPr>
-                        <a:t>mean &amp; max of the two risk indicators</a:t>
-                      </a:r>
-                    </a:p>
-                  </a:txBody>
-                  <a:tcPr anchor="ctr" marL="164592" marT="54864" marB="54864">
-                    <a:solidFill>
-                      <a:srgbClr val="EAF3EF"/>
-                    </a:solidFill>
-                  </a:tcPr>
-                </a:tc>
-                <a:tc>
-                  <a:txBody>
-                    <a:bodyPr wrap="square"/>
-                    <a:lstStyle/>
-                    <a:p>
-                      <a:pPr algn="l"/>
-                      <a:r>
-                        <a:rPr sz="1500">
-                          <a:solidFill>
-                            <a:srgbClr val="5C7268"/>
-                          </a:solidFill>
-                          <a:latin typeface="Arial"/>
-                        </a:rPr>
-                        <a:t>Combine both risk sources</a:t>
-                      </a:r>
-                    </a:p>
-                  </a:txBody>
-                  <a:tcPr anchor="ctr" marL="164592" marT="54864" marB="54864">
-                    <a:solidFill>
-                      <a:srgbClr val="EAF3EF"/>
-                    </a:solidFill>
-                  </a:tcPr>
-                </a:tc>
-              </a:tr>
-              <a:tr h="754380">
-                <a:tc>
-                  <a:txBody>
-                    <a:bodyPr wrap="square"/>
-                    <a:lstStyle/>
-                    <a:p>
-                      <a:pPr algn="l"/>
-                      <a:r>
-                        <a:rPr sz="1500">
-                          <a:solidFill>
-                            <a:srgbClr val="14533B"/>
-                          </a:solidFill>
-                          <a:latin typeface="Courier New"/>
-                        </a:rPr>
-                        <a:t>risk_dev</a:t>
-                      </a:r>
-                    </a:p>
-                  </a:txBody>
-                  <a:tcPr anchor="ctr" marL="164592" marT="54864" marB="54864">
-                    <a:solidFill>
-                      <a:srgbClr val="FFFFFF"/>
-                    </a:solidFill>
-                  </a:tcPr>
-                </a:tc>
-                <a:tc>
-                  <a:txBody>
-                    <a:bodyPr wrap="square"/>
-                    <a:lstStyle/>
-                    <a:p>
-                      <a:pPr algn="l"/>
-                      <a:r>
-                        <a:rPr sz="1500">
-                          <a:solidFill>
-                            <a:srgbClr val="14533B"/>
-                          </a:solidFill>
-                          <a:latin typeface="Courier New"/>
-                        </a:rPr>
-                        <a:t>distance from the middle:  |risk - 55|</a:t>
-                      </a:r>
-                    </a:p>
-                  </a:txBody>
-                  <a:tcPr anchor="ctr" marL="164592" marT="54864" marB="54864">
-                    <a:solidFill>
-                      <a:srgbClr val="FFFFFF"/>
-                    </a:solidFill>
-                  </a:tcPr>
-                </a:tc>
-                <a:tc>
-                  <a:txBody>
-                    <a:bodyPr wrap="square"/>
-                    <a:lstStyle/>
-                    <a:p>
-                      <a:pPr algn="l"/>
-                      <a:r>
-                        <a:rPr sz="1500">
-                          <a:solidFill>
-                            <a:srgbClr val="5C7268"/>
-                          </a:solidFill>
-                          <a:latin typeface="Arial"/>
-                        </a:rPr>
-                        <a:t>Turns the risk hump into usable signal</a:t>
-                      </a:r>
-                    </a:p>
-                  </a:txBody>
-                  <a:tcPr anchor="ctr" marL="164592" marT="54864" marB="54864">
-                    <a:solidFill>
-                      <a:srgbClr val="FFFFFF"/>
-                    </a:solidFill>
-                  </a:tcPr>
-                </a:tc>
-              </a:tr>
-              <a:tr h="754380">
-                <a:tc>
-                  <a:txBody>
-                    <a:bodyPr wrap="square"/>
-                    <a:lstStyle/>
-                    <a:p>
-                      <a:pPr algn="l"/>
-                      <a:r>
-                        <a:rPr sz="1500">
-                          <a:solidFill>
-                            <a:srgbClr val="14533B"/>
-                          </a:solidFill>
-                          <a:latin typeface="Courier New"/>
-                        </a:rPr>
-                        <a:t>amt_to_income</a:t>
-                      </a:r>
-                    </a:p>
-                  </a:txBody>
-                  <a:tcPr anchor="ctr" marL="164592" marT="54864" marB="54864">
-                    <a:solidFill>
-                      <a:srgbClr val="EAF3EF"/>
-                    </a:solidFill>
-                  </a:tcPr>
-                </a:tc>
-                <a:tc>
-                  <a:txBody>
-                    <a:bodyPr wrap="square"/>
-                    <a:lstStyle/>
-                    <a:p>
-                      <a:pPr algn="l"/>
-                      <a:r>
-                        <a:rPr sz="1500">
-                          <a:solidFill>
-                            <a:srgbClr val="14533B"/>
-                          </a:solidFill>
-                          <a:latin typeface="Courier New"/>
-                        </a:rPr>
-                        <a:t>amount / (total_income + 1)</a:t>
-                      </a:r>
-                    </a:p>
-                  </a:txBody>
-                  <a:tcPr anchor="ctr" marL="164592" marT="54864" marB="54864">
-                    <a:solidFill>
-                      <a:srgbClr val="EAF3EF"/>
-                    </a:solidFill>
-                  </a:tcPr>
-                </a:tc>
-                <a:tc>
-                  <a:txBody>
-                    <a:bodyPr wrap="square"/>
-                    <a:lstStyle/>
-                    <a:p>
-                      <a:pPr algn="l"/>
-                      <a:r>
-                        <a:rPr sz="1500">
-                          <a:solidFill>
-                            <a:srgbClr val="5C7268"/>
-                          </a:solidFill>
-                          <a:latin typeface="Arial"/>
-                        </a:rPr>
-                        <a:t>Affordability ratio — a credit standard</a:t>
-                      </a:r>
-                    </a:p>
-                  </a:txBody>
-                  <a:tcPr anchor="ctr" marL="164592" marT="54864" marB="54864">
-                    <a:solidFill>
-                      <a:srgbClr val="EAF3EF"/>
-                    </a:solidFill>
-                  </a:tcPr>
-                </a:tc>
-              </a:tr>
-              <a:tr h="754380">
-                <a:tc>
-                  <a:txBody>
-                    <a:bodyPr wrap="square"/>
-                    <a:lstStyle/>
-                    <a:p>
-                      <a:pPr algn="l"/>
-                      <a:r>
-                        <a:rPr sz="1500">
-                          <a:solidFill>
-                            <a:srgbClr val="14533B"/>
-                          </a:solidFill>
-                          <a:latin typeface="Courier New"/>
-                        </a:rPr>
-                        <a:t>total_income · log_income</a:t>
-                      </a:r>
-                    </a:p>
-                  </a:txBody>
-                  <a:tcPr anchor="ctr" marL="164592" marT="54864" marB="54864">
-                    <a:solidFill>
-                      <a:srgbClr val="FFFFFF"/>
-                    </a:solidFill>
-                  </a:tcPr>
-                </a:tc>
-                <a:tc>
-                  <a:txBody>
-                    <a:bodyPr wrap="square"/>
-                    <a:lstStyle/>
-                    <a:p>
-                      <a:pPr algn="l"/>
-                      <a:r>
-                        <a:rPr sz="1500">
-                          <a:solidFill>
-                            <a:srgbClr val="14533B"/>
-                          </a:solidFill>
-                          <a:latin typeface="Courier New"/>
-                        </a:rPr>
-                        <a:t>ann_income + other_income (log-scaled)</a:t>
-                      </a:r>
-                    </a:p>
-                  </a:txBody>
-                  <a:tcPr anchor="ctr" marL="164592" marT="54864" marB="54864">
-                    <a:solidFill>
-                      <a:srgbClr val="FFFFFF"/>
-                    </a:solidFill>
-                  </a:tcPr>
-                </a:tc>
-                <a:tc>
-                  <a:txBody>
-                    <a:bodyPr wrap="square"/>
-                    <a:lstStyle/>
-                    <a:p>
-                      <a:pPr algn="l"/>
-                      <a:r>
-                        <a:rPr sz="1500">
-                          <a:solidFill>
-                            <a:srgbClr val="5C7268"/>
-                          </a:solidFill>
-                          <a:latin typeface="Arial"/>
-                        </a:rPr>
-                        <a:t>Real disposable income</a:t>
-                      </a:r>
-                    </a:p>
-                  </a:txBody>
-                  <a:tcPr anchor="ctr" marL="164592" marT="54864" marB="54864">
-                    <a:solidFill>
-                      <a:srgbClr val="FFFFFF"/>
-                    </a:solidFill>
-                  </a:tcPr>
-                </a:tc>
-              </a:tr>
-              <a:tr h="754380">
-                <a:tc>
-                  <a:txBody>
-                    <a:bodyPr wrap="square"/>
-                    <a:lstStyle/>
-                    <a:p>
-                      <a:pPr algn="l"/>
-                      <a:r>
-                        <a:rPr sz="1500">
-                          <a:solidFill>
-                            <a:srgbClr val="14533B"/>
-                          </a:solidFill>
-                          <a:latin typeface="Courier New"/>
-                        </a:rPr>
-                        <a:t>credit_z</a:t>
-                      </a:r>
-                    </a:p>
-                  </a:txBody>
-                  <a:tcPr anchor="ctr" marL="164592" marT="54864" marB="54864">
-                    <a:solidFill>
-                      <a:srgbClr val="EAF3EF"/>
-                    </a:solidFill>
-                  </a:tcPr>
-                </a:tc>
-                <a:tc>
-                  <a:txBody>
-                    <a:bodyPr wrap="square"/>
-                    <a:lstStyle/>
-                    <a:p>
-                      <a:pPr algn="l"/>
-                      <a:r>
-                        <a:rPr sz="1500">
-                          <a:solidFill>
-                            <a:srgbClr val="14533B"/>
-                          </a:solidFill>
-                          <a:latin typeface="Courier New"/>
-                        </a:rPr>
-                        <a:t>3 bureau scores z-scored &amp; merged</a:t>
-                      </a:r>
-                    </a:p>
-                  </a:txBody>
-                  <a:tcPr anchor="ctr" marL="164592" marT="54864" marB="54864">
-                    <a:solidFill>
-                      <a:srgbClr val="EAF3EF"/>
-                    </a:solidFill>
-                  </a:tcPr>
-                </a:tc>
-                <a:tc>
-                  <a:txBody>
-                    <a:bodyPr wrap="square"/>
-                    <a:lstStyle/>
-                    <a:p>
-                      <a:pPr algn="l"/>
-                      <a:r>
-                        <a:rPr sz="1500">
-                          <a:solidFill>
-                            <a:srgbClr val="5C7268"/>
-                          </a:solidFill>
-                          <a:latin typeface="Arial"/>
-                        </a:rPr>
-                        <a:t>One comparable score from 3 scales</a:t>
-                      </a:r>
-                    </a:p>
-                  </a:txBody>
-                  <a:tcPr anchor="ctr" marL="164592" marT="54864" marB="54864">
-                    <a:solidFill>
-                      <a:srgbClr val="EAF3EF"/>
-                    </a:solidFill>
-                  </a:tcPr>
-                </a:tc>
-              </a:tr>
-              <a:tr h="754380">
-                <a:tc>
-                  <a:txBody>
-                    <a:bodyPr wrap="square"/>
-                    <a:lstStyle/>
-                    <a:p>
-                      <a:pPr algn="l"/>
-                      <a:r>
-                        <a:rPr sz="1500">
-                          <a:solidFill>
-                            <a:srgbClr val="14533B"/>
-                          </a:solidFill>
-                          <a:latin typeface="Courier New"/>
-                        </a:rPr>
-                        <a:t>has_score · *_missing</a:t>
-                      </a:r>
-                    </a:p>
-                  </a:txBody>
-                  <a:tcPr anchor="ctr" marL="164592" marT="54864" marB="54864">
-                    <a:solidFill>
-                      <a:srgbClr val="FFFFFF"/>
-                    </a:solidFill>
-                  </a:tcPr>
-                </a:tc>
-                <a:tc>
-                  <a:txBody>
-                    <a:bodyPr wrap="square"/>
-                    <a:lstStyle/>
-                    <a:p>
-                      <a:pPr algn="l"/>
-                      <a:r>
-                        <a:rPr sz="1500">
-                          <a:solidFill>
-                            <a:srgbClr val="14533B"/>
-                          </a:solidFill>
-                          <a:latin typeface="Courier New"/>
-                        </a:rPr>
-                        <a:t>binary 0/1 flags</a:t>
-                      </a:r>
-                    </a:p>
-                  </a:txBody>
-                  <a:tcPr anchor="ctr" marL="164592" marT="54864" marB="54864">
-                    <a:solidFill>
-                      <a:srgbClr val="FFFFFF"/>
-                    </a:solidFill>
-                  </a:tcPr>
-                </a:tc>
-                <a:tc>
-                  <a:txBody>
-                    <a:bodyPr wrap="square"/>
-                    <a:lstStyle/>
-                    <a:p>
-                      <a:pPr algn="l"/>
-                      <a:r>
-                        <a:rPr sz="1500">
-                          <a:solidFill>
-                            <a:srgbClr val="5C7268"/>
-                          </a:solidFill>
-                          <a:latin typeface="Arial"/>
-                        </a:rPr>
-                        <a:t>“Value absent” is itself a signal</a:t>
-                      </a:r>
-                    </a:p>
-                  </a:txBody>
-                  <a:tcPr anchor="ctr" marL="164592" marT="54864" marB="54864">
-                    <a:solidFill>
-                      <a:srgbClr val="FFFFFF"/>
-                    </a:solidFill>
-                  </a:tcPr>
-                </a:tc>
-              </a:tr>
-              <a:tr h="754380">
-                <a:tc>
-                  <a:txBody>
-                    <a:bodyPr wrap="square"/>
-                    <a:lstStyle/>
-                    <a:p>
-                      <a:pPr algn="l"/>
-                      <a:r>
-                        <a:rPr sz="1500">
-                          <a:solidFill>
-                            <a:srgbClr val="14533B"/>
-                          </a:solidFill>
-                          <a:latin typeface="Courier New"/>
-                        </a:rPr>
-                        <a:t>year · month</a:t>
-                      </a:r>
-                    </a:p>
-                  </a:txBody>
-                  <a:tcPr anchor="ctr" marL="164592" marT="54864" marB="54864">
-                    <a:solidFill>
-                      <a:srgbClr val="EAF3EF"/>
-                    </a:solidFill>
-                  </a:tcPr>
-                </a:tc>
-                <a:tc>
-                  <a:txBody>
-                    <a:bodyPr wrap="square"/>
-                    <a:lstStyle/>
-                    <a:p>
-                      <a:pPr algn="l"/>
-                      <a:r>
-                        <a:rPr sz="1500">
-                          <a:solidFill>
-                            <a:srgbClr val="14533B"/>
-                          </a:solidFill>
-                          <a:latin typeface="Courier New"/>
-                        </a:rPr>
-                        <a:t>parsed from the date</a:t>
-                      </a:r>
-                    </a:p>
-                  </a:txBody>
-                  <a:tcPr anchor="ctr" marL="164592" marT="54864" marB="54864">
-                    <a:solidFill>
-                      <a:srgbClr val="EAF3EF"/>
-                    </a:solidFill>
-                  </a:tcPr>
-                </a:tc>
-                <a:tc>
-                  <a:txBody>
-                    <a:bodyPr wrap="square"/>
-                    <a:lstStyle/>
-                    <a:p>
-                      <a:pPr algn="l"/>
-                      <a:r>
-                        <a:rPr sz="1500">
-                          <a:solidFill>
-                            <a:srgbClr val="5C7268"/>
-                          </a:solidFill>
-                          <a:latin typeface="Arial"/>
-                        </a:rPr>
-                        <a:t>Captures the downward 2026 approval trend</a:t>
-                      </a:r>
-                    </a:p>
-                  </a:txBody>
-                  <a:tcPr anchor="ctr" marL="164592" marT="54864" marB="54864">
-                    <a:solidFill>
-                      <a:srgbClr val="EAF3EF"/>
-                    </a:solidFill>
-                  </a:tcPr>
-                </a:tc>
-              </a:tr>
-            </a:tbl>
-          </a:graphicData>
-        </a:graphic>
-      </p:graphicFrame>
     </p:spTree>
   </p:cSld>
   <p:clrMapOvr>
@@ -10096,6 +11635,42 @@
           </a:p>
         </p:txBody>
       </p:sp>
+      <p:sp>
+        <p:nvSpPr>
+          <p:cNvPr id="15" name="TextBox 14">
+            <a:extLst>
+              <a:ext uri="{FF2B5EF4-FFF2-40B4-BE49-F238E27FC236}">
+                <a16:creationId xmlns:a16="http://schemas.microsoft.com/office/drawing/2014/main" id="{D24B80BA-02FB-FB9D-EE23-EA84EA211ABD}"/>
+              </a:ext>
+            </a:extLst>
+          </p:cNvPr>
+          <p:cNvSpPr txBox="1"/>
+          <p:nvPr/>
+        </p:nvSpPr>
+        <p:spPr>
+          <a:xfrm>
+            <a:off x="14459663" y="9179133"/>
+            <a:ext cx="2884355" cy="646331"/>
+          </a:xfrm>
+          <a:prstGeom prst="rect">
+            <a:avLst/>
+          </a:prstGeom>
+          <a:noFill/>
+        </p:spPr>
+        <p:txBody>
+          <a:bodyPr wrap="square" rtlCol="0">
+            <a:spAutoFit/>
+          </a:bodyPr>
+          <a:lstStyle/>
+          <a:p>
+            <a:r>
+              <a:rPr lang="en-DE" b="1" dirty="0"/>
+              <a:t>60 unique values across the entire dataset</a:t>
+            </a:r>
+            <a:endParaRPr lang="en-DE" b="1" cap="all" dirty="0"/>
+          </a:p>
+        </p:txBody>
+      </p:sp>
     </p:spTree>
   </p:cSld>
   <p:clrMapOvr>
@@ -12350,15 +13925,7 @@
 
 <file path=ppt/slides/slide9.xml><?xml version="1.0" encoding="utf-8"?>
 <p:sld xmlns:a="http://schemas.openxmlformats.org/drawingml/2006/main" xmlns:r="http://schemas.openxmlformats.org/officeDocument/2006/relationships" xmlns:p="http://schemas.openxmlformats.org/presentationml/2006/main">
-  <p:cSld name="Slide 9">
-    <p:bg>
-      <p:bgPr>
-        <a:solidFill>
-          <a:srgbClr val="FFFFFF"/>
-        </a:solidFill>
-        <a:effectLst/>
-      </p:bgPr>
-    </p:bg>
+  <p:cSld>
     <p:spTree>
       <p:nvGrpSpPr>
         <p:cNvPr id="1" name=""/>
@@ -12396,7 +13963,7 @@
           <a:bodyPr/>
           <a:lstStyle/>
           <a:p>
-            <a:endParaRPr/>
+            <a:endParaRPr lang="en-GB"/>
           </a:p>
         </p:txBody>
       </p:sp>
@@ -12435,7 +14002,7 @@
                 <a:ea typeface="Courier New" pitchFamily="34" charset="-122"/>
                 <a:cs typeface="Courier New" pitchFamily="34" charset="-120"/>
               </a:rPr>
-              <a:t>10 · RESULTS</a:t>
+              <a:t>09 · FEATURES WE BUILT</a:t>
             </a:r>
             <a:endParaRPr lang="en-US" sz="1800" dirty="0"/>
           </a:p>
@@ -12479,7 +14046,7 @@
                 <a:ea typeface="Arial" pitchFamily="34" charset="-122"/>
                 <a:cs typeface="Arial" pitchFamily="34" charset="-120"/>
               </a:rPr>
-              <a:t>Our own validation predicted the result in advance</a:t>
+              <a:t>The features we engineered</a:t>
             </a:r>
             <a:endParaRPr lang="en-US" sz="3600" dirty="0"/>
           </a:p>
@@ -12487,14 +14054,41 @@
       </p:sp>
       <p:sp>
         <p:nvSpPr>
-          <p:cNvPr id="5" name="Text 3"/>
-          <p:cNvSpPr/>
-          <p:nvPr/>
-        </p:nvSpPr>
-        <p:spPr>
-          <a:xfrm>
-            <a:off x="952500" y="3717429"/>
-            <a:ext cx="11050079" cy="295275"/>
+          <p:cNvPr id="20" name="Shape 18"/>
+          <p:cNvSpPr/>
+          <p:nvPr/>
+        </p:nvSpPr>
+        <p:spPr>
+          <a:xfrm>
+            <a:off x="952500" y="9239250"/>
+            <a:ext cx="16383000" cy="9525"/>
+          </a:xfrm>
+          <a:prstGeom prst="rect">
+            <a:avLst/>
+          </a:prstGeom>
+          <a:solidFill>
+            <a:srgbClr val="D2E6DD"/>
+          </a:solidFill>
+          <a:ln/>
+        </p:spPr>
+        <p:txBody>
+          <a:bodyPr/>
+          <a:lstStyle/>
+          <a:p>
+            <a:endParaRPr lang="en-GB"/>
+          </a:p>
+        </p:txBody>
+      </p:sp>
+      <p:sp>
+        <p:nvSpPr>
+          <p:cNvPr id="21" name="Text 19"/>
+          <p:cNvSpPr/>
+          <p:nvPr/>
+        </p:nvSpPr>
+        <p:spPr>
+          <a:xfrm>
+            <a:off x="952500" y="9458325"/>
+            <a:ext cx="16874490" cy="295275"/>
           </a:xfrm>
           <a:prstGeom prst="rect">
             <a:avLst/>
@@ -12512,2166 +14106,673 @@
               <a:buNone/>
             </a:pPr>
             <a:r>
-              <a:rPr lang="en-US" sz="1800" kern="0" spc="75" dirty="0">
-                <a:solidFill>
-                  <a:srgbClr val="007A33"/>
+              <a:rPr lang="en-US" sz="1800" dirty="0">
+                <a:solidFill>
+                  <a:srgbClr val="5C7268"/>
                 </a:solidFill>
                 <a:latin typeface="Courier New" pitchFamily="34" charset="0"/>
                 <a:ea typeface="Courier New" pitchFamily="34" charset="-122"/>
                 <a:cs typeface="Courier New" pitchFamily="34" charset="-120"/>
               </a:rPr>
-              <a:t>FINAL SUBMISSIONS SELECTED — v6 + v10</a:t>
+              <a:t>Source: src/prep.py · engineered features ranked on slide 8</a:t>
             </a:r>
             <a:endParaRPr lang="en-US" sz="1800" dirty="0"/>
           </a:p>
         </p:txBody>
       </p:sp>
-      <p:sp>
-        <p:nvSpPr>
-          <p:cNvPr id="6" name="Shape 4"/>
-          <p:cNvSpPr/>
-          <p:nvPr/>
-        </p:nvSpPr>
-        <p:spPr>
-          <a:xfrm>
-            <a:off x="952500" y="4593729"/>
-            <a:ext cx="704627" cy="19050"/>
-          </a:xfrm>
-          <a:prstGeom prst="rect">
-            <a:avLst/>
-          </a:prstGeom>
-          <a:solidFill>
-            <a:srgbClr val="1A7A57"/>
-          </a:solidFill>
-          <a:ln/>
-        </p:spPr>
-        <p:txBody>
-          <a:bodyPr/>
-          <a:lstStyle/>
-          <a:p>
-            <a:endParaRPr/>
-          </a:p>
-        </p:txBody>
-      </p:sp>
-      <p:sp>
-        <p:nvSpPr>
-          <p:cNvPr id="7" name="Text 5"/>
-          <p:cNvSpPr/>
-          <p:nvPr/>
-        </p:nvSpPr>
-        <p:spPr>
-          <a:xfrm>
-            <a:off x="1066800" y="4222254"/>
-            <a:ext cx="552227" cy="314325"/>
-          </a:xfrm>
-          <a:prstGeom prst="rect">
-            <a:avLst/>
-          </a:prstGeom>
-          <a:noFill/>
-          <a:ln/>
-        </p:spPr>
-        <p:txBody>
-          <a:bodyPr wrap="square" lIns="25400" tIns="25400" rIns="25400" bIns="25400" rtlCol="0" anchor="ctr">
-            <a:normAutofit lnSpcReduction="10000"/>
-          </a:bodyPr>
-          <a:lstStyle/>
-          <a:p>
-            <a:pPr marL="0" indent="0" algn="l">
-              <a:buNone/>
-            </a:pPr>
-            <a:r>
-              <a:rPr lang="en-US" sz="1875" b="1" dirty="0">
-                <a:solidFill>
-                  <a:srgbClr val="063D22"/>
-                </a:solidFill>
-                <a:latin typeface="Arial" pitchFamily="34" charset="0"/>
-                <a:ea typeface="Arial" pitchFamily="34" charset="-122"/>
-                <a:cs typeface="Arial" pitchFamily="34" charset="-120"/>
-              </a:rPr>
-              <a:t>Ver</a:t>
-            </a:r>
-            <a:endParaRPr lang="en-US" sz="1875" dirty="0"/>
-          </a:p>
-        </p:txBody>
-      </p:sp>
-      <p:sp>
-        <p:nvSpPr>
-          <p:cNvPr id="8" name="Shape 6"/>
-          <p:cNvSpPr/>
-          <p:nvPr/>
-        </p:nvSpPr>
-        <p:spPr>
-          <a:xfrm>
-            <a:off x="1657127" y="4593729"/>
-            <a:ext cx="5770736" cy="19050"/>
-          </a:xfrm>
-          <a:prstGeom prst="rect">
-            <a:avLst/>
-          </a:prstGeom>
-          <a:solidFill>
-            <a:srgbClr val="1A7A57"/>
-          </a:solidFill>
-          <a:ln/>
-        </p:spPr>
-        <p:txBody>
-          <a:bodyPr/>
-          <a:lstStyle/>
-          <a:p>
-            <a:endParaRPr/>
-          </a:p>
-        </p:txBody>
-      </p:sp>
-      <p:sp>
-        <p:nvSpPr>
-          <p:cNvPr id="9" name="Text 7"/>
-          <p:cNvSpPr/>
-          <p:nvPr/>
-        </p:nvSpPr>
-        <p:spPr>
-          <a:xfrm>
-            <a:off x="1771427" y="4222254"/>
-            <a:ext cx="5715258" cy="314325"/>
-          </a:xfrm>
-          <a:prstGeom prst="rect">
-            <a:avLst/>
-          </a:prstGeom>
-          <a:noFill/>
-          <a:ln/>
-        </p:spPr>
-        <p:txBody>
-          <a:bodyPr wrap="square" lIns="25400" tIns="25400" rIns="25400" bIns="25400" rtlCol="0" anchor="ctr">
-            <a:normAutofit lnSpcReduction="10000"/>
-          </a:bodyPr>
-          <a:lstStyle/>
-          <a:p>
-            <a:pPr marL="0" indent="0" algn="l">
-              <a:buNone/>
-            </a:pPr>
-            <a:r>
-              <a:rPr lang="en-US" sz="1875" b="1" dirty="0">
-                <a:solidFill>
-                  <a:srgbClr val="063D22"/>
-                </a:solidFill>
-                <a:latin typeface="Arial" pitchFamily="34" charset="0"/>
-                <a:ea typeface="Arial" pitchFamily="34" charset="-122"/>
-                <a:cs typeface="Arial" pitchFamily="34" charset="-120"/>
-              </a:rPr>
-              <a:t>Approach</a:t>
-            </a:r>
-            <a:endParaRPr lang="en-US" sz="1875" dirty="0"/>
-          </a:p>
-        </p:txBody>
-      </p:sp>
-      <p:sp>
-        <p:nvSpPr>
-          <p:cNvPr id="10" name="Shape 8"/>
-          <p:cNvSpPr/>
-          <p:nvPr/>
-        </p:nvSpPr>
-        <p:spPr>
-          <a:xfrm>
-            <a:off x="7427863" y="4593729"/>
-            <a:ext cx="1164357" cy="19050"/>
-          </a:xfrm>
-          <a:prstGeom prst="rect">
-            <a:avLst/>
-          </a:prstGeom>
-          <a:solidFill>
-            <a:srgbClr val="1A7A57"/>
-          </a:solidFill>
-          <a:ln/>
-        </p:spPr>
-        <p:txBody>
-          <a:bodyPr/>
-          <a:lstStyle/>
-          <a:p>
-            <a:endParaRPr/>
-          </a:p>
-        </p:txBody>
-      </p:sp>
-      <p:sp>
-        <p:nvSpPr>
-          <p:cNvPr id="11" name="Text 9"/>
-          <p:cNvSpPr/>
-          <p:nvPr/>
-        </p:nvSpPr>
-        <p:spPr>
-          <a:xfrm>
-            <a:off x="7465963" y="4222254"/>
-            <a:ext cx="1011957" cy="314325"/>
-          </a:xfrm>
-          <a:prstGeom prst="rect">
-            <a:avLst/>
-          </a:prstGeom>
-          <a:noFill/>
-          <a:ln/>
-        </p:spPr>
-        <p:txBody>
-          <a:bodyPr wrap="square" lIns="25400" tIns="25400" rIns="25400" bIns="25400" rtlCol="0" anchor="ctr">
-            <a:normAutofit lnSpcReduction="10000"/>
-          </a:bodyPr>
-          <a:lstStyle/>
-          <a:p>
-            <a:pPr marL="0" indent="0" algn="r">
-              <a:buNone/>
-            </a:pPr>
-            <a:r>
-              <a:rPr lang="en-US" sz="1875" b="1" dirty="0">
-                <a:solidFill>
-                  <a:srgbClr val="063D22"/>
-                </a:solidFill>
-                <a:latin typeface="Arial" pitchFamily="34" charset="0"/>
-                <a:ea typeface="Arial" pitchFamily="34" charset="-122"/>
-                <a:cs typeface="Arial" pitchFamily="34" charset="-120"/>
-              </a:rPr>
-              <a:t>OOF</a:t>
-            </a:r>
-            <a:endParaRPr lang="en-US" sz="1875" dirty="0"/>
-          </a:p>
-        </p:txBody>
-      </p:sp>
-      <p:sp>
-        <p:nvSpPr>
-          <p:cNvPr id="12" name="Shape 10"/>
-          <p:cNvSpPr/>
-          <p:nvPr/>
-        </p:nvSpPr>
-        <p:spPr>
-          <a:xfrm>
-            <a:off x="8592220" y="4593729"/>
-            <a:ext cx="1394520" cy="19050"/>
-          </a:xfrm>
-          <a:prstGeom prst="rect">
-            <a:avLst/>
-          </a:prstGeom>
-          <a:solidFill>
-            <a:srgbClr val="1A7A57"/>
-          </a:solidFill>
-          <a:ln/>
-        </p:spPr>
-        <p:txBody>
-          <a:bodyPr/>
-          <a:lstStyle/>
-          <a:p>
-            <a:endParaRPr/>
-          </a:p>
-        </p:txBody>
-      </p:sp>
-      <p:sp>
-        <p:nvSpPr>
-          <p:cNvPr id="13" name="Text 11"/>
-          <p:cNvSpPr/>
-          <p:nvPr/>
-        </p:nvSpPr>
-        <p:spPr>
-          <a:xfrm>
-            <a:off x="8630320" y="4222254"/>
-            <a:ext cx="1242120" cy="314325"/>
-          </a:xfrm>
-          <a:prstGeom prst="rect">
-            <a:avLst/>
-          </a:prstGeom>
-          <a:noFill/>
-          <a:ln/>
-        </p:spPr>
-        <p:txBody>
-          <a:bodyPr wrap="square" lIns="25400" tIns="25400" rIns="25400" bIns="25400" rtlCol="0" anchor="ctr">
-            <a:normAutofit lnSpcReduction="10000"/>
-          </a:bodyPr>
-          <a:lstStyle/>
-          <a:p>
-            <a:pPr marL="0" indent="0" algn="r">
-              <a:buNone/>
-            </a:pPr>
-            <a:r>
-              <a:rPr lang="en-US" sz="1875" b="1" dirty="0">
-                <a:solidFill>
-                  <a:srgbClr val="063D22"/>
-                </a:solidFill>
-                <a:latin typeface="Arial" pitchFamily="34" charset="0"/>
-                <a:ea typeface="Arial" pitchFamily="34" charset="-122"/>
-                <a:cs typeface="Arial" pitchFamily="34" charset="-120"/>
-              </a:rPr>
-              <a:t>Public LB</a:t>
-            </a:r>
-            <a:endParaRPr lang="en-US" sz="1875" dirty="0"/>
-          </a:p>
-        </p:txBody>
-      </p:sp>
-      <p:sp>
-        <p:nvSpPr>
-          <p:cNvPr id="14" name="Shape 12"/>
-          <p:cNvSpPr/>
-          <p:nvPr/>
-        </p:nvSpPr>
-        <p:spPr>
-          <a:xfrm>
-            <a:off x="9986739" y="4593729"/>
-            <a:ext cx="1011287" cy="19050"/>
-          </a:xfrm>
-          <a:prstGeom prst="rect">
-            <a:avLst/>
-          </a:prstGeom>
-          <a:solidFill>
-            <a:srgbClr val="1A7A57"/>
-          </a:solidFill>
-          <a:ln/>
-        </p:spPr>
-        <p:txBody>
-          <a:bodyPr/>
-          <a:lstStyle/>
-          <a:p>
-            <a:endParaRPr/>
-          </a:p>
-        </p:txBody>
-      </p:sp>
-      <p:sp>
-        <p:nvSpPr>
-          <p:cNvPr id="15" name="Text 13"/>
-          <p:cNvSpPr/>
-          <p:nvPr/>
-        </p:nvSpPr>
-        <p:spPr>
-          <a:xfrm>
-            <a:off x="10024839" y="4222254"/>
-            <a:ext cx="858887" cy="314325"/>
-          </a:xfrm>
-          <a:prstGeom prst="rect">
-            <a:avLst/>
-          </a:prstGeom>
-          <a:noFill/>
-          <a:ln/>
-        </p:spPr>
-        <p:txBody>
-          <a:bodyPr wrap="square" lIns="25400" tIns="25400" rIns="25400" bIns="25400" rtlCol="0" anchor="ctr">
-            <a:normAutofit lnSpcReduction="10000"/>
-          </a:bodyPr>
-          <a:lstStyle/>
-          <a:p>
-            <a:pPr marL="0" indent="0" algn="r">
-              <a:buNone/>
-            </a:pPr>
-            <a:r>
-              <a:rPr lang="en-US" sz="1875" b="1" dirty="0">
-                <a:solidFill>
-                  <a:srgbClr val="063D22"/>
-                </a:solidFill>
-                <a:latin typeface="Arial" pitchFamily="34" charset="0"/>
-                <a:ea typeface="Arial" pitchFamily="34" charset="-122"/>
-                <a:cs typeface="Arial" pitchFamily="34" charset="-120"/>
-              </a:rPr>
-              <a:t>Appr.</a:t>
-            </a:r>
-            <a:endParaRPr lang="en-US" sz="1875" dirty="0"/>
-          </a:p>
-        </p:txBody>
-      </p:sp>
-      <p:sp>
-        <p:nvSpPr>
-          <p:cNvPr id="16" name="Shape 14"/>
-          <p:cNvSpPr/>
-          <p:nvPr/>
-        </p:nvSpPr>
-        <p:spPr>
-          <a:xfrm>
-            <a:off x="952500" y="5103316"/>
-            <a:ext cx="704627" cy="9525"/>
-          </a:xfrm>
-          <a:prstGeom prst="rect">
-            <a:avLst/>
-          </a:prstGeom>
-          <a:solidFill>
-            <a:srgbClr val="D2E6DD"/>
-          </a:solidFill>
-          <a:ln/>
-        </p:spPr>
-        <p:txBody>
-          <a:bodyPr/>
-          <a:lstStyle/>
-          <a:p>
-            <a:endParaRPr/>
-          </a:p>
-        </p:txBody>
-      </p:sp>
-      <p:sp>
-        <p:nvSpPr>
-          <p:cNvPr id="17" name="Text 15"/>
-          <p:cNvSpPr/>
-          <p:nvPr/>
-        </p:nvSpPr>
-        <p:spPr>
-          <a:xfrm>
-            <a:off x="1066800" y="4717554"/>
-            <a:ext cx="552227" cy="319088"/>
-          </a:xfrm>
-          <a:prstGeom prst="rect">
-            <a:avLst/>
-          </a:prstGeom>
-          <a:noFill/>
-          <a:ln/>
-        </p:spPr>
-        <p:txBody>
-          <a:bodyPr wrap="square" lIns="25400" tIns="25400" rIns="25400" bIns="25400" rtlCol="0" anchor="ctr">
-            <a:normAutofit lnSpcReduction="10000"/>
-          </a:bodyPr>
-          <a:lstStyle/>
-          <a:p>
-            <a:pPr marL="0" indent="0" algn="l">
-              <a:buNone/>
-            </a:pPr>
-            <a:r>
-              <a:rPr lang="en-US" sz="1875" dirty="0">
-                <a:solidFill>
-                  <a:srgbClr val="244236"/>
-                </a:solidFill>
-                <a:latin typeface="Courier New" pitchFamily="34" charset="0"/>
-                <a:ea typeface="Courier New" pitchFamily="34" charset="-122"/>
-                <a:cs typeface="Courier New" pitchFamily="34" charset="-120"/>
-              </a:rPr>
-              <a:t>v1</a:t>
-            </a:r>
-            <a:endParaRPr lang="en-US" sz="1875" dirty="0"/>
-          </a:p>
-        </p:txBody>
-      </p:sp>
-      <p:sp>
-        <p:nvSpPr>
-          <p:cNvPr id="18" name="Shape 16"/>
-          <p:cNvSpPr/>
-          <p:nvPr/>
-        </p:nvSpPr>
-        <p:spPr>
-          <a:xfrm>
-            <a:off x="1657127" y="5103316"/>
-            <a:ext cx="5770736" cy="9525"/>
-          </a:xfrm>
-          <a:prstGeom prst="rect">
-            <a:avLst/>
-          </a:prstGeom>
-          <a:solidFill>
-            <a:srgbClr val="D2E6DD"/>
-          </a:solidFill>
-          <a:ln/>
-        </p:spPr>
-        <p:txBody>
-          <a:bodyPr/>
-          <a:lstStyle/>
-          <a:p>
-            <a:endParaRPr/>
-          </a:p>
-        </p:txBody>
-      </p:sp>
-      <p:sp>
-        <p:nvSpPr>
-          <p:cNvPr id="19" name="Text 17"/>
-          <p:cNvSpPr/>
-          <p:nvPr/>
-        </p:nvSpPr>
-        <p:spPr>
-          <a:xfrm>
-            <a:off x="1771427" y="4717554"/>
-            <a:ext cx="5715258" cy="319088"/>
-          </a:xfrm>
-          <a:prstGeom prst="rect">
-            <a:avLst/>
-          </a:prstGeom>
-          <a:noFill/>
-          <a:ln/>
-        </p:spPr>
-        <p:txBody>
-          <a:bodyPr wrap="square" lIns="25400" tIns="25400" rIns="25400" bIns="25400" rtlCol="0" anchor="ctr">
-            <a:normAutofit lnSpcReduction="10000"/>
-          </a:bodyPr>
-          <a:lstStyle/>
-          <a:p>
-            <a:pPr marL="0" indent="0" algn="l">
-              <a:buNone/>
-            </a:pPr>
-            <a:r>
-              <a:rPr lang="en-US" sz="1875" dirty="0">
-                <a:solidFill>
-                  <a:srgbClr val="244236"/>
-                </a:solidFill>
-                <a:latin typeface="Arial" pitchFamily="34" charset="0"/>
-                <a:ea typeface="Arial" pitchFamily="34" charset="-122"/>
-                <a:cs typeface="Arial" pitchFamily="34" charset="-120"/>
-              </a:rPr>
-              <a:t>Single LightGBM</a:t>
-            </a:r>
-            <a:endParaRPr lang="en-US" sz="1875" dirty="0"/>
-          </a:p>
-        </p:txBody>
-      </p:sp>
-      <p:sp>
-        <p:nvSpPr>
-          <p:cNvPr id="20" name="Shape 18"/>
-          <p:cNvSpPr/>
-          <p:nvPr/>
-        </p:nvSpPr>
-        <p:spPr>
-          <a:xfrm>
-            <a:off x="7427863" y="5103316"/>
-            <a:ext cx="1164357" cy="9525"/>
-          </a:xfrm>
-          <a:prstGeom prst="rect">
-            <a:avLst/>
-          </a:prstGeom>
-          <a:solidFill>
-            <a:srgbClr val="D2E6DD"/>
-          </a:solidFill>
-          <a:ln/>
-        </p:spPr>
-        <p:txBody>
-          <a:bodyPr/>
-          <a:lstStyle/>
-          <a:p>
-            <a:endParaRPr/>
-          </a:p>
-        </p:txBody>
-      </p:sp>
-      <p:sp>
-        <p:nvSpPr>
-          <p:cNvPr id="21" name="Text 19"/>
-          <p:cNvSpPr/>
-          <p:nvPr/>
-        </p:nvSpPr>
-        <p:spPr>
-          <a:xfrm>
-            <a:off x="7465963" y="4717554"/>
-            <a:ext cx="1011957" cy="319088"/>
-          </a:xfrm>
-          <a:prstGeom prst="rect">
-            <a:avLst/>
-          </a:prstGeom>
-          <a:noFill/>
-          <a:ln/>
-        </p:spPr>
-        <p:txBody>
-          <a:bodyPr wrap="square" lIns="25400" tIns="25400" rIns="25400" bIns="25400" rtlCol="0" anchor="ctr">
-            <a:normAutofit lnSpcReduction="10000"/>
-          </a:bodyPr>
-          <a:lstStyle/>
-          <a:p>
-            <a:pPr marL="0" indent="0" algn="r">
-              <a:buNone/>
-            </a:pPr>
-            <a:r>
-              <a:rPr lang="en-US" sz="1875" dirty="0">
-                <a:solidFill>
-                  <a:srgbClr val="244236"/>
-                </a:solidFill>
-                <a:latin typeface="Courier New" pitchFamily="34" charset="0"/>
-                <a:ea typeface="Courier New" pitchFamily="34" charset="-122"/>
-                <a:cs typeface="Courier New" pitchFamily="34" charset="-120"/>
-              </a:rPr>
-              <a:t>0.8525</a:t>
-            </a:r>
-            <a:endParaRPr lang="en-US" sz="1875" dirty="0"/>
-          </a:p>
-        </p:txBody>
-      </p:sp>
-      <p:sp>
-        <p:nvSpPr>
-          <p:cNvPr id="22" name="Shape 20"/>
-          <p:cNvSpPr/>
-          <p:nvPr/>
-        </p:nvSpPr>
-        <p:spPr>
-          <a:xfrm>
-            <a:off x="8592220" y="5103316"/>
-            <a:ext cx="1394520" cy="9525"/>
-          </a:xfrm>
-          <a:prstGeom prst="rect">
-            <a:avLst/>
-          </a:prstGeom>
-          <a:solidFill>
-            <a:srgbClr val="D2E6DD"/>
-          </a:solidFill>
-          <a:ln/>
-        </p:spPr>
-        <p:txBody>
-          <a:bodyPr/>
-          <a:lstStyle/>
-          <a:p>
-            <a:endParaRPr/>
-          </a:p>
-        </p:txBody>
-      </p:sp>
-      <p:sp>
-        <p:nvSpPr>
-          <p:cNvPr id="23" name="Text 21"/>
-          <p:cNvSpPr/>
-          <p:nvPr/>
-        </p:nvSpPr>
-        <p:spPr>
-          <a:xfrm>
-            <a:off x="8630320" y="4717554"/>
-            <a:ext cx="1242120" cy="319088"/>
-          </a:xfrm>
-          <a:prstGeom prst="rect">
-            <a:avLst/>
-          </a:prstGeom>
-          <a:noFill/>
-          <a:ln/>
-        </p:spPr>
-        <p:txBody>
-          <a:bodyPr wrap="square" lIns="25400" tIns="25400" rIns="25400" bIns="25400" rtlCol="0" anchor="ctr">
-            <a:normAutofit lnSpcReduction="10000"/>
-          </a:bodyPr>
-          <a:lstStyle/>
-          <a:p>
-            <a:pPr marL="0" indent="0" algn="r">
-              <a:buNone/>
-            </a:pPr>
-            <a:r>
-              <a:rPr lang="en-US" sz="1875" dirty="0">
-                <a:solidFill>
-                  <a:srgbClr val="244236"/>
-                </a:solidFill>
-                <a:latin typeface="Courier New" pitchFamily="34" charset="0"/>
-                <a:ea typeface="Courier New" pitchFamily="34" charset="-122"/>
-                <a:cs typeface="Courier New" pitchFamily="34" charset="-120"/>
-              </a:rPr>
-              <a:t>0.8515</a:t>
-            </a:r>
-            <a:endParaRPr lang="en-US" sz="1875" dirty="0"/>
-          </a:p>
-        </p:txBody>
-      </p:sp>
-      <p:sp>
-        <p:nvSpPr>
-          <p:cNvPr id="24" name="Shape 22"/>
-          <p:cNvSpPr/>
-          <p:nvPr/>
-        </p:nvSpPr>
-        <p:spPr>
-          <a:xfrm>
-            <a:off x="9986739" y="5103316"/>
-            <a:ext cx="1011287" cy="9525"/>
-          </a:xfrm>
-          <a:prstGeom prst="rect">
-            <a:avLst/>
-          </a:prstGeom>
-          <a:solidFill>
-            <a:srgbClr val="D2E6DD"/>
-          </a:solidFill>
-          <a:ln/>
-        </p:spPr>
-        <p:txBody>
-          <a:bodyPr/>
-          <a:lstStyle/>
-          <a:p>
-            <a:endParaRPr/>
-          </a:p>
-        </p:txBody>
-      </p:sp>
-      <p:sp>
-        <p:nvSpPr>
-          <p:cNvPr id="25" name="Text 23"/>
-          <p:cNvSpPr/>
-          <p:nvPr/>
-        </p:nvSpPr>
-        <p:spPr>
-          <a:xfrm>
-            <a:off x="10024839" y="4717554"/>
-            <a:ext cx="858887" cy="319088"/>
-          </a:xfrm>
-          <a:prstGeom prst="rect">
-            <a:avLst/>
-          </a:prstGeom>
-          <a:noFill/>
-          <a:ln/>
-        </p:spPr>
-        <p:txBody>
-          <a:bodyPr wrap="square" lIns="25400" tIns="25400" rIns="25400" bIns="25400" rtlCol="0" anchor="ctr">
-            <a:normAutofit lnSpcReduction="10000"/>
-          </a:bodyPr>
-          <a:lstStyle/>
-          <a:p>
-            <a:pPr marL="0" indent="0" algn="r">
-              <a:buNone/>
-            </a:pPr>
-            <a:r>
-              <a:rPr lang="en-US" sz="1875" dirty="0">
-                <a:solidFill>
-                  <a:srgbClr val="5C7268"/>
-                </a:solidFill>
-                <a:latin typeface="Courier New" pitchFamily="34" charset="0"/>
-                <a:ea typeface="Courier New" pitchFamily="34" charset="-122"/>
-                <a:cs typeface="Courier New" pitchFamily="34" charset="-120"/>
-              </a:rPr>
-              <a:t>0.506</a:t>
-            </a:r>
-            <a:endParaRPr lang="en-US" sz="1875" dirty="0"/>
-          </a:p>
-        </p:txBody>
-      </p:sp>
-      <p:sp>
-        <p:nvSpPr>
-          <p:cNvPr id="26" name="Shape 24"/>
-          <p:cNvSpPr/>
-          <p:nvPr/>
-        </p:nvSpPr>
-        <p:spPr>
-          <a:xfrm>
-            <a:off x="952500" y="5112841"/>
-            <a:ext cx="10045526" cy="528638"/>
-          </a:xfrm>
-          <a:prstGeom prst="rect">
-            <a:avLst/>
-          </a:prstGeom>
-          <a:solidFill>
-            <a:srgbClr val="E6F5EF"/>
-          </a:solidFill>
-          <a:ln/>
-        </p:spPr>
-        <p:txBody>
-          <a:bodyPr/>
-          <a:lstStyle/>
-          <a:p>
-            <a:endParaRPr/>
-          </a:p>
-        </p:txBody>
-      </p:sp>
-      <p:sp>
-        <p:nvSpPr>
-          <p:cNvPr id="27" name="Shape 25"/>
-          <p:cNvSpPr/>
-          <p:nvPr/>
-        </p:nvSpPr>
-        <p:spPr>
-          <a:xfrm>
-            <a:off x="952500" y="5631954"/>
-            <a:ext cx="704627" cy="9525"/>
-          </a:xfrm>
-          <a:prstGeom prst="rect">
-            <a:avLst/>
-          </a:prstGeom>
-          <a:solidFill>
-            <a:srgbClr val="D2E6DD"/>
-          </a:solidFill>
-          <a:ln/>
-        </p:spPr>
-        <p:txBody>
-          <a:bodyPr/>
-          <a:lstStyle/>
-          <a:p>
-            <a:endParaRPr/>
-          </a:p>
-        </p:txBody>
-      </p:sp>
-      <p:sp>
-        <p:nvSpPr>
-          <p:cNvPr id="28" name="Text 26"/>
-          <p:cNvSpPr/>
-          <p:nvPr/>
-        </p:nvSpPr>
-        <p:spPr>
-          <a:xfrm>
-            <a:off x="1066800" y="5217616"/>
-            <a:ext cx="552227" cy="347663"/>
-          </a:xfrm>
-          <a:prstGeom prst="rect">
-            <a:avLst/>
-          </a:prstGeom>
-          <a:noFill/>
-          <a:ln/>
-        </p:spPr>
-        <p:txBody>
-          <a:bodyPr wrap="square" lIns="25400" tIns="25400" rIns="25400" bIns="25400" rtlCol="0" anchor="ctr">
-            <a:normAutofit/>
-          </a:bodyPr>
-          <a:lstStyle/>
-          <a:p>
-            <a:pPr marL="0" indent="0" algn="l">
-              <a:buNone/>
-            </a:pPr>
-            <a:r>
-              <a:rPr lang="en-US" sz="1875" b="1" dirty="0">
-                <a:solidFill>
-                  <a:srgbClr val="063D22"/>
-                </a:solidFill>
-                <a:latin typeface="Courier New" pitchFamily="34" charset="0"/>
-                <a:ea typeface="Courier New" pitchFamily="34" charset="-122"/>
-                <a:cs typeface="Courier New" pitchFamily="34" charset="-120"/>
-              </a:rPr>
-              <a:t>v6</a:t>
-            </a:r>
-            <a:endParaRPr lang="en-US" sz="1875" dirty="0"/>
-          </a:p>
-        </p:txBody>
-      </p:sp>
-      <p:sp>
-        <p:nvSpPr>
-          <p:cNvPr id="29" name="Shape 27"/>
-          <p:cNvSpPr/>
-          <p:nvPr/>
-        </p:nvSpPr>
-        <p:spPr>
-          <a:xfrm>
-            <a:off x="1657127" y="5631954"/>
-            <a:ext cx="5770736" cy="9525"/>
-          </a:xfrm>
-          <a:prstGeom prst="rect">
-            <a:avLst/>
-          </a:prstGeom>
-          <a:solidFill>
-            <a:srgbClr val="D2E6DD"/>
-          </a:solidFill>
-          <a:ln/>
-        </p:spPr>
-        <p:txBody>
-          <a:bodyPr/>
-          <a:lstStyle/>
-          <a:p>
-            <a:endParaRPr/>
-          </a:p>
-        </p:txBody>
-      </p:sp>
-      <p:sp>
-        <p:nvSpPr>
-          <p:cNvPr id="30" name="Text 28"/>
-          <p:cNvSpPr/>
-          <p:nvPr/>
-        </p:nvSpPr>
-        <p:spPr>
-          <a:xfrm>
-            <a:off x="1771427" y="5217616"/>
-            <a:ext cx="5715258" cy="347663"/>
-          </a:xfrm>
-          <a:prstGeom prst="rect">
-            <a:avLst/>
-          </a:prstGeom>
-          <a:noFill/>
-          <a:ln/>
-        </p:spPr>
-        <p:txBody>
-          <a:bodyPr wrap="square" lIns="25400" tIns="25400" rIns="25400" bIns="25400" rtlCol="0" anchor="ctr">
-            <a:normAutofit/>
-          </a:bodyPr>
-          <a:lstStyle/>
-          <a:p>
-            <a:pPr marL="0" indent="0" algn="l">
-              <a:buNone/>
-            </a:pPr>
-            <a:r>
-              <a:rPr lang="en-US" sz="1875" b="1" dirty="0">
-                <a:solidFill>
-                  <a:srgbClr val="244236"/>
-                </a:solidFill>
-                <a:latin typeface="Arial" pitchFamily="34" charset="0"/>
-                <a:ea typeface="Arial" pitchFamily="34" charset="-122"/>
-                <a:cs typeface="Arial" pitchFamily="34" charset="-120"/>
-              </a:rPr>
-              <a:t>9× CatBoost blend</a:t>
-            </a:r>
-            <a:endParaRPr lang="en-US" sz="1875" dirty="0"/>
-          </a:p>
-        </p:txBody>
-      </p:sp>
-      <p:sp>
-        <p:nvSpPr>
-          <p:cNvPr id="31" name="Shape 29"/>
-          <p:cNvSpPr/>
-          <p:nvPr/>
-        </p:nvSpPr>
-        <p:spPr>
-          <a:xfrm>
-            <a:off x="7427863" y="5631954"/>
-            <a:ext cx="1164357" cy="9525"/>
-          </a:xfrm>
-          <a:prstGeom prst="rect">
-            <a:avLst/>
-          </a:prstGeom>
-          <a:solidFill>
-            <a:srgbClr val="D2E6DD"/>
-          </a:solidFill>
-          <a:ln/>
-        </p:spPr>
-        <p:txBody>
-          <a:bodyPr/>
-          <a:lstStyle/>
-          <a:p>
-            <a:endParaRPr/>
-          </a:p>
-        </p:txBody>
-      </p:sp>
-      <p:sp>
-        <p:nvSpPr>
-          <p:cNvPr id="32" name="Text 30"/>
-          <p:cNvSpPr/>
-          <p:nvPr/>
-        </p:nvSpPr>
-        <p:spPr>
-          <a:xfrm>
-            <a:off x="7465963" y="5217616"/>
-            <a:ext cx="1011957" cy="347663"/>
-          </a:xfrm>
-          <a:prstGeom prst="rect">
-            <a:avLst/>
-          </a:prstGeom>
-          <a:noFill/>
-          <a:ln/>
-        </p:spPr>
-        <p:txBody>
-          <a:bodyPr wrap="square" lIns="25400" tIns="25400" rIns="25400" bIns="25400" rtlCol="0" anchor="ctr">
-            <a:normAutofit/>
-          </a:bodyPr>
-          <a:lstStyle/>
-          <a:p>
-            <a:pPr marL="0" indent="0" algn="r">
-              <a:buNone/>
-            </a:pPr>
-            <a:r>
-              <a:rPr lang="en-US" sz="1875" b="1" dirty="0">
-                <a:solidFill>
-                  <a:srgbClr val="244236"/>
-                </a:solidFill>
-                <a:latin typeface="Courier New" pitchFamily="34" charset="0"/>
-                <a:ea typeface="Courier New" pitchFamily="34" charset="-122"/>
-                <a:cs typeface="Courier New" pitchFamily="34" charset="-120"/>
-              </a:rPr>
-              <a:t>0.8615</a:t>
-            </a:r>
-            <a:endParaRPr lang="en-US" sz="1875" dirty="0"/>
-          </a:p>
-        </p:txBody>
-      </p:sp>
-      <p:sp>
-        <p:nvSpPr>
-          <p:cNvPr id="33" name="Shape 31"/>
-          <p:cNvSpPr/>
-          <p:nvPr/>
-        </p:nvSpPr>
-        <p:spPr>
-          <a:xfrm>
-            <a:off x="8592220" y="5631954"/>
-            <a:ext cx="1394520" cy="9525"/>
-          </a:xfrm>
-          <a:prstGeom prst="rect">
-            <a:avLst/>
-          </a:prstGeom>
-          <a:solidFill>
-            <a:srgbClr val="D2E6DD"/>
-          </a:solidFill>
-          <a:ln/>
-        </p:spPr>
-        <p:txBody>
-          <a:bodyPr/>
-          <a:lstStyle/>
-          <a:p>
-            <a:endParaRPr/>
-          </a:p>
-        </p:txBody>
-      </p:sp>
-      <p:sp>
-        <p:nvSpPr>
-          <p:cNvPr id="34" name="Text 32"/>
-          <p:cNvSpPr/>
-          <p:nvPr/>
-        </p:nvSpPr>
-        <p:spPr>
-          <a:xfrm>
-            <a:off x="8630320" y="5217616"/>
-            <a:ext cx="1242120" cy="347663"/>
-          </a:xfrm>
-          <a:prstGeom prst="rect">
-            <a:avLst/>
-          </a:prstGeom>
-          <a:noFill/>
-          <a:ln/>
-        </p:spPr>
-        <p:txBody>
-          <a:bodyPr wrap="square" lIns="25400" tIns="25400" rIns="25400" bIns="25400" rtlCol="0" anchor="ctr">
-            <a:normAutofit/>
-          </a:bodyPr>
-          <a:lstStyle/>
-          <a:p>
-            <a:pPr marL="0" indent="0" algn="r">
-              <a:buNone/>
-            </a:pPr>
-            <a:r>
-              <a:rPr lang="en-US" sz="1875" b="1" dirty="0">
-                <a:solidFill>
-                  <a:srgbClr val="1A7A57"/>
-                </a:solidFill>
-                <a:latin typeface="Courier New" pitchFamily="34" charset="0"/>
-                <a:ea typeface="Courier New" pitchFamily="34" charset="-122"/>
-                <a:cs typeface="Courier New" pitchFamily="34" charset="-120"/>
-              </a:rPr>
-              <a:t>0.8565</a:t>
-            </a:r>
-            <a:endParaRPr lang="en-US" sz="1875" dirty="0"/>
-          </a:p>
-        </p:txBody>
-      </p:sp>
-      <p:sp>
-        <p:nvSpPr>
-          <p:cNvPr id="35" name="Shape 33"/>
-          <p:cNvSpPr/>
-          <p:nvPr/>
-        </p:nvSpPr>
-        <p:spPr>
-          <a:xfrm>
-            <a:off x="9986739" y="5631954"/>
-            <a:ext cx="1011287" cy="9525"/>
-          </a:xfrm>
-          <a:prstGeom prst="rect">
-            <a:avLst/>
-          </a:prstGeom>
-          <a:solidFill>
-            <a:srgbClr val="D2E6DD"/>
-          </a:solidFill>
-          <a:ln/>
-        </p:spPr>
-        <p:txBody>
-          <a:bodyPr/>
-          <a:lstStyle/>
-          <a:p>
-            <a:endParaRPr/>
-          </a:p>
-        </p:txBody>
-      </p:sp>
-      <p:sp>
-        <p:nvSpPr>
-          <p:cNvPr id="36" name="Text 34"/>
-          <p:cNvSpPr/>
-          <p:nvPr/>
-        </p:nvSpPr>
-        <p:spPr>
-          <a:xfrm>
-            <a:off x="10024839" y="5217616"/>
-            <a:ext cx="858887" cy="347663"/>
-          </a:xfrm>
-          <a:prstGeom prst="rect">
-            <a:avLst/>
-          </a:prstGeom>
-          <a:noFill/>
-          <a:ln/>
-        </p:spPr>
-        <p:txBody>
-          <a:bodyPr wrap="square" lIns="25400" tIns="25400" rIns="25400" bIns="25400" rtlCol="0" anchor="ctr">
-            <a:normAutofit/>
-          </a:bodyPr>
-          <a:lstStyle/>
-          <a:p>
-            <a:pPr marL="0" indent="0" algn="r">
-              <a:buNone/>
-            </a:pPr>
-            <a:r>
-              <a:rPr lang="en-US" sz="1875" dirty="0">
-                <a:solidFill>
-                  <a:srgbClr val="5C7268"/>
-                </a:solidFill>
-                <a:latin typeface="Courier New" pitchFamily="34" charset="0"/>
-                <a:ea typeface="Courier New" pitchFamily="34" charset="-122"/>
-                <a:cs typeface="Courier New" pitchFamily="34" charset="-120"/>
-              </a:rPr>
-              <a:t>0.512</a:t>
-            </a:r>
-            <a:endParaRPr lang="en-US" sz="1875" dirty="0"/>
-          </a:p>
-        </p:txBody>
-      </p:sp>
-      <p:sp>
-        <p:nvSpPr>
-          <p:cNvPr id="37" name="Shape 35"/>
-          <p:cNvSpPr/>
-          <p:nvPr/>
-        </p:nvSpPr>
-        <p:spPr>
-          <a:xfrm>
-            <a:off x="952500" y="5641479"/>
-            <a:ext cx="10045526" cy="523875"/>
-          </a:xfrm>
-          <a:prstGeom prst="rect">
-            <a:avLst/>
-          </a:prstGeom>
-          <a:solidFill>
-            <a:srgbClr val="E6F5EF"/>
-          </a:solidFill>
-          <a:ln/>
-        </p:spPr>
-        <p:txBody>
-          <a:bodyPr/>
-          <a:lstStyle/>
-          <a:p>
-            <a:endParaRPr/>
-          </a:p>
-        </p:txBody>
-      </p:sp>
-      <p:sp>
-        <p:nvSpPr>
-          <p:cNvPr id="38" name="Text 36"/>
-          <p:cNvSpPr/>
-          <p:nvPr/>
-        </p:nvSpPr>
-        <p:spPr>
-          <a:xfrm>
-            <a:off x="1066800" y="5746254"/>
-            <a:ext cx="552227" cy="352425"/>
-          </a:xfrm>
-          <a:prstGeom prst="rect">
-            <a:avLst/>
-          </a:prstGeom>
-          <a:noFill/>
-          <a:ln/>
-        </p:spPr>
-        <p:txBody>
-          <a:bodyPr wrap="square" lIns="25400" tIns="25400" rIns="25400" bIns="25400" rtlCol="0" anchor="ctr">
-            <a:normAutofit/>
-          </a:bodyPr>
-          <a:lstStyle/>
-          <a:p>
-            <a:pPr marL="0" indent="0" algn="l">
-              <a:buNone/>
-            </a:pPr>
-            <a:r>
-              <a:rPr lang="en-US" sz="1875" b="1" dirty="0">
-                <a:solidFill>
-                  <a:srgbClr val="063D22"/>
-                </a:solidFill>
-                <a:latin typeface="Courier New" pitchFamily="34" charset="0"/>
-                <a:ea typeface="Courier New" pitchFamily="34" charset="-122"/>
-                <a:cs typeface="Courier New" pitchFamily="34" charset="-120"/>
-              </a:rPr>
-              <a:t>v10</a:t>
-            </a:r>
-            <a:endParaRPr lang="en-US" sz="1875" dirty="0"/>
-          </a:p>
-        </p:txBody>
-      </p:sp>
-      <p:sp>
-        <p:nvSpPr>
-          <p:cNvPr id="39" name="Text 37"/>
-          <p:cNvSpPr/>
-          <p:nvPr/>
-        </p:nvSpPr>
-        <p:spPr>
-          <a:xfrm>
-            <a:off x="1771427" y="5746254"/>
-            <a:ext cx="5715258" cy="352425"/>
-          </a:xfrm>
-          <a:prstGeom prst="rect">
-            <a:avLst/>
-          </a:prstGeom>
-          <a:noFill/>
-          <a:ln/>
-        </p:spPr>
-        <p:txBody>
-          <a:bodyPr wrap="square" lIns="25400" tIns="25400" rIns="25400" bIns="25400" rtlCol="0" anchor="ctr">
-            <a:normAutofit/>
-          </a:bodyPr>
-          <a:lstStyle/>
-          <a:p>
-            <a:pPr marL="0" indent="0" algn="l">
-              <a:buNone/>
-            </a:pPr>
-            <a:r>
-              <a:rPr lang="en-US" sz="1875" b="1" dirty="0">
-                <a:solidFill>
-                  <a:srgbClr val="244236"/>
-                </a:solidFill>
-                <a:latin typeface="Arial" pitchFamily="34" charset="0"/>
-                <a:ea typeface="Arial" pitchFamily="34" charset="-122"/>
-                <a:cs typeface="Arial" pitchFamily="34" charset="-120"/>
-              </a:rPr>
-              <a:t>Clean prep + pseudo-label + smooth threshold</a:t>
-            </a:r>
-            <a:endParaRPr lang="en-US" sz="1875" dirty="0"/>
-          </a:p>
-        </p:txBody>
-      </p:sp>
-      <p:sp>
-        <p:nvSpPr>
-          <p:cNvPr id="40" name="Text 38"/>
-          <p:cNvSpPr/>
-          <p:nvPr/>
-        </p:nvSpPr>
-        <p:spPr>
-          <a:xfrm>
-            <a:off x="7465963" y="5746254"/>
-            <a:ext cx="1011957" cy="352425"/>
-          </a:xfrm>
-          <a:prstGeom prst="rect">
-            <a:avLst/>
-          </a:prstGeom>
-          <a:noFill/>
-          <a:ln/>
-        </p:spPr>
-        <p:txBody>
-          <a:bodyPr wrap="square" lIns="25400" tIns="25400" rIns="25400" bIns="25400" rtlCol="0" anchor="ctr">
-            <a:normAutofit/>
-          </a:bodyPr>
-          <a:lstStyle/>
-          <a:p>
-            <a:pPr marL="0" indent="0" algn="r">
-              <a:buNone/>
-            </a:pPr>
-            <a:r>
-              <a:rPr lang="en-US" sz="1875" b="1" dirty="0">
-                <a:solidFill>
-                  <a:srgbClr val="244236"/>
-                </a:solidFill>
-                <a:latin typeface="Courier New" pitchFamily="34" charset="0"/>
-                <a:ea typeface="Courier New" pitchFamily="34" charset="-122"/>
-                <a:cs typeface="Courier New" pitchFamily="34" charset="-120"/>
-              </a:rPr>
-              <a:t>0.8590</a:t>
-            </a:r>
-            <a:endParaRPr lang="en-US" sz="1875" dirty="0"/>
-          </a:p>
-        </p:txBody>
-      </p:sp>
-      <p:sp>
-        <p:nvSpPr>
-          <p:cNvPr id="41" name="Text 39"/>
-          <p:cNvSpPr/>
-          <p:nvPr/>
-        </p:nvSpPr>
-        <p:spPr>
-          <a:xfrm>
-            <a:off x="8630320" y="5746254"/>
-            <a:ext cx="1242120" cy="352425"/>
-          </a:xfrm>
-          <a:prstGeom prst="rect">
-            <a:avLst/>
-          </a:prstGeom>
-          <a:noFill/>
-          <a:ln/>
-        </p:spPr>
-        <p:txBody>
-          <a:bodyPr wrap="square" lIns="25400" tIns="25400" rIns="25400" bIns="25400" rtlCol="0" anchor="ctr">
-            <a:normAutofit/>
-          </a:bodyPr>
-          <a:lstStyle/>
-          <a:p>
-            <a:pPr marL="0" indent="0" algn="r">
-              <a:buNone/>
-            </a:pPr>
-            <a:r>
-              <a:rPr lang="en-US" sz="1875" b="1" dirty="0">
-                <a:solidFill>
-                  <a:srgbClr val="244236"/>
-                </a:solidFill>
-                <a:latin typeface="Courier New" pitchFamily="34" charset="0"/>
-                <a:ea typeface="Courier New" pitchFamily="34" charset="-122"/>
-                <a:cs typeface="Courier New" pitchFamily="34" charset="-120"/>
-              </a:rPr>
-              <a:t>0.8535</a:t>
-            </a:r>
-            <a:endParaRPr lang="en-US" sz="1875" dirty="0"/>
-          </a:p>
-        </p:txBody>
-      </p:sp>
-      <p:sp>
-        <p:nvSpPr>
-          <p:cNvPr id="42" name="Text 40"/>
-          <p:cNvSpPr/>
-          <p:nvPr/>
-        </p:nvSpPr>
-        <p:spPr>
-          <a:xfrm>
-            <a:off x="10024839" y="5746254"/>
-            <a:ext cx="858887" cy="352425"/>
-          </a:xfrm>
-          <a:prstGeom prst="rect">
-            <a:avLst/>
-          </a:prstGeom>
-          <a:noFill/>
-          <a:ln/>
-        </p:spPr>
-        <p:txBody>
-          <a:bodyPr wrap="square" lIns="25400" tIns="25400" rIns="25400" bIns="25400" rtlCol="0" anchor="ctr">
-            <a:normAutofit/>
-          </a:bodyPr>
-          <a:lstStyle/>
-          <a:p>
-            <a:pPr marL="0" indent="0" algn="r">
-              <a:buNone/>
-            </a:pPr>
-            <a:r>
-              <a:rPr lang="en-US" sz="1875" dirty="0">
-                <a:solidFill>
-                  <a:srgbClr val="5C7268"/>
-                </a:solidFill>
-                <a:latin typeface="Courier New" pitchFamily="34" charset="0"/>
-                <a:ea typeface="Courier New" pitchFamily="34" charset="-122"/>
-                <a:cs typeface="Courier New" pitchFamily="34" charset="-120"/>
-              </a:rPr>
-              <a:t>0.509</a:t>
-            </a:r>
-            <a:endParaRPr lang="en-US" sz="1875" dirty="0"/>
-          </a:p>
-        </p:txBody>
-      </p:sp>
-      <p:sp>
-        <p:nvSpPr>
-          <p:cNvPr id="43" name="Text 41"/>
-          <p:cNvSpPr/>
-          <p:nvPr/>
-        </p:nvSpPr>
-        <p:spPr>
-          <a:xfrm>
-            <a:off x="952500" y="6374904"/>
-            <a:ext cx="11050079" cy="295275"/>
-          </a:xfrm>
-          <a:prstGeom prst="rect">
-            <a:avLst/>
-          </a:prstGeom>
-          <a:noFill/>
-          <a:ln/>
-        </p:spPr>
-        <p:txBody>
-          <a:bodyPr wrap="square" lIns="25400" tIns="25400" rIns="25400" bIns="25400" rtlCol="0" anchor="t">
-            <a:normAutofit fontScale="92500" lnSpcReduction="10000"/>
-          </a:bodyPr>
-          <a:lstStyle/>
-          <a:p>
-            <a:pPr marL="0" indent="0" algn="l">
-              <a:buNone/>
-            </a:pPr>
-            <a:r>
-              <a:rPr lang="en-US" sz="1800" dirty="0">
-                <a:solidFill>
-                  <a:srgbClr val="5C7268"/>
-                </a:solidFill>
-                <a:latin typeface="Courier New" pitchFamily="34" charset="0"/>
-                <a:ea typeface="Courier New" pitchFamily="34" charset="-122"/>
-                <a:cs typeface="Courier New" pitchFamily="34" charset="-120"/>
-              </a:rPr>
-              <a:t>Model family ladder · 5-fold accuracy</a:t>
-            </a:r>
-            <a:endParaRPr lang="en-US" sz="1800" dirty="0"/>
-          </a:p>
-        </p:txBody>
-      </p:sp>
-      <p:sp>
-        <p:nvSpPr>
-          <p:cNvPr id="44" name="Text 42"/>
-          <p:cNvSpPr/>
-          <p:nvPr/>
-        </p:nvSpPr>
-        <p:spPr>
-          <a:xfrm>
-            <a:off x="952500" y="6746379"/>
-            <a:ext cx="1173659" cy="295275"/>
-          </a:xfrm>
-          <a:prstGeom prst="rect">
-            <a:avLst/>
-          </a:prstGeom>
-          <a:noFill/>
-          <a:ln/>
-        </p:spPr>
-        <p:txBody>
-          <a:bodyPr wrap="square" lIns="25400" tIns="25400" rIns="25400" bIns="25400" rtlCol="0" anchor="t">
-            <a:normAutofit fontScale="92500" lnSpcReduction="10000"/>
-          </a:bodyPr>
-          <a:lstStyle/>
-          <a:p>
-            <a:pPr marL="0" indent="0" algn="l">
-              <a:buNone/>
-            </a:pPr>
-            <a:r>
-              <a:rPr lang="en-US" sz="1800" dirty="0">
-                <a:solidFill>
-                  <a:srgbClr val="5C7268"/>
-                </a:solidFill>
-                <a:latin typeface="Courier New" pitchFamily="34" charset="0"/>
-                <a:ea typeface="Courier New" pitchFamily="34" charset="-122"/>
-                <a:cs typeface="Courier New" pitchFamily="34" charset="-120"/>
-              </a:rPr>
-              <a:t>NB 0.760</a:t>
-            </a:r>
-            <a:endParaRPr lang="en-US" sz="1800" dirty="0"/>
-          </a:p>
-        </p:txBody>
-      </p:sp>
-      <p:sp>
-        <p:nvSpPr>
-          <p:cNvPr id="45" name="Text 43"/>
-          <p:cNvSpPr/>
-          <p:nvPr/>
-        </p:nvSpPr>
-        <p:spPr>
-          <a:xfrm>
-            <a:off x="2145209" y="6746379"/>
-            <a:ext cx="213420" cy="295275"/>
-          </a:xfrm>
-          <a:prstGeom prst="rect">
-            <a:avLst/>
-          </a:prstGeom>
-          <a:noFill/>
-          <a:ln/>
-        </p:spPr>
-        <p:txBody>
-          <a:bodyPr wrap="square" lIns="25400" tIns="25400" rIns="25400" bIns="25400" rtlCol="0" anchor="t">
-            <a:normAutofit fontScale="92500" lnSpcReduction="10000"/>
-          </a:bodyPr>
-          <a:lstStyle/>
-          <a:p>
-            <a:pPr marL="0" indent="0" algn="l">
-              <a:buNone/>
-            </a:pPr>
-            <a:r>
-              <a:rPr lang="en-US" sz="1800" dirty="0">
-                <a:solidFill>
-                  <a:srgbClr val="66B3A1"/>
-                </a:solidFill>
-                <a:latin typeface="Courier New" pitchFamily="34" charset="0"/>
-                <a:ea typeface="Courier New" pitchFamily="34" charset="-122"/>
-                <a:cs typeface="Courier New" pitchFamily="34" charset="-120"/>
-              </a:rPr>
-              <a:t>→</a:t>
-            </a:r>
-            <a:endParaRPr lang="en-US" sz="1800" dirty="0"/>
-          </a:p>
-        </p:txBody>
-      </p:sp>
-      <p:sp>
-        <p:nvSpPr>
-          <p:cNvPr id="46" name="Text 44"/>
-          <p:cNvSpPr/>
-          <p:nvPr/>
-        </p:nvSpPr>
-        <p:spPr>
-          <a:xfrm>
-            <a:off x="2377678" y="6746379"/>
-            <a:ext cx="1358146" cy="295275"/>
-          </a:xfrm>
-          <a:prstGeom prst="rect">
-            <a:avLst/>
-          </a:prstGeom>
-          <a:noFill/>
-          <a:ln/>
-        </p:spPr>
-        <p:txBody>
-          <a:bodyPr wrap="square" lIns="25400" tIns="25400" rIns="25400" bIns="25400" rtlCol="0" anchor="t">
-            <a:normAutofit fontScale="92500" lnSpcReduction="10000"/>
-          </a:bodyPr>
-          <a:lstStyle/>
-          <a:p>
-            <a:pPr marL="0" indent="0" algn="l">
-              <a:buNone/>
-            </a:pPr>
-            <a:r>
-              <a:rPr lang="en-US" sz="1800" dirty="0">
-                <a:solidFill>
-                  <a:srgbClr val="5C7268"/>
-                </a:solidFill>
-                <a:latin typeface="Courier New" pitchFamily="34" charset="0"/>
-                <a:ea typeface="Courier New" pitchFamily="34" charset="-122"/>
-                <a:cs typeface="Courier New" pitchFamily="34" charset="-120"/>
-              </a:rPr>
-              <a:t>LDA 0.777</a:t>
-            </a:r>
-            <a:endParaRPr lang="en-US" sz="1800" dirty="0"/>
-          </a:p>
-        </p:txBody>
-      </p:sp>
-      <p:sp>
-        <p:nvSpPr>
-          <p:cNvPr id="47" name="Text 45"/>
-          <p:cNvSpPr/>
-          <p:nvPr/>
-        </p:nvSpPr>
-        <p:spPr>
-          <a:xfrm>
-            <a:off x="3707606" y="6746379"/>
-            <a:ext cx="213420" cy="295275"/>
-          </a:xfrm>
-          <a:prstGeom prst="rect">
-            <a:avLst/>
-          </a:prstGeom>
-          <a:noFill/>
-          <a:ln/>
-        </p:spPr>
-        <p:txBody>
-          <a:bodyPr wrap="square" lIns="25400" tIns="25400" rIns="25400" bIns="25400" rtlCol="0" anchor="t">
-            <a:normAutofit fontScale="92500" lnSpcReduction="10000"/>
-          </a:bodyPr>
-          <a:lstStyle/>
-          <a:p>
-            <a:pPr marL="0" indent="0" algn="l">
-              <a:buNone/>
-            </a:pPr>
-            <a:r>
-              <a:rPr lang="en-US" sz="1800" dirty="0">
-                <a:solidFill>
-                  <a:srgbClr val="66B3A1"/>
-                </a:solidFill>
-                <a:latin typeface="Courier New" pitchFamily="34" charset="0"/>
-                <a:ea typeface="Courier New" pitchFamily="34" charset="-122"/>
-                <a:cs typeface="Courier New" pitchFamily="34" charset="-120"/>
-              </a:rPr>
-              <a:t>→</a:t>
-            </a:r>
-            <a:endParaRPr lang="en-US" sz="1800" dirty="0"/>
-          </a:p>
-        </p:txBody>
-      </p:sp>
-      <p:sp>
-        <p:nvSpPr>
-          <p:cNvPr id="48" name="Text 46"/>
-          <p:cNvSpPr/>
-          <p:nvPr/>
-        </p:nvSpPr>
-        <p:spPr>
-          <a:xfrm>
-            <a:off x="3940076" y="6746379"/>
-            <a:ext cx="1173659" cy="295275"/>
-          </a:xfrm>
-          <a:prstGeom prst="rect">
-            <a:avLst/>
-          </a:prstGeom>
-          <a:noFill/>
-          <a:ln/>
-        </p:spPr>
-        <p:txBody>
-          <a:bodyPr wrap="square" lIns="25400" tIns="25400" rIns="25400" bIns="25400" rtlCol="0" anchor="t">
-            <a:normAutofit fontScale="92500" lnSpcReduction="10000"/>
-          </a:bodyPr>
-          <a:lstStyle/>
-          <a:p>
-            <a:pPr marL="0" indent="0" algn="l">
-              <a:buNone/>
-            </a:pPr>
-            <a:r>
-              <a:rPr lang="en-US" sz="1800" dirty="0">
-                <a:solidFill>
-                  <a:srgbClr val="5C7268"/>
-                </a:solidFill>
-                <a:latin typeface="Courier New" pitchFamily="34" charset="0"/>
-                <a:ea typeface="Courier New" pitchFamily="34" charset="-122"/>
-                <a:cs typeface="Courier New" pitchFamily="34" charset="-120"/>
-              </a:rPr>
-              <a:t>LR 0.784</a:t>
-            </a:r>
-            <a:endParaRPr lang="en-US" sz="1800" dirty="0"/>
-          </a:p>
-        </p:txBody>
-      </p:sp>
-      <p:sp>
-        <p:nvSpPr>
-          <p:cNvPr id="49" name="Text 47"/>
-          <p:cNvSpPr/>
-          <p:nvPr/>
-        </p:nvSpPr>
-        <p:spPr>
-          <a:xfrm>
-            <a:off x="5132784" y="6746379"/>
-            <a:ext cx="213420" cy="295275"/>
-          </a:xfrm>
-          <a:prstGeom prst="rect">
-            <a:avLst/>
-          </a:prstGeom>
-          <a:noFill/>
-          <a:ln/>
-        </p:spPr>
-        <p:txBody>
-          <a:bodyPr wrap="square" lIns="25400" tIns="25400" rIns="25400" bIns="25400" rtlCol="0" anchor="t">
-            <a:normAutofit fontScale="92500" lnSpcReduction="10000"/>
-          </a:bodyPr>
-          <a:lstStyle/>
-          <a:p>
-            <a:pPr marL="0" indent="0" algn="l">
-              <a:buNone/>
-            </a:pPr>
-            <a:r>
-              <a:rPr lang="en-US" sz="1800" dirty="0">
-                <a:solidFill>
-                  <a:srgbClr val="66B3A1"/>
-                </a:solidFill>
-                <a:latin typeface="Courier New" pitchFamily="34" charset="0"/>
-                <a:ea typeface="Courier New" pitchFamily="34" charset="-122"/>
-                <a:cs typeface="Courier New" pitchFamily="34" charset="-120"/>
-              </a:rPr>
-              <a:t>→</a:t>
-            </a:r>
-            <a:endParaRPr lang="en-US" sz="1800" dirty="0"/>
-          </a:p>
-        </p:txBody>
-      </p:sp>
-      <p:sp>
-        <p:nvSpPr>
-          <p:cNvPr id="50" name="Text 48"/>
-          <p:cNvSpPr/>
-          <p:nvPr/>
-        </p:nvSpPr>
-        <p:spPr>
-          <a:xfrm>
-            <a:off x="5365254" y="6746379"/>
-            <a:ext cx="1173659" cy="295275"/>
-          </a:xfrm>
-          <a:prstGeom prst="rect">
-            <a:avLst/>
-          </a:prstGeom>
-          <a:noFill/>
-          <a:ln/>
-        </p:spPr>
-        <p:txBody>
-          <a:bodyPr wrap="square" lIns="25400" tIns="25400" rIns="25400" bIns="25400" rtlCol="0" anchor="t">
-            <a:normAutofit fontScale="92500" lnSpcReduction="10000"/>
-          </a:bodyPr>
-          <a:lstStyle/>
-          <a:p>
-            <a:pPr marL="0" indent="0" algn="l">
-              <a:buNone/>
-            </a:pPr>
-            <a:r>
-              <a:rPr lang="en-US" sz="1800" dirty="0">
-                <a:solidFill>
-                  <a:srgbClr val="244236"/>
-                </a:solidFill>
-                <a:latin typeface="Courier New" pitchFamily="34" charset="0"/>
-                <a:ea typeface="Courier New" pitchFamily="34" charset="-122"/>
-                <a:cs typeface="Courier New" pitchFamily="34" charset="-120"/>
-              </a:rPr>
-              <a:t>RF 0.833</a:t>
-            </a:r>
-            <a:endParaRPr lang="en-US" sz="1800" dirty="0"/>
-          </a:p>
-        </p:txBody>
-      </p:sp>
-      <p:sp>
-        <p:nvSpPr>
-          <p:cNvPr id="51" name="Text 49"/>
-          <p:cNvSpPr/>
-          <p:nvPr/>
-        </p:nvSpPr>
-        <p:spPr>
-          <a:xfrm>
-            <a:off x="6557963" y="6746379"/>
-            <a:ext cx="213420" cy="295275"/>
-          </a:xfrm>
-          <a:prstGeom prst="rect">
-            <a:avLst/>
-          </a:prstGeom>
-          <a:noFill/>
-          <a:ln/>
-        </p:spPr>
-        <p:txBody>
-          <a:bodyPr wrap="square" lIns="25400" tIns="25400" rIns="25400" bIns="25400" rtlCol="0" anchor="t">
-            <a:normAutofit fontScale="92500" lnSpcReduction="10000"/>
-          </a:bodyPr>
-          <a:lstStyle/>
-          <a:p>
-            <a:pPr marL="0" indent="0" algn="l">
-              <a:buNone/>
-            </a:pPr>
-            <a:r>
-              <a:rPr lang="en-US" sz="1800" dirty="0">
-                <a:solidFill>
-                  <a:srgbClr val="66B3A1"/>
-                </a:solidFill>
-                <a:latin typeface="Courier New" pitchFamily="34" charset="0"/>
-                <a:ea typeface="Courier New" pitchFamily="34" charset="-122"/>
-                <a:cs typeface="Courier New" pitchFamily="34" charset="-120"/>
-              </a:rPr>
-              <a:t>→</a:t>
-            </a:r>
-            <a:endParaRPr lang="en-US" sz="1800" dirty="0"/>
-          </a:p>
-        </p:txBody>
-      </p:sp>
-      <p:sp>
-        <p:nvSpPr>
-          <p:cNvPr id="52" name="Text 50"/>
-          <p:cNvSpPr/>
-          <p:nvPr/>
-        </p:nvSpPr>
-        <p:spPr>
-          <a:xfrm>
-            <a:off x="6790432" y="6727329"/>
-            <a:ext cx="2112280" cy="333375"/>
-          </a:xfrm>
-          <a:prstGeom prst="rect">
-            <a:avLst/>
-          </a:prstGeom>
-          <a:noFill/>
-          <a:ln/>
-        </p:spPr>
-        <p:txBody>
-          <a:bodyPr wrap="square" lIns="25400" tIns="25400" rIns="25400" bIns="25400" rtlCol="0" anchor="t">
-            <a:normAutofit/>
-          </a:bodyPr>
-          <a:lstStyle/>
-          <a:p>
-            <a:pPr marL="0" indent="0" algn="l">
-              <a:buNone/>
-            </a:pPr>
-            <a:r>
-              <a:rPr lang="en-US" sz="1800" b="1" dirty="0">
-                <a:solidFill>
-                  <a:srgbClr val="063D22"/>
-                </a:solidFill>
-                <a:latin typeface="Courier New" pitchFamily="34" charset="0"/>
-                <a:ea typeface="Courier New" pitchFamily="34" charset="-122"/>
-                <a:cs typeface="Courier New" pitchFamily="34" charset="-120"/>
-              </a:rPr>
-              <a:t>LightGBM 0.836</a:t>
-            </a:r>
-            <a:endParaRPr lang="en-US" sz="1800" dirty="0"/>
-          </a:p>
-        </p:txBody>
-      </p:sp>
-      <p:sp>
-        <p:nvSpPr>
-          <p:cNvPr id="53" name="Text 51"/>
-          <p:cNvSpPr/>
-          <p:nvPr/>
-        </p:nvSpPr>
-        <p:spPr>
-          <a:xfrm>
-            <a:off x="8805937" y="6746379"/>
-            <a:ext cx="213420" cy="295275"/>
-          </a:xfrm>
-          <a:prstGeom prst="rect">
-            <a:avLst/>
-          </a:prstGeom>
-          <a:noFill/>
-          <a:ln/>
-        </p:spPr>
-        <p:txBody>
-          <a:bodyPr wrap="square" lIns="25400" tIns="25400" rIns="25400" bIns="25400" rtlCol="0" anchor="t">
-            <a:normAutofit fontScale="92500" lnSpcReduction="10000"/>
-          </a:bodyPr>
-          <a:lstStyle/>
-          <a:p>
-            <a:pPr marL="0" indent="0" algn="l">
-              <a:buNone/>
-            </a:pPr>
-            <a:r>
-              <a:rPr lang="en-US" sz="1800" dirty="0">
-                <a:solidFill>
-                  <a:srgbClr val="66B3A1"/>
-                </a:solidFill>
-                <a:latin typeface="Courier New" pitchFamily="34" charset="0"/>
-                <a:ea typeface="Courier New" pitchFamily="34" charset="-122"/>
-                <a:cs typeface="Courier New" pitchFamily="34" charset="-120"/>
-              </a:rPr>
-              <a:t>→</a:t>
-            </a:r>
-            <a:endParaRPr lang="en-US" sz="1800" dirty="0"/>
-          </a:p>
-        </p:txBody>
-      </p:sp>
-      <p:sp>
-        <p:nvSpPr>
-          <p:cNvPr id="54" name="Text 52"/>
-          <p:cNvSpPr/>
-          <p:nvPr/>
-        </p:nvSpPr>
-        <p:spPr>
-          <a:xfrm>
-            <a:off x="9038406" y="6727329"/>
-            <a:ext cx="2112280" cy="333375"/>
-          </a:xfrm>
-          <a:prstGeom prst="rect">
-            <a:avLst/>
-          </a:prstGeom>
-          <a:noFill/>
-          <a:ln/>
-        </p:spPr>
-        <p:txBody>
-          <a:bodyPr wrap="square" lIns="25400" tIns="25400" rIns="25400" bIns="25400" rtlCol="0" anchor="t">
-            <a:normAutofit/>
-          </a:bodyPr>
-          <a:lstStyle/>
-          <a:p>
-            <a:pPr marL="0" indent="0" algn="l">
-              <a:buNone/>
-            </a:pPr>
-            <a:r>
-              <a:rPr lang="en-US" sz="1800" b="1" dirty="0">
-                <a:solidFill>
-                  <a:srgbClr val="1A7A57"/>
-                </a:solidFill>
-                <a:latin typeface="Courier New" pitchFamily="34" charset="0"/>
-                <a:ea typeface="Courier New" pitchFamily="34" charset="-122"/>
-                <a:cs typeface="Courier New" pitchFamily="34" charset="-120"/>
-              </a:rPr>
-              <a:t>ensemble 0.859</a:t>
-            </a:r>
-            <a:endParaRPr lang="en-US" sz="1800" dirty="0"/>
-          </a:p>
-        </p:txBody>
-      </p:sp>
-      <p:sp>
-        <p:nvSpPr>
-          <p:cNvPr id="55" name="Text 53"/>
-          <p:cNvSpPr/>
-          <p:nvPr/>
-        </p:nvSpPr>
-        <p:spPr>
-          <a:xfrm>
-            <a:off x="952500" y="7232154"/>
-            <a:ext cx="10346892" cy="678061"/>
-          </a:xfrm>
-          <a:prstGeom prst="rect">
-            <a:avLst/>
-          </a:prstGeom>
-          <a:noFill/>
-          <a:ln/>
-        </p:spPr>
-        <p:txBody>
-          <a:bodyPr wrap="square" lIns="25400" tIns="25400" rIns="25400" bIns="25400" rtlCol="0" anchor="t">
-            <a:normAutofit fontScale="92500" lnSpcReduction="20000"/>
-          </a:bodyPr>
-          <a:lstStyle/>
-          <a:p>
-            <a:pPr marL="0" indent="0" algn="l">
-              <a:lnSpc>
-                <a:spcPct val="140000"/>
-              </a:lnSpc>
-              <a:buNone/>
-            </a:pPr>
-            <a:r>
-              <a:rPr lang="en-US" sz="1800" dirty="0">
-                <a:solidFill>
-                  <a:srgbClr val="5C7268"/>
-                </a:solidFill>
-                <a:latin typeface="Arial" pitchFamily="34" charset="0"/>
-                <a:ea typeface="Arial" pitchFamily="34" charset="-122"/>
-                <a:cs typeface="Arial" pitchFamily="34" charset="-120"/>
-              </a:rPr>
-              <a:t>v10 adds leak-free z-scoring and a conservative smooth threshold (ROC AUC 0.9377). Its OOF dips slightly below v6/v7 </a:t>
-            </a:r>
-            <a:r>
-              <a:rPr lang="en-US" sz="1800" b="1" dirty="0">
-                <a:solidFill>
-                  <a:srgbClr val="244236"/>
-                </a:solidFill>
-                <a:latin typeface="Arial" pitchFamily="34" charset="0"/>
-                <a:ea typeface="Arial" pitchFamily="34" charset="-122"/>
-                <a:cs typeface="Arial" pitchFamily="34" charset="-120"/>
-              </a:rPr>
-              <a:t>by design </a:t>
-            </a:r>
-            <a:r>
-              <a:rPr lang="en-US" sz="1800" dirty="0">
-                <a:solidFill>
-                  <a:srgbClr val="5C7268"/>
-                </a:solidFill>
-                <a:latin typeface="Arial" pitchFamily="34" charset="0"/>
-                <a:ea typeface="Arial" pitchFamily="34" charset="-122"/>
-                <a:cs typeface="Arial" pitchFamily="34" charset="-120"/>
-              </a:rPr>
-              <a:t>— not because the model is worse.</a:t>
-            </a:r>
-            <a:endParaRPr lang="en-US" sz="1800" dirty="0"/>
-          </a:p>
-        </p:txBody>
-      </p:sp>
-      <p:sp>
-        <p:nvSpPr>
-          <p:cNvPr id="56" name="Text 54"/>
-          <p:cNvSpPr/>
-          <p:nvPr/>
-        </p:nvSpPr>
-        <p:spPr>
-          <a:xfrm>
-            <a:off x="11531426" y="3792662"/>
-            <a:ext cx="6384481" cy="870570"/>
-          </a:xfrm>
-          <a:prstGeom prst="rect">
-            <a:avLst/>
-          </a:prstGeom>
-          <a:noFill/>
-          <a:ln/>
-        </p:spPr>
-        <p:txBody>
-          <a:bodyPr wrap="square" lIns="25400" tIns="25400" rIns="25400" bIns="25400" rtlCol="0" anchor="t">
-            <a:normAutofit fontScale="92500" lnSpcReduction="20000"/>
-          </a:bodyPr>
-          <a:lstStyle/>
-          <a:p>
-            <a:pPr marL="0" indent="0" algn="l">
-              <a:lnSpc>
-                <a:spcPct val="95000"/>
-              </a:lnSpc>
-              <a:buNone/>
-            </a:pPr>
-            <a:r>
-              <a:rPr lang="en-US" sz="6900" b="1" dirty="0">
-                <a:solidFill>
-                  <a:srgbClr val="1A7A57"/>
-                </a:solidFill>
-                <a:latin typeface="Arial" pitchFamily="34" charset="0"/>
-                <a:ea typeface="Arial" pitchFamily="34" charset="-122"/>
-                <a:cs typeface="Arial" pitchFamily="34" charset="-120"/>
-              </a:rPr>
-              <a:t>0.8565</a:t>
-            </a:r>
-            <a:endParaRPr lang="en-US" sz="6900" dirty="0"/>
-          </a:p>
-        </p:txBody>
-      </p:sp>
-      <p:sp>
-        <p:nvSpPr>
-          <p:cNvPr id="57" name="Text 55"/>
-          <p:cNvSpPr/>
-          <p:nvPr/>
-        </p:nvSpPr>
-        <p:spPr>
-          <a:xfrm>
-            <a:off x="11531426" y="4720382"/>
-            <a:ext cx="5978196" cy="733425"/>
-          </a:xfrm>
-          <a:prstGeom prst="rect">
-            <a:avLst/>
-          </a:prstGeom>
-          <a:noFill/>
-          <a:ln/>
-        </p:spPr>
-        <p:txBody>
-          <a:bodyPr wrap="square" lIns="25400" tIns="25400" rIns="25400" bIns="25400" rtlCol="0" anchor="t">
-            <a:normAutofit lnSpcReduction="10000"/>
-          </a:bodyPr>
-          <a:lstStyle/>
-          <a:p>
-            <a:pPr marL="0" indent="0" algn="l">
-              <a:buNone/>
-            </a:pPr>
-            <a:r>
-              <a:rPr lang="en-US" sz="2250" b="1" dirty="0">
-                <a:solidFill>
-                  <a:srgbClr val="063D22"/>
-                </a:solidFill>
-                <a:latin typeface="Arial" pitchFamily="34" charset="0"/>
-                <a:ea typeface="Arial" pitchFamily="34" charset="-122"/>
-                <a:cs typeface="Arial" pitchFamily="34" charset="-120"/>
-              </a:rPr>
-              <a:t>0.8565 public accuracy — no leak, no protected attributes.</a:t>
-            </a:r>
-            <a:endParaRPr lang="en-US" sz="2250" dirty="0"/>
-          </a:p>
-        </p:txBody>
-      </p:sp>
-      <p:sp>
-        <p:nvSpPr>
-          <p:cNvPr id="58" name="Text 56"/>
-          <p:cNvSpPr/>
-          <p:nvPr/>
-        </p:nvSpPr>
-        <p:spPr>
-          <a:xfrm>
-            <a:off x="11531426" y="5682407"/>
-            <a:ext cx="5978196" cy="1204913"/>
-          </a:xfrm>
-          <a:prstGeom prst="rect">
-            <a:avLst/>
-          </a:prstGeom>
-          <a:noFill/>
-          <a:ln/>
-        </p:spPr>
-        <p:txBody>
-          <a:bodyPr wrap="square" lIns="25400" tIns="25400" rIns="25400" bIns="25400" rtlCol="0" anchor="t">
-            <a:normAutofit fontScale="92500" lnSpcReduction="20000"/>
-          </a:bodyPr>
-          <a:lstStyle/>
-          <a:p>
-            <a:pPr marL="0" indent="0" algn="l">
-              <a:lnSpc>
-                <a:spcPct val="150000"/>
-              </a:lnSpc>
-              <a:buNone/>
-            </a:pPr>
-            <a:r>
-              <a:rPr lang="en-US" sz="2025" dirty="0">
-                <a:solidFill>
-                  <a:srgbClr val="244236"/>
-                </a:solidFill>
-                <a:latin typeface="Arial" pitchFamily="34" charset="0"/>
-                <a:ea typeface="Arial" pitchFamily="34" charset="-122"/>
-                <a:cs typeface="Arial" pitchFamily="34" charset="-120"/>
-              </a:rPr>
-              <a:t>Our held-back validation tracked just above the live score the whole way — it </a:t>
-            </a:r>
-            <a:r>
-              <a:rPr lang="en-US" sz="2025" b="1" dirty="0">
-                <a:solidFill>
-                  <a:srgbClr val="063D22"/>
-                </a:solidFill>
-                <a:latin typeface="Arial" pitchFamily="34" charset="0"/>
-                <a:ea typeface="Arial" pitchFamily="34" charset="-122"/>
-                <a:cs typeface="Arial" pitchFamily="34" charset="-120"/>
-              </a:rPr>
-              <a:t>called the result in advance </a:t>
-            </a:r>
-            <a:r>
-              <a:rPr lang="en-US" sz="2025" dirty="0">
-                <a:solidFill>
-                  <a:srgbClr val="244236"/>
-                </a:solidFill>
-                <a:latin typeface="Arial" pitchFamily="34" charset="0"/>
-                <a:ea typeface="Arial" pitchFamily="34" charset="-122"/>
-                <a:cs typeface="Arial" pitchFamily="34" charset="-120"/>
-              </a:rPr>
-              <a:t>.</a:t>
-            </a:r>
-            <a:endParaRPr lang="en-US" sz="2025" dirty="0"/>
-          </a:p>
-        </p:txBody>
-      </p:sp>
-      <p:sp>
-        <p:nvSpPr>
-          <p:cNvPr id="59" name="Text 57"/>
-          <p:cNvSpPr/>
-          <p:nvPr/>
-        </p:nvSpPr>
-        <p:spPr>
-          <a:xfrm>
-            <a:off x="11531426" y="7020669"/>
-            <a:ext cx="5978196" cy="814388"/>
-          </a:xfrm>
-          <a:prstGeom prst="rect">
-            <a:avLst/>
-          </a:prstGeom>
-          <a:noFill/>
-          <a:ln/>
-        </p:spPr>
-        <p:txBody>
-          <a:bodyPr wrap="square" lIns="25400" tIns="25400" rIns="25400" bIns="25400" rtlCol="0" anchor="t">
-            <a:normAutofit fontScale="92500" lnSpcReduction="20000"/>
-          </a:bodyPr>
-          <a:lstStyle/>
-          <a:p>
-            <a:pPr marL="0" indent="0" algn="l">
-              <a:lnSpc>
-                <a:spcPct val="150000"/>
-              </a:lnSpc>
-              <a:buNone/>
-            </a:pPr>
-            <a:r>
-              <a:rPr lang="en-US" sz="2025" dirty="0">
-                <a:solidFill>
-                  <a:srgbClr val="5C7268"/>
-                </a:solidFill>
-                <a:latin typeface="Arial" pitchFamily="34" charset="0"/>
-                <a:ea typeface="Arial" pitchFamily="34" charset="-122"/>
-                <a:cs typeface="Arial" pitchFamily="34" charset="-120"/>
-              </a:rPr>
-              <a:t>Adversarial validation confirms the CV→LB gap is </a:t>
-            </a:r>
-            <a:r>
-              <a:rPr lang="en-US" sz="2025" b="1" dirty="0">
-                <a:solidFill>
-                  <a:srgbClr val="244236"/>
-                </a:solidFill>
-                <a:latin typeface="Arial" pitchFamily="34" charset="0"/>
-                <a:ea typeface="Arial" pitchFamily="34" charset="-122"/>
-                <a:cs typeface="Arial" pitchFamily="34" charset="-120"/>
-              </a:rPr>
-              <a:t>distribution shift over time</a:t>
-            </a:r>
-            <a:r>
-              <a:rPr lang="en-US" sz="2025" dirty="0">
-                <a:solidFill>
-                  <a:srgbClr val="5C7268"/>
-                </a:solidFill>
-                <a:latin typeface="Arial" pitchFamily="34" charset="0"/>
-                <a:ea typeface="Arial" pitchFamily="34" charset="-122"/>
-                <a:cs typeface="Arial" pitchFamily="34" charset="-120"/>
-              </a:rPr>
-              <a:t>, not overfitting.</a:t>
-            </a:r>
-            <a:endParaRPr lang="en-US" sz="2025" dirty="0"/>
-          </a:p>
-        </p:txBody>
-      </p:sp>
-      <p:sp>
-        <p:nvSpPr>
-          <p:cNvPr id="60" name="Shape 58"/>
-          <p:cNvSpPr/>
-          <p:nvPr/>
-        </p:nvSpPr>
-        <p:spPr>
-          <a:xfrm>
-            <a:off x="952500" y="9239250"/>
-            <a:ext cx="16383000" cy="9525"/>
-          </a:xfrm>
-          <a:prstGeom prst="rect">
-            <a:avLst/>
-          </a:prstGeom>
-          <a:solidFill>
-            <a:srgbClr val="D2E6DD"/>
-          </a:solidFill>
-          <a:ln/>
-        </p:spPr>
-        <p:txBody>
-          <a:bodyPr/>
-          <a:lstStyle/>
-          <a:p>
-            <a:endParaRPr lang="en-GB"/>
-          </a:p>
-        </p:txBody>
-      </p:sp>
-      <p:sp>
-        <p:nvSpPr>
-          <p:cNvPr id="61" name="Text 59"/>
-          <p:cNvSpPr/>
-          <p:nvPr/>
-        </p:nvSpPr>
-        <p:spPr>
-          <a:xfrm>
-            <a:off x="952500" y="9458325"/>
-            <a:ext cx="16874490" cy="295275"/>
-          </a:xfrm>
-          <a:prstGeom prst="rect">
-            <a:avLst/>
-          </a:prstGeom>
-          <a:noFill/>
-          <a:ln/>
-        </p:spPr>
-        <p:txBody>
-          <a:bodyPr wrap="square" lIns="25400" tIns="25400" rIns="25400" bIns="25400" rtlCol="0" anchor="t">
-            <a:normAutofit fontScale="92500" lnSpcReduction="10000"/>
-          </a:bodyPr>
-          <a:lstStyle/>
-          <a:p>
-            <a:pPr marL="0" indent="0" algn="l">
-              <a:buNone/>
-            </a:pPr>
-            <a:r>
-              <a:rPr lang="en-US" sz="1800" dirty="0">
-                <a:solidFill>
-                  <a:srgbClr val="5C7268"/>
-                </a:solidFill>
-                <a:latin typeface="Courier New" pitchFamily="34" charset="0"/>
-                <a:ea typeface="Courier New" pitchFamily="34" charset="-122"/>
-                <a:cs typeface="Courier New" pitchFamily="34" charset="-120"/>
-              </a:rPr>
-              <a:t>Source: Kaggle public leaderboard · 10 submissions, v1 → v10</a:t>
-            </a:r>
-            <a:endParaRPr lang="en-US" sz="1800" dirty="0"/>
-          </a:p>
-        </p:txBody>
-      </p:sp>
-      <p:pic>
-        <p:nvPicPr>
-          <p:cNvPr id="62" name="Picture 61" descr="deck_progression.png"/>
-          <p:cNvPicPr>
-            <a:picLocks noChangeAspect="1"/>
-          </p:cNvPicPr>
-          <p:nvPr/>
-        </p:nvPicPr>
-        <p:blipFill>
-          <a:blip r:embed="rId3"/>
-          <a:stretch>
-            <a:fillRect/>
-          </a:stretch>
-        </p:blipFill>
-        <p:spPr>
-          <a:xfrm>
-            <a:off x="1188720" y="2103120"/>
-            <a:ext cx="15361920" cy="1632204"/>
-          </a:xfrm>
-          <a:prstGeom prst="rect">
-            <a:avLst/>
-          </a:prstGeom>
-        </p:spPr>
-      </p:pic>
+      <p:graphicFrame>
+        <p:nvGraphicFramePr>
+          <p:cNvPr id="22" name="Table 21"/>
+          <p:cNvGraphicFramePr>
+            <a:graphicFrameLocks noGrp="1"/>
+          </p:cNvGraphicFramePr>
+          <p:nvPr/>
+        </p:nvGraphicFramePr>
+        <p:xfrm>
+          <a:off x="950976" y="2468880"/>
+          <a:ext cx="16367760" cy="6035040"/>
+        </p:xfrm>
+        <a:graphic>
+          <a:graphicData uri="http://schemas.openxmlformats.org/drawingml/2006/table">
+            <a:tbl>
+              <a:tblPr>
+                <a:tableStyleId>{5C22544A-7EE6-4342-B048-85BDC9FD1C3A}</a:tableStyleId>
+              </a:tblPr>
+              <a:tblGrid>
+                <a:gridCol w="3931920">
+                  <a:extLst>
+                    <a:ext uri="{9D8B030D-6E8A-4147-A177-3AD203B41FA5}">
+                      <a16:colId xmlns:a16="http://schemas.microsoft.com/office/drawing/2014/main" val="20000"/>
+                    </a:ext>
+                  </a:extLst>
+                </a:gridCol>
+                <a:gridCol w="5943600">
+                  <a:extLst>
+                    <a:ext uri="{9D8B030D-6E8A-4147-A177-3AD203B41FA5}">
+                      <a16:colId xmlns:a16="http://schemas.microsoft.com/office/drawing/2014/main" val="20001"/>
+                    </a:ext>
+                  </a:extLst>
+                </a:gridCol>
+                <a:gridCol w="6492240">
+                  <a:extLst>
+                    <a:ext uri="{9D8B030D-6E8A-4147-A177-3AD203B41FA5}">
+                      <a16:colId xmlns:a16="http://schemas.microsoft.com/office/drawing/2014/main" val="20002"/>
+                    </a:ext>
+                  </a:extLst>
+                </a:gridCol>
+              </a:tblGrid>
+              <a:tr h="754380">
+                <a:tc>
+                  <a:txBody>
+                    <a:bodyPr/>
+                    <a:lstStyle/>
+                    <a:p>
+                      <a:pPr algn="l"/>
+                      <a:r>
+                        <a:rPr sz="1700" b="1">
+                          <a:solidFill>
+                            <a:srgbClr val="FFFFFF"/>
+                          </a:solidFill>
+                          <a:latin typeface="Arial"/>
+                        </a:rPr>
+                        <a:t>Feature</a:t>
+                      </a:r>
+                    </a:p>
+                  </a:txBody>
+                  <a:tcPr marL="164592" marT="54864" marB="54864" anchor="ctr">
+                    <a:solidFill>
+                      <a:srgbClr val="063D22"/>
+                    </a:solidFill>
+                  </a:tcPr>
+                </a:tc>
+                <a:tc>
+                  <a:txBody>
+                    <a:bodyPr/>
+                    <a:lstStyle/>
+                    <a:p>
+                      <a:pPr algn="l"/>
+                      <a:r>
+                        <a:rPr sz="1700" b="1">
+                          <a:solidFill>
+                            <a:srgbClr val="FFFFFF"/>
+                          </a:solidFill>
+                          <a:latin typeface="Arial"/>
+                        </a:rPr>
+                        <a:t>How we built it</a:t>
+                      </a:r>
+                    </a:p>
+                  </a:txBody>
+                  <a:tcPr marL="164592" marT="54864" marB="54864" anchor="ctr">
+                    <a:solidFill>
+                      <a:srgbClr val="063D22"/>
+                    </a:solidFill>
+                  </a:tcPr>
+                </a:tc>
+                <a:tc>
+                  <a:txBody>
+                    <a:bodyPr/>
+                    <a:lstStyle/>
+                    <a:p>
+                      <a:pPr algn="l"/>
+                      <a:r>
+                        <a:rPr sz="1700" b="1">
+                          <a:solidFill>
+                            <a:srgbClr val="FFFFFF"/>
+                          </a:solidFill>
+                          <a:latin typeface="Arial"/>
+                        </a:rPr>
+                        <a:t>Why it helps</a:t>
+                      </a:r>
+                    </a:p>
+                  </a:txBody>
+                  <a:tcPr marL="164592" marT="54864" marB="54864" anchor="ctr">
+                    <a:solidFill>
+                      <a:srgbClr val="063D22"/>
+                    </a:solidFill>
+                  </a:tcPr>
+                </a:tc>
+                <a:extLst>
+                  <a:ext uri="{0D108BD9-81ED-4DB2-BD59-A6C34878D82A}">
+                    <a16:rowId xmlns:a16="http://schemas.microsoft.com/office/drawing/2014/main" val="10000"/>
+                  </a:ext>
+                </a:extLst>
+              </a:tr>
+              <a:tr h="754380">
+                <a:tc>
+                  <a:txBody>
+                    <a:bodyPr/>
+                    <a:lstStyle/>
+                    <a:p>
+                      <a:pPr algn="l"/>
+                      <a:r>
+                        <a:rPr sz="1500">
+                          <a:solidFill>
+                            <a:srgbClr val="14533B"/>
+                          </a:solidFill>
+                          <a:latin typeface="Courier New"/>
+                        </a:rPr>
+                        <a:t>risk_mean · risk_max</a:t>
+                      </a:r>
+                    </a:p>
+                  </a:txBody>
+                  <a:tcPr marL="164592" marT="54864" marB="54864" anchor="ctr">
+                    <a:solidFill>
+                      <a:srgbClr val="EAF3EF"/>
+                    </a:solidFill>
+                  </a:tcPr>
+                </a:tc>
+                <a:tc>
+                  <a:txBody>
+                    <a:bodyPr/>
+                    <a:lstStyle/>
+                    <a:p>
+                      <a:pPr algn="l"/>
+                      <a:r>
+                        <a:rPr sz="1500">
+                          <a:solidFill>
+                            <a:srgbClr val="14533B"/>
+                          </a:solidFill>
+                          <a:latin typeface="Courier New"/>
+                        </a:rPr>
+                        <a:t>mean &amp; max of the two risk indicators</a:t>
+                      </a:r>
+                    </a:p>
+                  </a:txBody>
+                  <a:tcPr marL="164592" marT="54864" marB="54864" anchor="ctr">
+                    <a:solidFill>
+                      <a:srgbClr val="EAF3EF"/>
+                    </a:solidFill>
+                  </a:tcPr>
+                </a:tc>
+                <a:tc>
+                  <a:txBody>
+                    <a:bodyPr/>
+                    <a:lstStyle/>
+                    <a:p>
+                      <a:pPr algn="l"/>
+                      <a:r>
+                        <a:rPr sz="1500">
+                          <a:solidFill>
+                            <a:srgbClr val="5C7268"/>
+                          </a:solidFill>
+                          <a:latin typeface="Arial"/>
+                        </a:rPr>
+                        <a:t>Combine both risk sources</a:t>
+                      </a:r>
+                    </a:p>
+                  </a:txBody>
+                  <a:tcPr marL="164592" marT="54864" marB="54864" anchor="ctr">
+                    <a:solidFill>
+                      <a:srgbClr val="EAF3EF"/>
+                    </a:solidFill>
+                  </a:tcPr>
+                </a:tc>
+                <a:extLst>
+                  <a:ext uri="{0D108BD9-81ED-4DB2-BD59-A6C34878D82A}">
+                    <a16:rowId xmlns:a16="http://schemas.microsoft.com/office/drawing/2014/main" val="10001"/>
+                  </a:ext>
+                </a:extLst>
+              </a:tr>
+              <a:tr h="754380">
+                <a:tc>
+                  <a:txBody>
+                    <a:bodyPr/>
+                    <a:lstStyle/>
+                    <a:p>
+                      <a:pPr algn="l"/>
+                      <a:r>
+                        <a:rPr sz="1500">
+                          <a:solidFill>
+                            <a:srgbClr val="14533B"/>
+                          </a:solidFill>
+                          <a:latin typeface="Courier New"/>
+                        </a:rPr>
+                        <a:t>risk_dev</a:t>
+                      </a:r>
+                    </a:p>
+                  </a:txBody>
+                  <a:tcPr marL="164592" marT="54864" marB="54864" anchor="ctr">
+                    <a:solidFill>
+                      <a:srgbClr val="FFFFFF"/>
+                    </a:solidFill>
+                  </a:tcPr>
+                </a:tc>
+                <a:tc>
+                  <a:txBody>
+                    <a:bodyPr/>
+                    <a:lstStyle/>
+                    <a:p>
+                      <a:pPr algn="l"/>
+                      <a:r>
+                        <a:rPr sz="1500">
+                          <a:solidFill>
+                            <a:srgbClr val="14533B"/>
+                          </a:solidFill>
+                          <a:latin typeface="Courier New"/>
+                        </a:rPr>
+                        <a:t>distance from the middle:  |risk - 55|</a:t>
+                      </a:r>
+                    </a:p>
+                  </a:txBody>
+                  <a:tcPr marL="164592" marT="54864" marB="54864" anchor="ctr">
+                    <a:solidFill>
+                      <a:srgbClr val="FFFFFF"/>
+                    </a:solidFill>
+                  </a:tcPr>
+                </a:tc>
+                <a:tc>
+                  <a:txBody>
+                    <a:bodyPr/>
+                    <a:lstStyle/>
+                    <a:p>
+                      <a:pPr algn="l"/>
+                      <a:r>
+                        <a:rPr sz="1500">
+                          <a:solidFill>
+                            <a:srgbClr val="5C7268"/>
+                          </a:solidFill>
+                          <a:latin typeface="Arial"/>
+                        </a:rPr>
+                        <a:t>Turns the risk hump into usable signal</a:t>
+                      </a:r>
+                    </a:p>
+                  </a:txBody>
+                  <a:tcPr marL="164592" marT="54864" marB="54864" anchor="ctr">
+                    <a:solidFill>
+                      <a:srgbClr val="FFFFFF"/>
+                    </a:solidFill>
+                  </a:tcPr>
+                </a:tc>
+                <a:extLst>
+                  <a:ext uri="{0D108BD9-81ED-4DB2-BD59-A6C34878D82A}">
+                    <a16:rowId xmlns:a16="http://schemas.microsoft.com/office/drawing/2014/main" val="10002"/>
+                  </a:ext>
+                </a:extLst>
+              </a:tr>
+              <a:tr h="754380">
+                <a:tc>
+                  <a:txBody>
+                    <a:bodyPr/>
+                    <a:lstStyle/>
+                    <a:p>
+                      <a:pPr algn="l"/>
+                      <a:r>
+                        <a:rPr sz="1500">
+                          <a:solidFill>
+                            <a:srgbClr val="14533B"/>
+                          </a:solidFill>
+                          <a:latin typeface="Courier New"/>
+                        </a:rPr>
+                        <a:t>amt_to_income</a:t>
+                      </a:r>
+                    </a:p>
+                  </a:txBody>
+                  <a:tcPr marL="164592" marT="54864" marB="54864" anchor="ctr">
+                    <a:solidFill>
+                      <a:srgbClr val="EAF3EF"/>
+                    </a:solidFill>
+                  </a:tcPr>
+                </a:tc>
+                <a:tc>
+                  <a:txBody>
+                    <a:bodyPr/>
+                    <a:lstStyle/>
+                    <a:p>
+                      <a:pPr algn="l"/>
+                      <a:r>
+                        <a:rPr sz="1500">
+                          <a:solidFill>
+                            <a:srgbClr val="14533B"/>
+                          </a:solidFill>
+                          <a:latin typeface="Courier New"/>
+                        </a:rPr>
+                        <a:t>amount / (total_income + 1)</a:t>
+                      </a:r>
+                    </a:p>
+                  </a:txBody>
+                  <a:tcPr marL="164592" marT="54864" marB="54864" anchor="ctr">
+                    <a:solidFill>
+                      <a:srgbClr val="EAF3EF"/>
+                    </a:solidFill>
+                  </a:tcPr>
+                </a:tc>
+                <a:tc>
+                  <a:txBody>
+                    <a:bodyPr/>
+                    <a:lstStyle/>
+                    <a:p>
+                      <a:pPr algn="l"/>
+                      <a:r>
+                        <a:rPr sz="1500">
+                          <a:solidFill>
+                            <a:srgbClr val="5C7268"/>
+                          </a:solidFill>
+                          <a:latin typeface="Arial"/>
+                        </a:rPr>
+                        <a:t>Affordability ratio — a credit standard</a:t>
+                      </a:r>
+                    </a:p>
+                  </a:txBody>
+                  <a:tcPr marL="164592" marT="54864" marB="54864" anchor="ctr">
+                    <a:solidFill>
+                      <a:srgbClr val="EAF3EF"/>
+                    </a:solidFill>
+                  </a:tcPr>
+                </a:tc>
+                <a:extLst>
+                  <a:ext uri="{0D108BD9-81ED-4DB2-BD59-A6C34878D82A}">
+                    <a16:rowId xmlns:a16="http://schemas.microsoft.com/office/drawing/2014/main" val="10003"/>
+                  </a:ext>
+                </a:extLst>
+              </a:tr>
+              <a:tr h="754380">
+                <a:tc>
+                  <a:txBody>
+                    <a:bodyPr/>
+                    <a:lstStyle/>
+                    <a:p>
+                      <a:pPr algn="l"/>
+                      <a:r>
+                        <a:rPr sz="1500">
+                          <a:solidFill>
+                            <a:srgbClr val="14533B"/>
+                          </a:solidFill>
+                          <a:latin typeface="Courier New"/>
+                        </a:rPr>
+                        <a:t>total_income · log_income</a:t>
+                      </a:r>
+                    </a:p>
+                  </a:txBody>
+                  <a:tcPr marL="164592" marT="54864" marB="54864" anchor="ctr">
+                    <a:solidFill>
+                      <a:srgbClr val="FFFFFF"/>
+                    </a:solidFill>
+                  </a:tcPr>
+                </a:tc>
+                <a:tc>
+                  <a:txBody>
+                    <a:bodyPr/>
+                    <a:lstStyle/>
+                    <a:p>
+                      <a:pPr algn="l"/>
+                      <a:r>
+                        <a:rPr sz="1500">
+                          <a:solidFill>
+                            <a:srgbClr val="14533B"/>
+                          </a:solidFill>
+                          <a:latin typeface="Courier New"/>
+                        </a:rPr>
+                        <a:t>ann_income + other_income (log-scaled)</a:t>
+                      </a:r>
+                    </a:p>
+                  </a:txBody>
+                  <a:tcPr marL="164592" marT="54864" marB="54864" anchor="ctr">
+                    <a:solidFill>
+                      <a:srgbClr val="FFFFFF"/>
+                    </a:solidFill>
+                  </a:tcPr>
+                </a:tc>
+                <a:tc>
+                  <a:txBody>
+                    <a:bodyPr/>
+                    <a:lstStyle/>
+                    <a:p>
+                      <a:pPr algn="l"/>
+                      <a:r>
+                        <a:rPr sz="1500">
+                          <a:solidFill>
+                            <a:srgbClr val="5C7268"/>
+                          </a:solidFill>
+                          <a:latin typeface="Arial"/>
+                        </a:rPr>
+                        <a:t>Real disposable income</a:t>
+                      </a:r>
+                    </a:p>
+                  </a:txBody>
+                  <a:tcPr marL="164592" marT="54864" marB="54864" anchor="ctr">
+                    <a:solidFill>
+                      <a:srgbClr val="FFFFFF"/>
+                    </a:solidFill>
+                  </a:tcPr>
+                </a:tc>
+                <a:extLst>
+                  <a:ext uri="{0D108BD9-81ED-4DB2-BD59-A6C34878D82A}">
+                    <a16:rowId xmlns:a16="http://schemas.microsoft.com/office/drawing/2014/main" val="10004"/>
+                  </a:ext>
+                </a:extLst>
+              </a:tr>
+              <a:tr h="754380">
+                <a:tc>
+                  <a:txBody>
+                    <a:bodyPr/>
+                    <a:lstStyle/>
+                    <a:p>
+                      <a:pPr algn="l"/>
+                      <a:r>
+                        <a:rPr sz="1500">
+                          <a:solidFill>
+                            <a:srgbClr val="14533B"/>
+                          </a:solidFill>
+                          <a:latin typeface="Courier New"/>
+                        </a:rPr>
+                        <a:t>credit_z</a:t>
+                      </a:r>
+                    </a:p>
+                  </a:txBody>
+                  <a:tcPr marL="164592" marT="54864" marB="54864" anchor="ctr">
+                    <a:solidFill>
+                      <a:srgbClr val="EAF3EF"/>
+                    </a:solidFill>
+                  </a:tcPr>
+                </a:tc>
+                <a:tc>
+                  <a:txBody>
+                    <a:bodyPr/>
+                    <a:lstStyle/>
+                    <a:p>
+                      <a:pPr algn="l"/>
+                      <a:r>
+                        <a:rPr sz="1500">
+                          <a:solidFill>
+                            <a:srgbClr val="14533B"/>
+                          </a:solidFill>
+                          <a:latin typeface="Courier New"/>
+                        </a:rPr>
+                        <a:t>3 bureau scores z-scored &amp; merged</a:t>
+                      </a:r>
+                    </a:p>
+                  </a:txBody>
+                  <a:tcPr marL="164592" marT="54864" marB="54864" anchor="ctr">
+                    <a:solidFill>
+                      <a:srgbClr val="EAF3EF"/>
+                    </a:solidFill>
+                  </a:tcPr>
+                </a:tc>
+                <a:tc>
+                  <a:txBody>
+                    <a:bodyPr/>
+                    <a:lstStyle/>
+                    <a:p>
+                      <a:pPr algn="l"/>
+                      <a:r>
+                        <a:rPr sz="1500">
+                          <a:solidFill>
+                            <a:srgbClr val="5C7268"/>
+                          </a:solidFill>
+                          <a:latin typeface="Arial"/>
+                        </a:rPr>
+                        <a:t>One comparable score from 3 scales</a:t>
+                      </a:r>
+                    </a:p>
+                  </a:txBody>
+                  <a:tcPr marL="164592" marT="54864" marB="54864" anchor="ctr">
+                    <a:solidFill>
+                      <a:srgbClr val="EAF3EF"/>
+                    </a:solidFill>
+                  </a:tcPr>
+                </a:tc>
+                <a:extLst>
+                  <a:ext uri="{0D108BD9-81ED-4DB2-BD59-A6C34878D82A}">
+                    <a16:rowId xmlns:a16="http://schemas.microsoft.com/office/drawing/2014/main" val="10005"/>
+                  </a:ext>
+                </a:extLst>
+              </a:tr>
+              <a:tr h="754380">
+                <a:tc>
+                  <a:txBody>
+                    <a:bodyPr/>
+                    <a:lstStyle/>
+                    <a:p>
+                      <a:pPr algn="l"/>
+                      <a:r>
+                        <a:rPr sz="1500">
+                          <a:solidFill>
+                            <a:srgbClr val="14533B"/>
+                          </a:solidFill>
+                          <a:latin typeface="Courier New"/>
+                        </a:rPr>
+                        <a:t>has_score · *_missing</a:t>
+                      </a:r>
+                    </a:p>
+                  </a:txBody>
+                  <a:tcPr marL="164592" marT="54864" marB="54864" anchor="ctr">
+                    <a:solidFill>
+                      <a:srgbClr val="FFFFFF"/>
+                    </a:solidFill>
+                  </a:tcPr>
+                </a:tc>
+                <a:tc>
+                  <a:txBody>
+                    <a:bodyPr/>
+                    <a:lstStyle/>
+                    <a:p>
+                      <a:pPr algn="l"/>
+                      <a:r>
+                        <a:rPr sz="1500">
+                          <a:solidFill>
+                            <a:srgbClr val="14533B"/>
+                          </a:solidFill>
+                          <a:latin typeface="Courier New"/>
+                        </a:rPr>
+                        <a:t>binary 0/1 flags</a:t>
+                      </a:r>
+                    </a:p>
+                  </a:txBody>
+                  <a:tcPr marL="164592" marT="54864" marB="54864" anchor="ctr">
+                    <a:solidFill>
+                      <a:srgbClr val="FFFFFF"/>
+                    </a:solidFill>
+                  </a:tcPr>
+                </a:tc>
+                <a:tc>
+                  <a:txBody>
+                    <a:bodyPr/>
+                    <a:lstStyle/>
+                    <a:p>
+                      <a:pPr algn="l"/>
+                      <a:r>
+                        <a:rPr sz="1500">
+                          <a:solidFill>
+                            <a:srgbClr val="5C7268"/>
+                          </a:solidFill>
+                          <a:latin typeface="Arial"/>
+                        </a:rPr>
+                        <a:t>“Value absent” is itself a signal</a:t>
+                      </a:r>
+                    </a:p>
+                  </a:txBody>
+                  <a:tcPr marL="164592" marT="54864" marB="54864" anchor="ctr">
+                    <a:solidFill>
+                      <a:srgbClr val="FFFFFF"/>
+                    </a:solidFill>
+                  </a:tcPr>
+                </a:tc>
+                <a:extLst>
+                  <a:ext uri="{0D108BD9-81ED-4DB2-BD59-A6C34878D82A}">
+                    <a16:rowId xmlns:a16="http://schemas.microsoft.com/office/drawing/2014/main" val="10006"/>
+                  </a:ext>
+                </a:extLst>
+              </a:tr>
+              <a:tr h="754380">
+                <a:tc>
+                  <a:txBody>
+                    <a:bodyPr/>
+                    <a:lstStyle/>
+                    <a:p>
+                      <a:pPr algn="l"/>
+                      <a:r>
+                        <a:rPr sz="1500">
+                          <a:solidFill>
+                            <a:srgbClr val="14533B"/>
+                          </a:solidFill>
+                          <a:latin typeface="Courier New"/>
+                        </a:rPr>
+                        <a:t>year · month</a:t>
+                      </a:r>
+                    </a:p>
+                  </a:txBody>
+                  <a:tcPr marL="164592" marT="54864" marB="54864" anchor="ctr">
+                    <a:solidFill>
+                      <a:srgbClr val="EAF3EF"/>
+                    </a:solidFill>
+                  </a:tcPr>
+                </a:tc>
+                <a:tc>
+                  <a:txBody>
+                    <a:bodyPr/>
+                    <a:lstStyle/>
+                    <a:p>
+                      <a:pPr algn="l"/>
+                      <a:r>
+                        <a:rPr sz="1500">
+                          <a:solidFill>
+                            <a:srgbClr val="14533B"/>
+                          </a:solidFill>
+                          <a:latin typeface="Courier New"/>
+                        </a:rPr>
+                        <a:t>parsed from the date</a:t>
+                      </a:r>
+                    </a:p>
+                  </a:txBody>
+                  <a:tcPr marL="164592" marT="54864" marB="54864" anchor="ctr">
+                    <a:solidFill>
+                      <a:srgbClr val="EAF3EF"/>
+                    </a:solidFill>
+                  </a:tcPr>
+                </a:tc>
+                <a:tc>
+                  <a:txBody>
+                    <a:bodyPr/>
+                    <a:lstStyle/>
+                    <a:p>
+                      <a:pPr algn="l"/>
+                      <a:r>
+                        <a:rPr sz="1500">
+                          <a:solidFill>
+                            <a:srgbClr val="5C7268"/>
+                          </a:solidFill>
+                          <a:latin typeface="Arial"/>
+                        </a:rPr>
+                        <a:t>Captures the downward 2026 approval trend</a:t>
+                      </a:r>
+                    </a:p>
+                  </a:txBody>
+                  <a:tcPr marL="164592" marT="54864" marB="54864" anchor="ctr">
+                    <a:solidFill>
+                      <a:srgbClr val="EAF3EF"/>
+                    </a:solidFill>
+                  </a:tcPr>
+                </a:tc>
+                <a:extLst>
+                  <a:ext uri="{0D108BD9-81ED-4DB2-BD59-A6C34878D82A}">
+                    <a16:rowId xmlns:a16="http://schemas.microsoft.com/office/drawing/2014/main" val="10007"/>
+                  </a:ext>
+                </a:extLst>
+              </a:tr>
+            </a:tbl>
+          </a:graphicData>
+        </a:graphic>
+      </p:graphicFrame>
     </p:spTree>
   </p:cSld>
   <p:clrMapOvr>

--- a/presentation/Consulting_Finance_ML_Slides.pptx
+++ b/presentation/Consulting_Finance_ML_Slides.pptx
@@ -13915,6 +13915,95 @@
           </a:prstGeom>
         </p:spPr>
       </p:pic>
+      <p:sp>
+        <p:nvSpPr>
+          <p:cNvPr id="42" name="Rounded Rectangle 41"/>
+          <p:cNvSpPr/>
+          <p:nvPr/>
+        </p:nvSpPr>
+        <p:spPr>
+          <a:xfrm>
+            <a:off x="950976" y="6967728"/>
+            <a:ext cx="8595360" cy="1207008"/>
+          </a:xfrm>
+          <a:prstGeom prst="roundRect">
+            <a:avLst/>
+          </a:prstGeom>
+          <a:solidFill>
+            <a:srgbClr val="063D22"/>
+          </a:solidFill>
+          <a:ln>
+            <a:noFill/>
+          </a:ln>
+          <a:effectLst/>
+        </p:spPr>
+        <p:style>
+          <a:lnRef idx="1">
+            <a:schemeClr val="accent1"/>
+          </a:lnRef>
+          <a:fillRef idx="3">
+            <a:schemeClr val="accent1"/>
+          </a:fillRef>
+          <a:effectRef idx="2">
+            <a:schemeClr val="accent1"/>
+          </a:effectRef>
+          <a:fontRef idx="minor">
+            <a:schemeClr val="lt1"/>
+          </a:fontRef>
+        </p:style>
+        <p:txBody>
+          <a:bodyPr rtlCol="0" anchor="ctr" wrap="square" lIns="274320" tIns="146304" rIns="182880" bIns="109728"/>
+          <a:lstStyle/>
+          <a:p>
+            <a:pPr algn="l">
+              <a:spcAft>
+                <a:spcPts val="300"/>
+              </a:spcAft>
+            </a:pPr>
+            <a:r>
+              <a:rPr sz="1300" b="0">
+                <a:solidFill>
+                  <a:srgbClr val="8FD0BB"/>
+                </a:solidFill>
+                <a:latin typeface="Courier New"/>
+              </a:rPr>
+              <a:t>FINAL MODEL</a:t>
+            </a:r>
+          </a:p>
+          <a:p>
+            <a:pPr algn="l">
+              <a:spcAft>
+                <a:spcPts val="300"/>
+              </a:spcAft>
+            </a:pPr>
+            <a:r>
+              <a:rPr sz="1700" b="1">
+                <a:solidFill>
+                  <a:srgbClr val="FFFFFF"/>
+                </a:solidFill>
+                <a:latin typeface="Arial"/>
+              </a:rPr>
+              <a:t>Ensemble — LightGBM + XGBoost + CatBoost</a:t>
+            </a:r>
+          </a:p>
+          <a:p>
+            <a:pPr algn="l">
+              <a:spcAft>
+                <a:spcPts val="300"/>
+              </a:spcAft>
+            </a:pPr>
+            <a:r>
+              <a:rPr sz="1400" b="0">
+                <a:solidFill>
+                  <a:srgbClr val="BCDDCE"/>
+                </a:solidFill>
+                <a:latin typeface="Arial"/>
+              </a:rPr>
+              <a:t>+ pseudo-labeling &amp; smooth threshold  →  0.859 accuracy</a:t>
+            </a:r>
+          </a:p>
+        </p:txBody>
+      </p:sp>
     </p:spTree>
   </p:cSld>
   <p:clrMapOvr>

--- a/presentation/Consulting_Finance_ML_Slides.pptx
+++ b/presentation/Consulting_Finance_ML_Slides.pptx
@@ -12516,7 +12516,7 @@
                 <a:ea typeface="Arial" pitchFamily="34" charset="-122"/>
                 <a:cs typeface="Arial" pitchFamily="34" charset="-120"/>
               </a:rPr>
-              <a:t>We judged every model on next-month accuracy, not the leaderboard</a:t>
+              <a:t>How our model turns features into a decision</a:t>
             </a:r>
             <a:endParaRPr lang="en-US" sz="3600" dirty="0"/>
           </a:p>
@@ -12524,14 +12524,41 @@
       </p:sp>
       <p:sp>
         <p:nvSpPr>
-          <p:cNvPr id="5" name="Text 3"/>
-          <p:cNvSpPr/>
-          <p:nvPr/>
-        </p:nvSpPr>
-        <p:spPr>
-          <a:xfrm>
-            <a:off x="952500" y="2350368"/>
-            <a:ext cx="9620228" cy="295275"/>
+          <p:cNvPr id="39" name="Shape 37"/>
+          <p:cNvSpPr/>
+          <p:nvPr/>
+        </p:nvSpPr>
+        <p:spPr>
+          <a:xfrm>
+            <a:off x="952500" y="9239250"/>
+            <a:ext cx="16383000" cy="9525"/>
+          </a:xfrm>
+          <a:prstGeom prst="rect">
+            <a:avLst/>
+          </a:prstGeom>
+          <a:solidFill>
+            <a:srgbClr val="D2E6DD"/>
+          </a:solidFill>
+          <a:ln/>
+        </p:spPr>
+        <p:txBody>
+          <a:bodyPr/>
+          <a:lstStyle/>
+          <a:p>
+            <a:endParaRPr lang="en-GB"/>
+          </a:p>
+        </p:txBody>
+      </p:sp>
+      <p:sp>
+        <p:nvSpPr>
+          <p:cNvPr id="40" name="Text 38"/>
+          <p:cNvSpPr/>
+          <p:nvPr/>
+        </p:nvSpPr>
+        <p:spPr>
+          <a:xfrm>
+            <a:off x="952500" y="9458325"/>
+            <a:ext cx="16874490" cy="295275"/>
           </a:xfrm>
           <a:prstGeom prst="rect">
             <a:avLst/>
@@ -12557,7 +12584,7 @@
                 <a:ea typeface="Courier New" pitchFamily="34" charset="-122"/>
                 <a:cs typeface="Courier New" pitchFamily="34" charset="-120"/>
               </a:rPr>
-              <a:t>Model selection · 5-fold accuracy</a:t>
+              <a:t>Source: src/model_v10.py · 16-model ensemble (9 LGBM + 3 XGB + 4 CatBoost)</a:t>
             </a:r>
             <a:endParaRPr lang="en-US" sz="1800" dirty="0"/>
           </a:p>
@@ -12565,1375 +12592,25 @@
       </p:sp>
       <p:sp>
         <p:nvSpPr>
-          <p:cNvPr id="6" name="Text 4"/>
-          <p:cNvSpPr/>
-          <p:nvPr/>
-        </p:nvSpPr>
-        <p:spPr>
-          <a:xfrm>
-            <a:off x="952500" y="4167039"/>
-            <a:ext cx="2305050" cy="323850"/>
-          </a:xfrm>
-          <a:prstGeom prst="rect">
-            <a:avLst/>
-          </a:prstGeom>
-          <a:noFill/>
-          <a:ln/>
-        </p:spPr>
-        <p:txBody>
-          <a:bodyPr wrap="square" lIns="25400" tIns="25400" rIns="25400" bIns="25400" rtlCol="0" anchor="t">
-            <a:normAutofit lnSpcReduction="10000"/>
-          </a:bodyPr>
-          <a:lstStyle/>
-          <a:p>
-            <a:pPr marL="0" indent="0" algn="l">
-              <a:buNone/>
-            </a:pPr>
-            <a:r>
-              <a:rPr lang="en-US" sz="1950" dirty="0">
-                <a:solidFill>
-                  <a:srgbClr val="244236"/>
-                </a:solidFill>
-                <a:latin typeface="Arial" pitchFamily="34" charset="0"/>
-                <a:ea typeface="Arial" pitchFamily="34" charset="-122"/>
-                <a:cs typeface="Arial" pitchFamily="34" charset="-120"/>
-              </a:rPr>
-              <a:t>Naive Bayes</a:t>
-            </a:r>
-            <a:endParaRPr lang="en-US" sz="1950" dirty="0"/>
-          </a:p>
-        </p:txBody>
-      </p:sp>
-      <p:sp>
-        <p:nvSpPr>
-          <p:cNvPr id="7" name="Shape 5"/>
-          <p:cNvSpPr/>
-          <p:nvPr/>
-        </p:nvSpPr>
-        <p:spPr>
-          <a:xfrm>
-            <a:off x="3219450" y="4128939"/>
-            <a:ext cx="5392862" cy="361950"/>
+          <p:cNvPr id="41" name="Rounded Rectangle 40"/>
+          <p:cNvSpPr/>
+          <p:nvPr/>
+        </p:nvSpPr>
+        <p:spPr>
+          <a:xfrm>
+            <a:off x="950976" y="2697480"/>
+            <a:ext cx="2743200" cy="1280160"/>
           </a:xfrm>
           <a:prstGeom prst="roundRect">
-            <a:avLst>
-              <a:gd name="adj" fmla="val 15789"/>
-            </a:avLst>
+            <a:avLst/>
           </a:prstGeom>
           <a:solidFill>
-            <a:srgbClr val="E6F5EF"/>
+            <a:srgbClr val="EAF3EF"/>
           </a:solidFill>
-          <a:ln/>
-        </p:spPr>
-        <p:txBody>
-          <a:bodyPr/>
-          <a:lstStyle/>
-          <a:p>
-            <a:endParaRPr lang="en-GB"/>
-          </a:p>
-        </p:txBody>
-      </p:sp>
-      <p:sp>
-        <p:nvSpPr>
-          <p:cNvPr id="8" name="Shape 6"/>
-          <p:cNvSpPr/>
-          <p:nvPr/>
-        </p:nvSpPr>
-        <p:spPr>
-          <a:xfrm>
-            <a:off x="3219450" y="4128939"/>
-            <a:ext cx="2157115" cy="361950"/>
-          </a:xfrm>
-          <a:prstGeom prst="rect">
-            <a:avLst/>
-          </a:prstGeom>
-          <a:solidFill>
-            <a:srgbClr val="A7C8BC"/>
-          </a:solidFill>
-          <a:ln/>
-        </p:spPr>
-        <p:txBody>
-          <a:bodyPr/>
-          <a:lstStyle/>
-          <a:p>
-            <a:endParaRPr lang="en-GB"/>
-          </a:p>
-        </p:txBody>
-      </p:sp>
-      <p:sp>
-        <p:nvSpPr>
-          <p:cNvPr id="9" name="Text 7"/>
-          <p:cNvSpPr/>
-          <p:nvPr/>
-        </p:nvSpPr>
-        <p:spPr>
-          <a:xfrm>
-            <a:off x="8707562" y="4174182"/>
-            <a:ext cx="990600" cy="309563"/>
-          </a:xfrm>
-          <a:prstGeom prst="rect">
-            <a:avLst/>
-          </a:prstGeom>
-          <a:noFill/>
-          <a:ln/>
-        </p:spPr>
-        <p:txBody>
-          <a:bodyPr wrap="square" lIns="25400" tIns="25400" rIns="25400" bIns="25400" rtlCol="0" anchor="t">
-            <a:normAutofit fontScale="92500" lnSpcReduction="10000"/>
-          </a:bodyPr>
-          <a:lstStyle/>
-          <a:p>
-            <a:pPr marL="0" indent="0" algn="r">
-              <a:buNone/>
-            </a:pPr>
-            <a:r>
-              <a:rPr lang="en-US" sz="1875" dirty="0">
-                <a:solidFill>
-                  <a:srgbClr val="5C7268"/>
-                </a:solidFill>
-                <a:latin typeface="Courier New" pitchFamily="34" charset="0"/>
-                <a:ea typeface="Courier New" pitchFamily="34" charset="-122"/>
-                <a:cs typeface="Courier New" pitchFamily="34" charset="-120"/>
-              </a:rPr>
-              <a:t>0.760</a:t>
-            </a:r>
-            <a:endParaRPr lang="en-US" sz="1875" dirty="0"/>
-          </a:p>
-        </p:txBody>
-      </p:sp>
-      <p:sp>
-        <p:nvSpPr>
-          <p:cNvPr id="10" name="Text 8"/>
-          <p:cNvSpPr/>
-          <p:nvPr/>
-        </p:nvSpPr>
-        <p:spPr>
-          <a:xfrm>
-            <a:off x="952500" y="4700439"/>
-            <a:ext cx="2305050" cy="323850"/>
-          </a:xfrm>
-          <a:prstGeom prst="rect">
-            <a:avLst/>
-          </a:prstGeom>
-          <a:noFill/>
-          <a:ln/>
-        </p:spPr>
-        <p:txBody>
-          <a:bodyPr wrap="square" lIns="25400" tIns="25400" rIns="25400" bIns="25400" rtlCol="0" anchor="t">
-            <a:normAutofit lnSpcReduction="10000"/>
-          </a:bodyPr>
-          <a:lstStyle/>
-          <a:p>
-            <a:pPr marL="0" indent="0" algn="l">
-              <a:buNone/>
-            </a:pPr>
-            <a:r>
-              <a:rPr lang="en-US" sz="1950" dirty="0">
-                <a:solidFill>
-                  <a:srgbClr val="244236"/>
-                </a:solidFill>
-                <a:latin typeface="Arial" pitchFamily="34" charset="0"/>
-                <a:ea typeface="Arial" pitchFamily="34" charset="-122"/>
-                <a:cs typeface="Arial" pitchFamily="34" charset="-120"/>
-              </a:rPr>
-              <a:t>LDA</a:t>
-            </a:r>
-            <a:endParaRPr lang="en-US" sz="1950" dirty="0"/>
-          </a:p>
-        </p:txBody>
-      </p:sp>
-      <p:sp>
-        <p:nvSpPr>
-          <p:cNvPr id="11" name="Shape 9"/>
-          <p:cNvSpPr/>
-          <p:nvPr/>
-        </p:nvSpPr>
-        <p:spPr>
-          <a:xfrm>
-            <a:off x="3219450" y="4662339"/>
-            <a:ext cx="5392862" cy="361950"/>
-          </a:xfrm>
-          <a:prstGeom prst="roundRect">
-            <a:avLst>
-              <a:gd name="adj" fmla="val 15789"/>
-            </a:avLst>
-          </a:prstGeom>
-          <a:solidFill>
-            <a:srgbClr val="E6F5EF"/>
-          </a:solidFill>
-          <a:ln/>
-        </p:spPr>
-        <p:txBody>
-          <a:bodyPr/>
-          <a:lstStyle/>
-          <a:p>
-            <a:endParaRPr lang="en-GB"/>
-          </a:p>
-        </p:txBody>
-      </p:sp>
-      <p:sp>
-        <p:nvSpPr>
-          <p:cNvPr id="12" name="Shape 10"/>
-          <p:cNvSpPr/>
-          <p:nvPr/>
-        </p:nvSpPr>
-        <p:spPr>
-          <a:xfrm>
-            <a:off x="3219450" y="4662339"/>
-            <a:ext cx="2750344" cy="361950"/>
-          </a:xfrm>
-          <a:prstGeom prst="rect">
-            <a:avLst/>
-          </a:prstGeom>
-          <a:solidFill>
-            <a:srgbClr val="A7C8BC"/>
-          </a:solidFill>
-          <a:ln/>
-        </p:spPr>
-        <p:txBody>
-          <a:bodyPr/>
-          <a:lstStyle/>
-          <a:p>
-            <a:endParaRPr lang="en-GB"/>
-          </a:p>
-        </p:txBody>
-      </p:sp>
-      <p:sp>
-        <p:nvSpPr>
-          <p:cNvPr id="13" name="Text 11"/>
-          <p:cNvSpPr/>
-          <p:nvPr/>
-        </p:nvSpPr>
-        <p:spPr>
-          <a:xfrm>
-            <a:off x="8707562" y="4707582"/>
-            <a:ext cx="990600" cy="309563"/>
-          </a:xfrm>
-          <a:prstGeom prst="rect">
-            <a:avLst/>
-          </a:prstGeom>
-          <a:noFill/>
-          <a:ln/>
-        </p:spPr>
-        <p:txBody>
-          <a:bodyPr wrap="square" lIns="25400" tIns="25400" rIns="25400" bIns="25400" rtlCol="0" anchor="t">
-            <a:normAutofit fontScale="92500" lnSpcReduction="10000"/>
-          </a:bodyPr>
-          <a:lstStyle/>
-          <a:p>
-            <a:pPr marL="0" indent="0" algn="r">
-              <a:buNone/>
-            </a:pPr>
-            <a:r>
-              <a:rPr lang="en-US" sz="1875" dirty="0">
-                <a:solidFill>
-                  <a:srgbClr val="5C7268"/>
-                </a:solidFill>
-                <a:latin typeface="Courier New" pitchFamily="34" charset="0"/>
-                <a:ea typeface="Courier New" pitchFamily="34" charset="-122"/>
-                <a:cs typeface="Courier New" pitchFamily="34" charset="-120"/>
-              </a:rPr>
-              <a:t>0.777</a:t>
-            </a:r>
-            <a:endParaRPr lang="en-US" sz="1875" dirty="0"/>
-          </a:p>
-        </p:txBody>
-      </p:sp>
-      <p:sp>
-        <p:nvSpPr>
-          <p:cNvPr id="14" name="Text 12"/>
-          <p:cNvSpPr/>
-          <p:nvPr/>
-        </p:nvSpPr>
-        <p:spPr>
-          <a:xfrm>
-            <a:off x="952500" y="5195739"/>
-            <a:ext cx="2171700" cy="609600"/>
-          </a:xfrm>
-          <a:prstGeom prst="rect">
-            <a:avLst/>
-          </a:prstGeom>
-          <a:noFill/>
-          <a:ln/>
-        </p:spPr>
-        <p:txBody>
-          <a:bodyPr wrap="square" lIns="25400" tIns="25400" rIns="25400" bIns="25400" rtlCol="0" anchor="t">
-            <a:normAutofit lnSpcReduction="10000"/>
-          </a:bodyPr>
-          <a:lstStyle/>
-          <a:p>
-            <a:pPr marL="0" indent="0" algn="l">
-              <a:buNone/>
-            </a:pPr>
-            <a:r>
-              <a:rPr lang="en-US" sz="1950" dirty="0">
-                <a:solidFill>
-                  <a:srgbClr val="244236"/>
-                </a:solidFill>
-                <a:latin typeface="Arial" pitchFamily="34" charset="0"/>
-                <a:ea typeface="Arial" pitchFamily="34" charset="-122"/>
-                <a:cs typeface="Arial" pitchFamily="34" charset="-120"/>
-              </a:rPr>
-              <a:t>Logistic Regression</a:t>
-            </a:r>
-            <a:endParaRPr lang="en-US" sz="1950" dirty="0"/>
-          </a:p>
-        </p:txBody>
-      </p:sp>
-      <p:sp>
-        <p:nvSpPr>
-          <p:cNvPr id="15" name="Shape 13"/>
-          <p:cNvSpPr/>
-          <p:nvPr/>
-        </p:nvSpPr>
-        <p:spPr>
-          <a:xfrm>
-            <a:off x="3219450" y="5300514"/>
-            <a:ext cx="5392862" cy="361950"/>
-          </a:xfrm>
-          <a:prstGeom prst="roundRect">
-            <a:avLst>
-              <a:gd name="adj" fmla="val 15789"/>
-            </a:avLst>
-          </a:prstGeom>
-          <a:solidFill>
-            <a:srgbClr val="E6F5EF"/>
-          </a:solidFill>
-          <a:ln/>
-        </p:spPr>
-        <p:txBody>
-          <a:bodyPr/>
-          <a:lstStyle/>
-          <a:p>
-            <a:endParaRPr lang="en-GB"/>
-          </a:p>
-        </p:txBody>
-      </p:sp>
-      <p:sp>
-        <p:nvSpPr>
-          <p:cNvPr id="16" name="Shape 14"/>
-          <p:cNvSpPr/>
-          <p:nvPr/>
-        </p:nvSpPr>
-        <p:spPr>
-          <a:xfrm>
-            <a:off x="3219450" y="5300514"/>
-            <a:ext cx="3019946" cy="361950"/>
-          </a:xfrm>
-          <a:prstGeom prst="rect">
-            <a:avLst/>
-          </a:prstGeom>
-          <a:solidFill>
-            <a:srgbClr val="A7C8BC"/>
-          </a:solidFill>
-          <a:ln/>
-        </p:spPr>
-        <p:txBody>
-          <a:bodyPr/>
-          <a:lstStyle/>
-          <a:p>
-            <a:endParaRPr lang="en-GB"/>
-          </a:p>
-        </p:txBody>
-      </p:sp>
-      <p:sp>
-        <p:nvSpPr>
-          <p:cNvPr id="17" name="Text 15"/>
-          <p:cNvSpPr/>
-          <p:nvPr/>
-        </p:nvSpPr>
-        <p:spPr>
-          <a:xfrm>
-            <a:off x="8707562" y="5345757"/>
-            <a:ext cx="990600" cy="309563"/>
-          </a:xfrm>
-          <a:prstGeom prst="rect">
-            <a:avLst/>
-          </a:prstGeom>
-          <a:noFill/>
-          <a:ln/>
-        </p:spPr>
-        <p:txBody>
-          <a:bodyPr wrap="square" lIns="25400" tIns="25400" rIns="25400" bIns="25400" rtlCol="0" anchor="t">
-            <a:normAutofit fontScale="92500" lnSpcReduction="10000"/>
-          </a:bodyPr>
-          <a:lstStyle/>
-          <a:p>
-            <a:pPr marL="0" indent="0" algn="r">
-              <a:buNone/>
-            </a:pPr>
-            <a:r>
-              <a:rPr lang="en-US" sz="1875" dirty="0">
-                <a:solidFill>
-                  <a:srgbClr val="5C7268"/>
-                </a:solidFill>
-                <a:latin typeface="Courier New" pitchFamily="34" charset="0"/>
-                <a:ea typeface="Courier New" pitchFamily="34" charset="-122"/>
-                <a:cs typeface="Courier New" pitchFamily="34" charset="-120"/>
-              </a:rPr>
-              <a:t>0.784</a:t>
-            </a:r>
-            <a:endParaRPr lang="en-US" sz="1875" dirty="0"/>
-          </a:p>
-        </p:txBody>
-      </p:sp>
-      <p:sp>
-        <p:nvSpPr>
-          <p:cNvPr id="18" name="Text 16"/>
-          <p:cNvSpPr/>
-          <p:nvPr/>
-        </p:nvSpPr>
-        <p:spPr>
-          <a:xfrm>
-            <a:off x="952500" y="5976789"/>
-            <a:ext cx="2305050" cy="323850"/>
-          </a:xfrm>
-          <a:prstGeom prst="rect">
-            <a:avLst/>
-          </a:prstGeom>
-          <a:noFill/>
-          <a:ln/>
-        </p:spPr>
-        <p:txBody>
-          <a:bodyPr wrap="square" lIns="25400" tIns="25400" rIns="25400" bIns="25400" rtlCol="0" anchor="t">
-            <a:normAutofit lnSpcReduction="10000"/>
-          </a:bodyPr>
-          <a:lstStyle/>
-          <a:p>
-            <a:pPr marL="0" indent="0" algn="l">
-              <a:buNone/>
-            </a:pPr>
-            <a:r>
-              <a:rPr lang="en-US" sz="1950" dirty="0">
-                <a:solidFill>
-                  <a:srgbClr val="244236"/>
-                </a:solidFill>
-                <a:latin typeface="Arial" pitchFamily="34" charset="0"/>
-                <a:ea typeface="Arial" pitchFamily="34" charset="-122"/>
-                <a:cs typeface="Arial" pitchFamily="34" charset="-120"/>
-              </a:rPr>
-              <a:t>Random Forest</a:t>
-            </a:r>
-            <a:endParaRPr lang="en-US" sz="1950" dirty="0"/>
-          </a:p>
-        </p:txBody>
-      </p:sp>
-      <p:sp>
-        <p:nvSpPr>
-          <p:cNvPr id="19" name="Shape 17"/>
-          <p:cNvSpPr/>
-          <p:nvPr/>
-        </p:nvSpPr>
-        <p:spPr>
-          <a:xfrm>
-            <a:off x="3219450" y="5938689"/>
-            <a:ext cx="5392862" cy="361950"/>
-          </a:xfrm>
-          <a:prstGeom prst="roundRect">
-            <a:avLst>
-              <a:gd name="adj" fmla="val 15789"/>
-            </a:avLst>
-          </a:prstGeom>
-          <a:solidFill>
-            <a:srgbClr val="E6F5EF"/>
-          </a:solidFill>
-          <a:ln/>
-        </p:spPr>
-        <p:txBody>
-          <a:bodyPr/>
-          <a:lstStyle/>
-          <a:p>
-            <a:endParaRPr lang="en-GB"/>
-          </a:p>
-        </p:txBody>
-      </p:sp>
-      <p:sp>
-        <p:nvSpPr>
-          <p:cNvPr id="20" name="Shape 18"/>
-          <p:cNvSpPr/>
-          <p:nvPr/>
-        </p:nvSpPr>
-        <p:spPr>
-          <a:xfrm>
-            <a:off x="3219450" y="5938689"/>
-            <a:ext cx="4799633" cy="361950"/>
-          </a:xfrm>
-          <a:prstGeom prst="rect">
-            <a:avLst/>
-          </a:prstGeom>
-          <a:solidFill>
-            <a:srgbClr val="66B3A1"/>
-          </a:solidFill>
-          <a:ln/>
-        </p:spPr>
-        <p:txBody>
-          <a:bodyPr/>
-          <a:lstStyle/>
-          <a:p>
-            <a:endParaRPr lang="en-GB"/>
-          </a:p>
-        </p:txBody>
-      </p:sp>
-      <p:sp>
-        <p:nvSpPr>
-          <p:cNvPr id="21" name="Text 19"/>
-          <p:cNvSpPr/>
-          <p:nvPr/>
-        </p:nvSpPr>
-        <p:spPr>
-          <a:xfrm>
-            <a:off x="8707562" y="5983932"/>
-            <a:ext cx="990600" cy="309563"/>
-          </a:xfrm>
-          <a:prstGeom prst="rect">
-            <a:avLst/>
-          </a:prstGeom>
-          <a:noFill/>
-          <a:ln/>
-        </p:spPr>
-        <p:txBody>
-          <a:bodyPr wrap="square" lIns="25400" tIns="25400" rIns="25400" bIns="25400" rtlCol="0" anchor="t">
-            <a:normAutofit fontScale="92500" lnSpcReduction="10000"/>
-          </a:bodyPr>
-          <a:lstStyle/>
-          <a:p>
-            <a:pPr marL="0" indent="0" algn="r">
-              <a:buNone/>
-            </a:pPr>
-            <a:r>
-              <a:rPr lang="en-US" sz="1875" dirty="0">
-                <a:solidFill>
-                  <a:srgbClr val="5C7268"/>
-                </a:solidFill>
-                <a:latin typeface="Courier New" pitchFamily="34" charset="0"/>
-                <a:ea typeface="Courier New" pitchFamily="34" charset="-122"/>
-                <a:cs typeface="Courier New" pitchFamily="34" charset="-120"/>
-              </a:rPr>
-              <a:t>0.833</a:t>
-            </a:r>
-            <a:endParaRPr lang="en-US" sz="1875" dirty="0"/>
-          </a:p>
-        </p:txBody>
-      </p:sp>
-      <p:sp>
-        <p:nvSpPr>
-          <p:cNvPr id="22" name="Text 20"/>
-          <p:cNvSpPr/>
-          <p:nvPr/>
-        </p:nvSpPr>
-        <p:spPr>
-          <a:xfrm>
-            <a:off x="952500" y="6503045"/>
-            <a:ext cx="2305050" cy="338138"/>
-          </a:xfrm>
-          <a:prstGeom prst="rect">
-            <a:avLst/>
-          </a:prstGeom>
-          <a:noFill/>
-          <a:ln/>
-        </p:spPr>
-        <p:txBody>
-          <a:bodyPr wrap="square" lIns="25400" tIns="25400" rIns="25400" bIns="25400" rtlCol="0" anchor="t">
-            <a:normAutofit lnSpcReduction="10000"/>
-          </a:bodyPr>
-          <a:lstStyle/>
-          <a:p>
-            <a:pPr marL="0" indent="0" algn="l">
-              <a:buNone/>
-            </a:pPr>
-            <a:r>
-              <a:rPr lang="en-US" sz="1950" b="1" dirty="0">
-                <a:solidFill>
-                  <a:srgbClr val="063D22"/>
-                </a:solidFill>
-                <a:latin typeface="Arial" pitchFamily="34" charset="0"/>
-                <a:ea typeface="Arial" pitchFamily="34" charset="-122"/>
-                <a:cs typeface="Arial" pitchFamily="34" charset="-120"/>
-              </a:rPr>
-              <a:t>LightGBM</a:t>
-            </a:r>
-            <a:endParaRPr lang="en-US" sz="1950" dirty="0"/>
-          </a:p>
-        </p:txBody>
-      </p:sp>
-      <p:sp>
-        <p:nvSpPr>
-          <p:cNvPr id="23" name="Shape 21"/>
-          <p:cNvSpPr/>
-          <p:nvPr/>
-        </p:nvSpPr>
-        <p:spPr>
-          <a:xfrm>
-            <a:off x="3219450" y="6472089"/>
-            <a:ext cx="5392862" cy="361950"/>
-          </a:xfrm>
-          <a:prstGeom prst="roundRect">
-            <a:avLst>
-              <a:gd name="adj" fmla="val 15789"/>
-            </a:avLst>
-          </a:prstGeom>
-          <a:solidFill>
-            <a:srgbClr val="E6F5EF"/>
-          </a:solidFill>
-          <a:ln/>
-        </p:spPr>
-        <p:txBody>
-          <a:bodyPr/>
-          <a:lstStyle/>
-          <a:p>
-            <a:endParaRPr lang="en-GB"/>
-          </a:p>
-        </p:txBody>
-      </p:sp>
-      <p:sp>
-        <p:nvSpPr>
-          <p:cNvPr id="24" name="Shape 22"/>
-          <p:cNvSpPr/>
-          <p:nvPr/>
-        </p:nvSpPr>
-        <p:spPr>
-          <a:xfrm>
-            <a:off x="3219450" y="6472089"/>
-            <a:ext cx="4907459" cy="361950"/>
-          </a:xfrm>
-          <a:prstGeom prst="rect">
-            <a:avLst/>
-          </a:prstGeom>
-          <a:solidFill>
-            <a:srgbClr val="1A7A57"/>
-          </a:solidFill>
-          <a:ln/>
-        </p:spPr>
-        <p:txBody>
-          <a:bodyPr/>
-          <a:lstStyle/>
-          <a:p>
-            <a:endParaRPr lang="en-GB"/>
-          </a:p>
-        </p:txBody>
-      </p:sp>
-      <p:sp>
-        <p:nvSpPr>
-          <p:cNvPr id="25" name="Text 23"/>
-          <p:cNvSpPr/>
-          <p:nvPr/>
-        </p:nvSpPr>
-        <p:spPr>
-          <a:xfrm>
-            <a:off x="8707562" y="6498282"/>
-            <a:ext cx="990600" cy="347663"/>
-          </a:xfrm>
-          <a:prstGeom prst="rect">
-            <a:avLst/>
-          </a:prstGeom>
-          <a:noFill/>
-          <a:ln/>
-        </p:spPr>
-        <p:txBody>
-          <a:bodyPr wrap="square" lIns="25400" tIns="25400" rIns="25400" bIns="25400" rtlCol="0" anchor="t">
-            <a:normAutofit/>
-          </a:bodyPr>
-          <a:lstStyle/>
-          <a:p>
-            <a:pPr marL="0" indent="0" algn="r">
-              <a:buNone/>
-            </a:pPr>
-            <a:r>
-              <a:rPr lang="en-US" sz="1875" b="1" dirty="0">
-                <a:solidFill>
-                  <a:srgbClr val="063D22"/>
-                </a:solidFill>
-                <a:latin typeface="Courier New" pitchFamily="34" charset="0"/>
-                <a:ea typeface="Courier New" pitchFamily="34" charset="-122"/>
-                <a:cs typeface="Courier New" pitchFamily="34" charset="-120"/>
-              </a:rPr>
-              <a:t>0.836</a:t>
-            </a:r>
-            <a:endParaRPr lang="en-US" sz="1875" dirty="0"/>
-          </a:p>
-        </p:txBody>
-      </p:sp>
-      <p:sp>
-        <p:nvSpPr>
-          <p:cNvPr id="26" name="Text 24"/>
-          <p:cNvSpPr/>
-          <p:nvPr/>
-        </p:nvSpPr>
-        <p:spPr>
-          <a:xfrm>
-            <a:off x="952500" y="8279309"/>
-            <a:ext cx="9008031" cy="998041"/>
-          </a:xfrm>
-          <a:prstGeom prst="rect">
-            <a:avLst/>
-          </a:prstGeom>
-          <a:noFill/>
-          <a:ln/>
-        </p:spPr>
-        <p:txBody>
-          <a:bodyPr wrap="square" lIns="25400" tIns="25400" rIns="25400" bIns="25400" rtlCol="0" anchor="t">
-            <a:normAutofit fontScale="92500" lnSpcReduction="20000"/>
-          </a:bodyPr>
-          <a:lstStyle/>
-          <a:p>
-            <a:pPr marL="0" indent="0" algn="l">
-              <a:lnSpc>
-                <a:spcPct val="140000"/>
-              </a:lnSpc>
-              <a:buNone/>
-            </a:pPr>
-            <a:r>
-              <a:rPr lang="en-US" sz="1800" dirty="0">
-                <a:solidFill>
-                  <a:srgbClr val="5C7268"/>
-                </a:solidFill>
-                <a:latin typeface="Courier New" pitchFamily="34" charset="0"/>
-                <a:ea typeface="Courier New" pitchFamily="34" charset="-122"/>
-                <a:cs typeface="Courier New" pitchFamily="34" charset="-120"/>
-              </a:rPr>
-              <a:t>Bars scaled from 0.70 · final label uses a </a:t>
-            </a:r>
-            <a:r>
-              <a:rPr lang="en-US" sz="1800" dirty="0">
-                <a:solidFill>
-                  <a:srgbClr val="063D22"/>
-                </a:solidFill>
-                <a:latin typeface="Courier New" pitchFamily="34" charset="0"/>
-                <a:ea typeface="Courier New" pitchFamily="34" charset="-122"/>
-                <a:cs typeface="Courier New" pitchFamily="34" charset="-120"/>
-              </a:rPr>
-              <a:t>smooth threshold </a:t>
-            </a:r>
-            <a:r>
-              <a:rPr lang="en-US" sz="1800" dirty="0">
-                <a:solidFill>
-                  <a:srgbClr val="5C7268"/>
-                </a:solidFill>
-                <a:latin typeface="Courier New" pitchFamily="34" charset="0"/>
-                <a:ea typeface="Courier New" pitchFamily="34" charset="-122"/>
-                <a:cs typeface="Courier New" pitchFamily="34" charset="-120"/>
-              </a:rPr>
-              <a:t>= average of the top-1% of candidate cutoffs (more robust than a single argmax cutoff).</a:t>
-            </a:r>
-            <a:endParaRPr lang="en-US" sz="1800" dirty="0"/>
-          </a:p>
-        </p:txBody>
-      </p:sp>
-      <p:sp>
-        <p:nvSpPr>
-          <p:cNvPr id="27" name="Shape 25"/>
-          <p:cNvSpPr/>
-          <p:nvPr/>
-        </p:nvSpPr>
-        <p:spPr>
-          <a:xfrm>
-            <a:off x="10307762" y="2350368"/>
-            <a:ext cx="7027738" cy="3468886"/>
-          </a:xfrm>
-          <a:prstGeom prst="roundRect">
-            <a:avLst>
-              <a:gd name="adj" fmla="val 3295"/>
-            </a:avLst>
-          </a:prstGeom>
-          <a:solidFill>
-            <a:srgbClr val="E6F5EF"/>
-          </a:solidFill>
-          <a:ln/>
-        </p:spPr>
-        <p:txBody>
-          <a:bodyPr/>
-          <a:lstStyle/>
-          <a:p>
-            <a:endParaRPr lang="en-GB"/>
-          </a:p>
-        </p:txBody>
-      </p:sp>
-      <p:sp>
-        <p:nvSpPr>
-          <p:cNvPr id="28" name="Text 26"/>
-          <p:cNvSpPr/>
-          <p:nvPr/>
-        </p:nvSpPr>
-        <p:spPr>
-          <a:xfrm>
-            <a:off x="10593512" y="2617068"/>
-            <a:ext cx="7101862" cy="361950"/>
-          </a:xfrm>
-          <a:prstGeom prst="rect">
-            <a:avLst/>
-          </a:prstGeom>
-          <a:noFill/>
-          <a:ln/>
-        </p:spPr>
-        <p:txBody>
-          <a:bodyPr wrap="square" lIns="25400" tIns="25400" rIns="25400" bIns="25400" rtlCol="0" anchor="t">
-            <a:normAutofit lnSpcReduction="10000"/>
-          </a:bodyPr>
-          <a:lstStyle/>
-          <a:p>
-            <a:pPr marL="0" indent="0" algn="l">
-              <a:buNone/>
-            </a:pPr>
-            <a:r>
-              <a:rPr lang="en-US" sz="2100" b="1" dirty="0">
-                <a:solidFill>
-                  <a:srgbClr val="063D22"/>
-                </a:solidFill>
-                <a:latin typeface="Arial" pitchFamily="34" charset="0"/>
-                <a:ea typeface="Arial" pitchFamily="34" charset="-122"/>
-                <a:cs typeface="Arial" pitchFamily="34" charset="-120"/>
-              </a:rPr>
-              <a:t>Adversarial validation</a:t>
-            </a:r>
-            <a:endParaRPr lang="en-US" sz="2100" dirty="0"/>
-          </a:p>
-        </p:txBody>
-      </p:sp>
-      <p:sp>
-        <p:nvSpPr>
-          <p:cNvPr id="29" name="Shape 27"/>
-          <p:cNvSpPr/>
-          <p:nvPr/>
-        </p:nvSpPr>
-        <p:spPr>
-          <a:xfrm>
-            <a:off x="10593512" y="3093318"/>
-            <a:ext cx="3142357" cy="981075"/>
-          </a:xfrm>
-          <a:prstGeom prst="roundRect">
-            <a:avLst>
-              <a:gd name="adj" fmla="val 7767"/>
-            </a:avLst>
-          </a:prstGeom>
-          <a:solidFill>
-            <a:srgbClr val="FFFFFF"/>
-          </a:solidFill>
-          <a:ln w="9525">
+          <a:ln w="19050">
             <a:solidFill>
-              <a:srgbClr val="D2E6DD"/>
+              <a:srgbClr val="2E8B62"/>
             </a:solidFill>
-            <a:prstDash val="solid"/>
-          </a:ln>
-        </p:spPr>
-        <p:txBody>
-          <a:bodyPr/>
-          <a:lstStyle/>
-          <a:p>
-            <a:endParaRPr lang="en-GB"/>
-          </a:p>
-        </p:txBody>
-      </p:sp>
-      <p:sp>
-        <p:nvSpPr>
-          <p:cNvPr id="30" name="Text 28"/>
-          <p:cNvSpPr/>
-          <p:nvPr/>
-        </p:nvSpPr>
-        <p:spPr>
-          <a:xfrm>
-            <a:off x="10755437" y="3236193"/>
-            <a:ext cx="3100358" cy="295275"/>
-          </a:xfrm>
-          <a:prstGeom prst="rect">
-            <a:avLst/>
-          </a:prstGeom>
-          <a:noFill/>
-          <a:ln/>
-        </p:spPr>
-        <p:txBody>
-          <a:bodyPr wrap="square" lIns="25400" tIns="25400" rIns="25400" bIns="25400" rtlCol="0" anchor="t">
-            <a:normAutofit fontScale="92500" lnSpcReduction="10000"/>
-          </a:bodyPr>
-          <a:lstStyle/>
-          <a:p>
-            <a:pPr marL="0" indent="0" algn="l">
-              <a:buNone/>
-            </a:pPr>
-            <a:r>
-              <a:rPr lang="en-US" sz="1800" dirty="0">
-                <a:solidFill>
-                  <a:srgbClr val="5C7268"/>
-                </a:solidFill>
-                <a:latin typeface="Courier New" pitchFamily="34" charset="0"/>
-                <a:ea typeface="Courier New" pitchFamily="34" charset="-122"/>
-                <a:cs typeface="Courier New" pitchFamily="34" charset="-120"/>
-              </a:rPr>
-              <a:t>ALL FEATURES</a:t>
-            </a:r>
-            <a:endParaRPr lang="en-US" sz="1800" dirty="0"/>
-          </a:p>
-        </p:txBody>
-      </p:sp>
-      <p:sp>
-        <p:nvSpPr>
-          <p:cNvPr id="31" name="Text 29"/>
-          <p:cNvSpPr/>
-          <p:nvPr/>
-        </p:nvSpPr>
-        <p:spPr>
-          <a:xfrm>
-            <a:off x="10755437" y="3550518"/>
-            <a:ext cx="3100358" cy="419100"/>
-          </a:xfrm>
-          <a:prstGeom prst="rect">
-            <a:avLst/>
-          </a:prstGeom>
-          <a:noFill/>
-          <a:ln/>
-        </p:spPr>
-        <p:txBody>
-          <a:bodyPr wrap="square" lIns="25400" tIns="25400" rIns="25400" bIns="25400" rtlCol="0" anchor="t">
-            <a:normAutofit lnSpcReduction="10000"/>
-          </a:bodyPr>
-          <a:lstStyle/>
-          <a:p>
-            <a:pPr marL="0" indent="0" algn="l">
-              <a:buNone/>
-            </a:pPr>
-            <a:r>
-              <a:rPr lang="en-US" sz="2475" b="1" dirty="0">
-                <a:solidFill>
-                  <a:srgbClr val="B3573F"/>
-                </a:solidFill>
-                <a:latin typeface="Arial" pitchFamily="34" charset="0"/>
-                <a:ea typeface="Arial" pitchFamily="34" charset="-122"/>
-                <a:cs typeface="Arial" pitchFamily="34" charset="-120"/>
-              </a:rPr>
-              <a:t>AUC 1.000</a:t>
-            </a:r>
-            <a:endParaRPr lang="en-US" sz="2475" dirty="0"/>
-          </a:p>
-        </p:txBody>
-      </p:sp>
-      <p:sp>
-        <p:nvSpPr>
-          <p:cNvPr id="32" name="Shape 30"/>
-          <p:cNvSpPr/>
-          <p:nvPr/>
-        </p:nvSpPr>
-        <p:spPr>
-          <a:xfrm>
-            <a:off x="13907319" y="3093318"/>
-            <a:ext cx="3142431" cy="981075"/>
-          </a:xfrm>
-          <a:prstGeom prst="roundRect">
-            <a:avLst>
-              <a:gd name="adj" fmla="val 7767"/>
-            </a:avLst>
-          </a:prstGeom>
-          <a:solidFill>
-            <a:srgbClr val="FFFFFF"/>
-          </a:solidFill>
-          <a:ln w="9525">
-            <a:solidFill>
-              <a:srgbClr val="D2E6DD"/>
-            </a:solidFill>
-            <a:prstDash val="solid"/>
-          </a:ln>
-        </p:spPr>
-        <p:txBody>
-          <a:bodyPr/>
-          <a:lstStyle/>
-          <a:p>
-            <a:endParaRPr lang="en-GB"/>
-          </a:p>
-        </p:txBody>
-      </p:sp>
-      <p:sp>
-        <p:nvSpPr>
-          <p:cNvPr id="33" name="Text 31"/>
-          <p:cNvSpPr/>
-          <p:nvPr/>
-        </p:nvSpPr>
-        <p:spPr>
-          <a:xfrm>
-            <a:off x="14069244" y="3236193"/>
-            <a:ext cx="3100440" cy="295275"/>
-          </a:xfrm>
-          <a:prstGeom prst="rect">
-            <a:avLst/>
-          </a:prstGeom>
-          <a:noFill/>
-          <a:ln/>
-        </p:spPr>
-        <p:txBody>
-          <a:bodyPr wrap="square" lIns="25400" tIns="25400" rIns="25400" bIns="25400" rtlCol="0" anchor="t">
-            <a:normAutofit fontScale="92500" lnSpcReduction="10000"/>
-          </a:bodyPr>
-          <a:lstStyle/>
-          <a:p>
-            <a:pPr marL="0" indent="0" algn="l">
-              <a:buNone/>
-            </a:pPr>
-            <a:r>
-              <a:rPr lang="en-US" sz="1800" dirty="0">
-                <a:solidFill>
-                  <a:srgbClr val="5C7268"/>
-                </a:solidFill>
-                <a:latin typeface="Courier New" pitchFamily="34" charset="0"/>
-                <a:ea typeface="Courier New" pitchFamily="34" charset="-122"/>
-                <a:cs typeface="Courier New" pitchFamily="34" charset="-120"/>
-              </a:rPr>
-              <a:t>WITHOUT DATE</a:t>
-            </a:r>
-            <a:endParaRPr lang="en-US" sz="1800" dirty="0"/>
-          </a:p>
-        </p:txBody>
-      </p:sp>
-      <p:sp>
-        <p:nvSpPr>
-          <p:cNvPr id="34" name="Text 32"/>
-          <p:cNvSpPr/>
-          <p:nvPr/>
-        </p:nvSpPr>
-        <p:spPr>
-          <a:xfrm>
-            <a:off x="14069244" y="3550518"/>
-            <a:ext cx="3100440" cy="419100"/>
-          </a:xfrm>
-          <a:prstGeom prst="rect">
-            <a:avLst/>
-          </a:prstGeom>
-          <a:noFill/>
-          <a:ln/>
-        </p:spPr>
-        <p:txBody>
-          <a:bodyPr wrap="square" lIns="25400" tIns="25400" rIns="25400" bIns="25400" rtlCol="0" anchor="t">
-            <a:normAutofit lnSpcReduction="10000"/>
-          </a:bodyPr>
-          <a:lstStyle/>
-          <a:p>
-            <a:pPr marL="0" indent="0" algn="l">
-              <a:buNone/>
-            </a:pPr>
-            <a:r>
-              <a:rPr lang="en-US" sz="2475" b="1" dirty="0">
-                <a:solidFill>
-                  <a:srgbClr val="1A7A57"/>
-                </a:solidFill>
-                <a:latin typeface="Arial" pitchFamily="34" charset="0"/>
-                <a:ea typeface="Arial" pitchFamily="34" charset="-122"/>
-                <a:cs typeface="Arial" pitchFamily="34" charset="-120"/>
-              </a:rPr>
-              <a:t>AUC 0.497</a:t>
-            </a:r>
-            <a:endParaRPr lang="en-US" sz="2475" dirty="0"/>
-          </a:p>
-        </p:txBody>
-      </p:sp>
-      <p:sp>
-        <p:nvSpPr>
-          <p:cNvPr id="35" name="Text 33"/>
-          <p:cNvSpPr/>
-          <p:nvPr/>
-        </p:nvSpPr>
-        <p:spPr>
-          <a:xfrm>
-            <a:off x="10593512" y="4226793"/>
-            <a:ext cx="6649926" cy="1363861"/>
-          </a:xfrm>
-          <a:prstGeom prst="rect">
-            <a:avLst/>
-          </a:prstGeom>
-          <a:noFill/>
-          <a:ln/>
-        </p:spPr>
-        <p:txBody>
-          <a:bodyPr wrap="square" lIns="25400" tIns="25400" rIns="25400" bIns="25400" rtlCol="0" anchor="t">
-            <a:normAutofit fontScale="92500" lnSpcReduction="20000"/>
-          </a:bodyPr>
-          <a:lstStyle/>
-          <a:p>
-            <a:pPr marL="0" indent="0" algn="l">
-              <a:lnSpc>
-                <a:spcPct val="145000"/>
-              </a:lnSpc>
-              <a:buNone/>
-            </a:pPr>
-            <a:r>
-              <a:rPr lang="en-US" sz="1800" dirty="0">
-                <a:solidFill>
-                  <a:srgbClr val="244236"/>
-                </a:solidFill>
-                <a:latin typeface="Arial" pitchFamily="34" charset="0"/>
-                <a:ea typeface="Arial" pitchFamily="34" charset="-122"/>
-                <a:cs typeface="Arial" pitchFamily="34" charset="-120"/>
-              </a:rPr>
-              <a:t>A classifier separates train from test perfectly — but only via the </a:t>
-            </a:r>
-            <a:r>
-              <a:rPr lang="en-US" sz="1800" b="1" dirty="0">
-                <a:solidFill>
-                  <a:srgbClr val="063D22"/>
-                </a:solidFill>
-                <a:latin typeface="Arial" pitchFamily="34" charset="0"/>
-                <a:ea typeface="Arial" pitchFamily="34" charset="-122"/>
-                <a:cs typeface="Arial" pitchFamily="34" charset="-120"/>
-              </a:rPr>
-              <a:t>date </a:t>
-            </a:r>
-            <a:r>
-              <a:rPr lang="en-US" sz="1800" dirty="0">
-                <a:solidFill>
-                  <a:srgbClr val="244236"/>
-                </a:solidFill>
-                <a:latin typeface="Arial" pitchFamily="34" charset="0"/>
-                <a:ea typeface="Arial" pitchFamily="34" charset="-122"/>
-                <a:cs typeface="Arial" pitchFamily="34" charset="-120"/>
-              </a:rPr>
-              <a:t>(test is all May 2026). Drop the date features and it’s no better than chance, so the sets are </a:t>
-            </a:r>
-            <a:r>
-              <a:rPr lang="en-US" sz="1800" b="1" dirty="0">
-                <a:solidFill>
-                  <a:srgbClr val="063D22"/>
-                </a:solidFill>
-                <a:latin typeface="Arial" pitchFamily="34" charset="0"/>
-                <a:ea typeface="Arial" pitchFamily="34" charset="-122"/>
-                <a:cs typeface="Arial" pitchFamily="34" charset="-120"/>
-              </a:rPr>
-              <a:t>identically distributed apart from time </a:t>
-            </a:r>
-            <a:r>
-              <a:rPr lang="en-US" sz="1800" dirty="0">
-                <a:solidFill>
-                  <a:srgbClr val="244236"/>
-                </a:solidFill>
-                <a:latin typeface="Arial" pitchFamily="34" charset="0"/>
-                <a:ea typeface="Arial" pitchFamily="34" charset="-122"/>
-                <a:cs typeface="Arial" pitchFamily="34" charset="-120"/>
-              </a:rPr>
-              <a:t>.</a:t>
-            </a:r>
-            <a:endParaRPr lang="en-US" sz="1800" dirty="0"/>
-          </a:p>
-        </p:txBody>
-      </p:sp>
-      <p:sp>
-        <p:nvSpPr>
-          <p:cNvPr id="36" name="Shape 34"/>
-          <p:cNvSpPr/>
-          <p:nvPr/>
-        </p:nvSpPr>
-        <p:spPr>
-          <a:xfrm>
-            <a:off x="10307762" y="6028804"/>
-            <a:ext cx="7027738" cy="3210446"/>
-          </a:xfrm>
-          <a:prstGeom prst="roundRect">
-            <a:avLst>
-              <a:gd name="adj" fmla="val 3560"/>
-            </a:avLst>
-          </a:prstGeom>
-          <a:solidFill>
-            <a:srgbClr val="E6F5EF"/>
-          </a:solidFill>
-          <a:ln/>
-        </p:spPr>
-        <p:txBody>
-          <a:bodyPr/>
-          <a:lstStyle/>
-          <a:p>
-            <a:endParaRPr lang="en-GB"/>
-          </a:p>
-        </p:txBody>
-      </p:sp>
-      <p:sp>
-        <p:nvSpPr>
-          <p:cNvPr id="37" name="Text 35"/>
-          <p:cNvSpPr/>
-          <p:nvPr/>
-        </p:nvSpPr>
-        <p:spPr>
-          <a:xfrm>
-            <a:off x="10574462" y="6257404"/>
-            <a:ext cx="7143772" cy="338138"/>
-          </a:xfrm>
-          <a:prstGeom prst="rect">
-            <a:avLst/>
-          </a:prstGeom>
-          <a:noFill/>
-          <a:ln/>
-        </p:spPr>
-        <p:txBody>
-          <a:bodyPr wrap="square" lIns="25400" tIns="25400" rIns="25400" bIns="25400" rtlCol="0" anchor="t">
-            <a:normAutofit lnSpcReduction="10000"/>
-          </a:bodyPr>
-          <a:lstStyle/>
-          <a:p>
-            <a:pPr marL="0" indent="0" algn="l">
-              <a:buNone/>
-            </a:pPr>
-            <a:r>
-              <a:rPr lang="en-US" sz="1950" b="1" dirty="0">
-                <a:solidFill>
-                  <a:srgbClr val="063D22"/>
-                </a:solidFill>
-                <a:latin typeface="Arial" pitchFamily="34" charset="0"/>
-                <a:ea typeface="Arial" pitchFamily="34" charset="-122"/>
-                <a:cs typeface="Arial" pitchFamily="34" charset="-120"/>
-              </a:rPr>
-              <a:t>What drives the model</a:t>
-            </a:r>
-            <a:endParaRPr lang="en-US" sz="1950" dirty="0"/>
-          </a:p>
-        </p:txBody>
-      </p:sp>
-      <p:sp>
-        <p:nvSpPr>
-          <p:cNvPr id="38" name="Text 36"/>
-          <p:cNvSpPr/>
-          <p:nvPr/>
-        </p:nvSpPr>
-        <p:spPr>
-          <a:xfrm>
-            <a:off x="10574462" y="6595542"/>
-            <a:ext cx="7143772" cy="335235"/>
-          </a:xfrm>
-          <a:prstGeom prst="rect">
-            <a:avLst/>
-          </a:prstGeom>
-          <a:noFill/>
-          <a:ln/>
-        </p:spPr>
-        <p:txBody>
-          <a:bodyPr wrap="square" lIns="25400" tIns="25400" rIns="25400" bIns="25400" rtlCol="0" anchor="t">
-            <a:normAutofit fontScale="92500" lnSpcReduction="20000"/>
-          </a:bodyPr>
-          <a:lstStyle/>
-          <a:p>
-            <a:pPr marL="0" indent="0" algn="l">
-              <a:lnSpc>
-                <a:spcPct val="130000"/>
-              </a:lnSpc>
-              <a:buNone/>
-            </a:pPr>
-            <a:r>
-              <a:rPr lang="en-US" sz="1800" dirty="0">
-                <a:solidFill>
-                  <a:srgbClr val="5C7268"/>
-                </a:solidFill>
-                <a:latin typeface="Arial" pitchFamily="34" charset="0"/>
-                <a:ea typeface="Arial" pitchFamily="34" charset="-122"/>
-                <a:cs typeface="Arial" pitchFamily="34" charset="-120"/>
-              </a:rPr>
-              <a:t>Most important features, by gain.</a:t>
-            </a:r>
-            <a:endParaRPr lang="en-US" sz="1800" dirty="0"/>
-          </a:p>
-        </p:txBody>
-      </p:sp>
-      <p:sp>
-        <p:nvSpPr>
-          <p:cNvPr id="39" name="Shape 37"/>
-          <p:cNvSpPr/>
-          <p:nvPr/>
-        </p:nvSpPr>
-        <p:spPr>
-          <a:xfrm>
-            <a:off x="952500" y="9239250"/>
-            <a:ext cx="16383000" cy="9525"/>
-          </a:xfrm>
-          <a:prstGeom prst="rect">
-            <a:avLst/>
-          </a:prstGeom>
-          <a:solidFill>
-            <a:srgbClr val="D2E6DD"/>
-          </a:solidFill>
-          <a:ln/>
-        </p:spPr>
-        <p:txBody>
-          <a:bodyPr/>
-          <a:lstStyle/>
-          <a:p>
-            <a:endParaRPr lang="en-GB"/>
-          </a:p>
-        </p:txBody>
-      </p:sp>
-      <p:sp>
-        <p:nvSpPr>
-          <p:cNvPr id="40" name="Text 38"/>
-          <p:cNvSpPr/>
-          <p:nvPr/>
-        </p:nvSpPr>
-        <p:spPr>
-          <a:xfrm>
-            <a:off x="952500" y="9458325"/>
-            <a:ext cx="16874490" cy="295275"/>
-          </a:xfrm>
-          <a:prstGeom prst="rect">
-            <a:avLst/>
-          </a:prstGeom>
-          <a:noFill/>
-          <a:ln/>
-        </p:spPr>
-        <p:txBody>
-          <a:bodyPr wrap="square" lIns="25400" tIns="25400" rIns="25400" bIns="25400" rtlCol="0" anchor="t">
-            <a:normAutofit fontScale="92500" lnSpcReduction="10000"/>
-          </a:bodyPr>
-          <a:lstStyle/>
-          <a:p>
-            <a:pPr marL="0" indent="0" algn="l">
-              <a:buNone/>
-            </a:pPr>
-            <a:r>
-              <a:rPr lang="en-US" sz="1800" dirty="0">
-                <a:solidFill>
-                  <a:srgbClr val="5C7268"/>
-                </a:solidFill>
-                <a:latin typeface="Courier New" pitchFamily="34" charset="0"/>
-                <a:ea typeface="Courier New" pitchFamily="34" charset="-122"/>
-                <a:cs typeface="Courier New" pitchFamily="34" charset="-120"/>
-              </a:rPr>
-              <a:t>Source: team validation · rolling next-month testing</a:t>
-            </a:r>
-            <a:endParaRPr lang="en-US" sz="1800" dirty="0"/>
-          </a:p>
-        </p:txBody>
-      </p:sp>
-      <p:pic>
-        <p:nvPicPr>
-          <p:cNvPr id="41" name="Picture 40" descr="deck_importance.png"/>
-          <p:cNvPicPr>
-            <a:picLocks noChangeAspect="1"/>
-          </p:cNvPicPr>
-          <p:nvPr/>
-        </p:nvPicPr>
-        <p:blipFill>
-          <a:blip r:embed="rId3"/>
-          <a:stretch>
-            <a:fillRect/>
-          </a:stretch>
-        </p:blipFill>
-        <p:spPr>
-          <a:xfrm>
-            <a:off x="10515600" y="6967728"/>
-            <a:ext cx="6583680" cy="2139696"/>
-          </a:xfrm>
-          <a:prstGeom prst="rect">
-            <a:avLst/>
-          </a:prstGeom>
-        </p:spPr>
-      </p:pic>
-      <p:sp>
-        <p:nvSpPr>
-          <p:cNvPr id="42" name="Rounded Rectangle 41"/>
-          <p:cNvSpPr/>
-          <p:nvPr/>
-        </p:nvSpPr>
-        <p:spPr>
-          <a:xfrm>
-            <a:off x="950976" y="6967728"/>
-            <a:ext cx="8595360" cy="1207008"/>
-          </a:xfrm>
-          <a:prstGeom prst="roundRect">
-            <a:avLst/>
-          </a:prstGeom>
-          <a:solidFill>
-            <a:srgbClr val="063D22"/>
-          </a:solidFill>
-          <a:ln>
-            <a:noFill/>
           </a:ln>
           <a:effectLst/>
         </p:spPr>
@@ -13952,54 +12629,782 @@
           </a:fontRef>
         </p:style>
         <p:txBody>
-          <a:bodyPr rtlCol="0" anchor="ctr" wrap="square" lIns="274320" tIns="146304" rIns="182880" bIns="109728"/>
-          <a:lstStyle/>
-          <a:p>
-            <a:pPr algn="l">
-              <a:spcAft>
-                <a:spcPts val="300"/>
-              </a:spcAft>
-            </a:pPr>
+          <a:bodyPr rtlCol="0" anchor="ctr" wrap="square"/>
+          <a:lstStyle/>
+          <a:p>
+            <a:pPr algn="ctr"/>
+            <a:r>
+              <a:rPr sz="1800" b="1">
+                <a:solidFill>
+                  <a:srgbClr val="063D22"/>
+                </a:solidFill>
+                <a:latin typeface="Arial"/>
+              </a:rPr>
+              <a:t>clean X</a:t>
+            </a:r>
+          </a:p>
+          <a:p>
+            <a:pPr algn="ctr"/>
             <a:r>
               <a:rPr sz="1300" b="0">
                 <a:solidFill>
-                  <a:srgbClr val="8FD0BB"/>
-                </a:solidFill>
-                <a:latin typeface="Courier New"/>
-              </a:rPr>
-              <a:t>FINAL MODEL</a:t>
-            </a:r>
-          </a:p>
-          <a:p>
-            <a:pPr algn="l">
-              <a:spcAft>
-                <a:spcPts val="300"/>
-              </a:spcAft>
-            </a:pPr>
-            <a:r>
-              <a:rPr sz="1700" b="1">
+                  <a:srgbClr val="5C7268"/>
+                </a:solidFill>
+                <a:latin typeface="Arial"/>
+              </a:rPr>
+              <a:t>20 features</a:t>
+            </a:r>
+          </a:p>
+        </p:txBody>
+      </p:sp>
+      <p:sp>
+        <p:nvSpPr>
+          <p:cNvPr id="42" name="Rounded Rectangle 41"/>
+          <p:cNvSpPr/>
+          <p:nvPr/>
+        </p:nvSpPr>
+        <p:spPr>
+          <a:xfrm>
+            <a:off x="5029200" y="2148840"/>
+            <a:ext cx="4114800" cy="749808"/>
+          </a:xfrm>
+          <a:prstGeom prst="roundRect">
+            <a:avLst/>
+          </a:prstGeom>
+          <a:solidFill>
+            <a:srgbClr val="FFFFFF"/>
+          </a:solidFill>
+          <a:ln w="19050">
+            <a:solidFill>
+              <a:srgbClr val="2E8B62"/>
+            </a:solidFill>
+          </a:ln>
+          <a:effectLst/>
+        </p:spPr>
+        <p:style>
+          <a:lnRef idx="1">
+            <a:schemeClr val="accent1"/>
+          </a:lnRef>
+          <a:fillRef idx="3">
+            <a:schemeClr val="accent1"/>
+          </a:fillRef>
+          <a:effectRef idx="2">
+            <a:schemeClr val="accent1"/>
+          </a:effectRef>
+          <a:fontRef idx="minor">
+            <a:schemeClr val="lt1"/>
+          </a:fontRef>
+        </p:style>
+        <p:txBody>
+          <a:bodyPr rtlCol="0" anchor="ctr" wrap="square"/>
+          <a:lstStyle/>
+          <a:p>
+            <a:pPr algn="ctr"/>
+            <a:r>
+              <a:rPr sz="1600" b="1">
+                <a:solidFill>
+                  <a:srgbClr val="063D22"/>
+                </a:solidFill>
+                <a:latin typeface="Arial"/>
+              </a:rPr>
+              <a:t>9 × LightGBM</a:t>
+            </a:r>
+          </a:p>
+        </p:txBody>
+      </p:sp>
+      <p:sp>
+        <p:nvSpPr>
+          <p:cNvPr id="43" name="Rounded Rectangle 42"/>
+          <p:cNvSpPr/>
+          <p:nvPr/>
+        </p:nvSpPr>
+        <p:spPr>
+          <a:xfrm>
+            <a:off x="5029200" y="2962656"/>
+            <a:ext cx="4114800" cy="749808"/>
+          </a:xfrm>
+          <a:prstGeom prst="roundRect">
+            <a:avLst/>
+          </a:prstGeom>
+          <a:solidFill>
+            <a:srgbClr val="FFFFFF"/>
+          </a:solidFill>
+          <a:ln w="19050">
+            <a:solidFill>
+              <a:srgbClr val="2E8B62"/>
+            </a:solidFill>
+          </a:ln>
+          <a:effectLst/>
+        </p:spPr>
+        <p:style>
+          <a:lnRef idx="1">
+            <a:schemeClr val="accent1"/>
+          </a:lnRef>
+          <a:fillRef idx="3">
+            <a:schemeClr val="accent1"/>
+          </a:fillRef>
+          <a:effectRef idx="2">
+            <a:schemeClr val="accent1"/>
+          </a:effectRef>
+          <a:fontRef idx="minor">
+            <a:schemeClr val="lt1"/>
+          </a:fontRef>
+        </p:style>
+        <p:txBody>
+          <a:bodyPr rtlCol="0" anchor="ctr" wrap="square"/>
+          <a:lstStyle/>
+          <a:p>
+            <a:pPr algn="ctr"/>
+            <a:r>
+              <a:rPr sz="1600" b="1">
+                <a:solidFill>
+                  <a:srgbClr val="063D22"/>
+                </a:solidFill>
+                <a:latin typeface="Arial"/>
+              </a:rPr>
+              <a:t>3 × XGBoost</a:t>
+            </a:r>
+          </a:p>
+        </p:txBody>
+      </p:sp>
+      <p:sp>
+        <p:nvSpPr>
+          <p:cNvPr id="44" name="Rounded Rectangle 43"/>
+          <p:cNvSpPr/>
+          <p:nvPr/>
+        </p:nvSpPr>
+        <p:spPr>
+          <a:xfrm>
+            <a:off x="5029200" y="3776472"/>
+            <a:ext cx="4114800" cy="749808"/>
+          </a:xfrm>
+          <a:prstGeom prst="roundRect">
+            <a:avLst/>
+          </a:prstGeom>
+          <a:solidFill>
+            <a:srgbClr val="FFFFFF"/>
+          </a:solidFill>
+          <a:ln w="19050">
+            <a:solidFill>
+              <a:srgbClr val="2E8B62"/>
+            </a:solidFill>
+          </a:ln>
+          <a:effectLst/>
+        </p:spPr>
+        <p:style>
+          <a:lnRef idx="1">
+            <a:schemeClr val="accent1"/>
+          </a:lnRef>
+          <a:fillRef idx="3">
+            <a:schemeClr val="accent1"/>
+          </a:fillRef>
+          <a:effectRef idx="2">
+            <a:schemeClr val="accent1"/>
+          </a:effectRef>
+          <a:fontRef idx="minor">
+            <a:schemeClr val="lt1"/>
+          </a:fontRef>
+        </p:style>
+        <p:txBody>
+          <a:bodyPr rtlCol="0" anchor="ctr" wrap="square"/>
+          <a:lstStyle/>
+          <a:p>
+            <a:pPr algn="ctr"/>
+            <a:r>
+              <a:rPr sz="1600" b="1">
+                <a:solidFill>
+                  <a:srgbClr val="063D22"/>
+                </a:solidFill>
+                <a:latin typeface="Arial"/>
+              </a:rPr>
+              <a:t>4 × CatBoost</a:t>
+            </a:r>
+          </a:p>
+        </p:txBody>
+      </p:sp>
+      <p:sp>
+        <p:nvSpPr>
+          <p:cNvPr id="45" name="Rounded Rectangle 44"/>
+          <p:cNvSpPr/>
+          <p:nvPr/>
+        </p:nvSpPr>
+        <p:spPr>
+          <a:xfrm>
+            <a:off x="10424160" y="2697480"/>
+            <a:ext cx="3108960" cy="1280160"/>
+          </a:xfrm>
+          <a:prstGeom prst="roundRect">
+            <a:avLst/>
+          </a:prstGeom>
+          <a:solidFill>
+            <a:srgbClr val="2E8B62"/>
+          </a:solidFill>
+          <a:ln>
+            <a:noFill/>
+          </a:ln>
+          <a:effectLst/>
+        </p:spPr>
+        <p:style>
+          <a:lnRef idx="1">
+            <a:schemeClr val="accent1"/>
+          </a:lnRef>
+          <a:fillRef idx="3">
+            <a:schemeClr val="accent1"/>
+          </a:fillRef>
+          <a:effectRef idx="2">
+            <a:schemeClr val="accent1"/>
+          </a:effectRef>
+          <a:fontRef idx="minor">
+            <a:schemeClr val="lt1"/>
+          </a:fontRef>
+        </p:style>
+        <p:txBody>
+          <a:bodyPr rtlCol="0" anchor="ctr" wrap="square"/>
+          <a:lstStyle/>
+          <a:p>
+            <a:pPr algn="ctr"/>
+            <a:r>
+              <a:rPr sz="1800" b="1">
                 <a:solidFill>
                   <a:srgbClr val="FFFFFF"/>
                 </a:solidFill>
                 <a:latin typeface="Arial"/>
               </a:rPr>
-              <a:t>Ensemble — LightGBM + XGBoost + CatBoost</a:t>
-            </a:r>
-          </a:p>
-          <a:p>
-            <a:pPr algn="l">
-              <a:spcAft>
-                <a:spcPts val="300"/>
-              </a:spcAft>
-            </a:pPr>
-            <a:r>
-              <a:rPr sz="1400" b="0">
+              <a:t>mean blend</a:t>
+            </a:r>
+          </a:p>
+          <a:p>
+            <a:pPr algn="ctr"/>
+            <a:r>
+              <a:rPr sz="1300" b="0">
+                <a:solidFill>
+                  <a:srgbClr val="EAF3EF"/>
+                </a:solidFill>
+                <a:latin typeface="Arial"/>
+              </a:rPr>
+              <a:t>16 → 1 probability</a:t>
+            </a:r>
+          </a:p>
+        </p:txBody>
+      </p:sp>
+      <p:sp>
+        <p:nvSpPr>
+          <p:cNvPr id="46" name="Rounded Rectangle 45"/>
+          <p:cNvSpPr/>
+          <p:nvPr/>
+        </p:nvSpPr>
+        <p:spPr>
+          <a:xfrm>
+            <a:off x="14630400" y="2834640"/>
+            <a:ext cx="2651760" cy="1005840"/>
+          </a:xfrm>
+          <a:prstGeom prst="roundRect">
+            <a:avLst/>
+          </a:prstGeom>
+          <a:solidFill>
+            <a:srgbClr val="063D22"/>
+          </a:solidFill>
+          <a:ln>
+            <a:noFill/>
+          </a:ln>
+          <a:effectLst/>
+        </p:spPr>
+        <p:style>
+          <a:lnRef idx="1">
+            <a:schemeClr val="accent1"/>
+          </a:lnRef>
+          <a:fillRef idx="3">
+            <a:schemeClr val="accent1"/>
+          </a:fillRef>
+          <a:effectRef idx="2">
+            <a:schemeClr val="accent1"/>
+          </a:effectRef>
+          <a:fontRef idx="minor">
+            <a:schemeClr val="lt1"/>
+          </a:fontRef>
+        </p:style>
+        <p:txBody>
+          <a:bodyPr rtlCol="0" anchor="ctr" wrap="square"/>
+          <a:lstStyle/>
+          <a:p>
+            <a:pPr algn="ctr"/>
+            <a:r>
+              <a:rPr sz="1600" b="1">
+                <a:solidFill>
+                  <a:srgbClr val="FFFFFF"/>
+                </a:solidFill>
+                <a:latin typeface="Arial"/>
+              </a:rPr>
+              <a:t>smooth cutoff</a:t>
+            </a:r>
+          </a:p>
+          <a:p>
+            <a:pPr algn="ctr"/>
+            <a:r>
+              <a:rPr sz="1300" b="0">
                 <a:solidFill>
                   <a:srgbClr val="BCDDCE"/>
                 </a:solidFill>
                 <a:latin typeface="Arial"/>
               </a:rPr>
-              <a:t>+ pseudo-labeling &amp; smooth threshold  →  0.859 accuracy</a:t>
+              <a:t>≈ 0.527</a:t>
+            </a:r>
+          </a:p>
+        </p:txBody>
+      </p:sp>
+      <p:cxnSp>
+        <p:nvCxnSpPr>
+          <p:cNvPr id="47" name="Connector 46"/>
+          <p:cNvCxnSpPr/>
+          <p:nvPr/>
+        </p:nvCxnSpPr>
+        <p:spPr>
+          <a:xfrm flipV="1">
+            <a:off x="3694176" y="2523744"/>
+            <a:ext cx="1335024" cy="813816"/>
+          </a:xfrm>
+          <a:prstGeom prst="line">
+            <a:avLst/>
+          </a:prstGeom>
+          <a:ln w="28575">
+            <a:solidFill>
+              <a:srgbClr val="063D22"/>
+            </a:solidFill>
+            <a:tailEnd type="triangle" w="med" len="med"/>
+          </a:ln>
+        </p:spPr>
+        <p:style>
+          <a:lnRef idx="2">
+            <a:schemeClr val="accent1"/>
+          </a:lnRef>
+          <a:fillRef idx="0">
+            <a:schemeClr val="accent1"/>
+          </a:fillRef>
+          <a:effectRef idx="1">
+            <a:schemeClr val="accent1"/>
+          </a:effectRef>
+          <a:fontRef idx="minor">
+            <a:schemeClr val="tx1"/>
+          </a:fontRef>
+        </p:style>
+      </p:cxnSp>
+      <p:cxnSp>
+        <p:nvCxnSpPr>
+          <p:cNvPr id="48" name="Connector 47"/>
+          <p:cNvCxnSpPr/>
+          <p:nvPr/>
+        </p:nvCxnSpPr>
+        <p:spPr>
+          <a:xfrm>
+            <a:off x="3694176" y="3337560"/>
+            <a:ext cx="1335024" cy="0"/>
+          </a:xfrm>
+          <a:prstGeom prst="line">
+            <a:avLst/>
+          </a:prstGeom>
+          <a:ln w="28575">
+            <a:solidFill>
+              <a:srgbClr val="063D22"/>
+            </a:solidFill>
+            <a:tailEnd type="triangle" w="med" len="med"/>
+          </a:ln>
+        </p:spPr>
+        <p:style>
+          <a:lnRef idx="2">
+            <a:schemeClr val="accent1"/>
+          </a:lnRef>
+          <a:fillRef idx="0">
+            <a:schemeClr val="accent1"/>
+          </a:fillRef>
+          <a:effectRef idx="1">
+            <a:schemeClr val="accent1"/>
+          </a:effectRef>
+          <a:fontRef idx="minor">
+            <a:schemeClr val="tx1"/>
+          </a:fontRef>
+        </p:style>
+      </p:cxnSp>
+      <p:cxnSp>
+        <p:nvCxnSpPr>
+          <p:cNvPr id="49" name="Connector 48"/>
+          <p:cNvCxnSpPr/>
+          <p:nvPr/>
+        </p:nvCxnSpPr>
+        <p:spPr>
+          <a:xfrm>
+            <a:off x="3694176" y="3337560"/>
+            <a:ext cx="1335024" cy="813816"/>
+          </a:xfrm>
+          <a:prstGeom prst="line">
+            <a:avLst/>
+          </a:prstGeom>
+          <a:ln w="28575">
+            <a:solidFill>
+              <a:srgbClr val="063D22"/>
+            </a:solidFill>
+            <a:tailEnd type="triangle" w="med" len="med"/>
+          </a:ln>
+        </p:spPr>
+        <p:style>
+          <a:lnRef idx="2">
+            <a:schemeClr val="accent1"/>
+          </a:lnRef>
+          <a:fillRef idx="0">
+            <a:schemeClr val="accent1"/>
+          </a:fillRef>
+          <a:effectRef idx="1">
+            <a:schemeClr val="accent1"/>
+          </a:effectRef>
+          <a:fontRef idx="minor">
+            <a:schemeClr val="tx1"/>
+          </a:fontRef>
+        </p:style>
+      </p:cxnSp>
+      <p:cxnSp>
+        <p:nvCxnSpPr>
+          <p:cNvPr id="50" name="Connector 49"/>
+          <p:cNvCxnSpPr/>
+          <p:nvPr/>
+        </p:nvCxnSpPr>
+        <p:spPr>
+          <a:xfrm>
+            <a:off x="9144000" y="2523744"/>
+            <a:ext cx="1280160" cy="813816"/>
+          </a:xfrm>
+          <a:prstGeom prst="line">
+            <a:avLst/>
+          </a:prstGeom>
+          <a:ln w="28575">
+            <a:solidFill>
+              <a:srgbClr val="063D22"/>
+            </a:solidFill>
+            <a:tailEnd type="triangle" w="med" len="med"/>
+          </a:ln>
+        </p:spPr>
+        <p:style>
+          <a:lnRef idx="2">
+            <a:schemeClr val="accent1"/>
+          </a:lnRef>
+          <a:fillRef idx="0">
+            <a:schemeClr val="accent1"/>
+          </a:fillRef>
+          <a:effectRef idx="1">
+            <a:schemeClr val="accent1"/>
+          </a:effectRef>
+          <a:fontRef idx="minor">
+            <a:schemeClr val="tx1"/>
+          </a:fontRef>
+        </p:style>
+      </p:cxnSp>
+      <p:cxnSp>
+        <p:nvCxnSpPr>
+          <p:cNvPr id="51" name="Connector 50"/>
+          <p:cNvCxnSpPr/>
+          <p:nvPr/>
+        </p:nvCxnSpPr>
+        <p:spPr>
+          <a:xfrm>
+            <a:off x="9144000" y="3337560"/>
+            <a:ext cx="1280160" cy="0"/>
+          </a:xfrm>
+          <a:prstGeom prst="line">
+            <a:avLst/>
+          </a:prstGeom>
+          <a:ln w="28575">
+            <a:solidFill>
+              <a:srgbClr val="063D22"/>
+            </a:solidFill>
+            <a:tailEnd type="triangle" w="med" len="med"/>
+          </a:ln>
+        </p:spPr>
+        <p:style>
+          <a:lnRef idx="2">
+            <a:schemeClr val="accent1"/>
+          </a:lnRef>
+          <a:fillRef idx="0">
+            <a:schemeClr val="accent1"/>
+          </a:fillRef>
+          <a:effectRef idx="1">
+            <a:schemeClr val="accent1"/>
+          </a:effectRef>
+          <a:fontRef idx="minor">
+            <a:schemeClr val="tx1"/>
+          </a:fontRef>
+        </p:style>
+      </p:cxnSp>
+      <p:cxnSp>
+        <p:nvCxnSpPr>
+          <p:cNvPr id="52" name="Connector 51"/>
+          <p:cNvCxnSpPr/>
+          <p:nvPr/>
+        </p:nvCxnSpPr>
+        <p:spPr>
+          <a:xfrm flipV="1">
+            <a:off x="9144000" y="3337560"/>
+            <a:ext cx="1280160" cy="813816"/>
+          </a:xfrm>
+          <a:prstGeom prst="line">
+            <a:avLst/>
+          </a:prstGeom>
+          <a:ln w="28575">
+            <a:solidFill>
+              <a:srgbClr val="063D22"/>
+            </a:solidFill>
+            <a:tailEnd type="triangle" w="med" len="med"/>
+          </a:ln>
+        </p:spPr>
+        <p:style>
+          <a:lnRef idx="2">
+            <a:schemeClr val="accent1"/>
+          </a:lnRef>
+          <a:fillRef idx="0">
+            <a:schemeClr val="accent1"/>
+          </a:fillRef>
+          <a:effectRef idx="1">
+            <a:schemeClr val="accent1"/>
+          </a:effectRef>
+          <a:fontRef idx="minor">
+            <a:schemeClr val="tx1"/>
+          </a:fontRef>
+        </p:style>
+      </p:cxnSp>
+      <p:cxnSp>
+        <p:nvCxnSpPr>
+          <p:cNvPr id="53" name="Connector 52"/>
+          <p:cNvCxnSpPr/>
+          <p:nvPr/>
+        </p:nvCxnSpPr>
+        <p:spPr>
+          <a:xfrm>
+            <a:off x="13533120" y="3337560"/>
+            <a:ext cx="1097280" cy="0"/>
+          </a:xfrm>
+          <a:prstGeom prst="line">
+            <a:avLst/>
+          </a:prstGeom>
+          <a:ln w="28575">
+            <a:solidFill>
+              <a:srgbClr val="063D22"/>
+            </a:solidFill>
+            <a:tailEnd type="triangle" w="med" len="med"/>
+          </a:ln>
+        </p:spPr>
+        <p:style>
+          <a:lnRef idx="2">
+            <a:schemeClr val="accent1"/>
+          </a:lnRef>
+          <a:fillRef idx="0">
+            <a:schemeClr val="accent1"/>
+          </a:fillRef>
+          <a:effectRef idx="1">
+            <a:schemeClr val="accent1"/>
+          </a:effectRef>
+          <a:fontRef idx="minor">
+            <a:schemeClr val="tx1"/>
+          </a:fontRef>
+        </p:style>
+      </p:cxnSp>
+      <p:sp>
+        <p:nvSpPr>
+          <p:cNvPr id="54" name="Rounded Rectangle 53"/>
+          <p:cNvSpPr/>
+          <p:nvPr/>
+        </p:nvSpPr>
+        <p:spPr>
+          <a:xfrm>
+            <a:off x="950976" y="4983480"/>
+            <a:ext cx="16367759" cy="868680"/>
+          </a:xfrm>
+          <a:prstGeom prst="roundRect">
+            <a:avLst/>
+          </a:prstGeom>
+          <a:solidFill>
+            <a:srgbClr val="F4F8F6"/>
+          </a:solidFill>
+          <a:ln w="19050">
+            <a:solidFill>
+              <a:srgbClr val="C8D4CF"/>
+            </a:solidFill>
+          </a:ln>
+          <a:effectLst/>
+        </p:spPr>
+        <p:style>
+          <a:lnRef idx="1">
+            <a:schemeClr val="accent1"/>
+          </a:lnRef>
+          <a:fillRef idx="3">
+            <a:schemeClr val="accent1"/>
+          </a:fillRef>
+          <a:effectRef idx="2">
+            <a:schemeClr val="accent1"/>
+          </a:effectRef>
+          <a:fontRef idx="minor">
+            <a:schemeClr val="lt1"/>
+          </a:fontRef>
+        </p:style>
+        <p:txBody>
+          <a:bodyPr rtlCol="0" anchor="ctr" wrap="square"/>
+          <a:lstStyle/>
+          <a:p>
+            <a:pPr algn="ctr"/>
+            <a:r>
+              <a:rPr sz="1500" b="1">
+                <a:solidFill>
+                  <a:srgbClr val="063D22"/>
+                </a:solidFill>
+                <a:latin typeface="Arial"/>
+              </a:rPr>
+              <a:t>Pseudo-labeling pass (v8 / v10)</a:t>
+            </a:r>
+          </a:p>
+          <a:p>
+            <a:pPr algn="ctr"/>
+            <a:r>
+              <a:rPr sz="1300" b="0">
+                <a:solidFill>
+                  <a:srgbClr val="5C7268"/>
+                </a:solidFill>
+                <a:latin typeface="Arial"/>
+              </a:rPr>
+              <a:t>confident test rows (≥ 0.97) added at weight 0.5  —  +0.14 pt on rolling validation</a:t>
+            </a:r>
+          </a:p>
+        </p:txBody>
+      </p:sp>
+      <p:sp>
+        <p:nvSpPr>
+          <p:cNvPr id="55" name="TextBox 54"/>
+          <p:cNvSpPr txBox="1"/>
+          <p:nvPr/>
+        </p:nvSpPr>
+        <p:spPr>
+          <a:xfrm>
+            <a:off x="950976" y="5943600"/>
+            <a:ext cx="16367759" cy="365760"/>
+          </a:xfrm>
+          <a:prstGeom prst="rect">
+            <a:avLst/>
+          </a:prstGeom>
+          <a:noFill/>
+        </p:spPr>
+        <p:txBody>
+          <a:bodyPr wrap="none">
+            <a:spAutoFit/>
+          </a:bodyPr>
+          <a:lstStyle/>
+          <a:p>
+            <a:pPr algn="ctr"/>
+            <a:r>
+              <a:rPr sz="1400" i="1">
+                <a:solidFill>
+                  <a:srgbClr val="5C7268"/>
+                </a:solidFill>
+                <a:latin typeface="Arial"/>
+              </a:rPr>
+              <a:t>From clean features to a single approve / reject decision per applicant.</a:t>
+            </a:r>
+          </a:p>
+        </p:txBody>
+      </p:sp>
+      <p:sp>
+        <p:nvSpPr>
+          <p:cNvPr id="56" name="TextBox 55"/>
+          <p:cNvSpPr txBox="1"/>
+          <p:nvPr/>
+        </p:nvSpPr>
+        <p:spPr>
+          <a:xfrm>
+            <a:off x="950976" y="6446520"/>
+            <a:ext cx="10972800" cy="365760"/>
+          </a:xfrm>
+          <a:prstGeom prst="rect">
+            <a:avLst/>
+          </a:prstGeom>
+          <a:noFill/>
+        </p:spPr>
+        <p:txBody>
+          <a:bodyPr wrap="none">
+            <a:spAutoFit/>
+          </a:bodyPr>
+          <a:lstStyle/>
+          <a:p>
+            <a:r>
+              <a:rPr sz="2000" b="1">
+                <a:solidFill>
+                  <a:srgbClr val="063D22"/>
+                </a:solidFill>
+                <a:latin typeface="Arial"/>
+              </a:rPr>
+              <a:t>What drives the model — top features by gain</a:t>
+            </a:r>
+          </a:p>
+        </p:txBody>
+      </p:sp>
+      <p:pic>
+        <p:nvPicPr>
+          <p:cNvPr id="57" name="Picture 56" descr="deck_importance_wide.png"/>
+          <p:cNvPicPr>
+            <a:picLocks noChangeAspect="1"/>
+          </p:cNvPicPr>
+          <p:nvPr/>
+        </p:nvPicPr>
+        <p:blipFill>
+          <a:blip r:embed="rId4"/>
+          <a:stretch>
+            <a:fillRect/>
+          </a:stretch>
+        </p:blipFill>
+        <p:spPr>
+          <a:xfrm>
+            <a:off x="950976" y="6858000"/>
+            <a:ext cx="10058400" cy="2286000"/>
+          </a:xfrm>
+          <a:prstGeom prst="rect">
+            <a:avLst/>
+          </a:prstGeom>
+        </p:spPr>
+      </p:pic>
+      <p:sp>
+        <p:nvSpPr>
+          <p:cNvPr id="58" name="TextBox 57"/>
+          <p:cNvSpPr txBox="1"/>
+          <p:nvPr/>
+        </p:nvSpPr>
+        <p:spPr>
+          <a:xfrm>
+            <a:off x="11521440" y="7223760"/>
+            <a:ext cx="5760720" cy="1463040"/>
+          </a:xfrm>
+          <a:prstGeom prst="rect">
+            <a:avLst/>
+          </a:prstGeom>
+          <a:noFill/>
+        </p:spPr>
+        <p:txBody>
+          <a:bodyPr wrap="square">
+            <a:spAutoFit/>
+          </a:bodyPr>
+          <a:lstStyle/>
+          <a:p>
+            <a:r>
+              <a:rPr sz="1500">
+                <a:solidFill>
+                  <a:srgbClr val="5C7268"/>
+                </a:solidFill>
+                <a:latin typeface="Arial"/>
+              </a:rPr>
+              <a:t>The risk-shape and affordability features carry the model.</a:t>
+            </a:r>
+          </a:p>
+          <a:p>
+            <a:r>
+              <a:rPr sz="1500">
+                <a:solidFill>
+                  <a:srgbClr val="007A33"/>
+                </a:solidFill>
+                <a:latin typeface="Arial"/>
+              </a:rPr>
+              <a:t>What each feature is → slide 9.</a:t>
             </a:r>
           </a:p>
         </p:txBody>

--- a/presentation/Consulting_Finance_ML_Slides.pptx
+++ b/presentation/Consulting_Finance_ML_Slides.pptx
@@ -12629,7 +12629,7 @@
           </a:fontRef>
         </p:style>
         <p:txBody>
-          <a:bodyPr rtlCol="0" anchor="ctr" wrap="square"/>
+          <a:bodyPr wrap="square" rtlCol="0" anchor="ctr"/>
           <a:lstStyle/>
           <a:p>
             <a:pPr algn="ctr"/>
@@ -12696,7 +12696,7 @@
           </a:fontRef>
         </p:style>
         <p:txBody>
-          <a:bodyPr rtlCol="0" anchor="ctr" wrap="square"/>
+          <a:bodyPr wrap="square" rtlCol="0" anchor="ctr"/>
           <a:lstStyle/>
           <a:p>
             <a:pPr algn="ctr"/>
@@ -12751,7 +12751,7 @@
           </a:fontRef>
         </p:style>
         <p:txBody>
-          <a:bodyPr rtlCol="0" anchor="ctr" wrap="square"/>
+          <a:bodyPr wrap="square" rtlCol="0" anchor="ctr"/>
           <a:lstStyle/>
           <a:p>
             <a:pPr algn="ctr"/>
@@ -12806,7 +12806,7 @@
           </a:fontRef>
         </p:style>
         <p:txBody>
-          <a:bodyPr rtlCol="0" anchor="ctr" wrap="square"/>
+          <a:bodyPr wrap="square" rtlCol="0" anchor="ctr"/>
           <a:lstStyle/>
           <a:p>
             <a:pPr algn="ctr"/>
@@ -12859,7 +12859,7 @@
           </a:fontRef>
         </p:style>
         <p:txBody>
-          <a:bodyPr rtlCol="0" anchor="ctr" wrap="square"/>
+          <a:bodyPr wrap="square" rtlCol="0" anchor="ctr"/>
           <a:lstStyle/>
           <a:p>
             <a:pPr algn="ctr"/>
@@ -12924,7 +12924,7 @@
           </a:fontRef>
         </p:style>
         <p:txBody>
-          <a:bodyPr rtlCol="0" anchor="ctr" wrap="square"/>
+          <a:bodyPr wrap="square" rtlCol="0" anchor="ctr"/>
           <a:lstStyle/>
           <a:p>
             <a:pPr algn="ctr"/>
@@ -13243,7 +13243,7 @@
           </a:fontRef>
         </p:style>
         <p:txBody>
-          <a:bodyPr rtlCol="0" anchor="ctr" wrap="square"/>
+          <a:bodyPr wrap="square" rtlCol="0" anchor="ctr"/>
           <a:lstStyle/>
           <a:p>
             <a:pPr algn="ctr"/>
@@ -13343,6 +13343,81 @@
       <p:pic>
         <p:nvPicPr>
           <p:cNvPr id="57" name="Picture 56" descr="deck_importance_wide.png"/>
+          <p:cNvPicPr>
+            <a:picLocks noChangeAspect="1"/>
+          </p:cNvPicPr>
+          <p:nvPr/>
+        </p:nvPicPr>
+        <p:blipFill>
+          <a:blip r:embed="rId3"/>
+          <a:stretch>
+            <a:fillRect/>
+          </a:stretch>
+        </p:blipFill>
+        <p:spPr>
+          <a:xfrm>
+            <a:off x="950976" y="6858000"/>
+            <a:ext cx="10058400" cy="2286000"/>
+          </a:xfrm>
+          <a:prstGeom prst="rect">
+            <a:avLst/>
+          </a:prstGeom>
+        </p:spPr>
+      </p:pic>
+      <p:sp>
+        <p:nvSpPr>
+          <p:cNvPr id="58" name="TextBox 57"/>
+          <p:cNvSpPr txBox="1"/>
+          <p:nvPr/>
+        </p:nvSpPr>
+        <p:spPr>
+          <a:xfrm>
+            <a:off x="11521440" y="7223760"/>
+            <a:ext cx="5760720" cy="1463040"/>
+          </a:xfrm>
+          <a:prstGeom prst="rect">
+            <a:avLst/>
+          </a:prstGeom>
+          <a:noFill/>
+        </p:spPr>
+        <p:txBody>
+          <a:bodyPr wrap="square">
+            <a:spAutoFit/>
+          </a:bodyPr>
+          <a:lstStyle/>
+          <a:p>
+            <a:r>
+              <a:rPr sz="1500">
+                <a:solidFill>
+                  <a:srgbClr val="5C7268"/>
+                </a:solidFill>
+                <a:latin typeface="Arial"/>
+              </a:rPr>
+              <a:t>The risk-shape and affordability features carry the model.</a:t>
+            </a:r>
+          </a:p>
+          <a:p>
+            <a:r>
+              <a:rPr sz="1500">
+                <a:solidFill>
+                  <a:srgbClr val="007A33"/>
+                </a:solidFill>
+                <a:latin typeface="Arial"/>
+              </a:rPr>
+              <a:t>What each feature is → slide 9.</a:t>
+            </a:r>
+          </a:p>
+        </p:txBody>
+      </p:sp>
+      <p:pic>
+        <p:nvPicPr>
+          <p:cNvPr id="5" name="Picture 4">
+            <a:extLst>
+              <a:ext uri="{FF2B5EF4-FFF2-40B4-BE49-F238E27FC236}">
+                <a16:creationId xmlns:a16="http://schemas.microsoft.com/office/drawing/2014/main" id="{B4E6C54B-8C83-317D-1AF4-3605A7D7896A}"/>
+              </a:ext>
+            </a:extLst>
+          </p:cNvPr>
           <p:cNvPicPr>
             <a:picLocks noChangeAspect="1"/>
           </p:cNvPicPr>
@@ -13356,59 +13431,104 @@
         </p:blipFill>
         <p:spPr>
           <a:xfrm>
-            <a:off x="950976" y="6858000"/>
-            <a:ext cx="10058400" cy="2286000"/>
+            <a:off x="5112256" y="2635767"/>
+            <a:ext cx="2503936" cy="196590"/>
           </a:xfrm>
           <a:prstGeom prst="rect">
             <a:avLst/>
           </a:prstGeom>
         </p:spPr>
       </p:pic>
-      <p:sp>
-        <p:nvSpPr>
-          <p:cNvPr id="58" name="TextBox 57"/>
-          <p:cNvSpPr txBox="1"/>
-          <p:nvPr/>
-        </p:nvSpPr>
-        <p:spPr>
-          <a:xfrm>
-            <a:off x="11521440" y="7223760"/>
-            <a:ext cx="5760720" cy="1463040"/>
-          </a:xfrm>
-          <a:prstGeom prst="rect">
-            <a:avLst/>
-          </a:prstGeom>
-          <a:noFill/>
-        </p:spPr>
-        <p:txBody>
-          <a:bodyPr wrap="square">
-            <a:spAutoFit/>
-          </a:bodyPr>
-          <a:lstStyle/>
-          <a:p>
-            <a:r>
-              <a:rPr sz="1500">
-                <a:solidFill>
-                  <a:srgbClr val="5C7268"/>
-                </a:solidFill>
-                <a:latin typeface="Arial"/>
-              </a:rPr>
-              <a:t>The risk-shape and affordability features carry the model.</a:t>
-            </a:r>
-          </a:p>
-          <a:p>
-            <a:r>
-              <a:rPr sz="1500">
-                <a:solidFill>
-                  <a:srgbClr val="007A33"/>
-                </a:solidFill>
-                <a:latin typeface="Arial"/>
-              </a:rPr>
-              <a:t>What each feature is → slide 9.</a:t>
-            </a:r>
-          </a:p>
-        </p:txBody>
-      </p:sp>
+      <p:pic>
+        <p:nvPicPr>
+          <p:cNvPr id="6" name="Picture 5">
+            <a:extLst>
+              <a:ext uri="{FF2B5EF4-FFF2-40B4-BE49-F238E27FC236}">
+                <a16:creationId xmlns:a16="http://schemas.microsoft.com/office/drawing/2014/main" id="{A27ABDAD-6D53-63BC-51E5-B5ADDE84859C}"/>
+              </a:ext>
+            </a:extLst>
+          </p:cNvPr>
+          <p:cNvPicPr>
+            <a:picLocks noChangeAspect="1"/>
+          </p:cNvPicPr>
+          <p:nvPr/>
+        </p:nvPicPr>
+        <p:blipFill>
+          <a:blip r:embed="rId5"/>
+          <a:stretch>
+            <a:fillRect/>
+          </a:stretch>
+        </p:blipFill>
+        <p:spPr>
+          <a:xfrm>
+            <a:off x="6472367" y="3463731"/>
+            <a:ext cx="1228465" cy="206382"/>
+          </a:xfrm>
+          <a:prstGeom prst="rect">
+            <a:avLst/>
+          </a:prstGeom>
+        </p:spPr>
+      </p:pic>
+      <p:pic>
+        <p:nvPicPr>
+          <p:cNvPr id="7" name="Picture 6">
+            <a:extLst>
+              <a:ext uri="{FF2B5EF4-FFF2-40B4-BE49-F238E27FC236}">
+                <a16:creationId xmlns:a16="http://schemas.microsoft.com/office/drawing/2014/main" id="{7951B2C4-E38E-FCB5-A933-51BC39E6D62E}"/>
+              </a:ext>
+            </a:extLst>
+          </p:cNvPr>
+          <p:cNvPicPr>
+            <a:picLocks noChangeAspect="1"/>
+          </p:cNvPicPr>
+          <p:nvPr/>
+        </p:nvPicPr>
+        <p:blipFill>
+          <a:blip r:embed="rId6"/>
+          <a:stretch>
+            <a:fillRect/>
+          </a:stretch>
+        </p:blipFill>
+        <p:spPr>
+          <a:xfrm>
+            <a:off x="6219251" y="4276858"/>
+            <a:ext cx="1734695" cy="173470"/>
+          </a:xfrm>
+          <a:prstGeom prst="rect">
+            <a:avLst/>
+          </a:prstGeom>
+        </p:spPr>
+      </p:pic>
+      <p:pic>
+        <p:nvPicPr>
+          <p:cNvPr id="8" name="Picture 7">
+            <a:extLst>
+              <a:ext uri="{FF2B5EF4-FFF2-40B4-BE49-F238E27FC236}">
+                <a16:creationId xmlns:a16="http://schemas.microsoft.com/office/drawing/2014/main" id="{096898CC-70E5-622C-2E42-FC0208C0771A}"/>
+              </a:ext>
+            </a:extLst>
+          </p:cNvPr>
+          <p:cNvPicPr>
+            <a:picLocks noChangeAspect="1"/>
+          </p:cNvPicPr>
+          <p:nvPr/>
+        </p:nvPicPr>
+        <p:blipFill>
+          <a:blip r:embed="rId5"/>
+          <a:stretch>
+            <a:fillRect/>
+          </a:stretch>
+        </p:blipFill>
+        <p:spPr>
+          <a:xfrm>
+            <a:off x="7765863" y="2643940"/>
+            <a:ext cx="1228465" cy="206382"/>
+          </a:xfrm>
+          <a:prstGeom prst="rect">
+            <a:avLst/>
+          </a:prstGeom>
+        </p:spPr>
+      </p:pic>
     </p:spTree>
   </p:cSld>
   <p:clrMapOvr>

--- a/presentation/Consulting_Finance_ML_Slides.pptx
+++ b/presentation/Consulting_Finance_ML_Slides.pptx
@@ -13364,51 +13364,6 @@
           </a:prstGeom>
         </p:spPr>
       </p:pic>
-      <p:sp>
-        <p:nvSpPr>
-          <p:cNvPr id="58" name="TextBox 57"/>
-          <p:cNvSpPr txBox="1"/>
-          <p:nvPr/>
-        </p:nvSpPr>
-        <p:spPr>
-          <a:xfrm>
-            <a:off x="11521440" y="7223760"/>
-            <a:ext cx="5760720" cy="1463040"/>
-          </a:xfrm>
-          <a:prstGeom prst="rect">
-            <a:avLst/>
-          </a:prstGeom>
-          <a:noFill/>
-        </p:spPr>
-        <p:txBody>
-          <a:bodyPr wrap="square">
-            <a:spAutoFit/>
-          </a:bodyPr>
-          <a:lstStyle/>
-          <a:p>
-            <a:r>
-              <a:rPr sz="1500">
-                <a:solidFill>
-                  <a:srgbClr val="5C7268"/>
-                </a:solidFill>
-                <a:latin typeface="Arial"/>
-              </a:rPr>
-              <a:t>The risk-shape and affordability features carry the model.</a:t>
-            </a:r>
-          </a:p>
-          <a:p>
-            <a:r>
-              <a:rPr sz="1500">
-                <a:solidFill>
-                  <a:srgbClr val="007A33"/>
-                </a:solidFill>
-                <a:latin typeface="Arial"/>
-              </a:rPr>
-              <a:t>What each feature is → slide 9.</a:t>
-            </a:r>
-          </a:p>
-        </p:txBody>
-      </p:sp>
       <p:pic>
         <p:nvPicPr>
           <p:cNvPr id="5" name="Picture 4">
@@ -13529,6 +13484,109 @@
           </a:prstGeom>
         </p:spPr>
       </p:pic>
+      <p:sp>
+        <p:nvSpPr>
+          <p:cNvPr id="58" name="Rounded Rectangle 57"/>
+          <p:cNvSpPr/>
+          <p:nvPr/>
+        </p:nvSpPr>
+        <p:spPr>
+          <a:xfrm>
+            <a:off x="11475720" y="6766560"/>
+            <a:ext cx="5852160" cy="2057400"/>
+          </a:xfrm>
+          <a:prstGeom prst="roundRect">
+            <a:avLst/>
+          </a:prstGeom>
+          <a:solidFill>
+            <a:srgbClr val="EAF3EF"/>
+          </a:solidFill>
+          <a:ln>
+            <a:noFill/>
+          </a:ln>
+          <a:effectLst/>
+        </p:spPr>
+        <p:style>
+          <a:lnRef idx="1">
+            <a:schemeClr val="accent1"/>
+          </a:lnRef>
+          <a:fillRef idx="3">
+            <a:schemeClr val="accent1"/>
+          </a:fillRef>
+          <a:effectRef idx="2">
+            <a:schemeClr val="accent1"/>
+          </a:effectRef>
+          <a:fontRef idx="minor">
+            <a:schemeClr val="lt1"/>
+          </a:fontRef>
+        </p:style>
+        <p:txBody>
+          <a:bodyPr rtlCol="0" anchor="t" wrap="square" lIns="256032" rIns="219456" tIns="182880" bIns="128016"/>
+          <a:lstStyle/>
+          <a:p>
+            <a:pPr algn="l"/>
+            <a:r>
+              <a:rPr sz="1700" b="1">
+                <a:solidFill>
+                  <a:srgbClr val="063D22"/>
+                </a:solidFill>
+                <a:latin typeface="Arial"/>
+              </a:rPr>
+              <a:t>Why blend 16 models?</a:t>
+            </a:r>
+          </a:p>
+          <a:p>
+            <a:pPr algn="l">
+              <a:spcBef>
+                <a:spcPts val="600"/>
+              </a:spcBef>
+            </a:pPr>
+            <a:r>
+              <a:rPr sz="1400">
+                <a:solidFill>
+                  <a:srgbClr val="5C7268"/>
+                </a:solidFill>
+                <a:latin typeface="Arial"/>
+              </a:rPr>
+              <a:t>Different model families make different mistakes. Averaging their predictions cancels the random part of each model's error and leaves the genuine signal — so the ensemble beats any single model.</a:t>
+            </a:r>
+          </a:p>
+        </p:txBody>
+      </p:sp>
+      <p:sp>
+        <p:nvSpPr>
+          <p:cNvPr id="59" name="TextBox 58"/>
+          <p:cNvSpPr txBox="1"/>
+          <p:nvPr/>
+        </p:nvSpPr>
+        <p:spPr>
+          <a:xfrm>
+            <a:off x="11475720" y="8869680"/>
+            <a:ext cx="5852160" cy="320040"/>
+          </a:xfrm>
+          <a:prstGeom prst="rect">
+            <a:avLst/>
+          </a:prstGeom>
+          <a:noFill/>
+        </p:spPr>
+        <p:txBody>
+          <a:bodyPr wrap="none">
+            <a:spAutoFit/>
+          </a:bodyPr>
+          <a:lstStyle/>
+          <a:p>
+            <a:r>
+              <a:rPr sz="1300">
+                <a:solidFill>
+                  <a:srgbClr val="007A33"/>
+                </a:solidFill>
+                <a:latin typeface="Arial"/>
+              </a:rPr>
+              <a:t>What each feature is → slide 9</a:t>
+            </a:r>
+          </a:p>
+        </p:txBody>
+      </p:sp>
     </p:spTree>
   </p:cSld>
   <p:clrMapOvr>

--- a/presentation/Consulting_Finance_ML_Slides.pptx
+++ b/presentation/Consulting_Finance_ML_Slides.pptx
@@ -12659,25 +12659,23 @@
       </p:sp>
       <p:sp>
         <p:nvSpPr>
-          <p:cNvPr id="42" name="Rounded Rectangle 41"/>
-          <p:cNvSpPr/>
-          <p:nvPr/>
-        </p:nvSpPr>
-        <p:spPr>
-          <a:xfrm>
-            <a:off x="5029200" y="2148840"/>
-            <a:ext cx="4114800" cy="749808"/>
+          <p:cNvPr id="45" name="Rounded Rectangle 44"/>
+          <p:cNvSpPr/>
+          <p:nvPr/>
+        </p:nvSpPr>
+        <p:spPr>
+          <a:xfrm>
+            <a:off x="10424160" y="2697480"/>
+            <a:ext cx="3108960" cy="1280160"/>
           </a:xfrm>
           <a:prstGeom prst="roundRect">
             <a:avLst/>
           </a:prstGeom>
           <a:solidFill>
-            <a:srgbClr val="FFFFFF"/>
+            <a:srgbClr val="2E8B62"/>
           </a:solidFill>
-          <a:ln w="19050">
-            <a:solidFill>
-              <a:srgbClr val="2E8B62"/>
-            </a:solidFill>
+          <a:ln>
+            <a:noFill/>
           </a:ln>
           <a:effectLst/>
         </p:spPr>
@@ -12701,38 +12699,48 @@
           <a:p>
             <a:pPr algn="ctr"/>
             <a:r>
-              <a:rPr sz="1600" b="1">
-                <a:solidFill>
-                  <a:srgbClr val="063D22"/>
+              <a:rPr sz="1800" b="1">
+                <a:solidFill>
+                  <a:srgbClr val="FFFFFF"/>
                 </a:solidFill>
                 <a:latin typeface="Arial"/>
               </a:rPr>
-              <a:t>9 × LightGBM</a:t>
-            </a:r>
-          </a:p>
-        </p:txBody>
-      </p:sp>
-      <p:sp>
-        <p:nvSpPr>
-          <p:cNvPr id="43" name="Rounded Rectangle 42"/>
-          <p:cNvSpPr/>
-          <p:nvPr/>
-        </p:nvSpPr>
-        <p:spPr>
-          <a:xfrm>
-            <a:off x="5029200" y="2962656"/>
-            <a:ext cx="4114800" cy="749808"/>
+              <a:t>mean blend</a:t>
+            </a:r>
+          </a:p>
+          <a:p>
+            <a:pPr algn="ctr"/>
+            <a:r>
+              <a:rPr sz="1300" b="0">
+                <a:solidFill>
+                  <a:srgbClr val="EAF3EF"/>
+                </a:solidFill>
+                <a:latin typeface="Arial"/>
+              </a:rPr>
+              <a:t>16 → 1 probability</a:t>
+            </a:r>
+          </a:p>
+        </p:txBody>
+      </p:sp>
+      <p:sp>
+        <p:nvSpPr>
+          <p:cNvPr id="46" name="Rounded Rectangle 45"/>
+          <p:cNvSpPr/>
+          <p:nvPr/>
+        </p:nvSpPr>
+        <p:spPr>
+          <a:xfrm>
+            <a:off x="14630400" y="2834640"/>
+            <a:ext cx="2651760" cy="1005840"/>
           </a:xfrm>
           <a:prstGeom prst="roundRect">
             <a:avLst/>
           </a:prstGeom>
           <a:solidFill>
-            <a:srgbClr val="FFFFFF"/>
+            <a:srgbClr val="063D22"/>
           </a:solidFill>
-          <a:ln w="19050">
-            <a:solidFill>
-              <a:srgbClr val="2E8B62"/>
-            </a:solidFill>
+          <a:ln>
+            <a:noFill/>
           </a:ln>
           <a:effectLst/>
         </p:spPr>
@@ -12758,35 +12766,83 @@
             <a:r>
               <a:rPr sz="1600" b="1">
                 <a:solidFill>
-                  <a:srgbClr val="063D22"/>
+                  <a:srgbClr val="FFFFFF"/>
                 </a:solidFill>
                 <a:latin typeface="Arial"/>
               </a:rPr>
-              <a:t>3 × XGBoost</a:t>
-            </a:r>
-          </a:p>
-        </p:txBody>
-      </p:sp>
-      <p:sp>
-        <p:nvSpPr>
-          <p:cNvPr id="44" name="Rounded Rectangle 43"/>
-          <p:cNvSpPr/>
-          <p:nvPr/>
-        </p:nvSpPr>
-        <p:spPr>
-          <a:xfrm>
-            <a:off x="5029200" y="3776472"/>
-            <a:ext cx="4114800" cy="749808"/>
+              <a:t>smooth cutoff</a:t>
+            </a:r>
+          </a:p>
+          <a:p>
+            <a:pPr algn="ctr"/>
+            <a:r>
+              <a:rPr sz="1300" b="0">
+                <a:solidFill>
+                  <a:srgbClr val="BCDDCE"/>
+                </a:solidFill>
+                <a:latin typeface="Arial"/>
+              </a:rPr>
+              <a:t>≈ 0.527</a:t>
+            </a:r>
+          </a:p>
+        </p:txBody>
+      </p:sp>
+      <p:cxnSp>
+        <p:nvCxnSpPr>
+          <p:cNvPr id="53" name="Connector 52"/>
+          <p:cNvCxnSpPr/>
+          <p:nvPr/>
+        </p:nvCxnSpPr>
+        <p:spPr>
+          <a:xfrm>
+            <a:off x="13533120" y="3337560"/>
+            <a:ext cx="1097280" cy="0"/>
+          </a:xfrm>
+          <a:prstGeom prst="line">
+            <a:avLst/>
+          </a:prstGeom>
+          <a:ln w="28575">
+            <a:solidFill>
+              <a:srgbClr val="063D22"/>
+            </a:solidFill>
+            <a:tailEnd type="triangle" w="med" len="med"/>
+          </a:ln>
+        </p:spPr>
+        <p:style>
+          <a:lnRef idx="2">
+            <a:schemeClr val="accent1"/>
+          </a:lnRef>
+          <a:fillRef idx="0">
+            <a:schemeClr val="accent1"/>
+          </a:fillRef>
+          <a:effectRef idx="1">
+            <a:schemeClr val="accent1"/>
+          </a:effectRef>
+          <a:fontRef idx="minor">
+            <a:schemeClr val="tx1"/>
+          </a:fontRef>
+        </p:style>
+      </p:cxnSp>
+      <p:sp>
+        <p:nvSpPr>
+          <p:cNvPr id="54" name="Rounded Rectangle 53"/>
+          <p:cNvSpPr/>
+          <p:nvPr/>
+        </p:nvSpPr>
+        <p:spPr>
+          <a:xfrm>
+            <a:off x="950976" y="4983480"/>
+            <a:ext cx="16367759" cy="868680"/>
           </a:xfrm>
           <a:prstGeom prst="roundRect">
             <a:avLst/>
           </a:prstGeom>
           <a:solidFill>
-            <a:srgbClr val="FFFFFF"/>
+            <a:srgbClr val="F4F8F6"/>
           </a:solidFill>
           <a:ln w="19050">
             <a:solidFill>
-              <a:srgbClr val="2E8B62"/>
+              <a:srgbClr val="C8D4CF"/>
             </a:solidFill>
           </a:ln>
           <a:effectLst/>
@@ -12811,33 +12867,138 @@
           <a:p>
             <a:pPr algn="ctr"/>
             <a:r>
-              <a:rPr sz="1600" b="1">
+              <a:rPr sz="1500" b="1">
                 <a:solidFill>
                   <a:srgbClr val="063D22"/>
                 </a:solidFill>
                 <a:latin typeface="Arial"/>
               </a:rPr>
-              <a:t>4 × CatBoost</a:t>
-            </a:r>
-          </a:p>
-        </p:txBody>
-      </p:sp>
-      <p:sp>
-        <p:nvSpPr>
-          <p:cNvPr id="45" name="Rounded Rectangle 44"/>
-          <p:cNvSpPr/>
-          <p:nvPr/>
-        </p:nvSpPr>
-        <p:spPr>
-          <a:xfrm>
-            <a:off x="10424160" y="2697480"/>
-            <a:ext cx="3108960" cy="1280160"/>
+              <a:t>Pseudo-labeling pass (v8 / v10)</a:t>
+            </a:r>
+          </a:p>
+          <a:p>
+            <a:pPr algn="ctr"/>
+            <a:r>
+              <a:rPr sz="1300" b="0">
+                <a:solidFill>
+                  <a:srgbClr val="5C7268"/>
+                </a:solidFill>
+                <a:latin typeface="Arial"/>
+              </a:rPr>
+              <a:t>confident test rows (≥ 0.97) added at weight 0.5  —  +0.14 pt on rolling validation</a:t>
+            </a:r>
+          </a:p>
+        </p:txBody>
+      </p:sp>
+      <p:sp>
+        <p:nvSpPr>
+          <p:cNvPr id="55" name="TextBox 54"/>
+          <p:cNvSpPr txBox="1"/>
+          <p:nvPr/>
+        </p:nvSpPr>
+        <p:spPr>
+          <a:xfrm>
+            <a:off x="950976" y="5943600"/>
+            <a:ext cx="16367759" cy="365760"/>
+          </a:xfrm>
+          <a:prstGeom prst="rect">
+            <a:avLst/>
+          </a:prstGeom>
+          <a:noFill/>
+        </p:spPr>
+        <p:txBody>
+          <a:bodyPr wrap="none">
+            <a:spAutoFit/>
+          </a:bodyPr>
+          <a:lstStyle/>
+          <a:p>
+            <a:pPr algn="ctr"/>
+            <a:r>
+              <a:rPr sz="1400" i="1">
+                <a:solidFill>
+                  <a:srgbClr val="5C7268"/>
+                </a:solidFill>
+                <a:latin typeface="Arial"/>
+              </a:rPr>
+              <a:t>From clean features to a single approve / reject decision per applicant.</a:t>
+            </a:r>
+          </a:p>
+        </p:txBody>
+      </p:sp>
+      <p:sp>
+        <p:nvSpPr>
+          <p:cNvPr id="56" name="TextBox 55"/>
+          <p:cNvSpPr txBox="1"/>
+          <p:nvPr/>
+        </p:nvSpPr>
+        <p:spPr>
+          <a:xfrm>
+            <a:off x="950976" y="6446520"/>
+            <a:ext cx="10972800" cy="365760"/>
+          </a:xfrm>
+          <a:prstGeom prst="rect">
+            <a:avLst/>
+          </a:prstGeom>
+          <a:noFill/>
+        </p:spPr>
+        <p:txBody>
+          <a:bodyPr wrap="none">
+            <a:spAutoFit/>
+          </a:bodyPr>
+          <a:lstStyle/>
+          <a:p>
+            <a:r>
+              <a:rPr sz="2000" b="1">
+                <a:solidFill>
+                  <a:srgbClr val="063D22"/>
+                </a:solidFill>
+                <a:latin typeface="Arial"/>
+              </a:rPr>
+              <a:t>What drives the model — top features by gain</a:t>
+            </a:r>
+          </a:p>
+        </p:txBody>
+      </p:sp>
+      <p:pic>
+        <p:nvPicPr>
+          <p:cNvPr id="57" name="Picture 56" descr="deck_importance_wide.png"/>
+          <p:cNvPicPr>
+            <a:picLocks noChangeAspect="1"/>
+          </p:cNvPicPr>
+          <p:nvPr/>
+        </p:nvPicPr>
+        <p:blipFill>
+          <a:blip r:embed="rId3"/>
+          <a:stretch>
+            <a:fillRect/>
+          </a:stretch>
+        </p:blipFill>
+        <p:spPr>
+          <a:xfrm>
+            <a:off x="950976" y="6858000"/>
+            <a:ext cx="10058400" cy="2286000"/>
+          </a:xfrm>
+          <a:prstGeom prst="rect">
+            <a:avLst/>
+          </a:prstGeom>
+        </p:spPr>
+      </p:pic>
+      <p:sp>
+        <p:nvSpPr>
+          <p:cNvPr id="58" name="Rounded Rectangle 57"/>
+          <p:cNvSpPr/>
+          <p:nvPr/>
+        </p:nvSpPr>
+        <p:spPr>
+          <a:xfrm>
+            <a:off x="11475720" y="6766560"/>
+            <a:ext cx="5852160" cy="2057400"/>
           </a:xfrm>
           <a:prstGeom prst="roundRect">
             <a:avLst/>
           </a:prstGeom>
           <a:solidFill>
-            <a:srgbClr val="2E8B62"/>
+            <a:srgbClr val="EAF3EF"/>
           </a:solidFill>
           <a:ln>
             <a:noFill/>
@@ -12859,53 +13020,93 @@
           </a:fontRef>
         </p:style>
         <p:txBody>
-          <a:bodyPr wrap="square" rtlCol="0" anchor="ctr"/>
-          <a:lstStyle/>
-          <a:p>
-            <a:pPr algn="ctr"/>
-            <a:r>
-              <a:rPr sz="1800" b="1">
-                <a:solidFill>
-                  <a:srgbClr val="FFFFFF"/>
+          <a:bodyPr rtlCol="0" anchor="t" wrap="square" lIns="256032" rIns="219456" tIns="182880" bIns="128016"/>
+          <a:lstStyle/>
+          <a:p>
+            <a:pPr algn="l"/>
+            <a:r>
+              <a:rPr sz="1700" b="1">
+                <a:solidFill>
+                  <a:srgbClr val="063D22"/>
                 </a:solidFill>
                 <a:latin typeface="Arial"/>
               </a:rPr>
-              <a:t>mean blend</a:t>
-            </a:r>
-          </a:p>
-          <a:p>
-            <a:pPr algn="ctr"/>
-            <a:r>
-              <a:rPr sz="1300" b="0">
-                <a:solidFill>
-                  <a:srgbClr val="EAF3EF"/>
+              <a:t>Why blend 16 models?</a:t>
+            </a:r>
+          </a:p>
+          <a:p>
+            <a:pPr algn="l">
+              <a:spcBef>
+                <a:spcPts val="600"/>
+              </a:spcBef>
+            </a:pPr>
+            <a:r>
+              <a:rPr sz="1400">
+                <a:solidFill>
+                  <a:srgbClr val="5C7268"/>
                 </a:solidFill>
                 <a:latin typeface="Arial"/>
               </a:rPr>
-              <a:t>16 → 1 probability</a:t>
-            </a:r>
-          </a:p>
-        </p:txBody>
-      </p:sp>
-      <p:sp>
-        <p:nvSpPr>
-          <p:cNvPr id="46" name="Rounded Rectangle 45"/>
-          <p:cNvSpPr/>
-          <p:nvPr/>
-        </p:nvSpPr>
-        <p:spPr>
-          <a:xfrm>
-            <a:off x="14630400" y="2834640"/>
-            <a:ext cx="2651760" cy="1005840"/>
+              <a:t>Different model families make different mistakes. Averaging their predictions cancels the random part of each model's error and leaves the genuine signal — so the ensemble beats any single model.</a:t>
+            </a:r>
+          </a:p>
+        </p:txBody>
+      </p:sp>
+      <p:sp>
+        <p:nvSpPr>
+          <p:cNvPr id="59" name="TextBox 58"/>
+          <p:cNvSpPr txBox="1"/>
+          <p:nvPr/>
+        </p:nvSpPr>
+        <p:spPr>
+          <a:xfrm>
+            <a:off x="11475720" y="8869680"/>
+            <a:ext cx="5852160" cy="320040"/>
+          </a:xfrm>
+          <a:prstGeom prst="rect">
+            <a:avLst/>
+          </a:prstGeom>
+          <a:noFill/>
+        </p:spPr>
+        <p:txBody>
+          <a:bodyPr wrap="none">
+            <a:spAutoFit/>
+          </a:bodyPr>
+          <a:lstStyle/>
+          <a:p>
+            <a:r>
+              <a:rPr sz="1300">
+                <a:solidFill>
+                  <a:srgbClr val="007A33"/>
+                </a:solidFill>
+                <a:latin typeface="Arial"/>
+              </a:rPr>
+              <a:t>What each feature is → slide 9</a:t>
+            </a:r>
+          </a:p>
+        </p:txBody>
+      </p:sp>
+      <p:sp>
+        <p:nvSpPr>
+          <p:cNvPr id="60" name="Rounded Rectangle 59"/>
+          <p:cNvSpPr/>
+          <p:nvPr/>
+        </p:nvSpPr>
+        <p:spPr>
+          <a:xfrm>
+            <a:off x="5029200" y="2011680"/>
+            <a:ext cx="4114800" cy="822960"/>
           </a:xfrm>
           <a:prstGeom prst="roundRect">
             <a:avLst/>
           </a:prstGeom>
           <a:solidFill>
-            <a:srgbClr val="063D22"/>
+            <a:srgbClr val="FFFFFF"/>
           </a:solidFill>
-          <a:ln>
-            <a:noFill/>
+          <a:ln w="19050">
+            <a:solidFill>
+              <a:srgbClr val="2E8B62"/>
+            </a:solidFill>
           </a:ln>
           <a:effectLst/>
         </p:spPr>
@@ -12924,44 +13125,214 @@
           </a:fontRef>
         </p:style>
         <p:txBody>
-          <a:bodyPr wrap="square" rtlCol="0" anchor="ctr"/>
+          <a:bodyPr rtlCol="0" anchor="ctr" wrap="square" tIns="36576" bIns="36576"/>
           <a:lstStyle/>
           <a:p>
             <a:pPr algn="ctr"/>
             <a:r>
-              <a:rPr sz="1600" b="1">
-                <a:solidFill>
-                  <a:srgbClr val="FFFFFF"/>
+              <a:rPr sz="1500" b="1" i="0">
+                <a:solidFill>
+                  <a:srgbClr val="063D22"/>
                 </a:solidFill>
                 <a:latin typeface="Arial"/>
               </a:rPr>
-              <a:t>smooth cutoff</a:t>
+              <a:t>9 × LightGBM</a:t>
             </a:r>
           </a:p>
           <a:p>
             <a:pPr algn="ctr"/>
             <a:r>
-              <a:rPr sz="1300" b="0">
-                <a:solidFill>
-                  <a:srgbClr val="BCDDCE"/>
+              <a:rPr sz="1150" b="0" i="0">
+                <a:solidFill>
+                  <a:srgbClr val="2E8B62"/>
                 </a:solidFill>
                 <a:latin typeface="Arial"/>
               </a:rPr>
-              <a:t>≈ 0.527</a:t>
+              <a:t>Fast · native missing-value handling</a:t>
+            </a:r>
+          </a:p>
+          <a:p>
+            <a:pPr algn="ctr"/>
+            <a:r>
+              <a:rPr sz="1000" b="0" i="0">
+                <a:solidFill>
+                  <a:srgbClr val="5C7268"/>
+                </a:solidFill>
+                <a:latin typeface="Arial"/>
+              </a:rPr>
+              <a:t>3 configs × 3 seeds</a:t>
+            </a:r>
+          </a:p>
+        </p:txBody>
+      </p:sp>
+      <p:sp>
+        <p:nvSpPr>
+          <p:cNvPr id="61" name="Rounded Rectangle 60"/>
+          <p:cNvSpPr/>
+          <p:nvPr/>
+        </p:nvSpPr>
+        <p:spPr>
+          <a:xfrm>
+            <a:off x="5029200" y="2926080"/>
+            <a:ext cx="4114800" cy="822960"/>
+          </a:xfrm>
+          <a:prstGeom prst="roundRect">
+            <a:avLst/>
+          </a:prstGeom>
+          <a:solidFill>
+            <a:srgbClr val="FFFFFF"/>
+          </a:solidFill>
+          <a:ln w="19050">
+            <a:solidFill>
+              <a:srgbClr val="2E8B62"/>
+            </a:solidFill>
+          </a:ln>
+          <a:effectLst/>
+        </p:spPr>
+        <p:style>
+          <a:lnRef idx="1">
+            <a:schemeClr val="accent1"/>
+          </a:lnRef>
+          <a:fillRef idx="3">
+            <a:schemeClr val="accent1"/>
+          </a:fillRef>
+          <a:effectRef idx="2">
+            <a:schemeClr val="accent1"/>
+          </a:effectRef>
+          <a:fontRef idx="minor">
+            <a:schemeClr val="lt1"/>
+          </a:fontRef>
+        </p:style>
+        <p:txBody>
+          <a:bodyPr rtlCol="0" anchor="ctr" wrap="square" tIns="36576" bIns="36576"/>
+          <a:lstStyle/>
+          <a:p>
+            <a:pPr algn="ctr"/>
+            <a:r>
+              <a:rPr sz="1500" b="1" i="0">
+                <a:solidFill>
+                  <a:srgbClr val="063D22"/>
+                </a:solidFill>
+                <a:latin typeface="Arial"/>
+              </a:rPr>
+              <a:t>3 × XGBoost</a:t>
+            </a:r>
+          </a:p>
+          <a:p>
+            <a:pPr algn="ctr"/>
+            <a:r>
+              <a:rPr sz="1150" b="0" i="0">
+                <a:solidFill>
+                  <a:srgbClr val="2E8B62"/>
+                </a:solidFill>
+                <a:latin typeface="Arial"/>
+              </a:rPr>
+              <a:t>Different algorithm → adds diversity</a:t>
+            </a:r>
+          </a:p>
+          <a:p>
+            <a:pPr algn="ctr"/>
+            <a:r>
+              <a:rPr sz="1000" b="0" i="0">
+                <a:solidFill>
+                  <a:srgbClr val="5C7268"/>
+                </a:solidFill>
+                <a:latin typeface="Arial"/>
+              </a:rPr>
+              <a:t>3 seeds</a:t>
+            </a:r>
+          </a:p>
+        </p:txBody>
+      </p:sp>
+      <p:sp>
+        <p:nvSpPr>
+          <p:cNvPr id="62" name="Rounded Rectangle 61"/>
+          <p:cNvSpPr/>
+          <p:nvPr/>
+        </p:nvSpPr>
+        <p:spPr>
+          <a:xfrm>
+            <a:off x="5029200" y="3840480"/>
+            <a:ext cx="4114800" cy="822960"/>
+          </a:xfrm>
+          <a:prstGeom prst="roundRect">
+            <a:avLst/>
+          </a:prstGeom>
+          <a:solidFill>
+            <a:srgbClr val="FFFFFF"/>
+          </a:solidFill>
+          <a:ln w="19050">
+            <a:solidFill>
+              <a:srgbClr val="2E8B62"/>
+            </a:solidFill>
+          </a:ln>
+          <a:effectLst/>
+        </p:spPr>
+        <p:style>
+          <a:lnRef idx="1">
+            <a:schemeClr val="accent1"/>
+          </a:lnRef>
+          <a:fillRef idx="3">
+            <a:schemeClr val="accent1"/>
+          </a:fillRef>
+          <a:effectRef idx="2">
+            <a:schemeClr val="accent1"/>
+          </a:effectRef>
+          <a:fontRef idx="minor">
+            <a:schemeClr val="lt1"/>
+          </a:fontRef>
+        </p:style>
+        <p:txBody>
+          <a:bodyPr rtlCol="0" anchor="ctr" wrap="square" tIns="36576" bIns="36576"/>
+          <a:lstStyle/>
+          <a:p>
+            <a:pPr algn="ctr"/>
+            <a:r>
+              <a:rPr sz="1500" b="1" i="0">
+                <a:solidFill>
+                  <a:srgbClr val="063D22"/>
+                </a:solidFill>
+                <a:latin typeface="Arial"/>
+              </a:rPr>
+              <a:t>4 × CatBoost</a:t>
+            </a:r>
+          </a:p>
+          <a:p>
+            <a:pPr algn="ctr"/>
+            <a:r>
+              <a:rPr sz="1150" b="0" i="0">
+                <a:solidFill>
+                  <a:srgbClr val="2E8B62"/>
+                </a:solidFill>
+                <a:latin typeface="Arial"/>
+              </a:rPr>
+              <a:t>Best on categoricals (the analyst note)</a:t>
+            </a:r>
+          </a:p>
+          <a:p>
+            <a:pPr algn="ctr"/>
+            <a:r>
+              <a:rPr sz="1000" b="0" i="0">
+                <a:solidFill>
+                  <a:srgbClr val="5C7268"/>
+                </a:solidFill>
+                <a:latin typeface="Arial"/>
+              </a:rPr>
+              <a:t>2 configs × 2 seeds</a:t>
             </a:r>
           </a:p>
         </p:txBody>
       </p:sp>
       <p:cxnSp>
         <p:nvCxnSpPr>
-          <p:cNvPr id="47" name="Connector 46"/>
+          <p:cNvPr id="63" name="Connector 62"/>
           <p:cNvCxnSpPr/>
           <p:nvPr/>
         </p:nvCxnSpPr>
         <p:spPr>
           <a:xfrm flipV="1">
-            <a:off x="3694176" y="2523744"/>
-            <a:ext cx="1335024" cy="813816"/>
+            <a:off x="3694176" y="2423160"/>
+            <a:ext cx="1335024" cy="914400"/>
           </a:xfrm>
           <a:prstGeom prst="line">
             <a:avLst/>
@@ -12990,7 +13361,7 @@
       </p:cxnSp>
       <p:cxnSp>
         <p:nvCxnSpPr>
-          <p:cNvPr id="48" name="Connector 47"/>
+          <p:cNvPr id="64" name="Connector 63"/>
           <p:cNvCxnSpPr/>
           <p:nvPr/>
         </p:nvCxnSpPr>
@@ -13026,14 +13397,14 @@
       </p:cxnSp>
       <p:cxnSp>
         <p:nvCxnSpPr>
-          <p:cNvPr id="49" name="Connector 48"/>
+          <p:cNvPr id="65" name="Connector 64"/>
           <p:cNvCxnSpPr/>
           <p:nvPr/>
         </p:nvCxnSpPr>
         <p:spPr>
           <a:xfrm>
             <a:off x="3694176" y="3337560"/>
-            <a:ext cx="1335024" cy="813816"/>
+            <a:ext cx="1335024" cy="914400"/>
           </a:xfrm>
           <a:prstGeom prst="line">
             <a:avLst/>
@@ -13062,14 +13433,14 @@
       </p:cxnSp>
       <p:cxnSp>
         <p:nvCxnSpPr>
-          <p:cNvPr id="50" name="Connector 49"/>
+          <p:cNvPr id="66" name="Connector 65"/>
           <p:cNvCxnSpPr/>
           <p:nvPr/>
         </p:nvCxnSpPr>
         <p:spPr>
           <a:xfrm>
-            <a:off x="9144000" y="2523744"/>
-            <a:ext cx="1280160" cy="813816"/>
+            <a:off x="9144000" y="2423160"/>
+            <a:ext cx="1280160" cy="914400"/>
           </a:xfrm>
           <a:prstGeom prst="line">
             <a:avLst/>
@@ -13098,7 +13469,7 @@
       </p:cxnSp>
       <p:cxnSp>
         <p:nvCxnSpPr>
-          <p:cNvPr id="51" name="Connector 50"/>
+          <p:cNvPr id="67" name="Connector 66"/>
           <p:cNvCxnSpPr/>
           <p:nvPr/>
         </p:nvCxnSpPr>
@@ -13134,14 +13505,14 @@
       </p:cxnSp>
       <p:cxnSp>
         <p:nvCxnSpPr>
-          <p:cNvPr id="52" name="Connector 51"/>
+          <p:cNvPr id="68" name="Connector 67"/>
           <p:cNvCxnSpPr/>
           <p:nvPr/>
         </p:nvCxnSpPr>
         <p:spPr>
           <a:xfrm flipV="1">
             <a:off x="9144000" y="3337560"/>
-            <a:ext cx="1280160" cy="813816"/>
+            <a:ext cx="1280160" cy="914400"/>
           </a:xfrm>
           <a:prstGeom prst="line">
             <a:avLst/>
@@ -13168,425 +13539,6 @@
           </a:fontRef>
         </p:style>
       </p:cxnSp>
-      <p:cxnSp>
-        <p:nvCxnSpPr>
-          <p:cNvPr id="53" name="Connector 52"/>
-          <p:cNvCxnSpPr/>
-          <p:nvPr/>
-        </p:nvCxnSpPr>
-        <p:spPr>
-          <a:xfrm>
-            <a:off x="13533120" y="3337560"/>
-            <a:ext cx="1097280" cy="0"/>
-          </a:xfrm>
-          <a:prstGeom prst="line">
-            <a:avLst/>
-          </a:prstGeom>
-          <a:ln w="28575">
-            <a:solidFill>
-              <a:srgbClr val="063D22"/>
-            </a:solidFill>
-            <a:tailEnd type="triangle" w="med" len="med"/>
-          </a:ln>
-        </p:spPr>
-        <p:style>
-          <a:lnRef idx="2">
-            <a:schemeClr val="accent1"/>
-          </a:lnRef>
-          <a:fillRef idx="0">
-            <a:schemeClr val="accent1"/>
-          </a:fillRef>
-          <a:effectRef idx="1">
-            <a:schemeClr val="accent1"/>
-          </a:effectRef>
-          <a:fontRef idx="minor">
-            <a:schemeClr val="tx1"/>
-          </a:fontRef>
-        </p:style>
-      </p:cxnSp>
-      <p:sp>
-        <p:nvSpPr>
-          <p:cNvPr id="54" name="Rounded Rectangle 53"/>
-          <p:cNvSpPr/>
-          <p:nvPr/>
-        </p:nvSpPr>
-        <p:spPr>
-          <a:xfrm>
-            <a:off x="950976" y="4983480"/>
-            <a:ext cx="16367759" cy="868680"/>
-          </a:xfrm>
-          <a:prstGeom prst="roundRect">
-            <a:avLst/>
-          </a:prstGeom>
-          <a:solidFill>
-            <a:srgbClr val="F4F8F6"/>
-          </a:solidFill>
-          <a:ln w="19050">
-            <a:solidFill>
-              <a:srgbClr val="C8D4CF"/>
-            </a:solidFill>
-          </a:ln>
-          <a:effectLst/>
-        </p:spPr>
-        <p:style>
-          <a:lnRef idx="1">
-            <a:schemeClr val="accent1"/>
-          </a:lnRef>
-          <a:fillRef idx="3">
-            <a:schemeClr val="accent1"/>
-          </a:fillRef>
-          <a:effectRef idx="2">
-            <a:schemeClr val="accent1"/>
-          </a:effectRef>
-          <a:fontRef idx="minor">
-            <a:schemeClr val="lt1"/>
-          </a:fontRef>
-        </p:style>
-        <p:txBody>
-          <a:bodyPr wrap="square" rtlCol="0" anchor="ctr"/>
-          <a:lstStyle/>
-          <a:p>
-            <a:pPr algn="ctr"/>
-            <a:r>
-              <a:rPr sz="1500" b="1">
-                <a:solidFill>
-                  <a:srgbClr val="063D22"/>
-                </a:solidFill>
-                <a:latin typeface="Arial"/>
-              </a:rPr>
-              <a:t>Pseudo-labeling pass (v8 / v10)</a:t>
-            </a:r>
-          </a:p>
-          <a:p>
-            <a:pPr algn="ctr"/>
-            <a:r>
-              <a:rPr sz="1300" b="0">
-                <a:solidFill>
-                  <a:srgbClr val="5C7268"/>
-                </a:solidFill>
-                <a:latin typeface="Arial"/>
-              </a:rPr>
-              <a:t>confident test rows (≥ 0.97) added at weight 0.5  —  +0.14 pt on rolling validation</a:t>
-            </a:r>
-          </a:p>
-        </p:txBody>
-      </p:sp>
-      <p:sp>
-        <p:nvSpPr>
-          <p:cNvPr id="55" name="TextBox 54"/>
-          <p:cNvSpPr txBox="1"/>
-          <p:nvPr/>
-        </p:nvSpPr>
-        <p:spPr>
-          <a:xfrm>
-            <a:off x="950976" y="5943600"/>
-            <a:ext cx="16367759" cy="365760"/>
-          </a:xfrm>
-          <a:prstGeom prst="rect">
-            <a:avLst/>
-          </a:prstGeom>
-          <a:noFill/>
-        </p:spPr>
-        <p:txBody>
-          <a:bodyPr wrap="none">
-            <a:spAutoFit/>
-          </a:bodyPr>
-          <a:lstStyle/>
-          <a:p>
-            <a:pPr algn="ctr"/>
-            <a:r>
-              <a:rPr sz="1400" i="1">
-                <a:solidFill>
-                  <a:srgbClr val="5C7268"/>
-                </a:solidFill>
-                <a:latin typeface="Arial"/>
-              </a:rPr>
-              <a:t>From clean features to a single approve / reject decision per applicant.</a:t>
-            </a:r>
-          </a:p>
-        </p:txBody>
-      </p:sp>
-      <p:sp>
-        <p:nvSpPr>
-          <p:cNvPr id="56" name="TextBox 55"/>
-          <p:cNvSpPr txBox="1"/>
-          <p:nvPr/>
-        </p:nvSpPr>
-        <p:spPr>
-          <a:xfrm>
-            <a:off x="950976" y="6446520"/>
-            <a:ext cx="10972800" cy="365760"/>
-          </a:xfrm>
-          <a:prstGeom prst="rect">
-            <a:avLst/>
-          </a:prstGeom>
-          <a:noFill/>
-        </p:spPr>
-        <p:txBody>
-          <a:bodyPr wrap="none">
-            <a:spAutoFit/>
-          </a:bodyPr>
-          <a:lstStyle/>
-          <a:p>
-            <a:r>
-              <a:rPr sz="2000" b="1">
-                <a:solidFill>
-                  <a:srgbClr val="063D22"/>
-                </a:solidFill>
-                <a:latin typeface="Arial"/>
-              </a:rPr>
-              <a:t>What drives the model — top features by gain</a:t>
-            </a:r>
-          </a:p>
-        </p:txBody>
-      </p:sp>
-      <p:pic>
-        <p:nvPicPr>
-          <p:cNvPr id="57" name="Picture 56" descr="deck_importance_wide.png"/>
-          <p:cNvPicPr>
-            <a:picLocks noChangeAspect="1"/>
-          </p:cNvPicPr>
-          <p:nvPr/>
-        </p:nvPicPr>
-        <p:blipFill>
-          <a:blip r:embed="rId3"/>
-          <a:stretch>
-            <a:fillRect/>
-          </a:stretch>
-        </p:blipFill>
-        <p:spPr>
-          <a:xfrm>
-            <a:off x="950976" y="6858000"/>
-            <a:ext cx="10058400" cy="2286000"/>
-          </a:xfrm>
-          <a:prstGeom prst="rect">
-            <a:avLst/>
-          </a:prstGeom>
-        </p:spPr>
-      </p:pic>
-      <p:pic>
-        <p:nvPicPr>
-          <p:cNvPr id="5" name="Picture 4">
-            <a:extLst>
-              <a:ext uri="{FF2B5EF4-FFF2-40B4-BE49-F238E27FC236}">
-                <a16:creationId xmlns:a16="http://schemas.microsoft.com/office/drawing/2014/main" id="{B4E6C54B-8C83-317D-1AF4-3605A7D7896A}"/>
-              </a:ext>
-            </a:extLst>
-          </p:cNvPr>
-          <p:cNvPicPr>
-            <a:picLocks noChangeAspect="1"/>
-          </p:cNvPicPr>
-          <p:nvPr/>
-        </p:nvPicPr>
-        <p:blipFill>
-          <a:blip r:embed="rId4"/>
-          <a:stretch>
-            <a:fillRect/>
-          </a:stretch>
-        </p:blipFill>
-        <p:spPr>
-          <a:xfrm>
-            <a:off x="5112256" y="2635767"/>
-            <a:ext cx="2503936" cy="196590"/>
-          </a:xfrm>
-          <a:prstGeom prst="rect">
-            <a:avLst/>
-          </a:prstGeom>
-        </p:spPr>
-      </p:pic>
-      <p:pic>
-        <p:nvPicPr>
-          <p:cNvPr id="6" name="Picture 5">
-            <a:extLst>
-              <a:ext uri="{FF2B5EF4-FFF2-40B4-BE49-F238E27FC236}">
-                <a16:creationId xmlns:a16="http://schemas.microsoft.com/office/drawing/2014/main" id="{A27ABDAD-6D53-63BC-51E5-B5ADDE84859C}"/>
-              </a:ext>
-            </a:extLst>
-          </p:cNvPr>
-          <p:cNvPicPr>
-            <a:picLocks noChangeAspect="1"/>
-          </p:cNvPicPr>
-          <p:nvPr/>
-        </p:nvPicPr>
-        <p:blipFill>
-          <a:blip r:embed="rId5"/>
-          <a:stretch>
-            <a:fillRect/>
-          </a:stretch>
-        </p:blipFill>
-        <p:spPr>
-          <a:xfrm>
-            <a:off x="6472367" y="3463731"/>
-            <a:ext cx="1228465" cy="206382"/>
-          </a:xfrm>
-          <a:prstGeom prst="rect">
-            <a:avLst/>
-          </a:prstGeom>
-        </p:spPr>
-      </p:pic>
-      <p:pic>
-        <p:nvPicPr>
-          <p:cNvPr id="7" name="Picture 6">
-            <a:extLst>
-              <a:ext uri="{FF2B5EF4-FFF2-40B4-BE49-F238E27FC236}">
-                <a16:creationId xmlns:a16="http://schemas.microsoft.com/office/drawing/2014/main" id="{7951B2C4-E38E-FCB5-A933-51BC39E6D62E}"/>
-              </a:ext>
-            </a:extLst>
-          </p:cNvPr>
-          <p:cNvPicPr>
-            <a:picLocks noChangeAspect="1"/>
-          </p:cNvPicPr>
-          <p:nvPr/>
-        </p:nvPicPr>
-        <p:blipFill>
-          <a:blip r:embed="rId6"/>
-          <a:stretch>
-            <a:fillRect/>
-          </a:stretch>
-        </p:blipFill>
-        <p:spPr>
-          <a:xfrm>
-            <a:off x="6219251" y="4276858"/>
-            <a:ext cx="1734695" cy="173470"/>
-          </a:xfrm>
-          <a:prstGeom prst="rect">
-            <a:avLst/>
-          </a:prstGeom>
-        </p:spPr>
-      </p:pic>
-      <p:pic>
-        <p:nvPicPr>
-          <p:cNvPr id="8" name="Picture 7">
-            <a:extLst>
-              <a:ext uri="{FF2B5EF4-FFF2-40B4-BE49-F238E27FC236}">
-                <a16:creationId xmlns:a16="http://schemas.microsoft.com/office/drawing/2014/main" id="{096898CC-70E5-622C-2E42-FC0208C0771A}"/>
-              </a:ext>
-            </a:extLst>
-          </p:cNvPr>
-          <p:cNvPicPr>
-            <a:picLocks noChangeAspect="1"/>
-          </p:cNvPicPr>
-          <p:nvPr/>
-        </p:nvPicPr>
-        <p:blipFill>
-          <a:blip r:embed="rId5"/>
-          <a:stretch>
-            <a:fillRect/>
-          </a:stretch>
-        </p:blipFill>
-        <p:spPr>
-          <a:xfrm>
-            <a:off x="7765863" y="2643940"/>
-            <a:ext cx="1228465" cy="206382"/>
-          </a:xfrm>
-          <a:prstGeom prst="rect">
-            <a:avLst/>
-          </a:prstGeom>
-        </p:spPr>
-      </p:pic>
-      <p:sp>
-        <p:nvSpPr>
-          <p:cNvPr id="58" name="Rounded Rectangle 57"/>
-          <p:cNvSpPr/>
-          <p:nvPr/>
-        </p:nvSpPr>
-        <p:spPr>
-          <a:xfrm>
-            <a:off x="11475720" y="6766560"/>
-            <a:ext cx="5852160" cy="2057400"/>
-          </a:xfrm>
-          <a:prstGeom prst="roundRect">
-            <a:avLst/>
-          </a:prstGeom>
-          <a:solidFill>
-            <a:srgbClr val="EAF3EF"/>
-          </a:solidFill>
-          <a:ln>
-            <a:noFill/>
-          </a:ln>
-          <a:effectLst/>
-        </p:spPr>
-        <p:style>
-          <a:lnRef idx="1">
-            <a:schemeClr val="accent1"/>
-          </a:lnRef>
-          <a:fillRef idx="3">
-            <a:schemeClr val="accent1"/>
-          </a:fillRef>
-          <a:effectRef idx="2">
-            <a:schemeClr val="accent1"/>
-          </a:effectRef>
-          <a:fontRef idx="minor">
-            <a:schemeClr val="lt1"/>
-          </a:fontRef>
-        </p:style>
-        <p:txBody>
-          <a:bodyPr rtlCol="0" anchor="t" wrap="square" lIns="256032" rIns="219456" tIns="182880" bIns="128016"/>
-          <a:lstStyle/>
-          <a:p>
-            <a:pPr algn="l"/>
-            <a:r>
-              <a:rPr sz="1700" b="1">
-                <a:solidFill>
-                  <a:srgbClr val="063D22"/>
-                </a:solidFill>
-                <a:latin typeface="Arial"/>
-              </a:rPr>
-              <a:t>Why blend 16 models?</a:t>
-            </a:r>
-          </a:p>
-          <a:p>
-            <a:pPr algn="l">
-              <a:spcBef>
-                <a:spcPts val="600"/>
-              </a:spcBef>
-            </a:pPr>
-            <a:r>
-              <a:rPr sz="1400">
-                <a:solidFill>
-                  <a:srgbClr val="5C7268"/>
-                </a:solidFill>
-                <a:latin typeface="Arial"/>
-              </a:rPr>
-              <a:t>Different model families make different mistakes. Averaging their predictions cancels the random part of each model's error and leaves the genuine signal — so the ensemble beats any single model.</a:t>
-            </a:r>
-          </a:p>
-        </p:txBody>
-      </p:sp>
-      <p:sp>
-        <p:nvSpPr>
-          <p:cNvPr id="59" name="TextBox 58"/>
-          <p:cNvSpPr txBox="1"/>
-          <p:nvPr/>
-        </p:nvSpPr>
-        <p:spPr>
-          <a:xfrm>
-            <a:off x="11475720" y="8869680"/>
-            <a:ext cx="5852160" cy="320040"/>
-          </a:xfrm>
-          <a:prstGeom prst="rect">
-            <a:avLst/>
-          </a:prstGeom>
-          <a:noFill/>
-        </p:spPr>
-        <p:txBody>
-          <a:bodyPr wrap="none">
-            <a:spAutoFit/>
-          </a:bodyPr>
-          <a:lstStyle/>
-          <a:p>
-            <a:r>
-              <a:rPr sz="1300">
-                <a:solidFill>
-                  <a:srgbClr val="007A33"/>
-                </a:solidFill>
-                <a:latin typeface="Arial"/>
-              </a:rPr>
-              <a:t>What each feature is → slide 9</a:t>
-            </a:r>
-          </a:p>
-        </p:txBody>
-      </p:sp>
     </p:spTree>
   </p:cSld>
   <p:clrMapOvr>

--- a/presentation/Consulting_Finance_ML_Slides.pptx
+++ b/presentation/Consulting_Finance_ML_Slides.pptx
@@ -13020,7 +13020,7 @@
           </a:fontRef>
         </p:style>
         <p:txBody>
-          <a:bodyPr rtlCol="0" anchor="t" wrap="square" lIns="256032" rIns="219456" tIns="182880" bIns="128016"/>
+          <a:bodyPr wrap="square" lIns="256032" tIns="182880" rIns="219456" bIns="128016" rtlCol="0" anchor="t"/>
           <a:lstStyle/>
           <a:p>
             <a:pPr algn="l"/>
@@ -13125,7 +13125,7 @@
           </a:fontRef>
         </p:style>
         <p:txBody>
-          <a:bodyPr rtlCol="0" anchor="ctr" wrap="square" tIns="36576" bIns="36576"/>
+          <a:bodyPr wrap="square" tIns="36576" bIns="36576" rtlCol="0" anchor="ctr"/>
           <a:lstStyle/>
           <a:p>
             <a:pPr algn="ctr"/>
@@ -13204,7 +13204,7 @@
           </a:fontRef>
         </p:style>
         <p:txBody>
-          <a:bodyPr rtlCol="0" anchor="ctr" wrap="square" tIns="36576" bIns="36576"/>
+          <a:bodyPr wrap="square" tIns="36576" bIns="36576" rtlCol="0" anchor="ctr"/>
           <a:lstStyle/>
           <a:p>
             <a:pPr algn="ctr"/>
@@ -13283,7 +13283,7 @@
           </a:fontRef>
         </p:style>
         <p:txBody>
-          <a:bodyPr rtlCol="0" anchor="ctr" wrap="square" tIns="36576" bIns="36576"/>
+          <a:bodyPr wrap="square" tIns="36576" bIns="36576" rtlCol="0" anchor="ctr"/>
           <a:lstStyle/>
           <a:p>
             <a:pPr algn="ctr"/>

--- a/presentation/Consulting_Finance_ML_Slides.pptx
+++ b/presentation/Consulting_Finance_ML_Slides.pptx
@@ -12782,7 +12782,7 @@
                 </a:solidFill>
                 <a:latin typeface="Arial"/>
               </a:rPr>
-              <a:t>≈ 0.527</a:t>
+              <a:t>approve if p &gt; 0.527</a:t>
             </a:r>
           </a:p>
         </p:txBody>
@@ -12823,108 +12823,6 @@
           </a:fontRef>
         </p:style>
       </p:cxnSp>
-      <p:sp>
-        <p:nvSpPr>
-          <p:cNvPr id="54" name="Rounded Rectangle 53"/>
-          <p:cNvSpPr/>
-          <p:nvPr/>
-        </p:nvSpPr>
-        <p:spPr>
-          <a:xfrm>
-            <a:off x="950976" y="4983480"/>
-            <a:ext cx="16367759" cy="868680"/>
-          </a:xfrm>
-          <a:prstGeom prst="roundRect">
-            <a:avLst/>
-          </a:prstGeom>
-          <a:solidFill>
-            <a:srgbClr val="F4F8F6"/>
-          </a:solidFill>
-          <a:ln w="19050">
-            <a:solidFill>
-              <a:srgbClr val="C8D4CF"/>
-            </a:solidFill>
-          </a:ln>
-          <a:effectLst/>
-        </p:spPr>
-        <p:style>
-          <a:lnRef idx="1">
-            <a:schemeClr val="accent1"/>
-          </a:lnRef>
-          <a:fillRef idx="3">
-            <a:schemeClr val="accent1"/>
-          </a:fillRef>
-          <a:effectRef idx="2">
-            <a:schemeClr val="accent1"/>
-          </a:effectRef>
-          <a:fontRef idx="minor">
-            <a:schemeClr val="lt1"/>
-          </a:fontRef>
-        </p:style>
-        <p:txBody>
-          <a:bodyPr wrap="square" rtlCol="0" anchor="ctr"/>
-          <a:lstStyle/>
-          <a:p>
-            <a:pPr algn="ctr"/>
-            <a:r>
-              <a:rPr sz="1500" b="1">
-                <a:solidFill>
-                  <a:srgbClr val="063D22"/>
-                </a:solidFill>
-                <a:latin typeface="Arial"/>
-              </a:rPr>
-              <a:t>Pseudo-labeling pass (v8 / v10)</a:t>
-            </a:r>
-          </a:p>
-          <a:p>
-            <a:pPr algn="ctr"/>
-            <a:r>
-              <a:rPr sz="1300" b="0">
-                <a:solidFill>
-                  <a:srgbClr val="5C7268"/>
-                </a:solidFill>
-                <a:latin typeface="Arial"/>
-              </a:rPr>
-              <a:t>confident test rows (≥ 0.97) added at weight 0.5  —  +0.14 pt on rolling validation</a:t>
-            </a:r>
-          </a:p>
-        </p:txBody>
-      </p:sp>
-      <p:sp>
-        <p:nvSpPr>
-          <p:cNvPr id="55" name="TextBox 54"/>
-          <p:cNvSpPr txBox="1"/>
-          <p:nvPr/>
-        </p:nvSpPr>
-        <p:spPr>
-          <a:xfrm>
-            <a:off x="950976" y="5943600"/>
-            <a:ext cx="16367759" cy="365760"/>
-          </a:xfrm>
-          <a:prstGeom prst="rect">
-            <a:avLst/>
-          </a:prstGeom>
-          <a:noFill/>
-        </p:spPr>
-        <p:txBody>
-          <a:bodyPr wrap="none">
-            <a:spAutoFit/>
-          </a:bodyPr>
-          <a:lstStyle/>
-          <a:p>
-            <a:pPr algn="ctr"/>
-            <a:r>
-              <a:rPr sz="1400" i="1">
-                <a:solidFill>
-                  <a:srgbClr val="5C7268"/>
-                </a:solidFill>
-                <a:latin typeface="Arial"/>
-              </a:rPr>
-              <a:t>From clean features to a single approve / reject decision per applicant.</a:t>
-            </a:r>
-          </a:p>
-        </p:txBody>
-      </p:sp>
       <p:sp>
         <p:nvSpPr>
           <p:cNvPr id="56" name="TextBox 55"/>
@@ -13539,6 +13437,97 @@
           </a:fontRef>
         </p:style>
       </p:cxnSp>
+      <p:sp>
+        <p:nvSpPr>
+          <p:cNvPr id="69" name="Rounded Rectangle 68"/>
+          <p:cNvSpPr/>
+          <p:nvPr/>
+        </p:nvSpPr>
+        <p:spPr>
+          <a:xfrm>
+            <a:off x="950976" y="4846320"/>
+            <a:ext cx="16367759" cy="1417320"/>
+          </a:xfrm>
+          <a:prstGeom prst="roundRect">
+            <a:avLst/>
+          </a:prstGeom>
+          <a:solidFill>
+            <a:srgbClr val="F4F8F6"/>
+          </a:solidFill>
+          <a:ln w="12700">
+            <a:solidFill>
+              <a:srgbClr val="C8D4CF"/>
+            </a:solidFill>
+          </a:ln>
+          <a:effectLst/>
+        </p:spPr>
+        <p:style>
+          <a:lnRef idx="1">
+            <a:schemeClr val="accent1"/>
+          </a:lnRef>
+          <a:fillRef idx="3">
+            <a:schemeClr val="accent1"/>
+          </a:fillRef>
+          <a:effectRef idx="2">
+            <a:schemeClr val="accent1"/>
+          </a:effectRef>
+          <a:fontRef idx="minor">
+            <a:schemeClr val="lt1"/>
+          </a:fontRef>
+        </p:style>
+        <p:txBody>
+          <a:bodyPr rtlCol="0" anchor="ctr" wrap="square" lIns="365760" rIns="365760" tIns="109728" bIns="109728"/>
+          <a:lstStyle/>
+          <a:p>
+            <a:pPr algn="ctr">
+              <a:spcAft>
+                <a:spcPts val="300"/>
+              </a:spcAft>
+            </a:pPr>
+            <a:r>
+              <a:rPr sz="1600" b="1" i="0">
+                <a:solidFill>
+                  <a:srgbClr val="063D22"/>
+                </a:solidFill>
+                <a:latin typeface="Arial"/>
+              </a:rPr>
+              <a:t>Pseudo-labeling  —  learning from the new month</a:t>
+            </a:r>
+          </a:p>
+          <a:p>
+            <a:pPr algn="ctr">
+              <a:spcAft>
+                <a:spcPts val="300"/>
+              </a:spcAft>
+            </a:pPr>
+            <a:r>
+              <a:rPr sz="1400" b="0" i="0">
+                <a:solidFill>
+                  <a:srgbClr val="5C7268"/>
+                </a:solidFill>
+                <a:latin typeface="Arial"/>
+              </a:rPr>
+              <a:t>The ensemble's most confident test predictions (≥ 0.97) are added back into training as extra examples, at half weight, so the model adapts to the May-2026 patterns it has to predict.</a:t>
+            </a:r>
+          </a:p>
+          <a:p>
+            <a:pPr algn="ctr">
+              <a:spcAft>
+                <a:spcPts val="300"/>
+              </a:spcAft>
+            </a:pPr>
+            <a:r>
+              <a:rPr sz="1300" b="0" i="1">
+                <a:solidFill>
+                  <a:srgbClr val="5C7268"/>
+                </a:solidFill>
+                <a:latin typeface="Arial"/>
+              </a:rPr>
+              <a:t>Kept safe — only very confident rows, down-weighted — and the gain is measured, not assumed:  +0.14 pt on rolling validation.</a:t>
+            </a:r>
+          </a:p>
+        </p:txBody>
+      </p:sp>
     </p:spTree>
   </p:cSld>
   <p:clrMapOvr>

--- a/presentation/Consulting_Finance_ML_Slides.pptx
+++ b/presentation/Consulting_Finance_ML_Slides.pptx
@@ -12699,19 +12699,55 @@
           <a:p>
             <a:pPr algn="ctr"/>
             <a:r>
-              <a:rPr sz="1800" b="1">
+              <a:rPr lang="de-DE" sz="1800" b="1" dirty="0" err="1">
                 <a:solidFill>
                   <a:srgbClr val="FFFFFF"/>
                 </a:solidFill>
                 <a:latin typeface="Arial"/>
               </a:rPr>
-              <a:t>mean blend</a:t>
+              <a:t>Weighted</a:t>
+            </a:r>
+            <a:r>
+              <a:rPr lang="de-DE" sz="1800" b="1" dirty="0">
+                <a:solidFill>
+                  <a:srgbClr val="FFFFFF"/>
+                </a:solidFill>
+                <a:latin typeface="Arial"/>
+              </a:rPr>
+              <a:t> </a:t>
+            </a:r>
+            <a:r>
+              <a:rPr lang="de-DE" sz="1800" b="1" dirty="0" err="1">
+                <a:solidFill>
+                  <a:srgbClr val="FFFFFF"/>
+                </a:solidFill>
+                <a:latin typeface="Arial"/>
+              </a:rPr>
+              <a:t>tuned</a:t>
+            </a:r>
+            <a:r>
+              <a:rPr lang="de-DE" sz="1800" b="1" dirty="0">
+                <a:solidFill>
+                  <a:srgbClr val="FFFFFF"/>
+                </a:solidFill>
+                <a:latin typeface="Arial"/>
+              </a:rPr>
+              <a:t> </a:t>
+            </a:r>
+            <a:r>
+              <a:rPr sz="1800" b="1" dirty="0">
+                <a:solidFill>
+                  <a:srgbClr val="FFFFFF"/>
+                </a:solidFill>
+                <a:latin typeface="Arial"/>
+              </a:rPr>
+              <a:t>blend</a:t>
             </a:r>
           </a:p>
           <a:p>
             <a:pPr algn="ctr"/>
             <a:r>
-              <a:rPr sz="1300" b="0">
+              <a:rPr sz="1300" b="0" dirty="0">
                 <a:solidFill>
                   <a:srgbClr val="EAF3EF"/>
                 </a:solidFill>
@@ -12973,7 +13009,7 @@
           <a:lstStyle/>
           <a:p>
             <a:r>
-              <a:rPr sz="1300">
+              <a:rPr sz="1300" dirty="0">
                 <a:solidFill>
                   <a:srgbClr val="007A33"/>
                 </a:solidFill>
@@ -13028,19 +13064,34 @@
           <a:p>
             <a:pPr algn="ctr"/>
             <a:r>
-              <a:rPr sz="1500" b="1" i="0">
+              <a:rPr sz="1500" b="1" i="0" dirty="0">
                 <a:solidFill>
                   <a:srgbClr val="063D22"/>
                 </a:solidFill>
                 <a:latin typeface="Arial"/>
               </a:rPr>
-              <a:t>9 × LightGBM</a:t>
-            </a:r>
+              <a:t>9 × </a:t>
+            </a:r>
+            <a:r>
+              <a:rPr sz="1500" b="1" i="0" dirty="0" err="1">
+                <a:solidFill>
+                  <a:srgbClr val="063D22"/>
+                </a:solidFill>
+                <a:latin typeface="Arial"/>
+              </a:rPr>
+              <a:t>LightGBM</a:t>
+            </a:r>
+            <a:endParaRPr sz="1500" b="1" i="0" dirty="0">
+              <a:solidFill>
+                <a:srgbClr val="063D22"/>
+              </a:solidFill>
+              <a:latin typeface="Arial"/>
+            </a:endParaRPr>
           </a:p>
           <a:p>
             <a:pPr algn="ctr"/>
             <a:r>
-              <a:rPr sz="1150" b="0" i="0">
+              <a:rPr sz="1150" b="0" i="0" dirty="0">
                 <a:solidFill>
                   <a:srgbClr val="2E8B62"/>
                 </a:solidFill>
@@ -13048,11 +13099,26 @@
               </a:rPr>
               <a:t>Fast · native missing-value handling</a:t>
             </a:r>
+            <a:r>
+              <a:rPr lang="de-DE" sz="1150" b="0" i="0" dirty="0">
+                <a:solidFill>
+                  <a:srgbClr val="2E8B62"/>
+                </a:solidFill>
+                <a:latin typeface="Arial"/>
+              </a:rPr>
+              <a:t> </a:t>
+            </a:r>
+            <a:endParaRPr sz="1150" b="0" i="0" dirty="0">
+              <a:solidFill>
+                <a:srgbClr val="2E8B62"/>
+              </a:solidFill>
+              <a:latin typeface="Arial"/>
+            </a:endParaRPr>
           </a:p>
           <a:p>
             <a:pPr algn="ctr"/>
             <a:r>
-              <a:rPr sz="1000" b="0" i="0">
+              <a:rPr sz="1000" b="0" i="0" dirty="0">
                 <a:solidFill>
                   <a:srgbClr val="5C7268"/>
                 </a:solidFill>
@@ -13107,19 +13173,34 @@
           <a:p>
             <a:pPr algn="ctr"/>
             <a:r>
-              <a:rPr sz="1500" b="1" i="0">
+              <a:rPr sz="1500" b="1" i="0" dirty="0">
                 <a:solidFill>
                   <a:srgbClr val="063D22"/>
                 </a:solidFill>
                 <a:latin typeface="Arial"/>
               </a:rPr>
-              <a:t>3 × XGBoost</a:t>
-            </a:r>
+              <a:t>3 × </a:t>
+            </a:r>
+            <a:r>
+              <a:rPr sz="1500" b="1" i="0" dirty="0" err="1">
+                <a:solidFill>
+                  <a:srgbClr val="063D22"/>
+                </a:solidFill>
+                <a:latin typeface="Arial"/>
+              </a:rPr>
+              <a:t>XGBoost</a:t>
+            </a:r>
+            <a:endParaRPr sz="1500" b="1" i="0" dirty="0">
+              <a:solidFill>
+                <a:srgbClr val="063D22"/>
+              </a:solidFill>
+              <a:latin typeface="Arial"/>
+            </a:endParaRPr>
           </a:p>
           <a:p>
             <a:pPr algn="ctr"/>
             <a:r>
-              <a:rPr sz="1150" b="0" i="0">
+              <a:rPr sz="1150" b="0" i="0" dirty="0">
                 <a:solidFill>
                   <a:srgbClr val="2E8B62"/>
                 </a:solidFill>
@@ -13131,7 +13212,7 @@
           <a:p>
             <a:pPr algn="ctr"/>
             <a:r>
-              <a:rPr sz="1000" b="0" i="0">
+              <a:rPr sz="1000" b="0" i="0" dirty="0">
                 <a:solidFill>
                   <a:srgbClr val="5C7268"/>
                 </a:solidFill>
@@ -13476,7 +13557,7 @@
           </a:fontRef>
         </p:style>
         <p:txBody>
-          <a:bodyPr rtlCol="0" anchor="ctr" wrap="square" lIns="365760" rIns="365760" tIns="109728" bIns="109728"/>
+          <a:bodyPr wrap="square" lIns="365760" tIns="109728" rIns="365760" bIns="109728" rtlCol="0" anchor="ctr"/>
           <a:lstStyle/>
           <a:p>
             <a:pPr algn="ctr">
@@ -13525,6 +13606,125 @@
               </a:rPr>
               <a:t>Kept safe — only very confident rows, down-weighted — and the gain is measured, not assumed:  +0.14 pt on rolling validation.</a:t>
             </a:r>
+          </a:p>
+        </p:txBody>
+      </p:sp>
+      <p:sp>
+        <p:nvSpPr>
+          <p:cNvPr id="6" name="TextBox 5">
+            <a:extLst>
+              <a:ext uri="{FF2B5EF4-FFF2-40B4-BE49-F238E27FC236}">
+                <a16:creationId xmlns:a16="http://schemas.microsoft.com/office/drawing/2014/main" id="{F0C4F650-6F9E-2C83-CF82-59BC68D8AEB7}"/>
+              </a:ext>
+            </a:extLst>
+          </p:cNvPr>
+          <p:cNvSpPr txBox="1"/>
+          <p:nvPr/>
+        </p:nvSpPr>
+        <p:spPr>
+          <a:xfrm>
+            <a:off x="3590986" y="1952625"/>
+            <a:ext cx="1438214" cy="292388"/>
+          </a:xfrm>
+          <a:prstGeom prst="rect">
+            <a:avLst/>
+          </a:prstGeom>
+          <a:noFill/>
+        </p:spPr>
+        <p:txBody>
+          <a:bodyPr wrap="none">
+            <a:spAutoFit/>
+          </a:bodyPr>
+          <a:lstStyle/>
+          <a:p>
+            <a:r>
+              <a:rPr lang="de-DE" sz="1300" b="1" dirty="0">
+                <a:solidFill>
+                  <a:srgbClr val="007A33"/>
+                </a:solidFill>
+                <a:latin typeface="Arial"/>
+              </a:rPr>
+              <a:t>Random </a:t>
+            </a:r>
+            <a:r>
+              <a:rPr lang="de-DE" sz="1300" b="1" dirty="0" err="1">
+                <a:solidFill>
+                  <a:srgbClr val="007A33"/>
+                </a:solidFill>
+                <a:latin typeface="Arial"/>
+              </a:rPr>
+              <a:t>search</a:t>
+            </a:r>
+            <a:endParaRPr sz="1300" b="1" dirty="0">
+              <a:solidFill>
+                <a:srgbClr val="007A33"/>
+              </a:solidFill>
+              <a:latin typeface="Arial"/>
+            </a:endParaRPr>
+          </a:p>
+        </p:txBody>
+      </p:sp>
+      <p:sp>
+        <p:nvSpPr>
+          <p:cNvPr id="7" name="TextBox 6">
+            <a:extLst>
+              <a:ext uri="{FF2B5EF4-FFF2-40B4-BE49-F238E27FC236}">
+                <a16:creationId xmlns:a16="http://schemas.microsoft.com/office/drawing/2014/main" id="{27C5012B-4219-D21C-1146-55198B6A3D05}"/>
+              </a:ext>
+            </a:extLst>
+          </p:cNvPr>
+          <p:cNvSpPr txBox="1"/>
+          <p:nvPr/>
+        </p:nvSpPr>
+        <p:spPr>
+          <a:xfrm>
+            <a:off x="9144000" y="1924786"/>
+            <a:ext cx="1326004" cy="338554"/>
+          </a:xfrm>
+          <a:prstGeom prst="rect">
+            <a:avLst/>
+          </a:prstGeom>
+          <a:noFill/>
+        </p:spPr>
+        <p:txBody>
+          <a:bodyPr wrap="none">
+            <a:spAutoFit/>
+          </a:bodyPr>
+          <a:lstStyle/>
+          <a:p>
+            <a:r>
+              <a:rPr lang="de-DE" sz="1600" b="1" dirty="0" err="1">
+                <a:solidFill>
+                  <a:srgbClr val="007A33"/>
+                </a:solidFill>
+                <a:latin typeface="Arial"/>
+              </a:rPr>
+              <a:t>Grid</a:t>
+            </a:r>
+            <a:r>
+              <a:rPr lang="de-DE" sz="1600" b="1" dirty="0">
+                <a:solidFill>
+                  <a:srgbClr val="007A33"/>
+                </a:solidFill>
+                <a:latin typeface="Arial"/>
+              </a:rPr>
+              <a:t> </a:t>
+            </a:r>
+            <a:r>
+              <a:rPr lang="de-DE" sz="1600" b="1" dirty="0" err="1">
+                <a:solidFill>
+                  <a:srgbClr val="007A33"/>
+                </a:solidFill>
+                <a:latin typeface="Arial"/>
+              </a:rPr>
+              <a:t>search</a:t>
+            </a:r>
+            <a:endParaRPr sz="1600" b="1" dirty="0">
+              <a:solidFill>
+                <a:srgbClr val="007A33"/>
+              </a:solidFill>
+              <a:latin typeface="Arial"/>
+            </a:endParaRPr>
           </a:p>
         </p:txBody>
       </p:sp>

--- a/presentation/Consulting_Finance_ML_Slides.pptx
+++ b/presentation/Consulting_Finance_ML_Slides.pptx
@@ -13977,12 +13977,12 @@
               <a:tr h="754380">
                 <a:tc>
                   <a:txBody>
-                    <a:bodyPr/>
+                    <a:bodyPr wrap="square"/>
                     <a:lstStyle/>
                     <a:p>
                       <a:pPr algn="l"/>
                       <a:r>
-                        <a:rPr sz="1700" b="1">
+                        <a:rPr sz="1600" b="1">
                           <a:solidFill>
                             <a:srgbClr val="FFFFFF"/>
                           </a:solidFill>
@@ -14000,18 +14000,18 @@
                 </a:tc>
                 <a:tc>
                   <a:txBody>
-                    <a:bodyPr/>
+                    <a:bodyPr wrap="square"/>
                     <a:lstStyle/>
                     <a:p>
                       <a:pPr algn="l"/>
                       <a:r>
-                        <a:rPr sz="1700" b="1">
+                        <a:rPr sz="1600" b="1">
                           <a:solidFill>
                             <a:srgbClr val="FFFFFF"/>
                           </a:solidFill>
                           <a:latin typeface="Arial"/>
                         </a:rPr>
-                        <a:t>How we built it</a:t>
+                        <a:t>What it is</a:t>
                       </a:r>
                     </a:p>
                   </a:txBody>
@@ -14023,18 +14023,18 @@
                 </a:tc>
                 <a:tc>
                   <a:txBody>
-                    <a:bodyPr/>
+                    <a:bodyPr wrap="square"/>
                     <a:lstStyle/>
                     <a:p>
                       <a:pPr algn="l"/>
                       <a:r>
-                        <a:rPr sz="1700" b="1">
+                        <a:rPr sz="1600" b="1">
                           <a:solidFill>
                             <a:srgbClr val="FFFFFF"/>
                           </a:solidFill>
                           <a:latin typeface="Arial"/>
                         </a:rPr>
-                        <a:t>Why it helps</a:t>
+                        <a:t>Why we made it</a:t>
                       </a:r>
                     </a:p>
                   </a:txBody>
@@ -14053,12 +14053,12 @@
               <a:tr h="754380">
                 <a:tc>
                   <a:txBody>
-                    <a:bodyPr/>
+                    <a:bodyPr wrap="square"/>
                     <a:lstStyle/>
                     <a:p>
                       <a:pPr algn="l"/>
                       <a:r>
-                        <a:rPr sz="1500">
+                        <a:rPr sz="1400">
                           <a:solidFill>
                             <a:srgbClr val="14533B"/>
                           </a:solidFill>
@@ -14076,18 +14076,18 @@
                 </a:tc>
                 <a:tc>
                   <a:txBody>
-                    <a:bodyPr/>
+                    <a:bodyPr wrap="square"/>
                     <a:lstStyle/>
                     <a:p>
                       <a:pPr algn="l"/>
                       <a:r>
-                        <a:rPr sz="1500">
+                        <a:rPr sz="1400">
                           <a:solidFill>
-                            <a:srgbClr val="14533B"/>
+                            <a:srgbClr val="143A2B"/>
                           </a:solidFill>
-                          <a:latin typeface="Courier New"/>
+                          <a:latin typeface="Arial"/>
                         </a:rPr>
-                        <a:t>mean &amp; max of the two risk indicators</a:t>
+                        <a:t>Average, and the higher (worse), of the two risk scores</a:t>
                       </a:r>
                     </a:p>
                   </a:txBody>
@@ -14099,18 +14099,18 @@
                 </a:tc>
                 <a:tc>
                   <a:txBody>
-                    <a:bodyPr/>
+                    <a:bodyPr wrap="square"/>
                     <a:lstStyle/>
                     <a:p>
                       <a:pPr algn="l"/>
                       <a:r>
-                        <a:rPr sz="1500">
+                        <a:rPr sz="1400">
                           <a:solidFill>
                             <a:srgbClr val="5C7268"/>
                           </a:solidFill>
                           <a:latin typeface="Arial"/>
                         </a:rPr>
-                        <a:t>Combine both risk sources</a:t>
+                        <a:t>One combined risk level — plus a flag when either source is high</a:t>
                       </a:r>
                     </a:p>
                   </a:txBody>
@@ -14129,12 +14129,12 @@
               <a:tr h="754380">
                 <a:tc>
                   <a:txBody>
-                    <a:bodyPr/>
+                    <a:bodyPr wrap="square"/>
                     <a:lstStyle/>
                     <a:p>
                       <a:pPr algn="l"/>
                       <a:r>
-                        <a:rPr sz="1500">
+                        <a:rPr sz="1400">
                           <a:solidFill>
                             <a:srgbClr val="14533B"/>
                           </a:solidFill>
@@ -14152,18 +14152,18 @@
                 </a:tc>
                 <a:tc>
                   <a:txBody>
-                    <a:bodyPr/>
+                    <a:bodyPr wrap="square"/>
                     <a:lstStyle/>
                     <a:p>
                       <a:pPr algn="l"/>
                       <a:r>
-                        <a:rPr sz="1500">
+                        <a:rPr sz="1400">
                           <a:solidFill>
-                            <a:srgbClr val="14533B"/>
+                            <a:srgbClr val="143A2B"/>
                           </a:solidFill>
-                          <a:latin typeface="Courier New"/>
+                          <a:latin typeface="Arial"/>
                         </a:rPr>
-                        <a:t>distance from the middle:  |risk - 55|</a:t>
+                        <a:t>How far the risk score sits from the safe middle  (|risk − 55|)</a:t>
                       </a:r>
                     </a:p>
                   </a:txBody>
@@ -14175,18 +14175,18 @@
                 </a:tc>
                 <a:tc>
                   <a:txBody>
-                    <a:bodyPr/>
+                    <a:bodyPr wrap="square"/>
                     <a:lstStyle/>
                     <a:p>
                       <a:pPr algn="l"/>
                       <a:r>
-                        <a:rPr sz="1500">
+                        <a:rPr sz="1400">
                           <a:solidFill>
                             <a:srgbClr val="5C7268"/>
                           </a:solidFill>
                           <a:latin typeface="Arial"/>
                         </a:rPr>
-                        <a:t>Turns the risk hump into usable signal</a:t>
+                        <a:t>Approval peaks mid-scale and drops at both ends — this captures that hump</a:t>
                       </a:r>
                     </a:p>
                   </a:txBody>
@@ -14205,12 +14205,12 @@
               <a:tr h="754380">
                 <a:tc>
                   <a:txBody>
-                    <a:bodyPr/>
+                    <a:bodyPr wrap="square"/>
                     <a:lstStyle/>
                     <a:p>
                       <a:pPr algn="l"/>
                       <a:r>
-                        <a:rPr sz="1500">
+                        <a:rPr sz="1400">
                           <a:solidFill>
                             <a:srgbClr val="14533B"/>
                           </a:solidFill>
@@ -14228,18 +14228,18 @@
                 </a:tc>
                 <a:tc>
                   <a:txBody>
-                    <a:bodyPr/>
+                    <a:bodyPr wrap="square"/>
                     <a:lstStyle/>
                     <a:p>
                       <a:pPr algn="l"/>
                       <a:r>
-                        <a:rPr sz="1500">
+                        <a:rPr sz="1400">
                           <a:solidFill>
-                            <a:srgbClr val="14533B"/>
+                            <a:srgbClr val="143A2B"/>
                           </a:solidFill>
-                          <a:latin typeface="Courier New"/>
+                          <a:latin typeface="Arial"/>
                         </a:rPr>
-                        <a:t>amount / (total_income + 1)</a:t>
+                        <a:t>Loan amount ÷ total income</a:t>
                       </a:r>
                     </a:p>
                   </a:txBody>
@@ -14251,18 +14251,18 @@
                 </a:tc>
                 <a:tc>
                   <a:txBody>
-                    <a:bodyPr/>
+                    <a:bodyPr wrap="square"/>
                     <a:lstStyle/>
                     <a:p>
                       <a:pPr algn="l"/>
                       <a:r>
-                        <a:rPr sz="1500">
+                        <a:rPr sz="1400">
                           <a:solidFill>
                             <a:srgbClr val="5C7268"/>
                           </a:solidFill>
                           <a:latin typeface="Arial"/>
                         </a:rPr>
-                        <a:t>Affordability ratio — a credit standard</a:t>
+                        <a:t>Affordability — loan size vs. what they earn (a credit standard)</a:t>
                       </a:r>
                     </a:p>
                   </a:txBody>
@@ -14281,12 +14281,12 @@
               <a:tr h="754380">
                 <a:tc>
                   <a:txBody>
-                    <a:bodyPr/>
+                    <a:bodyPr wrap="square"/>
                     <a:lstStyle/>
                     <a:p>
                       <a:pPr algn="l"/>
                       <a:r>
-                        <a:rPr sz="1500">
+                        <a:rPr sz="1400">
                           <a:solidFill>
                             <a:srgbClr val="14533B"/>
                           </a:solidFill>
@@ -14304,18 +14304,18 @@
                 </a:tc>
                 <a:tc>
                   <a:txBody>
-                    <a:bodyPr/>
+                    <a:bodyPr wrap="square"/>
                     <a:lstStyle/>
                     <a:p>
                       <a:pPr algn="l"/>
                       <a:r>
-                        <a:rPr sz="1500">
+                        <a:rPr sz="1400">
                           <a:solidFill>
-                            <a:srgbClr val="14533B"/>
+                            <a:srgbClr val="143A2B"/>
                           </a:solidFill>
-                          <a:latin typeface="Courier New"/>
+                          <a:latin typeface="Arial"/>
                         </a:rPr>
-                        <a:t>ann_income + other_income (log-scaled)</a:t>
+                        <a:t>Annual + other income combined (and its log)</a:t>
                       </a:r>
                     </a:p>
                   </a:txBody>
@@ -14327,18 +14327,18 @@
                 </a:tc>
                 <a:tc>
                   <a:txBody>
-                    <a:bodyPr/>
+                    <a:bodyPr wrap="square"/>
                     <a:lstStyle/>
                     <a:p>
                       <a:pPr algn="l"/>
                       <a:r>
-                        <a:rPr sz="1500">
+                        <a:rPr sz="1400">
                           <a:solidFill>
                             <a:srgbClr val="5C7268"/>
                           </a:solidFill>
                           <a:latin typeface="Arial"/>
                         </a:rPr>
-                        <a:t>Real disposable income</a:t>
+                        <a:t>Real disposable income; the log tames very large values</a:t>
                       </a:r>
                     </a:p>
                   </a:txBody>
@@ -14357,12 +14357,12 @@
               <a:tr h="754380">
                 <a:tc>
                   <a:txBody>
-                    <a:bodyPr/>
+                    <a:bodyPr wrap="square"/>
                     <a:lstStyle/>
                     <a:p>
                       <a:pPr algn="l"/>
                       <a:r>
-                        <a:rPr sz="1500">
+                        <a:rPr sz="1400">
                           <a:solidFill>
                             <a:srgbClr val="14533B"/>
                           </a:solidFill>
@@ -14380,18 +14380,18 @@
                 </a:tc>
                 <a:tc>
                   <a:txBody>
-                    <a:bodyPr/>
+                    <a:bodyPr wrap="square"/>
                     <a:lstStyle/>
                     <a:p>
                       <a:pPr algn="l"/>
                       <a:r>
-                        <a:rPr sz="1500">
+                        <a:rPr sz="1400">
                           <a:solidFill>
-                            <a:srgbClr val="14533B"/>
+                            <a:srgbClr val="143A2B"/>
                           </a:solidFill>
-                          <a:latin typeface="Courier New"/>
+                          <a:latin typeface="Arial"/>
                         </a:rPr>
-                        <a:t>3 bureau scores z-scored &amp; merged</a:t>
+                        <a:t>The 3 bureau scores put on one scale and merged</a:t>
                       </a:r>
                     </a:p>
                   </a:txBody>
@@ -14403,18 +14403,18 @@
                 </a:tc>
                 <a:tc>
                   <a:txBody>
-                    <a:bodyPr/>
+                    <a:bodyPr wrap="square"/>
                     <a:lstStyle/>
                     <a:p>
                       <a:pPr algn="l"/>
                       <a:r>
-                        <a:rPr sz="1500">
+                        <a:rPr sz="1400">
                           <a:solidFill>
                             <a:srgbClr val="5C7268"/>
                           </a:solidFill>
                           <a:latin typeface="Arial"/>
                         </a:rPr>
-                        <a:t>One comparable score from 3 scales</a:t>
+                        <a:t>Each person has one score on a different scale — makes them comparable</a:t>
                       </a:r>
                     </a:p>
                   </a:txBody>
@@ -14433,12 +14433,12 @@
               <a:tr h="754380">
                 <a:tc>
                   <a:txBody>
-                    <a:bodyPr/>
+                    <a:bodyPr wrap="square"/>
                     <a:lstStyle/>
                     <a:p>
                       <a:pPr algn="l"/>
                       <a:r>
-                        <a:rPr sz="1500">
+                        <a:rPr sz="1400">
                           <a:solidFill>
                             <a:srgbClr val="14533B"/>
                           </a:solidFill>
@@ -14456,18 +14456,18 @@
                 </a:tc>
                 <a:tc>
                   <a:txBody>
-                    <a:bodyPr/>
+                    <a:bodyPr wrap="square"/>
                     <a:lstStyle/>
                     <a:p>
                       <a:pPr algn="l"/>
                       <a:r>
-                        <a:rPr sz="1500">
+                        <a:rPr sz="1400">
                           <a:solidFill>
-                            <a:srgbClr val="14533B"/>
+                            <a:srgbClr val="143A2B"/>
                           </a:solidFill>
-                          <a:latin typeface="Courier New"/>
+                          <a:latin typeface="Arial"/>
                         </a:rPr>
-                        <a:t>binary 0/1 flags</a:t>
+                        <a:t>Flags for whether a value is present</a:t>
                       </a:r>
                     </a:p>
                   </a:txBody>
@@ -14479,18 +14479,18 @@
                 </a:tc>
                 <a:tc>
                   <a:txBody>
-                    <a:bodyPr/>
+                    <a:bodyPr wrap="square"/>
                     <a:lstStyle/>
                     <a:p>
                       <a:pPr algn="l"/>
                       <a:r>
-                        <a:rPr sz="1500">
+                        <a:rPr sz="1400">
                           <a:solidFill>
                             <a:srgbClr val="5C7268"/>
                           </a:solidFill>
                           <a:latin typeface="Arial"/>
                         </a:rPr>
-                        <a:t>“Value absent” is itself a signal</a:t>
+                        <a:t>Whether a field is missing is itself a useful signal</a:t>
                       </a:r>
                     </a:p>
                   </a:txBody>
@@ -14509,12 +14509,12 @@
               <a:tr h="754380">
                 <a:tc>
                   <a:txBody>
-                    <a:bodyPr/>
+                    <a:bodyPr wrap="square"/>
                     <a:lstStyle/>
                     <a:p>
                       <a:pPr algn="l"/>
                       <a:r>
-                        <a:rPr sz="1500">
+                        <a:rPr sz="1400">
                           <a:solidFill>
                             <a:srgbClr val="14533B"/>
                           </a:solidFill>
@@ -14532,18 +14532,18 @@
                 </a:tc>
                 <a:tc>
                   <a:txBody>
-                    <a:bodyPr/>
+                    <a:bodyPr wrap="square"/>
                     <a:lstStyle/>
                     <a:p>
                       <a:pPr algn="l"/>
                       <a:r>
-                        <a:rPr sz="1500">
+                        <a:rPr sz="1400">
                           <a:solidFill>
-                            <a:srgbClr val="14533B"/>
+                            <a:srgbClr val="143A2B"/>
                           </a:solidFill>
-                          <a:latin typeface="Courier New"/>
+                          <a:latin typeface="Arial"/>
                         </a:rPr>
-                        <a:t>parsed from the date</a:t>
+                        <a:t>Taken from the application date</a:t>
                       </a:r>
                     </a:p>
                   </a:txBody>
@@ -14555,18 +14555,18 @@
                 </a:tc>
                 <a:tc>
                   <a:txBody>
-                    <a:bodyPr/>
+                    <a:bodyPr wrap="square"/>
                     <a:lstStyle/>
                     <a:p>
                       <a:pPr algn="l"/>
                       <a:r>
-                        <a:rPr sz="1500">
+                        <a:rPr sz="1400">
                           <a:solidFill>
                             <a:srgbClr val="5C7268"/>
                           </a:solidFill>
                           <a:latin typeface="Arial"/>
                         </a:rPr>
-                        <a:t>Captures the downward 2026 approval trend</a:t>
+                        <a:t>Captures the approval-rate trend over time (down toward 2026)</a:t>
                       </a:r>
                     </a:p>
                   </a:txBody>

--- a/presentation/Consulting_Finance_ML_Slides.pptx
+++ b/presentation/Consulting_Finance_ML_Slides.pptx
@@ -13977,7 +13977,7 @@
               <a:tr h="754380">
                 <a:tc>
                   <a:txBody>
-                    <a:bodyPr wrap="square"/>
+                    <a:bodyPr/>
                     <a:lstStyle/>
                     <a:p>
                       <a:pPr algn="l"/>
@@ -14000,7 +14000,7 @@
                 </a:tc>
                 <a:tc>
                   <a:txBody>
-                    <a:bodyPr wrap="square"/>
+                    <a:bodyPr/>
                     <a:lstStyle/>
                     <a:p>
                       <a:pPr algn="l"/>
@@ -14023,7 +14023,7 @@
                 </a:tc>
                 <a:tc>
                   <a:txBody>
-                    <a:bodyPr wrap="square"/>
+                    <a:bodyPr/>
                     <a:lstStyle/>
                     <a:p>
                       <a:pPr algn="l"/>
@@ -14053,7 +14053,7 @@
               <a:tr h="754380">
                 <a:tc>
                   <a:txBody>
-                    <a:bodyPr wrap="square"/>
+                    <a:bodyPr/>
                     <a:lstStyle/>
                     <a:p>
                       <a:pPr algn="l"/>
@@ -14076,7 +14076,7 @@
                 </a:tc>
                 <a:tc>
                   <a:txBody>
-                    <a:bodyPr wrap="square"/>
+                    <a:bodyPr/>
                     <a:lstStyle/>
                     <a:p>
                       <a:pPr algn="l"/>
@@ -14099,7 +14099,7 @@
                 </a:tc>
                 <a:tc>
                   <a:txBody>
-                    <a:bodyPr wrap="square"/>
+                    <a:bodyPr/>
                     <a:lstStyle/>
                     <a:p>
                       <a:pPr algn="l"/>
@@ -14129,7 +14129,7 @@
               <a:tr h="754380">
                 <a:tc>
                   <a:txBody>
-                    <a:bodyPr wrap="square"/>
+                    <a:bodyPr/>
                     <a:lstStyle/>
                     <a:p>
                       <a:pPr algn="l"/>
@@ -14152,7 +14152,7 @@
                 </a:tc>
                 <a:tc>
                   <a:txBody>
-                    <a:bodyPr wrap="square"/>
+                    <a:bodyPr/>
                     <a:lstStyle/>
                     <a:p>
                       <a:pPr algn="l"/>
@@ -14175,7 +14175,7 @@
                 </a:tc>
                 <a:tc>
                   <a:txBody>
-                    <a:bodyPr wrap="square"/>
+                    <a:bodyPr/>
                     <a:lstStyle/>
                     <a:p>
                       <a:pPr algn="l"/>
@@ -14205,7 +14205,7 @@
               <a:tr h="754380">
                 <a:tc>
                   <a:txBody>
-                    <a:bodyPr wrap="square"/>
+                    <a:bodyPr/>
                     <a:lstStyle/>
                     <a:p>
                       <a:pPr algn="l"/>
@@ -14228,7 +14228,7 @@
                 </a:tc>
                 <a:tc>
                   <a:txBody>
-                    <a:bodyPr wrap="square"/>
+                    <a:bodyPr/>
                     <a:lstStyle/>
                     <a:p>
                       <a:pPr algn="l"/>
@@ -14251,7 +14251,7 @@
                 </a:tc>
                 <a:tc>
                   <a:txBody>
-                    <a:bodyPr wrap="square"/>
+                    <a:bodyPr/>
                     <a:lstStyle/>
                     <a:p>
                       <a:pPr algn="l"/>
@@ -14281,7 +14281,7 @@
               <a:tr h="754380">
                 <a:tc>
                   <a:txBody>
-                    <a:bodyPr wrap="square"/>
+                    <a:bodyPr/>
                     <a:lstStyle/>
                     <a:p>
                       <a:pPr algn="l"/>
@@ -14304,7 +14304,7 @@
                 </a:tc>
                 <a:tc>
                   <a:txBody>
-                    <a:bodyPr wrap="square"/>
+                    <a:bodyPr/>
                     <a:lstStyle/>
                     <a:p>
                       <a:pPr algn="l"/>
@@ -14327,7 +14327,7 @@
                 </a:tc>
                 <a:tc>
                   <a:txBody>
-                    <a:bodyPr wrap="square"/>
+                    <a:bodyPr/>
                     <a:lstStyle/>
                     <a:p>
                       <a:pPr algn="l"/>
@@ -14357,7 +14357,7 @@
               <a:tr h="754380">
                 <a:tc>
                   <a:txBody>
-                    <a:bodyPr wrap="square"/>
+                    <a:bodyPr/>
                     <a:lstStyle/>
                     <a:p>
                       <a:pPr algn="l"/>
@@ -14380,7 +14380,7 @@
                 </a:tc>
                 <a:tc>
                   <a:txBody>
-                    <a:bodyPr wrap="square"/>
+                    <a:bodyPr/>
                     <a:lstStyle/>
                     <a:p>
                       <a:pPr algn="l"/>
@@ -14403,7 +14403,7 @@
                 </a:tc>
                 <a:tc>
                   <a:txBody>
-                    <a:bodyPr wrap="square"/>
+                    <a:bodyPr/>
                     <a:lstStyle/>
                     <a:p>
                       <a:pPr algn="l"/>
@@ -14433,7 +14433,7 @@
               <a:tr h="754380">
                 <a:tc>
                   <a:txBody>
-                    <a:bodyPr wrap="square"/>
+                    <a:bodyPr/>
                     <a:lstStyle/>
                     <a:p>
                       <a:pPr algn="l"/>
@@ -14456,7 +14456,7 @@
                 </a:tc>
                 <a:tc>
                   <a:txBody>
-                    <a:bodyPr wrap="square"/>
+                    <a:bodyPr/>
                     <a:lstStyle/>
                     <a:p>
                       <a:pPr algn="l"/>
@@ -14479,7 +14479,7 @@
                 </a:tc>
                 <a:tc>
                   <a:txBody>
-                    <a:bodyPr wrap="square"/>
+                    <a:bodyPr/>
                     <a:lstStyle/>
                     <a:p>
                       <a:pPr algn="l"/>
@@ -14509,7 +14509,7 @@
               <a:tr h="754380">
                 <a:tc>
                   <a:txBody>
-                    <a:bodyPr wrap="square"/>
+                    <a:bodyPr/>
                     <a:lstStyle/>
                     <a:p>
                       <a:pPr algn="l"/>
@@ -14532,7 +14532,7 @@
                 </a:tc>
                 <a:tc>
                   <a:txBody>
-                    <a:bodyPr wrap="square"/>
+                    <a:bodyPr/>
                     <a:lstStyle/>
                     <a:p>
                       <a:pPr algn="l"/>
@@ -14555,7 +14555,7 @@
                 </a:tc>
                 <a:tc>
                   <a:txBody>
-                    <a:bodyPr wrap="square"/>
+                    <a:bodyPr/>
                     <a:lstStyle/>
                     <a:p>
                       <a:pPr algn="l"/>

--- a/presentation/Consulting_Finance_ML_Slides.pptx
+++ b/presentation/Consulting_Finance_ML_Slides.pptx
@@ -18,7 +18,6 @@
     <p:sldId id="263" r:id="rId9"/>
     <p:sldId id="269" r:id="rId10"/>
     <p:sldId id="264" r:id="rId11"/>
-    <p:sldId id="265" r:id="rId12"/>
     <p:sldId id="266" r:id="rId13"/>
     <p:sldId id="268" r:id="rId14"/>
     <p:sldId id="267" r:id="rId15"/>
@@ -5149,7 +5148,7 @@
                 <a:ea typeface="Courier New" pitchFamily="34" charset="-122"/>
                 <a:cs typeface="Courier New" pitchFamily="34" charset="-120"/>
               </a:rPr>
-              <a:t>12 · WHAT COMES NEXT</a:t>
+              <a:t>11 · WHAT COMES NEXT</a:t>
             </a:r>
             <a:endParaRPr lang="en-US" sz="1800" dirty="0"/>
           </a:p>
@@ -5304,7 +5303,7 @@
                 <a:ea typeface="Arial" pitchFamily="34" charset="-122"/>
                 <a:cs typeface="Arial" pitchFamily="34" charset="-120"/>
               </a:rPr>
-              <a:t>Decide by cost, not accuracy</a:t>
+              <a:t>Optimize for cost, not accuracy</a:t>
             </a:r>
             <a:endParaRPr lang="en-US" sz="2400" dirty="0"/>
           </a:p>
@@ -5348,7 +5347,7 @@
                 <a:ea typeface="Arial" pitchFamily="34" charset="-122"/>
                 <a:cs typeface="Arial" pitchFamily="34" charset="-120"/>
               </a:rPr>
-              <a:t>A default costs far more than a lost customer — weigh the two mistakes differently.</a:t>
+              <a:t>A default loses the whole loan; a wrong rejection loses only some interest — so tune the cutoff to minimise expected € loss, not the error count.</a:t>
             </a:r>
             <a:endParaRPr lang="en-US" sz="1950" dirty="0"/>
           </a:p>
@@ -5503,7 +5502,7 @@
                 <a:ea typeface="Arial" pitchFamily="34" charset="-122"/>
                 <a:cs typeface="Arial" pitchFamily="34" charset="-120"/>
               </a:rPr>
-              <a:t>Real lenders need trustworthy risk percentages for pricing and capital, not just a yes/no.</a:t>
+              <a:t>Our cutoff gives a yes/no, but the score isn't a true probability. Calibrate it so a lender can price loans and hold capital on a real default rate.</a:t>
             </a:r>
             <a:endParaRPr lang="en-US" sz="1950" dirty="0"/>
           </a:p>
@@ -5614,7 +5613,7 @@
                 <a:ea typeface="Arial" pitchFamily="34" charset="-122"/>
                 <a:cs typeface="Arial" pitchFamily="34" charset="-120"/>
               </a:rPr>
-              <a:t>Explain every decision</a:t>
+              <a:t>Give every decision a reason</a:t>
             </a:r>
             <a:endParaRPr lang="en-US" sz="2400" dirty="0"/>
           </a:p>
@@ -5658,7 +5657,7 @@
                 <a:ea typeface="Arial" pitchFamily="34" charset="-122"/>
                 <a:cs typeface="Arial" pitchFamily="34" charset="-120"/>
               </a:rPr>
-              <a:t>Show why each application was approved or rejected, so the credit team can defend it.</a:t>
+              <a:t>ECOA law requires telling a rejected applicant why. Add a per-decision explanation (SHAP) so every call is transparent and contestable.</a:t>
             </a:r>
             <a:endParaRPr lang="en-US" sz="1950" dirty="0"/>
           </a:p>
@@ -5769,7 +5768,7 @@
                 <a:ea typeface="Arial" pitchFamily="34" charset="-122"/>
                 <a:cs typeface="Arial" pitchFamily="34" charset="-120"/>
               </a:rPr>
-              <a:t>Monitor fairness &amp; drift</a:t>
+              <a:t>Monitor drift and bias</a:t>
             </a:r>
             <a:endParaRPr lang="en-US" sz="2400" dirty="0"/>
           </a:p>
@@ -5813,7 +5812,7 @@
                 <a:ea typeface="Arial" pitchFamily="34" charset="-122"/>
                 <a:cs typeface="Arial" pitchFamily="34" charset="-120"/>
               </a:rPr>
-              <a:t>Keep checking for bias and for months that look different from training, then retrain.</a:t>
+              <a:t>Approval rates drifted down over the years — track live performance and retrain on schedule, and keep auditing for proxy bias since we dropped race &amp; religion.</a:t>
             </a:r>
             <a:endParaRPr lang="en-US" sz="1950" dirty="0"/>
           </a:p>
@@ -5975,7 +5974,7 @@
                 <a:ea typeface="Courier New" pitchFamily="34" charset="-122"/>
                 <a:cs typeface="Courier New" pitchFamily="34" charset="-120"/>
               </a:rPr>
-              <a:t>13 · KEY CODE</a:t>
+              <a:t>12 · KEY CODE</a:t>
             </a:r>
             <a:endParaRPr lang="en-US" sz="1800" dirty="0"/>
           </a:p>
@@ -6680,7 +6679,7 @@
                 <a:ea typeface="Courier New" pitchFamily="34" charset="-122"/>
                 <a:cs typeface="Courier New" pitchFamily="34" charset="-120"/>
               </a:rPr>
-              <a:t>14 · QUESTIONS</a:t>
+              <a:t>13 · QUESTIONS</a:t>
             </a:r>
             <a:endParaRPr lang="en-US" sz="1800" dirty="0"/>
           </a:p>

--- a/presentation/Consulting_Finance_ML_Slides.pptx
+++ b/presentation/Consulting_Finance_ML_Slides.pptx
@@ -5,7 +5,7 @@
     <p:sldMasterId id="2147483648" r:id="rId1"/>
   </p:sldMasterIdLst>
   <p:notesMasterIdLst>
-    <p:notesMasterId r:id="rId16"/>
+    <p:notesMasterId r:id="rId15"/>
   </p:notesMasterIdLst>
   <p:sldIdLst>
     <p:sldId id="256" r:id="rId2"/>
@@ -18,9 +18,9 @@
     <p:sldId id="263" r:id="rId9"/>
     <p:sldId id="269" r:id="rId10"/>
     <p:sldId id="264" r:id="rId11"/>
-    <p:sldId id="266" r:id="rId13"/>
-    <p:sldId id="268" r:id="rId14"/>
-    <p:sldId id="267" r:id="rId15"/>
+    <p:sldId id="266" r:id="rId12"/>
+    <p:sldId id="268" r:id="rId13"/>
+    <p:sldId id="267" r:id="rId14"/>
   </p:sldIdLst>
   <p:sldSz cx="18288000" cy="10287000"/>
   <p:notesSz cx="10287000" cy="18288000"/>
@@ -382,7 +382,7 @@
           <a:p>
             <a:r>
               <a:rPr lang="en-US" dirty="0"/>
-              <a:t>This slide shows we understood the problem, not just ran a library. The hardest part was the forensics, the validation against the real task, and quantifying the ethics rather than hand-waving them.</a:t>
+              <a:t>Separate what we did from what we'd do next. For a finance audience the strongest next step is deciding by cost rather than accuracy, plus calibrated probabilities: that reframes this from a Kaggle score to real lending economics.</a:t>
             </a:r>
           </a:p>
         </p:txBody>
@@ -469,7 +469,7 @@
           <a:p>
             <a:r>
               <a:rPr lang="en-US" dirty="0"/>
-              <a:t>Separate what we did from what we'd do next. For a finance audience the strongest next step is deciding by cost rather than accuracy, plus calibrated probabilities: that reframes this from a Kaggle score to real lending economics.</a:t>
+              <a:t>The two questions most likely to come up: why we dropped race and religion (lead with the +0.7pt number), and how we knew the column was a leak (it tracked real signal in training but was random in test). Both make us look rigorous.</a:t>
             </a:r>
           </a:p>
         </p:txBody>
@@ -491,94 +491,7 @@
           <a:p>
             <a:fld id="{F7021451-1387-4CA6-816F-3879F97B5CBC}" type="slidenum">
               <a:rPr lang="en-US"/>
-              <a:t>12</a:t>
-            </a:fld>
-            <a:endParaRPr lang="en-US"/>
-          </a:p>
-        </p:txBody>
-      </p:sp>
-    </p:spTree>
-    <p:extLst>
-      <p:ext uri="{BB962C8B-B14F-4D97-AF65-F5344CB8AC3E}">
-        <p14:creationId xmlns:p14="http://schemas.microsoft.com/office/powerpoint/2010/main" val="1024086991"/>
-      </p:ext>
-    </p:extLst>
-  </p:cSld>
-  <p:clrMapOvr>
-    <a:masterClrMapping/>
-  </p:clrMapOvr>
-</p:notes>
-</file>
-
-<file path=ppt/notesSlides/notesSlide12.xml><?xml version="1.0" encoding="utf-8"?>
-<p:notes xmlns:a="http://schemas.openxmlformats.org/drawingml/2006/main" xmlns:r="http://schemas.openxmlformats.org/officeDocument/2006/relationships" xmlns:p="http://schemas.openxmlformats.org/presentationml/2006/main">
-  <p:cSld>
-    <p:spTree>
-      <p:nvGrpSpPr>
-        <p:cNvPr id="1" name=""/>
-        <p:cNvGrpSpPr/>
-        <p:nvPr/>
-      </p:nvGrpSpPr>
-      <p:grpSpPr>
-        <a:xfrm>
-          <a:off x="0" y="0"/>
-          <a:ext cx="0" cy="0"/>
-          <a:chOff x="0" y="0"/>
-          <a:chExt cx="0" cy="0"/>
-        </a:xfrm>
-      </p:grpSpPr>
-      <p:sp>
-        <p:nvSpPr>
-          <p:cNvPr id="2" name="Slide Image Placeholder 1"/>
-          <p:cNvSpPr>
-            <a:spLocks noGrp="1" noRot="1" noChangeAspect="1"/>
-          </p:cNvSpPr>
-          <p:nvPr>
-            <p:ph type="sldImg"/>
-          </p:nvPr>
-        </p:nvSpPr>
-        <p:spPr/>
-      </p:sp>
-      <p:sp>
-        <p:nvSpPr>
-          <p:cNvPr id="3" name="Notes Placeholder 2"/>
-          <p:cNvSpPr>
-            <a:spLocks noGrp="1"/>
-          </p:cNvSpPr>
-          <p:nvPr>
-            <p:ph type="body" idx="1"/>
-          </p:nvPr>
-        </p:nvSpPr>
-        <p:spPr/>
-        <p:txBody>
-          <a:bodyPr/>
-          <a:lstStyle/>
-          <a:p>
-            <a:r>
-              <a:rPr lang="en-US" dirty="0"/>
-              <a:t>The two questions most likely to come up: why we dropped race and religion (lead with the +0.7pt number), and how we knew the column was a leak (it tracked real signal in training but was random in test). Both make us look rigorous.</a:t>
-            </a:r>
-          </a:p>
-        </p:txBody>
-      </p:sp>
-      <p:sp>
-        <p:nvSpPr>
-          <p:cNvPr id="4" name="Slide Number Placeholder 3"/>
-          <p:cNvSpPr>
-            <a:spLocks noGrp="1"/>
-          </p:cNvSpPr>
-          <p:nvPr>
-            <p:ph type="sldNum" sz="quarter" idx="10"/>
-          </p:nvPr>
-        </p:nvSpPr>
-        <p:spPr/>
-        <p:txBody>
-          <a:bodyPr/>
-          <a:lstStyle/>
-          <a:p>
-            <a:fld id="{F7021451-1387-4CA6-816F-3879F97B5CBC}" type="slidenum">
-              <a:rPr lang="en-US"/>
-              <a:t>14</a:t>
+              <a:t>13</a:t>
             </a:fld>
             <a:endParaRPr lang="en-US"/>
           </a:p>
@@ -4253,816 +4166,6 @@
 
 <file path=ppt/slides/slide11.xml><?xml version="1.0" encoding="utf-8"?>
 <p:sld xmlns:a="http://schemas.openxmlformats.org/drawingml/2006/main" xmlns:r="http://schemas.openxmlformats.org/officeDocument/2006/relationships" xmlns:p="http://schemas.openxmlformats.org/presentationml/2006/main">
-  <p:cSld name="Slide 10">
-    <p:bg>
-      <p:bgPr>
-        <a:solidFill>
-          <a:srgbClr val="FFFFFF"/>
-        </a:solidFill>
-        <a:effectLst/>
-      </p:bgPr>
-    </p:bg>
-    <p:spTree>
-      <p:nvGrpSpPr>
-        <p:cNvPr id="1" name=""/>
-        <p:cNvGrpSpPr/>
-        <p:nvPr/>
-      </p:nvGrpSpPr>
-      <p:grpSpPr>
-        <a:xfrm>
-          <a:off x="0" y="0"/>
-          <a:ext cx="0" cy="0"/>
-          <a:chOff x="0" y="0"/>
-          <a:chExt cx="0" cy="0"/>
-        </a:xfrm>
-      </p:grpSpPr>
-      <p:sp>
-        <p:nvSpPr>
-          <p:cNvPr id="2" name="Shape 0"/>
-          <p:cNvSpPr/>
-          <p:nvPr/>
-        </p:nvSpPr>
-        <p:spPr>
-          <a:xfrm>
-            <a:off x="952500" y="1912218"/>
-            <a:ext cx="16383000" cy="19050"/>
-          </a:xfrm>
-          <a:prstGeom prst="rect">
-            <a:avLst/>
-          </a:prstGeom>
-          <a:solidFill>
-            <a:srgbClr val="1A7A57"/>
-          </a:solidFill>
-          <a:ln/>
-        </p:spPr>
-        <p:txBody>
-          <a:bodyPr/>
-          <a:lstStyle/>
-          <a:p>
-            <a:endParaRPr lang="en-GB"/>
-          </a:p>
-        </p:txBody>
-      </p:sp>
-      <p:sp>
-        <p:nvSpPr>
-          <p:cNvPr id="3" name="Text 1"/>
-          <p:cNvSpPr/>
-          <p:nvPr/>
-        </p:nvSpPr>
-        <p:spPr>
-          <a:xfrm>
-            <a:off x="952500" y="742950"/>
-            <a:ext cx="18021300" cy="295275"/>
-          </a:xfrm>
-          <a:prstGeom prst="rect">
-            <a:avLst/>
-          </a:prstGeom>
-          <a:noFill/>
-          <a:ln/>
-        </p:spPr>
-        <p:txBody>
-          <a:bodyPr wrap="square" lIns="25400" tIns="25400" rIns="25400" bIns="25400" rtlCol="0" anchor="t">
-            <a:normAutofit fontScale="92500" lnSpcReduction="10000"/>
-          </a:bodyPr>
-          <a:lstStyle/>
-          <a:p>
-            <a:pPr marL="0" indent="0" algn="l">
-              <a:buNone/>
-            </a:pPr>
-            <a:r>
-              <a:rPr lang="en-US" sz="1800" kern="0" spc="225" dirty="0">
-                <a:solidFill>
-                  <a:srgbClr val="007A33"/>
-                </a:solidFill>
-                <a:latin typeface="Courier New" pitchFamily="34" charset="0"/>
-                <a:ea typeface="Courier New" pitchFamily="34" charset="-122"/>
-                <a:cs typeface="Courier New" pitchFamily="34" charset="-120"/>
-              </a:rPr>
-              <a:t>11 · WHAT WE LEARNED</a:t>
-            </a:r>
-            <a:endParaRPr lang="en-US" sz="1800" dirty="0"/>
-          </a:p>
-        </p:txBody>
-      </p:sp>
-      <p:sp>
-        <p:nvSpPr>
-          <p:cNvPr id="4" name="Text 2"/>
-          <p:cNvSpPr/>
-          <p:nvPr/>
-        </p:nvSpPr>
-        <p:spPr>
-          <a:xfrm>
-            <a:off x="952500" y="1152525"/>
-            <a:ext cx="18021300" cy="550143"/>
-          </a:xfrm>
-          <a:prstGeom prst="rect">
-            <a:avLst/>
-          </a:prstGeom>
-          <a:noFill/>
-          <a:ln/>
-        </p:spPr>
-        <p:txBody>
-          <a:bodyPr wrap="square" lIns="25400" tIns="25400" rIns="25400" bIns="25400" rtlCol="0" anchor="t">
-            <a:normAutofit fontScale="92500" lnSpcReduction="10000"/>
-          </a:bodyPr>
-          <a:lstStyle/>
-          <a:p>
-            <a:pPr marL="0" indent="0" algn="l">
-              <a:lnSpc>
-                <a:spcPct val="112000"/>
-              </a:lnSpc>
-              <a:buNone/>
-            </a:pPr>
-            <a:r>
-              <a:rPr lang="en-US" sz="3600" b="1" kern="0" spc="-37" dirty="0">
-                <a:solidFill>
-                  <a:srgbClr val="063D22"/>
-                </a:solidFill>
-                <a:latin typeface="Arial" pitchFamily="34" charset="0"/>
-                <a:ea typeface="Arial" pitchFamily="34" charset="-122"/>
-                <a:cs typeface="Arial" pitchFamily="34" charset="-120"/>
-              </a:rPr>
-              <a:t>Finding the traps was harder than building the model</a:t>
-            </a:r>
-            <a:endParaRPr lang="en-US" sz="3600" dirty="0"/>
-          </a:p>
-        </p:txBody>
-      </p:sp>
-      <p:sp>
-        <p:nvSpPr>
-          <p:cNvPr id="5" name="Text 3"/>
-          <p:cNvSpPr/>
-          <p:nvPr/>
-        </p:nvSpPr>
-        <p:spPr>
-          <a:xfrm>
-            <a:off x="952500" y="2426568"/>
-            <a:ext cx="3868817" cy="647700"/>
-          </a:xfrm>
-          <a:prstGeom prst="rect">
-            <a:avLst/>
-          </a:prstGeom>
-          <a:noFill/>
-          <a:ln/>
-        </p:spPr>
-        <p:txBody>
-          <a:bodyPr wrap="square" lIns="25400" tIns="25400" rIns="25400" bIns="25400" rtlCol="0" anchor="t">
-            <a:normAutofit fontScale="92500" lnSpcReduction="20000"/>
-          </a:bodyPr>
-          <a:lstStyle/>
-          <a:p>
-            <a:pPr marL="0" indent="0" algn="l">
-              <a:lnSpc>
-                <a:spcPct val="100000"/>
-              </a:lnSpc>
-              <a:buNone/>
-            </a:pPr>
-            <a:r>
-              <a:rPr lang="en-US" sz="4800" b="1" dirty="0">
-                <a:solidFill>
-                  <a:srgbClr val="66B3A1"/>
-                </a:solidFill>
-                <a:latin typeface="Georgia" pitchFamily="34" charset="0"/>
-                <a:ea typeface="Georgia" pitchFamily="34" charset="-122"/>
-                <a:cs typeface="Georgia" pitchFamily="34" charset="-120"/>
-              </a:rPr>
-              <a:t>01</a:t>
-            </a:r>
-            <a:endParaRPr lang="en-US" sz="4800" dirty="0"/>
-          </a:p>
-        </p:txBody>
-      </p:sp>
-      <p:sp>
-        <p:nvSpPr>
-          <p:cNvPr id="6" name="Text 4"/>
-          <p:cNvSpPr/>
-          <p:nvPr/>
-        </p:nvSpPr>
-        <p:spPr>
-          <a:xfrm>
-            <a:off x="952500" y="3207618"/>
-            <a:ext cx="3622619" cy="733425"/>
-          </a:xfrm>
-          <a:prstGeom prst="rect">
-            <a:avLst/>
-          </a:prstGeom>
-          <a:noFill/>
-          <a:ln/>
-        </p:spPr>
-        <p:txBody>
-          <a:bodyPr wrap="square" lIns="25400" tIns="25400" rIns="25400" bIns="25400" rtlCol="0" anchor="t">
-            <a:normAutofit lnSpcReduction="10000"/>
-          </a:bodyPr>
-          <a:lstStyle/>
-          <a:p>
-            <a:pPr marL="0" indent="0" algn="l">
-              <a:buNone/>
-            </a:pPr>
-            <a:r>
-              <a:rPr lang="en-US" sz="2250" b="1" dirty="0">
-                <a:solidFill>
-                  <a:srgbClr val="063D22"/>
-                </a:solidFill>
-                <a:latin typeface="Arial" pitchFamily="34" charset="0"/>
-                <a:ea typeface="Arial" pitchFamily="34" charset="-122"/>
-                <a:cs typeface="Arial" pitchFamily="34" charset="-120"/>
-              </a:rPr>
-              <a:t>The traps, not the algorithm</a:t>
-            </a:r>
-            <a:endParaRPr lang="en-US" sz="2250" dirty="0"/>
-          </a:p>
-        </p:txBody>
-      </p:sp>
-      <p:sp>
-        <p:nvSpPr>
-          <p:cNvPr id="7" name="Text 5"/>
-          <p:cNvSpPr/>
-          <p:nvPr/>
-        </p:nvSpPr>
-        <p:spPr>
-          <a:xfrm>
-            <a:off x="952500" y="4017243"/>
-            <a:ext cx="3622619" cy="1115244"/>
-          </a:xfrm>
-          <a:prstGeom prst="rect">
-            <a:avLst/>
-          </a:prstGeom>
-          <a:noFill/>
-          <a:ln/>
-        </p:spPr>
-        <p:txBody>
-          <a:bodyPr wrap="square" lIns="25400" tIns="25400" rIns="25400" bIns="25400" rtlCol="0" anchor="t">
-            <a:normAutofit fontScale="92500" lnSpcReduction="20000"/>
-          </a:bodyPr>
-          <a:lstStyle/>
-          <a:p>
-            <a:pPr marL="0" indent="0" algn="l">
-              <a:lnSpc>
-                <a:spcPct val="145000"/>
-              </a:lnSpc>
-              <a:buNone/>
-            </a:pPr>
-            <a:r>
-              <a:rPr lang="en-US" sz="1950" dirty="0">
-                <a:solidFill>
-                  <a:srgbClr val="5C7268"/>
-                </a:solidFill>
-                <a:latin typeface="Arial" pitchFamily="34" charset="0"/>
-                <a:ea typeface="Arial" pitchFamily="34" charset="-122"/>
-                <a:cs typeface="Arial" pitchFamily="34" charset="-120"/>
-              </a:rPr>
-              <a:t>Most of the value came from catching sabotaged columns before any modeling.</a:t>
-            </a:r>
-            <a:endParaRPr lang="en-US" sz="1950" dirty="0"/>
-          </a:p>
-        </p:txBody>
-      </p:sp>
-      <p:sp>
-        <p:nvSpPr>
-          <p:cNvPr id="8" name="Shape 6"/>
-          <p:cNvSpPr/>
-          <p:nvPr/>
-        </p:nvSpPr>
-        <p:spPr>
-          <a:xfrm>
-            <a:off x="4850606" y="2426568"/>
-            <a:ext cx="9525" cy="6812682"/>
-          </a:xfrm>
-          <a:prstGeom prst="rect">
-            <a:avLst/>
-          </a:prstGeom>
-          <a:solidFill>
-            <a:srgbClr val="D2E6DD"/>
-          </a:solidFill>
-          <a:ln/>
-        </p:spPr>
-        <p:txBody>
-          <a:bodyPr/>
-          <a:lstStyle/>
-          <a:p>
-            <a:endParaRPr lang="en-GB"/>
-          </a:p>
-        </p:txBody>
-      </p:sp>
-      <p:sp>
-        <p:nvSpPr>
-          <p:cNvPr id="9" name="Text 7"/>
-          <p:cNvSpPr/>
-          <p:nvPr/>
-        </p:nvSpPr>
-        <p:spPr>
-          <a:xfrm>
-            <a:off x="5241131" y="2426568"/>
-            <a:ext cx="3868817" cy="647700"/>
-          </a:xfrm>
-          <a:prstGeom prst="rect">
-            <a:avLst/>
-          </a:prstGeom>
-          <a:noFill/>
-          <a:ln/>
-        </p:spPr>
-        <p:txBody>
-          <a:bodyPr wrap="square" lIns="25400" tIns="25400" rIns="25400" bIns="25400" rtlCol="0" anchor="t">
-            <a:normAutofit fontScale="92500" lnSpcReduction="20000"/>
-          </a:bodyPr>
-          <a:lstStyle/>
-          <a:p>
-            <a:pPr marL="0" indent="0" algn="l">
-              <a:lnSpc>
-                <a:spcPct val="100000"/>
-              </a:lnSpc>
-              <a:buNone/>
-            </a:pPr>
-            <a:r>
-              <a:rPr lang="en-US" sz="4800" b="1" dirty="0">
-                <a:solidFill>
-                  <a:srgbClr val="66B3A1"/>
-                </a:solidFill>
-                <a:latin typeface="Georgia" pitchFamily="34" charset="0"/>
-                <a:ea typeface="Georgia" pitchFamily="34" charset="-122"/>
-                <a:cs typeface="Georgia" pitchFamily="34" charset="-120"/>
-              </a:rPr>
-              <a:t>02</a:t>
-            </a:r>
-            <a:endParaRPr lang="en-US" sz="4800" dirty="0"/>
-          </a:p>
-        </p:txBody>
-      </p:sp>
-      <p:sp>
-        <p:nvSpPr>
-          <p:cNvPr id="10" name="Text 8"/>
-          <p:cNvSpPr/>
-          <p:nvPr/>
-        </p:nvSpPr>
-        <p:spPr>
-          <a:xfrm>
-            <a:off x="5241131" y="3207618"/>
-            <a:ext cx="3868817" cy="385763"/>
-          </a:xfrm>
-          <a:prstGeom prst="rect">
-            <a:avLst/>
-          </a:prstGeom>
-          <a:noFill/>
-          <a:ln/>
-        </p:spPr>
-        <p:txBody>
-          <a:bodyPr wrap="square" lIns="25400" tIns="25400" rIns="25400" bIns="25400" rtlCol="0" anchor="t">
-            <a:normAutofit lnSpcReduction="10000"/>
-          </a:bodyPr>
-          <a:lstStyle/>
-          <a:p>
-            <a:pPr marL="0" indent="0" algn="l">
-              <a:buNone/>
-            </a:pPr>
-            <a:r>
-              <a:rPr lang="en-US" sz="2250" b="1" dirty="0">
-                <a:solidFill>
-                  <a:srgbClr val="063D22"/>
-                </a:solidFill>
-                <a:latin typeface="Arial" pitchFamily="34" charset="0"/>
-                <a:ea typeface="Arial" pitchFamily="34" charset="-122"/>
-                <a:cs typeface="Arial" pitchFamily="34" charset="-120"/>
-              </a:rPr>
-              <a:t>Test like the real task</a:t>
-            </a:r>
-            <a:endParaRPr lang="en-US" sz="2250" dirty="0"/>
-          </a:p>
-        </p:txBody>
-      </p:sp>
-      <p:sp>
-        <p:nvSpPr>
-          <p:cNvPr id="11" name="Text 9"/>
-          <p:cNvSpPr/>
-          <p:nvPr/>
-        </p:nvSpPr>
-        <p:spPr>
-          <a:xfrm>
-            <a:off x="5241131" y="3669581"/>
-            <a:ext cx="3622619" cy="1115244"/>
-          </a:xfrm>
-          <a:prstGeom prst="rect">
-            <a:avLst/>
-          </a:prstGeom>
-          <a:noFill/>
-          <a:ln/>
-        </p:spPr>
-        <p:txBody>
-          <a:bodyPr wrap="square" lIns="25400" tIns="25400" rIns="25400" bIns="25400" rtlCol="0" anchor="t">
-            <a:normAutofit fontScale="92500" lnSpcReduction="20000"/>
-          </a:bodyPr>
-          <a:lstStyle/>
-          <a:p>
-            <a:pPr marL="0" indent="0" algn="l">
-              <a:lnSpc>
-                <a:spcPct val="145000"/>
-              </a:lnSpc>
-              <a:buNone/>
-            </a:pPr>
-            <a:r>
-              <a:rPr lang="en-US" sz="1950" dirty="0">
-                <a:solidFill>
-                  <a:srgbClr val="5C7268"/>
-                </a:solidFill>
-                <a:latin typeface="Arial" pitchFamily="34" charset="0"/>
-                <a:ea typeface="Arial" pitchFamily="34" charset="-122"/>
-                <a:cs typeface="Arial" pitchFamily="34" charset="-120"/>
-              </a:rPr>
-              <a:t>Predicting held-back months exposed mistakes a random split would have hidden.</a:t>
-            </a:r>
-            <a:endParaRPr lang="en-US" sz="1950" dirty="0"/>
-          </a:p>
-        </p:txBody>
-      </p:sp>
-      <p:sp>
-        <p:nvSpPr>
-          <p:cNvPr id="12" name="Shape 10"/>
-          <p:cNvSpPr/>
-          <p:nvPr/>
-        </p:nvSpPr>
-        <p:spPr>
-          <a:xfrm>
-            <a:off x="9139238" y="2426568"/>
-            <a:ext cx="9525" cy="6812682"/>
-          </a:xfrm>
-          <a:prstGeom prst="rect">
-            <a:avLst/>
-          </a:prstGeom>
-          <a:solidFill>
-            <a:srgbClr val="D2E6DD"/>
-          </a:solidFill>
-          <a:ln/>
-        </p:spPr>
-        <p:txBody>
-          <a:bodyPr/>
-          <a:lstStyle/>
-          <a:p>
-            <a:endParaRPr lang="en-GB"/>
-          </a:p>
-        </p:txBody>
-      </p:sp>
-      <p:sp>
-        <p:nvSpPr>
-          <p:cNvPr id="13" name="Text 11"/>
-          <p:cNvSpPr/>
-          <p:nvPr/>
-        </p:nvSpPr>
-        <p:spPr>
-          <a:xfrm>
-            <a:off x="9529763" y="2426568"/>
-            <a:ext cx="3868817" cy="647700"/>
-          </a:xfrm>
-          <a:prstGeom prst="rect">
-            <a:avLst/>
-          </a:prstGeom>
-          <a:noFill/>
-          <a:ln/>
-        </p:spPr>
-        <p:txBody>
-          <a:bodyPr wrap="square" lIns="25400" tIns="25400" rIns="25400" bIns="25400" rtlCol="0" anchor="t">
-            <a:normAutofit fontScale="92500" lnSpcReduction="20000"/>
-          </a:bodyPr>
-          <a:lstStyle/>
-          <a:p>
-            <a:pPr marL="0" indent="0" algn="l">
-              <a:lnSpc>
-                <a:spcPct val="100000"/>
-              </a:lnSpc>
-              <a:buNone/>
-            </a:pPr>
-            <a:r>
-              <a:rPr lang="en-US" sz="4800" b="1" dirty="0">
-                <a:solidFill>
-                  <a:srgbClr val="66B3A1"/>
-                </a:solidFill>
-                <a:latin typeface="Georgia" pitchFamily="34" charset="0"/>
-                <a:ea typeface="Georgia" pitchFamily="34" charset="-122"/>
-                <a:cs typeface="Georgia" pitchFamily="34" charset="-120"/>
-              </a:rPr>
-              <a:t>03</a:t>
-            </a:r>
-            <a:endParaRPr lang="en-US" sz="4800" dirty="0"/>
-          </a:p>
-        </p:txBody>
-      </p:sp>
-      <p:sp>
-        <p:nvSpPr>
-          <p:cNvPr id="14" name="Text 12"/>
-          <p:cNvSpPr/>
-          <p:nvPr/>
-        </p:nvSpPr>
-        <p:spPr>
-          <a:xfrm>
-            <a:off x="9529763" y="3207618"/>
-            <a:ext cx="3868817" cy="385763"/>
-          </a:xfrm>
-          <a:prstGeom prst="rect">
-            <a:avLst/>
-          </a:prstGeom>
-          <a:noFill/>
-          <a:ln/>
-        </p:spPr>
-        <p:txBody>
-          <a:bodyPr wrap="square" lIns="25400" tIns="25400" rIns="25400" bIns="25400" rtlCol="0" anchor="t">
-            <a:normAutofit lnSpcReduction="10000"/>
-          </a:bodyPr>
-          <a:lstStyle/>
-          <a:p>
-            <a:pPr marL="0" indent="0" algn="l">
-              <a:buNone/>
-            </a:pPr>
-            <a:r>
-              <a:rPr lang="en-US" sz="2250" b="1" dirty="0">
-                <a:solidFill>
-                  <a:srgbClr val="063D22"/>
-                </a:solidFill>
-                <a:latin typeface="Arial" pitchFamily="34" charset="0"/>
-                <a:ea typeface="Arial" pitchFamily="34" charset="-122"/>
-                <a:cs typeface="Arial" pitchFamily="34" charset="-120"/>
-              </a:rPr>
-              <a:t>Measure the ethics</a:t>
-            </a:r>
-            <a:endParaRPr lang="en-US" sz="2250" dirty="0"/>
-          </a:p>
-        </p:txBody>
-      </p:sp>
-      <p:sp>
-        <p:nvSpPr>
-          <p:cNvPr id="15" name="Text 13"/>
-          <p:cNvSpPr/>
-          <p:nvPr/>
-        </p:nvSpPr>
-        <p:spPr>
-          <a:xfrm>
-            <a:off x="9529763" y="3669581"/>
-            <a:ext cx="3622619" cy="1115244"/>
-          </a:xfrm>
-          <a:prstGeom prst="rect">
-            <a:avLst/>
-          </a:prstGeom>
-          <a:noFill/>
-          <a:ln/>
-        </p:spPr>
-        <p:txBody>
-          <a:bodyPr wrap="square" lIns="25400" tIns="25400" rIns="25400" bIns="25400" rtlCol="0" anchor="t">
-            <a:normAutofit fontScale="92500" lnSpcReduction="20000"/>
-          </a:bodyPr>
-          <a:lstStyle/>
-          <a:p>
-            <a:pPr marL="0" indent="0" algn="l">
-              <a:lnSpc>
-                <a:spcPct val="145000"/>
-              </a:lnSpc>
-              <a:buNone/>
-            </a:pPr>
-            <a:r>
-              <a:rPr lang="en-US" sz="1950" dirty="0">
-                <a:solidFill>
-                  <a:srgbClr val="5C7268"/>
-                </a:solidFill>
-                <a:latin typeface="Arial" pitchFamily="34" charset="0"/>
-                <a:ea typeface="Arial" pitchFamily="34" charset="-122"/>
-                <a:cs typeface="Arial" pitchFamily="34" charset="-120"/>
-              </a:rPr>
-              <a:t>“We dropped race” is weak. “It costs exactly +0.7pt of bias” is strong.</a:t>
-            </a:r>
-            <a:endParaRPr lang="en-US" sz="1950" dirty="0"/>
-          </a:p>
-        </p:txBody>
-      </p:sp>
-      <p:sp>
-        <p:nvSpPr>
-          <p:cNvPr id="16" name="Shape 14"/>
-          <p:cNvSpPr/>
-          <p:nvPr/>
-        </p:nvSpPr>
-        <p:spPr>
-          <a:xfrm>
-            <a:off x="13427869" y="2426568"/>
-            <a:ext cx="9525" cy="6812682"/>
-          </a:xfrm>
-          <a:prstGeom prst="rect">
-            <a:avLst/>
-          </a:prstGeom>
-          <a:solidFill>
-            <a:srgbClr val="D2E6DD"/>
-          </a:solidFill>
-          <a:ln/>
-        </p:spPr>
-        <p:txBody>
-          <a:bodyPr/>
-          <a:lstStyle/>
-          <a:p>
-            <a:endParaRPr lang="en-GB"/>
-          </a:p>
-        </p:txBody>
-      </p:sp>
-      <p:sp>
-        <p:nvSpPr>
-          <p:cNvPr id="17" name="Text 15"/>
-          <p:cNvSpPr/>
-          <p:nvPr/>
-        </p:nvSpPr>
-        <p:spPr>
-          <a:xfrm>
-            <a:off x="13818394" y="2426568"/>
-            <a:ext cx="3868817" cy="647700"/>
-          </a:xfrm>
-          <a:prstGeom prst="rect">
-            <a:avLst/>
-          </a:prstGeom>
-          <a:noFill/>
-          <a:ln/>
-        </p:spPr>
-        <p:txBody>
-          <a:bodyPr wrap="square" lIns="25400" tIns="25400" rIns="25400" bIns="25400" rtlCol="0" anchor="t">
-            <a:normAutofit fontScale="92500" lnSpcReduction="20000"/>
-          </a:bodyPr>
-          <a:lstStyle/>
-          <a:p>
-            <a:pPr marL="0" indent="0" algn="l">
-              <a:lnSpc>
-                <a:spcPct val="100000"/>
-              </a:lnSpc>
-              <a:buNone/>
-            </a:pPr>
-            <a:r>
-              <a:rPr lang="en-US" sz="4800" b="1" dirty="0">
-                <a:solidFill>
-                  <a:srgbClr val="66B3A1"/>
-                </a:solidFill>
-                <a:latin typeface="Georgia" pitchFamily="34" charset="0"/>
-                <a:ea typeface="Georgia" pitchFamily="34" charset="-122"/>
-                <a:cs typeface="Georgia" pitchFamily="34" charset="-120"/>
-              </a:rPr>
-              <a:t>04</a:t>
-            </a:r>
-            <a:endParaRPr lang="en-US" sz="4800" dirty="0"/>
-          </a:p>
-        </p:txBody>
-      </p:sp>
-      <p:sp>
-        <p:nvSpPr>
-          <p:cNvPr id="18" name="Text 16"/>
-          <p:cNvSpPr/>
-          <p:nvPr/>
-        </p:nvSpPr>
-        <p:spPr>
-          <a:xfrm>
-            <a:off x="13818394" y="3207618"/>
-            <a:ext cx="3868817" cy="385763"/>
-          </a:xfrm>
-          <a:prstGeom prst="rect">
-            <a:avLst/>
-          </a:prstGeom>
-          <a:noFill/>
-          <a:ln/>
-        </p:spPr>
-        <p:txBody>
-          <a:bodyPr wrap="square" lIns="25400" tIns="25400" rIns="25400" bIns="25400" rtlCol="0" anchor="t">
-            <a:normAutofit lnSpcReduction="10000"/>
-          </a:bodyPr>
-          <a:lstStyle/>
-          <a:p>
-            <a:pPr marL="0" indent="0" algn="l">
-              <a:buNone/>
-            </a:pPr>
-            <a:r>
-              <a:rPr lang="en-US" sz="2250" b="1" dirty="0">
-                <a:solidFill>
-                  <a:srgbClr val="063D22"/>
-                </a:solidFill>
-                <a:latin typeface="Arial" pitchFamily="34" charset="0"/>
-                <a:ea typeface="Arial" pitchFamily="34" charset="-122"/>
-                <a:cs typeface="Arial" pitchFamily="34" charset="-120"/>
-              </a:rPr>
-              <a:t>Deleting can be the fix</a:t>
-            </a:r>
-            <a:endParaRPr lang="en-US" sz="2250" dirty="0"/>
-          </a:p>
-        </p:txBody>
-      </p:sp>
-      <p:sp>
-        <p:nvSpPr>
-          <p:cNvPr id="19" name="Text 17"/>
-          <p:cNvSpPr/>
-          <p:nvPr/>
-        </p:nvSpPr>
-        <p:spPr>
-          <a:xfrm>
-            <a:off x="13818394" y="3669581"/>
-            <a:ext cx="3622619" cy="1474291"/>
-          </a:xfrm>
-          <a:prstGeom prst="rect">
-            <a:avLst/>
-          </a:prstGeom>
-          <a:noFill/>
-          <a:ln/>
-        </p:spPr>
-        <p:txBody>
-          <a:bodyPr wrap="square" lIns="25400" tIns="25400" rIns="25400" bIns="25400" rtlCol="0" anchor="t">
-            <a:normAutofit/>
-          </a:bodyPr>
-          <a:lstStyle/>
-          <a:p>
-            <a:pPr marL="0" indent="0" algn="l">
-              <a:lnSpc>
-                <a:spcPct val="145000"/>
-              </a:lnSpc>
-              <a:buNone/>
-            </a:pPr>
-            <a:r>
-              <a:rPr lang="en-US" sz="1950" dirty="0">
-                <a:solidFill>
-                  <a:srgbClr val="5C7268"/>
-                </a:solidFill>
-                <a:latin typeface="Arial" pitchFamily="34" charset="0"/>
-                <a:ea typeface="Arial" pitchFamily="34" charset="-122"/>
-                <a:cs typeface="Arial" pitchFamily="34" charset="-120"/>
-              </a:rPr>
-              <a:t>We removed the four most “predictive” columns on purpose — their power was fake.</a:t>
-            </a:r>
-            <a:endParaRPr lang="en-US" sz="1950" dirty="0"/>
-          </a:p>
-        </p:txBody>
-      </p:sp>
-      <p:sp>
-        <p:nvSpPr>
-          <p:cNvPr id="20" name="Shape 18"/>
-          <p:cNvSpPr/>
-          <p:nvPr/>
-        </p:nvSpPr>
-        <p:spPr>
-          <a:xfrm>
-            <a:off x="952500" y="9239250"/>
-            <a:ext cx="16383000" cy="9525"/>
-          </a:xfrm>
-          <a:prstGeom prst="rect">
-            <a:avLst/>
-          </a:prstGeom>
-          <a:solidFill>
-            <a:srgbClr val="D2E6DD"/>
-          </a:solidFill>
-          <a:ln/>
-        </p:spPr>
-        <p:txBody>
-          <a:bodyPr/>
-          <a:lstStyle/>
-          <a:p>
-            <a:endParaRPr lang="en-GB"/>
-          </a:p>
-        </p:txBody>
-      </p:sp>
-      <p:sp>
-        <p:nvSpPr>
-          <p:cNvPr id="21" name="Text 19"/>
-          <p:cNvSpPr/>
-          <p:nvPr/>
-        </p:nvSpPr>
-        <p:spPr>
-          <a:xfrm>
-            <a:off x="952500" y="9458325"/>
-            <a:ext cx="16874490" cy="295275"/>
-          </a:xfrm>
-          <a:prstGeom prst="rect">
-            <a:avLst/>
-          </a:prstGeom>
-          <a:noFill/>
-          <a:ln/>
-        </p:spPr>
-        <p:txBody>
-          <a:bodyPr wrap="square" lIns="25400" tIns="25400" rIns="25400" bIns="25400" rtlCol="0" anchor="t">
-            <a:normAutofit fontScale="92500" lnSpcReduction="10000"/>
-          </a:bodyPr>
-          <a:lstStyle/>
-          <a:p>
-            <a:pPr marL="0" indent="0" algn="l">
-              <a:buNone/>
-            </a:pPr>
-            <a:r>
-              <a:rPr lang="en-US" sz="1800" dirty="0">
-                <a:solidFill>
-                  <a:srgbClr val="5C7268"/>
-                </a:solidFill>
-                <a:latin typeface="Courier New" pitchFamily="34" charset="0"/>
-                <a:ea typeface="Courier New" pitchFamily="34" charset="-122"/>
-                <a:cs typeface="Courier New" pitchFamily="34" charset="-120"/>
-              </a:rPr>
-              <a:t>Source: team retrospective</a:t>
-            </a:r>
-            <a:endParaRPr lang="en-US" sz="1800" dirty="0"/>
-          </a:p>
-        </p:txBody>
-      </p:sp>
-    </p:spTree>
-  </p:cSld>
-  <p:clrMapOvr>
-    <a:masterClrMapping/>
-  </p:clrMapOvr>
-</p:sld>
-</file>
-
-<file path=ppt/slides/slide12.xml><?xml version="1.0" encoding="utf-8"?>
-<p:sld xmlns:a="http://schemas.openxmlformats.org/drawingml/2006/main" xmlns:r="http://schemas.openxmlformats.org/officeDocument/2006/relationships" xmlns:p="http://schemas.openxmlformats.org/presentationml/2006/main">
   <p:cSld name="Slide 11">
     <p:bg>
       <p:bgPr>
@@ -5894,7 +4997,7 @@
 </p:sld>
 </file>
 
-<file path=ppt/slides/slide13.xml><?xml version="1.0" encoding="utf-8"?>
+<file path=ppt/slides/slide12.xml><?xml version="1.0" encoding="utf-8"?>
 <p:sld xmlns:a="http://schemas.openxmlformats.org/drawingml/2006/main" xmlns:r="http://schemas.openxmlformats.org/officeDocument/2006/relationships" xmlns:p="http://schemas.openxmlformats.org/presentationml/2006/main">
   <p:cSld>
     <p:spTree>
@@ -6619,7 +5722,7 @@
 </p:sld>
 </file>
 
-<file path=ppt/slides/slide14.xml><?xml version="1.0" encoding="utf-8"?>
+<file path=ppt/slides/slide13.xml><?xml version="1.0" encoding="utf-8"?>
 <p:sld xmlns:a="http://schemas.openxmlformats.org/drawingml/2006/main" xmlns:r="http://schemas.openxmlformats.org/officeDocument/2006/relationships" xmlns:p="http://schemas.openxmlformats.org/presentationml/2006/main">
   <p:cSld name="Slide 12">
     <p:bg>

--- a/presentation/Consulting_Finance_ML_Slides.pptx
+++ b/presentation/Consulting_Finance_ML_Slides.pptx
@@ -18,7 +18,6 @@
     <p:sldId id="263" r:id="rId9"/>
     <p:sldId id="269" r:id="rId10"/>
     <p:sldId id="264" r:id="rId11"/>
-    <p:sldId id="266" r:id="rId12"/>
     <p:sldId id="268" r:id="rId13"/>
     <p:sldId id="267" r:id="rId14"/>
   </p:sldIdLst>
@@ -3291,564 +3290,6 @@
       </p:sp>
       <p:sp>
         <p:nvSpPr>
-          <p:cNvPr id="43" name="Text 41"/>
-          <p:cNvSpPr/>
-          <p:nvPr/>
-        </p:nvSpPr>
-        <p:spPr>
-          <a:xfrm>
-            <a:off x="952500" y="6374904"/>
-            <a:ext cx="11050079" cy="295275"/>
-          </a:xfrm>
-          <a:prstGeom prst="rect">
-            <a:avLst/>
-          </a:prstGeom>
-          <a:noFill/>
-          <a:ln/>
-        </p:spPr>
-        <p:txBody>
-          <a:bodyPr wrap="square" lIns="25400" tIns="25400" rIns="25400" bIns="25400" rtlCol="0" anchor="t">
-            <a:normAutofit fontScale="92500" lnSpcReduction="10000"/>
-          </a:bodyPr>
-          <a:lstStyle/>
-          <a:p>
-            <a:pPr marL="0" indent="0" algn="l">
-              <a:buNone/>
-            </a:pPr>
-            <a:r>
-              <a:rPr lang="en-US" sz="1800" dirty="0">
-                <a:solidFill>
-                  <a:srgbClr val="5C7268"/>
-                </a:solidFill>
-                <a:latin typeface="Courier New" pitchFamily="34" charset="0"/>
-                <a:ea typeface="Courier New" pitchFamily="34" charset="-122"/>
-                <a:cs typeface="Courier New" pitchFamily="34" charset="-120"/>
-              </a:rPr>
-              <a:t>Model family ladder · 5-fold accuracy</a:t>
-            </a:r>
-            <a:endParaRPr lang="en-US" sz="1800" dirty="0"/>
-          </a:p>
-        </p:txBody>
-      </p:sp>
-      <p:sp>
-        <p:nvSpPr>
-          <p:cNvPr id="44" name="Text 42"/>
-          <p:cNvSpPr/>
-          <p:nvPr/>
-        </p:nvSpPr>
-        <p:spPr>
-          <a:xfrm>
-            <a:off x="952500" y="6746379"/>
-            <a:ext cx="1173659" cy="295275"/>
-          </a:xfrm>
-          <a:prstGeom prst="rect">
-            <a:avLst/>
-          </a:prstGeom>
-          <a:noFill/>
-          <a:ln/>
-        </p:spPr>
-        <p:txBody>
-          <a:bodyPr wrap="square" lIns="25400" tIns="25400" rIns="25400" bIns="25400" rtlCol="0" anchor="t">
-            <a:normAutofit fontScale="92500" lnSpcReduction="10000"/>
-          </a:bodyPr>
-          <a:lstStyle/>
-          <a:p>
-            <a:pPr marL="0" indent="0" algn="l">
-              <a:buNone/>
-            </a:pPr>
-            <a:r>
-              <a:rPr lang="en-US" sz="1800" dirty="0">
-                <a:solidFill>
-                  <a:srgbClr val="5C7268"/>
-                </a:solidFill>
-                <a:latin typeface="Courier New" pitchFamily="34" charset="0"/>
-                <a:ea typeface="Courier New" pitchFamily="34" charset="-122"/>
-                <a:cs typeface="Courier New" pitchFamily="34" charset="-120"/>
-              </a:rPr>
-              <a:t>NB 0.760</a:t>
-            </a:r>
-            <a:endParaRPr lang="en-US" sz="1800" dirty="0"/>
-          </a:p>
-        </p:txBody>
-      </p:sp>
-      <p:sp>
-        <p:nvSpPr>
-          <p:cNvPr id="45" name="Text 43"/>
-          <p:cNvSpPr/>
-          <p:nvPr/>
-        </p:nvSpPr>
-        <p:spPr>
-          <a:xfrm>
-            <a:off x="2145209" y="6746379"/>
-            <a:ext cx="213420" cy="295275"/>
-          </a:xfrm>
-          <a:prstGeom prst="rect">
-            <a:avLst/>
-          </a:prstGeom>
-          <a:noFill/>
-          <a:ln/>
-        </p:spPr>
-        <p:txBody>
-          <a:bodyPr wrap="square" lIns="25400" tIns="25400" rIns="25400" bIns="25400" rtlCol="0" anchor="t">
-            <a:normAutofit fontScale="92500" lnSpcReduction="10000"/>
-          </a:bodyPr>
-          <a:lstStyle/>
-          <a:p>
-            <a:pPr marL="0" indent="0" algn="l">
-              <a:buNone/>
-            </a:pPr>
-            <a:r>
-              <a:rPr lang="en-US" sz="1800" dirty="0">
-                <a:solidFill>
-                  <a:srgbClr val="66B3A1"/>
-                </a:solidFill>
-                <a:latin typeface="Courier New" pitchFamily="34" charset="0"/>
-                <a:ea typeface="Courier New" pitchFamily="34" charset="-122"/>
-                <a:cs typeface="Courier New" pitchFamily="34" charset="-120"/>
-              </a:rPr>
-              <a:t>→</a:t>
-            </a:r>
-            <a:endParaRPr lang="en-US" sz="1800" dirty="0"/>
-          </a:p>
-        </p:txBody>
-      </p:sp>
-      <p:sp>
-        <p:nvSpPr>
-          <p:cNvPr id="46" name="Text 44"/>
-          <p:cNvSpPr/>
-          <p:nvPr/>
-        </p:nvSpPr>
-        <p:spPr>
-          <a:xfrm>
-            <a:off x="2377678" y="6746379"/>
-            <a:ext cx="1358146" cy="295275"/>
-          </a:xfrm>
-          <a:prstGeom prst="rect">
-            <a:avLst/>
-          </a:prstGeom>
-          <a:noFill/>
-          <a:ln/>
-        </p:spPr>
-        <p:txBody>
-          <a:bodyPr wrap="square" lIns="25400" tIns="25400" rIns="25400" bIns="25400" rtlCol="0" anchor="t">
-            <a:normAutofit fontScale="92500" lnSpcReduction="10000"/>
-          </a:bodyPr>
-          <a:lstStyle/>
-          <a:p>
-            <a:pPr marL="0" indent="0" algn="l">
-              <a:buNone/>
-            </a:pPr>
-            <a:r>
-              <a:rPr lang="en-US" sz="1800" dirty="0">
-                <a:solidFill>
-                  <a:srgbClr val="5C7268"/>
-                </a:solidFill>
-                <a:latin typeface="Courier New" pitchFamily="34" charset="0"/>
-                <a:ea typeface="Courier New" pitchFamily="34" charset="-122"/>
-                <a:cs typeface="Courier New" pitchFamily="34" charset="-120"/>
-              </a:rPr>
-              <a:t>LDA 0.777</a:t>
-            </a:r>
-            <a:endParaRPr lang="en-US" sz="1800" dirty="0"/>
-          </a:p>
-        </p:txBody>
-      </p:sp>
-      <p:sp>
-        <p:nvSpPr>
-          <p:cNvPr id="47" name="Text 45"/>
-          <p:cNvSpPr/>
-          <p:nvPr/>
-        </p:nvSpPr>
-        <p:spPr>
-          <a:xfrm>
-            <a:off x="3707606" y="6746379"/>
-            <a:ext cx="213420" cy="295275"/>
-          </a:xfrm>
-          <a:prstGeom prst="rect">
-            <a:avLst/>
-          </a:prstGeom>
-          <a:noFill/>
-          <a:ln/>
-        </p:spPr>
-        <p:txBody>
-          <a:bodyPr wrap="square" lIns="25400" tIns="25400" rIns="25400" bIns="25400" rtlCol="0" anchor="t">
-            <a:normAutofit fontScale="92500" lnSpcReduction="10000"/>
-          </a:bodyPr>
-          <a:lstStyle/>
-          <a:p>
-            <a:pPr marL="0" indent="0" algn="l">
-              <a:buNone/>
-            </a:pPr>
-            <a:r>
-              <a:rPr lang="en-US" sz="1800" dirty="0">
-                <a:solidFill>
-                  <a:srgbClr val="66B3A1"/>
-                </a:solidFill>
-                <a:latin typeface="Courier New" pitchFamily="34" charset="0"/>
-                <a:ea typeface="Courier New" pitchFamily="34" charset="-122"/>
-                <a:cs typeface="Courier New" pitchFamily="34" charset="-120"/>
-              </a:rPr>
-              <a:t>→</a:t>
-            </a:r>
-            <a:endParaRPr lang="en-US" sz="1800" dirty="0"/>
-          </a:p>
-        </p:txBody>
-      </p:sp>
-      <p:sp>
-        <p:nvSpPr>
-          <p:cNvPr id="48" name="Text 46"/>
-          <p:cNvSpPr/>
-          <p:nvPr/>
-        </p:nvSpPr>
-        <p:spPr>
-          <a:xfrm>
-            <a:off x="3940076" y="6746379"/>
-            <a:ext cx="1173659" cy="295275"/>
-          </a:xfrm>
-          <a:prstGeom prst="rect">
-            <a:avLst/>
-          </a:prstGeom>
-          <a:noFill/>
-          <a:ln/>
-        </p:spPr>
-        <p:txBody>
-          <a:bodyPr wrap="square" lIns="25400" tIns="25400" rIns="25400" bIns="25400" rtlCol="0" anchor="t">
-            <a:normAutofit fontScale="92500" lnSpcReduction="10000"/>
-          </a:bodyPr>
-          <a:lstStyle/>
-          <a:p>
-            <a:pPr marL="0" indent="0" algn="l">
-              <a:buNone/>
-            </a:pPr>
-            <a:r>
-              <a:rPr lang="en-US" sz="1800" dirty="0">
-                <a:solidFill>
-                  <a:srgbClr val="5C7268"/>
-                </a:solidFill>
-                <a:latin typeface="Courier New" pitchFamily="34" charset="0"/>
-                <a:ea typeface="Courier New" pitchFamily="34" charset="-122"/>
-                <a:cs typeface="Courier New" pitchFamily="34" charset="-120"/>
-              </a:rPr>
-              <a:t>LR 0.784</a:t>
-            </a:r>
-            <a:endParaRPr lang="en-US" sz="1800" dirty="0"/>
-          </a:p>
-        </p:txBody>
-      </p:sp>
-      <p:sp>
-        <p:nvSpPr>
-          <p:cNvPr id="49" name="Text 47"/>
-          <p:cNvSpPr/>
-          <p:nvPr/>
-        </p:nvSpPr>
-        <p:spPr>
-          <a:xfrm>
-            <a:off x="5132784" y="6746379"/>
-            <a:ext cx="213420" cy="295275"/>
-          </a:xfrm>
-          <a:prstGeom prst="rect">
-            <a:avLst/>
-          </a:prstGeom>
-          <a:noFill/>
-          <a:ln/>
-        </p:spPr>
-        <p:txBody>
-          <a:bodyPr wrap="square" lIns="25400" tIns="25400" rIns="25400" bIns="25400" rtlCol="0" anchor="t">
-            <a:normAutofit fontScale="92500" lnSpcReduction="10000"/>
-          </a:bodyPr>
-          <a:lstStyle/>
-          <a:p>
-            <a:pPr marL="0" indent="0" algn="l">
-              <a:buNone/>
-            </a:pPr>
-            <a:r>
-              <a:rPr lang="en-US" sz="1800" dirty="0">
-                <a:solidFill>
-                  <a:srgbClr val="66B3A1"/>
-                </a:solidFill>
-                <a:latin typeface="Courier New" pitchFamily="34" charset="0"/>
-                <a:ea typeface="Courier New" pitchFamily="34" charset="-122"/>
-                <a:cs typeface="Courier New" pitchFamily="34" charset="-120"/>
-              </a:rPr>
-              <a:t>→</a:t>
-            </a:r>
-            <a:endParaRPr lang="en-US" sz="1800" dirty="0"/>
-          </a:p>
-        </p:txBody>
-      </p:sp>
-      <p:sp>
-        <p:nvSpPr>
-          <p:cNvPr id="50" name="Text 48"/>
-          <p:cNvSpPr/>
-          <p:nvPr/>
-        </p:nvSpPr>
-        <p:spPr>
-          <a:xfrm>
-            <a:off x="5365254" y="6746379"/>
-            <a:ext cx="1173659" cy="295275"/>
-          </a:xfrm>
-          <a:prstGeom prst="rect">
-            <a:avLst/>
-          </a:prstGeom>
-          <a:noFill/>
-          <a:ln/>
-        </p:spPr>
-        <p:txBody>
-          <a:bodyPr wrap="square" lIns="25400" tIns="25400" rIns="25400" bIns="25400" rtlCol="0" anchor="t">
-            <a:normAutofit fontScale="92500" lnSpcReduction="10000"/>
-          </a:bodyPr>
-          <a:lstStyle/>
-          <a:p>
-            <a:pPr marL="0" indent="0" algn="l">
-              <a:buNone/>
-            </a:pPr>
-            <a:r>
-              <a:rPr lang="en-US" sz="1800" dirty="0">
-                <a:solidFill>
-                  <a:srgbClr val="244236"/>
-                </a:solidFill>
-                <a:latin typeface="Courier New" pitchFamily="34" charset="0"/>
-                <a:ea typeface="Courier New" pitchFamily="34" charset="-122"/>
-                <a:cs typeface="Courier New" pitchFamily="34" charset="-120"/>
-              </a:rPr>
-              <a:t>RF 0.833</a:t>
-            </a:r>
-            <a:endParaRPr lang="en-US" sz="1800" dirty="0"/>
-          </a:p>
-        </p:txBody>
-      </p:sp>
-      <p:sp>
-        <p:nvSpPr>
-          <p:cNvPr id="51" name="Text 49"/>
-          <p:cNvSpPr/>
-          <p:nvPr/>
-        </p:nvSpPr>
-        <p:spPr>
-          <a:xfrm>
-            <a:off x="6557963" y="6746379"/>
-            <a:ext cx="213420" cy="295275"/>
-          </a:xfrm>
-          <a:prstGeom prst="rect">
-            <a:avLst/>
-          </a:prstGeom>
-          <a:noFill/>
-          <a:ln/>
-        </p:spPr>
-        <p:txBody>
-          <a:bodyPr wrap="square" lIns="25400" tIns="25400" rIns="25400" bIns="25400" rtlCol="0" anchor="t">
-            <a:normAutofit fontScale="92500" lnSpcReduction="10000"/>
-          </a:bodyPr>
-          <a:lstStyle/>
-          <a:p>
-            <a:pPr marL="0" indent="0" algn="l">
-              <a:buNone/>
-            </a:pPr>
-            <a:r>
-              <a:rPr lang="en-US" sz="1800" dirty="0">
-                <a:solidFill>
-                  <a:srgbClr val="66B3A1"/>
-                </a:solidFill>
-                <a:latin typeface="Courier New" pitchFamily="34" charset="0"/>
-                <a:ea typeface="Courier New" pitchFamily="34" charset="-122"/>
-                <a:cs typeface="Courier New" pitchFamily="34" charset="-120"/>
-              </a:rPr>
-              <a:t>→</a:t>
-            </a:r>
-            <a:endParaRPr lang="en-US" sz="1800" dirty="0"/>
-          </a:p>
-        </p:txBody>
-      </p:sp>
-      <p:sp>
-        <p:nvSpPr>
-          <p:cNvPr id="52" name="Text 50"/>
-          <p:cNvSpPr/>
-          <p:nvPr/>
-        </p:nvSpPr>
-        <p:spPr>
-          <a:xfrm>
-            <a:off x="6790432" y="6727329"/>
-            <a:ext cx="2112280" cy="333375"/>
-          </a:xfrm>
-          <a:prstGeom prst="rect">
-            <a:avLst/>
-          </a:prstGeom>
-          <a:noFill/>
-          <a:ln/>
-        </p:spPr>
-        <p:txBody>
-          <a:bodyPr wrap="square" lIns="25400" tIns="25400" rIns="25400" bIns="25400" rtlCol="0" anchor="t">
-            <a:normAutofit/>
-          </a:bodyPr>
-          <a:lstStyle/>
-          <a:p>
-            <a:pPr marL="0" indent="0" algn="l">
-              <a:buNone/>
-            </a:pPr>
-            <a:r>
-              <a:rPr lang="en-US" sz="1800" b="1" dirty="0">
-                <a:solidFill>
-                  <a:srgbClr val="063D22"/>
-                </a:solidFill>
-                <a:latin typeface="Courier New" pitchFamily="34" charset="0"/>
-                <a:ea typeface="Courier New" pitchFamily="34" charset="-122"/>
-                <a:cs typeface="Courier New" pitchFamily="34" charset="-120"/>
-              </a:rPr>
-              <a:t>LightGBM 0.836</a:t>
-            </a:r>
-            <a:endParaRPr lang="en-US" sz="1800" dirty="0"/>
-          </a:p>
-        </p:txBody>
-      </p:sp>
-      <p:sp>
-        <p:nvSpPr>
-          <p:cNvPr id="53" name="Text 51"/>
-          <p:cNvSpPr/>
-          <p:nvPr/>
-        </p:nvSpPr>
-        <p:spPr>
-          <a:xfrm>
-            <a:off x="8805937" y="6746379"/>
-            <a:ext cx="213420" cy="295275"/>
-          </a:xfrm>
-          <a:prstGeom prst="rect">
-            <a:avLst/>
-          </a:prstGeom>
-          <a:noFill/>
-          <a:ln/>
-        </p:spPr>
-        <p:txBody>
-          <a:bodyPr wrap="square" lIns="25400" tIns="25400" rIns="25400" bIns="25400" rtlCol="0" anchor="t">
-            <a:normAutofit fontScale="92500" lnSpcReduction="10000"/>
-          </a:bodyPr>
-          <a:lstStyle/>
-          <a:p>
-            <a:pPr marL="0" indent="0" algn="l">
-              <a:buNone/>
-            </a:pPr>
-            <a:r>
-              <a:rPr lang="en-US" sz="1800" dirty="0">
-                <a:solidFill>
-                  <a:srgbClr val="66B3A1"/>
-                </a:solidFill>
-                <a:latin typeface="Courier New" pitchFamily="34" charset="0"/>
-                <a:ea typeface="Courier New" pitchFamily="34" charset="-122"/>
-                <a:cs typeface="Courier New" pitchFamily="34" charset="-120"/>
-              </a:rPr>
-              <a:t>→</a:t>
-            </a:r>
-            <a:endParaRPr lang="en-US" sz="1800" dirty="0"/>
-          </a:p>
-        </p:txBody>
-      </p:sp>
-      <p:sp>
-        <p:nvSpPr>
-          <p:cNvPr id="54" name="Text 52"/>
-          <p:cNvSpPr/>
-          <p:nvPr/>
-        </p:nvSpPr>
-        <p:spPr>
-          <a:xfrm>
-            <a:off x="9038406" y="6727329"/>
-            <a:ext cx="2112280" cy="333375"/>
-          </a:xfrm>
-          <a:prstGeom prst="rect">
-            <a:avLst/>
-          </a:prstGeom>
-          <a:noFill/>
-          <a:ln/>
-        </p:spPr>
-        <p:txBody>
-          <a:bodyPr wrap="square" lIns="25400" tIns="25400" rIns="25400" bIns="25400" rtlCol="0" anchor="t">
-            <a:normAutofit/>
-          </a:bodyPr>
-          <a:lstStyle/>
-          <a:p>
-            <a:pPr marL="0" indent="0" algn="l">
-              <a:buNone/>
-            </a:pPr>
-            <a:r>
-              <a:rPr lang="en-US" sz="1800" b="1" dirty="0">
-                <a:solidFill>
-                  <a:srgbClr val="1A7A57"/>
-                </a:solidFill>
-                <a:latin typeface="Courier New" pitchFamily="34" charset="0"/>
-                <a:ea typeface="Courier New" pitchFamily="34" charset="-122"/>
-                <a:cs typeface="Courier New" pitchFamily="34" charset="-120"/>
-              </a:rPr>
-              <a:t>ensemble 0.859</a:t>
-            </a:r>
-            <a:endParaRPr lang="en-US" sz="1800" dirty="0"/>
-          </a:p>
-        </p:txBody>
-      </p:sp>
-      <p:sp>
-        <p:nvSpPr>
-          <p:cNvPr id="55" name="Text 53"/>
-          <p:cNvSpPr/>
-          <p:nvPr/>
-        </p:nvSpPr>
-        <p:spPr>
-          <a:xfrm>
-            <a:off x="952500" y="7232154"/>
-            <a:ext cx="10346892" cy="678061"/>
-          </a:xfrm>
-          <a:prstGeom prst="rect">
-            <a:avLst/>
-          </a:prstGeom>
-          <a:noFill/>
-          <a:ln/>
-        </p:spPr>
-        <p:txBody>
-          <a:bodyPr wrap="square" lIns="25400" tIns="25400" rIns="25400" bIns="25400" rtlCol="0" anchor="t">
-            <a:normAutofit fontScale="92500" lnSpcReduction="20000"/>
-          </a:bodyPr>
-          <a:lstStyle/>
-          <a:p>
-            <a:pPr marL="0" indent="0" algn="l">
-              <a:lnSpc>
-                <a:spcPct val="140000"/>
-              </a:lnSpc>
-              <a:buNone/>
-            </a:pPr>
-            <a:r>
-              <a:rPr lang="en-US" sz="1800" dirty="0">
-                <a:solidFill>
-                  <a:srgbClr val="5C7268"/>
-                </a:solidFill>
-                <a:latin typeface="Arial" pitchFamily="34" charset="0"/>
-                <a:ea typeface="Arial" pitchFamily="34" charset="-122"/>
-                <a:cs typeface="Arial" pitchFamily="34" charset="-120"/>
-              </a:rPr>
-              <a:t>v10 adds leak-free z-scoring and a conservative smooth threshold (ROC AUC 0.9377). Its OOF dips slightly below v6/v7 </a:t>
-            </a:r>
-            <a:r>
-              <a:rPr lang="en-US" sz="1800" b="1" dirty="0">
-                <a:solidFill>
-                  <a:srgbClr val="244236"/>
-                </a:solidFill>
-                <a:latin typeface="Arial" pitchFamily="34" charset="0"/>
-                <a:ea typeface="Arial" pitchFamily="34" charset="-122"/>
-                <a:cs typeface="Arial" pitchFamily="34" charset="-120"/>
-              </a:rPr>
-              <a:t>by design </a:t>
-            </a:r>
-            <a:r>
-              <a:rPr lang="en-US" sz="1800" dirty="0">
-                <a:solidFill>
-                  <a:srgbClr val="5C7268"/>
-                </a:solidFill>
-                <a:latin typeface="Arial" pitchFamily="34" charset="0"/>
-                <a:ea typeface="Arial" pitchFamily="34" charset="-122"/>
-                <a:cs typeface="Arial" pitchFamily="34" charset="-120"/>
-              </a:rPr>
-              <a:t>— not because the model is worse.</a:t>
-            </a:r>
-            <a:endParaRPr lang="en-US" sz="1800" dirty="0"/>
-          </a:p>
-        </p:txBody>
-      </p:sp>
-      <p:sp>
-        <p:nvSpPr>
           <p:cNvPr id="56" name="Text 54"/>
           <p:cNvSpPr/>
           <p:nvPr/>
@@ -3993,72 +3434,6 @@
                 <a:cs typeface="Arial" pitchFamily="34" charset="-120"/>
               </a:rPr>
               <a:t>.</a:t>
-            </a:r>
-            <a:endParaRPr lang="en-US" sz="2025" dirty="0"/>
-          </a:p>
-        </p:txBody>
-      </p:sp>
-      <p:sp>
-        <p:nvSpPr>
-          <p:cNvPr id="59" name="Text 57"/>
-          <p:cNvSpPr/>
-          <p:nvPr/>
-        </p:nvSpPr>
-        <p:spPr>
-          <a:xfrm>
-            <a:off x="11531426" y="7020669"/>
-            <a:ext cx="5978196" cy="814388"/>
-          </a:xfrm>
-          <a:prstGeom prst="rect">
-            <a:avLst/>
-          </a:prstGeom>
-          <a:noFill/>
-          <a:ln/>
-        </p:spPr>
-        <p:txBody>
-          <a:bodyPr wrap="square" lIns="25400" tIns="25400" rIns="25400" bIns="25400" rtlCol="0" anchor="t">
-            <a:normAutofit fontScale="92500" lnSpcReduction="20000"/>
-          </a:bodyPr>
-          <a:lstStyle/>
-          <a:p>
-            <a:pPr marL="0" indent="0" algn="l">
-              <a:lnSpc>
-                <a:spcPct val="150000"/>
-              </a:lnSpc>
-              <a:buNone/>
-            </a:pPr>
-            <a:r>
-              <a:rPr lang="en-US" sz="2025" dirty="0">
-                <a:solidFill>
-                  <a:srgbClr val="5C7268"/>
-                </a:solidFill>
-                <a:latin typeface="Arial" pitchFamily="34" charset="0"/>
-                <a:ea typeface="Arial" pitchFamily="34" charset="-122"/>
-                <a:cs typeface="Arial" pitchFamily="34" charset="-120"/>
-              </a:rPr>
-              <a:t>Adversarial validation confirms the CV→LB gap is </a:t>
-            </a:r>
-            <a:r>
-              <a:rPr lang="en-US" sz="2025" b="1" dirty="0">
-                <a:solidFill>
-                  <a:srgbClr val="244236"/>
-                </a:solidFill>
-                <a:latin typeface="Arial" pitchFamily="34" charset="0"/>
-                <a:ea typeface="Arial" pitchFamily="34" charset="-122"/>
-                <a:cs typeface="Arial" pitchFamily="34" charset="-120"/>
-              </a:rPr>
-              <a:t>distribution shift over time</a:t>
-            </a:r>
-            <a:r>
-              <a:rPr lang="en-US" sz="2025" dirty="0">
-                <a:solidFill>
-                  <a:srgbClr val="5C7268"/>
-                </a:solidFill>
-                <a:latin typeface="Arial" pitchFamily="34" charset="0"/>
-                <a:ea typeface="Arial" pitchFamily="34" charset="-122"/>
-                <a:cs typeface="Arial" pitchFamily="34" charset="-120"/>
-              </a:rPr>
-              <a:t>, not overfitting.</a:t>
             </a:r>
             <a:endParaRPr lang="en-US" sz="2025" dirty="0"/>
           </a:p>
@@ -5077,7 +4452,7 @@
                 <a:ea typeface="Courier New" pitchFamily="34" charset="-122"/>
                 <a:cs typeface="Courier New" pitchFamily="34" charset="-120"/>
               </a:rPr>
-              <a:t>12 · KEY CODE</a:t>
+              <a:t>11 · KEY CODE</a:t>
             </a:r>
             <a:endParaRPr lang="en-US" sz="1800" dirty="0"/>
           </a:p>
@@ -5782,7 +5157,7 @@
                 <a:ea typeface="Courier New" pitchFamily="34" charset="-122"/>
                 <a:cs typeface="Courier New" pitchFamily="34" charset="-120"/>
               </a:rPr>
-              <a:t>13 · QUESTIONS</a:t>
+              <a:t>12 · QUESTIONS</a:t>
             </a:r>
             <a:endParaRPr lang="en-US" sz="1800" dirty="0"/>
           </a:p>

--- a/presentation/Consulting_Finance_ML_Slides.pptx
+++ b/presentation/Consulting_Finance_ML_Slides.pptx
@@ -5,7 +5,7 @@
     <p:sldMasterId id="2147483648" r:id="rId1"/>
   </p:sldMasterIdLst>
   <p:notesMasterIdLst>
-    <p:notesMasterId r:id="rId15"/>
+    <p:notesMasterId r:id="rId14"/>
   </p:notesMasterIdLst>
   <p:sldIdLst>
     <p:sldId id="256" r:id="rId2"/>
@@ -18,8 +18,8 @@
     <p:sldId id="263" r:id="rId9"/>
     <p:sldId id="269" r:id="rId10"/>
     <p:sldId id="264" r:id="rId11"/>
-    <p:sldId id="268" r:id="rId13"/>
-    <p:sldId id="267" r:id="rId14"/>
+    <p:sldId id="268" r:id="rId12"/>
+    <p:sldId id="267" r:id="rId13"/>
   </p:sldIdLst>
   <p:sldSz cx="18288000" cy="10287000"/>
   <p:notesSz cx="10287000" cy="18288000"/>
@@ -381,7 +381,7 @@
           <a:p>
             <a:r>
               <a:rPr lang="en-US" dirty="0"/>
-              <a:t>Separate what we did from what we'd do next. For a finance audience the strongest next step is deciding by cost rather than accuracy, plus calibrated probabilities: that reframes this from a Kaggle score to real lending economics.</a:t>
+              <a:t>The two questions most likely to come up: why we dropped race and religion (lead with the +0.7pt number), and how we knew the column was a leak (it tracked real signal in training but was random in test). Both make us look rigorous.</a:t>
             </a:r>
           </a:p>
         </p:txBody>
@@ -403,94 +403,7 @@
           <a:p>
             <a:fld id="{F7021451-1387-4CA6-816F-3879F97B5CBC}" type="slidenum">
               <a:rPr lang="en-US"/>
-              <a:t>11</a:t>
-            </a:fld>
-            <a:endParaRPr lang="en-US"/>
-          </a:p>
-        </p:txBody>
-      </p:sp>
-    </p:spTree>
-    <p:extLst>
-      <p:ext uri="{BB962C8B-B14F-4D97-AF65-F5344CB8AC3E}">
-        <p14:creationId xmlns:p14="http://schemas.microsoft.com/office/powerpoint/2010/main" val="1024086991"/>
-      </p:ext>
-    </p:extLst>
-  </p:cSld>
-  <p:clrMapOvr>
-    <a:masterClrMapping/>
-  </p:clrMapOvr>
-</p:notes>
-</file>
-
-<file path=ppt/notesSlides/notesSlide11.xml><?xml version="1.0" encoding="utf-8"?>
-<p:notes xmlns:a="http://schemas.openxmlformats.org/drawingml/2006/main" xmlns:r="http://schemas.openxmlformats.org/officeDocument/2006/relationships" xmlns:p="http://schemas.openxmlformats.org/presentationml/2006/main">
-  <p:cSld>
-    <p:spTree>
-      <p:nvGrpSpPr>
-        <p:cNvPr id="1" name=""/>
-        <p:cNvGrpSpPr/>
-        <p:nvPr/>
-      </p:nvGrpSpPr>
-      <p:grpSpPr>
-        <a:xfrm>
-          <a:off x="0" y="0"/>
-          <a:ext cx="0" cy="0"/>
-          <a:chOff x="0" y="0"/>
-          <a:chExt cx="0" cy="0"/>
-        </a:xfrm>
-      </p:grpSpPr>
-      <p:sp>
-        <p:nvSpPr>
-          <p:cNvPr id="2" name="Slide Image Placeholder 1"/>
-          <p:cNvSpPr>
-            <a:spLocks noGrp="1" noRot="1" noChangeAspect="1"/>
-          </p:cNvSpPr>
-          <p:nvPr>
-            <p:ph type="sldImg"/>
-          </p:nvPr>
-        </p:nvSpPr>
-        <p:spPr/>
-      </p:sp>
-      <p:sp>
-        <p:nvSpPr>
-          <p:cNvPr id="3" name="Notes Placeholder 2"/>
-          <p:cNvSpPr>
-            <a:spLocks noGrp="1"/>
-          </p:cNvSpPr>
-          <p:nvPr>
-            <p:ph type="body" idx="1"/>
-          </p:nvPr>
-        </p:nvSpPr>
-        <p:spPr/>
-        <p:txBody>
-          <a:bodyPr/>
-          <a:lstStyle/>
-          <a:p>
-            <a:r>
-              <a:rPr lang="en-US" dirty="0"/>
-              <a:t>The two questions most likely to come up: why we dropped race and religion (lead with the +0.7pt number), and how we knew the column was a leak (it tracked real signal in training but was random in test). Both make us look rigorous.</a:t>
-            </a:r>
-          </a:p>
-        </p:txBody>
-      </p:sp>
-      <p:sp>
-        <p:nvSpPr>
-          <p:cNvPr id="4" name="Slide Number Placeholder 3"/>
-          <p:cNvSpPr>
-            <a:spLocks noGrp="1"/>
-          </p:cNvSpPr>
-          <p:nvPr>
-            <p:ph type="sldNum" sz="quarter" idx="10"/>
-          </p:nvPr>
-        </p:nvSpPr>
-        <p:spPr/>
-        <p:txBody>
-          <a:bodyPr/>
-          <a:lstStyle/>
-          <a:p>
-            <a:fld id="{F7021451-1387-4CA6-816F-3879F97B5CBC}" type="slidenum">
-              <a:rPr lang="en-US"/>
-              <a:t>13</a:t>
+              <a:t>12</a:t>
             </a:fld>
             <a:endParaRPr lang="en-US"/>
           </a:p>
@@ -1976,7 +1889,7 @@
         </p:nvSpPr>
         <p:spPr>
           <a:xfrm>
-            <a:off x="952500" y="3717429"/>
+            <a:off x="822343" y="5067858"/>
             <a:ext cx="11050079" cy="295275"/>
           </a:xfrm>
           <a:prstGeom prst="rect">
@@ -2017,7 +1930,7 @@
         </p:nvSpPr>
         <p:spPr>
           <a:xfrm>
-            <a:off x="952500" y="4593729"/>
+            <a:off x="822343" y="6383290"/>
             <a:ext cx="704627" cy="19050"/>
           </a:xfrm>
           <a:prstGeom prst="rect">
@@ -2044,7 +1957,7 @@
         </p:nvSpPr>
         <p:spPr>
           <a:xfrm>
-            <a:off x="1066800" y="4222254"/>
+            <a:off x="936643" y="6011815"/>
             <a:ext cx="552227" cy="314325"/>
           </a:xfrm>
           <a:prstGeom prst="rect">
@@ -2085,7 +1998,7 @@
         </p:nvSpPr>
         <p:spPr>
           <a:xfrm>
-            <a:off x="1657127" y="4593729"/>
+            <a:off x="1526970" y="6383290"/>
             <a:ext cx="5770736" cy="19050"/>
           </a:xfrm>
           <a:prstGeom prst="rect">
@@ -2112,7 +2025,7 @@
         </p:nvSpPr>
         <p:spPr>
           <a:xfrm>
-            <a:off x="1771427" y="4222254"/>
+            <a:off x="1641270" y="6011815"/>
             <a:ext cx="5715258" cy="314325"/>
           </a:xfrm>
           <a:prstGeom prst="rect">
@@ -2153,7 +2066,7 @@
         </p:nvSpPr>
         <p:spPr>
           <a:xfrm>
-            <a:off x="7427863" y="4593729"/>
+            <a:off x="7297706" y="6383290"/>
             <a:ext cx="1164357" cy="19050"/>
           </a:xfrm>
           <a:prstGeom prst="rect">
@@ -2180,7 +2093,7 @@
         </p:nvSpPr>
         <p:spPr>
           <a:xfrm>
-            <a:off x="7465963" y="4222254"/>
+            <a:off x="7335806" y="6011815"/>
             <a:ext cx="1011957" cy="314325"/>
           </a:xfrm>
           <a:prstGeom prst="rect">
@@ -2221,7 +2134,7 @@
         </p:nvSpPr>
         <p:spPr>
           <a:xfrm>
-            <a:off x="8592220" y="4593729"/>
+            <a:off x="8462063" y="6383290"/>
             <a:ext cx="1394520" cy="19050"/>
           </a:xfrm>
           <a:prstGeom prst="rect">
@@ -2248,7 +2161,7 @@
         </p:nvSpPr>
         <p:spPr>
           <a:xfrm>
-            <a:off x="8630320" y="4222254"/>
+            <a:off x="8500163" y="6011815"/>
             <a:ext cx="1242120" cy="314325"/>
           </a:xfrm>
           <a:prstGeom prst="rect">
@@ -2289,7 +2202,7 @@
         </p:nvSpPr>
         <p:spPr>
           <a:xfrm>
-            <a:off x="9986739" y="4593729"/>
+            <a:off x="9856582" y="6383290"/>
             <a:ext cx="1011287" cy="19050"/>
           </a:xfrm>
           <a:prstGeom prst="rect">
@@ -2316,7 +2229,7 @@
         </p:nvSpPr>
         <p:spPr>
           <a:xfrm>
-            <a:off x="10024839" y="4222254"/>
+            <a:off x="9894682" y="6011815"/>
             <a:ext cx="858887" cy="314325"/>
           </a:xfrm>
           <a:prstGeom prst="rect">
@@ -2357,7 +2270,7 @@
         </p:nvSpPr>
         <p:spPr>
           <a:xfrm>
-            <a:off x="952500" y="5103316"/>
+            <a:off x="822343" y="6892877"/>
             <a:ext cx="704627" cy="9525"/>
           </a:xfrm>
           <a:prstGeom prst="rect">
@@ -2384,7 +2297,7 @@
         </p:nvSpPr>
         <p:spPr>
           <a:xfrm>
-            <a:off x="1066800" y="4717554"/>
+            <a:off x="936643" y="6507115"/>
             <a:ext cx="552227" cy="319088"/>
           </a:xfrm>
           <a:prstGeom prst="rect">
@@ -2425,7 +2338,7 @@
         </p:nvSpPr>
         <p:spPr>
           <a:xfrm>
-            <a:off x="1657127" y="5103316"/>
+            <a:off x="1526970" y="6892877"/>
             <a:ext cx="5770736" cy="9525"/>
           </a:xfrm>
           <a:prstGeom prst="rect">
@@ -2452,7 +2365,7 @@
         </p:nvSpPr>
         <p:spPr>
           <a:xfrm>
-            <a:off x="1771427" y="4717554"/>
+            <a:off x="1641270" y="6507115"/>
             <a:ext cx="5715258" cy="319088"/>
           </a:xfrm>
           <a:prstGeom prst="rect">
@@ -2493,7 +2406,7 @@
         </p:nvSpPr>
         <p:spPr>
           <a:xfrm>
-            <a:off x="7427863" y="5103316"/>
+            <a:off x="7297706" y="6892877"/>
             <a:ext cx="1164357" cy="9525"/>
           </a:xfrm>
           <a:prstGeom prst="rect">
@@ -2520,7 +2433,7 @@
         </p:nvSpPr>
         <p:spPr>
           <a:xfrm>
-            <a:off x="7465963" y="4717554"/>
+            <a:off x="7335806" y="6507115"/>
             <a:ext cx="1011957" cy="319088"/>
           </a:xfrm>
           <a:prstGeom prst="rect">
@@ -2561,7 +2474,7 @@
         </p:nvSpPr>
         <p:spPr>
           <a:xfrm>
-            <a:off x="8592220" y="5103316"/>
+            <a:off x="8462063" y="6892877"/>
             <a:ext cx="1394520" cy="9525"/>
           </a:xfrm>
           <a:prstGeom prst="rect">
@@ -2588,7 +2501,7 @@
         </p:nvSpPr>
         <p:spPr>
           <a:xfrm>
-            <a:off x="8630320" y="4717554"/>
+            <a:off x="8500163" y="6507115"/>
             <a:ext cx="1242120" cy="319088"/>
           </a:xfrm>
           <a:prstGeom prst="rect">
@@ -2629,7 +2542,7 @@
         </p:nvSpPr>
         <p:spPr>
           <a:xfrm>
-            <a:off x="9986739" y="5103316"/>
+            <a:off x="9856582" y="6892877"/>
             <a:ext cx="1011287" cy="9525"/>
           </a:xfrm>
           <a:prstGeom prst="rect">
@@ -2656,7 +2569,7 @@
         </p:nvSpPr>
         <p:spPr>
           <a:xfrm>
-            <a:off x="10024839" y="4717554"/>
+            <a:off x="9894682" y="6507115"/>
             <a:ext cx="858887" cy="319088"/>
           </a:xfrm>
           <a:prstGeom prst="rect">
@@ -2697,7 +2610,7 @@
         </p:nvSpPr>
         <p:spPr>
           <a:xfrm>
-            <a:off x="952500" y="5112841"/>
+            <a:off x="822343" y="6902402"/>
             <a:ext cx="10045526" cy="528638"/>
           </a:xfrm>
           <a:prstGeom prst="rect">
@@ -2724,7 +2637,7 @@
         </p:nvSpPr>
         <p:spPr>
           <a:xfrm>
-            <a:off x="952500" y="5631954"/>
+            <a:off x="822343" y="7421515"/>
             <a:ext cx="704627" cy="9525"/>
           </a:xfrm>
           <a:prstGeom prst="rect">
@@ -2751,7 +2664,7 @@
         </p:nvSpPr>
         <p:spPr>
           <a:xfrm>
-            <a:off x="1066800" y="5217616"/>
+            <a:off x="936643" y="7007177"/>
             <a:ext cx="552227" cy="347663"/>
           </a:xfrm>
           <a:prstGeom prst="rect">
@@ -2792,7 +2705,7 @@
         </p:nvSpPr>
         <p:spPr>
           <a:xfrm>
-            <a:off x="1657127" y="5631954"/>
+            <a:off x="1526970" y="7421515"/>
             <a:ext cx="5770736" cy="9525"/>
           </a:xfrm>
           <a:prstGeom prst="rect">
@@ -2819,7 +2732,7 @@
         </p:nvSpPr>
         <p:spPr>
           <a:xfrm>
-            <a:off x="1771427" y="5217616"/>
+            <a:off x="1641270" y="7007177"/>
             <a:ext cx="5715258" cy="347663"/>
           </a:xfrm>
           <a:prstGeom prst="rect">
@@ -2860,7 +2773,7 @@
         </p:nvSpPr>
         <p:spPr>
           <a:xfrm>
-            <a:off x="7427863" y="5631954"/>
+            <a:off x="7297706" y="7421515"/>
             <a:ext cx="1164357" cy="9525"/>
           </a:xfrm>
           <a:prstGeom prst="rect">
@@ -2887,7 +2800,7 @@
         </p:nvSpPr>
         <p:spPr>
           <a:xfrm>
-            <a:off x="7465963" y="5217616"/>
+            <a:off x="7335806" y="7007177"/>
             <a:ext cx="1011957" cy="347663"/>
           </a:xfrm>
           <a:prstGeom prst="rect">
@@ -2928,7 +2841,7 @@
         </p:nvSpPr>
         <p:spPr>
           <a:xfrm>
-            <a:off x="8592220" y="5631954"/>
+            <a:off x="8462063" y="7421515"/>
             <a:ext cx="1394520" cy="9525"/>
           </a:xfrm>
           <a:prstGeom prst="rect">
@@ -2955,7 +2868,7 @@
         </p:nvSpPr>
         <p:spPr>
           <a:xfrm>
-            <a:off x="8630320" y="5217616"/>
+            <a:off x="8500163" y="7007177"/>
             <a:ext cx="1242120" cy="347663"/>
           </a:xfrm>
           <a:prstGeom prst="rect">
@@ -2996,7 +2909,7 @@
         </p:nvSpPr>
         <p:spPr>
           <a:xfrm>
-            <a:off x="9986739" y="5631954"/>
+            <a:off x="9856582" y="7421515"/>
             <a:ext cx="1011287" cy="9525"/>
           </a:xfrm>
           <a:prstGeom prst="rect">
@@ -3023,7 +2936,7 @@
         </p:nvSpPr>
         <p:spPr>
           <a:xfrm>
-            <a:off x="10024839" y="5217616"/>
+            <a:off x="9894682" y="7007177"/>
             <a:ext cx="858887" cy="347663"/>
           </a:xfrm>
           <a:prstGeom prst="rect">
@@ -3064,7 +2977,7 @@
         </p:nvSpPr>
         <p:spPr>
           <a:xfrm>
-            <a:off x="952500" y="5641479"/>
+            <a:off x="822343" y="7431040"/>
             <a:ext cx="10045526" cy="523875"/>
           </a:xfrm>
           <a:prstGeom prst="rect">
@@ -3091,7 +3004,7 @@
         </p:nvSpPr>
         <p:spPr>
           <a:xfrm>
-            <a:off x="1066800" y="5746254"/>
+            <a:off x="936643" y="7535815"/>
             <a:ext cx="552227" cy="352425"/>
           </a:xfrm>
           <a:prstGeom prst="rect">
@@ -3132,7 +3045,7 @@
         </p:nvSpPr>
         <p:spPr>
           <a:xfrm>
-            <a:off x="1771427" y="5746254"/>
+            <a:off x="1641270" y="7535815"/>
             <a:ext cx="5715258" cy="352425"/>
           </a:xfrm>
           <a:prstGeom prst="rect">
@@ -3173,7 +3086,7 @@
         </p:nvSpPr>
         <p:spPr>
           <a:xfrm>
-            <a:off x="7465963" y="5746254"/>
+            <a:off x="7335806" y="7535815"/>
             <a:ext cx="1011957" cy="352425"/>
           </a:xfrm>
           <a:prstGeom prst="rect">
@@ -3214,7 +3127,7 @@
         </p:nvSpPr>
         <p:spPr>
           <a:xfrm>
-            <a:off x="8630320" y="5746254"/>
+            <a:off x="8500163" y="7535815"/>
             <a:ext cx="1242120" cy="352425"/>
           </a:xfrm>
           <a:prstGeom prst="rect">
@@ -3255,7 +3168,7 @@
         </p:nvSpPr>
         <p:spPr>
           <a:xfrm>
-            <a:off x="10024839" y="5746254"/>
+            <a:off x="9894682" y="7535815"/>
             <a:ext cx="858887" cy="352425"/>
           </a:xfrm>
           <a:prstGeom prst="rect">
@@ -3296,7 +3209,7 @@
         </p:nvSpPr>
         <p:spPr>
           <a:xfrm>
-            <a:off x="11531426" y="3792662"/>
+            <a:off x="11442509" y="5016365"/>
             <a:ext cx="6384481" cy="870570"/>
           </a:xfrm>
           <a:prstGeom prst="rect">
@@ -3340,7 +3253,7 @@
         </p:nvSpPr>
         <p:spPr>
           <a:xfrm>
-            <a:off x="11531426" y="4720382"/>
+            <a:off x="11442509" y="6227666"/>
             <a:ext cx="5978196" cy="733425"/>
           </a:xfrm>
           <a:prstGeom prst="rect">
@@ -3381,7 +3294,7 @@
         </p:nvSpPr>
         <p:spPr>
           <a:xfrm>
-            <a:off x="11531426" y="5682407"/>
+            <a:off x="11442509" y="7189691"/>
             <a:ext cx="5978196" cy="1204913"/>
           </a:xfrm>
           <a:prstGeom prst="rect">
@@ -3523,7 +3436,7 @@
         </p:blipFill>
         <p:spPr>
           <a:xfrm>
-            <a:off x="1188720" y="2103120"/>
+            <a:off x="822343" y="2694776"/>
             <a:ext cx="15361920" cy="1632204"/>
           </a:xfrm>
           <a:prstGeom prst="rect">
@@ -3540,839 +3453,6 @@
 </file>
 
 <file path=ppt/slides/slide11.xml><?xml version="1.0" encoding="utf-8"?>
-<p:sld xmlns:a="http://schemas.openxmlformats.org/drawingml/2006/main" xmlns:r="http://schemas.openxmlformats.org/officeDocument/2006/relationships" xmlns:p="http://schemas.openxmlformats.org/presentationml/2006/main">
-  <p:cSld name="Slide 11">
-    <p:bg>
-      <p:bgPr>
-        <a:solidFill>
-          <a:srgbClr val="FFFFFF"/>
-        </a:solidFill>
-        <a:effectLst/>
-      </p:bgPr>
-    </p:bg>
-    <p:spTree>
-      <p:nvGrpSpPr>
-        <p:cNvPr id="1" name=""/>
-        <p:cNvGrpSpPr/>
-        <p:nvPr/>
-      </p:nvGrpSpPr>
-      <p:grpSpPr>
-        <a:xfrm>
-          <a:off x="0" y="0"/>
-          <a:ext cx="0" cy="0"/>
-          <a:chOff x="0" y="0"/>
-          <a:chExt cx="0" cy="0"/>
-        </a:xfrm>
-      </p:grpSpPr>
-      <p:sp>
-        <p:nvSpPr>
-          <p:cNvPr id="2" name="Shape 0"/>
-          <p:cNvSpPr/>
-          <p:nvPr/>
-        </p:nvSpPr>
-        <p:spPr>
-          <a:xfrm>
-            <a:off x="952500" y="1912218"/>
-            <a:ext cx="16383000" cy="19050"/>
-          </a:xfrm>
-          <a:prstGeom prst="rect">
-            <a:avLst/>
-          </a:prstGeom>
-          <a:solidFill>
-            <a:srgbClr val="1A7A57"/>
-          </a:solidFill>
-          <a:ln/>
-        </p:spPr>
-        <p:txBody>
-          <a:bodyPr/>
-          <a:lstStyle/>
-          <a:p>
-            <a:endParaRPr lang="en-GB"/>
-          </a:p>
-        </p:txBody>
-      </p:sp>
-      <p:sp>
-        <p:nvSpPr>
-          <p:cNvPr id="3" name="Text 1"/>
-          <p:cNvSpPr/>
-          <p:nvPr/>
-        </p:nvSpPr>
-        <p:spPr>
-          <a:xfrm>
-            <a:off x="952500" y="742950"/>
-            <a:ext cx="18021300" cy="295275"/>
-          </a:xfrm>
-          <a:prstGeom prst="rect">
-            <a:avLst/>
-          </a:prstGeom>
-          <a:noFill/>
-          <a:ln/>
-        </p:spPr>
-        <p:txBody>
-          <a:bodyPr wrap="square" lIns="25400" tIns="25400" rIns="25400" bIns="25400" rtlCol="0" anchor="t">
-            <a:normAutofit fontScale="92500" lnSpcReduction="10000"/>
-          </a:bodyPr>
-          <a:lstStyle/>
-          <a:p>
-            <a:pPr marL="0" indent="0" algn="l">
-              <a:buNone/>
-            </a:pPr>
-            <a:r>
-              <a:rPr lang="en-US" sz="1800" kern="0" spc="225" dirty="0">
-                <a:solidFill>
-                  <a:srgbClr val="007A33"/>
-                </a:solidFill>
-                <a:latin typeface="Courier New" pitchFamily="34" charset="0"/>
-                <a:ea typeface="Courier New" pitchFamily="34" charset="-122"/>
-                <a:cs typeface="Courier New" pitchFamily="34" charset="-120"/>
-              </a:rPr>
-              <a:t>11 · WHAT COMES NEXT</a:t>
-            </a:r>
-            <a:endParaRPr lang="en-US" sz="1800" dirty="0"/>
-          </a:p>
-        </p:txBody>
-      </p:sp>
-      <p:sp>
-        <p:nvSpPr>
-          <p:cNvPr id="4" name="Text 2"/>
-          <p:cNvSpPr/>
-          <p:nvPr/>
-        </p:nvSpPr>
-        <p:spPr>
-          <a:xfrm>
-            <a:off x="952500" y="1152525"/>
-            <a:ext cx="18021300" cy="550143"/>
-          </a:xfrm>
-          <a:prstGeom prst="rect">
-            <a:avLst/>
-          </a:prstGeom>
-          <a:noFill/>
-          <a:ln/>
-        </p:spPr>
-        <p:txBody>
-          <a:bodyPr wrap="square" lIns="25400" tIns="25400" rIns="25400" bIns="25400" rtlCol="0" anchor="t">
-            <a:normAutofit fontScale="92500" lnSpcReduction="10000"/>
-          </a:bodyPr>
-          <a:lstStyle/>
-          <a:p>
-            <a:pPr marL="0" indent="0" algn="l">
-              <a:lnSpc>
-                <a:spcPct val="112000"/>
-              </a:lnSpc>
-              <a:buNone/>
-            </a:pPr>
-            <a:r>
-              <a:rPr lang="en-US" sz="3600" b="1" kern="0" spc="-37" dirty="0">
-                <a:solidFill>
-                  <a:srgbClr val="063D22"/>
-                </a:solidFill>
-                <a:latin typeface="Arial" pitchFamily="34" charset="0"/>
-                <a:ea typeface="Arial" pitchFamily="34" charset="-122"/>
-                <a:cs typeface="Arial" pitchFamily="34" charset="-120"/>
-              </a:rPr>
-              <a:t>Four steps would make this ready for a real bank</a:t>
-            </a:r>
-            <a:endParaRPr lang="en-US" sz="3600" dirty="0"/>
-          </a:p>
-        </p:txBody>
-      </p:sp>
-      <p:sp>
-        <p:nvSpPr>
-          <p:cNvPr id="5" name="Shape 3"/>
-          <p:cNvSpPr/>
-          <p:nvPr/>
-        </p:nvSpPr>
-        <p:spPr>
-          <a:xfrm>
-            <a:off x="952500" y="2388468"/>
-            <a:ext cx="8058150" cy="3292004"/>
-          </a:xfrm>
-          <a:prstGeom prst="roundRect">
-            <a:avLst>
-              <a:gd name="adj" fmla="val 3472"/>
-            </a:avLst>
-          </a:prstGeom>
-          <a:solidFill>
-            <a:srgbClr val="E6F5EF"/>
-          </a:solidFill>
-          <a:ln/>
-        </p:spPr>
-        <p:txBody>
-          <a:bodyPr/>
-          <a:lstStyle/>
-          <a:p>
-            <a:endParaRPr lang="en-GB"/>
-          </a:p>
-        </p:txBody>
-      </p:sp>
-      <p:sp>
-        <p:nvSpPr>
-          <p:cNvPr id="6" name="Text 4"/>
-          <p:cNvSpPr/>
-          <p:nvPr/>
-        </p:nvSpPr>
-        <p:spPr>
-          <a:xfrm>
-            <a:off x="1314450" y="2712318"/>
-            <a:ext cx="8067675" cy="295275"/>
-          </a:xfrm>
-          <a:prstGeom prst="rect">
-            <a:avLst/>
-          </a:prstGeom>
-          <a:noFill/>
-          <a:ln/>
-        </p:spPr>
-        <p:txBody>
-          <a:bodyPr wrap="square" lIns="25400" tIns="25400" rIns="25400" bIns="25400" rtlCol="0" anchor="t">
-            <a:normAutofit fontScale="92500" lnSpcReduction="10000"/>
-          </a:bodyPr>
-          <a:lstStyle/>
-          <a:p>
-            <a:pPr marL="0" indent="0" algn="l">
-              <a:buNone/>
-            </a:pPr>
-            <a:r>
-              <a:rPr lang="en-US" sz="1800" dirty="0">
-                <a:solidFill>
-                  <a:srgbClr val="007A33"/>
-                </a:solidFill>
-                <a:latin typeface="Courier New" pitchFamily="34" charset="0"/>
-                <a:ea typeface="Courier New" pitchFamily="34" charset="-122"/>
-                <a:cs typeface="Courier New" pitchFamily="34" charset="-120"/>
-              </a:rPr>
-              <a:t>01</a:t>
-            </a:r>
-            <a:endParaRPr lang="en-US" sz="1800" dirty="0"/>
-          </a:p>
-        </p:txBody>
-      </p:sp>
-      <p:sp>
-        <p:nvSpPr>
-          <p:cNvPr id="7" name="Text 5"/>
-          <p:cNvSpPr/>
-          <p:nvPr/>
-        </p:nvSpPr>
-        <p:spPr>
-          <a:xfrm>
-            <a:off x="1314450" y="3102843"/>
-            <a:ext cx="8067675" cy="409575"/>
-          </a:xfrm>
-          <a:prstGeom prst="rect">
-            <a:avLst/>
-          </a:prstGeom>
-          <a:noFill/>
-          <a:ln/>
-        </p:spPr>
-        <p:txBody>
-          <a:bodyPr wrap="square" lIns="25400" tIns="25400" rIns="25400" bIns="25400" rtlCol="0" anchor="t">
-            <a:normAutofit lnSpcReduction="10000"/>
-          </a:bodyPr>
-          <a:lstStyle/>
-          <a:p>
-            <a:pPr marL="0" indent="0" algn="l">
-              <a:buNone/>
-            </a:pPr>
-            <a:r>
-              <a:rPr lang="en-US" sz="2400" b="1" dirty="0">
-                <a:solidFill>
-                  <a:srgbClr val="063D22"/>
-                </a:solidFill>
-                <a:latin typeface="Arial" pitchFamily="34" charset="0"/>
-                <a:ea typeface="Arial" pitchFamily="34" charset="-122"/>
-                <a:cs typeface="Arial" pitchFamily="34" charset="-120"/>
-              </a:rPr>
-              <a:t>Optimize for cost, not accuracy</a:t>
-            </a:r>
-            <a:endParaRPr lang="en-US" sz="2400" dirty="0"/>
-          </a:p>
-        </p:txBody>
-      </p:sp>
-      <p:sp>
-        <p:nvSpPr>
-          <p:cNvPr id="8" name="Text 6"/>
-          <p:cNvSpPr/>
-          <p:nvPr/>
-        </p:nvSpPr>
-        <p:spPr>
-          <a:xfrm>
-            <a:off x="1314450" y="3569568"/>
-            <a:ext cx="7554278" cy="756196"/>
-          </a:xfrm>
-          <a:prstGeom prst="rect">
-            <a:avLst/>
-          </a:prstGeom>
-          <a:noFill/>
-          <a:ln/>
-        </p:spPr>
-        <p:txBody>
-          <a:bodyPr wrap="square" lIns="25400" tIns="25400" rIns="25400" bIns="25400" rtlCol="0" anchor="t">
-            <a:normAutofit fontScale="92500" lnSpcReduction="20000"/>
-          </a:bodyPr>
-          <a:lstStyle/>
-          <a:p>
-            <a:pPr marL="0" indent="0" algn="l">
-              <a:lnSpc>
-                <a:spcPct val="145000"/>
-              </a:lnSpc>
-              <a:buNone/>
-            </a:pPr>
-            <a:r>
-              <a:rPr lang="en-US" sz="1950" dirty="0">
-                <a:solidFill>
-                  <a:srgbClr val="5C7268"/>
-                </a:solidFill>
-                <a:latin typeface="Arial" pitchFamily="34" charset="0"/>
-                <a:ea typeface="Arial" pitchFamily="34" charset="-122"/>
-                <a:cs typeface="Arial" pitchFamily="34" charset="-120"/>
-              </a:rPr>
-              <a:t>A default loses the whole loan; a wrong rejection loses only some interest — so tune the cutoff to minimise expected € loss, not the error count.</a:t>
-            </a:r>
-            <a:endParaRPr lang="en-US" sz="1950" dirty="0"/>
-          </a:p>
-        </p:txBody>
-      </p:sp>
-      <p:sp>
-        <p:nvSpPr>
-          <p:cNvPr id="9" name="Shape 7"/>
-          <p:cNvSpPr/>
-          <p:nvPr/>
-        </p:nvSpPr>
-        <p:spPr>
-          <a:xfrm>
-            <a:off x="9277350" y="2388468"/>
-            <a:ext cx="8058150" cy="3292004"/>
-          </a:xfrm>
-          <a:prstGeom prst="roundRect">
-            <a:avLst>
-              <a:gd name="adj" fmla="val 3472"/>
-            </a:avLst>
-          </a:prstGeom>
-          <a:solidFill>
-            <a:srgbClr val="E6F5EF"/>
-          </a:solidFill>
-          <a:ln/>
-        </p:spPr>
-        <p:txBody>
-          <a:bodyPr/>
-          <a:lstStyle/>
-          <a:p>
-            <a:endParaRPr lang="en-GB"/>
-          </a:p>
-        </p:txBody>
-      </p:sp>
-      <p:sp>
-        <p:nvSpPr>
-          <p:cNvPr id="10" name="Text 8"/>
-          <p:cNvSpPr/>
-          <p:nvPr/>
-        </p:nvSpPr>
-        <p:spPr>
-          <a:xfrm>
-            <a:off x="9639300" y="2712318"/>
-            <a:ext cx="8067675" cy="295275"/>
-          </a:xfrm>
-          <a:prstGeom prst="rect">
-            <a:avLst/>
-          </a:prstGeom>
-          <a:noFill/>
-          <a:ln/>
-        </p:spPr>
-        <p:txBody>
-          <a:bodyPr wrap="square" lIns="25400" tIns="25400" rIns="25400" bIns="25400" rtlCol="0" anchor="t">
-            <a:normAutofit fontScale="92500" lnSpcReduction="10000"/>
-          </a:bodyPr>
-          <a:lstStyle/>
-          <a:p>
-            <a:pPr marL="0" indent="0" algn="l">
-              <a:buNone/>
-            </a:pPr>
-            <a:r>
-              <a:rPr lang="en-US" sz="1800" dirty="0">
-                <a:solidFill>
-                  <a:srgbClr val="007A33"/>
-                </a:solidFill>
-                <a:latin typeface="Courier New" pitchFamily="34" charset="0"/>
-                <a:ea typeface="Courier New" pitchFamily="34" charset="-122"/>
-                <a:cs typeface="Courier New" pitchFamily="34" charset="-120"/>
-              </a:rPr>
-              <a:t>02</a:t>
-            </a:r>
-            <a:endParaRPr lang="en-US" sz="1800" dirty="0"/>
-          </a:p>
-        </p:txBody>
-      </p:sp>
-      <p:sp>
-        <p:nvSpPr>
-          <p:cNvPr id="11" name="Text 9"/>
-          <p:cNvSpPr/>
-          <p:nvPr/>
-        </p:nvSpPr>
-        <p:spPr>
-          <a:xfrm>
-            <a:off x="9639300" y="3102843"/>
-            <a:ext cx="8067675" cy="409575"/>
-          </a:xfrm>
-          <a:prstGeom prst="rect">
-            <a:avLst/>
-          </a:prstGeom>
-          <a:noFill/>
-          <a:ln/>
-        </p:spPr>
-        <p:txBody>
-          <a:bodyPr wrap="square" lIns="25400" tIns="25400" rIns="25400" bIns="25400" rtlCol="0" anchor="t">
-            <a:normAutofit lnSpcReduction="10000"/>
-          </a:bodyPr>
-          <a:lstStyle/>
-          <a:p>
-            <a:pPr marL="0" indent="0" algn="l">
-              <a:buNone/>
-            </a:pPr>
-            <a:r>
-              <a:rPr lang="en-US" sz="2400" b="1" dirty="0">
-                <a:solidFill>
-                  <a:srgbClr val="063D22"/>
-                </a:solidFill>
-                <a:latin typeface="Arial" pitchFamily="34" charset="0"/>
-                <a:ea typeface="Arial" pitchFamily="34" charset="-122"/>
-                <a:cs typeface="Arial" pitchFamily="34" charset="-120"/>
-              </a:rPr>
-              <a:t>Calibrate the probabilities</a:t>
-            </a:r>
-            <a:endParaRPr lang="en-US" sz="2400" dirty="0"/>
-          </a:p>
-        </p:txBody>
-      </p:sp>
-      <p:sp>
-        <p:nvSpPr>
-          <p:cNvPr id="12" name="Text 10"/>
-          <p:cNvSpPr/>
-          <p:nvPr/>
-        </p:nvSpPr>
-        <p:spPr>
-          <a:xfrm>
-            <a:off x="9639300" y="3569568"/>
-            <a:ext cx="7554278" cy="756196"/>
-          </a:xfrm>
-          <a:prstGeom prst="rect">
-            <a:avLst/>
-          </a:prstGeom>
-          <a:noFill/>
-          <a:ln/>
-        </p:spPr>
-        <p:txBody>
-          <a:bodyPr wrap="square" lIns="25400" tIns="25400" rIns="25400" bIns="25400" rtlCol="0" anchor="t">
-            <a:normAutofit fontScale="92500" lnSpcReduction="20000"/>
-          </a:bodyPr>
-          <a:lstStyle/>
-          <a:p>
-            <a:pPr marL="0" indent="0" algn="l">
-              <a:lnSpc>
-                <a:spcPct val="145000"/>
-              </a:lnSpc>
-              <a:buNone/>
-            </a:pPr>
-            <a:r>
-              <a:rPr lang="en-US" sz="1950" dirty="0">
-                <a:solidFill>
-                  <a:srgbClr val="5C7268"/>
-                </a:solidFill>
-                <a:latin typeface="Arial" pitchFamily="34" charset="0"/>
-                <a:ea typeface="Arial" pitchFamily="34" charset="-122"/>
-                <a:cs typeface="Arial" pitchFamily="34" charset="-120"/>
-              </a:rPr>
-              <a:t>Our cutoff gives a yes/no, but the score isn't a true probability. Calibrate it so a lender can price loans and hold capital on a real default rate.</a:t>
-            </a:r>
-            <a:endParaRPr lang="en-US" sz="1950" dirty="0"/>
-          </a:p>
-        </p:txBody>
-      </p:sp>
-      <p:sp>
-        <p:nvSpPr>
-          <p:cNvPr id="13" name="Shape 11"/>
-          <p:cNvSpPr/>
-          <p:nvPr/>
-        </p:nvSpPr>
-        <p:spPr>
-          <a:xfrm>
-            <a:off x="952500" y="5947172"/>
-            <a:ext cx="8058150" cy="3292078"/>
-          </a:xfrm>
-          <a:prstGeom prst="roundRect">
-            <a:avLst>
-              <a:gd name="adj" fmla="val 3472"/>
-            </a:avLst>
-          </a:prstGeom>
-          <a:solidFill>
-            <a:srgbClr val="E6F5EF"/>
-          </a:solidFill>
-          <a:ln/>
-        </p:spPr>
-        <p:txBody>
-          <a:bodyPr/>
-          <a:lstStyle/>
-          <a:p>
-            <a:endParaRPr lang="en-GB"/>
-          </a:p>
-        </p:txBody>
-      </p:sp>
-      <p:sp>
-        <p:nvSpPr>
-          <p:cNvPr id="14" name="Text 12"/>
-          <p:cNvSpPr/>
-          <p:nvPr/>
-        </p:nvSpPr>
-        <p:spPr>
-          <a:xfrm>
-            <a:off x="1314450" y="6271022"/>
-            <a:ext cx="8067675" cy="295275"/>
-          </a:xfrm>
-          <a:prstGeom prst="rect">
-            <a:avLst/>
-          </a:prstGeom>
-          <a:noFill/>
-          <a:ln/>
-        </p:spPr>
-        <p:txBody>
-          <a:bodyPr wrap="square" lIns="25400" tIns="25400" rIns="25400" bIns="25400" rtlCol="0" anchor="t">
-            <a:normAutofit fontScale="92500" lnSpcReduction="10000"/>
-          </a:bodyPr>
-          <a:lstStyle/>
-          <a:p>
-            <a:pPr marL="0" indent="0" algn="l">
-              <a:buNone/>
-            </a:pPr>
-            <a:r>
-              <a:rPr lang="en-US" sz="1800" dirty="0">
-                <a:solidFill>
-                  <a:srgbClr val="007A33"/>
-                </a:solidFill>
-                <a:latin typeface="Courier New" pitchFamily="34" charset="0"/>
-                <a:ea typeface="Courier New" pitchFamily="34" charset="-122"/>
-                <a:cs typeface="Courier New" pitchFamily="34" charset="-120"/>
-              </a:rPr>
-              <a:t>03</a:t>
-            </a:r>
-            <a:endParaRPr lang="en-US" sz="1800" dirty="0"/>
-          </a:p>
-        </p:txBody>
-      </p:sp>
-      <p:sp>
-        <p:nvSpPr>
-          <p:cNvPr id="15" name="Text 13"/>
-          <p:cNvSpPr/>
-          <p:nvPr/>
-        </p:nvSpPr>
-        <p:spPr>
-          <a:xfrm>
-            <a:off x="1314450" y="6661547"/>
-            <a:ext cx="8067675" cy="409575"/>
-          </a:xfrm>
-          <a:prstGeom prst="rect">
-            <a:avLst/>
-          </a:prstGeom>
-          <a:noFill/>
-          <a:ln/>
-        </p:spPr>
-        <p:txBody>
-          <a:bodyPr wrap="square" lIns="25400" tIns="25400" rIns="25400" bIns="25400" rtlCol="0" anchor="t">
-            <a:normAutofit lnSpcReduction="10000"/>
-          </a:bodyPr>
-          <a:lstStyle/>
-          <a:p>
-            <a:pPr marL="0" indent="0" algn="l">
-              <a:buNone/>
-            </a:pPr>
-            <a:r>
-              <a:rPr lang="en-US" sz="2400" b="1" dirty="0">
-                <a:solidFill>
-                  <a:srgbClr val="063D22"/>
-                </a:solidFill>
-                <a:latin typeface="Arial" pitchFamily="34" charset="0"/>
-                <a:ea typeface="Arial" pitchFamily="34" charset="-122"/>
-                <a:cs typeface="Arial" pitchFamily="34" charset="-120"/>
-              </a:rPr>
-              <a:t>Give every decision a reason</a:t>
-            </a:r>
-            <a:endParaRPr lang="en-US" sz="2400" dirty="0"/>
-          </a:p>
-        </p:txBody>
-      </p:sp>
-      <p:sp>
-        <p:nvSpPr>
-          <p:cNvPr id="16" name="Text 14"/>
-          <p:cNvSpPr/>
-          <p:nvPr/>
-        </p:nvSpPr>
-        <p:spPr>
-          <a:xfrm>
-            <a:off x="1314450" y="7128272"/>
-            <a:ext cx="7554278" cy="756196"/>
-          </a:xfrm>
-          <a:prstGeom prst="rect">
-            <a:avLst/>
-          </a:prstGeom>
-          <a:noFill/>
-          <a:ln/>
-        </p:spPr>
-        <p:txBody>
-          <a:bodyPr wrap="square" lIns="25400" tIns="25400" rIns="25400" bIns="25400" rtlCol="0" anchor="t">
-            <a:normAutofit fontScale="92500" lnSpcReduction="20000"/>
-          </a:bodyPr>
-          <a:lstStyle/>
-          <a:p>
-            <a:pPr marL="0" indent="0" algn="l">
-              <a:lnSpc>
-                <a:spcPct val="145000"/>
-              </a:lnSpc>
-              <a:buNone/>
-            </a:pPr>
-            <a:r>
-              <a:rPr lang="en-US" sz="1950" dirty="0">
-                <a:solidFill>
-                  <a:srgbClr val="5C7268"/>
-                </a:solidFill>
-                <a:latin typeface="Arial" pitchFamily="34" charset="0"/>
-                <a:ea typeface="Arial" pitchFamily="34" charset="-122"/>
-                <a:cs typeface="Arial" pitchFamily="34" charset="-120"/>
-              </a:rPr>
-              <a:t>ECOA law requires telling a rejected applicant why. Add a per-decision explanation (SHAP) so every call is transparent and contestable.</a:t>
-            </a:r>
-            <a:endParaRPr lang="en-US" sz="1950" dirty="0"/>
-          </a:p>
-        </p:txBody>
-      </p:sp>
-      <p:sp>
-        <p:nvSpPr>
-          <p:cNvPr id="17" name="Shape 15"/>
-          <p:cNvSpPr/>
-          <p:nvPr/>
-        </p:nvSpPr>
-        <p:spPr>
-          <a:xfrm>
-            <a:off x="9277350" y="5947172"/>
-            <a:ext cx="8058150" cy="3292078"/>
-          </a:xfrm>
-          <a:prstGeom prst="roundRect">
-            <a:avLst>
-              <a:gd name="adj" fmla="val 3472"/>
-            </a:avLst>
-          </a:prstGeom>
-          <a:solidFill>
-            <a:srgbClr val="E6F5EF"/>
-          </a:solidFill>
-          <a:ln/>
-        </p:spPr>
-        <p:txBody>
-          <a:bodyPr/>
-          <a:lstStyle/>
-          <a:p>
-            <a:endParaRPr lang="en-GB"/>
-          </a:p>
-        </p:txBody>
-      </p:sp>
-      <p:sp>
-        <p:nvSpPr>
-          <p:cNvPr id="18" name="Text 16"/>
-          <p:cNvSpPr/>
-          <p:nvPr/>
-        </p:nvSpPr>
-        <p:spPr>
-          <a:xfrm>
-            <a:off x="9639300" y="6271022"/>
-            <a:ext cx="8067675" cy="295275"/>
-          </a:xfrm>
-          <a:prstGeom prst="rect">
-            <a:avLst/>
-          </a:prstGeom>
-          <a:noFill/>
-          <a:ln/>
-        </p:spPr>
-        <p:txBody>
-          <a:bodyPr wrap="square" lIns="25400" tIns="25400" rIns="25400" bIns="25400" rtlCol="0" anchor="t">
-            <a:normAutofit fontScale="92500" lnSpcReduction="10000"/>
-          </a:bodyPr>
-          <a:lstStyle/>
-          <a:p>
-            <a:pPr marL="0" indent="0" algn="l">
-              <a:buNone/>
-            </a:pPr>
-            <a:r>
-              <a:rPr lang="en-US" sz="1800" dirty="0">
-                <a:solidFill>
-                  <a:srgbClr val="007A33"/>
-                </a:solidFill>
-                <a:latin typeface="Courier New" pitchFamily="34" charset="0"/>
-                <a:ea typeface="Courier New" pitchFamily="34" charset="-122"/>
-                <a:cs typeface="Courier New" pitchFamily="34" charset="-120"/>
-              </a:rPr>
-              <a:t>04</a:t>
-            </a:r>
-            <a:endParaRPr lang="en-US" sz="1800" dirty="0"/>
-          </a:p>
-        </p:txBody>
-      </p:sp>
-      <p:sp>
-        <p:nvSpPr>
-          <p:cNvPr id="19" name="Text 17"/>
-          <p:cNvSpPr/>
-          <p:nvPr/>
-        </p:nvSpPr>
-        <p:spPr>
-          <a:xfrm>
-            <a:off x="9639300" y="6661547"/>
-            <a:ext cx="8067675" cy="409575"/>
-          </a:xfrm>
-          <a:prstGeom prst="rect">
-            <a:avLst/>
-          </a:prstGeom>
-          <a:noFill/>
-          <a:ln/>
-        </p:spPr>
-        <p:txBody>
-          <a:bodyPr wrap="square" lIns="25400" tIns="25400" rIns="25400" bIns="25400" rtlCol="0" anchor="t">
-            <a:normAutofit lnSpcReduction="10000"/>
-          </a:bodyPr>
-          <a:lstStyle/>
-          <a:p>
-            <a:pPr marL="0" indent="0" algn="l">
-              <a:buNone/>
-            </a:pPr>
-            <a:r>
-              <a:rPr lang="en-US" sz="2400" b="1" dirty="0">
-                <a:solidFill>
-                  <a:srgbClr val="063D22"/>
-                </a:solidFill>
-                <a:latin typeface="Arial" pitchFamily="34" charset="0"/>
-                <a:ea typeface="Arial" pitchFamily="34" charset="-122"/>
-                <a:cs typeface="Arial" pitchFamily="34" charset="-120"/>
-              </a:rPr>
-              <a:t>Monitor drift and bias</a:t>
-            </a:r>
-            <a:endParaRPr lang="en-US" sz="2400" dirty="0"/>
-          </a:p>
-        </p:txBody>
-      </p:sp>
-      <p:sp>
-        <p:nvSpPr>
-          <p:cNvPr id="20" name="Text 18"/>
-          <p:cNvSpPr/>
-          <p:nvPr/>
-        </p:nvSpPr>
-        <p:spPr>
-          <a:xfrm>
-            <a:off x="9639300" y="7128272"/>
-            <a:ext cx="7554278" cy="756196"/>
-          </a:xfrm>
-          <a:prstGeom prst="rect">
-            <a:avLst/>
-          </a:prstGeom>
-          <a:noFill/>
-          <a:ln/>
-        </p:spPr>
-        <p:txBody>
-          <a:bodyPr wrap="square" lIns="25400" tIns="25400" rIns="25400" bIns="25400" rtlCol="0" anchor="t">
-            <a:normAutofit fontScale="92500" lnSpcReduction="20000"/>
-          </a:bodyPr>
-          <a:lstStyle/>
-          <a:p>
-            <a:pPr marL="0" indent="0" algn="l">
-              <a:lnSpc>
-                <a:spcPct val="145000"/>
-              </a:lnSpc>
-              <a:buNone/>
-            </a:pPr>
-            <a:r>
-              <a:rPr lang="en-US" sz="1950" dirty="0">
-                <a:solidFill>
-                  <a:srgbClr val="5C7268"/>
-                </a:solidFill>
-                <a:latin typeface="Arial" pitchFamily="34" charset="0"/>
-                <a:ea typeface="Arial" pitchFamily="34" charset="-122"/>
-                <a:cs typeface="Arial" pitchFamily="34" charset="-120"/>
-              </a:rPr>
-              <a:t>Approval rates drifted down over the years — track live performance and retrain on schedule, and keep auditing for proxy bias since we dropped race &amp; religion.</a:t>
-            </a:r>
-            <a:endParaRPr lang="en-US" sz="1950" dirty="0"/>
-          </a:p>
-        </p:txBody>
-      </p:sp>
-      <p:sp>
-        <p:nvSpPr>
-          <p:cNvPr id="21" name="Shape 19"/>
-          <p:cNvSpPr/>
-          <p:nvPr/>
-        </p:nvSpPr>
-        <p:spPr>
-          <a:xfrm>
-            <a:off x="952500" y="9239250"/>
-            <a:ext cx="16383000" cy="9525"/>
-          </a:xfrm>
-          <a:prstGeom prst="rect">
-            <a:avLst/>
-          </a:prstGeom>
-          <a:solidFill>
-            <a:srgbClr val="D2E6DD"/>
-          </a:solidFill>
-          <a:ln/>
-        </p:spPr>
-        <p:txBody>
-          <a:bodyPr/>
-          <a:lstStyle/>
-          <a:p>
-            <a:endParaRPr lang="en-GB"/>
-          </a:p>
-        </p:txBody>
-      </p:sp>
-      <p:sp>
-        <p:nvSpPr>
-          <p:cNvPr id="22" name="Text 20"/>
-          <p:cNvSpPr/>
-          <p:nvPr/>
-        </p:nvSpPr>
-        <p:spPr>
-          <a:xfrm>
-            <a:off x="952500" y="9458325"/>
-            <a:ext cx="16874490" cy="295275"/>
-          </a:xfrm>
-          <a:prstGeom prst="rect">
-            <a:avLst/>
-          </a:prstGeom>
-          <a:noFill/>
-          <a:ln/>
-        </p:spPr>
-        <p:txBody>
-          <a:bodyPr wrap="square" lIns="25400" tIns="25400" rIns="25400" bIns="25400" rtlCol="0" anchor="t">
-            <a:normAutofit fontScale="92500" lnSpcReduction="10000"/>
-          </a:bodyPr>
-          <a:lstStyle/>
-          <a:p>
-            <a:pPr marL="0" indent="0" algn="l">
-              <a:buNone/>
-            </a:pPr>
-            <a:r>
-              <a:rPr lang="en-US" sz="1800" dirty="0">
-                <a:solidFill>
-                  <a:srgbClr val="5C7268"/>
-                </a:solidFill>
-                <a:latin typeface="Courier New" pitchFamily="34" charset="0"/>
-                <a:ea typeface="Courier New" pitchFamily="34" charset="-122"/>
-                <a:cs typeface="Courier New" pitchFamily="34" charset="-120"/>
-              </a:rPr>
-              <a:t>Source: team roadmap</a:t>
-            </a:r>
-            <a:endParaRPr lang="en-US" sz="1800" dirty="0"/>
-          </a:p>
-        </p:txBody>
-      </p:sp>
-    </p:spTree>
-  </p:cSld>
-  <p:clrMapOvr>
-    <a:masterClrMapping/>
-  </p:clrMapOvr>
-</p:sld>
-</file>
-
-<file path=ppt/slides/slide12.xml><?xml version="1.0" encoding="utf-8"?>
 <p:sld xmlns:a="http://schemas.openxmlformats.org/drawingml/2006/main" xmlns:r="http://schemas.openxmlformats.org/officeDocument/2006/relationships" xmlns:p="http://schemas.openxmlformats.org/presentationml/2006/main">
   <p:cSld>
     <p:spTree>
@@ -5097,7 +4177,7 @@
 </p:sld>
 </file>
 
-<file path=ppt/slides/slide13.xml><?xml version="1.0" encoding="utf-8"?>
+<file path=ppt/slides/slide12.xml><?xml version="1.0" encoding="utf-8"?>
 <p:sld xmlns:a="http://schemas.openxmlformats.org/drawingml/2006/main" xmlns:r="http://schemas.openxmlformats.org/officeDocument/2006/relationships" xmlns:p="http://schemas.openxmlformats.org/presentationml/2006/main">
   <p:cSld name="Slide 12">
     <p:bg>

--- a/presentation/Consulting_Finance_ML_Slides.pptx
+++ b/presentation/Consulting_Finance_ML_Slides.pptx
@@ -1490,7 +1490,7 @@
                 <a:ea typeface="Courier New" pitchFamily="34" charset="-122"/>
                 <a:cs typeface="Courier New" pitchFamily="34" charset="-120"/>
               </a:rPr>
-              <a:t>ESADE — DATA SCIENCE FOR FINANCE · 2026</a:t>
+              <a:t>ESADE - DATA SCIENCE FOR FINANCE · 2026</a:t>
             </a:r>
             <a:endParaRPr lang="en-US" sz="1800" dirty="0"/>
           </a:p>
@@ -1575,7 +1575,7 @@
                 <a:ea typeface="Arial" pitchFamily="34" charset="-122"/>
                 <a:cs typeface="Arial" pitchFamily="34" charset="-120"/>
               </a:rPr>
-              <a:t>Teaching a model to make the same call a bank’s credit analyst would — using data that was deliberately messy.</a:t>
+              <a:t>Teaching a model to make the same call a bank’s credit analyst would - using data that was deliberately messy.</a:t>
             </a:r>
             <a:endParaRPr lang="en-US" sz="2550" dirty="0"/>
           </a:p>
@@ -1619,7 +1619,7 @@
                 <a:ea typeface="Arial" pitchFamily="34" charset="-122"/>
                 <a:cs typeface="Arial" pitchFamily="34" charset="-120"/>
               </a:rPr>
-              <a:t>Built clean — we caught the planted data trap and used no race or religion data.</a:t>
+              <a:t>Built clean - we caught the planted data trap and used no race or religion data.</a:t>
             </a:r>
             <a:endParaRPr lang="en-US" sz="2100" dirty="0"/>
           </a:p>
@@ -1916,7 +1916,7 @@
                 <a:ea typeface="Courier New" pitchFamily="34" charset="-122"/>
                 <a:cs typeface="Courier New" pitchFamily="34" charset="-120"/>
               </a:rPr>
-              <a:t>FINAL SUBMISSIONS SELECTED — v6 + v10</a:t>
+              <a:t>FINAL SUBMISSIONS SELECTED - v6 + v10</a:t>
             </a:r>
             <a:endParaRPr lang="en-US" sz="1800" dirty="0"/>
           </a:p>
@@ -3280,7 +3280,7 @@
                 <a:ea typeface="Arial" pitchFamily="34" charset="-122"/>
                 <a:cs typeface="Arial" pitchFamily="34" charset="-120"/>
               </a:rPr>
-              <a:t>0.8565 public accuracy — no leak, no protected attributes.</a:t>
+              <a:t>0.8565 public accuracy - no leak, no protected attributes.</a:t>
             </a:r>
             <a:endParaRPr lang="en-US" sz="2250" dirty="0"/>
           </a:p>
@@ -3324,7 +3324,7 @@
                 <a:ea typeface="Arial" pitchFamily="34" charset="-122"/>
                 <a:cs typeface="Arial" pitchFamily="34" charset="-120"/>
               </a:rPr>
-              <a:t>Our held-back validation tracked just above the live score the whole way — it </a:t>
+              <a:t>Our held-back validation tracked just above the live score the whole way - it </a:t>
             </a:r>
             <a:r>
               <a:rPr lang="en-US" sz="2025" b="1" dirty="0">
@@ -3821,7 +3821,7 @@
                 </a:solidFill>
                 <a:latin typeface="Arial"/>
               </a:rPr>
-              <a:t>The column that predicts in training is random noise in test — proof it was scrambled on purpose.</a:t>
+              <a:t>The column that predicts in training is random noise in test - proof it was scrambled on purpose.</a:t>
             </a:r>
           </a:p>
         </p:txBody>
@@ -5652,7 +5652,7 @@
                 <a:ea typeface="Arial" pitchFamily="34" charset="-122"/>
                 <a:cs typeface="Arial" pitchFamily="34" charset="-120"/>
               </a:rPr>
-              <a:t>It learns the bank’s existing policy — so it must also avoid copying the analysts’ bias (see slide 7).</a:t>
+              <a:t>It learns the bank’s existing policy - so it must also avoid copying the analysts’ bias (see slide 7).</a:t>
             </a:r>
             <a:endParaRPr lang="en-US" sz="1950" dirty="0"/>
           </a:p>
@@ -6671,7 +6671,7 @@
                 <a:ea typeface="Arial" pitchFamily="34" charset="-122"/>
                 <a:cs typeface="Arial" pitchFamily="34" charset="-120"/>
               </a:rPr>
-              <a:t>The data was deliberately rigged — so we hunted for traps before modeling</a:t>
+              <a:t>The data was deliberately rigged - so we hunted for traps before modeling</a:t>
             </a:r>
             <a:endParaRPr lang="en-US" sz="3600" dirty="0"/>
           </a:p>
@@ -6734,7 +6734,7 @@
                 <a:ea typeface="Courier New" pitchFamily="34" charset="-122"/>
                 <a:cs typeface="Courier New" pitchFamily="34" charset="-120"/>
               </a:rPr>
-              <a:t>— promise vs reality</a:t>
+              <a:t>- promise vs reality</a:t>
             </a:r>
             <a:endParaRPr lang="en-US" sz="1800" dirty="0"/>
           </a:p>
@@ -6822,7 +6822,7 @@
                 <a:ea typeface="Arial" pitchFamily="34" charset="-122"/>
                 <a:cs typeface="Arial" pitchFamily="34" charset="-120"/>
               </a:rPr>
-              <a:t>— it was scrambled on purpose. </a:t>
+              <a:t>- it was scrambled on purpose. </a:t>
             </a:r>
             <a:r>
               <a:rPr lang="en-US" sz="2175" b="1" dirty="0">
@@ -6985,7 +6985,7 @@
                 <a:ea typeface="Arial" pitchFamily="34" charset="-122"/>
                 <a:cs typeface="Arial" pitchFamily="34" charset="-120"/>
               </a:rPr>
-              <a:t>Hidden leak — the “perfect” column above</a:t>
+              <a:t>Hidden leak - the “perfect” column above</a:t>
             </a:r>
             <a:endParaRPr lang="en-US" sz="1950" dirty="0"/>
           </a:p>
@@ -7318,7 +7318,7 @@
                 <a:ea typeface="Arial" pitchFamily="34" charset="-122"/>
                 <a:cs typeface="Arial" pitchFamily="34" charset="-120"/>
               </a:rPr>
-              <a:t>Race &amp; religion — off-limits (slide 7)</a:t>
+              <a:t>Race &amp; religion - off-limits (slide 7)</a:t>
             </a:r>
             <a:endParaRPr lang="en-US" sz="1950" dirty="0"/>
           </a:p>
@@ -8377,7 +8377,7 @@
                 <a:ea typeface="Arial" pitchFamily="34" charset="-122"/>
                 <a:cs typeface="Arial" pitchFamily="34" charset="-120"/>
               </a:rPr>
-              <a:t>— </a:t>
+              <a:t>- </a:t>
             </a:r>
             <a:r>
               <a:rPr lang="en-US" sz="1800" dirty="0">
@@ -8443,7 +8443,7 @@
                 <a:ea typeface="Arial" pitchFamily="34" charset="-122"/>
                 <a:cs typeface="Arial" pitchFamily="34" charset="-120"/>
               </a:rPr>
-              <a:t>— so “value absent” becomes usable signal.</a:t>
+              <a:t>- so “value absent” becomes usable signal.</a:t>
             </a:r>
             <a:endParaRPr lang="en-US" sz="2025" dirty="0"/>
           </a:p>
@@ -8509,7 +8509,7 @@
                 <a:ea typeface="Arial" pitchFamily="34" charset="-122"/>
                 <a:cs typeface="Arial" pitchFamily="34" charset="-120"/>
               </a:rPr>
-              <a:t>(no test leakage) — the correct, leak-free choice; for tree models the accuracy effect is ~0.</a:t>
+              <a:t>(no test leakage) - the correct, leak-free choice; for tree models the accuracy effect is ~0.</a:t>
             </a:r>
             <a:endParaRPr lang="en-US" sz="1800" dirty="0"/>
           </a:p>
@@ -8922,7 +8922,7 @@
                 <a:ea typeface="Arial" pitchFamily="34" charset="-122"/>
                 <a:cs typeface="Arial" pitchFamily="34" charset="-120"/>
               </a:rPr>
-              <a:t>The free text is really 60 fixed comments in three tiers — no fancy text analysis needed.</a:t>
+              <a:t>The free text is really 60 fixed comments in three tiers - no fancy text analysis needed.</a:t>
             </a:r>
             <a:endParaRPr lang="en-US" sz="1875" dirty="0"/>
           </a:p>
@@ -9369,7 +9369,7 @@
                 <a:ea typeface="Arial" pitchFamily="34" charset="-122"/>
                 <a:cs typeface="Arial" pitchFamily="34" charset="-120"/>
               </a:rPr>
-              <a:t>Using race or religion would lift accuracy — we said no</a:t>
+              <a:t>Using race or religion would lift accuracy - we said no</a:t>
             </a:r>
             <a:endParaRPr lang="en-US" sz="3600" dirty="0"/>
           </a:p>
@@ -9726,7 +9726,7 @@
                 <a:ea typeface="Arial" pitchFamily="34" charset="-122"/>
                 <a:cs typeface="Arial" pitchFamily="34" charset="-120"/>
               </a:rPr>
-              <a:t>of accuracy — almost certainly enough for first place.</a:t>
+              <a:t>of accuracy - almost certainly enough for first place.</a:t>
             </a:r>
             <a:endParaRPr lang="en-US" sz="2250" dirty="0"/>
           </a:p>
@@ -9792,7 +9792,7 @@
                 <a:ea typeface="Arial" pitchFamily="34" charset="-122"/>
                 <a:cs typeface="Arial" pitchFamily="34" charset="-120"/>
               </a:rPr>
-              <a:t>, yet they change who gets approved — e.g. </a:t>
+              <a:t>, yet they change who gets approved - e.g. </a:t>
             </a:r>
             <a:r>
               <a:rPr lang="en-US" sz="2100" b="1" dirty="0">
@@ -9858,7 +9858,7 @@
                 <a:ea typeface="Arial" pitchFamily="34" charset="-122"/>
                 <a:cs typeface="Arial" pitchFamily="34" charset="-120"/>
               </a:rPr>
-              <a:t>So the gain isn’t better prediction. It’s discrimination — and it’s illegal. We left the points on the table.</a:t>
+              <a:t>So the gain isn’t better prediction. It’s discrimination - and it’s illegal. We left the points on the table.</a:t>
             </a:r>
             <a:endParaRPr lang="en-US" sz="2100" dirty="0"/>
           </a:p>
@@ -10445,7 +10445,7 @@
                 </a:solidFill>
                 <a:latin typeface="Arial"/>
               </a:rPr>
-              <a:t>What drives the model — top features by gain</a:t>
+              <a:t>What drives the model - top features by gain</a:t>
             </a:r>
           </a:p>
         </p:txBody>
@@ -10538,7 +10538,7 @@
                 </a:solidFill>
                 <a:latin typeface="Arial"/>
               </a:rPr>
-              <a:t>Different model families make different mistakes. Averaging their predictions cancels the random part of each model's error and leaves the genuine signal — so the ensemble beats any single model.</a:t>
+              <a:t>Different model families make different mistakes. Averaging their predictions cancels the random part of each model's error and leaves the genuine signal - so the ensemble beats any single model.</a:t>
             </a:r>
           </a:p>
         </p:txBody>
@@ -11129,7 +11129,7 @@
                 </a:solidFill>
                 <a:latin typeface="Arial"/>
               </a:rPr>
-              <a:t>Pseudo-labeling  —  learning from the new month</a:t>
+              <a:t>Pseudo-labeling  -  learning from the new month</a:t>
             </a:r>
           </a:p>
           <a:p>
@@ -11161,7 +11161,7 @@
                 </a:solidFill>
                 <a:latin typeface="Arial"/>
               </a:rPr>
-              <a:t>Kept safe — only very confident rows, down-weighted — and the gain is measured, not assumed:  +0.14 pt on rolling validation.</a:t>
+              <a:t>Kept safe - only very confident rows, down-weighted - and the gain is measured, not assumed:  +0.14 pt on rolling validation.</a:t>
             </a:r>
           </a:p>
         </p:txBody>
@@ -11667,7 +11667,7 @@
                           </a:solidFill>
                           <a:latin typeface="Arial"/>
                         </a:rPr>
-                        <a:t>One combined risk level — plus a flag when either source is high</a:t>
+                        <a:t>One combined risk level - plus a flag when either source is high</a:t>
                       </a:r>
                     </a:p>
                   </a:txBody>
@@ -11743,7 +11743,7 @@
                           </a:solidFill>
                           <a:latin typeface="Arial"/>
                         </a:rPr>
-                        <a:t>Approval peaks mid-scale and drops at both ends — this captures that hump</a:t>
+                        <a:t>Approval peaks mid-scale and drops at both ends - this captures that hump</a:t>
                       </a:r>
                     </a:p>
                   </a:txBody>
@@ -11819,7 +11819,7 @@
                           </a:solidFill>
                           <a:latin typeface="Arial"/>
                         </a:rPr>
-                        <a:t>Affordability — loan size vs. what they earn (a credit standard)</a:t>
+                        <a:t>Affordability - loan size vs. what they earn (a credit standard)</a:t>
                       </a:r>
                     </a:p>
                   </a:txBody>
@@ -11971,7 +11971,7 @@
                           </a:solidFill>
                           <a:latin typeface="Arial"/>
                         </a:rPr>
-                        <a:t>Each person has one score on a different scale — makes them comparable</a:t>
+                        <a:t>Each person has one score on a different scale - makes them comparable</a:t>
                       </a:r>
                     </a:p>
                   </a:txBody>

--- a/presentation/Consulting_Finance_ML_Slides.pptx
+++ b/presentation/Consulting_Finance_ML_Slides.pptx
@@ -1583,50 +1583,6 @@
       </p:sp>
       <p:sp>
         <p:nvSpPr>
-          <p:cNvPr id="6" name="Text 4"/>
-          <p:cNvSpPr/>
-          <p:nvPr/>
-        </p:nvSpPr>
-        <p:spPr>
-          <a:xfrm>
-            <a:off x="2015654" y="6594202"/>
-            <a:ext cx="6082665" cy="784771"/>
-          </a:xfrm>
-          <a:prstGeom prst="rect">
-            <a:avLst/>
-          </a:prstGeom>
-          <a:noFill/>
-          <a:ln/>
-        </p:spPr>
-        <p:txBody>
-          <a:bodyPr wrap="square" lIns="25400" tIns="25400" rIns="25400" bIns="25400" rtlCol="0" anchor="t">
-            <a:normAutofit fontScale="92500" lnSpcReduction="10000"/>
-          </a:bodyPr>
-          <a:lstStyle/>
-          <a:p>
-            <a:pPr marL="0" indent="0" algn="l">
-              <a:lnSpc>
-                <a:spcPct val="140000"/>
-              </a:lnSpc>
-              <a:buNone/>
-            </a:pPr>
-            <a:r>
-              <a:rPr lang="en-US" sz="2100" dirty="0">
-                <a:solidFill>
-                  <a:srgbClr val="B2E0D4"/>
-                </a:solidFill>
-                <a:latin typeface="Arial" pitchFamily="34" charset="0"/>
-                <a:ea typeface="Arial" pitchFamily="34" charset="-122"/>
-                <a:cs typeface="Arial" pitchFamily="34" charset="-120"/>
-              </a:rPr>
-              <a:t>Built clean - we caught the planted data trap and used no race or religion data.</a:t>
-            </a:r>
-            <a:endParaRPr lang="en-US" sz="2100" dirty="0"/>
-          </a:p>
-        </p:txBody>
-      </p:sp>
-      <p:sp>
-        <p:nvSpPr>
           <p:cNvPr id="7" name="Shape 5"/>
           <p:cNvSpPr/>
           <p:nvPr/>
@@ -3305,7 +3261,7 @@
         </p:spPr>
         <p:txBody>
           <a:bodyPr wrap="square" lIns="25400" tIns="25400" rIns="25400" bIns="25400" rtlCol="0" anchor="t">
-            <a:normAutofit fontScale="92500" lnSpcReduction="20000"/>
+            <a:normAutofit fontScale="92500"/>
           </a:bodyPr>
           <a:lstStyle/>
           <a:p>
@@ -6656,11 +6612,10 @@
           </a:bodyPr>
           <a:lstStyle/>
           <a:p>
-            <a:pPr marL="0" indent="0" algn="l">
+            <a:pPr>
               <a:lnSpc>
                 <a:spcPct val="112000"/>
               </a:lnSpc>
-              <a:buNone/>
             </a:pPr>
             <a:r>
               <a:rPr lang="en-US" sz="3600" b="1" kern="0" spc="-37" dirty="0">
@@ -6671,7 +6626,7 @@
                 <a:ea typeface="Arial" pitchFamily="34" charset="-122"/>
                 <a:cs typeface="Arial" pitchFamily="34" charset="-120"/>
               </a:rPr>
-              <a:t>The data was deliberately rigged - so we hunted for traps before modeling</a:t>
+              <a:t>The rigged data - we hunted the traps before modeling</a:t>
             </a:r>
             <a:endParaRPr lang="en-US" sz="3600" dirty="0"/>
           </a:p>

--- a/presentation/Consulting_Finance_ML_Slides.pptx
+++ b/presentation/Consulting_Finance_ML_Slides.pptx
@@ -3203,113 +3203,6 @@
       </p:sp>
       <p:sp>
         <p:nvSpPr>
-          <p:cNvPr id="57" name="Text 55"/>
-          <p:cNvSpPr/>
-          <p:nvPr/>
-        </p:nvSpPr>
-        <p:spPr>
-          <a:xfrm>
-            <a:off x="11442509" y="6227666"/>
-            <a:ext cx="5978196" cy="733425"/>
-          </a:xfrm>
-          <a:prstGeom prst="rect">
-            <a:avLst/>
-          </a:prstGeom>
-          <a:noFill/>
-          <a:ln/>
-        </p:spPr>
-        <p:txBody>
-          <a:bodyPr wrap="square" lIns="25400" tIns="25400" rIns="25400" bIns="25400" rtlCol="0" anchor="t">
-            <a:normAutofit lnSpcReduction="10000"/>
-          </a:bodyPr>
-          <a:lstStyle/>
-          <a:p>
-            <a:pPr marL="0" indent="0" algn="l">
-              <a:buNone/>
-            </a:pPr>
-            <a:r>
-              <a:rPr lang="en-US" sz="2250" b="1" dirty="0">
-                <a:solidFill>
-                  <a:srgbClr val="063D22"/>
-                </a:solidFill>
-                <a:latin typeface="Arial" pitchFamily="34" charset="0"/>
-                <a:ea typeface="Arial" pitchFamily="34" charset="-122"/>
-                <a:cs typeface="Arial" pitchFamily="34" charset="-120"/>
-              </a:rPr>
-              <a:t>0.8565 public accuracy - no leak, no protected attributes.</a:t>
-            </a:r>
-            <a:endParaRPr lang="en-US" sz="2250" dirty="0"/>
-          </a:p>
-        </p:txBody>
-      </p:sp>
-      <p:sp>
-        <p:nvSpPr>
-          <p:cNvPr id="58" name="Text 56"/>
-          <p:cNvSpPr/>
-          <p:nvPr/>
-        </p:nvSpPr>
-        <p:spPr>
-          <a:xfrm>
-            <a:off x="11442509" y="7189691"/>
-            <a:ext cx="5978196" cy="1204913"/>
-          </a:xfrm>
-          <a:prstGeom prst="rect">
-            <a:avLst/>
-          </a:prstGeom>
-          <a:noFill/>
-          <a:ln/>
-        </p:spPr>
-        <p:txBody>
-          <a:bodyPr wrap="square" lIns="25400" tIns="25400" rIns="25400" bIns="25400" rtlCol="0" anchor="t">
-            <a:normAutofit fontScale="92500"/>
-          </a:bodyPr>
-          <a:lstStyle/>
-          <a:p>
-            <a:pPr marL="0" indent="0" algn="l">
-              <a:lnSpc>
-                <a:spcPct val="150000"/>
-              </a:lnSpc>
-              <a:buNone/>
-            </a:pPr>
-            <a:r>
-              <a:rPr lang="en-US" sz="2025" dirty="0">
-                <a:solidFill>
-                  <a:srgbClr val="244236"/>
-                </a:solidFill>
-                <a:latin typeface="Arial" pitchFamily="34" charset="0"/>
-                <a:ea typeface="Arial" pitchFamily="34" charset="-122"/>
-                <a:cs typeface="Arial" pitchFamily="34" charset="-120"/>
-              </a:rPr>
-              <a:t>Our held-back validation tracked just above the live score the whole way - it </a:t>
-            </a:r>
-            <a:r>
-              <a:rPr lang="en-US" sz="2025" b="1" dirty="0">
-                <a:solidFill>
-                  <a:srgbClr val="063D22"/>
-                </a:solidFill>
-                <a:latin typeface="Arial" pitchFamily="34" charset="0"/>
-                <a:ea typeface="Arial" pitchFamily="34" charset="-122"/>
-                <a:cs typeface="Arial" pitchFamily="34" charset="-120"/>
-              </a:rPr>
-              <a:t>called the result in advance </a:t>
-            </a:r>
-            <a:r>
-              <a:rPr lang="en-US" sz="2025" dirty="0">
-                <a:solidFill>
-                  <a:srgbClr val="244236"/>
-                </a:solidFill>
-                <a:latin typeface="Arial" pitchFamily="34" charset="0"/>
-                <a:ea typeface="Arial" pitchFamily="34" charset="-122"/>
-                <a:cs typeface="Arial" pitchFamily="34" charset="-120"/>
-              </a:rPr>
-              <a:t>.</a:t>
-            </a:r>
-            <a:endParaRPr lang="en-US" sz="2025" dirty="0"/>
-          </a:p>
-        </p:txBody>
-      </p:sp>
-      <p:sp>
-        <p:nvSpPr>
           <p:cNvPr id="60" name="Shape 58"/>
           <p:cNvSpPr/>
           <p:nvPr/>
@@ -3400,6 +3293,64 @@
           </a:prstGeom>
         </p:spPr>
       </p:pic>
+      <p:pic>
+        <p:nvPicPr>
+          <p:cNvPr id="63" name="Picture 62" descr="deck_confusion.png"/>
+          <p:cNvPicPr>
+            <a:picLocks noChangeAspect="1"/>
+          </p:cNvPicPr>
+          <p:nvPr/>
+        </p:nvPicPr>
+        <p:blipFill>
+          <a:blip r:embed="rId4"/>
+          <a:stretch>
+            <a:fillRect/>
+          </a:stretch>
+        </p:blipFill>
+        <p:spPr>
+          <a:xfrm>
+            <a:off x="11475720" y="6035040"/>
+            <a:ext cx="3611880" cy="3065578"/>
+          </a:xfrm>
+          <a:prstGeom prst="rect">
+            <a:avLst/>
+          </a:prstGeom>
+        </p:spPr>
+      </p:pic>
+      <p:sp>
+        <p:nvSpPr>
+          <p:cNvPr id="64" name="TextBox 63"/>
+          <p:cNvSpPr txBox="1"/>
+          <p:nvPr/>
+        </p:nvSpPr>
+        <p:spPr>
+          <a:xfrm>
+            <a:off x="11475720" y="9098280"/>
+            <a:ext cx="5852160" cy="365760"/>
+          </a:xfrm>
+          <a:prstGeom prst="rect">
+            <a:avLst/>
+          </a:prstGeom>
+          <a:noFill/>
+        </p:spPr>
+        <p:txBody>
+          <a:bodyPr wrap="none">
+            <a:spAutoFit/>
+          </a:bodyPr>
+          <a:lstStyle/>
+          <a:p>
+            <a:r>
+              <a:rPr sz="1300">
+                <a:solidFill>
+                  <a:srgbClr val="5C7268"/>
+                </a:solidFill>
+                <a:latin typeface="Arial"/>
+              </a:rPr>
+              <a:t>Errors are balanced - the model favours neither approve nor reject.</a:t>
+            </a:r>
+          </a:p>
+        </p:txBody>
+      </p:sp>
     </p:spTree>
   </p:cSld>
   <p:clrMapOvr>

--- a/presentation/Consulting_Finance_ML_Slides.pptx
+++ b/presentation/Consulting_Finance_ML_Slides.pptx
@@ -7869,20 +7869,85 @@
               <a:lnSpc>
                 <a:spcPct val="155000"/>
               </a:lnSpc>
-              <a:buNone/>
-            </a:pPr>
-            <a:r>
-              <a:rPr lang="en-US" sz="1875" dirty="0">
+              <a:spcAft>
+                <a:spcPts val="600"/>
+              </a:spcAft>
+              <a:buNone/>
+            </a:pPr>
+            <a:r>
+              <a:rPr sz="1600">
                 <a:solidFill>
                   <a:srgbClr val="244236"/>
                 </a:solidFill>
-                <a:latin typeface="Arial" pitchFamily="34" charset="0"/>
-                <a:ea typeface="Arial" pitchFamily="34" charset="-122"/>
-                <a:cs typeface="Arial" pitchFamily="34" charset="-120"/>
-              </a:rPr>
-              <a:t>Fix mixed units · parse two date formats Unify yes/no codes · z-score credit scores (train-only stats) Add missingness flags</a:t>
+                <a:latin typeface="Arial"/>
+              </a:rPr>
+              <a:t>•  Fix mixed-unit incomes</a:t>
             </a:r>
             <a:endParaRPr lang="en-US" sz="1875" dirty="0"/>
+          </a:p>
+          <a:p>
+            <a:pPr algn="l">
+              <a:spcAft>
+                <a:spcPts val="600"/>
+              </a:spcAft>
+            </a:pPr>
+            <a:r>
+              <a:rPr sz="1600">
+                <a:solidFill>
+                  <a:srgbClr val="244236"/>
+                </a:solidFill>
+                <a:latin typeface="Arial"/>
+              </a:rPr>
+              <a:t>•  Parse two date formats</a:t>
+            </a:r>
+          </a:p>
+          <a:p>
+            <a:pPr algn="l">
+              <a:spcAft>
+                <a:spcPts val="600"/>
+              </a:spcAft>
+            </a:pPr>
+            <a:r>
+              <a:rPr sz="1600">
+                <a:solidFill>
+                  <a:srgbClr val="244236"/>
+                </a:solidFill>
+                <a:latin typeface="Arial"/>
+              </a:rPr>
+              <a:t>•  Unify yes/no codes</a:t>
+            </a:r>
+          </a:p>
+          <a:p>
+            <a:pPr algn="l">
+              <a:spcAft>
+                <a:spcPts val="600"/>
+              </a:spcAft>
+            </a:pPr>
+            <a:r>
+              <a:rPr sz="1600">
+                <a:solidFill>
+                  <a:srgbClr val="244236"/>
+                </a:solidFill>
+                <a:latin typeface="Arial"/>
+              </a:rPr>
+              <a:t>•  Z-score credit scores</a:t>
+            </a:r>
+          </a:p>
+          <a:p>
+            <a:pPr algn="l">
+              <a:spcAft>
+                <a:spcPts val="600"/>
+              </a:spcAft>
+            </a:pPr>
+            <a:r>
+              <a:rPr sz="1600">
+                <a:solidFill>
+                  <a:srgbClr val="244236"/>
+                </a:solidFill>
+                <a:latin typeface="Arial"/>
+              </a:rPr>
+              <a:t>•  Add missingness flags</a:t>
+            </a:r>
           </a:p>
         </p:txBody>
       </p:sp>

--- a/presentation/Consulting_Finance_ML_Slides.pptx
+++ b/presentation/Consulting_Finance_ML_Slides.pptx
@@ -1575,7 +1575,7 @@
                 <a:ea typeface="Arial" pitchFamily="34" charset="-122"/>
                 <a:cs typeface="Arial" pitchFamily="34" charset="-120"/>
               </a:rPr>
-              <a:t>Teaching a model to make the same call a bank’s credit analyst would - using data that was deliberately messy.</a:t>
+              <a:t>Teaching a model to make the same call a bank’s credit analyst would.</a:t>
             </a:r>
             <a:endParaRPr lang="en-US" sz="2550" dirty="0"/>
           </a:p>
@@ -1845,7 +1845,7 @@
         </p:nvSpPr>
         <p:spPr>
           <a:xfrm>
-            <a:off x="822343" y="5067858"/>
+            <a:off x="801621" y="5396729"/>
             <a:ext cx="11050079" cy="295275"/>
           </a:xfrm>
           <a:prstGeom prst="rect">
@@ -1886,7 +1886,7 @@
         </p:nvSpPr>
         <p:spPr>
           <a:xfrm>
-            <a:off x="822343" y="6383290"/>
+            <a:off x="801621" y="6541044"/>
             <a:ext cx="704627" cy="19050"/>
           </a:xfrm>
           <a:prstGeom prst="rect">
@@ -1913,7 +1913,7 @@
         </p:nvSpPr>
         <p:spPr>
           <a:xfrm>
-            <a:off x="936643" y="6011815"/>
+            <a:off x="915921" y="6169569"/>
             <a:ext cx="552227" cy="314325"/>
           </a:xfrm>
           <a:prstGeom prst="rect">
@@ -1954,7 +1954,7 @@
         </p:nvSpPr>
         <p:spPr>
           <a:xfrm>
-            <a:off x="1526970" y="6383290"/>
+            <a:off x="1506248" y="6541044"/>
             <a:ext cx="5770736" cy="19050"/>
           </a:xfrm>
           <a:prstGeom prst="rect">
@@ -1981,7 +1981,7 @@
         </p:nvSpPr>
         <p:spPr>
           <a:xfrm>
-            <a:off x="1641270" y="6011815"/>
+            <a:off x="1620548" y="6169569"/>
             <a:ext cx="5715258" cy="314325"/>
           </a:xfrm>
           <a:prstGeom prst="rect">
@@ -2022,7 +2022,7 @@
         </p:nvSpPr>
         <p:spPr>
           <a:xfrm>
-            <a:off x="7297706" y="6383290"/>
+            <a:off x="7276984" y="6541044"/>
             <a:ext cx="1164357" cy="19050"/>
           </a:xfrm>
           <a:prstGeom prst="rect">
@@ -2049,7 +2049,7 @@
         </p:nvSpPr>
         <p:spPr>
           <a:xfrm>
-            <a:off x="7335806" y="6011815"/>
+            <a:off x="7315084" y="6169569"/>
             <a:ext cx="1011957" cy="314325"/>
           </a:xfrm>
           <a:prstGeom prst="rect">
@@ -2090,7 +2090,7 @@
         </p:nvSpPr>
         <p:spPr>
           <a:xfrm>
-            <a:off x="8462063" y="6383290"/>
+            <a:off x="8441341" y="6541044"/>
             <a:ext cx="1394520" cy="19050"/>
           </a:xfrm>
           <a:prstGeom prst="rect">
@@ -2117,7 +2117,7 @@
         </p:nvSpPr>
         <p:spPr>
           <a:xfrm>
-            <a:off x="8500163" y="6011815"/>
+            <a:off x="8479441" y="6169569"/>
             <a:ext cx="1242120" cy="314325"/>
           </a:xfrm>
           <a:prstGeom prst="rect">
@@ -2158,7 +2158,7 @@
         </p:nvSpPr>
         <p:spPr>
           <a:xfrm>
-            <a:off x="9856582" y="6383290"/>
+            <a:off x="9835860" y="6541044"/>
             <a:ext cx="1011287" cy="19050"/>
           </a:xfrm>
           <a:prstGeom prst="rect">
@@ -2185,7 +2185,7 @@
         </p:nvSpPr>
         <p:spPr>
           <a:xfrm>
-            <a:off x="9894682" y="6011815"/>
+            <a:off x="9873960" y="6169569"/>
             <a:ext cx="858887" cy="314325"/>
           </a:xfrm>
           <a:prstGeom prst="rect">
@@ -2226,7 +2226,7 @@
         </p:nvSpPr>
         <p:spPr>
           <a:xfrm>
-            <a:off x="822343" y="6892877"/>
+            <a:off x="801621" y="7050631"/>
             <a:ext cx="704627" cy="9525"/>
           </a:xfrm>
           <a:prstGeom prst="rect">
@@ -2253,7 +2253,7 @@
         </p:nvSpPr>
         <p:spPr>
           <a:xfrm>
-            <a:off x="936643" y="6507115"/>
+            <a:off x="915921" y="6664869"/>
             <a:ext cx="552227" cy="319088"/>
           </a:xfrm>
           <a:prstGeom prst="rect">
@@ -2294,7 +2294,7 @@
         </p:nvSpPr>
         <p:spPr>
           <a:xfrm>
-            <a:off x="1526970" y="6892877"/>
+            <a:off x="1506248" y="7050631"/>
             <a:ext cx="5770736" cy="9525"/>
           </a:xfrm>
           <a:prstGeom prst="rect">
@@ -2321,7 +2321,7 @@
         </p:nvSpPr>
         <p:spPr>
           <a:xfrm>
-            <a:off x="1641270" y="6507115"/>
+            <a:off x="1620548" y="6664869"/>
             <a:ext cx="5715258" cy="319088"/>
           </a:xfrm>
           <a:prstGeom prst="rect">
@@ -2362,7 +2362,7 @@
         </p:nvSpPr>
         <p:spPr>
           <a:xfrm>
-            <a:off x="7297706" y="6892877"/>
+            <a:off x="7276984" y="7050631"/>
             <a:ext cx="1164357" cy="9525"/>
           </a:xfrm>
           <a:prstGeom prst="rect">
@@ -2389,7 +2389,7 @@
         </p:nvSpPr>
         <p:spPr>
           <a:xfrm>
-            <a:off x="7335806" y="6507115"/>
+            <a:off x="7315084" y="6664869"/>
             <a:ext cx="1011957" cy="319088"/>
           </a:xfrm>
           <a:prstGeom prst="rect">
@@ -2430,7 +2430,7 @@
         </p:nvSpPr>
         <p:spPr>
           <a:xfrm>
-            <a:off x="8462063" y="6892877"/>
+            <a:off x="8441341" y="7050631"/>
             <a:ext cx="1394520" cy="9525"/>
           </a:xfrm>
           <a:prstGeom prst="rect">
@@ -2457,7 +2457,7 @@
         </p:nvSpPr>
         <p:spPr>
           <a:xfrm>
-            <a:off x="8500163" y="6507115"/>
+            <a:off x="8479441" y="6664869"/>
             <a:ext cx="1242120" cy="319088"/>
           </a:xfrm>
           <a:prstGeom prst="rect">
@@ -2498,7 +2498,7 @@
         </p:nvSpPr>
         <p:spPr>
           <a:xfrm>
-            <a:off x="9856582" y="6892877"/>
+            <a:off x="9835860" y="7050631"/>
             <a:ext cx="1011287" cy="9525"/>
           </a:xfrm>
           <a:prstGeom prst="rect">
@@ -2525,7 +2525,7 @@
         </p:nvSpPr>
         <p:spPr>
           <a:xfrm>
-            <a:off x="9894682" y="6507115"/>
+            <a:off x="9873960" y="6664869"/>
             <a:ext cx="858887" cy="319088"/>
           </a:xfrm>
           <a:prstGeom prst="rect">
@@ -2566,7 +2566,7 @@
         </p:nvSpPr>
         <p:spPr>
           <a:xfrm>
-            <a:off x="822343" y="6902402"/>
+            <a:off x="801621" y="7060156"/>
             <a:ext cx="10045526" cy="528638"/>
           </a:xfrm>
           <a:prstGeom prst="rect">
@@ -2593,7 +2593,7 @@
         </p:nvSpPr>
         <p:spPr>
           <a:xfrm>
-            <a:off x="822343" y="7421515"/>
+            <a:off x="801621" y="7579269"/>
             <a:ext cx="704627" cy="9525"/>
           </a:xfrm>
           <a:prstGeom prst="rect">
@@ -2620,7 +2620,7 @@
         </p:nvSpPr>
         <p:spPr>
           <a:xfrm>
-            <a:off x="936643" y="7007177"/>
+            <a:off x="915921" y="7164931"/>
             <a:ext cx="552227" cy="347663"/>
           </a:xfrm>
           <a:prstGeom prst="rect">
@@ -2661,7 +2661,7 @@
         </p:nvSpPr>
         <p:spPr>
           <a:xfrm>
-            <a:off x="1526970" y="7421515"/>
+            <a:off x="1506248" y="7579269"/>
             <a:ext cx="5770736" cy="9525"/>
           </a:xfrm>
           <a:prstGeom prst="rect">
@@ -2688,7 +2688,7 @@
         </p:nvSpPr>
         <p:spPr>
           <a:xfrm>
-            <a:off x="1641270" y="7007177"/>
+            <a:off x="1620548" y="7164931"/>
             <a:ext cx="5715258" cy="347663"/>
           </a:xfrm>
           <a:prstGeom prst="rect">
@@ -2729,7 +2729,7 @@
         </p:nvSpPr>
         <p:spPr>
           <a:xfrm>
-            <a:off x="7297706" y="7421515"/>
+            <a:off x="7276984" y="7579269"/>
             <a:ext cx="1164357" cy="9525"/>
           </a:xfrm>
           <a:prstGeom prst="rect">
@@ -2756,7 +2756,7 @@
         </p:nvSpPr>
         <p:spPr>
           <a:xfrm>
-            <a:off x="7335806" y="7007177"/>
+            <a:off x="7315084" y="7164931"/>
             <a:ext cx="1011957" cy="347663"/>
           </a:xfrm>
           <a:prstGeom prst="rect">
@@ -2797,7 +2797,7 @@
         </p:nvSpPr>
         <p:spPr>
           <a:xfrm>
-            <a:off x="8462063" y="7421515"/>
+            <a:off x="8441341" y="7579269"/>
             <a:ext cx="1394520" cy="9525"/>
           </a:xfrm>
           <a:prstGeom prst="rect">
@@ -2824,7 +2824,7 @@
         </p:nvSpPr>
         <p:spPr>
           <a:xfrm>
-            <a:off x="8500163" y="7007177"/>
+            <a:off x="8479441" y="7164931"/>
             <a:ext cx="1242120" cy="347663"/>
           </a:xfrm>
           <a:prstGeom prst="rect">
@@ -2865,7 +2865,7 @@
         </p:nvSpPr>
         <p:spPr>
           <a:xfrm>
-            <a:off x="9856582" y="7421515"/>
+            <a:off x="9835860" y="7579269"/>
             <a:ext cx="1011287" cy="9525"/>
           </a:xfrm>
           <a:prstGeom prst="rect">
@@ -2892,7 +2892,7 @@
         </p:nvSpPr>
         <p:spPr>
           <a:xfrm>
-            <a:off x="9894682" y="7007177"/>
+            <a:off x="9873960" y="7164931"/>
             <a:ext cx="858887" cy="347663"/>
           </a:xfrm>
           <a:prstGeom prst="rect">
@@ -2933,7 +2933,7 @@
         </p:nvSpPr>
         <p:spPr>
           <a:xfrm>
-            <a:off x="822343" y="7431040"/>
+            <a:off x="801621" y="7588794"/>
             <a:ext cx="10045526" cy="523875"/>
           </a:xfrm>
           <a:prstGeom prst="rect">
@@ -2960,7 +2960,7 @@
         </p:nvSpPr>
         <p:spPr>
           <a:xfrm>
-            <a:off x="936643" y="7535815"/>
+            <a:off x="915921" y="7693569"/>
             <a:ext cx="552227" cy="352425"/>
           </a:xfrm>
           <a:prstGeom prst="rect">
@@ -3001,7 +3001,7 @@
         </p:nvSpPr>
         <p:spPr>
           <a:xfrm>
-            <a:off x="1641270" y="7535815"/>
+            <a:off x="1620548" y="7693569"/>
             <a:ext cx="5715258" cy="352425"/>
           </a:xfrm>
           <a:prstGeom prst="rect">
@@ -3042,7 +3042,7 @@
         </p:nvSpPr>
         <p:spPr>
           <a:xfrm>
-            <a:off x="7335806" y="7535815"/>
+            <a:off x="7315084" y="7693569"/>
             <a:ext cx="1011957" cy="352425"/>
           </a:xfrm>
           <a:prstGeom prst="rect">
@@ -3083,7 +3083,7 @@
         </p:nvSpPr>
         <p:spPr>
           <a:xfrm>
-            <a:off x="8500163" y="7535815"/>
+            <a:off x="8479441" y="7693569"/>
             <a:ext cx="1242120" cy="352425"/>
           </a:xfrm>
           <a:prstGeom prst="rect">
@@ -3124,7 +3124,7 @@
         </p:nvSpPr>
         <p:spPr>
           <a:xfrm>
-            <a:off x="9894682" y="7535815"/>
+            <a:off x="9873960" y="7693569"/>
             <a:ext cx="858887" cy="352425"/>
           </a:xfrm>
           <a:prstGeom prst="rect">
@@ -3165,7 +3165,7 @@
         </p:nvSpPr>
         <p:spPr>
           <a:xfrm>
-            <a:off x="11442509" y="5016365"/>
+            <a:off x="7335806" y="4785541"/>
             <a:ext cx="6384481" cy="870570"/>
           </a:xfrm>
           <a:prstGeom prst="rect">
@@ -3285,7 +3285,7 @@
         </p:blipFill>
         <p:spPr>
           <a:xfrm>
-            <a:off x="822343" y="2694776"/>
+            <a:off x="1488870" y="2558971"/>
             <a:ext cx="15361920" cy="1632204"/>
           </a:xfrm>
           <a:prstGeom prst="rect">
@@ -3309,8 +3309,8 @@
         </p:blipFill>
         <p:spPr>
           <a:xfrm>
-            <a:off x="11475720" y="6035040"/>
-            <a:ext cx="3611880" cy="3065578"/>
+            <a:off x="11986722" y="4621364"/>
+            <a:ext cx="5012711" cy="4254531"/>
           </a:xfrm>
           <a:prstGeom prst="rect">
             <a:avLst/>
@@ -3325,7 +3325,7 @@
         </p:nvSpPr>
         <p:spPr>
           <a:xfrm>
-            <a:off x="11475720" y="9098280"/>
+            <a:off x="11986722" y="8782503"/>
             <a:ext cx="5852160" cy="365760"/>
           </a:xfrm>
           <a:prstGeom prst="rect">
@@ -3340,13 +3340,31 @@
           <a:lstStyle/>
           <a:p>
             <a:r>
-              <a:rPr sz="1300">
+              <a:rPr sz="1300" dirty="0">
                 <a:solidFill>
                   <a:srgbClr val="5C7268"/>
                 </a:solidFill>
                 <a:latin typeface="Arial"/>
               </a:rPr>
-              <a:t>Errors are balanced - the model favours neither approve nor reject.</a:t>
+              <a:t>Errors are balanced - the model </a:t>
+            </a:r>
+            <a:r>
+              <a:rPr sz="1300" dirty="0" err="1">
+                <a:solidFill>
+                  <a:srgbClr val="5C7268"/>
+                </a:solidFill>
+                <a:latin typeface="Arial"/>
+              </a:rPr>
+              <a:t>favours</a:t>
+            </a:r>
+            <a:r>
+              <a:rPr sz="1300" dirty="0">
+                <a:solidFill>
+                  <a:srgbClr val="5C7268"/>
+                </a:solidFill>
+                <a:latin typeface="Arial"/>
+              </a:rPr>
+              <a:t> neither approve nor reject.</a:t>
             </a:r>
           </a:p>
         </p:txBody>
@@ -11467,7 +11485,13 @@
           <p:cNvGraphicFramePr>
             <a:graphicFrameLocks noGrp="1"/>
           </p:cNvGraphicFramePr>
-          <p:nvPr/>
+          <p:nvPr>
+            <p:extLst>
+              <p:ext uri="{D42A27DB-BD31-4B8C-83A1-F6EECF244321}">
+                <p14:modId xmlns:p14="http://schemas.microsoft.com/office/powerpoint/2010/main" val="838448322"/>
+              </p:ext>
+            </p:extLst>
+          </p:nvPr>
         </p:nvGraphicFramePr>
         <p:xfrm>
           <a:off x="950976" y="2468880"/>
@@ -11913,7 +11937,7 @@
                     <a:p>
                       <a:pPr algn="l"/>
                       <a:r>
-                        <a:rPr sz="1400">
+                        <a:rPr sz="1400" dirty="0">
                           <a:solidFill>
                             <a:srgbClr val="143A2B"/>
                           </a:solidFill>
@@ -11921,6 +11945,21 @@
                         </a:rPr>
                         <a:t>The 3 bureau scores put on one scale and merged</a:t>
                       </a:r>
+                      <a:r>
+                        <a:rPr lang="de-DE" sz="1400" dirty="0">
+                          <a:solidFill>
+                            <a:srgbClr val="143A2B"/>
+                          </a:solidFill>
+                          <a:latin typeface="Arial"/>
+                        </a:rPr>
+                        <a:t> (FICO, Vantage and SCHUFA)</a:t>
+                      </a:r>
+                      <a:endParaRPr sz="1400" dirty="0">
+                        <a:solidFill>
+                          <a:srgbClr val="143A2B"/>
+                        </a:solidFill>
+                        <a:latin typeface="Arial"/>
+                      </a:endParaRPr>
                     </a:p>
                   </a:txBody>
                   <a:tcPr marL="164592" marT="54864" marB="54864" anchor="ctr">
@@ -12088,7 +12127,7 @@
                     <a:p>
                       <a:pPr algn="l"/>
                       <a:r>
-                        <a:rPr sz="1400">
+                        <a:rPr sz="1400" dirty="0">
                           <a:solidFill>
                             <a:srgbClr val="5C7268"/>
                           </a:solidFill>
